--- a/スクリーンショット_使い方_エネミー.pptx
+++ b/スクリーンショット_使い方_エネミー.pptx
@@ -5,9 +5,14 @@
     <p:sldMasterId id="2147483648" r:id="rId1"/>
   </p:sldMasterIdLst>
   <p:sldIdLst>
-    <p:sldId id="256" r:id="rId2"/>
-    <p:sldId id="257" r:id="rId3"/>
+    <p:sldId id="257" r:id="rId2"/>
+    <p:sldId id="261" r:id="rId3"/>
     <p:sldId id="258" r:id="rId4"/>
+    <p:sldId id="262" r:id="rId5"/>
+    <p:sldId id="265" r:id="rId6"/>
+    <p:sldId id="263" r:id="rId7"/>
+    <p:sldId id="264" r:id="rId8"/>
+    <p:sldId id="266" r:id="rId9"/>
   </p:sldIdLst>
   <p:sldSz cx="12192000" cy="6858000"/>
   <p:notesSz cx="6858000" cy="9144000"/>
@@ -261,7 +266,7 @@
           <a:p>
             <a:fld id="{CB957B6A-6E51-4212-A048-7E8AFB564F0B}" type="datetimeFigureOut">
               <a:rPr kumimoji="1" lang="ja-JP" altLang="en-US" smtClean="0"/>
-              <a:t>2026/5/13</a:t>
+              <a:t>2026/5/20</a:t>
             </a:fld>
             <a:endParaRPr kumimoji="1" lang="ja-JP" altLang="en-US"/>
           </a:p>
@@ -491,7 +496,7 @@
           <a:p>
             <a:fld id="{CB957B6A-6E51-4212-A048-7E8AFB564F0B}" type="datetimeFigureOut">
               <a:rPr kumimoji="1" lang="ja-JP" altLang="en-US" smtClean="0"/>
-              <a:t>2026/5/13</a:t>
+              <a:t>2026/5/20</a:t>
             </a:fld>
             <a:endParaRPr kumimoji="1" lang="ja-JP" altLang="en-US"/>
           </a:p>
@@ -731,7 +736,7 @@
           <a:p>
             <a:fld id="{CB957B6A-6E51-4212-A048-7E8AFB564F0B}" type="datetimeFigureOut">
               <a:rPr kumimoji="1" lang="ja-JP" altLang="en-US" smtClean="0"/>
-              <a:t>2026/5/13</a:t>
+              <a:t>2026/5/20</a:t>
             </a:fld>
             <a:endParaRPr kumimoji="1" lang="ja-JP" altLang="en-US"/>
           </a:p>
@@ -961,7 +966,7 @@
           <a:p>
             <a:fld id="{CB957B6A-6E51-4212-A048-7E8AFB564F0B}" type="datetimeFigureOut">
               <a:rPr kumimoji="1" lang="ja-JP" altLang="en-US" smtClean="0"/>
-              <a:t>2026/5/13</a:t>
+              <a:t>2026/5/20</a:t>
             </a:fld>
             <a:endParaRPr kumimoji="1" lang="ja-JP" altLang="en-US"/>
           </a:p>
@@ -1236,7 +1241,7 @@
           <a:p>
             <a:fld id="{CB957B6A-6E51-4212-A048-7E8AFB564F0B}" type="datetimeFigureOut">
               <a:rPr kumimoji="1" lang="ja-JP" altLang="en-US" smtClean="0"/>
-              <a:t>2026/5/13</a:t>
+              <a:t>2026/5/20</a:t>
             </a:fld>
             <a:endParaRPr kumimoji="1" lang="ja-JP" altLang="en-US"/>
           </a:p>
@@ -1565,7 +1570,7 @@
           <a:p>
             <a:fld id="{CB957B6A-6E51-4212-A048-7E8AFB564F0B}" type="datetimeFigureOut">
               <a:rPr kumimoji="1" lang="ja-JP" altLang="en-US" smtClean="0"/>
-              <a:t>2026/5/13</a:t>
+              <a:t>2026/5/20</a:t>
             </a:fld>
             <a:endParaRPr kumimoji="1" lang="ja-JP" altLang="en-US"/>
           </a:p>
@@ -2041,7 +2046,7 @@
           <a:p>
             <a:fld id="{CB957B6A-6E51-4212-A048-7E8AFB564F0B}" type="datetimeFigureOut">
               <a:rPr kumimoji="1" lang="ja-JP" altLang="en-US" smtClean="0"/>
-              <a:t>2026/5/13</a:t>
+              <a:t>2026/5/20</a:t>
             </a:fld>
             <a:endParaRPr kumimoji="1" lang="ja-JP" altLang="en-US"/>
           </a:p>
@@ -2182,7 +2187,7 @@
           <a:p>
             <a:fld id="{CB957B6A-6E51-4212-A048-7E8AFB564F0B}" type="datetimeFigureOut">
               <a:rPr kumimoji="1" lang="ja-JP" altLang="en-US" smtClean="0"/>
-              <a:t>2026/5/13</a:t>
+              <a:t>2026/5/20</a:t>
             </a:fld>
             <a:endParaRPr kumimoji="1" lang="ja-JP" altLang="en-US"/>
           </a:p>
@@ -2295,7 +2300,7 @@
           <a:p>
             <a:fld id="{CB957B6A-6E51-4212-A048-7E8AFB564F0B}" type="datetimeFigureOut">
               <a:rPr kumimoji="1" lang="ja-JP" altLang="en-US" smtClean="0"/>
-              <a:t>2026/5/13</a:t>
+              <a:t>2026/5/20</a:t>
             </a:fld>
             <a:endParaRPr kumimoji="1" lang="ja-JP" altLang="en-US"/>
           </a:p>
@@ -2638,7 +2643,7 @@
           <a:p>
             <a:fld id="{CB957B6A-6E51-4212-A048-7E8AFB564F0B}" type="datetimeFigureOut">
               <a:rPr kumimoji="1" lang="ja-JP" altLang="en-US" smtClean="0"/>
-              <a:t>2026/5/13</a:t>
+              <a:t>2026/5/20</a:t>
             </a:fld>
             <a:endParaRPr kumimoji="1" lang="ja-JP" altLang="en-US"/>
           </a:p>
@@ -2926,7 +2931,7 @@
           <a:p>
             <a:fld id="{CB957B6A-6E51-4212-A048-7E8AFB564F0B}" type="datetimeFigureOut">
               <a:rPr kumimoji="1" lang="ja-JP" altLang="en-US" smtClean="0"/>
-              <a:t>2026/5/13</a:t>
+              <a:t>2026/5/20</a:t>
             </a:fld>
             <a:endParaRPr kumimoji="1" lang="ja-JP" altLang="en-US"/>
           </a:p>
@@ -3199,7 +3204,7 @@
           <a:p>
             <a:fld id="{CB957B6A-6E51-4212-A048-7E8AFB564F0B}" type="datetimeFigureOut">
               <a:rPr kumimoji="1" lang="ja-JP" altLang="en-US" smtClean="0"/>
-              <a:t>2026/5/13</a:t>
+              <a:t>2026/5/20</a:t>
             </a:fld>
             <a:endParaRPr kumimoji="1" lang="ja-JP" altLang="en-US"/>
           </a:p>
@@ -3600,87 +3605,7 @@
 </file>
 
 <file path=ppt/slides/slide1.xml><?xml version="1.0" encoding="utf-8"?>
-<p:sld xmlns:a="http://schemas.openxmlformats.org/drawingml/2006/main" xmlns:r="http://schemas.openxmlformats.org/officeDocument/2006/relationships" xmlns:p="http://schemas.openxmlformats.org/presentationml/2006/main">
-  <p:cSld>
-    <p:spTree>
-      <p:nvGrpSpPr>
-        <p:cNvPr id="1" name=""/>
-        <p:cNvGrpSpPr/>
-        <p:nvPr/>
-      </p:nvGrpSpPr>
-      <p:grpSpPr>
-        <a:xfrm>
-          <a:off x="0" y="0"/>
-          <a:ext cx="0" cy="0"/>
-          <a:chOff x="0" y="0"/>
-          <a:chExt cx="0" cy="0"/>
-        </a:xfrm>
-      </p:grpSpPr>
-      <p:sp>
-        <p:nvSpPr>
-          <p:cNvPr id="2" name="タイトル 1">
-            <a:extLst>
-              <a:ext uri="{FF2B5EF4-FFF2-40B4-BE49-F238E27FC236}">
-                <a16:creationId xmlns:a16="http://schemas.microsoft.com/office/drawing/2014/main" id="{47343883-3903-F4E8-A819-9BBE80D31E99}"/>
-              </a:ext>
-            </a:extLst>
-          </p:cNvPr>
-          <p:cNvSpPr>
-            <a:spLocks noGrp="1"/>
-          </p:cNvSpPr>
-          <p:nvPr>
-            <p:ph type="ctrTitle"/>
-          </p:nvPr>
-        </p:nvSpPr>
-        <p:spPr/>
-        <p:txBody>
-          <a:bodyPr/>
-          <a:lstStyle/>
-          <a:p>
-            <a:endParaRPr kumimoji="1" lang="ja-JP" altLang="en-US"/>
-          </a:p>
-        </p:txBody>
-      </p:sp>
-      <p:sp>
-        <p:nvSpPr>
-          <p:cNvPr id="3" name="字幕 2">
-            <a:extLst>
-              <a:ext uri="{FF2B5EF4-FFF2-40B4-BE49-F238E27FC236}">
-                <a16:creationId xmlns:a16="http://schemas.microsoft.com/office/drawing/2014/main" id="{57782F85-1F1C-CB65-B3C6-632EF0282A01}"/>
-              </a:ext>
-            </a:extLst>
-          </p:cNvPr>
-          <p:cNvSpPr>
-            <a:spLocks noGrp="1"/>
-          </p:cNvSpPr>
-          <p:nvPr>
-            <p:ph type="subTitle" idx="1"/>
-          </p:nvPr>
-        </p:nvSpPr>
-        <p:spPr/>
-        <p:txBody>
-          <a:bodyPr/>
-          <a:lstStyle/>
-          <a:p>
-            <a:endParaRPr kumimoji="1" lang="ja-JP" altLang="en-US"/>
-          </a:p>
-        </p:txBody>
-      </p:sp>
-    </p:spTree>
-    <p:extLst>
-      <p:ext uri="{BB962C8B-B14F-4D97-AF65-F5344CB8AC3E}">
-        <p14:creationId xmlns:p14="http://schemas.microsoft.com/office/powerpoint/2010/main" val="3107056033"/>
-      </p:ext>
-    </p:extLst>
-  </p:cSld>
-  <p:clrMapOvr>
-    <a:masterClrMapping/>
-  </p:clrMapOvr>
-</p:sld>
-</file>
-
-<file path=ppt/slides/slide2.xml><?xml version="1.0" encoding="utf-8"?>
-<p:sld xmlns:a="http://schemas.openxmlformats.org/drawingml/2006/main" xmlns:r="http://schemas.openxmlformats.org/officeDocument/2006/relationships" xmlns:p="http://schemas.openxmlformats.org/presentationml/2006/main">
+<p:sld xmlns:a="http://schemas.openxmlformats.org/drawingml/2006/main" xmlns:r="http://schemas.openxmlformats.org/officeDocument/2006/relationships" xmlns:p="http://schemas.openxmlformats.org/presentationml/2006/main" show="0">
   <p:cSld>
     <p:spTree>
       <p:nvGrpSpPr>
@@ -3865,8 +3790,1699 @@
 </p:sld>
 </file>
 
+<file path=ppt/slides/slide2.xml><?xml version="1.0" encoding="utf-8"?>
+<p:sld xmlns:a="http://schemas.openxmlformats.org/drawingml/2006/main" xmlns:r="http://schemas.openxmlformats.org/officeDocument/2006/relationships" xmlns:p="http://schemas.openxmlformats.org/presentationml/2006/main" show="0">
+  <p:cSld>
+    <p:spTree>
+      <p:nvGrpSpPr>
+        <p:cNvPr id="1" name=""/>
+        <p:cNvGrpSpPr/>
+        <p:nvPr/>
+      </p:nvGrpSpPr>
+      <p:grpSpPr>
+        <a:xfrm>
+          <a:off x="0" y="0"/>
+          <a:ext cx="0" cy="0"/>
+          <a:chOff x="0" y="0"/>
+          <a:chExt cx="0" cy="0"/>
+        </a:xfrm>
+      </p:grpSpPr>
+      <p:grpSp>
+        <p:nvGrpSpPr>
+          <p:cNvPr id="4" name="グループ化 3">
+            <a:extLst>
+              <a:ext uri="{FF2B5EF4-FFF2-40B4-BE49-F238E27FC236}">
+                <a16:creationId xmlns:a16="http://schemas.microsoft.com/office/drawing/2014/main" id="{4313106B-5620-4C72-B153-1A5F31039641}"/>
+              </a:ext>
+            </a:extLst>
+          </p:cNvPr>
+          <p:cNvGrpSpPr/>
+          <p:nvPr/>
+        </p:nvGrpSpPr>
+        <p:grpSpPr>
+          <a:xfrm>
+            <a:off x="461899" y="-6355586"/>
+            <a:ext cx="11268202" cy="19569173"/>
+            <a:chOff x="0" y="0"/>
+            <a:chExt cx="11475801" cy="19124022"/>
+          </a:xfrm>
+        </p:grpSpPr>
+        <p:grpSp>
+          <p:nvGrpSpPr>
+            <p:cNvPr id="5" name="グループ化 4">
+              <a:extLst>
+                <a:ext uri="{FF2B5EF4-FFF2-40B4-BE49-F238E27FC236}">
+                  <a16:creationId xmlns:a16="http://schemas.microsoft.com/office/drawing/2014/main" id="{7BAB3D4A-8172-A04B-F527-58319D4ABE0B}"/>
+                </a:ext>
+              </a:extLst>
+            </p:cNvPr>
+            <p:cNvGrpSpPr/>
+            <p:nvPr/>
+          </p:nvGrpSpPr>
+          <p:grpSpPr>
+            <a:xfrm>
+              <a:off x="0" y="0"/>
+              <a:ext cx="11475801" cy="19124022"/>
+              <a:chOff x="0" y="0"/>
+              <a:chExt cx="11236058" cy="18674011"/>
+            </a:xfrm>
+          </p:grpSpPr>
+          <p:sp>
+            <p:nvSpPr>
+              <p:cNvPr id="18" name="正方形/長方形 17">
+                <a:extLst>
+                  <a:ext uri="{FF2B5EF4-FFF2-40B4-BE49-F238E27FC236}">
+                    <a16:creationId xmlns:a16="http://schemas.microsoft.com/office/drawing/2014/main" id="{0622D09D-C287-AC17-5FBF-C440DD5BF06B}"/>
+                  </a:ext>
+                </a:extLst>
+              </p:cNvPr>
+              <p:cNvSpPr/>
+              <p:nvPr/>
+            </p:nvSpPr>
+            <p:spPr>
+              <a:xfrm>
+                <a:off x="0" y="0"/>
+                <a:ext cx="11236058" cy="18674011"/>
+              </a:xfrm>
+              <a:prstGeom prst="rect">
+                <a:avLst/>
+              </a:prstGeom>
+              <a:ln>
+                <a:noFill/>
+              </a:ln>
+            </p:spPr>
+            <p:style>
+              <a:lnRef idx="2">
+                <a:schemeClr val="dk1"/>
+              </a:lnRef>
+              <a:fillRef idx="1">
+                <a:schemeClr val="lt1"/>
+              </a:fillRef>
+              <a:effectRef idx="0">
+                <a:schemeClr val="dk1"/>
+              </a:effectRef>
+              <a:fontRef idx="minor">
+                <a:schemeClr val="dk1"/>
+              </a:fontRef>
+            </p:style>
+            <p:txBody>
+              <a:bodyPr wrap="square" rtlCol="0" anchor="ctr"/>
+              <a:lstStyle>
+                <a:defPPr>
+                  <a:defRPr lang="ja-JP"/>
+                </a:defPPr>
+                <a:lvl1pPr marL="0" indent="0" algn="l" defTabSz="914400" rtl="0" eaLnBrk="1" latinLnBrk="0" hangingPunct="1">
+                  <a:defRPr kumimoji="1" sz="1800" kern="1200">
+                    <a:solidFill>
+                      <a:schemeClr val="dk1"/>
+                    </a:solidFill>
+                    <a:latin typeface="+mn-lt"/>
+                    <a:ea typeface="+mn-ea"/>
+                    <a:cs typeface="+mn-cs"/>
+                  </a:defRPr>
+                </a:lvl1pPr>
+                <a:lvl2pPr marL="457200" indent="0" algn="l" defTabSz="914400" rtl="0" eaLnBrk="1" latinLnBrk="0" hangingPunct="1">
+                  <a:defRPr kumimoji="1" sz="1800" kern="1200">
+                    <a:solidFill>
+                      <a:schemeClr val="dk1"/>
+                    </a:solidFill>
+                    <a:latin typeface="+mn-lt"/>
+                    <a:ea typeface="+mn-ea"/>
+                    <a:cs typeface="+mn-cs"/>
+                  </a:defRPr>
+                </a:lvl2pPr>
+                <a:lvl3pPr marL="914400" indent="0" algn="l" defTabSz="914400" rtl="0" eaLnBrk="1" latinLnBrk="0" hangingPunct="1">
+                  <a:defRPr kumimoji="1" sz="1800" kern="1200">
+                    <a:solidFill>
+                      <a:schemeClr val="dk1"/>
+                    </a:solidFill>
+                    <a:latin typeface="+mn-lt"/>
+                    <a:ea typeface="+mn-ea"/>
+                    <a:cs typeface="+mn-cs"/>
+                  </a:defRPr>
+                </a:lvl3pPr>
+                <a:lvl4pPr marL="1371600" indent="0" algn="l" defTabSz="914400" rtl="0" eaLnBrk="1" latinLnBrk="0" hangingPunct="1">
+                  <a:defRPr kumimoji="1" sz="1800" kern="1200">
+                    <a:solidFill>
+                      <a:schemeClr val="dk1"/>
+                    </a:solidFill>
+                    <a:latin typeface="+mn-lt"/>
+                    <a:ea typeface="+mn-ea"/>
+                    <a:cs typeface="+mn-cs"/>
+                  </a:defRPr>
+                </a:lvl4pPr>
+                <a:lvl5pPr marL="1828800" indent="0" algn="l" defTabSz="914400" rtl="0" eaLnBrk="1" latinLnBrk="0" hangingPunct="1">
+                  <a:defRPr kumimoji="1" sz="1800" kern="1200">
+                    <a:solidFill>
+                      <a:schemeClr val="dk1"/>
+                    </a:solidFill>
+                    <a:latin typeface="+mn-lt"/>
+                    <a:ea typeface="+mn-ea"/>
+                    <a:cs typeface="+mn-cs"/>
+                  </a:defRPr>
+                </a:lvl5pPr>
+                <a:lvl6pPr marL="2286000" indent="0" algn="l" defTabSz="914400" rtl="0" eaLnBrk="1" latinLnBrk="0" hangingPunct="1">
+                  <a:defRPr kumimoji="1" sz="1800" kern="1200">
+                    <a:solidFill>
+                      <a:schemeClr val="dk1"/>
+                    </a:solidFill>
+                    <a:latin typeface="+mn-lt"/>
+                    <a:ea typeface="+mn-ea"/>
+                    <a:cs typeface="+mn-cs"/>
+                  </a:defRPr>
+                </a:lvl6pPr>
+                <a:lvl7pPr marL="2743200" indent="0" algn="l" defTabSz="914400" rtl="0" eaLnBrk="1" latinLnBrk="0" hangingPunct="1">
+                  <a:defRPr kumimoji="1" sz="1800" kern="1200">
+                    <a:solidFill>
+                      <a:schemeClr val="dk1"/>
+                    </a:solidFill>
+                    <a:latin typeface="+mn-lt"/>
+                    <a:ea typeface="+mn-ea"/>
+                    <a:cs typeface="+mn-cs"/>
+                  </a:defRPr>
+                </a:lvl7pPr>
+                <a:lvl8pPr marL="3200400" indent="0" algn="l" defTabSz="914400" rtl="0" eaLnBrk="1" latinLnBrk="0" hangingPunct="1">
+                  <a:defRPr kumimoji="1" sz="1800" kern="1200">
+                    <a:solidFill>
+                      <a:schemeClr val="dk1"/>
+                    </a:solidFill>
+                    <a:latin typeface="+mn-lt"/>
+                    <a:ea typeface="+mn-ea"/>
+                    <a:cs typeface="+mn-cs"/>
+                  </a:defRPr>
+                </a:lvl8pPr>
+                <a:lvl9pPr marL="3657600" indent="0" algn="l" defTabSz="914400" rtl="0" eaLnBrk="1" latinLnBrk="0" hangingPunct="1">
+                  <a:defRPr kumimoji="1" sz="1800" kern="1200">
+                    <a:solidFill>
+                      <a:schemeClr val="dk1"/>
+                    </a:solidFill>
+                    <a:latin typeface="+mn-lt"/>
+                    <a:ea typeface="+mn-ea"/>
+                    <a:cs typeface="+mn-cs"/>
+                  </a:defRPr>
+                </a:lvl9pPr>
+              </a:lstStyle>
+              <a:p>
+                <a:pPr algn="ctr"/>
+                <a:endParaRPr kumimoji="1" lang="ja-JP" altLang="en-US"/>
+              </a:p>
+            </p:txBody>
+          </p:sp>
+          <p:pic>
+            <p:nvPicPr>
+              <p:cNvPr id="19" name="図 18">
+                <a:extLst>
+                  <a:ext uri="{FF2B5EF4-FFF2-40B4-BE49-F238E27FC236}">
+                    <a16:creationId xmlns:a16="http://schemas.microsoft.com/office/drawing/2014/main" id="{473DDA88-E27C-4A57-F196-D5472179BFA5}"/>
+                  </a:ext>
+                </a:extLst>
+              </p:cNvPr>
+              <p:cNvPicPr>
+                <a:picLocks noChangeAspect="1"/>
+              </p:cNvPicPr>
+              <p:nvPr/>
+            </p:nvPicPr>
+            <p:blipFill rotWithShape="1">
+              <a:blip r:embed="rId2"/>
+              <a:srcRect l="3511" r="6080"/>
+              <a:stretch>
+                <a:fillRect/>
+              </a:stretch>
+            </p:blipFill>
+            <p:spPr>
+              <a:xfrm>
+                <a:off x="1360933" y="11894317"/>
+                <a:ext cx="8602795" cy="6715125"/>
+              </a:xfrm>
+              <a:prstGeom prst="rect">
+                <a:avLst/>
+              </a:prstGeom>
+            </p:spPr>
+          </p:pic>
+          <p:pic>
+            <p:nvPicPr>
+              <p:cNvPr id="20" name="図 19">
+                <a:extLst>
+                  <a:ext uri="{FF2B5EF4-FFF2-40B4-BE49-F238E27FC236}">
+                    <a16:creationId xmlns:a16="http://schemas.microsoft.com/office/drawing/2014/main" id="{45AF5E9B-03D6-4AB1-1676-F897EC1E4B66}"/>
+                  </a:ext>
+                </a:extLst>
+              </p:cNvPr>
+              <p:cNvPicPr>
+                <a:picLocks noChangeAspect="1"/>
+              </p:cNvPicPr>
+              <p:nvPr/>
+            </p:nvPicPr>
+            <p:blipFill rotWithShape="1">
+              <a:blip r:embed="rId3"/>
+              <a:srcRect l="15627" r="14777" b="5882"/>
+              <a:stretch>
+                <a:fillRect/>
+              </a:stretch>
+            </p:blipFill>
+            <p:spPr>
+              <a:xfrm>
+                <a:off x="1284801" y="5890062"/>
+                <a:ext cx="8869255" cy="6651603"/>
+              </a:xfrm>
+              <a:prstGeom prst="rect">
+                <a:avLst/>
+              </a:prstGeom>
+            </p:spPr>
+          </p:pic>
+          <p:pic>
+            <p:nvPicPr>
+              <p:cNvPr id="21" name="図 20">
+                <a:extLst>
+                  <a:ext uri="{FF2B5EF4-FFF2-40B4-BE49-F238E27FC236}">
+                    <a16:creationId xmlns:a16="http://schemas.microsoft.com/office/drawing/2014/main" id="{724E5798-6B4D-8335-294F-FFE337B9910E}"/>
+                  </a:ext>
+                </a:extLst>
+              </p:cNvPr>
+              <p:cNvPicPr>
+                <a:picLocks noChangeAspect="1"/>
+              </p:cNvPicPr>
+              <p:nvPr/>
+            </p:nvPicPr>
+            <p:blipFill rotWithShape="1">
+              <a:blip r:embed="rId4"/>
+              <a:srcRect l="9123" r="14411"/>
+              <a:stretch>
+                <a:fillRect/>
+              </a:stretch>
+            </p:blipFill>
+            <p:spPr>
+              <a:xfrm>
+                <a:off x="1246735" y="42779"/>
+                <a:ext cx="8640862" cy="7965543"/>
+              </a:xfrm>
+              <a:prstGeom prst="rect">
+                <a:avLst/>
+              </a:prstGeom>
+            </p:spPr>
+          </p:pic>
+        </p:grpSp>
+        <p:sp>
+          <p:nvSpPr>
+            <p:cNvPr id="6" name="正方形/長方形 5">
+              <a:extLst>
+                <a:ext uri="{FF2B5EF4-FFF2-40B4-BE49-F238E27FC236}">
+                  <a16:creationId xmlns:a16="http://schemas.microsoft.com/office/drawing/2014/main" id="{1FF1069A-A88D-ECCA-B2D3-D5E5EA42DE82}"/>
+                </a:ext>
+              </a:extLst>
+            </p:cNvPr>
+            <p:cNvSpPr/>
+            <p:nvPr/>
+          </p:nvSpPr>
+          <p:spPr>
+            <a:xfrm>
+              <a:off x="1639995" y="2407636"/>
+              <a:ext cx="8272548" cy="3867323"/>
+            </a:xfrm>
+            <a:prstGeom prst="rect">
+              <a:avLst/>
+            </a:prstGeom>
+            <a:noFill/>
+            <a:ln w="28575">
+              <a:solidFill>
+                <a:srgbClr val="FF0000"/>
+              </a:solidFill>
+              <a:prstDash val="solid"/>
+            </a:ln>
+          </p:spPr>
+          <p:style>
+            <a:lnRef idx="2">
+              <a:schemeClr val="accent6"/>
+            </a:lnRef>
+            <a:fillRef idx="1">
+              <a:schemeClr val="lt1"/>
+            </a:fillRef>
+            <a:effectRef idx="0">
+              <a:schemeClr val="accent6"/>
+            </a:effectRef>
+            <a:fontRef idx="minor">
+              <a:schemeClr val="dk1"/>
+            </a:fontRef>
+          </p:style>
+          <p:txBody>
+            <a:bodyPr rtlCol="0" anchor="t"/>
+            <a:lstStyle>
+              <a:lvl1pPr marL="0" indent="0">
+                <a:defRPr sz="1100">
+                  <a:solidFill>
+                    <a:schemeClr val="dk1"/>
+                  </a:solidFill>
+                  <a:latin typeface="+mn-lt"/>
+                  <a:ea typeface="+mn-ea"/>
+                  <a:cs typeface="+mn-cs"/>
+                </a:defRPr>
+              </a:lvl1pPr>
+              <a:lvl2pPr marL="457200" indent="0">
+                <a:defRPr sz="1100">
+                  <a:solidFill>
+                    <a:schemeClr val="dk1"/>
+                  </a:solidFill>
+                  <a:latin typeface="+mn-lt"/>
+                  <a:ea typeface="+mn-ea"/>
+                  <a:cs typeface="+mn-cs"/>
+                </a:defRPr>
+              </a:lvl2pPr>
+              <a:lvl3pPr marL="914400" indent="0">
+                <a:defRPr sz="1100">
+                  <a:solidFill>
+                    <a:schemeClr val="dk1"/>
+                  </a:solidFill>
+                  <a:latin typeface="+mn-lt"/>
+                  <a:ea typeface="+mn-ea"/>
+                  <a:cs typeface="+mn-cs"/>
+                </a:defRPr>
+              </a:lvl3pPr>
+              <a:lvl4pPr marL="1371600" indent="0">
+                <a:defRPr sz="1100">
+                  <a:solidFill>
+                    <a:schemeClr val="dk1"/>
+                  </a:solidFill>
+                  <a:latin typeface="+mn-lt"/>
+                  <a:ea typeface="+mn-ea"/>
+                  <a:cs typeface="+mn-cs"/>
+                </a:defRPr>
+              </a:lvl4pPr>
+              <a:lvl5pPr marL="1828800" indent="0">
+                <a:defRPr sz="1100">
+                  <a:solidFill>
+                    <a:schemeClr val="dk1"/>
+                  </a:solidFill>
+                  <a:latin typeface="+mn-lt"/>
+                  <a:ea typeface="+mn-ea"/>
+                  <a:cs typeface="+mn-cs"/>
+                </a:defRPr>
+              </a:lvl5pPr>
+              <a:lvl6pPr marL="2286000" indent="0">
+                <a:defRPr sz="1100">
+                  <a:solidFill>
+                    <a:schemeClr val="dk1"/>
+                  </a:solidFill>
+                  <a:latin typeface="+mn-lt"/>
+                  <a:ea typeface="+mn-ea"/>
+                  <a:cs typeface="+mn-cs"/>
+                </a:defRPr>
+              </a:lvl6pPr>
+              <a:lvl7pPr marL="2743200" indent="0">
+                <a:defRPr sz="1100">
+                  <a:solidFill>
+                    <a:schemeClr val="dk1"/>
+                  </a:solidFill>
+                  <a:latin typeface="+mn-lt"/>
+                  <a:ea typeface="+mn-ea"/>
+                  <a:cs typeface="+mn-cs"/>
+                </a:defRPr>
+              </a:lvl7pPr>
+              <a:lvl8pPr marL="3200400" indent="0">
+                <a:defRPr sz="1100">
+                  <a:solidFill>
+                    <a:schemeClr val="dk1"/>
+                  </a:solidFill>
+                  <a:latin typeface="+mn-lt"/>
+                  <a:ea typeface="+mn-ea"/>
+                  <a:cs typeface="+mn-cs"/>
+                </a:defRPr>
+              </a:lvl8pPr>
+              <a:lvl9pPr marL="3657600" indent="0">
+                <a:defRPr sz="1100">
+                  <a:solidFill>
+                    <a:schemeClr val="dk1"/>
+                  </a:solidFill>
+                  <a:latin typeface="+mn-lt"/>
+                  <a:ea typeface="+mn-ea"/>
+                  <a:cs typeface="+mn-cs"/>
+                </a:defRPr>
+              </a:lvl9pPr>
+            </a:lstStyle>
+            <a:p>
+              <a:pPr algn="l"/>
+              <a:endParaRPr kumimoji="1" lang="ja-JP" altLang="en-US" sz="1100"/>
+            </a:p>
+          </p:txBody>
+        </p:sp>
+        <p:sp>
+          <p:nvSpPr>
+            <p:cNvPr id="7" name="正方形/長方形 6">
+              <a:extLst>
+                <a:ext uri="{FF2B5EF4-FFF2-40B4-BE49-F238E27FC236}">
+                  <a16:creationId xmlns:a16="http://schemas.microsoft.com/office/drawing/2014/main" id="{E0E6D1CA-FE3F-BD19-107E-ECC42C57A33E}"/>
+                </a:ext>
+              </a:extLst>
+            </p:cNvPr>
+            <p:cNvSpPr/>
+            <p:nvPr/>
+          </p:nvSpPr>
+          <p:spPr>
+            <a:xfrm>
+              <a:off x="1647615" y="6431862"/>
+              <a:ext cx="8259213" cy="5818043"/>
+            </a:xfrm>
+            <a:prstGeom prst="rect">
+              <a:avLst/>
+            </a:prstGeom>
+            <a:noFill/>
+            <a:ln w="28575">
+              <a:solidFill>
+                <a:srgbClr val="FF0000"/>
+              </a:solidFill>
+              <a:prstDash val="solid"/>
+            </a:ln>
+          </p:spPr>
+          <p:style>
+            <a:lnRef idx="2">
+              <a:schemeClr val="accent6"/>
+            </a:lnRef>
+            <a:fillRef idx="1">
+              <a:schemeClr val="lt1"/>
+            </a:fillRef>
+            <a:effectRef idx="0">
+              <a:schemeClr val="accent6"/>
+            </a:effectRef>
+            <a:fontRef idx="minor">
+              <a:schemeClr val="dk1"/>
+            </a:fontRef>
+          </p:style>
+          <p:txBody>
+            <a:bodyPr rtlCol="0" anchor="t"/>
+            <a:lstStyle>
+              <a:lvl1pPr marL="0" indent="0">
+                <a:defRPr sz="1100">
+                  <a:solidFill>
+                    <a:schemeClr val="dk1"/>
+                  </a:solidFill>
+                  <a:latin typeface="+mn-lt"/>
+                  <a:ea typeface="+mn-ea"/>
+                  <a:cs typeface="+mn-cs"/>
+                </a:defRPr>
+              </a:lvl1pPr>
+              <a:lvl2pPr marL="457200" indent="0">
+                <a:defRPr sz="1100">
+                  <a:solidFill>
+                    <a:schemeClr val="dk1"/>
+                  </a:solidFill>
+                  <a:latin typeface="+mn-lt"/>
+                  <a:ea typeface="+mn-ea"/>
+                  <a:cs typeface="+mn-cs"/>
+                </a:defRPr>
+              </a:lvl2pPr>
+              <a:lvl3pPr marL="914400" indent="0">
+                <a:defRPr sz="1100">
+                  <a:solidFill>
+                    <a:schemeClr val="dk1"/>
+                  </a:solidFill>
+                  <a:latin typeface="+mn-lt"/>
+                  <a:ea typeface="+mn-ea"/>
+                  <a:cs typeface="+mn-cs"/>
+                </a:defRPr>
+              </a:lvl3pPr>
+              <a:lvl4pPr marL="1371600" indent="0">
+                <a:defRPr sz="1100">
+                  <a:solidFill>
+                    <a:schemeClr val="dk1"/>
+                  </a:solidFill>
+                  <a:latin typeface="+mn-lt"/>
+                  <a:ea typeface="+mn-ea"/>
+                  <a:cs typeface="+mn-cs"/>
+                </a:defRPr>
+              </a:lvl4pPr>
+              <a:lvl5pPr marL="1828800" indent="0">
+                <a:defRPr sz="1100">
+                  <a:solidFill>
+                    <a:schemeClr val="dk1"/>
+                  </a:solidFill>
+                  <a:latin typeface="+mn-lt"/>
+                  <a:ea typeface="+mn-ea"/>
+                  <a:cs typeface="+mn-cs"/>
+                </a:defRPr>
+              </a:lvl5pPr>
+              <a:lvl6pPr marL="2286000" indent="0">
+                <a:defRPr sz="1100">
+                  <a:solidFill>
+                    <a:schemeClr val="dk1"/>
+                  </a:solidFill>
+                  <a:latin typeface="+mn-lt"/>
+                  <a:ea typeface="+mn-ea"/>
+                  <a:cs typeface="+mn-cs"/>
+                </a:defRPr>
+              </a:lvl6pPr>
+              <a:lvl7pPr marL="2743200" indent="0">
+                <a:defRPr sz="1100">
+                  <a:solidFill>
+                    <a:schemeClr val="dk1"/>
+                  </a:solidFill>
+                  <a:latin typeface="+mn-lt"/>
+                  <a:ea typeface="+mn-ea"/>
+                  <a:cs typeface="+mn-cs"/>
+                </a:defRPr>
+              </a:lvl7pPr>
+              <a:lvl8pPr marL="3200400" indent="0">
+                <a:defRPr sz="1100">
+                  <a:solidFill>
+                    <a:schemeClr val="dk1"/>
+                  </a:solidFill>
+                  <a:latin typeface="+mn-lt"/>
+                  <a:ea typeface="+mn-ea"/>
+                  <a:cs typeface="+mn-cs"/>
+                </a:defRPr>
+              </a:lvl8pPr>
+              <a:lvl9pPr marL="3657600" indent="0">
+                <a:defRPr sz="1100">
+                  <a:solidFill>
+                    <a:schemeClr val="dk1"/>
+                  </a:solidFill>
+                  <a:latin typeface="+mn-lt"/>
+                  <a:ea typeface="+mn-ea"/>
+                  <a:cs typeface="+mn-cs"/>
+                </a:defRPr>
+              </a:lvl9pPr>
+            </a:lstStyle>
+            <a:p>
+              <a:pPr algn="l"/>
+              <a:endParaRPr kumimoji="1" lang="ja-JP" altLang="en-US" sz="1100"/>
+            </a:p>
+          </p:txBody>
+        </p:sp>
+        <p:sp>
+          <p:nvSpPr>
+            <p:cNvPr id="8" name="正方形/長方形 7">
+              <a:extLst>
+                <a:ext uri="{FF2B5EF4-FFF2-40B4-BE49-F238E27FC236}">
+                  <a16:creationId xmlns:a16="http://schemas.microsoft.com/office/drawing/2014/main" id="{5A06FF8C-BBF1-A37D-99A5-8EC634E1711A}"/>
+                </a:ext>
+              </a:extLst>
+            </p:cNvPr>
+            <p:cNvSpPr/>
+            <p:nvPr/>
+          </p:nvSpPr>
+          <p:spPr>
+            <a:xfrm>
+              <a:off x="1651425" y="12552974"/>
+              <a:ext cx="8253498" cy="6139468"/>
+            </a:xfrm>
+            <a:prstGeom prst="rect">
+              <a:avLst/>
+            </a:prstGeom>
+            <a:noFill/>
+            <a:ln w="28575">
+              <a:solidFill>
+                <a:srgbClr val="FF0000"/>
+              </a:solidFill>
+              <a:prstDash val="solid"/>
+            </a:ln>
+          </p:spPr>
+          <p:style>
+            <a:lnRef idx="2">
+              <a:schemeClr val="accent6"/>
+            </a:lnRef>
+            <a:fillRef idx="1">
+              <a:schemeClr val="lt1"/>
+            </a:fillRef>
+            <a:effectRef idx="0">
+              <a:schemeClr val="accent6"/>
+            </a:effectRef>
+            <a:fontRef idx="minor">
+              <a:schemeClr val="dk1"/>
+            </a:fontRef>
+          </p:style>
+          <p:txBody>
+            <a:bodyPr rtlCol="0" anchor="t"/>
+            <a:lstStyle>
+              <a:lvl1pPr marL="0" indent="0">
+                <a:defRPr sz="1100">
+                  <a:solidFill>
+                    <a:schemeClr val="dk1"/>
+                  </a:solidFill>
+                  <a:latin typeface="+mn-lt"/>
+                  <a:ea typeface="+mn-ea"/>
+                  <a:cs typeface="+mn-cs"/>
+                </a:defRPr>
+              </a:lvl1pPr>
+              <a:lvl2pPr marL="457200" indent="0">
+                <a:defRPr sz="1100">
+                  <a:solidFill>
+                    <a:schemeClr val="dk1"/>
+                  </a:solidFill>
+                  <a:latin typeface="+mn-lt"/>
+                  <a:ea typeface="+mn-ea"/>
+                  <a:cs typeface="+mn-cs"/>
+                </a:defRPr>
+              </a:lvl2pPr>
+              <a:lvl3pPr marL="914400" indent="0">
+                <a:defRPr sz="1100">
+                  <a:solidFill>
+                    <a:schemeClr val="dk1"/>
+                  </a:solidFill>
+                  <a:latin typeface="+mn-lt"/>
+                  <a:ea typeface="+mn-ea"/>
+                  <a:cs typeface="+mn-cs"/>
+                </a:defRPr>
+              </a:lvl3pPr>
+              <a:lvl4pPr marL="1371600" indent="0">
+                <a:defRPr sz="1100">
+                  <a:solidFill>
+                    <a:schemeClr val="dk1"/>
+                  </a:solidFill>
+                  <a:latin typeface="+mn-lt"/>
+                  <a:ea typeface="+mn-ea"/>
+                  <a:cs typeface="+mn-cs"/>
+                </a:defRPr>
+              </a:lvl4pPr>
+              <a:lvl5pPr marL="1828800" indent="0">
+                <a:defRPr sz="1100">
+                  <a:solidFill>
+                    <a:schemeClr val="dk1"/>
+                  </a:solidFill>
+                  <a:latin typeface="+mn-lt"/>
+                  <a:ea typeface="+mn-ea"/>
+                  <a:cs typeface="+mn-cs"/>
+                </a:defRPr>
+              </a:lvl5pPr>
+              <a:lvl6pPr marL="2286000" indent="0">
+                <a:defRPr sz="1100">
+                  <a:solidFill>
+                    <a:schemeClr val="dk1"/>
+                  </a:solidFill>
+                  <a:latin typeface="+mn-lt"/>
+                  <a:ea typeface="+mn-ea"/>
+                  <a:cs typeface="+mn-cs"/>
+                </a:defRPr>
+              </a:lvl6pPr>
+              <a:lvl7pPr marL="2743200" indent="0">
+                <a:defRPr sz="1100">
+                  <a:solidFill>
+                    <a:schemeClr val="dk1"/>
+                  </a:solidFill>
+                  <a:latin typeface="+mn-lt"/>
+                  <a:ea typeface="+mn-ea"/>
+                  <a:cs typeface="+mn-cs"/>
+                </a:defRPr>
+              </a:lvl7pPr>
+              <a:lvl8pPr marL="3200400" indent="0">
+                <a:defRPr sz="1100">
+                  <a:solidFill>
+                    <a:schemeClr val="dk1"/>
+                  </a:solidFill>
+                  <a:latin typeface="+mn-lt"/>
+                  <a:ea typeface="+mn-ea"/>
+                  <a:cs typeface="+mn-cs"/>
+                </a:defRPr>
+              </a:lvl8pPr>
+              <a:lvl9pPr marL="3657600" indent="0">
+                <a:defRPr sz="1100">
+                  <a:solidFill>
+                    <a:schemeClr val="dk1"/>
+                  </a:solidFill>
+                  <a:latin typeface="+mn-lt"/>
+                  <a:ea typeface="+mn-ea"/>
+                  <a:cs typeface="+mn-cs"/>
+                </a:defRPr>
+              </a:lvl9pPr>
+            </a:lstStyle>
+            <a:p>
+              <a:pPr algn="l"/>
+              <a:endParaRPr kumimoji="1" lang="ja-JP" altLang="en-US" sz="1100"/>
+            </a:p>
+          </p:txBody>
+        </p:sp>
+        <p:cxnSp>
+          <p:nvCxnSpPr>
+            <p:cNvPr id="9" name="直線矢印コネクタ 8">
+              <a:extLst>
+                <a:ext uri="{FF2B5EF4-FFF2-40B4-BE49-F238E27FC236}">
+                  <a16:creationId xmlns:a16="http://schemas.microsoft.com/office/drawing/2014/main" id="{A8E0F279-70E5-379B-E1F0-D9F94828F9DC}"/>
+                </a:ext>
+              </a:extLst>
+            </p:cNvPr>
+            <p:cNvCxnSpPr>
+              <a:cxnSpLocks/>
+              <a:stCxn id="10" idx="2"/>
+              <a:endCxn id="17" idx="3"/>
+            </p:cNvCxnSpPr>
+            <p:nvPr/>
+          </p:nvCxnSpPr>
+          <p:spPr>
+            <a:xfrm flipH="1">
+              <a:off x="10123534" y="1215948"/>
+              <a:ext cx="587953" cy="283961"/>
+            </a:xfrm>
+            <a:prstGeom prst="straightConnector1">
+              <a:avLst/>
+            </a:prstGeom>
+            <a:ln w="28575">
+              <a:solidFill>
+                <a:srgbClr val="FF0000"/>
+              </a:solidFill>
+              <a:tailEnd type="triangle"/>
+            </a:ln>
+          </p:spPr>
+          <p:style>
+            <a:lnRef idx="2">
+              <a:schemeClr val="accent1"/>
+            </a:lnRef>
+            <a:fillRef idx="0">
+              <a:schemeClr val="accent1"/>
+            </a:fillRef>
+            <a:effectRef idx="1">
+              <a:schemeClr val="accent1"/>
+            </a:effectRef>
+            <a:fontRef idx="minor">
+              <a:schemeClr val="tx1"/>
+            </a:fontRef>
+          </p:style>
+        </p:cxnSp>
+        <p:sp>
+          <p:nvSpPr>
+            <p:cNvPr id="10" name="正方形/長方形 9">
+              <a:extLst>
+                <a:ext uri="{FF2B5EF4-FFF2-40B4-BE49-F238E27FC236}">
+                  <a16:creationId xmlns:a16="http://schemas.microsoft.com/office/drawing/2014/main" id="{E104C9A3-86A7-D51B-40D9-020CDC9F4FBC}"/>
+                </a:ext>
+              </a:extLst>
+            </p:cNvPr>
+            <p:cNvSpPr/>
+            <p:nvPr/>
+          </p:nvSpPr>
+          <p:spPr>
+            <a:xfrm>
+              <a:off x="10209576" y="787841"/>
+              <a:ext cx="1003822" cy="428106"/>
+            </a:xfrm>
+            <a:prstGeom prst="rect">
+              <a:avLst/>
+            </a:prstGeom>
+            <a:ln w="28575">
+              <a:solidFill>
+                <a:srgbClr val="FF0000"/>
+              </a:solidFill>
+            </a:ln>
+          </p:spPr>
+          <p:style>
+            <a:lnRef idx="2">
+              <a:schemeClr val="accent6"/>
+            </a:lnRef>
+            <a:fillRef idx="1">
+              <a:schemeClr val="lt1"/>
+            </a:fillRef>
+            <a:effectRef idx="0">
+              <a:schemeClr val="accent6"/>
+            </a:effectRef>
+            <a:fontRef idx="minor">
+              <a:schemeClr val="dk1"/>
+            </a:fontRef>
+          </p:style>
+          <p:txBody>
+            <a:bodyPr rtlCol="0" anchor="ctr"/>
+            <a:lstStyle>
+              <a:lvl1pPr marL="0" indent="0">
+                <a:defRPr sz="1100">
+                  <a:solidFill>
+                    <a:schemeClr val="dk1"/>
+                  </a:solidFill>
+                  <a:latin typeface="+mn-lt"/>
+                  <a:ea typeface="+mn-ea"/>
+                  <a:cs typeface="+mn-cs"/>
+                </a:defRPr>
+              </a:lvl1pPr>
+              <a:lvl2pPr marL="457200" indent="0">
+                <a:defRPr sz="1100">
+                  <a:solidFill>
+                    <a:schemeClr val="dk1"/>
+                  </a:solidFill>
+                  <a:latin typeface="+mn-lt"/>
+                  <a:ea typeface="+mn-ea"/>
+                  <a:cs typeface="+mn-cs"/>
+                </a:defRPr>
+              </a:lvl2pPr>
+              <a:lvl3pPr marL="914400" indent="0">
+                <a:defRPr sz="1100">
+                  <a:solidFill>
+                    <a:schemeClr val="dk1"/>
+                  </a:solidFill>
+                  <a:latin typeface="+mn-lt"/>
+                  <a:ea typeface="+mn-ea"/>
+                  <a:cs typeface="+mn-cs"/>
+                </a:defRPr>
+              </a:lvl3pPr>
+              <a:lvl4pPr marL="1371600" indent="0">
+                <a:defRPr sz="1100">
+                  <a:solidFill>
+                    <a:schemeClr val="dk1"/>
+                  </a:solidFill>
+                  <a:latin typeface="+mn-lt"/>
+                  <a:ea typeface="+mn-ea"/>
+                  <a:cs typeface="+mn-cs"/>
+                </a:defRPr>
+              </a:lvl4pPr>
+              <a:lvl5pPr marL="1828800" indent="0">
+                <a:defRPr sz="1100">
+                  <a:solidFill>
+                    <a:schemeClr val="dk1"/>
+                  </a:solidFill>
+                  <a:latin typeface="+mn-lt"/>
+                  <a:ea typeface="+mn-ea"/>
+                  <a:cs typeface="+mn-cs"/>
+                </a:defRPr>
+              </a:lvl5pPr>
+              <a:lvl6pPr marL="2286000" indent="0">
+                <a:defRPr sz="1100">
+                  <a:solidFill>
+                    <a:schemeClr val="dk1"/>
+                  </a:solidFill>
+                  <a:latin typeface="+mn-lt"/>
+                  <a:ea typeface="+mn-ea"/>
+                  <a:cs typeface="+mn-cs"/>
+                </a:defRPr>
+              </a:lvl6pPr>
+              <a:lvl7pPr marL="2743200" indent="0">
+                <a:defRPr sz="1100">
+                  <a:solidFill>
+                    <a:schemeClr val="dk1"/>
+                  </a:solidFill>
+                  <a:latin typeface="+mn-lt"/>
+                  <a:ea typeface="+mn-ea"/>
+                  <a:cs typeface="+mn-cs"/>
+                </a:defRPr>
+              </a:lvl7pPr>
+              <a:lvl8pPr marL="3200400" indent="0">
+                <a:defRPr sz="1100">
+                  <a:solidFill>
+                    <a:schemeClr val="dk1"/>
+                  </a:solidFill>
+                  <a:latin typeface="+mn-lt"/>
+                  <a:ea typeface="+mn-ea"/>
+                  <a:cs typeface="+mn-cs"/>
+                </a:defRPr>
+              </a:lvl8pPr>
+              <a:lvl9pPr marL="3657600" indent="0">
+                <a:defRPr sz="1100">
+                  <a:solidFill>
+                    <a:schemeClr val="dk1"/>
+                  </a:solidFill>
+                  <a:latin typeface="+mn-lt"/>
+                  <a:ea typeface="+mn-ea"/>
+                  <a:cs typeface="+mn-cs"/>
+                </a:defRPr>
+              </a:lvl9pPr>
+            </a:lstStyle>
+            <a:p>
+              <a:pPr algn="l"/>
+              <a:r>
+                <a:rPr kumimoji="1" lang="ja-JP" altLang="en-US" sz="1200" b="1">
+                  <a:solidFill>
+                    <a:srgbClr val="FF0000"/>
+                  </a:solidFill>
+                </a:rPr>
+                <a:t>①基本操作</a:t>
+              </a:r>
+            </a:p>
+          </p:txBody>
+        </p:sp>
+        <p:sp>
+          <p:nvSpPr>
+            <p:cNvPr id="11" name="正方形/長方形 10">
+              <a:extLst>
+                <a:ext uri="{FF2B5EF4-FFF2-40B4-BE49-F238E27FC236}">
+                  <a16:creationId xmlns:a16="http://schemas.microsoft.com/office/drawing/2014/main" id="{E68340B4-6D24-E1D2-B115-6F171BA29353}"/>
+                </a:ext>
+              </a:extLst>
+            </p:cNvPr>
+            <p:cNvSpPr/>
+            <p:nvPr/>
+          </p:nvSpPr>
+          <p:spPr>
+            <a:xfrm>
+              <a:off x="10191493" y="3783566"/>
+              <a:ext cx="1170410" cy="714548"/>
+            </a:xfrm>
+            <a:prstGeom prst="rect">
+              <a:avLst/>
+            </a:prstGeom>
+            <a:ln w="28575">
+              <a:solidFill>
+                <a:srgbClr val="FF0000"/>
+              </a:solidFill>
+            </a:ln>
+          </p:spPr>
+          <p:style>
+            <a:lnRef idx="2">
+              <a:schemeClr val="accent6"/>
+            </a:lnRef>
+            <a:fillRef idx="1">
+              <a:schemeClr val="lt1"/>
+            </a:fillRef>
+            <a:effectRef idx="0">
+              <a:schemeClr val="accent6"/>
+            </a:effectRef>
+            <a:fontRef idx="minor">
+              <a:schemeClr val="dk1"/>
+            </a:fontRef>
+          </p:style>
+          <p:txBody>
+            <a:bodyPr rtlCol="0" anchor="ctr"/>
+            <a:lstStyle>
+              <a:lvl1pPr marL="0" indent="0">
+                <a:defRPr sz="1100">
+                  <a:solidFill>
+                    <a:schemeClr val="dk1"/>
+                  </a:solidFill>
+                  <a:latin typeface="+mn-lt"/>
+                  <a:ea typeface="+mn-ea"/>
+                  <a:cs typeface="+mn-cs"/>
+                </a:defRPr>
+              </a:lvl1pPr>
+              <a:lvl2pPr marL="457200" indent="0">
+                <a:defRPr sz="1100">
+                  <a:solidFill>
+                    <a:schemeClr val="dk1"/>
+                  </a:solidFill>
+                  <a:latin typeface="+mn-lt"/>
+                  <a:ea typeface="+mn-ea"/>
+                  <a:cs typeface="+mn-cs"/>
+                </a:defRPr>
+              </a:lvl2pPr>
+              <a:lvl3pPr marL="914400" indent="0">
+                <a:defRPr sz="1100">
+                  <a:solidFill>
+                    <a:schemeClr val="dk1"/>
+                  </a:solidFill>
+                  <a:latin typeface="+mn-lt"/>
+                  <a:ea typeface="+mn-ea"/>
+                  <a:cs typeface="+mn-cs"/>
+                </a:defRPr>
+              </a:lvl3pPr>
+              <a:lvl4pPr marL="1371600" indent="0">
+                <a:defRPr sz="1100">
+                  <a:solidFill>
+                    <a:schemeClr val="dk1"/>
+                  </a:solidFill>
+                  <a:latin typeface="+mn-lt"/>
+                  <a:ea typeface="+mn-ea"/>
+                  <a:cs typeface="+mn-cs"/>
+                </a:defRPr>
+              </a:lvl4pPr>
+              <a:lvl5pPr marL="1828800" indent="0">
+                <a:defRPr sz="1100">
+                  <a:solidFill>
+                    <a:schemeClr val="dk1"/>
+                  </a:solidFill>
+                  <a:latin typeface="+mn-lt"/>
+                  <a:ea typeface="+mn-ea"/>
+                  <a:cs typeface="+mn-cs"/>
+                </a:defRPr>
+              </a:lvl5pPr>
+              <a:lvl6pPr marL="2286000" indent="0">
+                <a:defRPr sz="1100">
+                  <a:solidFill>
+                    <a:schemeClr val="dk1"/>
+                  </a:solidFill>
+                  <a:latin typeface="+mn-lt"/>
+                  <a:ea typeface="+mn-ea"/>
+                  <a:cs typeface="+mn-cs"/>
+                </a:defRPr>
+              </a:lvl6pPr>
+              <a:lvl7pPr marL="2743200" indent="0">
+                <a:defRPr sz="1100">
+                  <a:solidFill>
+                    <a:schemeClr val="dk1"/>
+                  </a:solidFill>
+                  <a:latin typeface="+mn-lt"/>
+                  <a:ea typeface="+mn-ea"/>
+                  <a:cs typeface="+mn-cs"/>
+                </a:defRPr>
+              </a:lvl7pPr>
+              <a:lvl8pPr marL="3200400" indent="0">
+                <a:defRPr sz="1100">
+                  <a:solidFill>
+                    <a:schemeClr val="dk1"/>
+                  </a:solidFill>
+                  <a:latin typeface="+mn-lt"/>
+                  <a:ea typeface="+mn-ea"/>
+                  <a:cs typeface="+mn-cs"/>
+                </a:defRPr>
+              </a:lvl8pPr>
+              <a:lvl9pPr marL="3657600" indent="0">
+                <a:defRPr sz="1100">
+                  <a:solidFill>
+                    <a:schemeClr val="dk1"/>
+                  </a:solidFill>
+                  <a:latin typeface="+mn-lt"/>
+                  <a:ea typeface="+mn-ea"/>
+                  <a:cs typeface="+mn-cs"/>
+                </a:defRPr>
+              </a:lvl9pPr>
+            </a:lstStyle>
+            <a:p>
+              <a:pPr algn="l"/>
+              <a:r>
+                <a:rPr kumimoji="1" lang="ja-JP" altLang="en-US" sz="1200" b="1">
+                  <a:solidFill>
+                    <a:srgbClr val="FF0000"/>
+                  </a:solidFill>
+                </a:rPr>
+                <a:t>②エネミー</a:t>
+              </a:r>
+              <a:endParaRPr kumimoji="1" lang="en-US" altLang="ja-JP" sz="1200" b="1">
+                <a:solidFill>
+                  <a:srgbClr val="FF0000"/>
+                </a:solidFill>
+              </a:endParaRPr>
+            </a:p>
+            <a:p>
+              <a:pPr algn="l"/>
+              <a:r>
+                <a:rPr kumimoji="1" lang="ja-JP" altLang="en-US" sz="1200" b="1">
+                  <a:solidFill>
+                    <a:srgbClr val="FF0000"/>
+                  </a:solidFill>
+                </a:rPr>
+                <a:t>　情報入力欄</a:t>
+              </a:r>
+            </a:p>
+          </p:txBody>
+        </p:sp>
+        <p:cxnSp>
+          <p:nvCxnSpPr>
+            <p:cNvPr id="12" name="直線矢印コネクタ 11">
+              <a:extLst>
+                <a:ext uri="{FF2B5EF4-FFF2-40B4-BE49-F238E27FC236}">
+                  <a16:creationId xmlns:a16="http://schemas.microsoft.com/office/drawing/2014/main" id="{02CDDD4D-0B14-0752-6CA5-ED2B32D28DB7}"/>
+                </a:ext>
+              </a:extLst>
+            </p:cNvPr>
+            <p:cNvCxnSpPr>
+              <a:stCxn id="11" idx="1"/>
+              <a:endCxn id="6" idx="3"/>
+            </p:cNvCxnSpPr>
+            <p:nvPr/>
+          </p:nvCxnSpPr>
+          <p:spPr>
+            <a:xfrm flipH="1">
+              <a:off x="9910638" y="4146901"/>
+              <a:ext cx="278950" cy="198207"/>
+            </a:xfrm>
+            <a:prstGeom prst="straightConnector1">
+              <a:avLst/>
+            </a:prstGeom>
+            <a:ln w="28575">
+              <a:solidFill>
+                <a:srgbClr val="FF0000"/>
+              </a:solidFill>
+              <a:tailEnd type="triangle"/>
+            </a:ln>
+          </p:spPr>
+          <p:style>
+            <a:lnRef idx="2">
+              <a:schemeClr val="accent1"/>
+            </a:lnRef>
+            <a:fillRef idx="0">
+              <a:schemeClr val="accent1"/>
+            </a:fillRef>
+            <a:effectRef idx="1">
+              <a:schemeClr val="accent1"/>
+            </a:effectRef>
+            <a:fontRef idx="minor">
+              <a:schemeClr val="tx1"/>
+            </a:fontRef>
+          </p:style>
+        </p:cxnSp>
+        <p:sp>
+          <p:nvSpPr>
+            <p:cNvPr id="13" name="正方形/長方形 12">
+              <a:extLst>
+                <a:ext uri="{FF2B5EF4-FFF2-40B4-BE49-F238E27FC236}">
+                  <a16:creationId xmlns:a16="http://schemas.microsoft.com/office/drawing/2014/main" id="{A1F70571-B6B2-13D4-D227-24B29505C168}"/>
+                </a:ext>
+              </a:extLst>
+            </p:cNvPr>
+            <p:cNvSpPr/>
+            <p:nvPr/>
+          </p:nvSpPr>
+          <p:spPr>
+            <a:xfrm>
+              <a:off x="10179543" y="8754923"/>
+              <a:ext cx="1129367" cy="700000"/>
+            </a:xfrm>
+            <a:prstGeom prst="rect">
+              <a:avLst/>
+            </a:prstGeom>
+            <a:ln w="28575">
+              <a:solidFill>
+                <a:srgbClr val="FF0000"/>
+              </a:solidFill>
+            </a:ln>
+          </p:spPr>
+          <p:style>
+            <a:lnRef idx="2">
+              <a:schemeClr val="accent6"/>
+            </a:lnRef>
+            <a:fillRef idx="1">
+              <a:schemeClr val="lt1"/>
+            </a:fillRef>
+            <a:effectRef idx="0">
+              <a:schemeClr val="accent6"/>
+            </a:effectRef>
+            <a:fontRef idx="minor">
+              <a:schemeClr val="dk1"/>
+            </a:fontRef>
+          </p:style>
+          <p:txBody>
+            <a:bodyPr rtlCol="0" anchor="ctr"/>
+            <a:lstStyle>
+              <a:lvl1pPr marL="0" indent="0">
+                <a:defRPr sz="1100">
+                  <a:solidFill>
+                    <a:schemeClr val="dk1"/>
+                  </a:solidFill>
+                  <a:latin typeface="+mn-lt"/>
+                  <a:ea typeface="+mn-ea"/>
+                  <a:cs typeface="+mn-cs"/>
+                </a:defRPr>
+              </a:lvl1pPr>
+              <a:lvl2pPr marL="457200" indent="0">
+                <a:defRPr sz="1100">
+                  <a:solidFill>
+                    <a:schemeClr val="dk1"/>
+                  </a:solidFill>
+                  <a:latin typeface="+mn-lt"/>
+                  <a:ea typeface="+mn-ea"/>
+                  <a:cs typeface="+mn-cs"/>
+                </a:defRPr>
+              </a:lvl2pPr>
+              <a:lvl3pPr marL="914400" indent="0">
+                <a:defRPr sz="1100">
+                  <a:solidFill>
+                    <a:schemeClr val="dk1"/>
+                  </a:solidFill>
+                  <a:latin typeface="+mn-lt"/>
+                  <a:ea typeface="+mn-ea"/>
+                  <a:cs typeface="+mn-cs"/>
+                </a:defRPr>
+              </a:lvl3pPr>
+              <a:lvl4pPr marL="1371600" indent="0">
+                <a:defRPr sz="1100">
+                  <a:solidFill>
+                    <a:schemeClr val="dk1"/>
+                  </a:solidFill>
+                  <a:latin typeface="+mn-lt"/>
+                  <a:ea typeface="+mn-ea"/>
+                  <a:cs typeface="+mn-cs"/>
+                </a:defRPr>
+              </a:lvl4pPr>
+              <a:lvl5pPr marL="1828800" indent="0">
+                <a:defRPr sz="1100">
+                  <a:solidFill>
+                    <a:schemeClr val="dk1"/>
+                  </a:solidFill>
+                  <a:latin typeface="+mn-lt"/>
+                  <a:ea typeface="+mn-ea"/>
+                  <a:cs typeface="+mn-cs"/>
+                </a:defRPr>
+              </a:lvl5pPr>
+              <a:lvl6pPr marL="2286000" indent="0">
+                <a:defRPr sz="1100">
+                  <a:solidFill>
+                    <a:schemeClr val="dk1"/>
+                  </a:solidFill>
+                  <a:latin typeface="+mn-lt"/>
+                  <a:ea typeface="+mn-ea"/>
+                  <a:cs typeface="+mn-cs"/>
+                </a:defRPr>
+              </a:lvl6pPr>
+              <a:lvl7pPr marL="2743200" indent="0">
+                <a:defRPr sz="1100">
+                  <a:solidFill>
+                    <a:schemeClr val="dk1"/>
+                  </a:solidFill>
+                  <a:latin typeface="+mn-lt"/>
+                  <a:ea typeface="+mn-ea"/>
+                  <a:cs typeface="+mn-cs"/>
+                </a:defRPr>
+              </a:lvl7pPr>
+              <a:lvl8pPr marL="3200400" indent="0">
+                <a:defRPr sz="1100">
+                  <a:solidFill>
+                    <a:schemeClr val="dk1"/>
+                  </a:solidFill>
+                  <a:latin typeface="+mn-lt"/>
+                  <a:ea typeface="+mn-ea"/>
+                  <a:cs typeface="+mn-cs"/>
+                </a:defRPr>
+              </a:lvl8pPr>
+              <a:lvl9pPr marL="3657600" indent="0">
+                <a:defRPr sz="1100">
+                  <a:solidFill>
+                    <a:schemeClr val="dk1"/>
+                  </a:solidFill>
+                  <a:latin typeface="+mn-lt"/>
+                  <a:ea typeface="+mn-ea"/>
+                  <a:cs typeface="+mn-cs"/>
+                </a:defRPr>
+              </a:lvl9pPr>
+            </a:lstStyle>
+            <a:p>
+              <a:pPr algn="l"/>
+              <a:r>
+                <a:rPr kumimoji="1" lang="ja-JP" altLang="en-US" sz="1200" b="1">
+                  <a:solidFill>
+                    <a:srgbClr val="FF0000"/>
+                  </a:solidFill>
+                </a:rPr>
+                <a:t>③ドロップ</a:t>
+              </a:r>
+              <a:endParaRPr kumimoji="1" lang="en-US" altLang="ja-JP" sz="1200" b="1">
+                <a:solidFill>
+                  <a:srgbClr val="FF0000"/>
+                </a:solidFill>
+              </a:endParaRPr>
+            </a:p>
+            <a:p>
+              <a:pPr algn="l"/>
+              <a:r>
+                <a:rPr kumimoji="1" lang="ja-JP" altLang="en-US" sz="1200" b="1">
+                  <a:solidFill>
+                    <a:srgbClr val="FF0000"/>
+                  </a:solidFill>
+                </a:rPr>
+                <a:t>　入力欄</a:t>
+              </a:r>
+            </a:p>
+          </p:txBody>
+        </p:sp>
+        <p:cxnSp>
+          <p:nvCxnSpPr>
+            <p:cNvPr id="14" name="直線矢印コネクタ 13">
+              <a:extLst>
+                <a:ext uri="{FF2B5EF4-FFF2-40B4-BE49-F238E27FC236}">
+                  <a16:creationId xmlns:a16="http://schemas.microsoft.com/office/drawing/2014/main" id="{50B8946C-E226-2A43-27FE-92A7329BAA3A}"/>
+                </a:ext>
+              </a:extLst>
+            </p:cNvPr>
+            <p:cNvCxnSpPr>
+              <a:stCxn id="13" idx="1"/>
+              <a:endCxn id="7" idx="3"/>
+            </p:cNvCxnSpPr>
+            <p:nvPr/>
+          </p:nvCxnSpPr>
+          <p:spPr>
+            <a:xfrm flipH="1">
+              <a:off x="9904923" y="9103625"/>
+              <a:ext cx="274620" cy="239164"/>
+            </a:xfrm>
+            <a:prstGeom prst="straightConnector1">
+              <a:avLst/>
+            </a:prstGeom>
+            <a:ln w="28575">
+              <a:solidFill>
+                <a:srgbClr val="FF0000"/>
+              </a:solidFill>
+              <a:tailEnd type="triangle"/>
+            </a:ln>
+          </p:spPr>
+          <p:style>
+            <a:lnRef idx="2">
+              <a:schemeClr val="accent1"/>
+            </a:lnRef>
+            <a:fillRef idx="0">
+              <a:schemeClr val="accent1"/>
+            </a:fillRef>
+            <a:effectRef idx="1">
+              <a:schemeClr val="accent1"/>
+            </a:effectRef>
+            <a:fontRef idx="minor">
+              <a:schemeClr val="tx1"/>
+            </a:fontRef>
+          </p:style>
+        </p:cxnSp>
+        <p:sp>
+          <p:nvSpPr>
+            <p:cNvPr id="15" name="正方形/長方形 14">
+              <a:extLst>
+                <a:ext uri="{FF2B5EF4-FFF2-40B4-BE49-F238E27FC236}">
+                  <a16:creationId xmlns:a16="http://schemas.microsoft.com/office/drawing/2014/main" id="{32848968-827C-725D-E743-131CBFBB5A52}"/>
+                </a:ext>
+              </a:extLst>
+            </p:cNvPr>
+            <p:cNvSpPr/>
+            <p:nvPr/>
+          </p:nvSpPr>
+          <p:spPr>
+            <a:xfrm>
+              <a:off x="10179542" y="14961760"/>
+              <a:ext cx="1135083" cy="834908"/>
+            </a:xfrm>
+            <a:prstGeom prst="rect">
+              <a:avLst/>
+            </a:prstGeom>
+            <a:ln w="28575">
+              <a:solidFill>
+                <a:srgbClr val="FF0000"/>
+              </a:solidFill>
+            </a:ln>
+          </p:spPr>
+          <p:style>
+            <a:lnRef idx="2">
+              <a:schemeClr val="accent6"/>
+            </a:lnRef>
+            <a:fillRef idx="1">
+              <a:schemeClr val="lt1"/>
+            </a:fillRef>
+            <a:effectRef idx="0">
+              <a:schemeClr val="accent6"/>
+            </a:effectRef>
+            <a:fontRef idx="minor">
+              <a:schemeClr val="dk1"/>
+            </a:fontRef>
+          </p:style>
+          <p:txBody>
+            <a:bodyPr rtlCol="0" anchor="ctr"/>
+            <a:lstStyle>
+              <a:lvl1pPr marL="0" indent="0">
+                <a:defRPr sz="1100">
+                  <a:solidFill>
+                    <a:schemeClr val="dk1"/>
+                  </a:solidFill>
+                  <a:latin typeface="+mn-lt"/>
+                  <a:ea typeface="+mn-ea"/>
+                  <a:cs typeface="+mn-cs"/>
+                </a:defRPr>
+              </a:lvl1pPr>
+              <a:lvl2pPr marL="457200" indent="0">
+                <a:defRPr sz="1100">
+                  <a:solidFill>
+                    <a:schemeClr val="dk1"/>
+                  </a:solidFill>
+                  <a:latin typeface="+mn-lt"/>
+                  <a:ea typeface="+mn-ea"/>
+                  <a:cs typeface="+mn-cs"/>
+                </a:defRPr>
+              </a:lvl2pPr>
+              <a:lvl3pPr marL="914400" indent="0">
+                <a:defRPr sz="1100">
+                  <a:solidFill>
+                    <a:schemeClr val="dk1"/>
+                  </a:solidFill>
+                  <a:latin typeface="+mn-lt"/>
+                  <a:ea typeface="+mn-ea"/>
+                  <a:cs typeface="+mn-cs"/>
+                </a:defRPr>
+              </a:lvl3pPr>
+              <a:lvl4pPr marL="1371600" indent="0">
+                <a:defRPr sz="1100">
+                  <a:solidFill>
+                    <a:schemeClr val="dk1"/>
+                  </a:solidFill>
+                  <a:latin typeface="+mn-lt"/>
+                  <a:ea typeface="+mn-ea"/>
+                  <a:cs typeface="+mn-cs"/>
+                </a:defRPr>
+              </a:lvl4pPr>
+              <a:lvl5pPr marL="1828800" indent="0">
+                <a:defRPr sz="1100">
+                  <a:solidFill>
+                    <a:schemeClr val="dk1"/>
+                  </a:solidFill>
+                  <a:latin typeface="+mn-lt"/>
+                  <a:ea typeface="+mn-ea"/>
+                  <a:cs typeface="+mn-cs"/>
+                </a:defRPr>
+              </a:lvl5pPr>
+              <a:lvl6pPr marL="2286000" indent="0">
+                <a:defRPr sz="1100">
+                  <a:solidFill>
+                    <a:schemeClr val="dk1"/>
+                  </a:solidFill>
+                  <a:latin typeface="+mn-lt"/>
+                  <a:ea typeface="+mn-ea"/>
+                  <a:cs typeface="+mn-cs"/>
+                </a:defRPr>
+              </a:lvl6pPr>
+              <a:lvl7pPr marL="2743200" indent="0">
+                <a:defRPr sz="1100">
+                  <a:solidFill>
+                    <a:schemeClr val="dk1"/>
+                  </a:solidFill>
+                  <a:latin typeface="+mn-lt"/>
+                  <a:ea typeface="+mn-ea"/>
+                  <a:cs typeface="+mn-cs"/>
+                </a:defRPr>
+              </a:lvl7pPr>
+              <a:lvl8pPr marL="3200400" indent="0">
+                <a:defRPr sz="1100">
+                  <a:solidFill>
+                    <a:schemeClr val="dk1"/>
+                  </a:solidFill>
+                  <a:latin typeface="+mn-lt"/>
+                  <a:ea typeface="+mn-ea"/>
+                  <a:cs typeface="+mn-cs"/>
+                </a:defRPr>
+              </a:lvl8pPr>
+              <a:lvl9pPr marL="3657600" indent="0">
+                <a:defRPr sz="1100">
+                  <a:solidFill>
+                    <a:schemeClr val="dk1"/>
+                  </a:solidFill>
+                  <a:latin typeface="+mn-lt"/>
+                  <a:ea typeface="+mn-ea"/>
+                  <a:cs typeface="+mn-cs"/>
+                </a:defRPr>
+              </a:lvl9pPr>
+            </a:lstStyle>
+            <a:p>
+              <a:pPr algn="l"/>
+              <a:r>
+                <a:rPr kumimoji="1" lang="ja-JP" altLang="en-US" sz="1200" b="1">
+                  <a:solidFill>
+                    <a:srgbClr val="FF0000"/>
+                  </a:solidFill>
+                </a:rPr>
+                <a:t>④エネミー</a:t>
+              </a:r>
+              <a:endParaRPr kumimoji="1" lang="en-US" altLang="ja-JP" sz="1200" b="1">
+                <a:solidFill>
+                  <a:srgbClr val="FF0000"/>
+                </a:solidFill>
+              </a:endParaRPr>
+            </a:p>
+            <a:p>
+              <a:pPr algn="l"/>
+              <a:r>
+                <a:rPr kumimoji="1" lang="ja-JP" altLang="en-US" sz="1200" b="1">
+                  <a:solidFill>
+                    <a:srgbClr val="FF0000"/>
+                  </a:solidFill>
+                </a:rPr>
+                <a:t>　能力値欄</a:t>
+              </a:r>
+            </a:p>
+          </p:txBody>
+        </p:sp>
+        <p:cxnSp>
+          <p:nvCxnSpPr>
+            <p:cNvPr id="16" name="直線矢印コネクタ 15">
+              <a:extLst>
+                <a:ext uri="{FF2B5EF4-FFF2-40B4-BE49-F238E27FC236}">
+                  <a16:creationId xmlns:a16="http://schemas.microsoft.com/office/drawing/2014/main" id="{C83085F6-8CDA-B12B-DEC4-FF49022A0FDF}"/>
+                </a:ext>
+              </a:extLst>
+            </p:cNvPr>
+            <p:cNvCxnSpPr>
+              <a:stCxn id="15" idx="1"/>
+              <a:endCxn id="8" idx="3"/>
+            </p:cNvCxnSpPr>
+            <p:nvPr/>
+          </p:nvCxnSpPr>
+          <p:spPr>
+            <a:xfrm flipH="1">
+              <a:off x="9904923" y="15378262"/>
+              <a:ext cx="274619" cy="246697"/>
+            </a:xfrm>
+            <a:prstGeom prst="straightConnector1">
+              <a:avLst/>
+            </a:prstGeom>
+            <a:ln w="28575">
+              <a:solidFill>
+                <a:srgbClr val="FF0000"/>
+              </a:solidFill>
+              <a:tailEnd type="triangle"/>
+            </a:ln>
+          </p:spPr>
+          <p:style>
+            <a:lnRef idx="2">
+              <a:schemeClr val="accent1"/>
+            </a:lnRef>
+            <a:fillRef idx="0">
+              <a:schemeClr val="accent1"/>
+            </a:fillRef>
+            <a:effectRef idx="1">
+              <a:schemeClr val="accent1"/>
+            </a:effectRef>
+            <a:fontRef idx="minor">
+              <a:schemeClr val="tx1"/>
+            </a:fontRef>
+          </p:style>
+        </p:cxnSp>
+        <p:sp>
+          <p:nvSpPr>
+            <p:cNvPr id="17" name="正方形/長方形 16">
+              <a:extLst>
+                <a:ext uri="{FF2B5EF4-FFF2-40B4-BE49-F238E27FC236}">
+                  <a16:creationId xmlns:a16="http://schemas.microsoft.com/office/drawing/2014/main" id="{EC0E0312-1518-D906-CA50-661F906058F2}"/>
+                </a:ext>
+              </a:extLst>
+            </p:cNvPr>
+            <p:cNvSpPr/>
+            <p:nvPr/>
+          </p:nvSpPr>
+          <p:spPr>
+            <a:xfrm>
+              <a:off x="1429003" y="681482"/>
+              <a:ext cx="8694531" cy="1636853"/>
+            </a:xfrm>
+            <a:prstGeom prst="rect">
+              <a:avLst/>
+            </a:prstGeom>
+            <a:noFill/>
+            <a:ln w="28575">
+              <a:solidFill>
+                <a:srgbClr val="FF0000"/>
+              </a:solidFill>
+              <a:prstDash val="solid"/>
+            </a:ln>
+          </p:spPr>
+          <p:style>
+            <a:lnRef idx="2">
+              <a:schemeClr val="accent6"/>
+            </a:lnRef>
+            <a:fillRef idx="1">
+              <a:schemeClr val="lt1"/>
+            </a:fillRef>
+            <a:effectRef idx="0">
+              <a:schemeClr val="accent6"/>
+            </a:effectRef>
+            <a:fontRef idx="minor">
+              <a:schemeClr val="dk1"/>
+            </a:fontRef>
+          </p:style>
+          <p:txBody>
+            <a:bodyPr rtlCol="0" anchor="t"/>
+            <a:lstStyle>
+              <a:lvl1pPr marL="0" indent="0">
+                <a:defRPr sz="1100">
+                  <a:solidFill>
+                    <a:schemeClr val="dk1"/>
+                  </a:solidFill>
+                  <a:latin typeface="+mn-lt"/>
+                  <a:ea typeface="+mn-ea"/>
+                  <a:cs typeface="+mn-cs"/>
+                </a:defRPr>
+              </a:lvl1pPr>
+              <a:lvl2pPr marL="457200" indent="0">
+                <a:defRPr sz="1100">
+                  <a:solidFill>
+                    <a:schemeClr val="dk1"/>
+                  </a:solidFill>
+                  <a:latin typeface="+mn-lt"/>
+                  <a:ea typeface="+mn-ea"/>
+                  <a:cs typeface="+mn-cs"/>
+                </a:defRPr>
+              </a:lvl2pPr>
+              <a:lvl3pPr marL="914400" indent="0">
+                <a:defRPr sz="1100">
+                  <a:solidFill>
+                    <a:schemeClr val="dk1"/>
+                  </a:solidFill>
+                  <a:latin typeface="+mn-lt"/>
+                  <a:ea typeface="+mn-ea"/>
+                  <a:cs typeface="+mn-cs"/>
+                </a:defRPr>
+              </a:lvl3pPr>
+              <a:lvl4pPr marL="1371600" indent="0">
+                <a:defRPr sz="1100">
+                  <a:solidFill>
+                    <a:schemeClr val="dk1"/>
+                  </a:solidFill>
+                  <a:latin typeface="+mn-lt"/>
+                  <a:ea typeface="+mn-ea"/>
+                  <a:cs typeface="+mn-cs"/>
+                </a:defRPr>
+              </a:lvl4pPr>
+              <a:lvl5pPr marL="1828800" indent="0">
+                <a:defRPr sz="1100">
+                  <a:solidFill>
+                    <a:schemeClr val="dk1"/>
+                  </a:solidFill>
+                  <a:latin typeface="+mn-lt"/>
+                  <a:ea typeface="+mn-ea"/>
+                  <a:cs typeface="+mn-cs"/>
+                </a:defRPr>
+              </a:lvl5pPr>
+              <a:lvl6pPr marL="2286000" indent="0">
+                <a:defRPr sz="1100">
+                  <a:solidFill>
+                    <a:schemeClr val="dk1"/>
+                  </a:solidFill>
+                  <a:latin typeface="+mn-lt"/>
+                  <a:ea typeface="+mn-ea"/>
+                  <a:cs typeface="+mn-cs"/>
+                </a:defRPr>
+              </a:lvl6pPr>
+              <a:lvl7pPr marL="2743200" indent="0">
+                <a:defRPr sz="1100">
+                  <a:solidFill>
+                    <a:schemeClr val="dk1"/>
+                  </a:solidFill>
+                  <a:latin typeface="+mn-lt"/>
+                  <a:ea typeface="+mn-ea"/>
+                  <a:cs typeface="+mn-cs"/>
+                </a:defRPr>
+              </a:lvl7pPr>
+              <a:lvl8pPr marL="3200400" indent="0">
+                <a:defRPr sz="1100">
+                  <a:solidFill>
+                    <a:schemeClr val="dk1"/>
+                  </a:solidFill>
+                  <a:latin typeface="+mn-lt"/>
+                  <a:ea typeface="+mn-ea"/>
+                  <a:cs typeface="+mn-cs"/>
+                </a:defRPr>
+              </a:lvl8pPr>
+              <a:lvl9pPr marL="3657600" indent="0">
+                <a:defRPr sz="1100">
+                  <a:solidFill>
+                    <a:schemeClr val="dk1"/>
+                  </a:solidFill>
+                  <a:latin typeface="+mn-lt"/>
+                  <a:ea typeface="+mn-ea"/>
+                  <a:cs typeface="+mn-cs"/>
+                </a:defRPr>
+              </a:lvl9pPr>
+            </a:lstStyle>
+            <a:p>
+              <a:pPr algn="l"/>
+              <a:endParaRPr kumimoji="1" lang="ja-JP" altLang="en-US" sz="1100"/>
+            </a:p>
+          </p:txBody>
+        </p:sp>
+      </p:grpSp>
+    </p:spTree>
+    <p:extLst>
+      <p:ext uri="{BB962C8B-B14F-4D97-AF65-F5344CB8AC3E}">
+        <p14:creationId xmlns:p14="http://schemas.microsoft.com/office/powerpoint/2010/main" val="3296933611"/>
+      </p:ext>
+    </p:extLst>
+  </p:cSld>
+  <p:clrMapOvr>
+    <a:masterClrMapping/>
+  </p:clrMapOvr>
+</p:sld>
+</file>
+
 <file path=ppt/slides/slide3.xml><?xml version="1.0" encoding="utf-8"?>
-<p:sld xmlns:a="http://schemas.openxmlformats.org/drawingml/2006/main" xmlns:r="http://schemas.openxmlformats.org/officeDocument/2006/relationships" xmlns:p="http://schemas.openxmlformats.org/presentationml/2006/main">
+<p:sld xmlns:a="http://schemas.openxmlformats.org/drawingml/2006/main" xmlns:r="http://schemas.openxmlformats.org/officeDocument/2006/relationships" xmlns:p="http://schemas.openxmlformats.org/presentationml/2006/main" show="0">
   <p:cSld>
     <p:spTree>
       <p:nvGrpSpPr>
@@ -3905,7 +5521,7 @@
         </p:blipFill>
         <p:spPr>
           <a:xfrm>
-            <a:off x="2705100" y="28491"/>
+            <a:off x="2667000" y="486087"/>
             <a:ext cx="5985510" cy="12743826"/>
           </a:xfrm>
           <a:prstGeom prst="rect">
@@ -3913,126 +5529,5477 @@
           </a:prstGeom>
         </p:spPr>
       </p:pic>
-      <p:sp>
-        <p:nvSpPr>
-          <p:cNvPr id="4" name="吹き出し: 2 つ折線 3">
-            <a:extLst>
-              <a:ext uri="{FF2B5EF4-FFF2-40B4-BE49-F238E27FC236}">
-                <a16:creationId xmlns:a16="http://schemas.microsoft.com/office/drawing/2014/main" id="{636896BA-312D-F790-4A51-41E5753A8454}"/>
-              </a:ext>
-            </a:extLst>
-          </p:cNvPr>
-          <p:cNvSpPr/>
-          <p:nvPr/>
-        </p:nvSpPr>
-        <p:spPr>
-          <a:xfrm>
-            <a:off x="5781676" y="1114426"/>
-            <a:ext cx="376237" cy="138113"/>
-          </a:xfrm>
-          <a:prstGeom prst="borderCallout3">
-            <a:avLst>
-              <a:gd name="adj1" fmla="val 18750"/>
-              <a:gd name="adj2" fmla="val -8333"/>
-              <a:gd name="adj3" fmla="val 18750"/>
-              <a:gd name="adj4" fmla="val -16667"/>
-              <a:gd name="adj5" fmla="val 72415"/>
-              <a:gd name="adj6" fmla="val -30591"/>
-              <a:gd name="adj7" fmla="val 95722"/>
-              <a:gd name="adj8" fmla="val -48839"/>
-            </a:avLst>
-          </a:prstGeom>
-          <a:solidFill>
-            <a:schemeClr val="bg1"/>
-          </a:solidFill>
-          <a:ln w="12700">
-            <a:solidFill>
-              <a:srgbClr val="FF0000"/>
-            </a:solidFill>
-          </a:ln>
-        </p:spPr>
-        <p:style>
-          <a:lnRef idx="2">
-            <a:schemeClr val="accent1">
-              <a:shade val="15000"/>
-            </a:schemeClr>
-          </a:lnRef>
-          <a:fillRef idx="1">
-            <a:schemeClr val="accent1"/>
-          </a:fillRef>
-          <a:effectRef idx="0">
-            <a:schemeClr val="accent1"/>
-          </a:effectRef>
-          <a:fontRef idx="minor">
-            <a:schemeClr val="lt1"/>
-          </a:fontRef>
-        </p:style>
-        <p:txBody>
-          <a:bodyPr rtlCol="0" anchor="ctr"/>
-          <a:lstStyle/>
-          <a:p>
-            <a:pPr algn="ctr"/>
-            <a:endParaRPr kumimoji="1" lang="ja-JP" altLang="en-US"/>
-          </a:p>
-        </p:txBody>
-      </p:sp>
-      <p:sp>
-        <p:nvSpPr>
-          <p:cNvPr id="5" name="吹き出し: 折線 4">
-            <a:extLst>
-              <a:ext uri="{FF2B5EF4-FFF2-40B4-BE49-F238E27FC236}">
-                <a16:creationId xmlns:a16="http://schemas.microsoft.com/office/drawing/2014/main" id="{384F5B63-967C-501A-AF26-DBDC3F76F828}"/>
-              </a:ext>
-            </a:extLst>
-          </p:cNvPr>
-          <p:cNvSpPr/>
-          <p:nvPr/>
-        </p:nvSpPr>
-        <p:spPr>
-          <a:xfrm>
-            <a:off x="5781675" y="966787"/>
-            <a:ext cx="885825" cy="185738"/>
-          </a:xfrm>
-          <a:prstGeom prst="borderCallout2">
-            <a:avLst>
-              <a:gd name="adj1" fmla="val 18750"/>
-              <a:gd name="adj2" fmla="val -8333"/>
-              <a:gd name="adj3" fmla="val 18750"/>
-              <a:gd name="adj4" fmla="val -16667"/>
-              <a:gd name="adj5" fmla="val -46860"/>
-              <a:gd name="adj6" fmla="val -45105"/>
-            </a:avLst>
-          </a:prstGeom>
-        </p:spPr>
-        <p:style>
-          <a:lnRef idx="2">
-            <a:schemeClr val="accent1">
-              <a:shade val="15000"/>
-            </a:schemeClr>
-          </a:lnRef>
-          <a:fillRef idx="1">
-            <a:schemeClr val="accent1"/>
-          </a:fillRef>
-          <a:effectRef idx="0">
-            <a:schemeClr val="accent1"/>
-          </a:effectRef>
-          <a:fontRef idx="minor">
-            <a:schemeClr val="lt1"/>
-          </a:fontRef>
-        </p:style>
-        <p:txBody>
-          <a:bodyPr rtlCol="0" anchor="ctr"/>
-          <a:lstStyle/>
-          <a:p>
-            <a:pPr algn="ctr"/>
-            <a:endParaRPr kumimoji="1" lang="ja-JP" altLang="en-US"/>
-          </a:p>
-        </p:txBody>
-      </p:sp>
     </p:spTree>
     <p:extLst>
       <p:ext uri="{BB962C8B-B14F-4D97-AF65-F5344CB8AC3E}">
         <p14:creationId xmlns:p14="http://schemas.microsoft.com/office/powerpoint/2010/main" val="3380023788"/>
+      </p:ext>
+    </p:extLst>
+  </p:cSld>
+  <p:clrMapOvr>
+    <a:masterClrMapping/>
+  </p:clrMapOvr>
+</p:sld>
+</file>
+
+<file path=ppt/slides/slide4.xml><?xml version="1.0" encoding="utf-8"?>
+<p:sld xmlns:a="http://schemas.openxmlformats.org/drawingml/2006/main" xmlns:r="http://schemas.openxmlformats.org/officeDocument/2006/relationships" xmlns:p="http://schemas.openxmlformats.org/presentationml/2006/main">
+  <p:cSld>
+    <p:spTree>
+      <p:nvGrpSpPr>
+        <p:cNvPr id="1" name=""/>
+        <p:cNvGrpSpPr/>
+        <p:nvPr/>
+      </p:nvGrpSpPr>
+      <p:grpSpPr>
+        <a:xfrm>
+          <a:off x="0" y="0"/>
+          <a:ext cx="0" cy="0"/>
+          <a:chOff x="0" y="0"/>
+          <a:chExt cx="0" cy="0"/>
+        </a:xfrm>
+      </p:grpSpPr>
+      <p:grpSp>
+        <p:nvGrpSpPr>
+          <p:cNvPr id="4" name="グループ化 3">
+            <a:extLst>
+              <a:ext uri="{FF2B5EF4-FFF2-40B4-BE49-F238E27FC236}">
+                <a16:creationId xmlns:a16="http://schemas.microsoft.com/office/drawing/2014/main" id="{7F64B540-BE8C-0B3F-0C77-B712161BC309}"/>
+              </a:ext>
+            </a:extLst>
+          </p:cNvPr>
+          <p:cNvGrpSpPr/>
+          <p:nvPr/>
+        </p:nvGrpSpPr>
+        <p:grpSpPr>
+          <a:xfrm>
+            <a:off x="456796" y="-6352185"/>
+            <a:ext cx="11278408" cy="19562370"/>
+            <a:chOff x="0" y="0"/>
+            <a:chExt cx="11441694" cy="19024888"/>
+          </a:xfrm>
+        </p:grpSpPr>
+        <p:grpSp>
+          <p:nvGrpSpPr>
+            <p:cNvPr id="5" name="グループ化 4">
+              <a:extLst>
+                <a:ext uri="{FF2B5EF4-FFF2-40B4-BE49-F238E27FC236}">
+                  <a16:creationId xmlns:a16="http://schemas.microsoft.com/office/drawing/2014/main" id="{4313106B-5620-4C72-B153-1A5F31039641}"/>
+                </a:ext>
+              </a:extLst>
+            </p:cNvPr>
+            <p:cNvGrpSpPr/>
+            <p:nvPr/>
+          </p:nvGrpSpPr>
+          <p:grpSpPr>
+            <a:xfrm>
+              <a:off x="0" y="0"/>
+              <a:ext cx="11441694" cy="19024888"/>
+              <a:chOff x="0" y="0"/>
+              <a:chExt cx="11475801" cy="19124022"/>
+            </a:xfrm>
+          </p:grpSpPr>
+          <p:grpSp>
+            <p:nvGrpSpPr>
+              <p:cNvPr id="16" name="グループ化 15">
+                <a:extLst>
+                  <a:ext uri="{FF2B5EF4-FFF2-40B4-BE49-F238E27FC236}">
+                    <a16:creationId xmlns:a16="http://schemas.microsoft.com/office/drawing/2014/main" id="{7BAB3D4A-8172-A04B-F527-58319D4ABE0B}"/>
+                  </a:ext>
+                </a:extLst>
+              </p:cNvPr>
+              <p:cNvGrpSpPr/>
+              <p:nvPr/>
+            </p:nvGrpSpPr>
+            <p:grpSpPr>
+              <a:xfrm>
+                <a:off x="0" y="0"/>
+                <a:ext cx="11475801" cy="19124022"/>
+                <a:chOff x="0" y="0"/>
+                <a:chExt cx="11236058" cy="18674011"/>
+              </a:xfrm>
+            </p:grpSpPr>
+            <p:sp>
+              <p:nvSpPr>
+                <p:cNvPr id="26" name="正方形/長方形 25">
+                  <a:extLst>
+                    <a:ext uri="{FF2B5EF4-FFF2-40B4-BE49-F238E27FC236}">
+                      <a16:creationId xmlns:a16="http://schemas.microsoft.com/office/drawing/2014/main" id="{0622D09D-C287-AC17-5FBF-C440DD5BF06B}"/>
+                    </a:ext>
+                  </a:extLst>
+                </p:cNvPr>
+                <p:cNvSpPr/>
+                <p:nvPr/>
+              </p:nvSpPr>
+              <p:spPr>
+                <a:xfrm>
+                  <a:off x="0" y="0"/>
+                  <a:ext cx="11236058" cy="18674011"/>
+                </a:xfrm>
+                <a:prstGeom prst="rect">
+                  <a:avLst/>
+                </a:prstGeom>
+                <a:ln>
+                  <a:noFill/>
+                </a:ln>
+              </p:spPr>
+              <p:style>
+                <a:lnRef idx="2">
+                  <a:schemeClr val="dk1"/>
+                </a:lnRef>
+                <a:fillRef idx="1">
+                  <a:schemeClr val="lt1"/>
+                </a:fillRef>
+                <a:effectRef idx="0">
+                  <a:schemeClr val="dk1"/>
+                </a:effectRef>
+                <a:fontRef idx="minor">
+                  <a:schemeClr val="dk1"/>
+                </a:fontRef>
+              </p:style>
+              <p:txBody>
+                <a:bodyPr wrap="square" rtlCol="0" anchor="ctr"/>
+                <a:lstStyle>
+                  <a:defPPr>
+                    <a:defRPr lang="ja-JP"/>
+                  </a:defPPr>
+                  <a:lvl1pPr marL="0" indent="0" algn="l" defTabSz="914400" rtl="0" eaLnBrk="1" latinLnBrk="0" hangingPunct="1">
+                    <a:defRPr kumimoji="1" sz="1800" kern="1200">
+                      <a:solidFill>
+                        <a:schemeClr val="dk1"/>
+                      </a:solidFill>
+                      <a:latin typeface="+mn-lt"/>
+                      <a:ea typeface="+mn-ea"/>
+                      <a:cs typeface="+mn-cs"/>
+                    </a:defRPr>
+                  </a:lvl1pPr>
+                  <a:lvl2pPr marL="457200" indent="0" algn="l" defTabSz="914400" rtl="0" eaLnBrk="1" latinLnBrk="0" hangingPunct="1">
+                    <a:defRPr kumimoji="1" sz="1800" kern="1200">
+                      <a:solidFill>
+                        <a:schemeClr val="dk1"/>
+                      </a:solidFill>
+                      <a:latin typeface="+mn-lt"/>
+                      <a:ea typeface="+mn-ea"/>
+                      <a:cs typeface="+mn-cs"/>
+                    </a:defRPr>
+                  </a:lvl2pPr>
+                  <a:lvl3pPr marL="914400" indent="0" algn="l" defTabSz="914400" rtl="0" eaLnBrk="1" latinLnBrk="0" hangingPunct="1">
+                    <a:defRPr kumimoji="1" sz="1800" kern="1200">
+                      <a:solidFill>
+                        <a:schemeClr val="dk1"/>
+                      </a:solidFill>
+                      <a:latin typeface="+mn-lt"/>
+                      <a:ea typeface="+mn-ea"/>
+                      <a:cs typeface="+mn-cs"/>
+                    </a:defRPr>
+                  </a:lvl3pPr>
+                  <a:lvl4pPr marL="1371600" indent="0" algn="l" defTabSz="914400" rtl="0" eaLnBrk="1" latinLnBrk="0" hangingPunct="1">
+                    <a:defRPr kumimoji="1" sz="1800" kern="1200">
+                      <a:solidFill>
+                        <a:schemeClr val="dk1"/>
+                      </a:solidFill>
+                      <a:latin typeface="+mn-lt"/>
+                      <a:ea typeface="+mn-ea"/>
+                      <a:cs typeface="+mn-cs"/>
+                    </a:defRPr>
+                  </a:lvl4pPr>
+                  <a:lvl5pPr marL="1828800" indent="0" algn="l" defTabSz="914400" rtl="0" eaLnBrk="1" latinLnBrk="0" hangingPunct="1">
+                    <a:defRPr kumimoji="1" sz="1800" kern="1200">
+                      <a:solidFill>
+                        <a:schemeClr val="dk1"/>
+                      </a:solidFill>
+                      <a:latin typeface="+mn-lt"/>
+                      <a:ea typeface="+mn-ea"/>
+                      <a:cs typeface="+mn-cs"/>
+                    </a:defRPr>
+                  </a:lvl5pPr>
+                  <a:lvl6pPr marL="2286000" indent="0" algn="l" defTabSz="914400" rtl="0" eaLnBrk="1" latinLnBrk="0" hangingPunct="1">
+                    <a:defRPr kumimoji="1" sz="1800" kern="1200">
+                      <a:solidFill>
+                        <a:schemeClr val="dk1"/>
+                      </a:solidFill>
+                      <a:latin typeface="+mn-lt"/>
+                      <a:ea typeface="+mn-ea"/>
+                      <a:cs typeface="+mn-cs"/>
+                    </a:defRPr>
+                  </a:lvl6pPr>
+                  <a:lvl7pPr marL="2743200" indent="0" algn="l" defTabSz="914400" rtl="0" eaLnBrk="1" latinLnBrk="0" hangingPunct="1">
+                    <a:defRPr kumimoji="1" sz="1800" kern="1200">
+                      <a:solidFill>
+                        <a:schemeClr val="dk1"/>
+                      </a:solidFill>
+                      <a:latin typeface="+mn-lt"/>
+                      <a:ea typeface="+mn-ea"/>
+                      <a:cs typeface="+mn-cs"/>
+                    </a:defRPr>
+                  </a:lvl7pPr>
+                  <a:lvl8pPr marL="3200400" indent="0" algn="l" defTabSz="914400" rtl="0" eaLnBrk="1" latinLnBrk="0" hangingPunct="1">
+                    <a:defRPr kumimoji="1" sz="1800" kern="1200">
+                      <a:solidFill>
+                        <a:schemeClr val="dk1"/>
+                      </a:solidFill>
+                      <a:latin typeface="+mn-lt"/>
+                      <a:ea typeface="+mn-ea"/>
+                      <a:cs typeface="+mn-cs"/>
+                    </a:defRPr>
+                  </a:lvl8pPr>
+                  <a:lvl9pPr marL="3657600" indent="0" algn="l" defTabSz="914400" rtl="0" eaLnBrk="1" latinLnBrk="0" hangingPunct="1">
+                    <a:defRPr kumimoji="1" sz="1800" kern="1200">
+                      <a:solidFill>
+                        <a:schemeClr val="dk1"/>
+                      </a:solidFill>
+                      <a:latin typeface="+mn-lt"/>
+                      <a:ea typeface="+mn-ea"/>
+                      <a:cs typeface="+mn-cs"/>
+                    </a:defRPr>
+                  </a:lvl9pPr>
+                </a:lstStyle>
+                <a:p>
+                  <a:pPr algn="ctr"/>
+                  <a:endParaRPr kumimoji="1" lang="ja-JP" altLang="en-US"/>
+                </a:p>
+              </p:txBody>
+            </p:sp>
+            <p:pic>
+              <p:nvPicPr>
+                <p:cNvPr id="27" name="図 26">
+                  <a:extLst>
+                    <a:ext uri="{FF2B5EF4-FFF2-40B4-BE49-F238E27FC236}">
+                      <a16:creationId xmlns:a16="http://schemas.microsoft.com/office/drawing/2014/main" id="{473DDA88-E27C-4A57-F196-D5472179BFA5}"/>
+                    </a:ext>
+                  </a:extLst>
+                </p:cNvPr>
+                <p:cNvPicPr>
+                  <a:picLocks noChangeAspect="1"/>
+                </p:cNvPicPr>
+                <p:nvPr/>
+              </p:nvPicPr>
+              <p:blipFill rotWithShape="1">
+                <a:blip r:embed="rId2"/>
+                <a:srcRect l="3511" r="6080"/>
+                <a:stretch>
+                  <a:fillRect/>
+                </a:stretch>
+              </p:blipFill>
+              <p:spPr>
+                <a:xfrm>
+                  <a:off x="1360933" y="11894317"/>
+                  <a:ext cx="8602795" cy="6715125"/>
+                </a:xfrm>
+                <a:prstGeom prst="rect">
+                  <a:avLst/>
+                </a:prstGeom>
+              </p:spPr>
+            </p:pic>
+            <p:pic>
+              <p:nvPicPr>
+                <p:cNvPr id="28" name="図 27">
+                  <a:extLst>
+                    <a:ext uri="{FF2B5EF4-FFF2-40B4-BE49-F238E27FC236}">
+                      <a16:creationId xmlns:a16="http://schemas.microsoft.com/office/drawing/2014/main" id="{45AF5E9B-03D6-4AB1-1676-F897EC1E4B66}"/>
+                    </a:ext>
+                  </a:extLst>
+                </p:cNvPr>
+                <p:cNvPicPr>
+                  <a:picLocks noChangeAspect="1"/>
+                </p:cNvPicPr>
+                <p:nvPr/>
+              </p:nvPicPr>
+              <p:blipFill rotWithShape="1">
+                <a:blip r:embed="rId3"/>
+                <a:srcRect l="15627" r="14777" b="5882"/>
+                <a:stretch>
+                  <a:fillRect/>
+                </a:stretch>
+              </p:blipFill>
+              <p:spPr>
+                <a:xfrm>
+                  <a:off x="1284801" y="5890062"/>
+                  <a:ext cx="8869255" cy="6651603"/>
+                </a:xfrm>
+                <a:prstGeom prst="rect">
+                  <a:avLst/>
+                </a:prstGeom>
+              </p:spPr>
+            </p:pic>
+            <p:pic>
+              <p:nvPicPr>
+                <p:cNvPr id="29" name="図 28">
+                  <a:extLst>
+                    <a:ext uri="{FF2B5EF4-FFF2-40B4-BE49-F238E27FC236}">
+                      <a16:creationId xmlns:a16="http://schemas.microsoft.com/office/drawing/2014/main" id="{724E5798-6B4D-8335-294F-FFE337B9910E}"/>
+                    </a:ext>
+                  </a:extLst>
+                </p:cNvPr>
+                <p:cNvPicPr>
+                  <a:picLocks noChangeAspect="1"/>
+                </p:cNvPicPr>
+                <p:nvPr/>
+              </p:nvPicPr>
+              <p:blipFill rotWithShape="1">
+                <a:blip r:embed="rId4"/>
+                <a:srcRect l="9123" r="14411"/>
+                <a:stretch>
+                  <a:fillRect/>
+                </a:stretch>
+              </p:blipFill>
+              <p:spPr>
+                <a:xfrm>
+                  <a:off x="1246735" y="42779"/>
+                  <a:ext cx="8640862" cy="7965543"/>
+                </a:xfrm>
+                <a:prstGeom prst="rect">
+                  <a:avLst/>
+                </a:prstGeom>
+              </p:spPr>
+            </p:pic>
+          </p:grpSp>
+          <p:sp>
+            <p:nvSpPr>
+              <p:cNvPr id="17" name="正方形/長方形 16">
+                <a:extLst>
+                  <a:ext uri="{FF2B5EF4-FFF2-40B4-BE49-F238E27FC236}">
+                    <a16:creationId xmlns:a16="http://schemas.microsoft.com/office/drawing/2014/main" id="{1FF1069A-A88D-ECCA-B2D3-D5E5EA42DE82}"/>
+                  </a:ext>
+                </a:extLst>
+              </p:cNvPr>
+              <p:cNvSpPr/>
+              <p:nvPr/>
+            </p:nvSpPr>
+            <p:spPr>
+              <a:xfrm>
+                <a:off x="1639995" y="2407636"/>
+                <a:ext cx="8272548" cy="3867323"/>
+              </a:xfrm>
+              <a:prstGeom prst="rect">
+                <a:avLst/>
+              </a:prstGeom>
+              <a:noFill/>
+              <a:ln w="28575">
+                <a:solidFill>
+                  <a:srgbClr val="FF0000"/>
+                </a:solidFill>
+                <a:prstDash val="solid"/>
+              </a:ln>
+            </p:spPr>
+            <p:style>
+              <a:lnRef idx="2">
+                <a:schemeClr val="accent6"/>
+              </a:lnRef>
+              <a:fillRef idx="1">
+                <a:schemeClr val="lt1"/>
+              </a:fillRef>
+              <a:effectRef idx="0">
+                <a:schemeClr val="accent6"/>
+              </a:effectRef>
+              <a:fontRef idx="minor">
+                <a:schemeClr val="dk1"/>
+              </a:fontRef>
+            </p:style>
+            <p:txBody>
+              <a:bodyPr rtlCol="0" anchor="t"/>
+              <a:lstStyle>
+                <a:lvl1pPr marL="0" indent="0">
+                  <a:defRPr sz="1100">
+                    <a:solidFill>
+                      <a:schemeClr val="dk1"/>
+                    </a:solidFill>
+                    <a:latin typeface="+mn-lt"/>
+                    <a:ea typeface="+mn-ea"/>
+                    <a:cs typeface="+mn-cs"/>
+                  </a:defRPr>
+                </a:lvl1pPr>
+                <a:lvl2pPr marL="457200" indent="0">
+                  <a:defRPr sz="1100">
+                    <a:solidFill>
+                      <a:schemeClr val="dk1"/>
+                    </a:solidFill>
+                    <a:latin typeface="+mn-lt"/>
+                    <a:ea typeface="+mn-ea"/>
+                    <a:cs typeface="+mn-cs"/>
+                  </a:defRPr>
+                </a:lvl2pPr>
+                <a:lvl3pPr marL="914400" indent="0">
+                  <a:defRPr sz="1100">
+                    <a:solidFill>
+                      <a:schemeClr val="dk1"/>
+                    </a:solidFill>
+                    <a:latin typeface="+mn-lt"/>
+                    <a:ea typeface="+mn-ea"/>
+                    <a:cs typeface="+mn-cs"/>
+                  </a:defRPr>
+                </a:lvl3pPr>
+                <a:lvl4pPr marL="1371600" indent="0">
+                  <a:defRPr sz="1100">
+                    <a:solidFill>
+                      <a:schemeClr val="dk1"/>
+                    </a:solidFill>
+                    <a:latin typeface="+mn-lt"/>
+                    <a:ea typeface="+mn-ea"/>
+                    <a:cs typeface="+mn-cs"/>
+                  </a:defRPr>
+                </a:lvl4pPr>
+                <a:lvl5pPr marL="1828800" indent="0">
+                  <a:defRPr sz="1100">
+                    <a:solidFill>
+                      <a:schemeClr val="dk1"/>
+                    </a:solidFill>
+                    <a:latin typeface="+mn-lt"/>
+                    <a:ea typeface="+mn-ea"/>
+                    <a:cs typeface="+mn-cs"/>
+                  </a:defRPr>
+                </a:lvl5pPr>
+                <a:lvl6pPr marL="2286000" indent="0">
+                  <a:defRPr sz="1100">
+                    <a:solidFill>
+                      <a:schemeClr val="dk1"/>
+                    </a:solidFill>
+                    <a:latin typeface="+mn-lt"/>
+                    <a:ea typeface="+mn-ea"/>
+                    <a:cs typeface="+mn-cs"/>
+                  </a:defRPr>
+                </a:lvl6pPr>
+                <a:lvl7pPr marL="2743200" indent="0">
+                  <a:defRPr sz="1100">
+                    <a:solidFill>
+                      <a:schemeClr val="dk1"/>
+                    </a:solidFill>
+                    <a:latin typeface="+mn-lt"/>
+                    <a:ea typeface="+mn-ea"/>
+                    <a:cs typeface="+mn-cs"/>
+                  </a:defRPr>
+                </a:lvl7pPr>
+                <a:lvl8pPr marL="3200400" indent="0">
+                  <a:defRPr sz="1100">
+                    <a:solidFill>
+                      <a:schemeClr val="dk1"/>
+                    </a:solidFill>
+                    <a:latin typeface="+mn-lt"/>
+                    <a:ea typeface="+mn-ea"/>
+                    <a:cs typeface="+mn-cs"/>
+                  </a:defRPr>
+                </a:lvl8pPr>
+                <a:lvl9pPr marL="3657600" indent="0">
+                  <a:defRPr sz="1100">
+                    <a:solidFill>
+                      <a:schemeClr val="dk1"/>
+                    </a:solidFill>
+                    <a:latin typeface="+mn-lt"/>
+                    <a:ea typeface="+mn-ea"/>
+                    <a:cs typeface="+mn-cs"/>
+                  </a:defRPr>
+                </a:lvl9pPr>
+              </a:lstStyle>
+              <a:p>
+                <a:pPr algn="l"/>
+                <a:endParaRPr kumimoji="1" lang="ja-JP" altLang="en-US" sz="1100"/>
+              </a:p>
+            </p:txBody>
+          </p:sp>
+          <p:sp>
+            <p:nvSpPr>
+              <p:cNvPr id="18" name="正方形/長方形 17">
+                <a:extLst>
+                  <a:ext uri="{FF2B5EF4-FFF2-40B4-BE49-F238E27FC236}">
+                    <a16:creationId xmlns:a16="http://schemas.microsoft.com/office/drawing/2014/main" id="{E0E6D1CA-FE3F-BD19-107E-ECC42C57A33E}"/>
+                  </a:ext>
+                </a:extLst>
+              </p:cNvPr>
+              <p:cNvSpPr/>
+              <p:nvPr/>
+            </p:nvSpPr>
+            <p:spPr>
+              <a:xfrm>
+                <a:off x="1647615" y="6431862"/>
+                <a:ext cx="8259213" cy="5818043"/>
+              </a:xfrm>
+              <a:prstGeom prst="rect">
+                <a:avLst/>
+              </a:prstGeom>
+              <a:noFill/>
+              <a:ln w="28575">
+                <a:solidFill>
+                  <a:srgbClr val="FF0000"/>
+                </a:solidFill>
+                <a:prstDash val="solid"/>
+              </a:ln>
+            </p:spPr>
+            <p:style>
+              <a:lnRef idx="2">
+                <a:schemeClr val="accent6"/>
+              </a:lnRef>
+              <a:fillRef idx="1">
+                <a:schemeClr val="lt1"/>
+              </a:fillRef>
+              <a:effectRef idx="0">
+                <a:schemeClr val="accent6"/>
+              </a:effectRef>
+              <a:fontRef idx="minor">
+                <a:schemeClr val="dk1"/>
+              </a:fontRef>
+            </p:style>
+            <p:txBody>
+              <a:bodyPr rtlCol="0" anchor="t"/>
+              <a:lstStyle>
+                <a:lvl1pPr marL="0" indent="0">
+                  <a:defRPr sz="1100">
+                    <a:solidFill>
+                      <a:schemeClr val="dk1"/>
+                    </a:solidFill>
+                    <a:latin typeface="+mn-lt"/>
+                    <a:ea typeface="+mn-ea"/>
+                    <a:cs typeface="+mn-cs"/>
+                  </a:defRPr>
+                </a:lvl1pPr>
+                <a:lvl2pPr marL="457200" indent="0">
+                  <a:defRPr sz="1100">
+                    <a:solidFill>
+                      <a:schemeClr val="dk1"/>
+                    </a:solidFill>
+                    <a:latin typeface="+mn-lt"/>
+                    <a:ea typeface="+mn-ea"/>
+                    <a:cs typeface="+mn-cs"/>
+                  </a:defRPr>
+                </a:lvl2pPr>
+                <a:lvl3pPr marL="914400" indent="0">
+                  <a:defRPr sz="1100">
+                    <a:solidFill>
+                      <a:schemeClr val="dk1"/>
+                    </a:solidFill>
+                    <a:latin typeface="+mn-lt"/>
+                    <a:ea typeface="+mn-ea"/>
+                    <a:cs typeface="+mn-cs"/>
+                  </a:defRPr>
+                </a:lvl3pPr>
+                <a:lvl4pPr marL="1371600" indent="0">
+                  <a:defRPr sz="1100">
+                    <a:solidFill>
+                      <a:schemeClr val="dk1"/>
+                    </a:solidFill>
+                    <a:latin typeface="+mn-lt"/>
+                    <a:ea typeface="+mn-ea"/>
+                    <a:cs typeface="+mn-cs"/>
+                  </a:defRPr>
+                </a:lvl4pPr>
+                <a:lvl5pPr marL="1828800" indent="0">
+                  <a:defRPr sz="1100">
+                    <a:solidFill>
+                      <a:schemeClr val="dk1"/>
+                    </a:solidFill>
+                    <a:latin typeface="+mn-lt"/>
+                    <a:ea typeface="+mn-ea"/>
+                    <a:cs typeface="+mn-cs"/>
+                  </a:defRPr>
+                </a:lvl5pPr>
+                <a:lvl6pPr marL="2286000" indent="0">
+                  <a:defRPr sz="1100">
+                    <a:solidFill>
+                      <a:schemeClr val="dk1"/>
+                    </a:solidFill>
+                    <a:latin typeface="+mn-lt"/>
+                    <a:ea typeface="+mn-ea"/>
+                    <a:cs typeface="+mn-cs"/>
+                  </a:defRPr>
+                </a:lvl6pPr>
+                <a:lvl7pPr marL="2743200" indent="0">
+                  <a:defRPr sz="1100">
+                    <a:solidFill>
+                      <a:schemeClr val="dk1"/>
+                    </a:solidFill>
+                    <a:latin typeface="+mn-lt"/>
+                    <a:ea typeface="+mn-ea"/>
+                    <a:cs typeface="+mn-cs"/>
+                  </a:defRPr>
+                </a:lvl7pPr>
+                <a:lvl8pPr marL="3200400" indent="0">
+                  <a:defRPr sz="1100">
+                    <a:solidFill>
+                      <a:schemeClr val="dk1"/>
+                    </a:solidFill>
+                    <a:latin typeface="+mn-lt"/>
+                    <a:ea typeface="+mn-ea"/>
+                    <a:cs typeface="+mn-cs"/>
+                  </a:defRPr>
+                </a:lvl8pPr>
+                <a:lvl9pPr marL="3657600" indent="0">
+                  <a:defRPr sz="1100">
+                    <a:solidFill>
+                      <a:schemeClr val="dk1"/>
+                    </a:solidFill>
+                    <a:latin typeface="+mn-lt"/>
+                    <a:ea typeface="+mn-ea"/>
+                    <a:cs typeface="+mn-cs"/>
+                  </a:defRPr>
+                </a:lvl9pPr>
+              </a:lstStyle>
+              <a:p>
+                <a:pPr algn="l"/>
+                <a:endParaRPr kumimoji="1" lang="ja-JP" altLang="en-US" sz="1100"/>
+              </a:p>
+            </p:txBody>
+          </p:sp>
+          <p:sp>
+            <p:nvSpPr>
+              <p:cNvPr id="19" name="正方形/長方形 18">
+                <a:extLst>
+                  <a:ext uri="{FF2B5EF4-FFF2-40B4-BE49-F238E27FC236}">
+                    <a16:creationId xmlns:a16="http://schemas.microsoft.com/office/drawing/2014/main" id="{5A06FF8C-BBF1-A37D-99A5-8EC634E1711A}"/>
+                  </a:ext>
+                </a:extLst>
+              </p:cNvPr>
+              <p:cNvSpPr/>
+              <p:nvPr/>
+            </p:nvSpPr>
+            <p:spPr>
+              <a:xfrm>
+                <a:off x="1651425" y="12552974"/>
+                <a:ext cx="8253498" cy="6139468"/>
+              </a:xfrm>
+              <a:prstGeom prst="rect">
+                <a:avLst/>
+              </a:prstGeom>
+              <a:noFill/>
+              <a:ln w="28575">
+                <a:solidFill>
+                  <a:srgbClr val="FF0000"/>
+                </a:solidFill>
+                <a:prstDash val="solid"/>
+              </a:ln>
+            </p:spPr>
+            <p:style>
+              <a:lnRef idx="2">
+                <a:schemeClr val="accent6"/>
+              </a:lnRef>
+              <a:fillRef idx="1">
+                <a:schemeClr val="lt1"/>
+              </a:fillRef>
+              <a:effectRef idx="0">
+                <a:schemeClr val="accent6"/>
+              </a:effectRef>
+              <a:fontRef idx="minor">
+                <a:schemeClr val="dk1"/>
+              </a:fontRef>
+            </p:style>
+            <p:txBody>
+              <a:bodyPr rtlCol="0" anchor="t"/>
+              <a:lstStyle>
+                <a:lvl1pPr marL="0" indent="0">
+                  <a:defRPr sz="1100">
+                    <a:solidFill>
+                      <a:schemeClr val="dk1"/>
+                    </a:solidFill>
+                    <a:latin typeface="+mn-lt"/>
+                    <a:ea typeface="+mn-ea"/>
+                    <a:cs typeface="+mn-cs"/>
+                  </a:defRPr>
+                </a:lvl1pPr>
+                <a:lvl2pPr marL="457200" indent="0">
+                  <a:defRPr sz="1100">
+                    <a:solidFill>
+                      <a:schemeClr val="dk1"/>
+                    </a:solidFill>
+                    <a:latin typeface="+mn-lt"/>
+                    <a:ea typeface="+mn-ea"/>
+                    <a:cs typeface="+mn-cs"/>
+                  </a:defRPr>
+                </a:lvl2pPr>
+                <a:lvl3pPr marL="914400" indent="0">
+                  <a:defRPr sz="1100">
+                    <a:solidFill>
+                      <a:schemeClr val="dk1"/>
+                    </a:solidFill>
+                    <a:latin typeface="+mn-lt"/>
+                    <a:ea typeface="+mn-ea"/>
+                    <a:cs typeface="+mn-cs"/>
+                  </a:defRPr>
+                </a:lvl3pPr>
+                <a:lvl4pPr marL="1371600" indent="0">
+                  <a:defRPr sz="1100">
+                    <a:solidFill>
+                      <a:schemeClr val="dk1"/>
+                    </a:solidFill>
+                    <a:latin typeface="+mn-lt"/>
+                    <a:ea typeface="+mn-ea"/>
+                    <a:cs typeface="+mn-cs"/>
+                  </a:defRPr>
+                </a:lvl4pPr>
+                <a:lvl5pPr marL="1828800" indent="0">
+                  <a:defRPr sz="1100">
+                    <a:solidFill>
+                      <a:schemeClr val="dk1"/>
+                    </a:solidFill>
+                    <a:latin typeface="+mn-lt"/>
+                    <a:ea typeface="+mn-ea"/>
+                    <a:cs typeface="+mn-cs"/>
+                  </a:defRPr>
+                </a:lvl5pPr>
+                <a:lvl6pPr marL="2286000" indent="0">
+                  <a:defRPr sz="1100">
+                    <a:solidFill>
+                      <a:schemeClr val="dk1"/>
+                    </a:solidFill>
+                    <a:latin typeface="+mn-lt"/>
+                    <a:ea typeface="+mn-ea"/>
+                    <a:cs typeface="+mn-cs"/>
+                  </a:defRPr>
+                </a:lvl6pPr>
+                <a:lvl7pPr marL="2743200" indent="0">
+                  <a:defRPr sz="1100">
+                    <a:solidFill>
+                      <a:schemeClr val="dk1"/>
+                    </a:solidFill>
+                    <a:latin typeface="+mn-lt"/>
+                    <a:ea typeface="+mn-ea"/>
+                    <a:cs typeface="+mn-cs"/>
+                  </a:defRPr>
+                </a:lvl7pPr>
+                <a:lvl8pPr marL="3200400" indent="0">
+                  <a:defRPr sz="1100">
+                    <a:solidFill>
+                      <a:schemeClr val="dk1"/>
+                    </a:solidFill>
+                    <a:latin typeface="+mn-lt"/>
+                    <a:ea typeface="+mn-ea"/>
+                    <a:cs typeface="+mn-cs"/>
+                  </a:defRPr>
+                </a:lvl8pPr>
+                <a:lvl9pPr marL="3657600" indent="0">
+                  <a:defRPr sz="1100">
+                    <a:solidFill>
+                      <a:schemeClr val="dk1"/>
+                    </a:solidFill>
+                    <a:latin typeface="+mn-lt"/>
+                    <a:ea typeface="+mn-ea"/>
+                    <a:cs typeface="+mn-cs"/>
+                  </a:defRPr>
+                </a:lvl9pPr>
+              </a:lstStyle>
+              <a:p>
+                <a:pPr algn="l"/>
+                <a:endParaRPr kumimoji="1" lang="ja-JP" altLang="en-US" sz="1100"/>
+              </a:p>
+            </p:txBody>
+          </p:sp>
+          <p:sp>
+            <p:nvSpPr>
+              <p:cNvPr id="20" name="正方形/長方形 19">
+                <a:extLst>
+                  <a:ext uri="{FF2B5EF4-FFF2-40B4-BE49-F238E27FC236}">
+                    <a16:creationId xmlns:a16="http://schemas.microsoft.com/office/drawing/2014/main" id="{E68340B4-6D24-E1D2-B115-6F171BA29353}"/>
+                  </a:ext>
+                </a:extLst>
+              </p:cNvPr>
+              <p:cNvSpPr/>
+              <p:nvPr/>
+            </p:nvSpPr>
+            <p:spPr>
+              <a:xfrm>
+                <a:off x="10191493" y="3783566"/>
+                <a:ext cx="1170410" cy="714548"/>
+              </a:xfrm>
+              <a:prstGeom prst="rect">
+                <a:avLst/>
+              </a:prstGeom>
+              <a:ln w="28575">
+                <a:solidFill>
+                  <a:srgbClr val="FF0000"/>
+                </a:solidFill>
+              </a:ln>
+            </p:spPr>
+            <p:style>
+              <a:lnRef idx="2">
+                <a:schemeClr val="accent6"/>
+              </a:lnRef>
+              <a:fillRef idx="1">
+                <a:schemeClr val="lt1"/>
+              </a:fillRef>
+              <a:effectRef idx="0">
+                <a:schemeClr val="accent6"/>
+              </a:effectRef>
+              <a:fontRef idx="minor">
+                <a:schemeClr val="dk1"/>
+              </a:fontRef>
+            </p:style>
+            <p:txBody>
+              <a:bodyPr rtlCol="0" anchor="ctr"/>
+              <a:lstStyle>
+                <a:lvl1pPr marL="0" indent="0">
+                  <a:defRPr sz="1100">
+                    <a:solidFill>
+                      <a:schemeClr val="dk1"/>
+                    </a:solidFill>
+                    <a:latin typeface="+mn-lt"/>
+                    <a:ea typeface="+mn-ea"/>
+                    <a:cs typeface="+mn-cs"/>
+                  </a:defRPr>
+                </a:lvl1pPr>
+                <a:lvl2pPr marL="457200" indent="0">
+                  <a:defRPr sz="1100">
+                    <a:solidFill>
+                      <a:schemeClr val="dk1"/>
+                    </a:solidFill>
+                    <a:latin typeface="+mn-lt"/>
+                    <a:ea typeface="+mn-ea"/>
+                    <a:cs typeface="+mn-cs"/>
+                  </a:defRPr>
+                </a:lvl2pPr>
+                <a:lvl3pPr marL="914400" indent="0">
+                  <a:defRPr sz="1100">
+                    <a:solidFill>
+                      <a:schemeClr val="dk1"/>
+                    </a:solidFill>
+                    <a:latin typeface="+mn-lt"/>
+                    <a:ea typeface="+mn-ea"/>
+                    <a:cs typeface="+mn-cs"/>
+                  </a:defRPr>
+                </a:lvl3pPr>
+                <a:lvl4pPr marL="1371600" indent="0">
+                  <a:defRPr sz="1100">
+                    <a:solidFill>
+                      <a:schemeClr val="dk1"/>
+                    </a:solidFill>
+                    <a:latin typeface="+mn-lt"/>
+                    <a:ea typeface="+mn-ea"/>
+                    <a:cs typeface="+mn-cs"/>
+                  </a:defRPr>
+                </a:lvl4pPr>
+                <a:lvl5pPr marL="1828800" indent="0">
+                  <a:defRPr sz="1100">
+                    <a:solidFill>
+                      <a:schemeClr val="dk1"/>
+                    </a:solidFill>
+                    <a:latin typeface="+mn-lt"/>
+                    <a:ea typeface="+mn-ea"/>
+                    <a:cs typeface="+mn-cs"/>
+                  </a:defRPr>
+                </a:lvl5pPr>
+                <a:lvl6pPr marL="2286000" indent="0">
+                  <a:defRPr sz="1100">
+                    <a:solidFill>
+                      <a:schemeClr val="dk1"/>
+                    </a:solidFill>
+                    <a:latin typeface="+mn-lt"/>
+                    <a:ea typeface="+mn-ea"/>
+                    <a:cs typeface="+mn-cs"/>
+                  </a:defRPr>
+                </a:lvl6pPr>
+                <a:lvl7pPr marL="2743200" indent="0">
+                  <a:defRPr sz="1100">
+                    <a:solidFill>
+                      <a:schemeClr val="dk1"/>
+                    </a:solidFill>
+                    <a:latin typeface="+mn-lt"/>
+                    <a:ea typeface="+mn-ea"/>
+                    <a:cs typeface="+mn-cs"/>
+                  </a:defRPr>
+                </a:lvl7pPr>
+                <a:lvl8pPr marL="3200400" indent="0">
+                  <a:defRPr sz="1100">
+                    <a:solidFill>
+                      <a:schemeClr val="dk1"/>
+                    </a:solidFill>
+                    <a:latin typeface="+mn-lt"/>
+                    <a:ea typeface="+mn-ea"/>
+                    <a:cs typeface="+mn-cs"/>
+                  </a:defRPr>
+                </a:lvl8pPr>
+                <a:lvl9pPr marL="3657600" indent="0">
+                  <a:defRPr sz="1100">
+                    <a:solidFill>
+                      <a:schemeClr val="dk1"/>
+                    </a:solidFill>
+                    <a:latin typeface="+mn-lt"/>
+                    <a:ea typeface="+mn-ea"/>
+                    <a:cs typeface="+mn-cs"/>
+                  </a:defRPr>
+                </a:lvl9pPr>
+              </a:lstStyle>
+              <a:p>
+                <a:pPr algn="l"/>
+                <a:r>
+                  <a:rPr kumimoji="1" lang="ja-JP" altLang="en-US" sz="1200" b="1">
+                    <a:solidFill>
+                      <a:srgbClr val="FF0000"/>
+                    </a:solidFill>
+                  </a:rPr>
+                  <a:t>④エネミー</a:t>
+                </a:r>
+                <a:endParaRPr kumimoji="1" lang="en-US" altLang="ja-JP" sz="1200" b="1">
+                  <a:solidFill>
+                    <a:srgbClr val="FF0000"/>
+                  </a:solidFill>
+                </a:endParaRPr>
+              </a:p>
+              <a:p>
+                <a:pPr algn="l"/>
+                <a:r>
+                  <a:rPr kumimoji="1" lang="ja-JP" altLang="en-US" sz="1200" b="1">
+                    <a:solidFill>
+                      <a:srgbClr val="FF0000"/>
+                    </a:solidFill>
+                  </a:rPr>
+                  <a:t>　情報入力欄</a:t>
+                </a:r>
+              </a:p>
+            </p:txBody>
+          </p:sp>
+          <p:cxnSp>
+            <p:nvCxnSpPr>
+              <p:cNvPr id="21" name="直線矢印コネクタ 20">
+                <a:extLst>
+                  <a:ext uri="{FF2B5EF4-FFF2-40B4-BE49-F238E27FC236}">
+                    <a16:creationId xmlns:a16="http://schemas.microsoft.com/office/drawing/2014/main" id="{02CDDD4D-0B14-0752-6CA5-ED2B32D28DB7}"/>
+                  </a:ext>
+                </a:extLst>
+              </p:cNvPr>
+              <p:cNvCxnSpPr>
+                <a:stCxn id="20" idx="1"/>
+                <a:endCxn id="17" idx="3"/>
+              </p:cNvCxnSpPr>
+              <p:nvPr/>
+            </p:nvCxnSpPr>
+            <p:spPr>
+              <a:xfrm flipH="1">
+                <a:off x="9910638" y="4146901"/>
+                <a:ext cx="278950" cy="198207"/>
+              </a:xfrm>
+              <a:prstGeom prst="straightConnector1">
+                <a:avLst/>
+              </a:prstGeom>
+              <a:ln w="28575">
+                <a:solidFill>
+                  <a:srgbClr val="FF0000"/>
+                </a:solidFill>
+                <a:tailEnd type="triangle"/>
+              </a:ln>
+            </p:spPr>
+            <p:style>
+              <a:lnRef idx="2">
+                <a:schemeClr val="accent1"/>
+              </a:lnRef>
+              <a:fillRef idx="0">
+                <a:schemeClr val="accent1"/>
+              </a:fillRef>
+              <a:effectRef idx="1">
+                <a:schemeClr val="accent1"/>
+              </a:effectRef>
+              <a:fontRef idx="minor">
+                <a:schemeClr val="tx1"/>
+              </a:fontRef>
+            </p:style>
+          </p:cxnSp>
+          <p:sp>
+            <p:nvSpPr>
+              <p:cNvPr id="22" name="正方形/長方形 21">
+                <a:extLst>
+                  <a:ext uri="{FF2B5EF4-FFF2-40B4-BE49-F238E27FC236}">
+                    <a16:creationId xmlns:a16="http://schemas.microsoft.com/office/drawing/2014/main" id="{A1F70571-B6B2-13D4-D227-24B29505C168}"/>
+                  </a:ext>
+                </a:extLst>
+              </p:cNvPr>
+              <p:cNvSpPr/>
+              <p:nvPr/>
+            </p:nvSpPr>
+            <p:spPr>
+              <a:xfrm>
+                <a:off x="10179543" y="8754923"/>
+                <a:ext cx="1129367" cy="700000"/>
+              </a:xfrm>
+              <a:prstGeom prst="rect">
+                <a:avLst/>
+              </a:prstGeom>
+              <a:ln w="28575">
+                <a:solidFill>
+                  <a:srgbClr val="FF0000"/>
+                </a:solidFill>
+              </a:ln>
+            </p:spPr>
+            <p:style>
+              <a:lnRef idx="2">
+                <a:schemeClr val="accent6"/>
+              </a:lnRef>
+              <a:fillRef idx="1">
+                <a:schemeClr val="lt1"/>
+              </a:fillRef>
+              <a:effectRef idx="0">
+                <a:schemeClr val="accent6"/>
+              </a:effectRef>
+              <a:fontRef idx="minor">
+                <a:schemeClr val="dk1"/>
+              </a:fontRef>
+            </p:style>
+            <p:txBody>
+              <a:bodyPr rtlCol="0" anchor="ctr"/>
+              <a:lstStyle>
+                <a:lvl1pPr marL="0" indent="0">
+                  <a:defRPr sz="1100">
+                    <a:solidFill>
+                      <a:schemeClr val="dk1"/>
+                    </a:solidFill>
+                    <a:latin typeface="+mn-lt"/>
+                    <a:ea typeface="+mn-ea"/>
+                    <a:cs typeface="+mn-cs"/>
+                  </a:defRPr>
+                </a:lvl1pPr>
+                <a:lvl2pPr marL="457200" indent="0">
+                  <a:defRPr sz="1100">
+                    <a:solidFill>
+                      <a:schemeClr val="dk1"/>
+                    </a:solidFill>
+                    <a:latin typeface="+mn-lt"/>
+                    <a:ea typeface="+mn-ea"/>
+                    <a:cs typeface="+mn-cs"/>
+                  </a:defRPr>
+                </a:lvl2pPr>
+                <a:lvl3pPr marL="914400" indent="0">
+                  <a:defRPr sz="1100">
+                    <a:solidFill>
+                      <a:schemeClr val="dk1"/>
+                    </a:solidFill>
+                    <a:latin typeface="+mn-lt"/>
+                    <a:ea typeface="+mn-ea"/>
+                    <a:cs typeface="+mn-cs"/>
+                  </a:defRPr>
+                </a:lvl3pPr>
+                <a:lvl4pPr marL="1371600" indent="0">
+                  <a:defRPr sz="1100">
+                    <a:solidFill>
+                      <a:schemeClr val="dk1"/>
+                    </a:solidFill>
+                    <a:latin typeface="+mn-lt"/>
+                    <a:ea typeface="+mn-ea"/>
+                    <a:cs typeface="+mn-cs"/>
+                  </a:defRPr>
+                </a:lvl4pPr>
+                <a:lvl5pPr marL="1828800" indent="0">
+                  <a:defRPr sz="1100">
+                    <a:solidFill>
+                      <a:schemeClr val="dk1"/>
+                    </a:solidFill>
+                    <a:latin typeface="+mn-lt"/>
+                    <a:ea typeface="+mn-ea"/>
+                    <a:cs typeface="+mn-cs"/>
+                  </a:defRPr>
+                </a:lvl5pPr>
+                <a:lvl6pPr marL="2286000" indent="0">
+                  <a:defRPr sz="1100">
+                    <a:solidFill>
+                      <a:schemeClr val="dk1"/>
+                    </a:solidFill>
+                    <a:latin typeface="+mn-lt"/>
+                    <a:ea typeface="+mn-ea"/>
+                    <a:cs typeface="+mn-cs"/>
+                  </a:defRPr>
+                </a:lvl6pPr>
+                <a:lvl7pPr marL="2743200" indent="0">
+                  <a:defRPr sz="1100">
+                    <a:solidFill>
+                      <a:schemeClr val="dk1"/>
+                    </a:solidFill>
+                    <a:latin typeface="+mn-lt"/>
+                    <a:ea typeface="+mn-ea"/>
+                    <a:cs typeface="+mn-cs"/>
+                  </a:defRPr>
+                </a:lvl7pPr>
+                <a:lvl8pPr marL="3200400" indent="0">
+                  <a:defRPr sz="1100">
+                    <a:solidFill>
+                      <a:schemeClr val="dk1"/>
+                    </a:solidFill>
+                    <a:latin typeface="+mn-lt"/>
+                    <a:ea typeface="+mn-ea"/>
+                    <a:cs typeface="+mn-cs"/>
+                  </a:defRPr>
+                </a:lvl8pPr>
+                <a:lvl9pPr marL="3657600" indent="0">
+                  <a:defRPr sz="1100">
+                    <a:solidFill>
+                      <a:schemeClr val="dk1"/>
+                    </a:solidFill>
+                    <a:latin typeface="+mn-lt"/>
+                    <a:ea typeface="+mn-ea"/>
+                    <a:cs typeface="+mn-cs"/>
+                  </a:defRPr>
+                </a:lvl9pPr>
+              </a:lstStyle>
+              <a:p>
+                <a:pPr algn="l"/>
+                <a:r>
+                  <a:rPr kumimoji="1" lang="ja-JP" altLang="en-US" sz="1200" b="1">
+                    <a:solidFill>
+                      <a:srgbClr val="FF0000"/>
+                    </a:solidFill>
+                  </a:rPr>
+                  <a:t>⑤ドロップ</a:t>
+                </a:r>
+                <a:endParaRPr kumimoji="1" lang="en-US" altLang="ja-JP" sz="1200" b="1">
+                  <a:solidFill>
+                    <a:srgbClr val="FF0000"/>
+                  </a:solidFill>
+                </a:endParaRPr>
+              </a:p>
+              <a:p>
+                <a:pPr algn="l"/>
+                <a:r>
+                  <a:rPr kumimoji="1" lang="ja-JP" altLang="en-US" sz="1200" b="1">
+                    <a:solidFill>
+                      <a:srgbClr val="FF0000"/>
+                    </a:solidFill>
+                  </a:rPr>
+                  <a:t>　入力欄</a:t>
+                </a:r>
+              </a:p>
+            </p:txBody>
+          </p:sp>
+          <p:cxnSp>
+            <p:nvCxnSpPr>
+              <p:cNvPr id="23" name="直線矢印コネクタ 22">
+                <a:extLst>
+                  <a:ext uri="{FF2B5EF4-FFF2-40B4-BE49-F238E27FC236}">
+                    <a16:creationId xmlns:a16="http://schemas.microsoft.com/office/drawing/2014/main" id="{50B8946C-E226-2A43-27FE-92A7329BAA3A}"/>
+                  </a:ext>
+                </a:extLst>
+              </p:cNvPr>
+              <p:cNvCxnSpPr>
+                <a:stCxn id="22" idx="1"/>
+                <a:endCxn id="18" idx="3"/>
+              </p:cNvCxnSpPr>
+              <p:nvPr/>
+            </p:nvCxnSpPr>
+            <p:spPr>
+              <a:xfrm flipH="1">
+                <a:off x="9904923" y="9103625"/>
+                <a:ext cx="274620" cy="239164"/>
+              </a:xfrm>
+              <a:prstGeom prst="straightConnector1">
+                <a:avLst/>
+              </a:prstGeom>
+              <a:ln w="28575">
+                <a:solidFill>
+                  <a:srgbClr val="FF0000"/>
+                </a:solidFill>
+                <a:tailEnd type="triangle"/>
+              </a:ln>
+            </p:spPr>
+            <p:style>
+              <a:lnRef idx="2">
+                <a:schemeClr val="accent1"/>
+              </a:lnRef>
+              <a:fillRef idx="0">
+                <a:schemeClr val="accent1"/>
+              </a:fillRef>
+              <a:effectRef idx="1">
+                <a:schemeClr val="accent1"/>
+              </a:effectRef>
+              <a:fontRef idx="minor">
+                <a:schemeClr val="tx1"/>
+              </a:fontRef>
+            </p:style>
+          </p:cxnSp>
+          <p:sp>
+            <p:nvSpPr>
+              <p:cNvPr id="24" name="正方形/長方形 23">
+                <a:extLst>
+                  <a:ext uri="{FF2B5EF4-FFF2-40B4-BE49-F238E27FC236}">
+                    <a16:creationId xmlns:a16="http://schemas.microsoft.com/office/drawing/2014/main" id="{32848968-827C-725D-E743-131CBFBB5A52}"/>
+                  </a:ext>
+                </a:extLst>
+              </p:cNvPr>
+              <p:cNvSpPr/>
+              <p:nvPr/>
+            </p:nvSpPr>
+            <p:spPr>
+              <a:xfrm>
+                <a:off x="10179542" y="14961760"/>
+                <a:ext cx="1135083" cy="834908"/>
+              </a:xfrm>
+              <a:prstGeom prst="rect">
+                <a:avLst/>
+              </a:prstGeom>
+              <a:ln w="28575">
+                <a:solidFill>
+                  <a:srgbClr val="FF0000"/>
+                </a:solidFill>
+              </a:ln>
+            </p:spPr>
+            <p:style>
+              <a:lnRef idx="2">
+                <a:schemeClr val="accent6"/>
+              </a:lnRef>
+              <a:fillRef idx="1">
+                <a:schemeClr val="lt1"/>
+              </a:fillRef>
+              <a:effectRef idx="0">
+                <a:schemeClr val="accent6"/>
+              </a:effectRef>
+              <a:fontRef idx="minor">
+                <a:schemeClr val="dk1"/>
+              </a:fontRef>
+            </p:style>
+            <p:txBody>
+              <a:bodyPr rtlCol="0" anchor="ctr"/>
+              <a:lstStyle>
+                <a:lvl1pPr marL="0" indent="0">
+                  <a:defRPr sz="1100">
+                    <a:solidFill>
+                      <a:schemeClr val="dk1"/>
+                    </a:solidFill>
+                    <a:latin typeface="+mn-lt"/>
+                    <a:ea typeface="+mn-ea"/>
+                    <a:cs typeface="+mn-cs"/>
+                  </a:defRPr>
+                </a:lvl1pPr>
+                <a:lvl2pPr marL="457200" indent="0">
+                  <a:defRPr sz="1100">
+                    <a:solidFill>
+                      <a:schemeClr val="dk1"/>
+                    </a:solidFill>
+                    <a:latin typeface="+mn-lt"/>
+                    <a:ea typeface="+mn-ea"/>
+                    <a:cs typeface="+mn-cs"/>
+                  </a:defRPr>
+                </a:lvl2pPr>
+                <a:lvl3pPr marL="914400" indent="0">
+                  <a:defRPr sz="1100">
+                    <a:solidFill>
+                      <a:schemeClr val="dk1"/>
+                    </a:solidFill>
+                    <a:latin typeface="+mn-lt"/>
+                    <a:ea typeface="+mn-ea"/>
+                    <a:cs typeface="+mn-cs"/>
+                  </a:defRPr>
+                </a:lvl3pPr>
+                <a:lvl4pPr marL="1371600" indent="0">
+                  <a:defRPr sz="1100">
+                    <a:solidFill>
+                      <a:schemeClr val="dk1"/>
+                    </a:solidFill>
+                    <a:latin typeface="+mn-lt"/>
+                    <a:ea typeface="+mn-ea"/>
+                    <a:cs typeface="+mn-cs"/>
+                  </a:defRPr>
+                </a:lvl4pPr>
+                <a:lvl5pPr marL="1828800" indent="0">
+                  <a:defRPr sz="1100">
+                    <a:solidFill>
+                      <a:schemeClr val="dk1"/>
+                    </a:solidFill>
+                    <a:latin typeface="+mn-lt"/>
+                    <a:ea typeface="+mn-ea"/>
+                    <a:cs typeface="+mn-cs"/>
+                  </a:defRPr>
+                </a:lvl5pPr>
+                <a:lvl6pPr marL="2286000" indent="0">
+                  <a:defRPr sz="1100">
+                    <a:solidFill>
+                      <a:schemeClr val="dk1"/>
+                    </a:solidFill>
+                    <a:latin typeface="+mn-lt"/>
+                    <a:ea typeface="+mn-ea"/>
+                    <a:cs typeface="+mn-cs"/>
+                  </a:defRPr>
+                </a:lvl6pPr>
+                <a:lvl7pPr marL="2743200" indent="0">
+                  <a:defRPr sz="1100">
+                    <a:solidFill>
+                      <a:schemeClr val="dk1"/>
+                    </a:solidFill>
+                    <a:latin typeface="+mn-lt"/>
+                    <a:ea typeface="+mn-ea"/>
+                    <a:cs typeface="+mn-cs"/>
+                  </a:defRPr>
+                </a:lvl7pPr>
+                <a:lvl8pPr marL="3200400" indent="0">
+                  <a:defRPr sz="1100">
+                    <a:solidFill>
+                      <a:schemeClr val="dk1"/>
+                    </a:solidFill>
+                    <a:latin typeface="+mn-lt"/>
+                    <a:ea typeface="+mn-ea"/>
+                    <a:cs typeface="+mn-cs"/>
+                  </a:defRPr>
+                </a:lvl8pPr>
+                <a:lvl9pPr marL="3657600" indent="0">
+                  <a:defRPr sz="1100">
+                    <a:solidFill>
+                      <a:schemeClr val="dk1"/>
+                    </a:solidFill>
+                    <a:latin typeface="+mn-lt"/>
+                    <a:ea typeface="+mn-ea"/>
+                    <a:cs typeface="+mn-cs"/>
+                  </a:defRPr>
+                </a:lvl9pPr>
+              </a:lstStyle>
+              <a:p>
+                <a:pPr algn="l"/>
+                <a:r>
+                  <a:rPr kumimoji="1" lang="ja-JP" altLang="en-US" sz="1200" b="1">
+                    <a:solidFill>
+                      <a:srgbClr val="FF0000"/>
+                    </a:solidFill>
+                  </a:rPr>
+                  <a:t>⑥エネミー</a:t>
+                </a:r>
+                <a:endParaRPr kumimoji="1" lang="en-US" altLang="ja-JP" sz="1200" b="1">
+                  <a:solidFill>
+                    <a:srgbClr val="FF0000"/>
+                  </a:solidFill>
+                </a:endParaRPr>
+              </a:p>
+              <a:p>
+                <a:pPr algn="l"/>
+                <a:r>
+                  <a:rPr kumimoji="1" lang="ja-JP" altLang="en-US" sz="1200" b="1">
+                    <a:solidFill>
+                      <a:srgbClr val="FF0000"/>
+                    </a:solidFill>
+                  </a:rPr>
+                  <a:t>　能力値欄</a:t>
+                </a:r>
+              </a:p>
+            </p:txBody>
+          </p:sp>
+          <p:cxnSp>
+            <p:nvCxnSpPr>
+              <p:cNvPr id="25" name="直線矢印コネクタ 24">
+                <a:extLst>
+                  <a:ext uri="{FF2B5EF4-FFF2-40B4-BE49-F238E27FC236}">
+                    <a16:creationId xmlns:a16="http://schemas.microsoft.com/office/drawing/2014/main" id="{C83085F6-8CDA-B12B-DEC4-FF49022A0FDF}"/>
+                  </a:ext>
+                </a:extLst>
+              </p:cNvPr>
+              <p:cNvCxnSpPr>
+                <a:stCxn id="24" idx="1"/>
+                <a:endCxn id="19" idx="3"/>
+              </p:cNvCxnSpPr>
+              <p:nvPr/>
+            </p:nvCxnSpPr>
+            <p:spPr>
+              <a:xfrm flipH="1">
+                <a:off x="9904923" y="15378262"/>
+                <a:ext cx="274619" cy="246697"/>
+              </a:xfrm>
+              <a:prstGeom prst="straightConnector1">
+                <a:avLst/>
+              </a:prstGeom>
+              <a:ln w="28575">
+                <a:solidFill>
+                  <a:srgbClr val="FF0000"/>
+                </a:solidFill>
+                <a:tailEnd type="triangle"/>
+              </a:ln>
+            </p:spPr>
+            <p:style>
+              <a:lnRef idx="2">
+                <a:schemeClr val="accent1"/>
+              </a:lnRef>
+              <a:fillRef idx="0">
+                <a:schemeClr val="accent1"/>
+              </a:fillRef>
+              <a:effectRef idx="1">
+                <a:schemeClr val="accent1"/>
+              </a:effectRef>
+              <a:fontRef idx="minor">
+                <a:schemeClr val="tx1"/>
+              </a:fontRef>
+            </p:style>
+          </p:cxnSp>
+        </p:grpSp>
+        <p:grpSp>
+          <p:nvGrpSpPr>
+            <p:cNvPr id="6" name="グループ化 5">
+              <a:extLst>
+                <a:ext uri="{FF2B5EF4-FFF2-40B4-BE49-F238E27FC236}">
+                  <a16:creationId xmlns:a16="http://schemas.microsoft.com/office/drawing/2014/main" id="{B1F3D28A-2366-4058-B8C0-9AF10E9EAFFF}"/>
+                </a:ext>
+              </a:extLst>
+            </p:cNvPr>
+            <p:cNvGrpSpPr/>
+            <p:nvPr/>
+          </p:nvGrpSpPr>
+          <p:grpSpPr>
+            <a:xfrm>
+              <a:off x="1467101" y="691343"/>
+              <a:ext cx="8550990" cy="1602982"/>
+              <a:chOff x="1467101" y="691344"/>
+              <a:chExt cx="8885958" cy="1362085"/>
+            </a:xfrm>
+          </p:grpSpPr>
+          <p:sp>
+            <p:nvSpPr>
+              <p:cNvPr id="7" name="正方形/長方形 6">
+                <a:extLst>
+                  <a:ext uri="{FF2B5EF4-FFF2-40B4-BE49-F238E27FC236}">
+                    <a16:creationId xmlns:a16="http://schemas.microsoft.com/office/drawing/2014/main" id="{A1854A21-90D8-7B80-E985-12453F5DE690}"/>
+                  </a:ext>
+                </a:extLst>
+              </p:cNvPr>
+              <p:cNvSpPr/>
+              <p:nvPr/>
+            </p:nvSpPr>
+            <p:spPr>
+              <a:xfrm>
+                <a:off x="1467101" y="759258"/>
+                <a:ext cx="2578686" cy="357256"/>
+              </a:xfrm>
+              <a:prstGeom prst="rect">
+                <a:avLst/>
+              </a:prstGeom>
+              <a:noFill/>
+              <a:ln w="28575">
+                <a:solidFill>
+                  <a:srgbClr val="FF0000"/>
+                </a:solidFill>
+                <a:prstDash val="solid"/>
+              </a:ln>
+            </p:spPr>
+            <p:style>
+              <a:lnRef idx="2">
+                <a:schemeClr val="accent6"/>
+              </a:lnRef>
+              <a:fillRef idx="1">
+                <a:schemeClr val="lt1"/>
+              </a:fillRef>
+              <a:effectRef idx="0">
+                <a:schemeClr val="accent6"/>
+              </a:effectRef>
+              <a:fontRef idx="minor">
+                <a:schemeClr val="dk1"/>
+              </a:fontRef>
+            </p:style>
+            <p:txBody>
+              <a:bodyPr rtlCol="0" anchor="t"/>
+              <a:lstStyle>
+                <a:lvl1pPr marL="0" indent="0">
+                  <a:defRPr sz="1100">
+                    <a:solidFill>
+                      <a:schemeClr val="dk1"/>
+                    </a:solidFill>
+                    <a:latin typeface="+mn-lt"/>
+                    <a:ea typeface="+mn-ea"/>
+                    <a:cs typeface="+mn-cs"/>
+                  </a:defRPr>
+                </a:lvl1pPr>
+                <a:lvl2pPr marL="457200" indent="0">
+                  <a:defRPr sz="1100">
+                    <a:solidFill>
+                      <a:schemeClr val="dk1"/>
+                    </a:solidFill>
+                    <a:latin typeface="+mn-lt"/>
+                    <a:ea typeface="+mn-ea"/>
+                    <a:cs typeface="+mn-cs"/>
+                  </a:defRPr>
+                </a:lvl2pPr>
+                <a:lvl3pPr marL="914400" indent="0">
+                  <a:defRPr sz="1100">
+                    <a:solidFill>
+                      <a:schemeClr val="dk1"/>
+                    </a:solidFill>
+                    <a:latin typeface="+mn-lt"/>
+                    <a:ea typeface="+mn-ea"/>
+                    <a:cs typeface="+mn-cs"/>
+                  </a:defRPr>
+                </a:lvl3pPr>
+                <a:lvl4pPr marL="1371600" indent="0">
+                  <a:defRPr sz="1100">
+                    <a:solidFill>
+                      <a:schemeClr val="dk1"/>
+                    </a:solidFill>
+                    <a:latin typeface="+mn-lt"/>
+                    <a:ea typeface="+mn-ea"/>
+                    <a:cs typeface="+mn-cs"/>
+                  </a:defRPr>
+                </a:lvl4pPr>
+                <a:lvl5pPr marL="1828800" indent="0">
+                  <a:defRPr sz="1100">
+                    <a:solidFill>
+                      <a:schemeClr val="dk1"/>
+                    </a:solidFill>
+                    <a:latin typeface="+mn-lt"/>
+                    <a:ea typeface="+mn-ea"/>
+                    <a:cs typeface="+mn-cs"/>
+                  </a:defRPr>
+                </a:lvl5pPr>
+                <a:lvl6pPr marL="2286000" indent="0">
+                  <a:defRPr sz="1100">
+                    <a:solidFill>
+                      <a:schemeClr val="dk1"/>
+                    </a:solidFill>
+                    <a:latin typeface="+mn-lt"/>
+                    <a:ea typeface="+mn-ea"/>
+                    <a:cs typeface="+mn-cs"/>
+                  </a:defRPr>
+                </a:lvl6pPr>
+                <a:lvl7pPr marL="2743200" indent="0">
+                  <a:defRPr sz="1100">
+                    <a:solidFill>
+                      <a:schemeClr val="dk1"/>
+                    </a:solidFill>
+                    <a:latin typeface="+mn-lt"/>
+                    <a:ea typeface="+mn-ea"/>
+                    <a:cs typeface="+mn-cs"/>
+                  </a:defRPr>
+                </a:lvl7pPr>
+                <a:lvl8pPr marL="3200400" indent="0">
+                  <a:defRPr sz="1100">
+                    <a:solidFill>
+                      <a:schemeClr val="dk1"/>
+                    </a:solidFill>
+                    <a:latin typeface="+mn-lt"/>
+                    <a:ea typeface="+mn-ea"/>
+                    <a:cs typeface="+mn-cs"/>
+                  </a:defRPr>
+                </a:lvl8pPr>
+                <a:lvl9pPr marL="3657600" indent="0">
+                  <a:defRPr sz="1100">
+                    <a:solidFill>
+                      <a:schemeClr val="dk1"/>
+                    </a:solidFill>
+                    <a:latin typeface="+mn-lt"/>
+                    <a:ea typeface="+mn-ea"/>
+                    <a:cs typeface="+mn-cs"/>
+                  </a:defRPr>
+                </a:lvl9pPr>
+              </a:lstStyle>
+              <a:p>
+                <a:pPr algn="l"/>
+                <a:endParaRPr kumimoji="1" lang="ja-JP" altLang="en-US" sz="1100"/>
+              </a:p>
+            </p:txBody>
+          </p:sp>
+          <p:sp>
+            <p:nvSpPr>
+              <p:cNvPr id="8" name="正方形/長方形 7">
+                <a:extLst>
+                  <a:ext uri="{FF2B5EF4-FFF2-40B4-BE49-F238E27FC236}">
+                    <a16:creationId xmlns:a16="http://schemas.microsoft.com/office/drawing/2014/main" id="{ED802243-87DD-6226-8472-F7A2537619C7}"/>
+                  </a:ext>
+                </a:extLst>
+              </p:cNvPr>
+              <p:cNvSpPr/>
+              <p:nvPr/>
+            </p:nvSpPr>
+            <p:spPr>
+              <a:xfrm>
+                <a:off x="1683233" y="1665848"/>
+                <a:ext cx="1301288" cy="364529"/>
+              </a:xfrm>
+              <a:prstGeom prst="rect">
+                <a:avLst/>
+              </a:prstGeom>
+              <a:noFill/>
+              <a:ln w="28575">
+                <a:solidFill>
+                  <a:srgbClr val="FF0000"/>
+                </a:solidFill>
+                <a:prstDash val="solid"/>
+              </a:ln>
+            </p:spPr>
+            <p:style>
+              <a:lnRef idx="2">
+                <a:schemeClr val="accent6"/>
+              </a:lnRef>
+              <a:fillRef idx="1">
+                <a:schemeClr val="lt1"/>
+              </a:fillRef>
+              <a:effectRef idx="0">
+                <a:schemeClr val="accent6"/>
+              </a:effectRef>
+              <a:fontRef idx="minor">
+                <a:schemeClr val="dk1"/>
+              </a:fontRef>
+            </p:style>
+            <p:txBody>
+              <a:bodyPr rtlCol="0" anchor="t"/>
+              <a:lstStyle>
+                <a:lvl1pPr marL="0" indent="0">
+                  <a:defRPr sz="1100">
+                    <a:solidFill>
+                      <a:schemeClr val="dk1"/>
+                    </a:solidFill>
+                    <a:latin typeface="+mn-lt"/>
+                    <a:ea typeface="+mn-ea"/>
+                    <a:cs typeface="+mn-cs"/>
+                  </a:defRPr>
+                </a:lvl1pPr>
+                <a:lvl2pPr marL="457200" indent="0">
+                  <a:defRPr sz="1100">
+                    <a:solidFill>
+                      <a:schemeClr val="dk1"/>
+                    </a:solidFill>
+                    <a:latin typeface="+mn-lt"/>
+                    <a:ea typeface="+mn-ea"/>
+                    <a:cs typeface="+mn-cs"/>
+                  </a:defRPr>
+                </a:lvl2pPr>
+                <a:lvl3pPr marL="914400" indent="0">
+                  <a:defRPr sz="1100">
+                    <a:solidFill>
+                      <a:schemeClr val="dk1"/>
+                    </a:solidFill>
+                    <a:latin typeface="+mn-lt"/>
+                    <a:ea typeface="+mn-ea"/>
+                    <a:cs typeface="+mn-cs"/>
+                  </a:defRPr>
+                </a:lvl3pPr>
+                <a:lvl4pPr marL="1371600" indent="0">
+                  <a:defRPr sz="1100">
+                    <a:solidFill>
+                      <a:schemeClr val="dk1"/>
+                    </a:solidFill>
+                    <a:latin typeface="+mn-lt"/>
+                    <a:ea typeface="+mn-ea"/>
+                    <a:cs typeface="+mn-cs"/>
+                  </a:defRPr>
+                </a:lvl4pPr>
+                <a:lvl5pPr marL="1828800" indent="0">
+                  <a:defRPr sz="1100">
+                    <a:solidFill>
+                      <a:schemeClr val="dk1"/>
+                    </a:solidFill>
+                    <a:latin typeface="+mn-lt"/>
+                    <a:ea typeface="+mn-ea"/>
+                    <a:cs typeface="+mn-cs"/>
+                  </a:defRPr>
+                </a:lvl5pPr>
+                <a:lvl6pPr marL="2286000" indent="0">
+                  <a:defRPr sz="1100">
+                    <a:solidFill>
+                      <a:schemeClr val="dk1"/>
+                    </a:solidFill>
+                    <a:latin typeface="+mn-lt"/>
+                    <a:ea typeface="+mn-ea"/>
+                    <a:cs typeface="+mn-cs"/>
+                  </a:defRPr>
+                </a:lvl6pPr>
+                <a:lvl7pPr marL="2743200" indent="0">
+                  <a:defRPr sz="1100">
+                    <a:solidFill>
+                      <a:schemeClr val="dk1"/>
+                    </a:solidFill>
+                    <a:latin typeface="+mn-lt"/>
+                    <a:ea typeface="+mn-ea"/>
+                    <a:cs typeface="+mn-cs"/>
+                  </a:defRPr>
+                </a:lvl7pPr>
+                <a:lvl8pPr marL="3200400" indent="0">
+                  <a:defRPr sz="1100">
+                    <a:solidFill>
+                      <a:schemeClr val="dk1"/>
+                    </a:solidFill>
+                    <a:latin typeface="+mn-lt"/>
+                    <a:ea typeface="+mn-ea"/>
+                    <a:cs typeface="+mn-cs"/>
+                  </a:defRPr>
+                </a:lvl8pPr>
+                <a:lvl9pPr marL="3657600" indent="0">
+                  <a:defRPr sz="1100">
+                    <a:solidFill>
+                      <a:schemeClr val="dk1"/>
+                    </a:solidFill>
+                    <a:latin typeface="+mn-lt"/>
+                    <a:ea typeface="+mn-ea"/>
+                    <a:cs typeface="+mn-cs"/>
+                  </a:defRPr>
+                </a:lvl9pPr>
+              </a:lstStyle>
+              <a:p>
+                <a:pPr algn="l"/>
+                <a:endParaRPr kumimoji="1" lang="ja-JP" altLang="en-US" sz="1100"/>
+              </a:p>
+            </p:txBody>
+          </p:sp>
+          <p:sp>
+            <p:nvSpPr>
+              <p:cNvPr id="9" name="正方形/長方形 8">
+                <a:extLst>
+                  <a:ext uri="{FF2B5EF4-FFF2-40B4-BE49-F238E27FC236}">
+                    <a16:creationId xmlns:a16="http://schemas.microsoft.com/office/drawing/2014/main" id="{2E8FFF4E-F31F-5793-E540-4AFFB749927D}"/>
+                  </a:ext>
+                </a:extLst>
+              </p:cNvPr>
+              <p:cNvSpPr/>
+              <p:nvPr/>
+            </p:nvSpPr>
+            <p:spPr>
+              <a:xfrm>
+                <a:off x="9023354" y="720740"/>
+                <a:ext cx="1329705" cy="346668"/>
+              </a:xfrm>
+              <a:prstGeom prst="rect">
+                <a:avLst/>
+              </a:prstGeom>
+              <a:noFill/>
+              <a:ln w="28575">
+                <a:solidFill>
+                  <a:srgbClr val="FF0000"/>
+                </a:solidFill>
+                <a:prstDash val="solid"/>
+              </a:ln>
+            </p:spPr>
+            <p:style>
+              <a:lnRef idx="2">
+                <a:schemeClr val="accent6"/>
+              </a:lnRef>
+              <a:fillRef idx="1">
+                <a:schemeClr val="lt1"/>
+              </a:fillRef>
+              <a:effectRef idx="0">
+                <a:schemeClr val="accent6"/>
+              </a:effectRef>
+              <a:fontRef idx="minor">
+                <a:schemeClr val="dk1"/>
+              </a:fontRef>
+            </p:style>
+            <p:txBody>
+              <a:bodyPr rtlCol="0" anchor="t"/>
+              <a:lstStyle>
+                <a:lvl1pPr marL="0" indent="0">
+                  <a:defRPr sz="1100">
+                    <a:solidFill>
+                      <a:schemeClr val="dk1"/>
+                    </a:solidFill>
+                    <a:latin typeface="+mn-lt"/>
+                    <a:ea typeface="+mn-ea"/>
+                    <a:cs typeface="+mn-cs"/>
+                  </a:defRPr>
+                </a:lvl1pPr>
+                <a:lvl2pPr marL="457200" indent="0">
+                  <a:defRPr sz="1100">
+                    <a:solidFill>
+                      <a:schemeClr val="dk1"/>
+                    </a:solidFill>
+                    <a:latin typeface="+mn-lt"/>
+                    <a:ea typeface="+mn-ea"/>
+                    <a:cs typeface="+mn-cs"/>
+                  </a:defRPr>
+                </a:lvl2pPr>
+                <a:lvl3pPr marL="914400" indent="0">
+                  <a:defRPr sz="1100">
+                    <a:solidFill>
+                      <a:schemeClr val="dk1"/>
+                    </a:solidFill>
+                    <a:latin typeface="+mn-lt"/>
+                    <a:ea typeface="+mn-ea"/>
+                    <a:cs typeface="+mn-cs"/>
+                  </a:defRPr>
+                </a:lvl3pPr>
+                <a:lvl4pPr marL="1371600" indent="0">
+                  <a:defRPr sz="1100">
+                    <a:solidFill>
+                      <a:schemeClr val="dk1"/>
+                    </a:solidFill>
+                    <a:latin typeface="+mn-lt"/>
+                    <a:ea typeface="+mn-ea"/>
+                    <a:cs typeface="+mn-cs"/>
+                  </a:defRPr>
+                </a:lvl4pPr>
+                <a:lvl5pPr marL="1828800" indent="0">
+                  <a:defRPr sz="1100">
+                    <a:solidFill>
+                      <a:schemeClr val="dk1"/>
+                    </a:solidFill>
+                    <a:latin typeface="+mn-lt"/>
+                    <a:ea typeface="+mn-ea"/>
+                    <a:cs typeface="+mn-cs"/>
+                  </a:defRPr>
+                </a:lvl5pPr>
+                <a:lvl6pPr marL="2286000" indent="0">
+                  <a:defRPr sz="1100">
+                    <a:solidFill>
+                      <a:schemeClr val="dk1"/>
+                    </a:solidFill>
+                    <a:latin typeface="+mn-lt"/>
+                    <a:ea typeface="+mn-ea"/>
+                    <a:cs typeface="+mn-cs"/>
+                  </a:defRPr>
+                </a:lvl6pPr>
+                <a:lvl7pPr marL="2743200" indent="0">
+                  <a:defRPr sz="1100">
+                    <a:solidFill>
+                      <a:schemeClr val="dk1"/>
+                    </a:solidFill>
+                    <a:latin typeface="+mn-lt"/>
+                    <a:ea typeface="+mn-ea"/>
+                    <a:cs typeface="+mn-cs"/>
+                  </a:defRPr>
+                </a:lvl7pPr>
+                <a:lvl8pPr marL="3200400" indent="0">
+                  <a:defRPr sz="1100">
+                    <a:solidFill>
+                      <a:schemeClr val="dk1"/>
+                    </a:solidFill>
+                    <a:latin typeface="+mn-lt"/>
+                    <a:ea typeface="+mn-ea"/>
+                    <a:cs typeface="+mn-cs"/>
+                  </a:defRPr>
+                </a:lvl8pPr>
+                <a:lvl9pPr marL="3657600" indent="0">
+                  <a:defRPr sz="1100">
+                    <a:solidFill>
+                      <a:schemeClr val="dk1"/>
+                    </a:solidFill>
+                    <a:latin typeface="+mn-lt"/>
+                    <a:ea typeface="+mn-ea"/>
+                    <a:cs typeface="+mn-cs"/>
+                  </a:defRPr>
+                </a:lvl9pPr>
+              </a:lstStyle>
+              <a:p>
+                <a:pPr algn="l"/>
+                <a:endParaRPr kumimoji="1" lang="ja-JP" altLang="en-US" sz="1100"/>
+              </a:p>
+            </p:txBody>
+          </p:sp>
+          <p:cxnSp>
+            <p:nvCxnSpPr>
+              <p:cNvPr id="10" name="直線矢印コネクタ 9">
+                <a:extLst>
+                  <a:ext uri="{FF2B5EF4-FFF2-40B4-BE49-F238E27FC236}">
+                    <a16:creationId xmlns:a16="http://schemas.microsoft.com/office/drawing/2014/main" id="{94E4CC36-680F-CB3C-2850-AFE93141BF78}"/>
+                  </a:ext>
+                </a:extLst>
+              </p:cNvPr>
+              <p:cNvCxnSpPr>
+                <a:stCxn id="11" idx="1"/>
+                <a:endCxn id="7" idx="3"/>
+              </p:cNvCxnSpPr>
+              <p:nvPr/>
+            </p:nvCxnSpPr>
+            <p:spPr>
+              <a:xfrm flipH="1">
+                <a:off x="4045787" y="935595"/>
+                <a:ext cx="624821" cy="2291"/>
+              </a:xfrm>
+              <a:prstGeom prst="straightConnector1">
+                <a:avLst/>
+              </a:prstGeom>
+              <a:ln w="28575">
+                <a:solidFill>
+                  <a:srgbClr val="FF0000"/>
+                </a:solidFill>
+                <a:tailEnd type="triangle"/>
+              </a:ln>
+            </p:spPr>
+            <p:style>
+              <a:lnRef idx="2">
+                <a:schemeClr val="accent1"/>
+              </a:lnRef>
+              <a:fillRef idx="0">
+                <a:schemeClr val="accent1"/>
+              </a:fillRef>
+              <a:effectRef idx="1">
+                <a:schemeClr val="accent1"/>
+              </a:effectRef>
+              <a:fontRef idx="minor">
+                <a:schemeClr val="tx1"/>
+              </a:fontRef>
+            </p:style>
+          </p:cxnSp>
+          <p:sp>
+            <p:nvSpPr>
+              <p:cNvPr id="11" name="正方形/長方形 10">
+                <a:extLst>
+                  <a:ext uri="{FF2B5EF4-FFF2-40B4-BE49-F238E27FC236}">
+                    <a16:creationId xmlns:a16="http://schemas.microsoft.com/office/drawing/2014/main" id="{F3CF621C-5E25-3F99-A481-0B0B64736FB2}"/>
+                  </a:ext>
+                </a:extLst>
+              </p:cNvPr>
+              <p:cNvSpPr/>
+              <p:nvPr/>
+            </p:nvSpPr>
+            <p:spPr>
+              <a:xfrm>
+                <a:off x="4670608" y="721542"/>
+                <a:ext cx="1508759" cy="428106"/>
+              </a:xfrm>
+              <a:prstGeom prst="rect">
+                <a:avLst/>
+              </a:prstGeom>
+              <a:ln w="28575">
+                <a:solidFill>
+                  <a:srgbClr val="FF0000"/>
+                </a:solidFill>
+              </a:ln>
+            </p:spPr>
+            <p:style>
+              <a:lnRef idx="2">
+                <a:schemeClr val="accent6"/>
+              </a:lnRef>
+              <a:fillRef idx="1">
+                <a:schemeClr val="lt1"/>
+              </a:fillRef>
+              <a:effectRef idx="0">
+                <a:schemeClr val="accent6"/>
+              </a:effectRef>
+              <a:fontRef idx="minor">
+                <a:schemeClr val="dk1"/>
+              </a:fontRef>
+            </p:style>
+            <p:txBody>
+              <a:bodyPr rtlCol="0" anchor="ctr"/>
+              <a:lstStyle>
+                <a:lvl1pPr marL="0" indent="0">
+                  <a:defRPr sz="1100">
+                    <a:solidFill>
+                      <a:schemeClr val="dk1"/>
+                    </a:solidFill>
+                    <a:latin typeface="+mn-lt"/>
+                    <a:ea typeface="+mn-ea"/>
+                    <a:cs typeface="+mn-cs"/>
+                  </a:defRPr>
+                </a:lvl1pPr>
+                <a:lvl2pPr marL="457200" indent="0">
+                  <a:defRPr sz="1100">
+                    <a:solidFill>
+                      <a:schemeClr val="dk1"/>
+                    </a:solidFill>
+                    <a:latin typeface="+mn-lt"/>
+                    <a:ea typeface="+mn-ea"/>
+                    <a:cs typeface="+mn-cs"/>
+                  </a:defRPr>
+                </a:lvl2pPr>
+                <a:lvl3pPr marL="914400" indent="0">
+                  <a:defRPr sz="1100">
+                    <a:solidFill>
+                      <a:schemeClr val="dk1"/>
+                    </a:solidFill>
+                    <a:latin typeface="+mn-lt"/>
+                    <a:ea typeface="+mn-ea"/>
+                    <a:cs typeface="+mn-cs"/>
+                  </a:defRPr>
+                </a:lvl3pPr>
+                <a:lvl4pPr marL="1371600" indent="0">
+                  <a:defRPr sz="1100">
+                    <a:solidFill>
+                      <a:schemeClr val="dk1"/>
+                    </a:solidFill>
+                    <a:latin typeface="+mn-lt"/>
+                    <a:ea typeface="+mn-ea"/>
+                    <a:cs typeface="+mn-cs"/>
+                  </a:defRPr>
+                </a:lvl4pPr>
+                <a:lvl5pPr marL="1828800" indent="0">
+                  <a:defRPr sz="1100">
+                    <a:solidFill>
+                      <a:schemeClr val="dk1"/>
+                    </a:solidFill>
+                    <a:latin typeface="+mn-lt"/>
+                    <a:ea typeface="+mn-ea"/>
+                    <a:cs typeface="+mn-cs"/>
+                  </a:defRPr>
+                </a:lvl5pPr>
+                <a:lvl6pPr marL="2286000" indent="0">
+                  <a:defRPr sz="1100">
+                    <a:solidFill>
+                      <a:schemeClr val="dk1"/>
+                    </a:solidFill>
+                    <a:latin typeface="+mn-lt"/>
+                    <a:ea typeface="+mn-ea"/>
+                    <a:cs typeface="+mn-cs"/>
+                  </a:defRPr>
+                </a:lvl6pPr>
+                <a:lvl7pPr marL="2743200" indent="0">
+                  <a:defRPr sz="1100">
+                    <a:solidFill>
+                      <a:schemeClr val="dk1"/>
+                    </a:solidFill>
+                    <a:latin typeface="+mn-lt"/>
+                    <a:ea typeface="+mn-ea"/>
+                    <a:cs typeface="+mn-cs"/>
+                  </a:defRPr>
+                </a:lvl7pPr>
+                <a:lvl8pPr marL="3200400" indent="0">
+                  <a:defRPr sz="1100">
+                    <a:solidFill>
+                      <a:schemeClr val="dk1"/>
+                    </a:solidFill>
+                    <a:latin typeface="+mn-lt"/>
+                    <a:ea typeface="+mn-ea"/>
+                    <a:cs typeface="+mn-cs"/>
+                  </a:defRPr>
+                </a:lvl8pPr>
+                <a:lvl9pPr marL="3657600" indent="0">
+                  <a:defRPr sz="1100">
+                    <a:solidFill>
+                      <a:schemeClr val="dk1"/>
+                    </a:solidFill>
+                    <a:latin typeface="+mn-lt"/>
+                    <a:ea typeface="+mn-ea"/>
+                    <a:cs typeface="+mn-cs"/>
+                  </a:defRPr>
+                </a:lvl9pPr>
+              </a:lstStyle>
+              <a:p>
+                <a:pPr algn="l"/>
+                <a:r>
+                  <a:rPr kumimoji="1" lang="ja-JP" altLang="en-US" sz="1200" b="1">
+                    <a:solidFill>
+                      <a:srgbClr val="FF0000"/>
+                    </a:solidFill>
+                  </a:rPr>
+                  <a:t>①タブの切り替え</a:t>
+                </a:r>
+              </a:p>
+            </p:txBody>
+          </p:sp>
+          <p:sp>
+            <p:nvSpPr>
+              <p:cNvPr id="12" name="正方形/長方形 11">
+                <a:extLst>
+                  <a:ext uri="{FF2B5EF4-FFF2-40B4-BE49-F238E27FC236}">
+                    <a16:creationId xmlns:a16="http://schemas.microsoft.com/office/drawing/2014/main" id="{AA0463E3-3F5C-394A-9326-56603CC5E8C2}"/>
+                  </a:ext>
+                </a:extLst>
+              </p:cNvPr>
+              <p:cNvSpPr/>
+              <p:nvPr/>
+            </p:nvSpPr>
+            <p:spPr>
+              <a:xfrm>
+                <a:off x="3322224" y="1632944"/>
+                <a:ext cx="2157623" cy="420485"/>
+              </a:xfrm>
+              <a:prstGeom prst="rect">
+                <a:avLst/>
+              </a:prstGeom>
+              <a:ln w="28575">
+                <a:solidFill>
+                  <a:srgbClr val="FF0000"/>
+                </a:solidFill>
+              </a:ln>
+            </p:spPr>
+            <p:style>
+              <a:lnRef idx="2">
+                <a:schemeClr val="accent6"/>
+              </a:lnRef>
+              <a:fillRef idx="1">
+                <a:schemeClr val="lt1"/>
+              </a:fillRef>
+              <a:effectRef idx="0">
+                <a:schemeClr val="accent6"/>
+              </a:effectRef>
+              <a:fontRef idx="minor">
+                <a:schemeClr val="dk1"/>
+              </a:fontRef>
+            </p:style>
+            <p:txBody>
+              <a:bodyPr rtlCol="0" anchor="ctr"/>
+              <a:lstStyle>
+                <a:lvl1pPr marL="0" indent="0">
+                  <a:defRPr sz="1100">
+                    <a:solidFill>
+                      <a:schemeClr val="dk1"/>
+                    </a:solidFill>
+                    <a:latin typeface="+mn-lt"/>
+                    <a:ea typeface="+mn-ea"/>
+                    <a:cs typeface="+mn-cs"/>
+                  </a:defRPr>
+                </a:lvl1pPr>
+                <a:lvl2pPr marL="457200" indent="0">
+                  <a:defRPr sz="1100">
+                    <a:solidFill>
+                      <a:schemeClr val="dk1"/>
+                    </a:solidFill>
+                    <a:latin typeface="+mn-lt"/>
+                    <a:ea typeface="+mn-ea"/>
+                    <a:cs typeface="+mn-cs"/>
+                  </a:defRPr>
+                </a:lvl2pPr>
+                <a:lvl3pPr marL="914400" indent="0">
+                  <a:defRPr sz="1100">
+                    <a:solidFill>
+                      <a:schemeClr val="dk1"/>
+                    </a:solidFill>
+                    <a:latin typeface="+mn-lt"/>
+                    <a:ea typeface="+mn-ea"/>
+                    <a:cs typeface="+mn-cs"/>
+                  </a:defRPr>
+                </a:lvl3pPr>
+                <a:lvl4pPr marL="1371600" indent="0">
+                  <a:defRPr sz="1100">
+                    <a:solidFill>
+                      <a:schemeClr val="dk1"/>
+                    </a:solidFill>
+                    <a:latin typeface="+mn-lt"/>
+                    <a:ea typeface="+mn-ea"/>
+                    <a:cs typeface="+mn-cs"/>
+                  </a:defRPr>
+                </a:lvl4pPr>
+                <a:lvl5pPr marL="1828800" indent="0">
+                  <a:defRPr sz="1100">
+                    <a:solidFill>
+                      <a:schemeClr val="dk1"/>
+                    </a:solidFill>
+                    <a:latin typeface="+mn-lt"/>
+                    <a:ea typeface="+mn-ea"/>
+                    <a:cs typeface="+mn-cs"/>
+                  </a:defRPr>
+                </a:lvl5pPr>
+                <a:lvl6pPr marL="2286000" indent="0">
+                  <a:defRPr sz="1100">
+                    <a:solidFill>
+                      <a:schemeClr val="dk1"/>
+                    </a:solidFill>
+                    <a:latin typeface="+mn-lt"/>
+                    <a:ea typeface="+mn-ea"/>
+                    <a:cs typeface="+mn-cs"/>
+                  </a:defRPr>
+                </a:lvl6pPr>
+                <a:lvl7pPr marL="2743200" indent="0">
+                  <a:defRPr sz="1100">
+                    <a:solidFill>
+                      <a:schemeClr val="dk1"/>
+                    </a:solidFill>
+                    <a:latin typeface="+mn-lt"/>
+                    <a:ea typeface="+mn-ea"/>
+                    <a:cs typeface="+mn-cs"/>
+                  </a:defRPr>
+                </a:lvl7pPr>
+                <a:lvl8pPr marL="3200400" indent="0">
+                  <a:defRPr sz="1100">
+                    <a:solidFill>
+                      <a:schemeClr val="dk1"/>
+                    </a:solidFill>
+                    <a:latin typeface="+mn-lt"/>
+                    <a:ea typeface="+mn-ea"/>
+                    <a:cs typeface="+mn-cs"/>
+                  </a:defRPr>
+                </a:lvl8pPr>
+                <a:lvl9pPr marL="3657600" indent="0">
+                  <a:defRPr sz="1100">
+                    <a:solidFill>
+                      <a:schemeClr val="dk1"/>
+                    </a:solidFill>
+                    <a:latin typeface="+mn-lt"/>
+                    <a:ea typeface="+mn-ea"/>
+                    <a:cs typeface="+mn-cs"/>
+                  </a:defRPr>
+                </a:lvl9pPr>
+              </a:lstStyle>
+              <a:p>
+                <a:pPr algn="l"/>
+                <a:r>
+                  <a:rPr kumimoji="1" lang="ja-JP" altLang="en-US" sz="1200" b="1">
+                    <a:solidFill>
+                      <a:srgbClr val="FF0000"/>
+                    </a:solidFill>
+                  </a:rPr>
+                  <a:t>②入力ファイルの読み込み</a:t>
+                </a:r>
+              </a:p>
+            </p:txBody>
+          </p:sp>
+          <p:cxnSp>
+            <p:nvCxnSpPr>
+              <p:cNvPr id="13" name="直線矢印コネクタ 12">
+                <a:extLst>
+                  <a:ext uri="{FF2B5EF4-FFF2-40B4-BE49-F238E27FC236}">
+                    <a16:creationId xmlns:a16="http://schemas.microsoft.com/office/drawing/2014/main" id="{2472F7D2-2107-3228-25FE-1A2F85169989}"/>
+                  </a:ext>
+                </a:extLst>
+              </p:cNvPr>
+              <p:cNvCxnSpPr>
+                <a:stCxn id="12" idx="1"/>
+                <a:endCxn id="8" idx="3"/>
+              </p:cNvCxnSpPr>
+              <p:nvPr/>
+            </p:nvCxnSpPr>
+            <p:spPr>
+              <a:xfrm flipH="1">
+                <a:off x="2984521" y="1843187"/>
+                <a:ext cx="337703" cy="4926"/>
+              </a:xfrm>
+              <a:prstGeom prst="straightConnector1">
+                <a:avLst/>
+              </a:prstGeom>
+              <a:ln w="28575">
+                <a:solidFill>
+                  <a:srgbClr val="FF0000"/>
+                </a:solidFill>
+                <a:tailEnd type="triangle"/>
+              </a:ln>
+            </p:spPr>
+            <p:style>
+              <a:lnRef idx="2">
+                <a:schemeClr val="accent1"/>
+              </a:lnRef>
+              <a:fillRef idx="0">
+                <a:schemeClr val="accent1"/>
+              </a:fillRef>
+              <a:effectRef idx="1">
+                <a:schemeClr val="accent1"/>
+              </a:effectRef>
+              <a:fontRef idx="minor">
+                <a:schemeClr val="tx1"/>
+              </a:fontRef>
+            </p:style>
+          </p:cxnSp>
+          <p:sp>
+            <p:nvSpPr>
+              <p:cNvPr id="14" name="正方形/長方形 13">
+                <a:extLst>
+                  <a:ext uri="{FF2B5EF4-FFF2-40B4-BE49-F238E27FC236}">
+                    <a16:creationId xmlns:a16="http://schemas.microsoft.com/office/drawing/2014/main" id="{26F9E13D-A368-6634-3CA4-62E95FC0D867}"/>
+                  </a:ext>
+                </a:extLst>
+              </p:cNvPr>
+              <p:cNvSpPr/>
+              <p:nvPr/>
+            </p:nvSpPr>
+            <p:spPr>
+              <a:xfrm>
+                <a:off x="6941340" y="691344"/>
+                <a:ext cx="1640080" cy="400743"/>
+              </a:xfrm>
+              <a:prstGeom prst="rect">
+                <a:avLst/>
+              </a:prstGeom>
+              <a:ln w="28575">
+                <a:solidFill>
+                  <a:srgbClr val="FF0000"/>
+                </a:solidFill>
+              </a:ln>
+            </p:spPr>
+            <p:style>
+              <a:lnRef idx="2">
+                <a:schemeClr val="accent6"/>
+              </a:lnRef>
+              <a:fillRef idx="1">
+                <a:schemeClr val="lt1"/>
+              </a:fillRef>
+              <a:effectRef idx="0">
+                <a:schemeClr val="accent6"/>
+              </a:effectRef>
+              <a:fontRef idx="minor">
+                <a:schemeClr val="dk1"/>
+              </a:fontRef>
+            </p:style>
+            <p:txBody>
+              <a:bodyPr rtlCol="0" anchor="ctr"/>
+              <a:lstStyle>
+                <a:lvl1pPr marL="0" indent="0">
+                  <a:defRPr sz="1100">
+                    <a:solidFill>
+                      <a:schemeClr val="dk1"/>
+                    </a:solidFill>
+                    <a:latin typeface="+mn-lt"/>
+                    <a:ea typeface="+mn-ea"/>
+                    <a:cs typeface="+mn-cs"/>
+                  </a:defRPr>
+                </a:lvl1pPr>
+                <a:lvl2pPr marL="457200" indent="0">
+                  <a:defRPr sz="1100">
+                    <a:solidFill>
+                      <a:schemeClr val="dk1"/>
+                    </a:solidFill>
+                    <a:latin typeface="+mn-lt"/>
+                    <a:ea typeface="+mn-ea"/>
+                    <a:cs typeface="+mn-cs"/>
+                  </a:defRPr>
+                </a:lvl2pPr>
+                <a:lvl3pPr marL="914400" indent="0">
+                  <a:defRPr sz="1100">
+                    <a:solidFill>
+                      <a:schemeClr val="dk1"/>
+                    </a:solidFill>
+                    <a:latin typeface="+mn-lt"/>
+                    <a:ea typeface="+mn-ea"/>
+                    <a:cs typeface="+mn-cs"/>
+                  </a:defRPr>
+                </a:lvl3pPr>
+                <a:lvl4pPr marL="1371600" indent="0">
+                  <a:defRPr sz="1100">
+                    <a:solidFill>
+                      <a:schemeClr val="dk1"/>
+                    </a:solidFill>
+                    <a:latin typeface="+mn-lt"/>
+                    <a:ea typeface="+mn-ea"/>
+                    <a:cs typeface="+mn-cs"/>
+                  </a:defRPr>
+                </a:lvl4pPr>
+                <a:lvl5pPr marL="1828800" indent="0">
+                  <a:defRPr sz="1100">
+                    <a:solidFill>
+                      <a:schemeClr val="dk1"/>
+                    </a:solidFill>
+                    <a:latin typeface="+mn-lt"/>
+                    <a:ea typeface="+mn-ea"/>
+                    <a:cs typeface="+mn-cs"/>
+                  </a:defRPr>
+                </a:lvl5pPr>
+                <a:lvl6pPr marL="2286000" indent="0">
+                  <a:defRPr sz="1100">
+                    <a:solidFill>
+                      <a:schemeClr val="dk1"/>
+                    </a:solidFill>
+                    <a:latin typeface="+mn-lt"/>
+                    <a:ea typeface="+mn-ea"/>
+                    <a:cs typeface="+mn-cs"/>
+                  </a:defRPr>
+                </a:lvl6pPr>
+                <a:lvl7pPr marL="2743200" indent="0">
+                  <a:defRPr sz="1100">
+                    <a:solidFill>
+                      <a:schemeClr val="dk1"/>
+                    </a:solidFill>
+                    <a:latin typeface="+mn-lt"/>
+                    <a:ea typeface="+mn-ea"/>
+                    <a:cs typeface="+mn-cs"/>
+                  </a:defRPr>
+                </a:lvl7pPr>
+                <a:lvl8pPr marL="3200400" indent="0">
+                  <a:defRPr sz="1100">
+                    <a:solidFill>
+                      <a:schemeClr val="dk1"/>
+                    </a:solidFill>
+                    <a:latin typeface="+mn-lt"/>
+                    <a:ea typeface="+mn-ea"/>
+                    <a:cs typeface="+mn-cs"/>
+                  </a:defRPr>
+                </a:lvl8pPr>
+                <a:lvl9pPr marL="3657600" indent="0">
+                  <a:defRPr sz="1100">
+                    <a:solidFill>
+                      <a:schemeClr val="dk1"/>
+                    </a:solidFill>
+                    <a:latin typeface="+mn-lt"/>
+                    <a:ea typeface="+mn-ea"/>
+                    <a:cs typeface="+mn-cs"/>
+                  </a:defRPr>
+                </a:lvl9pPr>
+              </a:lstStyle>
+              <a:p>
+                <a:pPr algn="l"/>
+                <a:r>
+                  <a:rPr kumimoji="1" lang="ja-JP" altLang="en-US" sz="1200" b="1">
+                    <a:solidFill>
+                      <a:srgbClr val="FF0000"/>
+                    </a:solidFill>
+                  </a:rPr>
+                  <a:t>③入力内容をクリア</a:t>
+                </a:r>
+              </a:p>
+            </p:txBody>
+          </p:sp>
+          <p:cxnSp>
+            <p:nvCxnSpPr>
+              <p:cNvPr id="15" name="直線矢印コネクタ 14">
+                <a:extLst>
+                  <a:ext uri="{FF2B5EF4-FFF2-40B4-BE49-F238E27FC236}">
+                    <a16:creationId xmlns:a16="http://schemas.microsoft.com/office/drawing/2014/main" id="{B7DA71E8-81AA-3491-4CD7-E16D27753BA2}"/>
+                  </a:ext>
+                </a:extLst>
+              </p:cNvPr>
+              <p:cNvCxnSpPr>
+                <a:stCxn id="14" idx="3"/>
+                <a:endCxn id="9" idx="1"/>
+              </p:cNvCxnSpPr>
+              <p:nvPr/>
+            </p:nvCxnSpPr>
+            <p:spPr>
+              <a:xfrm>
+                <a:off x="8581420" y="891716"/>
+                <a:ext cx="441934" cy="2358"/>
+              </a:xfrm>
+              <a:prstGeom prst="straightConnector1">
+                <a:avLst/>
+              </a:prstGeom>
+              <a:ln w="28575">
+                <a:solidFill>
+                  <a:srgbClr val="FF0000"/>
+                </a:solidFill>
+                <a:tailEnd type="triangle"/>
+              </a:ln>
+            </p:spPr>
+            <p:style>
+              <a:lnRef idx="2">
+                <a:schemeClr val="accent1"/>
+              </a:lnRef>
+              <a:fillRef idx="0">
+                <a:schemeClr val="accent1"/>
+              </a:fillRef>
+              <a:effectRef idx="1">
+                <a:schemeClr val="accent1"/>
+              </a:effectRef>
+              <a:fontRef idx="minor">
+                <a:schemeClr val="tx1"/>
+              </a:fontRef>
+            </p:style>
+          </p:cxnSp>
+        </p:grpSp>
+      </p:grpSp>
+    </p:spTree>
+    <p:extLst>
+      <p:ext uri="{BB962C8B-B14F-4D97-AF65-F5344CB8AC3E}">
+        <p14:creationId xmlns:p14="http://schemas.microsoft.com/office/powerpoint/2010/main" val="2949499669"/>
+      </p:ext>
+    </p:extLst>
+  </p:cSld>
+  <p:clrMapOvr>
+    <a:masterClrMapping/>
+  </p:clrMapOvr>
+</p:sld>
+</file>
+
+<file path=ppt/slides/slide5.xml><?xml version="1.0" encoding="utf-8"?>
+<p:sld xmlns:a="http://schemas.openxmlformats.org/drawingml/2006/main" xmlns:r="http://schemas.openxmlformats.org/officeDocument/2006/relationships" xmlns:p="http://schemas.openxmlformats.org/presentationml/2006/main">
+  <p:cSld>
+    <p:spTree>
+      <p:nvGrpSpPr>
+        <p:cNvPr id="1" name="">
+          <a:extLst>
+            <a:ext uri="{FF2B5EF4-FFF2-40B4-BE49-F238E27FC236}">
+              <a16:creationId xmlns:a16="http://schemas.microsoft.com/office/drawing/2014/main" id="{1694D166-DF8A-EAC8-4C75-A464748EBD3D}"/>
+            </a:ext>
+          </a:extLst>
+        </p:cNvPr>
+        <p:cNvGrpSpPr/>
+        <p:nvPr/>
+      </p:nvGrpSpPr>
+      <p:grpSpPr>
+        <a:xfrm>
+          <a:off x="0" y="0"/>
+          <a:ext cx="0" cy="0"/>
+          <a:chOff x="0" y="0"/>
+          <a:chExt cx="0" cy="0"/>
+        </a:xfrm>
+      </p:grpSpPr>
+      <p:grpSp>
+        <p:nvGrpSpPr>
+          <p:cNvPr id="7" name="グループ化 6">
+            <a:extLst>
+              <a:ext uri="{FF2B5EF4-FFF2-40B4-BE49-F238E27FC236}">
+                <a16:creationId xmlns:a16="http://schemas.microsoft.com/office/drawing/2014/main" id="{64796E84-DD6A-24FE-6399-7D7B78DF7910}"/>
+              </a:ext>
+            </a:extLst>
+          </p:cNvPr>
+          <p:cNvGrpSpPr/>
+          <p:nvPr/>
+        </p:nvGrpSpPr>
+        <p:grpSpPr>
+          <a:xfrm>
+            <a:off x="891885" y="1423278"/>
+            <a:ext cx="11441695" cy="3502478"/>
+            <a:chOff x="0" y="661308"/>
+            <a:chExt cx="11322632" cy="3463257"/>
+          </a:xfrm>
+        </p:grpSpPr>
+        <p:grpSp>
+          <p:nvGrpSpPr>
+            <p:cNvPr id="8" name="グループ化 7">
+              <a:extLst>
+                <a:ext uri="{FF2B5EF4-FFF2-40B4-BE49-F238E27FC236}">
+                  <a16:creationId xmlns:a16="http://schemas.microsoft.com/office/drawing/2014/main" id="{E2B860D3-5596-4659-4CA7-BB4F4CC66BB5}"/>
+                </a:ext>
+              </a:extLst>
+            </p:cNvPr>
+            <p:cNvGrpSpPr/>
+            <p:nvPr/>
+          </p:nvGrpSpPr>
+          <p:grpSpPr>
+            <a:xfrm>
+              <a:off x="0" y="661308"/>
+              <a:ext cx="11322632" cy="3463257"/>
+              <a:chOff x="0" y="661308"/>
+              <a:chExt cx="11236058" cy="3428276"/>
+            </a:xfrm>
+          </p:grpSpPr>
+          <p:sp>
+            <p:nvSpPr>
+              <p:cNvPr id="19" name="正方形/長方形 18">
+                <a:extLst>
+                  <a:ext uri="{FF2B5EF4-FFF2-40B4-BE49-F238E27FC236}">
+                    <a16:creationId xmlns:a16="http://schemas.microsoft.com/office/drawing/2014/main" id="{45F88021-E903-5F7D-1CDE-B5AD4A8A7900}"/>
+                  </a:ext>
+                </a:extLst>
+              </p:cNvPr>
+              <p:cNvSpPr/>
+              <p:nvPr/>
+            </p:nvSpPr>
+            <p:spPr>
+              <a:xfrm>
+                <a:off x="0" y="661308"/>
+                <a:ext cx="11236058" cy="3428276"/>
+              </a:xfrm>
+              <a:prstGeom prst="rect">
+                <a:avLst/>
+              </a:prstGeom>
+              <a:ln>
+                <a:noFill/>
+              </a:ln>
+            </p:spPr>
+            <p:style>
+              <a:lnRef idx="2">
+                <a:schemeClr val="dk1"/>
+              </a:lnRef>
+              <a:fillRef idx="1">
+                <a:schemeClr val="lt1"/>
+              </a:fillRef>
+              <a:effectRef idx="0">
+                <a:schemeClr val="dk1"/>
+              </a:effectRef>
+              <a:fontRef idx="minor">
+                <a:schemeClr val="dk1"/>
+              </a:fontRef>
+            </p:style>
+            <p:txBody>
+              <a:bodyPr wrap="square" rtlCol="0" anchor="ctr"/>
+              <a:lstStyle>
+                <a:defPPr>
+                  <a:defRPr lang="ja-JP"/>
+                </a:defPPr>
+                <a:lvl1pPr marL="0" indent="0" algn="l" defTabSz="914400" rtl="0" eaLnBrk="1" latinLnBrk="0" hangingPunct="1">
+                  <a:defRPr kumimoji="1" sz="1800" kern="1200">
+                    <a:solidFill>
+                      <a:schemeClr val="dk1"/>
+                    </a:solidFill>
+                    <a:latin typeface="+mn-lt"/>
+                    <a:ea typeface="+mn-ea"/>
+                    <a:cs typeface="+mn-cs"/>
+                  </a:defRPr>
+                </a:lvl1pPr>
+                <a:lvl2pPr marL="457200" indent="0" algn="l" defTabSz="914400" rtl="0" eaLnBrk="1" latinLnBrk="0" hangingPunct="1">
+                  <a:defRPr kumimoji="1" sz="1800" kern="1200">
+                    <a:solidFill>
+                      <a:schemeClr val="dk1"/>
+                    </a:solidFill>
+                    <a:latin typeface="+mn-lt"/>
+                    <a:ea typeface="+mn-ea"/>
+                    <a:cs typeface="+mn-cs"/>
+                  </a:defRPr>
+                </a:lvl2pPr>
+                <a:lvl3pPr marL="914400" indent="0" algn="l" defTabSz="914400" rtl="0" eaLnBrk="1" latinLnBrk="0" hangingPunct="1">
+                  <a:defRPr kumimoji="1" sz="1800" kern="1200">
+                    <a:solidFill>
+                      <a:schemeClr val="dk1"/>
+                    </a:solidFill>
+                    <a:latin typeface="+mn-lt"/>
+                    <a:ea typeface="+mn-ea"/>
+                    <a:cs typeface="+mn-cs"/>
+                  </a:defRPr>
+                </a:lvl3pPr>
+                <a:lvl4pPr marL="1371600" indent="0" algn="l" defTabSz="914400" rtl="0" eaLnBrk="1" latinLnBrk="0" hangingPunct="1">
+                  <a:defRPr kumimoji="1" sz="1800" kern="1200">
+                    <a:solidFill>
+                      <a:schemeClr val="dk1"/>
+                    </a:solidFill>
+                    <a:latin typeface="+mn-lt"/>
+                    <a:ea typeface="+mn-ea"/>
+                    <a:cs typeface="+mn-cs"/>
+                  </a:defRPr>
+                </a:lvl4pPr>
+                <a:lvl5pPr marL="1828800" indent="0" algn="l" defTabSz="914400" rtl="0" eaLnBrk="1" latinLnBrk="0" hangingPunct="1">
+                  <a:defRPr kumimoji="1" sz="1800" kern="1200">
+                    <a:solidFill>
+                      <a:schemeClr val="dk1"/>
+                    </a:solidFill>
+                    <a:latin typeface="+mn-lt"/>
+                    <a:ea typeface="+mn-ea"/>
+                    <a:cs typeface="+mn-cs"/>
+                  </a:defRPr>
+                </a:lvl5pPr>
+                <a:lvl6pPr marL="2286000" indent="0" algn="l" defTabSz="914400" rtl="0" eaLnBrk="1" latinLnBrk="0" hangingPunct="1">
+                  <a:defRPr kumimoji="1" sz="1800" kern="1200">
+                    <a:solidFill>
+                      <a:schemeClr val="dk1"/>
+                    </a:solidFill>
+                    <a:latin typeface="+mn-lt"/>
+                    <a:ea typeface="+mn-ea"/>
+                    <a:cs typeface="+mn-cs"/>
+                  </a:defRPr>
+                </a:lvl6pPr>
+                <a:lvl7pPr marL="2743200" indent="0" algn="l" defTabSz="914400" rtl="0" eaLnBrk="1" latinLnBrk="0" hangingPunct="1">
+                  <a:defRPr kumimoji="1" sz="1800" kern="1200">
+                    <a:solidFill>
+                      <a:schemeClr val="dk1"/>
+                    </a:solidFill>
+                    <a:latin typeface="+mn-lt"/>
+                    <a:ea typeface="+mn-ea"/>
+                    <a:cs typeface="+mn-cs"/>
+                  </a:defRPr>
+                </a:lvl7pPr>
+                <a:lvl8pPr marL="3200400" indent="0" algn="l" defTabSz="914400" rtl="0" eaLnBrk="1" latinLnBrk="0" hangingPunct="1">
+                  <a:defRPr kumimoji="1" sz="1800" kern="1200">
+                    <a:solidFill>
+                      <a:schemeClr val="dk1"/>
+                    </a:solidFill>
+                    <a:latin typeface="+mn-lt"/>
+                    <a:ea typeface="+mn-ea"/>
+                    <a:cs typeface="+mn-cs"/>
+                  </a:defRPr>
+                </a:lvl8pPr>
+                <a:lvl9pPr marL="3657600" indent="0" algn="l" defTabSz="914400" rtl="0" eaLnBrk="1" latinLnBrk="0" hangingPunct="1">
+                  <a:defRPr kumimoji="1" sz="1800" kern="1200">
+                    <a:solidFill>
+                      <a:schemeClr val="dk1"/>
+                    </a:solidFill>
+                    <a:latin typeface="+mn-lt"/>
+                    <a:ea typeface="+mn-ea"/>
+                    <a:cs typeface="+mn-cs"/>
+                  </a:defRPr>
+                </a:lvl9pPr>
+              </a:lstStyle>
+              <a:p>
+                <a:pPr algn="ctr"/>
+                <a:endParaRPr kumimoji="1" lang="ja-JP" altLang="en-US"/>
+              </a:p>
+            </p:txBody>
+          </p:sp>
+          <p:pic>
+            <p:nvPicPr>
+              <p:cNvPr id="20" name="図 19">
+                <a:extLst>
+                  <a:ext uri="{FF2B5EF4-FFF2-40B4-BE49-F238E27FC236}">
+                    <a16:creationId xmlns:a16="http://schemas.microsoft.com/office/drawing/2014/main" id="{E3E3388C-D99D-72D2-79CA-4B6F9F1449D2}"/>
+                  </a:ext>
+                </a:extLst>
+              </p:cNvPr>
+              <p:cNvPicPr>
+                <a:picLocks noChangeAspect="1"/>
+              </p:cNvPicPr>
+              <p:nvPr/>
+            </p:nvPicPr>
+            <p:blipFill rotWithShape="1">
+              <a:blip r:embed="rId2"/>
+              <a:srcRect l="9123" r="14411" b="65718"/>
+              <a:stretch>
+                <a:fillRect/>
+              </a:stretch>
+            </p:blipFill>
+            <p:spPr>
+              <a:xfrm>
+                <a:off x="1246735" y="704087"/>
+                <a:ext cx="8640862" cy="2730754"/>
+              </a:xfrm>
+              <a:prstGeom prst="rect">
+                <a:avLst/>
+              </a:prstGeom>
+            </p:spPr>
+          </p:pic>
+        </p:grpSp>
+        <p:grpSp>
+          <p:nvGrpSpPr>
+            <p:cNvPr id="9" name="グループ化 8">
+              <a:extLst>
+                <a:ext uri="{FF2B5EF4-FFF2-40B4-BE49-F238E27FC236}">
+                  <a16:creationId xmlns:a16="http://schemas.microsoft.com/office/drawing/2014/main" id="{39A35922-D925-E01D-2D97-2553CAD4C0BF}"/>
+                </a:ext>
+              </a:extLst>
+            </p:cNvPr>
+            <p:cNvGrpSpPr/>
+            <p:nvPr/>
+          </p:nvGrpSpPr>
+          <p:grpSpPr>
+            <a:xfrm>
+              <a:off x="1451834" y="1344915"/>
+              <a:ext cx="8462009" cy="1585033"/>
+              <a:chOff x="1451834" y="1344915"/>
+              <a:chExt cx="8885958" cy="1362085"/>
+            </a:xfrm>
+          </p:grpSpPr>
+          <p:sp>
+            <p:nvSpPr>
+              <p:cNvPr id="10" name="正方形/長方形 9">
+                <a:extLst>
+                  <a:ext uri="{FF2B5EF4-FFF2-40B4-BE49-F238E27FC236}">
+                    <a16:creationId xmlns:a16="http://schemas.microsoft.com/office/drawing/2014/main" id="{403654BE-CC03-BA01-F7DE-212845F10F81}"/>
+                  </a:ext>
+                </a:extLst>
+              </p:cNvPr>
+              <p:cNvSpPr/>
+              <p:nvPr/>
+            </p:nvSpPr>
+            <p:spPr>
+              <a:xfrm>
+                <a:off x="1451834" y="1412829"/>
+                <a:ext cx="2578686" cy="357256"/>
+              </a:xfrm>
+              <a:prstGeom prst="rect">
+                <a:avLst/>
+              </a:prstGeom>
+              <a:noFill/>
+              <a:ln w="28575">
+                <a:solidFill>
+                  <a:srgbClr val="FF0000"/>
+                </a:solidFill>
+                <a:prstDash val="solid"/>
+              </a:ln>
+            </p:spPr>
+            <p:style>
+              <a:lnRef idx="2">
+                <a:schemeClr val="accent6"/>
+              </a:lnRef>
+              <a:fillRef idx="1">
+                <a:schemeClr val="lt1"/>
+              </a:fillRef>
+              <a:effectRef idx="0">
+                <a:schemeClr val="accent6"/>
+              </a:effectRef>
+              <a:fontRef idx="minor">
+                <a:schemeClr val="dk1"/>
+              </a:fontRef>
+            </p:style>
+            <p:txBody>
+              <a:bodyPr rtlCol="0" anchor="t"/>
+              <a:lstStyle>
+                <a:lvl1pPr marL="0" indent="0">
+                  <a:defRPr sz="1100">
+                    <a:solidFill>
+                      <a:schemeClr val="dk1"/>
+                    </a:solidFill>
+                    <a:latin typeface="+mn-lt"/>
+                    <a:ea typeface="+mn-ea"/>
+                    <a:cs typeface="+mn-cs"/>
+                  </a:defRPr>
+                </a:lvl1pPr>
+                <a:lvl2pPr marL="457200" indent="0">
+                  <a:defRPr sz="1100">
+                    <a:solidFill>
+                      <a:schemeClr val="dk1"/>
+                    </a:solidFill>
+                    <a:latin typeface="+mn-lt"/>
+                    <a:ea typeface="+mn-ea"/>
+                    <a:cs typeface="+mn-cs"/>
+                  </a:defRPr>
+                </a:lvl2pPr>
+                <a:lvl3pPr marL="914400" indent="0">
+                  <a:defRPr sz="1100">
+                    <a:solidFill>
+                      <a:schemeClr val="dk1"/>
+                    </a:solidFill>
+                    <a:latin typeface="+mn-lt"/>
+                    <a:ea typeface="+mn-ea"/>
+                    <a:cs typeface="+mn-cs"/>
+                  </a:defRPr>
+                </a:lvl3pPr>
+                <a:lvl4pPr marL="1371600" indent="0">
+                  <a:defRPr sz="1100">
+                    <a:solidFill>
+                      <a:schemeClr val="dk1"/>
+                    </a:solidFill>
+                    <a:latin typeface="+mn-lt"/>
+                    <a:ea typeface="+mn-ea"/>
+                    <a:cs typeface="+mn-cs"/>
+                  </a:defRPr>
+                </a:lvl4pPr>
+                <a:lvl5pPr marL="1828800" indent="0">
+                  <a:defRPr sz="1100">
+                    <a:solidFill>
+                      <a:schemeClr val="dk1"/>
+                    </a:solidFill>
+                    <a:latin typeface="+mn-lt"/>
+                    <a:ea typeface="+mn-ea"/>
+                    <a:cs typeface="+mn-cs"/>
+                  </a:defRPr>
+                </a:lvl5pPr>
+                <a:lvl6pPr marL="2286000" indent="0">
+                  <a:defRPr sz="1100">
+                    <a:solidFill>
+                      <a:schemeClr val="dk1"/>
+                    </a:solidFill>
+                    <a:latin typeface="+mn-lt"/>
+                    <a:ea typeface="+mn-ea"/>
+                    <a:cs typeface="+mn-cs"/>
+                  </a:defRPr>
+                </a:lvl6pPr>
+                <a:lvl7pPr marL="2743200" indent="0">
+                  <a:defRPr sz="1100">
+                    <a:solidFill>
+                      <a:schemeClr val="dk1"/>
+                    </a:solidFill>
+                    <a:latin typeface="+mn-lt"/>
+                    <a:ea typeface="+mn-ea"/>
+                    <a:cs typeface="+mn-cs"/>
+                  </a:defRPr>
+                </a:lvl7pPr>
+                <a:lvl8pPr marL="3200400" indent="0">
+                  <a:defRPr sz="1100">
+                    <a:solidFill>
+                      <a:schemeClr val="dk1"/>
+                    </a:solidFill>
+                    <a:latin typeface="+mn-lt"/>
+                    <a:ea typeface="+mn-ea"/>
+                    <a:cs typeface="+mn-cs"/>
+                  </a:defRPr>
+                </a:lvl8pPr>
+                <a:lvl9pPr marL="3657600" indent="0">
+                  <a:defRPr sz="1100">
+                    <a:solidFill>
+                      <a:schemeClr val="dk1"/>
+                    </a:solidFill>
+                    <a:latin typeface="+mn-lt"/>
+                    <a:ea typeface="+mn-ea"/>
+                    <a:cs typeface="+mn-cs"/>
+                  </a:defRPr>
+                </a:lvl9pPr>
+              </a:lstStyle>
+              <a:p>
+                <a:pPr algn="l"/>
+                <a:endParaRPr kumimoji="1" lang="ja-JP" altLang="en-US" sz="1100"/>
+              </a:p>
+            </p:txBody>
+          </p:sp>
+          <p:sp>
+            <p:nvSpPr>
+              <p:cNvPr id="11" name="正方形/長方形 10">
+                <a:extLst>
+                  <a:ext uri="{FF2B5EF4-FFF2-40B4-BE49-F238E27FC236}">
+                    <a16:creationId xmlns:a16="http://schemas.microsoft.com/office/drawing/2014/main" id="{9DCAF8EA-B50A-FAED-87AE-31E6A054FB59}"/>
+                  </a:ext>
+                </a:extLst>
+              </p:cNvPr>
+              <p:cNvSpPr/>
+              <p:nvPr/>
+            </p:nvSpPr>
+            <p:spPr>
+              <a:xfrm>
+                <a:off x="1667966" y="2319419"/>
+                <a:ext cx="1301288" cy="364529"/>
+              </a:xfrm>
+              <a:prstGeom prst="rect">
+                <a:avLst/>
+              </a:prstGeom>
+              <a:noFill/>
+              <a:ln w="28575">
+                <a:solidFill>
+                  <a:srgbClr val="FF0000"/>
+                </a:solidFill>
+                <a:prstDash val="solid"/>
+              </a:ln>
+            </p:spPr>
+            <p:style>
+              <a:lnRef idx="2">
+                <a:schemeClr val="accent6"/>
+              </a:lnRef>
+              <a:fillRef idx="1">
+                <a:schemeClr val="lt1"/>
+              </a:fillRef>
+              <a:effectRef idx="0">
+                <a:schemeClr val="accent6"/>
+              </a:effectRef>
+              <a:fontRef idx="minor">
+                <a:schemeClr val="dk1"/>
+              </a:fontRef>
+            </p:style>
+            <p:txBody>
+              <a:bodyPr rtlCol="0" anchor="t"/>
+              <a:lstStyle>
+                <a:lvl1pPr marL="0" indent="0">
+                  <a:defRPr sz="1100">
+                    <a:solidFill>
+                      <a:schemeClr val="dk1"/>
+                    </a:solidFill>
+                    <a:latin typeface="+mn-lt"/>
+                    <a:ea typeface="+mn-ea"/>
+                    <a:cs typeface="+mn-cs"/>
+                  </a:defRPr>
+                </a:lvl1pPr>
+                <a:lvl2pPr marL="457200" indent="0">
+                  <a:defRPr sz="1100">
+                    <a:solidFill>
+                      <a:schemeClr val="dk1"/>
+                    </a:solidFill>
+                    <a:latin typeface="+mn-lt"/>
+                    <a:ea typeface="+mn-ea"/>
+                    <a:cs typeface="+mn-cs"/>
+                  </a:defRPr>
+                </a:lvl2pPr>
+                <a:lvl3pPr marL="914400" indent="0">
+                  <a:defRPr sz="1100">
+                    <a:solidFill>
+                      <a:schemeClr val="dk1"/>
+                    </a:solidFill>
+                    <a:latin typeface="+mn-lt"/>
+                    <a:ea typeface="+mn-ea"/>
+                    <a:cs typeface="+mn-cs"/>
+                  </a:defRPr>
+                </a:lvl3pPr>
+                <a:lvl4pPr marL="1371600" indent="0">
+                  <a:defRPr sz="1100">
+                    <a:solidFill>
+                      <a:schemeClr val="dk1"/>
+                    </a:solidFill>
+                    <a:latin typeface="+mn-lt"/>
+                    <a:ea typeface="+mn-ea"/>
+                    <a:cs typeface="+mn-cs"/>
+                  </a:defRPr>
+                </a:lvl4pPr>
+                <a:lvl5pPr marL="1828800" indent="0">
+                  <a:defRPr sz="1100">
+                    <a:solidFill>
+                      <a:schemeClr val="dk1"/>
+                    </a:solidFill>
+                    <a:latin typeface="+mn-lt"/>
+                    <a:ea typeface="+mn-ea"/>
+                    <a:cs typeface="+mn-cs"/>
+                  </a:defRPr>
+                </a:lvl5pPr>
+                <a:lvl6pPr marL="2286000" indent="0">
+                  <a:defRPr sz="1100">
+                    <a:solidFill>
+                      <a:schemeClr val="dk1"/>
+                    </a:solidFill>
+                    <a:latin typeface="+mn-lt"/>
+                    <a:ea typeface="+mn-ea"/>
+                    <a:cs typeface="+mn-cs"/>
+                  </a:defRPr>
+                </a:lvl6pPr>
+                <a:lvl7pPr marL="2743200" indent="0">
+                  <a:defRPr sz="1100">
+                    <a:solidFill>
+                      <a:schemeClr val="dk1"/>
+                    </a:solidFill>
+                    <a:latin typeface="+mn-lt"/>
+                    <a:ea typeface="+mn-ea"/>
+                    <a:cs typeface="+mn-cs"/>
+                  </a:defRPr>
+                </a:lvl7pPr>
+                <a:lvl8pPr marL="3200400" indent="0">
+                  <a:defRPr sz="1100">
+                    <a:solidFill>
+                      <a:schemeClr val="dk1"/>
+                    </a:solidFill>
+                    <a:latin typeface="+mn-lt"/>
+                    <a:ea typeface="+mn-ea"/>
+                    <a:cs typeface="+mn-cs"/>
+                  </a:defRPr>
+                </a:lvl8pPr>
+                <a:lvl9pPr marL="3657600" indent="0">
+                  <a:defRPr sz="1100">
+                    <a:solidFill>
+                      <a:schemeClr val="dk1"/>
+                    </a:solidFill>
+                    <a:latin typeface="+mn-lt"/>
+                    <a:ea typeface="+mn-ea"/>
+                    <a:cs typeface="+mn-cs"/>
+                  </a:defRPr>
+                </a:lvl9pPr>
+              </a:lstStyle>
+              <a:p>
+                <a:pPr algn="l"/>
+                <a:endParaRPr kumimoji="1" lang="ja-JP" altLang="en-US" sz="1100"/>
+              </a:p>
+            </p:txBody>
+          </p:sp>
+          <p:sp>
+            <p:nvSpPr>
+              <p:cNvPr id="12" name="正方形/長方形 11">
+                <a:extLst>
+                  <a:ext uri="{FF2B5EF4-FFF2-40B4-BE49-F238E27FC236}">
+                    <a16:creationId xmlns:a16="http://schemas.microsoft.com/office/drawing/2014/main" id="{8667634C-E793-C5B6-1A29-CFB15874789A}"/>
+                  </a:ext>
+                </a:extLst>
+              </p:cNvPr>
+              <p:cNvSpPr/>
+              <p:nvPr/>
+            </p:nvSpPr>
+            <p:spPr>
+              <a:xfrm>
+                <a:off x="9008087" y="1374311"/>
+                <a:ext cx="1329705" cy="346668"/>
+              </a:xfrm>
+              <a:prstGeom prst="rect">
+                <a:avLst/>
+              </a:prstGeom>
+              <a:noFill/>
+              <a:ln w="28575">
+                <a:solidFill>
+                  <a:srgbClr val="FF0000"/>
+                </a:solidFill>
+                <a:prstDash val="solid"/>
+              </a:ln>
+            </p:spPr>
+            <p:style>
+              <a:lnRef idx="2">
+                <a:schemeClr val="accent6"/>
+              </a:lnRef>
+              <a:fillRef idx="1">
+                <a:schemeClr val="lt1"/>
+              </a:fillRef>
+              <a:effectRef idx="0">
+                <a:schemeClr val="accent6"/>
+              </a:effectRef>
+              <a:fontRef idx="minor">
+                <a:schemeClr val="dk1"/>
+              </a:fontRef>
+            </p:style>
+            <p:txBody>
+              <a:bodyPr rtlCol="0" anchor="t"/>
+              <a:lstStyle>
+                <a:lvl1pPr marL="0" indent="0">
+                  <a:defRPr sz="1100">
+                    <a:solidFill>
+                      <a:schemeClr val="dk1"/>
+                    </a:solidFill>
+                    <a:latin typeface="+mn-lt"/>
+                    <a:ea typeface="+mn-ea"/>
+                    <a:cs typeface="+mn-cs"/>
+                  </a:defRPr>
+                </a:lvl1pPr>
+                <a:lvl2pPr marL="457200" indent="0">
+                  <a:defRPr sz="1100">
+                    <a:solidFill>
+                      <a:schemeClr val="dk1"/>
+                    </a:solidFill>
+                    <a:latin typeface="+mn-lt"/>
+                    <a:ea typeface="+mn-ea"/>
+                    <a:cs typeface="+mn-cs"/>
+                  </a:defRPr>
+                </a:lvl2pPr>
+                <a:lvl3pPr marL="914400" indent="0">
+                  <a:defRPr sz="1100">
+                    <a:solidFill>
+                      <a:schemeClr val="dk1"/>
+                    </a:solidFill>
+                    <a:latin typeface="+mn-lt"/>
+                    <a:ea typeface="+mn-ea"/>
+                    <a:cs typeface="+mn-cs"/>
+                  </a:defRPr>
+                </a:lvl3pPr>
+                <a:lvl4pPr marL="1371600" indent="0">
+                  <a:defRPr sz="1100">
+                    <a:solidFill>
+                      <a:schemeClr val="dk1"/>
+                    </a:solidFill>
+                    <a:latin typeface="+mn-lt"/>
+                    <a:ea typeface="+mn-ea"/>
+                    <a:cs typeface="+mn-cs"/>
+                  </a:defRPr>
+                </a:lvl4pPr>
+                <a:lvl5pPr marL="1828800" indent="0">
+                  <a:defRPr sz="1100">
+                    <a:solidFill>
+                      <a:schemeClr val="dk1"/>
+                    </a:solidFill>
+                    <a:latin typeface="+mn-lt"/>
+                    <a:ea typeface="+mn-ea"/>
+                    <a:cs typeface="+mn-cs"/>
+                  </a:defRPr>
+                </a:lvl5pPr>
+                <a:lvl6pPr marL="2286000" indent="0">
+                  <a:defRPr sz="1100">
+                    <a:solidFill>
+                      <a:schemeClr val="dk1"/>
+                    </a:solidFill>
+                    <a:latin typeface="+mn-lt"/>
+                    <a:ea typeface="+mn-ea"/>
+                    <a:cs typeface="+mn-cs"/>
+                  </a:defRPr>
+                </a:lvl6pPr>
+                <a:lvl7pPr marL="2743200" indent="0">
+                  <a:defRPr sz="1100">
+                    <a:solidFill>
+                      <a:schemeClr val="dk1"/>
+                    </a:solidFill>
+                    <a:latin typeface="+mn-lt"/>
+                    <a:ea typeface="+mn-ea"/>
+                    <a:cs typeface="+mn-cs"/>
+                  </a:defRPr>
+                </a:lvl7pPr>
+                <a:lvl8pPr marL="3200400" indent="0">
+                  <a:defRPr sz="1100">
+                    <a:solidFill>
+                      <a:schemeClr val="dk1"/>
+                    </a:solidFill>
+                    <a:latin typeface="+mn-lt"/>
+                    <a:ea typeface="+mn-ea"/>
+                    <a:cs typeface="+mn-cs"/>
+                  </a:defRPr>
+                </a:lvl8pPr>
+                <a:lvl9pPr marL="3657600" indent="0">
+                  <a:defRPr sz="1100">
+                    <a:solidFill>
+                      <a:schemeClr val="dk1"/>
+                    </a:solidFill>
+                    <a:latin typeface="+mn-lt"/>
+                    <a:ea typeface="+mn-ea"/>
+                    <a:cs typeface="+mn-cs"/>
+                  </a:defRPr>
+                </a:lvl9pPr>
+              </a:lstStyle>
+              <a:p>
+                <a:pPr algn="l"/>
+                <a:endParaRPr kumimoji="1" lang="ja-JP" altLang="en-US" sz="1100"/>
+              </a:p>
+            </p:txBody>
+          </p:sp>
+          <p:cxnSp>
+            <p:nvCxnSpPr>
+              <p:cNvPr id="13" name="直線矢印コネクタ 12">
+                <a:extLst>
+                  <a:ext uri="{FF2B5EF4-FFF2-40B4-BE49-F238E27FC236}">
+                    <a16:creationId xmlns:a16="http://schemas.microsoft.com/office/drawing/2014/main" id="{F8BF77E2-5D8B-B307-7534-3E1C0E265653}"/>
+                  </a:ext>
+                </a:extLst>
+              </p:cNvPr>
+              <p:cNvCxnSpPr>
+                <a:stCxn id="14" idx="1"/>
+                <a:endCxn id="10" idx="3"/>
+              </p:cNvCxnSpPr>
+              <p:nvPr/>
+            </p:nvCxnSpPr>
+            <p:spPr>
+              <a:xfrm flipH="1">
+                <a:off x="4030520" y="1589166"/>
+                <a:ext cx="624821" cy="2291"/>
+              </a:xfrm>
+              <a:prstGeom prst="straightConnector1">
+                <a:avLst/>
+              </a:prstGeom>
+              <a:ln w="28575">
+                <a:solidFill>
+                  <a:srgbClr val="FF0000"/>
+                </a:solidFill>
+                <a:tailEnd type="triangle"/>
+              </a:ln>
+            </p:spPr>
+            <p:style>
+              <a:lnRef idx="2">
+                <a:schemeClr val="accent1"/>
+              </a:lnRef>
+              <a:fillRef idx="0">
+                <a:schemeClr val="accent1"/>
+              </a:fillRef>
+              <a:effectRef idx="1">
+                <a:schemeClr val="accent1"/>
+              </a:effectRef>
+              <a:fontRef idx="minor">
+                <a:schemeClr val="tx1"/>
+              </a:fontRef>
+            </p:style>
+          </p:cxnSp>
+          <p:sp>
+            <p:nvSpPr>
+              <p:cNvPr id="14" name="正方形/長方形 13">
+                <a:extLst>
+                  <a:ext uri="{FF2B5EF4-FFF2-40B4-BE49-F238E27FC236}">
+                    <a16:creationId xmlns:a16="http://schemas.microsoft.com/office/drawing/2014/main" id="{9E718FB3-B9ED-7C99-376F-6AD5B33ED941}"/>
+                  </a:ext>
+                </a:extLst>
+              </p:cNvPr>
+              <p:cNvSpPr/>
+              <p:nvPr/>
+            </p:nvSpPr>
+            <p:spPr>
+              <a:xfrm>
+                <a:off x="4655341" y="1375113"/>
+                <a:ext cx="1508759" cy="428106"/>
+              </a:xfrm>
+              <a:prstGeom prst="rect">
+                <a:avLst/>
+              </a:prstGeom>
+              <a:ln w="28575">
+                <a:solidFill>
+                  <a:srgbClr val="FF0000"/>
+                </a:solidFill>
+              </a:ln>
+            </p:spPr>
+            <p:style>
+              <a:lnRef idx="2">
+                <a:schemeClr val="accent6"/>
+              </a:lnRef>
+              <a:fillRef idx="1">
+                <a:schemeClr val="lt1"/>
+              </a:fillRef>
+              <a:effectRef idx="0">
+                <a:schemeClr val="accent6"/>
+              </a:effectRef>
+              <a:fontRef idx="minor">
+                <a:schemeClr val="dk1"/>
+              </a:fontRef>
+            </p:style>
+            <p:txBody>
+              <a:bodyPr rtlCol="0" anchor="ctr"/>
+              <a:lstStyle>
+                <a:lvl1pPr marL="0" indent="0">
+                  <a:defRPr sz="1100">
+                    <a:solidFill>
+                      <a:schemeClr val="dk1"/>
+                    </a:solidFill>
+                    <a:latin typeface="+mn-lt"/>
+                    <a:ea typeface="+mn-ea"/>
+                    <a:cs typeface="+mn-cs"/>
+                  </a:defRPr>
+                </a:lvl1pPr>
+                <a:lvl2pPr marL="457200" indent="0">
+                  <a:defRPr sz="1100">
+                    <a:solidFill>
+                      <a:schemeClr val="dk1"/>
+                    </a:solidFill>
+                    <a:latin typeface="+mn-lt"/>
+                    <a:ea typeface="+mn-ea"/>
+                    <a:cs typeface="+mn-cs"/>
+                  </a:defRPr>
+                </a:lvl2pPr>
+                <a:lvl3pPr marL="914400" indent="0">
+                  <a:defRPr sz="1100">
+                    <a:solidFill>
+                      <a:schemeClr val="dk1"/>
+                    </a:solidFill>
+                    <a:latin typeface="+mn-lt"/>
+                    <a:ea typeface="+mn-ea"/>
+                    <a:cs typeface="+mn-cs"/>
+                  </a:defRPr>
+                </a:lvl3pPr>
+                <a:lvl4pPr marL="1371600" indent="0">
+                  <a:defRPr sz="1100">
+                    <a:solidFill>
+                      <a:schemeClr val="dk1"/>
+                    </a:solidFill>
+                    <a:latin typeface="+mn-lt"/>
+                    <a:ea typeface="+mn-ea"/>
+                    <a:cs typeface="+mn-cs"/>
+                  </a:defRPr>
+                </a:lvl4pPr>
+                <a:lvl5pPr marL="1828800" indent="0">
+                  <a:defRPr sz="1100">
+                    <a:solidFill>
+                      <a:schemeClr val="dk1"/>
+                    </a:solidFill>
+                    <a:latin typeface="+mn-lt"/>
+                    <a:ea typeface="+mn-ea"/>
+                    <a:cs typeface="+mn-cs"/>
+                  </a:defRPr>
+                </a:lvl5pPr>
+                <a:lvl6pPr marL="2286000" indent="0">
+                  <a:defRPr sz="1100">
+                    <a:solidFill>
+                      <a:schemeClr val="dk1"/>
+                    </a:solidFill>
+                    <a:latin typeface="+mn-lt"/>
+                    <a:ea typeface="+mn-ea"/>
+                    <a:cs typeface="+mn-cs"/>
+                  </a:defRPr>
+                </a:lvl6pPr>
+                <a:lvl7pPr marL="2743200" indent="0">
+                  <a:defRPr sz="1100">
+                    <a:solidFill>
+                      <a:schemeClr val="dk1"/>
+                    </a:solidFill>
+                    <a:latin typeface="+mn-lt"/>
+                    <a:ea typeface="+mn-ea"/>
+                    <a:cs typeface="+mn-cs"/>
+                  </a:defRPr>
+                </a:lvl7pPr>
+                <a:lvl8pPr marL="3200400" indent="0">
+                  <a:defRPr sz="1100">
+                    <a:solidFill>
+                      <a:schemeClr val="dk1"/>
+                    </a:solidFill>
+                    <a:latin typeface="+mn-lt"/>
+                    <a:ea typeface="+mn-ea"/>
+                    <a:cs typeface="+mn-cs"/>
+                  </a:defRPr>
+                </a:lvl8pPr>
+                <a:lvl9pPr marL="3657600" indent="0">
+                  <a:defRPr sz="1100">
+                    <a:solidFill>
+                      <a:schemeClr val="dk1"/>
+                    </a:solidFill>
+                    <a:latin typeface="+mn-lt"/>
+                    <a:ea typeface="+mn-ea"/>
+                    <a:cs typeface="+mn-cs"/>
+                  </a:defRPr>
+                </a:lvl9pPr>
+              </a:lstStyle>
+              <a:p>
+                <a:pPr algn="l"/>
+                <a:r>
+                  <a:rPr kumimoji="1" lang="ja-JP" altLang="en-US" sz="1200" b="1">
+                    <a:solidFill>
+                      <a:srgbClr val="FF0000"/>
+                    </a:solidFill>
+                  </a:rPr>
+                  <a:t>①タブの切り替え</a:t>
+                </a:r>
+              </a:p>
+            </p:txBody>
+          </p:sp>
+          <p:sp>
+            <p:nvSpPr>
+              <p:cNvPr id="15" name="正方形/長方形 14">
+                <a:extLst>
+                  <a:ext uri="{FF2B5EF4-FFF2-40B4-BE49-F238E27FC236}">
+                    <a16:creationId xmlns:a16="http://schemas.microsoft.com/office/drawing/2014/main" id="{8CB59C3C-250B-F0F7-99E7-33F14F34D287}"/>
+                  </a:ext>
+                </a:extLst>
+              </p:cNvPr>
+              <p:cNvSpPr/>
+              <p:nvPr/>
+            </p:nvSpPr>
+            <p:spPr>
+              <a:xfrm>
+                <a:off x="3306957" y="2286515"/>
+                <a:ext cx="2157623" cy="420485"/>
+              </a:xfrm>
+              <a:prstGeom prst="rect">
+                <a:avLst/>
+              </a:prstGeom>
+              <a:ln w="28575">
+                <a:solidFill>
+                  <a:srgbClr val="FF0000"/>
+                </a:solidFill>
+              </a:ln>
+            </p:spPr>
+            <p:style>
+              <a:lnRef idx="2">
+                <a:schemeClr val="accent6"/>
+              </a:lnRef>
+              <a:fillRef idx="1">
+                <a:schemeClr val="lt1"/>
+              </a:fillRef>
+              <a:effectRef idx="0">
+                <a:schemeClr val="accent6"/>
+              </a:effectRef>
+              <a:fontRef idx="minor">
+                <a:schemeClr val="dk1"/>
+              </a:fontRef>
+            </p:style>
+            <p:txBody>
+              <a:bodyPr rtlCol="0" anchor="ctr"/>
+              <a:lstStyle>
+                <a:lvl1pPr marL="0" indent="0">
+                  <a:defRPr sz="1100">
+                    <a:solidFill>
+                      <a:schemeClr val="dk1"/>
+                    </a:solidFill>
+                    <a:latin typeface="+mn-lt"/>
+                    <a:ea typeface="+mn-ea"/>
+                    <a:cs typeface="+mn-cs"/>
+                  </a:defRPr>
+                </a:lvl1pPr>
+                <a:lvl2pPr marL="457200" indent="0">
+                  <a:defRPr sz="1100">
+                    <a:solidFill>
+                      <a:schemeClr val="dk1"/>
+                    </a:solidFill>
+                    <a:latin typeface="+mn-lt"/>
+                    <a:ea typeface="+mn-ea"/>
+                    <a:cs typeface="+mn-cs"/>
+                  </a:defRPr>
+                </a:lvl2pPr>
+                <a:lvl3pPr marL="914400" indent="0">
+                  <a:defRPr sz="1100">
+                    <a:solidFill>
+                      <a:schemeClr val="dk1"/>
+                    </a:solidFill>
+                    <a:latin typeface="+mn-lt"/>
+                    <a:ea typeface="+mn-ea"/>
+                    <a:cs typeface="+mn-cs"/>
+                  </a:defRPr>
+                </a:lvl3pPr>
+                <a:lvl4pPr marL="1371600" indent="0">
+                  <a:defRPr sz="1100">
+                    <a:solidFill>
+                      <a:schemeClr val="dk1"/>
+                    </a:solidFill>
+                    <a:latin typeface="+mn-lt"/>
+                    <a:ea typeface="+mn-ea"/>
+                    <a:cs typeface="+mn-cs"/>
+                  </a:defRPr>
+                </a:lvl4pPr>
+                <a:lvl5pPr marL="1828800" indent="0">
+                  <a:defRPr sz="1100">
+                    <a:solidFill>
+                      <a:schemeClr val="dk1"/>
+                    </a:solidFill>
+                    <a:latin typeface="+mn-lt"/>
+                    <a:ea typeface="+mn-ea"/>
+                    <a:cs typeface="+mn-cs"/>
+                  </a:defRPr>
+                </a:lvl5pPr>
+                <a:lvl6pPr marL="2286000" indent="0">
+                  <a:defRPr sz="1100">
+                    <a:solidFill>
+                      <a:schemeClr val="dk1"/>
+                    </a:solidFill>
+                    <a:latin typeface="+mn-lt"/>
+                    <a:ea typeface="+mn-ea"/>
+                    <a:cs typeface="+mn-cs"/>
+                  </a:defRPr>
+                </a:lvl6pPr>
+                <a:lvl7pPr marL="2743200" indent="0">
+                  <a:defRPr sz="1100">
+                    <a:solidFill>
+                      <a:schemeClr val="dk1"/>
+                    </a:solidFill>
+                    <a:latin typeface="+mn-lt"/>
+                    <a:ea typeface="+mn-ea"/>
+                    <a:cs typeface="+mn-cs"/>
+                  </a:defRPr>
+                </a:lvl7pPr>
+                <a:lvl8pPr marL="3200400" indent="0">
+                  <a:defRPr sz="1100">
+                    <a:solidFill>
+                      <a:schemeClr val="dk1"/>
+                    </a:solidFill>
+                    <a:latin typeface="+mn-lt"/>
+                    <a:ea typeface="+mn-ea"/>
+                    <a:cs typeface="+mn-cs"/>
+                  </a:defRPr>
+                </a:lvl8pPr>
+                <a:lvl9pPr marL="3657600" indent="0">
+                  <a:defRPr sz="1100">
+                    <a:solidFill>
+                      <a:schemeClr val="dk1"/>
+                    </a:solidFill>
+                    <a:latin typeface="+mn-lt"/>
+                    <a:ea typeface="+mn-ea"/>
+                    <a:cs typeface="+mn-cs"/>
+                  </a:defRPr>
+                </a:lvl9pPr>
+              </a:lstStyle>
+              <a:p>
+                <a:pPr algn="l"/>
+                <a:r>
+                  <a:rPr kumimoji="1" lang="ja-JP" altLang="en-US" sz="1200" b="1">
+                    <a:solidFill>
+                      <a:srgbClr val="FF0000"/>
+                    </a:solidFill>
+                  </a:rPr>
+                  <a:t>②入力ファイルの読み込み</a:t>
+                </a:r>
+              </a:p>
+            </p:txBody>
+          </p:sp>
+          <p:cxnSp>
+            <p:nvCxnSpPr>
+              <p:cNvPr id="16" name="直線矢印コネクタ 15">
+                <a:extLst>
+                  <a:ext uri="{FF2B5EF4-FFF2-40B4-BE49-F238E27FC236}">
+                    <a16:creationId xmlns:a16="http://schemas.microsoft.com/office/drawing/2014/main" id="{6B23FC7A-9023-256E-98E6-976A8F40800D}"/>
+                  </a:ext>
+                </a:extLst>
+              </p:cNvPr>
+              <p:cNvCxnSpPr>
+                <a:stCxn id="15" idx="1"/>
+                <a:endCxn id="11" idx="3"/>
+              </p:cNvCxnSpPr>
+              <p:nvPr/>
+            </p:nvCxnSpPr>
+            <p:spPr>
+              <a:xfrm flipH="1">
+                <a:off x="2969254" y="2496758"/>
+                <a:ext cx="337703" cy="4926"/>
+              </a:xfrm>
+              <a:prstGeom prst="straightConnector1">
+                <a:avLst/>
+              </a:prstGeom>
+              <a:ln w="28575">
+                <a:solidFill>
+                  <a:srgbClr val="FF0000"/>
+                </a:solidFill>
+                <a:tailEnd type="triangle"/>
+              </a:ln>
+            </p:spPr>
+            <p:style>
+              <a:lnRef idx="2">
+                <a:schemeClr val="accent1"/>
+              </a:lnRef>
+              <a:fillRef idx="0">
+                <a:schemeClr val="accent1"/>
+              </a:fillRef>
+              <a:effectRef idx="1">
+                <a:schemeClr val="accent1"/>
+              </a:effectRef>
+              <a:fontRef idx="minor">
+                <a:schemeClr val="tx1"/>
+              </a:fontRef>
+            </p:style>
+          </p:cxnSp>
+          <p:sp>
+            <p:nvSpPr>
+              <p:cNvPr id="17" name="正方形/長方形 16">
+                <a:extLst>
+                  <a:ext uri="{FF2B5EF4-FFF2-40B4-BE49-F238E27FC236}">
+                    <a16:creationId xmlns:a16="http://schemas.microsoft.com/office/drawing/2014/main" id="{DA7B2137-9475-4AF0-80AE-507F40708728}"/>
+                  </a:ext>
+                </a:extLst>
+              </p:cNvPr>
+              <p:cNvSpPr/>
+              <p:nvPr/>
+            </p:nvSpPr>
+            <p:spPr>
+              <a:xfrm>
+                <a:off x="6926073" y="1344915"/>
+                <a:ext cx="1640080" cy="400743"/>
+              </a:xfrm>
+              <a:prstGeom prst="rect">
+                <a:avLst/>
+              </a:prstGeom>
+              <a:ln w="28575">
+                <a:solidFill>
+                  <a:srgbClr val="FF0000"/>
+                </a:solidFill>
+              </a:ln>
+            </p:spPr>
+            <p:style>
+              <a:lnRef idx="2">
+                <a:schemeClr val="accent6"/>
+              </a:lnRef>
+              <a:fillRef idx="1">
+                <a:schemeClr val="lt1"/>
+              </a:fillRef>
+              <a:effectRef idx="0">
+                <a:schemeClr val="accent6"/>
+              </a:effectRef>
+              <a:fontRef idx="minor">
+                <a:schemeClr val="dk1"/>
+              </a:fontRef>
+            </p:style>
+            <p:txBody>
+              <a:bodyPr rtlCol="0" anchor="ctr"/>
+              <a:lstStyle>
+                <a:lvl1pPr marL="0" indent="0">
+                  <a:defRPr sz="1100">
+                    <a:solidFill>
+                      <a:schemeClr val="dk1"/>
+                    </a:solidFill>
+                    <a:latin typeface="+mn-lt"/>
+                    <a:ea typeface="+mn-ea"/>
+                    <a:cs typeface="+mn-cs"/>
+                  </a:defRPr>
+                </a:lvl1pPr>
+                <a:lvl2pPr marL="457200" indent="0">
+                  <a:defRPr sz="1100">
+                    <a:solidFill>
+                      <a:schemeClr val="dk1"/>
+                    </a:solidFill>
+                    <a:latin typeface="+mn-lt"/>
+                    <a:ea typeface="+mn-ea"/>
+                    <a:cs typeface="+mn-cs"/>
+                  </a:defRPr>
+                </a:lvl2pPr>
+                <a:lvl3pPr marL="914400" indent="0">
+                  <a:defRPr sz="1100">
+                    <a:solidFill>
+                      <a:schemeClr val="dk1"/>
+                    </a:solidFill>
+                    <a:latin typeface="+mn-lt"/>
+                    <a:ea typeface="+mn-ea"/>
+                    <a:cs typeface="+mn-cs"/>
+                  </a:defRPr>
+                </a:lvl3pPr>
+                <a:lvl4pPr marL="1371600" indent="0">
+                  <a:defRPr sz="1100">
+                    <a:solidFill>
+                      <a:schemeClr val="dk1"/>
+                    </a:solidFill>
+                    <a:latin typeface="+mn-lt"/>
+                    <a:ea typeface="+mn-ea"/>
+                    <a:cs typeface="+mn-cs"/>
+                  </a:defRPr>
+                </a:lvl4pPr>
+                <a:lvl5pPr marL="1828800" indent="0">
+                  <a:defRPr sz="1100">
+                    <a:solidFill>
+                      <a:schemeClr val="dk1"/>
+                    </a:solidFill>
+                    <a:latin typeface="+mn-lt"/>
+                    <a:ea typeface="+mn-ea"/>
+                    <a:cs typeface="+mn-cs"/>
+                  </a:defRPr>
+                </a:lvl5pPr>
+                <a:lvl6pPr marL="2286000" indent="0">
+                  <a:defRPr sz="1100">
+                    <a:solidFill>
+                      <a:schemeClr val="dk1"/>
+                    </a:solidFill>
+                    <a:latin typeface="+mn-lt"/>
+                    <a:ea typeface="+mn-ea"/>
+                    <a:cs typeface="+mn-cs"/>
+                  </a:defRPr>
+                </a:lvl6pPr>
+                <a:lvl7pPr marL="2743200" indent="0">
+                  <a:defRPr sz="1100">
+                    <a:solidFill>
+                      <a:schemeClr val="dk1"/>
+                    </a:solidFill>
+                    <a:latin typeface="+mn-lt"/>
+                    <a:ea typeface="+mn-ea"/>
+                    <a:cs typeface="+mn-cs"/>
+                  </a:defRPr>
+                </a:lvl7pPr>
+                <a:lvl8pPr marL="3200400" indent="0">
+                  <a:defRPr sz="1100">
+                    <a:solidFill>
+                      <a:schemeClr val="dk1"/>
+                    </a:solidFill>
+                    <a:latin typeface="+mn-lt"/>
+                    <a:ea typeface="+mn-ea"/>
+                    <a:cs typeface="+mn-cs"/>
+                  </a:defRPr>
+                </a:lvl8pPr>
+                <a:lvl9pPr marL="3657600" indent="0">
+                  <a:defRPr sz="1100">
+                    <a:solidFill>
+                      <a:schemeClr val="dk1"/>
+                    </a:solidFill>
+                    <a:latin typeface="+mn-lt"/>
+                    <a:ea typeface="+mn-ea"/>
+                    <a:cs typeface="+mn-cs"/>
+                  </a:defRPr>
+                </a:lvl9pPr>
+              </a:lstStyle>
+              <a:p>
+                <a:pPr algn="l"/>
+                <a:r>
+                  <a:rPr kumimoji="1" lang="ja-JP" altLang="en-US" sz="1200" b="1">
+                    <a:solidFill>
+                      <a:srgbClr val="FF0000"/>
+                    </a:solidFill>
+                  </a:rPr>
+                  <a:t>③入力内容をクリア</a:t>
+                </a:r>
+              </a:p>
+            </p:txBody>
+          </p:sp>
+          <p:cxnSp>
+            <p:nvCxnSpPr>
+              <p:cNvPr id="18" name="直線矢印コネクタ 17">
+                <a:extLst>
+                  <a:ext uri="{FF2B5EF4-FFF2-40B4-BE49-F238E27FC236}">
+                    <a16:creationId xmlns:a16="http://schemas.microsoft.com/office/drawing/2014/main" id="{13C550A2-2E01-5905-F9C1-A4E5015DE494}"/>
+                  </a:ext>
+                </a:extLst>
+              </p:cNvPr>
+              <p:cNvCxnSpPr>
+                <a:stCxn id="17" idx="3"/>
+                <a:endCxn id="12" idx="1"/>
+              </p:cNvCxnSpPr>
+              <p:nvPr/>
+            </p:nvCxnSpPr>
+            <p:spPr>
+              <a:xfrm>
+                <a:off x="8566153" y="1545287"/>
+                <a:ext cx="441934" cy="2358"/>
+              </a:xfrm>
+              <a:prstGeom prst="straightConnector1">
+                <a:avLst/>
+              </a:prstGeom>
+              <a:ln w="28575">
+                <a:solidFill>
+                  <a:srgbClr val="FF0000"/>
+                </a:solidFill>
+                <a:tailEnd type="triangle"/>
+              </a:ln>
+            </p:spPr>
+            <p:style>
+              <a:lnRef idx="2">
+                <a:schemeClr val="accent1"/>
+              </a:lnRef>
+              <a:fillRef idx="0">
+                <a:schemeClr val="accent1"/>
+              </a:fillRef>
+              <a:effectRef idx="1">
+                <a:schemeClr val="accent1"/>
+              </a:effectRef>
+              <a:fontRef idx="minor">
+                <a:schemeClr val="tx1"/>
+              </a:fontRef>
+            </p:style>
+          </p:cxnSp>
+        </p:grpSp>
+      </p:grpSp>
+    </p:spTree>
+    <p:extLst>
+      <p:ext uri="{BB962C8B-B14F-4D97-AF65-F5344CB8AC3E}">
+        <p14:creationId xmlns:p14="http://schemas.microsoft.com/office/powerpoint/2010/main" val="1138528472"/>
+      </p:ext>
+    </p:extLst>
+  </p:cSld>
+  <p:clrMapOvr>
+    <a:masterClrMapping/>
+  </p:clrMapOvr>
+</p:sld>
+</file>
+
+<file path=ppt/slides/slide6.xml><?xml version="1.0" encoding="utf-8"?>
+<p:sld xmlns:a="http://schemas.openxmlformats.org/drawingml/2006/main" xmlns:r="http://schemas.openxmlformats.org/officeDocument/2006/relationships" xmlns:p="http://schemas.openxmlformats.org/presentationml/2006/main">
+  <p:cSld>
+    <p:spTree>
+      <p:nvGrpSpPr>
+        <p:cNvPr id="1" name=""/>
+        <p:cNvGrpSpPr/>
+        <p:nvPr/>
+      </p:nvGrpSpPr>
+      <p:grpSpPr>
+        <a:xfrm>
+          <a:off x="0" y="0"/>
+          <a:ext cx="0" cy="0"/>
+          <a:chOff x="0" y="0"/>
+          <a:chExt cx="0" cy="0"/>
+        </a:xfrm>
+      </p:grpSpPr>
+      <p:grpSp>
+        <p:nvGrpSpPr>
+          <p:cNvPr id="4" name="グループ化 3">
+            <a:extLst>
+              <a:ext uri="{FF2B5EF4-FFF2-40B4-BE49-F238E27FC236}">
+                <a16:creationId xmlns:a16="http://schemas.microsoft.com/office/drawing/2014/main" id="{DE229200-2AD2-BD8E-1054-B47E1C8A1EE1}"/>
+              </a:ext>
+            </a:extLst>
+          </p:cNvPr>
+          <p:cNvGrpSpPr/>
+          <p:nvPr/>
+        </p:nvGrpSpPr>
+        <p:grpSpPr>
+          <a:xfrm>
+            <a:off x="-141578" y="1371570"/>
+            <a:ext cx="11436931" cy="4626427"/>
+            <a:chOff x="12187237" y="0"/>
+            <a:chExt cx="11475801" cy="4655945"/>
+          </a:xfrm>
+        </p:grpSpPr>
+        <p:grpSp>
+          <p:nvGrpSpPr>
+            <p:cNvPr id="33" name="グループ化 32">
+              <a:extLst>
+                <a:ext uri="{FF2B5EF4-FFF2-40B4-BE49-F238E27FC236}">
+                  <a16:creationId xmlns:a16="http://schemas.microsoft.com/office/drawing/2014/main" id="{9ECF3CB1-ED0C-B0ED-6A59-C4776D570463}"/>
+                </a:ext>
+              </a:extLst>
+            </p:cNvPr>
+            <p:cNvGrpSpPr/>
+            <p:nvPr/>
+          </p:nvGrpSpPr>
+          <p:grpSpPr>
+            <a:xfrm>
+              <a:off x="12187237" y="0"/>
+              <a:ext cx="11475801" cy="4655945"/>
+              <a:chOff x="12187237" y="0"/>
+              <a:chExt cx="11236058" cy="4546385"/>
+            </a:xfrm>
+          </p:grpSpPr>
+          <p:sp>
+            <p:nvSpPr>
+              <p:cNvPr id="37" name="正方形/長方形 36">
+                <a:extLst>
+                  <a:ext uri="{FF2B5EF4-FFF2-40B4-BE49-F238E27FC236}">
+                    <a16:creationId xmlns:a16="http://schemas.microsoft.com/office/drawing/2014/main" id="{5AE5EF6D-5F1D-D845-AB37-0967E92907A5}"/>
+                  </a:ext>
+                </a:extLst>
+              </p:cNvPr>
+              <p:cNvSpPr/>
+              <p:nvPr/>
+            </p:nvSpPr>
+            <p:spPr>
+              <a:xfrm>
+                <a:off x="12187237" y="0"/>
+                <a:ext cx="11236058" cy="4546385"/>
+              </a:xfrm>
+              <a:prstGeom prst="rect">
+                <a:avLst/>
+              </a:prstGeom>
+              <a:ln>
+                <a:noFill/>
+              </a:ln>
+            </p:spPr>
+            <p:style>
+              <a:lnRef idx="2">
+                <a:schemeClr val="dk1"/>
+              </a:lnRef>
+              <a:fillRef idx="1">
+                <a:schemeClr val="lt1"/>
+              </a:fillRef>
+              <a:effectRef idx="0">
+                <a:schemeClr val="dk1"/>
+              </a:effectRef>
+              <a:fontRef idx="minor">
+                <a:schemeClr val="dk1"/>
+              </a:fontRef>
+            </p:style>
+            <p:txBody>
+              <a:bodyPr wrap="square" rtlCol="0" anchor="ctr"/>
+              <a:lstStyle>
+                <a:defPPr>
+                  <a:defRPr lang="ja-JP"/>
+                </a:defPPr>
+                <a:lvl1pPr marL="0" indent="0" algn="l" defTabSz="914400" rtl="0" eaLnBrk="1" latinLnBrk="0" hangingPunct="1">
+                  <a:defRPr kumimoji="1" sz="1800" kern="1200">
+                    <a:solidFill>
+                      <a:schemeClr val="dk1"/>
+                    </a:solidFill>
+                    <a:latin typeface="+mn-lt"/>
+                    <a:ea typeface="+mn-ea"/>
+                    <a:cs typeface="+mn-cs"/>
+                  </a:defRPr>
+                </a:lvl1pPr>
+                <a:lvl2pPr marL="457200" indent="0" algn="l" defTabSz="914400" rtl="0" eaLnBrk="1" latinLnBrk="0" hangingPunct="1">
+                  <a:defRPr kumimoji="1" sz="1800" kern="1200">
+                    <a:solidFill>
+                      <a:schemeClr val="dk1"/>
+                    </a:solidFill>
+                    <a:latin typeface="+mn-lt"/>
+                    <a:ea typeface="+mn-ea"/>
+                    <a:cs typeface="+mn-cs"/>
+                  </a:defRPr>
+                </a:lvl2pPr>
+                <a:lvl3pPr marL="914400" indent="0" algn="l" defTabSz="914400" rtl="0" eaLnBrk="1" latinLnBrk="0" hangingPunct="1">
+                  <a:defRPr kumimoji="1" sz="1800" kern="1200">
+                    <a:solidFill>
+                      <a:schemeClr val="dk1"/>
+                    </a:solidFill>
+                    <a:latin typeface="+mn-lt"/>
+                    <a:ea typeface="+mn-ea"/>
+                    <a:cs typeface="+mn-cs"/>
+                  </a:defRPr>
+                </a:lvl3pPr>
+                <a:lvl4pPr marL="1371600" indent="0" algn="l" defTabSz="914400" rtl="0" eaLnBrk="1" latinLnBrk="0" hangingPunct="1">
+                  <a:defRPr kumimoji="1" sz="1800" kern="1200">
+                    <a:solidFill>
+                      <a:schemeClr val="dk1"/>
+                    </a:solidFill>
+                    <a:latin typeface="+mn-lt"/>
+                    <a:ea typeface="+mn-ea"/>
+                    <a:cs typeface="+mn-cs"/>
+                  </a:defRPr>
+                </a:lvl4pPr>
+                <a:lvl5pPr marL="1828800" indent="0" algn="l" defTabSz="914400" rtl="0" eaLnBrk="1" latinLnBrk="0" hangingPunct="1">
+                  <a:defRPr kumimoji="1" sz="1800" kern="1200">
+                    <a:solidFill>
+                      <a:schemeClr val="dk1"/>
+                    </a:solidFill>
+                    <a:latin typeface="+mn-lt"/>
+                    <a:ea typeface="+mn-ea"/>
+                    <a:cs typeface="+mn-cs"/>
+                  </a:defRPr>
+                </a:lvl5pPr>
+                <a:lvl6pPr marL="2286000" indent="0" algn="l" defTabSz="914400" rtl="0" eaLnBrk="1" latinLnBrk="0" hangingPunct="1">
+                  <a:defRPr kumimoji="1" sz="1800" kern="1200">
+                    <a:solidFill>
+                      <a:schemeClr val="dk1"/>
+                    </a:solidFill>
+                    <a:latin typeface="+mn-lt"/>
+                    <a:ea typeface="+mn-ea"/>
+                    <a:cs typeface="+mn-cs"/>
+                  </a:defRPr>
+                </a:lvl6pPr>
+                <a:lvl7pPr marL="2743200" indent="0" algn="l" defTabSz="914400" rtl="0" eaLnBrk="1" latinLnBrk="0" hangingPunct="1">
+                  <a:defRPr kumimoji="1" sz="1800" kern="1200">
+                    <a:solidFill>
+                      <a:schemeClr val="dk1"/>
+                    </a:solidFill>
+                    <a:latin typeface="+mn-lt"/>
+                    <a:ea typeface="+mn-ea"/>
+                    <a:cs typeface="+mn-cs"/>
+                  </a:defRPr>
+                </a:lvl7pPr>
+                <a:lvl8pPr marL="3200400" indent="0" algn="l" defTabSz="914400" rtl="0" eaLnBrk="1" latinLnBrk="0" hangingPunct="1">
+                  <a:defRPr kumimoji="1" sz="1800" kern="1200">
+                    <a:solidFill>
+                      <a:schemeClr val="dk1"/>
+                    </a:solidFill>
+                    <a:latin typeface="+mn-lt"/>
+                    <a:ea typeface="+mn-ea"/>
+                    <a:cs typeface="+mn-cs"/>
+                  </a:defRPr>
+                </a:lvl8pPr>
+                <a:lvl9pPr marL="3657600" indent="0" algn="l" defTabSz="914400" rtl="0" eaLnBrk="1" latinLnBrk="0" hangingPunct="1">
+                  <a:defRPr kumimoji="1" sz="1800" kern="1200">
+                    <a:solidFill>
+                      <a:schemeClr val="dk1"/>
+                    </a:solidFill>
+                    <a:latin typeface="+mn-lt"/>
+                    <a:ea typeface="+mn-ea"/>
+                    <a:cs typeface="+mn-cs"/>
+                  </a:defRPr>
+                </a:lvl9pPr>
+              </a:lstStyle>
+              <a:p>
+                <a:pPr algn="ctr"/>
+                <a:endParaRPr kumimoji="1" lang="ja-JP" altLang="en-US"/>
+              </a:p>
+            </p:txBody>
+          </p:sp>
+          <p:pic>
+            <p:nvPicPr>
+              <p:cNvPr id="38" name="図 37">
+                <a:extLst>
+                  <a:ext uri="{FF2B5EF4-FFF2-40B4-BE49-F238E27FC236}">
+                    <a16:creationId xmlns:a16="http://schemas.microsoft.com/office/drawing/2014/main" id="{3F9E84E0-0EF0-17FC-6FE4-B2FEC3957663}"/>
+                  </a:ext>
+                </a:extLst>
+              </p:cNvPr>
+              <p:cNvPicPr>
+                <a:picLocks noChangeAspect="1"/>
+              </p:cNvPicPr>
+              <p:nvPr/>
+            </p:nvPicPr>
+            <p:blipFill rotWithShape="1">
+              <a:blip r:embed="rId2"/>
+              <a:srcRect l="9123" t="27121" r="14411" b="20370"/>
+              <a:stretch>
+                <a:fillRect/>
+              </a:stretch>
+            </p:blipFill>
+            <p:spPr>
+              <a:xfrm>
+                <a:off x="13433972" y="233815"/>
+                <a:ext cx="8640862" cy="4182676"/>
+              </a:xfrm>
+              <a:prstGeom prst="rect">
+                <a:avLst/>
+              </a:prstGeom>
+            </p:spPr>
+          </p:pic>
+        </p:grpSp>
+        <p:sp>
+          <p:nvSpPr>
+            <p:cNvPr id="34" name="正方形/長方形 33">
+              <a:extLst>
+                <a:ext uri="{FF2B5EF4-FFF2-40B4-BE49-F238E27FC236}">
+                  <a16:creationId xmlns:a16="http://schemas.microsoft.com/office/drawing/2014/main" id="{68B1F501-50A0-F874-0098-AE3005047196}"/>
+                </a:ext>
+              </a:extLst>
+            </p:cNvPr>
+            <p:cNvSpPr/>
+            <p:nvPr/>
+          </p:nvSpPr>
+          <p:spPr>
+            <a:xfrm>
+              <a:off x="13827232" y="390945"/>
+              <a:ext cx="8272548" cy="3867323"/>
+            </a:xfrm>
+            <a:prstGeom prst="rect">
+              <a:avLst/>
+            </a:prstGeom>
+            <a:noFill/>
+            <a:ln w="28575">
+              <a:solidFill>
+                <a:srgbClr val="FF0000"/>
+              </a:solidFill>
+              <a:prstDash val="solid"/>
+            </a:ln>
+          </p:spPr>
+          <p:style>
+            <a:lnRef idx="2">
+              <a:schemeClr val="accent6"/>
+            </a:lnRef>
+            <a:fillRef idx="1">
+              <a:schemeClr val="lt1"/>
+            </a:fillRef>
+            <a:effectRef idx="0">
+              <a:schemeClr val="accent6"/>
+            </a:effectRef>
+            <a:fontRef idx="minor">
+              <a:schemeClr val="dk1"/>
+            </a:fontRef>
+          </p:style>
+          <p:txBody>
+            <a:bodyPr rtlCol="0" anchor="t"/>
+            <a:lstStyle>
+              <a:lvl1pPr marL="0" indent="0">
+                <a:defRPr sz="1100">
+                  <a:solidFill>
+                    <a:schemeClr val="dk1"/>
+                  </a:solidFill>
+                  <a:latin typeface="+mn-lt"/>
+                  <a:ea typeface="+mn-ea"/>
+                  <a:cs typeface="+mn-cs"/>
+                </a:defRPr>
+              </a:lvl1pPr>
+              <a:lvl2pPr marL="457200" indent="0">
+                <a:defRPr sz="1100">
+                  <a:solidFill>
+                    <a:schemeClr val="dk1"/>
+                  </a:solidFill>
+                  <a:latin typeface="+mn-lt"/>
+                  <a:ea typeface="+mn-ea"/>
+                  <a:cs typeface="+mn-cs"/>
+                </a:defRPr>
+              </a:lvl2pPr>
+              <a:lvl3pPr marL="914400" indent="0">
+                <a:defRPr sz="1100">
+                  <a:solidFill>
+                    <a:schemeClr val="dk1"/>
+                  </a:solidFill>
+                  <a:latin typeface="+mn-lt"/>
+                  <a:ea typeface="+mn-ea"/>
+                  <a:cs typeface="+mn-cs"/>
+                </a:defRPr>
+              </a:lvl3pPr>
+              <a:lvl4pPr marL="1371600" indent="0">
+                <a:defRPr sz="1100">
+                  <a:solidFill>
+                    <a:schemeClr val="dk1"/>
+                  </a:solidFill>
+                  <a:latin typeface="+mn-lt"/>
+                  <a:ea typeface="+mn-ea"/>
+                  <a:cs typeface="+mn-cs"/>
+                </a:defRPr>
+              </a:lvl4pPr>
+              <a:lvl5pPr marL="1828800" indent="0">
+                <a:defRPr sz="1100">
+                  <a:solidFill>
+                    <a:schemeClr val="dk1"/>
+                  </a:solidFill>
+                  <a:latin typeface="+mn-lt"/>
+                  <a:ea typeface="+mn-ea"/>
+                  <a:cs typeface="+mn-cs"/>
+                </a:defRPr>
+              </a:lvl5pPr>
+              <a:lvl6pPr marL="2286000" indent="0">
+                <a:defRPr sz="1100">
+                  <a:solidFill>
+                    <a:schemeClr val="dk1"/>
+                  </a:solidFill>
+                  <a:latin typeface="+mn-lt"/>
+                  <a:ea typeface="+mn-ea"/>
+                  <a:cs typeface="+mn-cs"/>
+                </a:defRPr>
+              </a:lvl6pPr>
+              <a:lvl7pPr marL="2743200" indent="0">
+                <a:defRPr sz="1100">
+                  <a:solidFill>
+                    <a:schemeClr val="dk1"/>
+                  </a:solidFill>
+                  <a:latin typeface="+mn-lt"/>
+                  <a:ea typeface="+mn-ea"/>
+                  <a:cs typeface="+mn-cs"/>
+                </a:defRPr>
+              </a:lvl7pPr>
+              <a:lvl8pPr marL="3200400" indent="0">
+                <a:defRPr sz="1100">
+                  <a:solidFill>
+                    <a:schemeClr val="dk1"/>
+                  </a:solidFill>
+                  <a:latin typeface="+mn-lt"/>
+                  <a:ea typeface="+mn-ea"/>
+                  <a:cs typeface="+mn-cs"/>
+                </a:defRPr>
+              </a:lvl8pPr>
+              <a:lvl9pPr marL="3657600" indent="0">
+                <a:defRPr sz="1100">
+                  <a:solidFill>
+                    <a:schemeClr val="dk1"/>
+                  </a:solidFill>
+                  <a:latin typeface="+mn-lt"/>
+                  <a:ea typeface="+mn-ea"/>
+                  <a:cs typeface="+mn-cs"/>
+                </a:defRPr>
+              </a:lvl9pPr>
+            </a:lstStyle>
+            <a:p>
+              <a:pPr algn="l"/>
+              <a:endParaRPr kumimoji="1" lang="ja-JP" altLang="en-US" sz="1100"/>
+            </a:p>
+          </p:txBody>
+        </p:sp>
+        <p:sp>
+          <p:nvSpPr>
+            <p:cNvPr id="35" name="正方形/長方形 34">
+              <a:extLst>
+                <a:ext uri="{FF2B5EF4-FFF2-40B4-BE49-F238E27FC236}">
+                  <a16:creationId xmlns:a16="http://schemas.microsoft.com/office/drawing/2014/main" id="{EB687877-C95E-F730-40C5-963B3E524E38}"/>
+                </a:ext>
+              </a:extLst>
+            </p:cNvPr>
+            <p:cNvSpPr/>
+            <p:nvPr/>
+          </p:nvSpPr>
+          <p:spPr>
+            <a:xfrm>
+              <a:off x="22378730" y="1955069"/>
+              <a:ext cx="1170410" cy="714548"/>
+            </a:xfrm>
+            <a:prstGeom prst="rect">
+              <a:avLst/>
+            </a:prstGeom>
+            <a:ln w="28575">
+              <a:solidFill>
+                <a:srgbClr val="FF0000"/>
+              </a:solidFill>
+            </a:ln>
+          </p:spPr>
+          <p:style>
+            <a:lnRef idx="2">
+              <a:schemeClr val="accent6"/>
+            </a:lnRef>
+            <a:fillRef idx="1">
+              <a:schemeClr val="lt1"/>
+            </a:fillRef>
+            <a:effectRef idx="0">
+              <a:schemeClr val="accent6"/>
+            </a:effectRef>
+            <a:fontRef idx="minor">
+              <a:schemeClr val="dk1"/>
+            </a:fontRef>
+          </p:style>
+          <p:txBody>
+            <a:bodyPr rtlCol="0" anchor="ctr"/>
+            <a:lstStyle>
+              <a:lvl1pPr marL="0" indent="0">
+                <a:defRPr sz="1100">
+                  <a:solidFill>
+                    <a:schemeClr val="dk1"/>
+                  </a:solidFill>
+                  <a:latin typeface="+mn-lt"/>
+                  <a:ea typeface="+mn-ea"/>
+                  <a:cs typeface="+mn-cs"/>
+                </a:defRPr>
+              </a:lvl1pPr>
+              <a:lvl2pPr marL="457200" indent="0">
+                <a:defRPr sz="1100">
+                  <a:solidFill>
+                    <a:schemeClr val="dk1"/>
+                  </a:solidFill>
+                  <a:latin typeface="+mn-lt"/>
+                  <a:ea typeface="+mn-ea"/>
+                  <a:cs typeface="+mn-cs"/>
+                </a:defRPr>
+              </a:lvl2pPr>
+              <a:lvl3pPr marL="914400" indent="0">
+                <a:defRPr sz="1100">
+                  <a:solidFill>
+                    <a:schemeClr val="dk1"/>
+                  </a:solidFill>
+                  <a:latin typeface="+mn-lt"/>
+                  <a:ea typeface="+mn-ea"/>
+                  <a:cs typeface="+mn-cs"/>
+                </a:defRPr>
+              </a:lvl3pPr>
+              <a:lvl4pPr marL="1371600" indent="0">
+                <a:defRPr sz="1100">
+                  <a:solidFill>
+                    <a:schemeClr val="dk1"/>
+                  </a:solidFill>
+                  <a:latin typeface="+mn-lt"/>
+                  <a:ea typeface="+mn-ea"/>
+                  <a:cs typeface="+mn-cs"/>
+                </a:defRPr>
+              </a:lvl4pPr>
+              <a:lvl5pPr marL="1828800" indent="0">
+                <a:defRPr sz="1100">
+                  <a:solidFill>
+                    <a:schemeClr val="dk1"/>
+                  </a:solidFill>
+                  <a:latin typeface="+mn-lt"/>
+                  <a:ea typeface="+mn-ea"/>
+                  <a:cs typeface="+mn-cs"/>
+                </a:defRPr>
+              </a:lvl5pPr>
+              <a:lvl6pPr marL="2286000" indent="0">
+                <a:defRPr sz="1100">
+                  <a:solidFill>
+                    <a:schemeClr val="dk1"/>
+                  </a:solidFill>
+                  <a:latin typeface="+mn-lt"/>
+                  <a:ea typeface="+mn-ea"/>
+                  <a:cs typeface="+mn-cs"/>
+                </a:defRPr>
+              </a:lvl6pPr>
+              <a:lvl7pPr marL="2743200" indent="0">
+                <a:defRPr sz="1100">
+                  <a:solidFill>
+                    <a:schemeClr val="dk1"/>
+                  </a:solidFill>
+                  <a:latin typeface="+mn-lt"/>
+                  <a:ea typeface="+mn-ea"/>
+                  <a:cs typeface="+mn-cs"/>
+                </a:defRPr>
+              </a:lvl7pPr>
+              <a:lvl8pPr marL="3200400" indent="0">
+                <a:defRPr sz="1100">
+                  <a:solidFill>
+                    <a:schemeClr val="dk1"/>
+                  </a:solidFill>
+                  <a:latin typeface="+mn-lt"/>
+                  <a:ea typeface="+mn-ea"/>
+                  <a:cs typeface="+mn-cs"/>
+                </a:defRPr>
+              </a:lvl8pPr>
+              <a:lvl9pPr marL="3657600" indent="0">
+                <a:defRPr sz="1100">
+                  <a:solidFill>
+                    <a:schemeClr val="dk1"/>
+                  </a:solidFill>
+                  <a:latin typeface="+mn-lt"/>
+                  <a:ea typeface="+mn-ea"/>
+                  <a:cs typeface="+mn-cs"/>
+                </a:defRPr>
+              </a:lvl9pPr>
+            </a:lstStyle>
+            <a:p>
+              <a:pPr algn="l"/>
+              <a:r>
+                <a:rPr kumimoji="1" lang="ja-JP" altLang="en-US" sz="1200" b="1">
+                  <a:solidFill>
+                    <a:srgbClr val="FF0000"/>
+                  </a:solidFill>
+                </a:rPr>
+                <a:t>④エネミー</a:t>
+              </a:r>
+              <a:endParaRPr kumimoji="1" lang="en-US" altLang="ja-JP" sz="1200" b="1">
+                <a:solidFill>
+                  <a:srgbClr val="FF0000"/>
+                </a:solidFill>
+              </a:endParaRPr>
+            </a:p>
+            <a:p>
+              <a:pPr algn="l"/>
+              <a:r>
+                <a:rPr kumimoji="1" lang="ja-JP" altLang="en-US" sz="1200" b="1">
+                  <a:solidFill>
+                    <a:srgbClr val="FF0000"/>
+                  </a:solidFill>
+                </a:rPr>
+                <a:t>　情報入力欄</a:t>
+              </a:r>
+            </a:p>
+          </p:txBody>
+        </p:sp>
+        <p:cxnSp>
+          <p:nvCxnSpPr>
+            <p:cNvPr id="36" name="直線矢印コネクタ 35">
+              <a:extLst>
+                <a:ext uri="{FF2B5EF4-FFF2-40B4-BE49-F238E27FC236}">
+                  <a16:creationId xmlns:a16="http://schemas.microsoft.com/office/drawing/2014/main" id="{A959EEC2-3229-4685-6297-95CB3BF1ED7C}"/>
+                </a:ext>
+              </a:extLst>
+            </p:cNvPr>
+            <p:cNvCxnSpPr>
+              <a:stCxn id="35" idx="1"/>
+              <a:endCxn id="34" idx="3"/>
+            </p:cNvCxnSpPr>
+            <p:nvPr/>
+          </p:nvCxnSpPr>
+          <p:spPr>
+            <a:xfrm flipH="1">
+              <a:off x="22099780" y="2312343"/>
+              <a:ext cx="278950" cy="12264"/>
+            </a:xfrm>
+            <a:prstGeom prst="straightConnector1">
+              <a:avLst/>
+            </a:prstGeom>
+            <a:ln w="28575">
+              <a:solidFill>
+                <a:srgbClr val="FF0000"/>
+              </a:solidFill>
+              <a:tailEnd type="triangle"/>
+            </a:ln>
+          </p:spPr>
+          <p:style>
+            <a:lnRef idx="2">
+              <a:schemeClr val="accent1"/>
+            </a:lnRef>
+            <a:fillRef idx="0">
+              <a:schemeClr val="accent1"/>
+            </a:fillRef>
+            <a:effectRef idx="1">
+              <a:schemeClr val="accent1"/>
+            </a:effectRef>
+            <a:fontRef idx="minor">
+              <a:schemeClr val="tx1"/>
+            </a:fontRef>
+          </p:style>
+        </p:cxnSp>
+      </p:grpSp>
+    </p:spTree>
+    <p:extLst>
+      <p:ext uri="{BB962C8B-B14F-4D97-AF65-F5344CB8AC3E}">
+        <p14:creationId xmlns:p14="http://schemas.microsoft.com/office/powerpoint/2010/main" val="773752062"/>
+      </p:ext>
+    </p:extLst>
+  </p:cSld>
+  <p:clrMapOvr>
+    <a:masterClrMapping/>
+  </p:clrMapOvr>
+</p:sld>
+</file>
+
+<file path=ppt/slides/slide7.xml><?xml version="1.0" encoding="utf-8"?>
+<p:sld xmlns:a="http://schemas.openxmlformats.org/drawingml/2006/main" xmlns:r="http://schemas.openxmlformats.org/officeDocument/2006/relationships" xmlns:p="http://schemas.openxmlformats.org/presentationml/2006/main">
+  <p:cSld>
+    <p:spTree>
+      <p:nvGrpSpPr>
+        <p:cNvPr id="1" name="">
+          <a:extLst>
+            <a:ext uri="{FF2B5EF4-FFF2-40B4-BE49-F238E27FC236}">
+              <a16:creationId xmlns:a16="http://schemas.microsoft.com/office/drawing/2014/main" id="{C5B15857-827A-6229-6113-E552ADAC6249}"/>
+            </a:ext>
+          </a:extLst>
+        </p:cNvPr>
+        <p:cNvGrpSpPr/>
+        <p:nvPr/>
+      </p:nvGrpSpPr>
+      <p:grpSpPr>
+        <a:xfrm>
+          <a:off x="0" y="0"/>
+          <a:ext cx="0" cy="0"/>
+          <a:chOff x="0" y="0"/>
+          <a:chExt cx="0" cy="0"/>
+        </a:xfrm>
+      </p:grpSpPr>
+      <p:grpSp>
+        <p:nvGrpSpPr>
+          <p:cNvPr id="5" name="グループ化 4">
+            <a:extLst>
+              <a:ext uri="{FF2B5EF4-FFF2-40B4-BE49-F238E27FC236}">
+                <a16:creationId xmlns:a16="http://schemas.microsoft.com/office/drawing/2014/main" id="{339F7668-3B6B-6140-6A0C-58595BED5135}"/>
+              </a:ext>
+            </a:extLst>
+          </p:cNvPr>
+          <p:cNvGrpSpPr/>
+          <p:nvPr/>
+        </p:nvGrpSpPr>
+        <p:grpSpPr>
+          <a:xfrm>
+            <a:off x="520410" y="0"/>
+            <a:ext cx="11436931" cy="6640884"/>
+            <a:chOff x="333375" y="4887767"/>
+            <a:chExt cx="11475801" cy="6683747"/>
+          </a:xfrm>
+        </p:grpSpPr>
+        <p:grpSp>
+          <p:nvGrpSpPr>
+            <p:cNvPr id="27" name="グループ化 26">
+              <a:extLst>
+                <a:ext uri="{FF2B5EF4-FFF2-40B4-BE49-F238E27FC236}">
+                  <a16:creationId xmlns:a16="http://schemas.microsoft.com/office/drawing/2014/main" id="{E0AA464E-254A-BCD5-7491-2B8D385FAC0C}"/>
+                </a:ext>
+              </a:extLst>
+            </p:cNvPr>
+            <p:cNvGrpSpPr/>
+            <p:nvPr/>
+          </p:nvGrpSpPr>
+          <p:grpSpPr>
+            <a:xfrm>
+              <a:off x="333375" y="4887767"/>
+              <a:ext cx="11475801" cy="6683747"/>
+              <a:chOff x="333375" y="4887767"/>
+              <a:chExt cx="11236058" cy="6526470"/>
+            </a:xfrm>
+          </p:grpSpPr>
+          <p:sp>
+            <p:nvSpPr>
+              <p:cNvPr id="31" name="正方形/長方形 30">
+                <a:extLst>
+                  <a:ext uri="{FF2B5EF4-FFF2-40B4-BE49-F238E27FC236}">
+                    <a16:creationId xmlns:a16="http://schemas.microsoft.com/office/drawing/2014/main" id="{8DC25741-1012-004A-8360-88CD98DE3327}"/>
+                  </a:ext>
+                </a:extLst>
+              </p:cNvPr>
+              <p:cNvSpPr/>
+              <p:nvPr/>
+            </p:nvSpPr>
+            <p:spPr>
+              <a:xfrm>
+                <a:off x="333375" y="4887767"/>
+                <a:ext cx="11236058" cy="6526470"/>
+              </a:xfrm>
+              <a:prstGeom prst="rect">
+                <a:avLst/>
+              </a:prstGeom>
+              <a:ln>
+                <a:noFill/>
+              </a:ln>
+            </p:spPr>
+            <p:style>
+              <a:lnRef idx="2">
+                <a:schemeClr val="dk1"/>
+              </a:lnRef>
+              <a:fillRef idx="1">
+                <a:schemeClr val="lt1"/>
+              </a:fillRef>
+              <a:effectRef idx="0">
+                <a:schemeClr val="dk1"/>
+              </a:effectRef>
+              <a:fontRef idx="minor">
+                <a:schemeClr val="dk1"/>
+              </a:fontRef>
+            </p:style>
+            <p:txBody>
+              <a:bodyPr wrap="square" rtlCol="0" anchor="ctr"/>
+              <a:lstStyle>
+                <a:defPPr>
+                  <a:defRPr lang="ja-JP"/>
+                </a:defPPr>
+                <a:lvl1pPr marL="0" indent="0" algn="l" defTabSz="914400" rtl="0" eaLnBrk="1" latinLnBrk="0" hangingPunct="1">
+                  <a:defRPr kumimoji="1" sz="1800" kern="1200">
+                    <a:solidFill>
+                      <a:schemeClr val="dk1"/>
+                    </a:solidFill>
+                    <a:latin typeface="+mn-lt"/>
+                    <a:ea typeface="+mn-ea"/>
+                    <a:cs typeface="+mn-cs"/>
+                  </a:defRPr>
+                </a:lvl1pPr>
+                <a:lvl2pPr marL="457200" indent="0" algn="l" defTabSz="914400" rtl="0" eaLnBrk="1" latinLnBrk="0" hangingPunct="1">
+                  <a:defRPr kumimoji="1" sz="1800" kern="1200">
+                    <a:solidFill>
+                      <a:schemeClr val="dk1"/>
+                    </a:solidFill>
+                    <a:latin typeface="+mn-lt"/>
+                    <a:ea typeface="+mn-ea"/>
+                    <a:cs typeface="+mn-cs"/>
+                  </a:defRPr>
+                </a:lvl2pPr>
+                <a:lvl3pPr marL="914400" indent="0" algn="l" defTabSz="914400" rtl="0" eaLnBrk="1" latinLnBrk="0" hangingPunct="1">
+                  <a:defRPr kumimoji="1" sz="1800" kern="1200">
+                    <a:solidFill>
+                      <a:schemeClr val="dk1"/>
+                    </a:solidFill>
+                    <a:latin typeface="+mn-lt"/>
+                    <a:ea typeface="+mn-ea"/>
+                    <a:cs typeface="+mn-cs"/>
+                  </a:defRPr>
+                </a:lvl3pPr>
+                <a:lvl4pPr marL="1371600" indent="0" algn="l" defTabSz="914400" rtl="0" eaLnBrk="1" latinLnBrk="0" hangingPunct="1">
+                  <a:defRPr kumimoji="1" sz="1800" kern="1200">
+                    <a:solidFill>
+                      <a:schemeClr val="dk1"/>
+                    </a:solidFill>
+                    <a:latin typeface="+mn-lt"/>
+                    <a:ea typeface="+mn-ea"/>
+                    <a:cs typeface="+mn-cs"/>
+                  </a:defRPr>
+                </a:lvl4pPr>
+                <a:lvl5pPr marL="1828800" indent="0" algn="l" defTabSz="914400" rtl="0" eaLnBrk="1" latinLnBrk="0" hangingPunct="1">
+                  <a:defRPr kumimoji="1" sz="1800" kern="1200">
+                    <a:solidFill>
+                      <a:schemeClr val="dk1"/>
+                    </a:solidFill>
+                    <a:latin typeface="+mn-lt"/>
+                    <a:ea typeface="+mn-ea"/>
+                    <a:cs typeface="+mn-cs"/>
+                  </a:defRPr>
+                </a:lvl5pPr>
+                <a:lvl6pPr marL="2286000" indent="0" algn="l" defTabSz="914400" rtl="0" eaLnBrk="1" latinLnBrk="0" hangingPunct="1">
+                  <a:defRPr kumimoji="1" sz="1800" kern="1200">
+                    <a:solidFill>
+                      <a:schemeClr val="dk1"/>
+                    </a:solidFill>
+                    <a:latin typeface="+mn-lt"/>
+                    <a:ea typeface="+mn-ea"/>
+                    <a:cs typeface="+mn-cs"/>
+                  </a:defRPr>
+                </a:lvl6pPr>
+                <a:lvl7pPr marL="2743200" indent="0" algn="l" defTabSz="914400" rtl="0" eaLnBrk="1" latinLnBrk="0" hangingPunct="1">
+                  <a:defRPr kumimoji="1" sz="1800" kern="1200">
+                    <a:solidFill>
+                      <a:schemeClr val="dk1"/>
+                    </a:solidFill>
+                    <a:latin typeface="+mn-lt"/>
+                    <a:ea typeface="+mn-ea"/>
+                    <a:cs typeface="+mn-cs"/>
+                  </a:defRPr>
+                </a:lvl7pPr>
+                <a:lvl8pPr marL="3200400" indent="0" algn="l" defTabSz="914400" rtl="0" eaLnBrk="1" latinLnBrk="0" hangingPunct="1">
+                  <a:defRPr kumimoji="1" sz="1800" kern="1200">
+                    <a:solidFill>
+                      <a:schemeClr val="dk1"/>
+                    </a:solidFill>
+                    <a:latin typeface="+mn-lt"/>
+                    <a:ea typeface="+mn-ea"/>
+                    <a:cs typeface="+mn-cs"/>
+                  </a:defRPr>
+                </a:lvl8pPr>
+                <a:lvl9pPr marL="3657600" indent="0" algn="l" defTabSz="914400" rtl="0" eaLnBrk="1" latinLnBrk="0" hangingPunct="1">
+                  <a:defRPr kumimoji="1" sz="1800" kern="1200">
+                    <a:solidFill>
+                      <a:schemeClr val="dk1"/>
+                    </a:solidFill>
+                    <a:latin typeface="+mn-lt"/>
+                    <a:ea typeface="+mn-ea"/>
+                    <a:cs typeface="+mn-cs"/>
+                  </a:defRPr>
+                </a:lvl9pPr>
+              </a:lstStyle>
+              <a:p>
+                <a:pPr algn="ctr"/>
+                <a:endParaRPr kumimoji="1" lang="ja-JP" altLang="en-US"/>
+              </a:p>
+            </p:txBody>
+          </p:sp>
+          <p:pic>
+            <p:nvPicPr>
+              <p:cNvPr id="32" name="図 31">
+                <a:extLst>
+                  <a:ext uri="{FF2B5EF4-FFF2-40B4-BE49-F238E27FC236}">
+                    <a16:creationId xmlns:a16="http://schemas.microsoft.com/office/drawing/2014/main" id="{AC970566-6562-751D-E782-572914D801D8}"/>
+                  </a:ext>
+                </a:extLst>
+              </p:cNvPr>
+              <p:cNvPicPr>
+                <a:picLocks noChangeAspect="1"/>
+              </p:cNvPicPr>
+              <p:nvPr/>
+            </p:nvPicPr>
+            <p:blipFill rotWithShape="1">
+              <a:blip r:embed="rId2"/>
+              <a:srcRect l="15627" t="4316" r="14777" b="8679"/>
+              <a:stretch>
+                <a:fillRect/>
+              </a:stretch>
+            </p:blipFill>
+            <p:spPr>
+              <a:xfrm>
+                <a:off x="1618176" y="5122335"/>
+                <a:ext cx="8869255" cy="6148906"/>
+              </a:xfrm>
+              <a:prstGeom prst="rect">
+                <a:avLst/>
+              </a:prstGeom>
+            </p:spPr>
+          </p:pic>
+        </p:grpSp>
+        <p:sp>
+          <p:nvSpPr>
+            <p:cNvPr id="28" name="正方形/長方形 27">
+              <a:extLst>
+                <a:ext uri="{FF2B5EF4-FFF2-40B4-BE49-F238E27FC236}">
+                  <a16:creationId xmlns:a16="http://schemas.microsoft.com/office/drawing/2014/main" id="{6AF3D99A-EDAD-1798-29B2-69A887A60946}"/>
+                </a:ext>
+              </a:extLst>
+            </p:cNvPr>
+            <p:cNvSpPr/>
+            <p:nvPr/>
+          </p:nvSpPr>
+          <p:spPr>
+            <a:xfrm>
+              <a:off x="1980990" y="5215465"/>
+              <a:ext cx="8259213" cy="5818043"/>
+            </a:xfrm>
+            <a:prstGeom prst="rect">
+              <a:avLst/>
+            </a:prstGeom>
+            <a:noFill/>
+            <a:ln w="28575">
+              <a:solidFill>
+                <a:srgbClr val="FF0000"/>
+              </a:solidFill>
+              <a:prstDash val="solid"/>
+            </a:ln>
+          </p:spPr>
+          <p:style>
+            <a:lnRef idx="2">
+              <a:schemeClr val="accent6"/>
+            </a:lnRef>
+            <a:fillRef idx="1">
+              <a:schemeClr val="lt1"/>
+            </a:fillRef>
+            <a:effectRef idx="0">
+              <a:schemeClr val="accent6"/>
+            </a:effectRef>
+            <a:fontRef idx="minor">
+              <a:schemeClr val="dk1"/>
+            </a:fontRef>
+          </p:style>
+          <p:txBody>
+            <a:bodyPr rtlCol="0" anchor="t"/>
+            <a:lstStyle>
+              <a:lvl1pPr marL="0" indent="0">
+                <a:defRPr sz="1100">
+                  <a:solidFill>
+                    <a:schemeClr val="dk1"/>
+                  </a:solidFill>
+                  <a:latin typeface="+mn-lt"/>
+                  <a:ea typeface="+mn-ea"/>
+                  <a:cs typeface="+mn-cs"/>
+                </a:defRPr>
+              </a:lvl1pPr>
+              <a:lvl2pPr marL="457200" indent="0">
+                <a:defRPr sz="1100">
+                  <a:solidFill>
+                    <a:schemeClr val="dk1"/>
+                  </a:solidFill>
+                  <a:latin typeface="+mn-lt"/>
+                  <a:ea typeface="+mn-ea"/>
+                  <a:cs typeface="+mn-cs"/>
+                </a:defRPr>
+              </a:lvl2pPr>
+              <a:lvl3pPr marL="914400" indent="0">
+                <a:defRPr sz="1100">
+                  <a:solidFill>
+                    <a:schemeClr val="dk1"/>
+                  </a:solidFill>
+                  <a:latin typeface="+mn-lt"/>
+                  <a:ea typeface="+mn-ea"/>
+                  <a:cs typeface="+mn-cs"/>
+                </a:defRPr>
+              </a:lvl3pPr>
+              <a:lvl4pPr marL="1371600" indent="0">
+                <a:defRPr sz="1100">
+                  <a:solidFill>
+                    <a:schemeClr val="dk1"/>
+                  </a:solidFill>
+                  <a:latin typeface="+mn-lt"/>
+                  <a:ea typeface="+mn-ea"/>
+                  <a:cs typeface="+mn-cs"/>
+                </a:defRPr>
+              </a:lvl4pPr>
+              <a:lvl5pPr marL="1828800" indent="0">
+                <a:defRPr sz="1100">
+                  <a:solidFill>
+                    <a:schemeClr val="dk1"/>
+                  </a:solidFill>
+                  <a:latin typeface="+mn-lt"/>
+                  <a:ea typeface="+mn-ea"/>
+                  <a:cs typeface="+mn-cs"/>
+                </a:defRPr>
+              </a:lvl5pPr>
+              <a:lvl6pPr marL="2286000" indent="0">
+                <a:defRPr sz="1100">
+                  <a:solidFill>
+                    <a:schemeClr val="dk1"/>
+                  </a:solidFill>
+                  <a:latin typeface="+mn-lt"/>
+                  <a:ea typeface="+mn-ea"/>
+                  <a:cs typeface="+mn-cs"/>
+                </a:defRPr>
+              </a:lvl6pPr>
+              <a:lvl7pPr marL="2743200" indent="0">
+                <a:defRPr sz="1100">
+                  <a:solidFill>
+                    <a:schemeClr val="dk1"/>
+                  </a:solidFill>
+                  <a:latin typeface="+mn-lt"/>
+                  <a:ea typeface="+mn-ea"/>
+                  <a:cs typeface="+mn-cs"/>
+                </a:defRPr>
+              </a:lvl7pPr>
+              <a:lvl8pPr marL="3200400" indent="0">
+                <a:defRPr sz="1100">
+                  <a:solidFill>
+                    <a:schemeClr val="dk1"/>
+                  </a:solidFill>
+                  <a:latin typeface="+mn-lt"/>
+                  <a:ea typeface="+mn-ea"/>
+                  <a:cs typeface="+mn-cs"/>
+                </a:defRPr>
+              </a:lvl8pPr>
+              <a:lvl9pPr marL="3657600" indent="0">
+                <a:defRPr sz="1100">
+                  <a:solidFill>
+                    <a:schemeClr val="dk1"/>
+                  </a:solidFill>
+                  <a:latin typeface="+mn-lt"/>
+                  <a:ea typeface="+mn-ea"/>
+                  <a:cs typeface="+mn-cs"/>
+                </a:defRPr>
+              </a:lvl9pPr>
+            </a:lstStyle>
+            <a:p>
+              <a:pPr algn="l"/>
+              <a:endParaRPr kumimoji="1" lang="ja-JP" altLang="en-US" sz="1100"/>
+            </a:p>
+          </p:txBody>
+        </p:sp>
+        <p:sp>
+          <p:nvSpPr>
+            <p:cNvPr id="29" name="正方形/長方形 28">
+              <a:extLst>
+                <a:ext uri="{FF2B5EF4-FFF2-40B4-BE49-F238E27FC236}">
+                  <a16:creationId xmlns:a16="http://schemas.microsoft.com/office/drawing/2014/main" id="{8A11EA04-7160-76FC-A60E-63742E5407FB}"/>
+                </a:ext>
+              </a:extLst>
+            </p:cNvPr>
+            <p:cNvSpPr/>
+            <p:nvPr/>
+          </p:nvSpPr>
+          <p:spPr>
+            <a:xfrm>
+              <a:off x="10512918" y="7766687"/>
+              <a:ext cx="1129367" cy="700000"/>
+            </a:xfrm>
+            <a:prstGeom prst="rect">
+              <a:avLst/>
+            </a:prstGeom>
+            <a:ln w="28575">
+              <a:solidFill>
+                <a:srgbClr val="FF0000"/>
+              </a:solidFill>
+            </a:ln>
+          </p:spPr>
+          <p:style>
+            <a:lnRef idx="2">
+              <a:schemeClr val="accent6"/>
+            </a:lnRef>
+            <a:fillRef idx="1">
+              <a:schemeClr val="lt1"/>
+            </a:fillRef>
+            <a:effectRef idx="0">
+              <a:schemeClr val="accent6"/>
+            </a:effectRef>
+            <a:fontRef idx="minor">
+              <a:schemeClr val="dk1"/>
+            </a:fontRef>
+          </p:style>
+          <p:txBody>
+            <a:bodyPr rtlCol="0" anchor="ctr"/>
+            <a:lstStyle>
+              <a:lvl1pPr marL="0" indent="0">
+                <a:defRPr sz="1100">
+                  <a:solidFill>
+                    <a:schemeClr val="dk1"/>
+                  </a:solidFill>
+                  <a:latin typeface="+mn-lt"/>
+                  <a:ea typeface="+mn-ea"/>
+                  <a:cs typeface="+mn-cs"/>
+                </a:defRPr>
+              </a:lvl1pPr>
+              <a:lvl2pPr marL="457200" indent="0">
+                <a:defRPr sz="1100">
+                  <a:solidFill>
+                    <a:schemeClr val="dk1"/>
+                  </a:solidFill>
+                  <a:latin typeface="+mn-lt"/>
+                  <a:ea typeface="+mn-ea"/>
+                  <a:cs typeface="+mn-cs"/>
+                </a:defRPr>
+              </a:lvl2pPr>
+              <a:lvl3pPr marL="914400" indent="0">
+                <a:defRPr sz="1100">
+                  <a:solidFill>
+                    <a:schemeClr val="dk1"/>
+                  </a:solidFill>
+                  <a:latin typeface="+mn-lt"/>
+                  <a:ea typeface="+mn-ea"/>
+                  <a:cs typeface="+mn-cs"/>
+                </a:defRPr>
+              </a:lvl3pPr>
+              <a:lvl4pPr marL="1371600" indent="0">
+                <a:defRPr sz="1100">
+                  <a:solidFill>
+                    <a:schemeClr val="dk1"/>
+                  </a:solidFill>
+                  <a:latin typeface="+mn-lt"/>
+                  <a:ea typeface="+mn-ea"/>
+                  <a:cs typeface="+mn-cs"/>
+                </a:defRPr>
+              </a:lvl4pPr>
+              <a:lvl5pPr marL="1828800" indent="0">
+                <a:defRPr sz="1100">
+                  <a:solidFill>
+                    <a:schemeClr val="dk1"/>
+                  </a:solidFill>
+                  <a:latin typeface="+mn-lt"/>
+                  <a:ea typeface="+mn-ea"/>
+                  <a:cs typeface="+mn-cs"/>
+                </a:defRPr>
+              </a:lvl5pPr>
+              <a:lvl6pPr marL="2286000" indent="0">
+                <a:defRPr sz="1100">
+                  <a:solidFill>
+                    <a:schemeClr val="dk1"/>
+                  </a:solidFill>
+                  <a:latin typeface="+mn-lt"/>
+                  <a:ea typeface="+mn-ea"/>
+                  <a:cs typeface="+mn-cs"/>
+                </a:defRPr>
+              </a:lvl6pPr>
+              <a:lvl7pPr marL="2743200" indent="0">
+                <a:defRPr sz="1100">
+                  <a:solidFill>
+                    <a:schemeClr val="dk1"/>
+                  </a:solidFill>
+                  <a:latin typeface="+mn-lt"/>
+                  <a:ea typeface="+mn-ea"/>
+                  <a:cs typeface="+mn-cs"/>
+                </a:defRPr>
+              </a:lvl7pPr>
+              <a:lvl8pPr marL="3200400" indent="0">
+                <a:defRPr sz="1100">
+                  <a:solidFill>
+                    <a:schemeClr val="dk1"/>
+                  </a:solidFill>
+                  <a:latin typeface="+mn-lt"/>
+                  <a:ea typeface="+mn-ea"/>
+                  <a:cs typeface="+mn-cs"/>
+                </a:defRPr>
+              </a:lvl8pPr>
+              <a:lvl9pPr marL="3657600" indent="0">
+                <a:defRPr sz="1100">
+                  <a:solidFill>
+                    <a:schemeClr val="dk1"/>
+                  </a:solidFill>
+                  <a:latin typeface="+mn-lt"/>
+                  <a:ea typeface="+mn-ea"/>
+                  <a:cs typeface="+mn-cs"/>
+                </a:defRPr>
+              </a:lvl9pPr>
+            </a:lstStyle>
+            <a:p>
+              <a:pPr algn="l"/>
+              <a:r>
+                <a:rPr kumimoji="1" lang="ja-JP" altLang="en-US" sz="1200" b="1">
+                  <a:solidFill>
+                    <a:srgbClr val="FF0000"/>
+                  </a:solidFill>
+                </a:rPr>
+                <a:t>⑤ドロップ</a:t>
+              </a:r>
+              <a:endParaRPr kumimoji="1" lang="en-US" altLang="ja-JP" sz="1200" b="1">
+                <a:solidFill>
+                  <a:srgbClr val="FF0000"/>
+                </a:solidFill>
+              </a:endParaRPr>
+            </a:p>
+            <a:p>
+              <a:pPr algn="l"/>
+              <a:r>
+                <a:rPr kumimoji="1" lang="ja-JP" altLang="en-US" sz="1200" b="1">
+                  <a:solidFill>
+                    <a:srgbClr val="FF0000"/>
+                  </a:solidFill>
+                </a:rPr>
+                <a:t>　入力欄</a:t>
+              </a:r>
+            </a:p>
+          </p:txBody>
+        </p:sp>
+        <p:cxnSp>
+          <p:nvCxnSpPr>
+            <p:cNvPr id="30" name="直線矢印コネクタ 29">
+              <a:extLst>
+                <a:ext uri="{FF2B5EF4-FFF2-40B4-BE49-F238E27FC236}">
+                  <a16:creationId xmlns:a16="http://schemas.microsoft.com/office/drawing/2014/main" id="{94BF8C1D-901C-95E3-FAC1-AA061E830872}"/>
+                </a:ext>
+              </a:extLst>
+            </p:cNvPr>
+            <p:cNvCxnSpPr>
+              <a:stCxn id="29" idx="1"/>
+              <a:endCxn id="28" idx="3"/>
+            </p:cNvCxnSpPr>
+            <p:nvPr/>
+          </p:nvCxnSpPr>
+          <p:spPr>
+            <a:xfrm flipH="1">
+              <a:off x="10240203" y="8116686"/>
+              <a:ext cx="272715" cy="7800"/>
+            </a:xfrm>
+            <a:prstGeom prst="straightConnector1">
+              <a:avLst/>
+            </a:prstGeom>
+            <a:ln w="28575">
+              <a:solidFill>
+                <a:srgbClr val="FF0000"/>
+              </a:solidFill>
+              <a:tailEnd type="triangle"/>
+            </a:ln>
+          </p:spPr>
+          <p:style>
+            <a:lnRef idx="2">
+              <a:schemeClr val="accent1"/>
+            </a:lnRef>
+            <a:fillRef idx="0">
+              <a:schemeClr val="accent1"/>
+            </a:fillRef>
+            <a:effectRef idx="1">
+              <a:schemeClr val="accent1"/>
+            </a:effectRef>
+            <a:fontRef idx="minor">
+              <a:schemeClr val="tx1"/>
+            </a:fontRef>
+          </p:style>
+        </p:cxnSp>
+      </p:grpSp>
+    </p:spTree>
+    <p:extLst>
+      <p:ext uri="{BB962C8B-B14F-4D97-AF65-F5344CB8AC3E}">
+        <p14:creationId xmlns:p14="http://schemas.microsoft.com/office/powerpoint/2010/main" val="3701427094"/>
+      </p:ext>
+    </p:extLst>
+  </p:cSld>
+  <p:clrMapOvr>
+    <a:masterClrMapping/>
+  </p:clrMapOvr>
+</p:sld>
+</file>
+
+<file path=ppt/slides/slide8.xml><?xml version="1.0" encoding="utf-8"?>
+<p:sld xmlns:a="http://schemas.openxmlformats.org/drawingml/2006/main" xmlns:r="http://schemas.openxmlformats.org/officeDocument/2006/relationships" xmlns:p="http://schemas.openxmlformats.org/presentationml/2006/main">
+  <p:cSld>
+    <p:spTree>
+      <p:nvGrpSpPr>
+        <p:cNvPr id="1" name="">
+          <a:extLst>
+            <a:ext uri="{FF2B5EF4-FFF2-40B4-BE49-F238E27FC236}">
+              <a16:creationId xmlns:a16="http://schemas.microsoft.com/office/drawing/2014/main" id="{9F980BDA-4A4C-7E94-0A20-011122EAC56E}"/>
+            </a:ext>
+          </a:extLst>
+        </p:cNvPr>
+        <p:cNvGrpSpPr/>
+        <p:nvPr/>
+      </p:nvGrpSpPr>
+      <p:grpSpPr>
+        <a:xfrm>
+          <a:off x="0" y="0"/>
+          <a:ext cx="0" cy="0"/>
+          <a:chOff x="0" y="0"/>
+          <a:chExt cx="0" cy="0"/>
+        </a:xfrm>
+      </p:grpSpPr>
+      <p:grpSp>
+        <p:nvGrpSpPr>
+          <p:cNvPr id="6" name="グループ化 5">
+            <a:extLst>
+              <a:ext uri="{FF2B5EF4-FFF2-40B4-BE49-F238E27FC236}">
+                <a16:creationId xmlns:a16="http://schemas.microsoft.com/office/drawing/2014/main" id="{117035BB-941E-434B-1B7D-FC0E88A58996}"/>
+              </a:ext>
+            </a:extLst>
+          </p:cNvPr>
+          <p:cNvGrpSpPr/>
+          <p:nvPr/>
+        </p:nvGrpSpPr>
+        <p:grpSpPr>
+          <a:xfrm>
+            <a:off x="375153" y="415637"/>
+            <a:ext cx="11441694" cy="6918613"/>
+            <a:chOff x="12301537" y="5082948"/>
+            <a:chExt cx="11475801" cy="6955591"/>
+          </a:xfrm>
+        </p:grpSpPr>
+        <p:grpSp>
+          <p:nvGrpSpPr>
+            <p:cNvPr id="21" name="グループ化 20">
+              <a:extLst>
+                <a:ext uri="{FF2B5EF4-FFF2-40B4-BE49-F238E27FC236}">
+                  <a16:creationId xmlns:a16="http://schemas.microsoft.com/office/drawing/2014/main" id="{E3A9B2BE-7263-7BEF-CF8A-8FBC14530D4D}"/>
+                </a:ext>
+              </a:extLst>
+            </p:cNvPr>
+            <p:cNvGrpSpPr/>
+            <p:nvPr/>
+          </p:nvGrpSpPr>
+          <p:grpSpPr>
+            <a:xfrm>
+              <a:off x="12301537" y="5082948"/>
+              <a:ext cx="11475801" cy="6955591"/>
+              <a:chOff x="12301537" y="5082948"/>
+              <a:chExt cx="11236058" cy="6791917"/>
+            </a:xfrm>
+          </p:grpSpPr>
+          <p:sp>
+            <p:nvSpPr>
+              <p:cNvPr id="25" name="正方形/長方形 24">
+                <a:extLst>
+                  <a:ext uri="{FF2B5EF4-FFF2-40B4-BE49-F238E27FC236}">
+                    <a16:creationId xmlns:a16="http://schemas.microsoft.com/office/drawing/2014/main" id="{BF470FBD-094D-577D-D12C-5F0DEA6E1F68}"/>
+                  </a:ext>
+                </a:extLst>
+              </p:cNvPr>
+              <p:cNvSpPr/>
+              <p:nvPr/>
+            </p:nvSpPr>
+            <p:spPr>
+              <a:xfrm>
+                <a:off x="12301537" y="5082948"/>
+                <a:ext cx="11236058" cy="6791917"/>
+              </a:xfrm>
+              <a:prstGeom prst="rect">
+                <a:avLst/>
+              </a:prstGeom>
+              <a:ln>
+                <a:noFill/>
+              </a:ln>
+            </p:spPr>
+            <p:style>
+              <a:lnRef idx="2">
+                <a:schemeClr val="dk1"/>
+              </a:lnRef>
+              <a:fillRef idx="1">
+                <a:schemeClr val="lt1"/>
+              </a:fillRef>
+              <a:effectRef idx="0">
+                <a:schemeClr val="dk1"/>
+              </a:effectRef>
+              <a:fontRef idx="minor">
+                <a:schemeClr val="dk1"/>
+              </a:fontRef>
+            </p:style>
+            <p:txBody>
+              <a:bodyPr wrap="square" rtlCol="0" anchor="ctr"/>
+              <a:lstStyle>
+                <a:defPPr>
+                  <a:defRPr lang="ja-JP"/>
+                </a:defPPr>
+                <a:lvl1pPr marL="0" indent="0" algn="l" defTabSz="914400" rtl="0" eaLnBrk="1" latinLnBrk="0" hangingPunct="1">
+                  <a:defRPr kumimoji="1" sz="1800" kern="1200">
+                    <a:solidFill>
+                      <a:schemeClr val="dk1"/>
+                    </a:solidFill>
+                    <a:latin typeface="+mn-lt"/>
+                    <a:ea typeface="+mn-ea"/>
+                    <a:cs typeface="+mn-cs"/>
+                  </a:defRPr>
+                </a:lvl1pPr>
+                <a:lvl2pPr marL="457200" indent="0" algn="l" defTabSz="914400" rtl="0" eaLnBrk="1" latinLnBrk="0" hangingPunct="1">
+                  <a:defRPr kumimoji="1" sz="1800" kern="1200">
+                    <a:solidFill>
+                      <a:schemeClr val="dk1"/>
+                    </a:solidFill>
+                    <a:latin typeface="+mn-lt"/>
+                    <a:ea typeface="+mn-ea"/>
+                    <a:cs typeface="+mn-cs"/>
+                  </a:defRPr>
+                </a:lvl2pPr>
+                <a:lvl3pPr marL="914400" indent="0" algn="l" defTabSz="914400" rtl="0" eaLnBrk="1" latinLnBrk="0" hangingPunct="1">
+                  <a:defRPr kumimoji="1" sz="1800" kern="1200">
+                    <a:solidFill>
+                      <a:schemeClr val="dk1"/>
+                    </a:solidFill>
+                    <a:latin typeface="+mn-lt"/>
+                    <a:ea typeface="+mn-ea"/>
+                    <a:cs typeface="+mn-cs"/>
+                  </a:defRPr>
+                </a:lvl3pPr>
+                <a:lvl4pPr marL="1371600" indent="0" algn="l" defTabSz="914400" rtl="0" eaLnBrk="1" latinLnBrk="0" hangingPunct="1">
+                  <a:defRPr kumimoji="1" sz="1800" kern="1200">
+                    <a:solidFill>
+                      <a:schemeClr val="dk1"/>
+                    </a:solidFill>
+                    <a:latin typeface="+mn-lt"/>
+                    <a:ea typeface="+mn-ea"/>
+                    <a:cs typeface="+mn-cs"/>
+                  </a:defRPr>
+                </a:lvl4pPr>
+                <a:lvl5pPr marL="1828800" indent="0" algn="l" defTabSz="914400" rtl="0" eaLnBrk="1" latinLnBrk="0" hangingPunct="1">
+                  <a:defRPr kumimoji="1" sz="1800" kern="1200">
+                    <a:solidFill>
+                      <a:schemeClr val="dk1"/>
+                    </a:solidFill>
+                    <a:latin typeface="+mn-lt"/>
+                    <a:ea typeface="+mn-ea"/>
+                    <a:cs typeface="+mn-cs"/>
+                  </a:defRPr>
+                </a:lvl5pPr>
+                <a:lvl6pPr marL="2286000" indent="0" algn="l" defTabSz="914400" rtl="0" eaLnBrk="1" latinLnBrk="0" hangingPunct="1">
+                  <a:defRPr kumimoji="1" sz="1800" kern="1200">
+                    <a:solidFill>
+                      <a:schemeClr val="dk1"/>
+                    </a:solidFill>
+                    <a:latin typeface="+mn-lt"/>
+                    <a:ea typeface="+mn-ea"/>
+                    <a:cs typeface="+mn-cs"/>
+                  </a:defRPr>
+                </a:lvl6pPr>
+                <a:lvl7pPr marL="2743200" indent="0" algn="l" defTabSz="914400" rtl="0" eaLnBrk="1" latinLnBrk="0" hangingPunct="1">
+                  <a:defRPr kumimoji="1" sz="1800" kern="1200">
+                    <a:solidFill>
+                      <a:schemeClr val="dk1"/>
+                    </a:solidFill>
+                    <a:latin typeface="+mn-lt"/>
+                    <a:ea typeface="+mn-ea"/>
+                    <a:cs typeface="+mn-cs"/>
+                  </a:defRPr>
+                </a:lvl7pPr>
+                <a:lvl8pPr marL="3200400" indent="0" algn="l" defTabSz="914400" rtl="0" eaLnBrk="1" latinLnBrk="0" hangingPunct="1">
+                  <a:defRPr kumimoji="1" sz="1800" kern="1200">
+                    <a:solidFill>
+                      <a:schemeClr val="dk1"/>
+                    </a:solidFill>
+                    <a:latin typeface="+mn-lt"/>
+                    <a:ea typeface="+mn-ea"/>
+                    <a:cs typeface="+mn-cs"/>
+                  </a:defRPr>
+                </a:lvl8pPr>
+                <a:lvl9pPr marL="3657600" indent="0" algn="l" defTabSz="914400" rtl="0" eaLnBrk="1" latinLnBrk="0" hangingPunct="1">
+                  <a:defRPr kumimoji="1" sz="1800" kern="1200">
+                    <a:solidFill>
+                      <a:schemeClr val="dk1"/>
+                    </a:solidFill>
+                    <a:latin typeface="+mn-lt"/>
+                    <a:ea typeface="+mn-ea"/>
+                    <a:cs typeface="+mn-cs"/>
+                  </a:defRPr>
+                </a:lvl9pPr>
+              </a:lstStyle>
+              <a:p>
+                <a:pPr algn="ctr"/>
+                <a:endParaRPr kumimoji="1" lang="ja-JP" altLang="en-US" dirty="0"/>
+              </a:p>
+            </p:txBody>
+          </p:sp>
+          <p:pic>
+            <p:nvPicPr>
+              <p:cNvPr id="26" name="図 25">
+                <a:extLst>
+                  <a:ext uri="{FF2B5EF4-FFF2-40B4-BE49-F238E27FC236}">
+                    <a16:creationId xmlns:a16="http://schemas.microsoft.com/office/drawing/2014/main" id="{80E4A9A0-2C8E-B345-1ECD-E0BDA39EC1AB}"/>
+                  </a:ext>
+                </a:extLst>
+              </p:cNvPr>
+              <p:cNvPicPr>
+                <a:picLocks noChangeAspect="1"/>
+              </p:cNvPicPr>
+              <p:nvPr/>
+            </p:nvPicPr>
+            <p:blipFill rotWithShape="1">
+              <a:blip r:embed="rId2"/>
+              <a:srcRect l="3511" t="2932" r="6080"/>
+              <a:stretch>
+                <a:fillRect/>
+              </a:stretch>
+            </p:blipFill>
+            <p:spPr>
+              <a:xfrm>
+                <a:off x="13662470" y="5292060"/>
+                <a:ext cx="8602795" cy="6518237"/>
+              </a:xfrm>
+              <a:prstGeom prst="rect">
+                <a:avLst/>
+              </a:prstGeom>
+            </p:spPr>
+          </p:pic>
+        </p:grpSp>
+        <p:sp>
+          <p:nvSpPr>
+            <p:cNvPr id="22" name="正方形/長方形 21">
+              <a:extLst>
+                <a:ext uri="{FF2B5EF4-FFF2-40B4-BE49-F238E27FC236}">
+                  <a16:creationId xmlns:a16="http://schemas.microsoft.com/office/drawing/2014/main" id="{6E5ACAE0-4FB1-E6CD-9B75-692B8604ABB3}"/>
+                </a:ext>
+              </a:extLst>
+            </p:cNvPr>
+            <p:cNvSpPr/>
+            <p:nvPr/>
+          </p:nvSpPr>
+          <p:spPr>
+            <a:xfrm>
+              <a:off x="13952962" y="5467490"/>
+              <a:ext cx="8253498" cy="6139468"/>
+            </a:xfrm>
+            <a:prstGeom prst="rect">
+              <a:avLst/>
+            </a:prstGeom>
+            <a:noFill/>
+            <a:ln w="28575">
+              <a:solidFill>
+                <a:srgbClr val="FF0000"/>
+              </a:solidFill>
+              <a:prstDash val="solid"/>
+            </a:ln>
+          </p:spPr>
+          <p:style>
+            <a:lnRef idx="2">
+              <a:schemeClr val="accent6"/>
+            </a:lnRef>
+            <a:fillRef idx="1">
+              <a:schemeClr val="lt1"/>
+            </a:fillRef>
+            <a:effectRef idx="0">
+              <a:schemeClr val="accent6"/>
+            </a:effectRef>
+            <a:fontRef idx="minor">
+              <a:schemeClr val="dk1"/>
+            </a:fontRef>
+          </p:style>
+          <p:txBody>
+            <a:bodyPr rtlCol="0" anchor="t"/>
+            <a:lstStyle>
+              <a:lvl1pPr marL="0" indent="0">
+                <a:defRPr sz="1100">
+                  <a:solidFill>
+                    <a:schemeClr val="dk1"/>
+                  </a:solidFill>
+                  <a:latin typeface="+mn-lt"/>
+                  <a:ea typeface="+mn-ea"/>
+                  <a:cs typeface="+mn-cs"/>
+                </a:defRPr>
+              </a:lvl1pPr>
+              <a:lvl2pPr marL="457200" indent="0">
+                <a:defRPr sz="1100">
+                  <a:solidFill>
+                    <a:schemeClr val="dk1"/>
+                  </a:solidFill>
+                  <a:latin typeface="+mn-lt"/>
+                  <a:ea typeface="+mn-ea"/>
+                  <a:cs typeface="+mn-cs"/>
+                </a:defRPr>
+              </a:lvl2pPr>
+              <a:lvl3pPr marL="914400" indent="0">
+                <a:defRPr sz="1100">
+                  <a:solidFill>
+                    <a:schemeClr val="dk1"/>
+                  </a:solidFill>
+                  <a:latin typeface="+mn-lt"/>
+                  <a:ea typeface="+mn-ea"/>
+                  <a:cs typeface="+mn-cs"/>
+                </a:defRPr>
+              </a:lvl3pPr>
+              <a:lvl4pPr marL="1371600" indent="0">
+                <a:defRPr sz="1100">
+                  <a:solidFill>
+                    <a:schemeClr val="dk1"/>
+                  </a:solidFill>
+                  <a:latin typeface="+mn-lt"/>
+                  <a:ea typeface="+mn-ea"/>
+                  <a:cs typeface="+mn-cs"/>
+                </a:defRPr>
+              </a:lvl4pPr>
+              <a:lvl5pPr marL="1828800" indent="0">
+                <a:defRPr sz="1100">
+                  <a:solidFill>
+                    <a:schemeClr val="dk1"/>
+                  </a:solidFill>
+                  <a:latin typeface="+mn-lt"/>
+                  <a:ea typeface="+mn-ea"/>
+                  <a:cs typeface="+mn-cs"/>
+                </a:defRPr>
+              </a:lvl5pPr>
+              <a:lvl6pPr marL="2286000" indent="0">
+                <a:defRPr sz="1100">
+                  <a:solidFill>
+                    <a:schemeClr val="dk1"/>
+                  </a:solidFill>
+                  <a:latin typeface="+mn-lt"/>
+                  <a:ea typeface="+mn-ea"/>
+                  <a:cs typeface="+mn-cs"/>
+                </a:defRPr>
+              </a:lvl6pPr>
+              <a:lvl7pPr marL="2743200" indent="0">
+                <a:defRPr sz="1100">
+                  <a:solidFill>
+                    <a:schemeClr val="dk1"/>
+                  </a:solidFill>
+                  <a:latin typeface="+mn-lt"/>
+                  <a:ea typeface="+mn-ea"/>
+                  <a:cs typeface="+mn-cs"/>
+                </a:defRPr>
+              </a:lvl7pPr>
+              <a:lvl8pPr marL="3200400" indent="0">
+                <a:defRPr sz="1100">
+                  <a:solidFill>
+                    <a:schemeClr val="dk1"/>
+                  </a:solidFill>
+                  <a:latin typeface="+mn-lt"/>
+                  <a:ea typeface="+mn-ea"/>
+                  <a:cs typeface="+mn-cs"/>
+                </a:defRPr>
+              </a:lvl8pPr>
+              <a:lvl9pPr marL="3657600" indent="0">
+                <a:defRPr sz="1100">
+                  <a:solidFill>
+                    <a:schemeClr val="dk1"/>
+                  </a:solidFill>
+                  <a:latin typeface="+mn-lt"/>
+                  <a:ea typeface="+mn-ea"/>
+                  <a:cs typeface="+mn-cs"/>
+                </a:defRPr>
+              </a:lvl9pPr>
+            </a:lstStyle>
+            <a:p>
+              <a:pPr algn="l"/>
+              <a:endParaRPr kumimoji="1" lang="ja-JP" altLang="en-US" sz="1100"/>
+            </a:p>
+          </p:txBody>
+        </p:sp>
+        <p:sp>
+          <p:nvSpPr>
+            <p:cNvPr id="23" name="正方形/長方形 22">
+              <a:extLst>
+                <a:ext uri="{FF2B5EF4-FFF2-40B4-BE49-F238E27FC236}">
+                  <a16:creationId xmlns:a16="http://schemas.microsoft.com/office/drawing/2014/main" id="{B058BDEA-2998-C4C9-96E0-3BCDCA6BA825}"/>
+                </a:ext>
+              </a:extLst>
+            </p:cNvPr>
+            <p:cNvSpPr/>
+            <p:nvPr/>
+          </p:nvSpPr>
+          <p:spPr>
+            <a:xfrm>
+              <a:off x="22481079" y="8115674"/>
+              <a:ext cx="1135083" cy="834908"/>
+            </a:xfrm>
+            <a:prstGeom prst="rect">
+              <a:avLst/>
+            </a:prstGeom>
+            <a:ln w="28575">
+              <a:solidFill>
+                <a:srgbClr val="FF0000"/>
+              </a:solidFill>
+            </a:ln>
+          </p:spPr>
+          <p:style>
+            <a:lnRef idx="2">
+              <a:schemeClr val="accent6"/>
+            </a:lnRef>
+            <a:fillRef idx="1">
+              <a:schemeClr val="lt1"/>
+            </a:fillRef>
+            <a:effectRef idx="0">
+              <a:schemeClr val="accent6"/>
+            </a:effectRef>
+            <a:fontRef idx="minor">
+              <a:schemeClr val="dk1"/>
+            </a:fontRef>
+          </p:style>
+          <p:txBody>
+            <a:bodyPr rtlCol="0" anchor="ctr"/>
+            <a:lstStyle>
+              <a:lvl1pPr marL="0" indent="0">
+                <a:defRPr sz="1100">
+                  <a:solidFill>
+                    <a:schemeClr val="dk1"/>
+                  </a:solidFill>
+                  <a:latin typeface="+mn-lt"/>
+                  <a:ea typeface="+mn-ea"/>
+                  <a:cs typeface="+mn-cs"/>
+                </a:defRPr>
+              </a:lvl1pPr>
+              <a:lvl2pPr marL="457200" indent="0">
+                <a:defRPr sz="1100">
+                  <a:solidFill>
+                    <a:schemeClr val="dk1"/>
+                  </a:solidFill>
+                  <a:latin typeface="+mn-lt"/>
+                  <a:ea typeface="+mn-ea"/>
+                  <a:cs typeface="+mn-cs"/>
+                </a:defRPr>
+              </a:lvl2pPr>
+              <a:lvl3pPr marL="914400" indent="0">
+                <a:defRPr sz="1100">
+                  <a:solidFill>
+                    <a:schemeClr val="dk1"/>
+                  </a:solidFill>
+                  <a:latin typeface="+mn-lt"/>
+                  <a:ea typeface="+mn-ea"/>
+                  <a:cs typeface="+mn-cs"/>
+                </a:defRPr>
+              </a:lvl3pPr>
+              <a:lvl4pPr marL="1371600" indent="0">
+                <a:defRPr sz="1100">
+                  <a:solidFill>
+                    <a:schemeClr val="dk1"/>
+                  </a:solidFill>
+                  <a:latin typeface="+mn-lt"/>
+                  <a:ea typeface="+mn-ea"/>
+                  <a:cs typeface="+mn-cs"/>
+                </a:defRPr>
+              </a:lvl4pPr>
+              <a:lvl5pPr marL="1828800" indent="0">
+                <a:defRPr sz="1100">
+                  <a:solidFill>
+                    <a:schemeClr val="dk1"/>
+                  </a:solidFill>
+                  <a:latin typeface="+mn-lt"/>
+                  <a:ea typeface="+mn-ea"/>
+                  <a:cs typeface="+mn-cs"/>
+                </a:defRPr>
+              </a:lvl5pPr>
+              <a:lvl6pPr marL="2286000" indent="0">
+                <a:defRPr sz="1100">
+                  <a:solidFill>
+                    <a:schemeClr val="dk1"/>
+                  </a:solidFill>
+                  <a:latin typeface="+mn-lt"/>
+                  <a:ea typeface="+mn-ea"/>
+                  <a:cs typeface="+mn-cs"/>
+                </a:defRPr>
+              </a:lvl6pPr>
+              <a:lvl7pPr marL="2743200" indent="0">
+                <a:defRPr sz="1100">
+                  <a:solidFill>
+                    <a:schemeClr val="dk1"/>
+                  </a:solidFill>
+                  <a:latin typeface="+mn-lt"/>
+                  <a:ea typeface="+mn-ea"/>
+                  <a:cs typeface="+mn-cs"/>
+                </a:defRPr>
+              </a:lvl7pPr>
+              <a:lvl8pPr marL="3200400" indent="0">
+                <a:defRPr sz="1100">
+                  <a:solidFill>
+                    <a:schemeClr val="dk1"/>
+                  </a:solidFill>
+                  <a:latin typeface="+mn-lt"/>
+                  <a:ea typeface="+mn-ea"/>
+                  <a:cs typeface="+mn-cs"/>
+                </a:defRPr>
+              </a:lvl8pPr>
+              <a:lvl9pPr marL="3657600" indent="0">
+                <a:defRPr sz="1100">
+                  <a:solidFill>
+                    <a:schemeClr val="dk1"/>
+                  </a:solidFill>
+                  <a:latin typeface="+mn-lt"/>
+                  <a:ea typeface="+mn-ea"/>
+                  <a:cs typeface="+mn-cs"/>
+                </a:defRPr>
+              </a:lvl9pPr>
+            </a:lstStyle>
+            <a:p>
+              <a:pPr algn="l"/>
+              <a:r>
+                <a:rPr kumimoji="1" lang="ja-JP" altLang="en-US" sz="1200" b="1">
+                  <a:solidFill>
+                    <a:srgbClr val="FF0000"/>
+                  </a:solidFill>
+                </a:rPr>
+                <a:t>⑥エネミー</a:t>
+              </a:r>
+              <a:endParaRPr kumimoji="1" lang="en-US" altLang="ja-JP" sz="1200" b="1">
+                <a:solidFill>
+                  <a:srgbClr val="FF0000"/>
+                </a:solidFill>
+              </a:endParaRPr>
+            </a:p>
+            <a:p>
+              <a:pPr algn="l"/>
+              <a:r>
+                <a:rPr kumimoji="1" lang="ja-JP" altLang="en-US" sz="1200" b="1">
+                  <a:solidFill>
+                    <a:srgbClr val="FF0000"/>
+                  </a:solidFill>
+                </a:rPr>
+                <a:t>　能力値欄</a:t>
+              </a:r>
+            </a:p>
+          </p:txBody>
+        </p:sp>
+        <p:cxnSp>
+          <p:nvCxnSpPr>
+            <p:cNvPr id="24" name="直線矢印コネクタ 23">
+              <a:extLst>
+                <a:ext uri="{FF2B5EF4-FFF2-40B4-BE49-F238E27FC236}">
+                  <a16:creationId xmlns:a16="http://schemas.microsoft.com/office/drawing/2014/main" id="{278AFAF8-C95B-67C7-A036-591C56A19F4E}"/>
+                </a:ext>
+              </a:extLst>
+            </p:cNvPr>
+            <p:cNvCxnSpPr>
+              <a:stCxn id="23" idx="1"/>
+              <a:endCxn id="22" idx="3"/>
+            </p:cNvCxnSpPr>
+            <p:nvPr/>
+          </p:nvCxnSpPr>
+          <p:spPr>
+            <a:xfrm flipH="1">
+              <a:off x="22206460" y="8533128"/>
+              <a:ext cx="274619" cy="4097"/>
+            </a:xfrm>
+            <a:prstGeom prst="straightConnector1">
+              <a:avLst/>
+            </a:prstGeom>
+            <a:ln w="28575">
+              <a:solidFill>
+                <a:srgbClr val="FF0000"/>
+              </a:solidFill>
+              <a:tailEnd type="triangle"/>
+            </a:ln>
+          </p:spPr>
+          <p:style>
+            <a:lnRef idx="2">
+              <a:schemeClr val="accent1"/>
+            </a:lnRef>
+            <a:fillRef idx="0">
+              <a:schemeClr val="accent1"/>
+            </a:fillRef>
+            <a:effectRef idx="1">
+              <a:schemeClr val="accent1"/>
+            </a:effectRef>
+            <a:fontRef idx="minor">
+              <a:schemeClr val="tx1"/>
+            </a:fontRef>
+          </p:style>
+        </p:cxnSp>
+      </p:grpSp>
+    </p:spTree>
+    <p:extLst>
+      <p:ext uri="{BB962C8B-B14F-4D97-AF65-F5344CB8AC3E}">
+        <p14:creationId xmlns:p14="http://schemas.microsoft.com/office/powerpoint/2010/main" val="3940630575"/>
       </p:ext>
     </p:extLst>
   </p:cSld>

--- a/スクリーンショット_使い方_エネミー.pptx
+++ b/スクリーンショット_使い方_エネミー.pptx
@@ -13,6 +13,10 @@
     <p:sldId id="263" r:id="rId7"/>
     <p:sldId id="264" r:id="rId8"/>
     <p:sldId id="266" r:id="rId9"/>
+    <p:sldId id="270" r:id="rId10"/>
+    <p:sldId id="271" r:id="rId11"/>
+    <p:sldId id="272" r:id="rId12"/>
+    <p:sldId id="273" r:id="rId13"/>
   </p:sldIdLst>
   <p:sldSz cx="12192000" cy="6858000"/>
   <p:notesSz cx="6858000" cy="9144000"/>
@@ -113,7 +117,18 @@
   </p:defaultTextStyle>
   <p:extLst>
     <p:ext uri="{EFAFB233-063F-42B5-8137-9DF3F51BA10A}">
-      <p15:sldGuideLst xmlns:p15="http://schemas.microsoft.com/office/powerpoint/2012/main"/>
+      <p15:sldGuideLst xmlns:p15="http://schemas.microsoft.com/office/powerpoint/2012/main">
+        <p15:guide id="1" orient="horz" pos="2160" userDrawn="1">
+          <p15:clr>
+            <a:srgbClr val="A4A3A4"/>
+          </p15:clr>
+        </p15:guide>
+        <p15:guide id="2" pos="3840" userDrawn="1">
+          <p15:clr>
+            <a:srgbClr val="A4A3A4"/>
+          </p15:clr>
+        </p15:guide>
+      </p15:sldGuideLst>
     </p:ext>
   </p:extLst>
 </p:presentation>
@@ -3790,6 +3805,4491 @@
 </p:sld>
 </file>
 
+<file path=ppt/slides/slide10.xml><?xml version="1.0" encoding="utf-8"?>
+<p:sld xmlns:a="http://schemas.openxmlformats.org/drawingml/2006/main" xmlns:r="http://schemas.openxmlformats.org/officeDocument/2006/relationships" xmlns:p="http://schemas.openxmlformats.org/presentationml/2006/main">
+  <p:cSld>
+    <p:spTree>
+      <p:nvGrpSpPr>
+        <p:cNvPr id="1" name="">
+          <a:extLst>
+            <a:ext uri="{FF2B5EF4-FFF2-40B4-BE49-F238E27FC236}">
+              <a16:creationId xmlns:a16="http://schemas.microsoft.com/office/drawing/2014/main" id="{10095EDD-5C5D-A834-0D34-A6661AABE3FD}"/>
+            </a:ext>
+          </a:extLst>
+        </p:cNvPr>
+        <p:cNvGrpSpPr/>
+        <p:nvPr/>
+      </p:nvGrpSpPr>
+      <p:grpSpPr>
+        <a:xfrm>
+          <a:off x="0" y="0"/>
+          <a:ext cx="0" cy="0"/>
+          <a:chOff x="0" y="0"/>
+          <a:chExt cx="0" cy="0"/>
+        </a:xfrm>
+      </p:grpSpPr>
+      <p:grpSp>
+        <p:nvGrpSpPr>
+          <p:cNvPr id="5" name="グループ化 4">
+            <a:extLst>
+              <a:ext uri="{FF2B5EF4-FFF2-40B4-BE49-F238E27FC236}">
+                <a16:creationId xmlns:a16="http://schemas.microsoft.com/office/drawing/2014/main" id="{22B7ED58-AFA1-B108-CD5C-34BC1147F047}"/>
+              </a:ext>
+            </a:extLst>
+          </p:cNvPr>
+          <p:cNvGrpSpPr/>
+          <p:nvPr/>
+        </p:nvGrpSpPr>
+        <p:grpSpPr>
+          <a:xfrm>
+            <a:off x="242096" y="719291"/>
+            <a:ext cx="11210374" cy="5419417"/>
+            <a:chOff x="11811001" y="887863"/>
+            <a:chExt cx="11615187" cy="4513795"/>
+          </a:xfrm>
+        </p:grpSpPr>
+        <p:sp>
+          <p:nvSpPr>
+            <p:cNvPr id="19" name="正方形/長方形 18">
+              <a:extLst>
+                <a:ext uri="{FF2B5EF4-FFF2-40B4-BE49-F238E27FC236}">
+                  <a16:creationId xmlns:a16="http://schemas.microsoft.com/office/drawing/2014/main" id="{AD249010-4E9A-2D04-F4B8-8CE096F3C355}"/>
+                </a:ext>
+              </a:extLst>
+            </p:cNvPr>
+            <p:cNvSpPr/>
+            <p:nvPr/>
+          </p:nvSpPr>
+          <p:spPr>
+            <a:xfrm>
+              <a:off x="11811001" y="887863"/>
+              <a:ext cx="11615187" cy="4513795"/>
+            </a:xfrm>
+            <a:prstGeom prst="rect">
+              <a:avLst/>
+            </a:prstGeom>
+            <a:ln>
+              <a:noFill/>
+            </a:ln>
+          </p:spPr>
+          <p:style>
+            <a:lnRef idx="2">
+              <a:schemeClr val="dk1"/>
+            </a:lnRef>
+            <a:fillRef idx="1">
+              <a:schemeClr val="lt1"/>
+            </a:fillRef>
+            <a:effectRef idx="0">
+              <a:schemeClr val="dk1"/>
+            </a:effectRef>
+            <a:fontRef idx="minor">
+              <a:schemeClr val="dk1"/>
+            </a:fontRef>
+          </p:style>
+          <p:txBody>
+            <a:bodyPr wrap="square" rtlCol="0" anchor="ctr"/>
+            <a:lstStyle>
+              <a:defPPr>
+                <a:defRPr lang="ja-JP"/>
+              </a:defPPr>
+              <a:lvl1pPr marL="0" indent="0" algn="l" defTabSz="914400" rtl="0" eaLnBrk="1" latinLnBrk="0" hangingPunct="1">
+                <a:defRPr kumimoji="1" sz="1800" kern="1200">
+                  <a:solidFill>
+                    <a:schemeClr val="dk1"/>
+                  </a:solidFill>
+                  <a:latin typeface="+mn-lt"/>
+                  <a:ea typeface="+mn-ea"/>
+                  <a:cs typeface="+mn-cs"/>
+                </a:defRPr>
+              </a:lvl1pPr>
+              <a:lvl2pPr marL="457200" indent="0" algn="l" defTabSz="914400" rtl="0" eaLnBrk="1" latinLnBrk="0" hangingPunct="1">
+                <a:defRPr kumimoji="1" sz="1800" kern="1200">
+                  <a:solidFill>
+                    <a:schemeClr val="dk1"/>
+                  </a:solidFill>
+                  <a:latin typeface="+mn-lt"/>
+                  <a:ea typeface="+mn-ea"/>
+                  <a:cs typeface="+mn-cs"/>
+                </a:defRPr>
+              </a:lvl2pPr>
+              <a:lvl3pPr marL="914400" indent="0" algn="l" defTabSz="914400" rtl="0" eaLnBrk="1" latinLnBrk="0" hangingPunct="1">
+                <a:defRPr kumimoji="1" sz="1800" kern="1200">
+                  <a:solidFill>
+                    <a:schemeClr val="dk1"/>
+                  </a:solidFill>
+                  <a:latin typeface="+mn-lt"/>
+                  <a:ea typeface="+mn-ea"/>
+                  <a:cs typeface="+mn-cs"/>
+                </a:defRPr>
+              </a:lvl3pPr>
+              <a:lvl4pPr marL="1371600" indent="0" algn="l" defTabSz="914400" rtl="0" eaLnBrk="1" latinLnBrk="0" hangingPunct="1">
+                <a:defRPr kumimoji="1" sz="1800" kern="1200">
+                  <a:solidFill>
+                    <a:schemeClr val="dk1"/>
+                  </a:solidFill>
+                  <a:latin typeface="+mn-lt"/>
+                  <a:ea typeface="+mn-ea"/>
+                  <a:cs typeface="+mn-cs"/>
+                </a:defRPr>
+              </a:lvl4pPr>
+              <a:lvl5pPr marL="1828800" indent="0" algn="l" defTabSz="914400" rtl="0" eaLnBrk="1" latinLnBrk="0" hangingPunct="1">
+                <a:defRPr kumimoji="1" sz="1800" kern="1200">
+                  <a:solidFill>
+                    <a:schemeClr val="dk1"/>
+                  </a:solidFill>
+                  <a:latin typeface="+mn-lt"/>
+                  <a:ea typeface="+mn-ea"/>
+                  <a:cs typeface="+mn-cs"/>
+                </a:defRPr>
+              </a:lvl5pPr>
+              <a:lvl6pPr marL="2286000" indent="0" algn="l" defTabSz="914400" rtl="0" eaLnBrk="1" latinLnBrk="0" hangingPunct="1">
+                <a:defRPr kumimoji="1" sz="1800" kern="1200">
+                  <a:solidFill>
+                    <a:schemeClr val="dk1"/>
+                  </a:solidFill>
+                  <a:latin typeface="+mn-lt"/>
+                  <a:ea typeface="+mn-ea"/>
+                  <a:cs typeface="+mn-cs"/>
+                </a:defRPr>
+              </a:lvl6pPr>
+              <a:lvl7pPr marL="2743200" indent="0" algn="l" defTabSz="914400" rtl="0" eaLnBrk="1" latinLnBrk="0" hangingPunct="1">
+                <a:defRPr kumimoji="1" sz="1800" kern="1200">
+                  <a:solidFill>
+                    <a:schemeClr val="dk1"/>
+                  </a:solidFill>
+                  <a:latin typeface="+mn-lt"/>
+                  <a:ea typeface="+mn-ea"/>
+                  <a:cs typeface="+mn-cs"/>
+                </a:defRPr>
+              </a:lvl7pPr>
+              <a:lvl8pPr marL="3200400" indent="0" algn="l" defTabSz="914400" rtl="0" eaLnBrk="1" latinLnBrk="0" hangingPunct="1">
+                <a:defRPr kumimoji="1" sz="1800" kern="1200">
+                  <a:solidFill>
+                    <a:schemeClr val="dk1"/>
+                  </a:solidFill>
+                  <a:latin typeface="+mn-lt"/>
+                  <a:ea typeface="+mn-ea"/>
+                  <a:cs typeface="+mn-cs"/>
+                </a:defRPr>
+              </a:lvl8pPr>
+              <a:lvl9pPr marL="3657600" indent="0" algn="l" defTabSz="914400" rtl="0" eaLnBrk="1" latinLnBrk="0" hangingPunct="1">
+                <a:defRPr kumimoji="1" sz="1800" kern="1200">
+                  <a:solidFill>
+                    <a:schemeClr val="dk1"/>
+                  </a:solidFill>
+                  <a:latin typeface="+mn-lt"/>
+                  <a:ea typeface="+mn-ea"/>
+                  <a:cs typeface="+mn-cs"/>
+                </a:defRPr>
+              </a:lvl9pPr>
+            </a:lstStyle>
+            <a:p>
+              <a:pPr algn="ctr"/>
+              <a:endParaRPr kumimoji="1" lang="ja-JP" altLang="en-US"/>
+            </a:p>
+          </p:txBody>
+        </p:sp>
+        <p:pic>
+          <p:nvPicPr>
+            <p:cNvPr id="20" name="図 19">
+              <a:extLst>
+                <a:ext uri="{FF2B5EF4-FFF2-40B4-BE49-F238E27FC236}">
+                  <a16:creationId xmlns:a16="http://schemas.microsoft.com/office/drawing/2014/main" id="{4626DD85-4E90-2876-611E-203F6DF94103}"/>
+                </a:ext>
+              </a:extLst>
+            </p:cNvPr>
+            <p:cNvPicPr>
+              <a:picLocks noChangeAspect="1"/>
+            </p:cNvPicPr>
+            <p:nvPr/>
+          </p:nvPicPr>
+          <p:blipFill rotWithShape="1">
+            <a:blip r:embed="rId2">
+              <a:alphaModFix/>
+            </a:blip>
+            <a:srcRect l="3250" t="13128" r="4513" b="35330"/>
+            <a:stretch>
+              <a:fillRect/>
+            </a:stretch>
+          </p:blipFill>
+          <p:spPr>
+            <a:xfrm>
+              <a:off x="13272407" y="1447997"/>
+              <a:ext cx="8702375" cy="3678184"/>
+            </a:xfrm>
+            <a:prstGeom prst="rect">
+              <a:avLst/>
+            </a:prstGeom>
+          </p:spPr>
+        </p:pic>
+        <p:grpSp>
+          <p:nvGrpSpPr>
+            <p:cNvPr id="21" name="グループ化 20">
+              <a:extLst>
+                <a:ext uri="{FF2B5EF4-FFF2-40B4-BE49-F238E27FC236}">
+                  <a16:creationId xmlns:a16="http://schemas.microsoft.com/office/drawing/2014/main" id="{3334FFE0-FA4A-027C-0828-F9451D07A18D}"/>
+                </a:ext>
+              </a:extLst>
+            </p:cNvPr>
+            <p:cNvGrpSpPr/>
+            <p:nvPr/>
+          </p:nvGrpSpPr>
+          <p:grpSpPr>
+            <a:xfrm>
+              <a:off x="13301604" y="1800786"/>
+              <a:ext cx="8519813" cy="3224639"/>
+              <a:chOff x="13301602" y="1800784"/>
+              <a:chExt cx="8725065" cy="2818946"/>
+            </a:xfrm>
+          </p:grpSpPr>
+          <p:sp>
+            <p:nvSpPr>
+              <p:cNvPr id="23" name="正方形/長方形 22">
+                <a:extLst>
+                  <a:ext uri="{FF2B5EF4-FFF2-40B4-BE49-F238E27FC236}">
+                    <a16:creationId xmlns:a16="http://schemas.microsoft.com/office/drawing/2014/main" id="{171B3E84-F70D-AE70-DA10-8B095D730D6E}"/>
+                  </a:ext>
+                </a:extLst>
+              </p:cNvPr>
+              <p:cNvSpPr/>
+              <p:nvPr/>
+            </p:nvSpPr>
+            <p:spPr>
+              <a:xfrm>
+                <a:off x="13301602" y="1838500"/>
+                <a:ext cx="2578686" cy="357256"/>
+              </a:xfrm>
+              <a:prstGeom prst="rect">
+                <a:avLst/>
+              </a:prstGeom>
+              <a:noFill/>
+              <a:ln w="28575">
+                <a:solidFill>
+                  <a:srgbClr val="FF0000"/>
+                </a:solidFill>
+                <a:prstDash val="solid"/>
+              </a:ln>
+            </p:spPr>
+            <p:style>
+              <a:lnRef idx="2">
+                <a:schemeClr val="accent6"/>
+              </a:lnRef>
+              <a:fillRef idx="1">
+                <a:schemeClr val="lt1"/>
+              </a:fillRef>
+              <a:effectRef idx="0">
+                <a:schemeClr val="accent6"/>
+              </a:effectRef>
+              <a:fontRef idx="minor">
+                <a:schemeClr val="dk1"/>
+              </a:fontRef>
+            </p:style>
+            <p:txBody>
+              <a:bodyPr rtlCol="0" anchor="t"/>
+              <a:lstStyle>
+                <a:lvl1pPr marL="0" indent="0">
+                  <a:defRPr sz="1100">
+                    <a:solidFill>
+                      <a:schemeClr val="dk1"/>
+                    </a:solidFill>
+                    <a:latin typeface="+mn-lt"/>
+                    <a:ea typeface="+mn-ea"/>
+                    <a:cs typeface="+mn-cs"/>
+                  </a:defRPr>
+                </a:lvl1pPr>
+                <a:lvl2pPr marL="457200" indent="0">
+                  <a:defRPr sz="1100">
+                    <a:solidFill>
+                      <a:schemeClr val="dk1"/>
+                    </a:solidFill>
+                    <a:latin typeface="+mn-lt"/>
+                    <a:ea typeface="+mn-ea"/>
+                    <a:cs typeface="+mn-cs"/>
+                  </a:defRPr>
+                </a:lvl2pPr>
+                <a:lvl3pPr marL="914400" indent="0">
+                  <a:defRPr sz="1100">
+                    <a:solidFill>
+                      <a:schemeClr val="dk1"/>
+                    </a:solidFill>
+                    <a:latin typeface="+mn-lt"/>
+                    <a:ea typeface="+mn-ea"/>
+                    <a:cs typeface="+mn-cs"/>
+                  </a:defRPr>
+                </a:lvl3pPr>
+                <a:lvl4pPr marL="1371600" indent="0">
+                  <a:defRPr sz="1100">
+                    <a:solidFill>
+                      <a:schemeClr val="dk1"/>
+                    </a:solidFill>
+                    <a:latin typeface="+mn-lt"/>
+                    <a:ea typeface="+mn-ea"/>
+                    <a:cs typeface="+mn-cs"/>
+                  </a:defRPr>
+                </a:lvl4pPr>
+                <a:lvl5pPr marL="1828800" indent="0">
+                  <a:defRPr sz="1100">
+                    <a:solidFill>
+                      <a:schemeClr val="dk1"/>
+                    </a:solidFill>
+                    <a:latin typeface="+mn-lt"/>
+                    <a:ea typeface="+mn-ea"/>
+                    <a:cs typeface="+mn-cs"/>
+                  </a:defRPr>
+                </a:lvl5pPr>
+                <a:lvl6pPr marL="2286000" indent="0">
+                  <a:defRPr sz="1100">
+                    <a:solidFill>
+                      <a:schemeClr val="dk1"/>
+                    </a:solidFill>
+                    <a:latin typeface="+mn-lt"/>
+                    <a:ea typeface="+mn-ea"/>
+                    <a:cs typeface="+mn-cs"/>
+                  </a:defRPr>
+                </a:lvl6pPr>
+                <a:lvl7pPr marL="2743200" indent="0">
+                  <a:defRPr sz="1100">
+                    <a:solidFill>
+                      <a:schemeClr val="dk1"/>
+                    </a:solidFill>
+                    <a:latin typeface="+mn-lt"/>
+                    <a:ea typeface="+mn-ea"/>
+                    <a:cs typeface="+mn-cs"/>
+                  </a:defRPr>
+                </a:lvl7pPr>
+                <a:lvl8pPr marL="3200400" indent="0">
+                  <a:defRPr sz="1100">
+                    <a:solidFill>
+                      <a:schemeClr val="dk1"/>
+                    </a:solidFill>
+                    <a:latin typeface="+mn-lt"/>
+                    <a:ea typeface="+mn-ea"/>
+                    <a:cs typeface="+mn-cs"/>
+                  </a:defRPr>
+                </a:lvl8pPr>
+                <a:lvl9pPr marL="3657600" indent="0">
+                  <a:defRPr sz="1100">
+                    <a:solidFill>
+                      <a:schemeClr val="dk1"/>
+                    </a:solidFill>
+                    <a:latin typeface="+mn-lt"/>
+                    <a:ea typeface="+mn-ea"/>
+                    <a:cs typeface="+mn-cs"/>
+                  </a:defRPr>
+                </a:lvl9pPr>
+              </a:lstStyle>
+              <a:p>
+                <a:pPr algn="l"/>
+                <a:endParaRPr kumimoji="1" lang="ja-JP" altLang="en-US" sz="1100"/>
+              </a:p>
+            </p:txBody>
+          </p:sp>
+          <p:sp>
+            <p:nvSpPr>
+              <p:cNvPr id="24" name="正方形/長方形 23">
+                <a:extLst>
+                  <a:ext uri="{FF2B5EF4-FFF2-40B4-BE49-F238E27FC236}">
+                    <a16:creationId xmlns:a16="http://schemas.microsoft.com/office/drawing/2014/main" id="{F7CB8986-BEB8-670E-1C0E-35E82085BCBE}"/>
+                  </a:ext>
+                </a:extLst>
+              </p:cNvPr>
+              <p:cNvSpPr/>
+              <p:nvPr/>
+            </p:nvSpPr>
+            <p:spPr>
+              <a:xfrm>
+                <a:off x="13517734" y="2814494"/>
+                <a:ext cx="8508933" cy="1805236"/>
+              </a:xfrm>
+              <a:prstGeom prst="rect">
+                <a:avLst/>
+              </a:prstGeom>
+              <a:noFill/>
+              <a:ln w="28575">
+                <a:solidFill>
+                  <a:srgbClr val="FF0000"/>
+                </a:solidFill>
+                <a:prstDash val="solid"/>
+              </a:ln>
+            </p:spPr>
+            <p:style>
+              <a:lnRef idx="2">
+                <a:schemeClr val="accent6"/>
+              </a:lnRef>
+              <a:fillRef idx="1">
+                <a:schemeClr val="lt1"/>
+              </a:fillRef>
+              <a:effectRef idx="0">
+                <a:schemeClr val="accent6"/>
+              </a:effectRef>
+              <a:fontRef idx="minor">
+                <a:schemeClr val="dk1"/>
+              </a:fontRef>
+            </p:style>
+            <p:txBody>
+              <a:bodyPr rtlCol="0" anchor="t"/>
+              <a:lstStyle>
+                <a:lvl1pPr marL="0" indent="0">
+                  <a:defRPr sz="1100">
+                    <a:solidFill>
+                      <a:schemeClr val="dk1"/>
+                    </a:solidFill>
+                    <a:latin typeface="+mn-lt"/>
+                    <a:ea typeface="+mn-ea"/>
+                    <a:cs typeface="+mn-cs"/>
+                  </a:defRPr>
+                </a:lvl1pPr>
+                <a:lvl2pPr marL="457200" indent="0">
+                  <a:defRPr sz="1100">
+                    <a:solidFill>
+                      <a:schemeClr val="dk1"/>
+                    </a:solidFill>
+                    <a:latin typeface="+mn-lt"/>
+                    <a:ea typeface="+mn-ea"/>
+                    <a:cs typeface="+mn-cs"/>
+                  </a:defRPr>
+                </a:lvl2pPr>
+                <a:lvl3pPr marL="914400" indent="0">
+                  <a:defRPr sz="1100">
+                    <a:solidFill>
+                      <a:schemeClr val="dk1"/>
+                    </a:solidFill>
+                    <a:latin typeface="+mn-lt"/>
+                    <a:ea typeface="+mn-ea"/>
+                    <a:cs typeface="+mn-cs"/>
+                  </a:defRPr>
+                </a:lvl3pPr>
+                <a:lvl4pPr marL="1371600" indent="0">
+                  <a:defRPr sz="1100">
+                    <a:solidFill>
+                      <a:schemeClr val="dk1"/>
+                    </a:solidFill>
+                    <a:latin typeface="+mn-lt"/>
+                    <a:ea typeface="+mn-ea"/>
+                    <a:cs typeface="+mn-cs"/>
+                  </a:defRPr>
+                </a:lvl4pPr>
+                <a:lvl5pPr marL="1828800" indent="0">
+                  <a:defRPr sz="1100">
+                    <a:solidFill>
+                      <a:schemeClr val="dk1"/>
+                    </a:solidFill>
+                    <a:latin typeface="+mn-lt"/>
+                    <a:ea typeface="+mn-ea"/>
+                    <a:cs typeface="+mn-cs"/>
+                  </a:defRPr>
+                </a:lvl5pPr>
+                <a:lvl6pPr marL="2286000" indent="0">
+                  <a:defRPr sz="1100">
+                    <a:solidFill>
+                      <a:schemeClr val="dk1"/>
+                    </a:solidFill>
+                    <a:latin typeface="+mn-lt"/>
+                    <a:ea typeface="+mn-ea"/>
+                    <a:cs typeface="+mn-cs"/>
+                  </a:defRPr>
+                </a:lvl6pPr>
+                <a:lvl7pPr marL="2743200" indent="0">
+                  <a:defRPr sz="1100">
+                    <a:solidFill>
+                      <a:schemeClr val="dk1"/>
+                    </a:solidFill>
+                    <a:latin typeface="+mn-lt"/>
+                    <a:ea typeface="+mn-ea"/>
+                    <a:cs typeface="+mn-cs"/>
+                  </a:defRPr>
+                </a:lvl7pPr>
+                <a:lvl8pPr marL="3200400" indent="0">
+                  <a:defRPr sz="1100">
+                    <a:solidFill>
+                      <a:schemeClr val="dk1"/>
+                    </a:solidFill>
+                    <a:latin typeface="+mn-lt"/>
+                    <a:ea typeface="+mn-ea"/>
+                    <a:cs typeface="+mn-cs"/>
+                  </a:defRPr>
+                </a:lvl8pPr>
+                <a:lvl9pPr marL="3657600" indent="0">
+                  <a:defRPr sz="1100">
+                    <a:solidFill>
+                      <a:schemeClr val="dk1"/>
+                    </a:solidFill>
+                    <a:latin typeface="+mn-lt"/>
+                    <a:ea typeface="+mn-ea"/>
+                    <a:cs typeface="+mn-cs"/>
+                  </a:defRPr>
+                </a:lvl9pPr>
+              </a:lstStyle>
+              <a:p>
+                <a:pPr algn="l"/>
+                <a:endParaRPr kumimoji="1" lang="ja-JP" altLang="en-US" sz="1100"/>
+              </a:p>
+            </p:txBody>
+          </p:sp>
+          <p:cxnSp>
+            <p:nvCxnSpPr>
+              <p:cNvPr id="25" name="直線矢印コネクタ 24">
+                <a:extLst>
+                  <a:ext uri="{FF2B5EF4-FFF2-40B4-BE49-F238E27FC236}">
+                    <a16:creationId xmlns:a16="http://schemas.microsoft.com/office/drawing/2014/main" id="{238D2688-B3B0-934C-92D7-2C081CB32D3E}"/>
+                  </a:ext>
+                </a:extLst>
+              </p:cNvPr>
+              <p:cNvCxnSpPr>
+                <a:stCxn id="26" idx="1"/>
+                <a:endCxn id="23" idx="3"/>
+              </p:cNvCxnSpPr>
+              <p:nvPr/>
+            </p:nvCxnSpPr>
+            <p:spPr>
+              <a:xfrm flipH="1">
+                <a:off x="15880288" y="2014837"/>
+                <a:ext cx="624821" cy="2291"/>
+              </a:xfrm>
+              <a:prstGeom prst="straightConnector1">
+                <a:avLst/>
+              </a:prstGeom>
+              <a:ln w="28575">
+                <a:solidFill>
+                  <a:srgbClr val="FF0000"/>
+                </a:solidFill>
+                <a:tailEnd type="triangle"/>
+              </a:ln>
+            </p:spPr>
+            <p:style>
+              <a:lnRef idx="2">
+                <a:schemeClr val="accent1"/>
+              </a:lnRef>
+              <a:fillRef idx="0">
+                <a:schemeClr val="accent1"/>
+              </a:fillRef>
+              <a:effectRef idx="1">
+                <a:schemeClr val="accent1"/>
+              </a:effectRef>
+              <a:fontRef idx="minor">
+                <a:schemeClr val="tx1"/>
+              </a:fontRef>
+            </p:style>
+          </p:cxnSp>
+          <p:sp>
+            <p:nvSpPr>
+              <p:cNvPr id="26" name="正方形/長方形 25">
+                <a:extLst>
+                  <a:ext uri="{FF2B5EF4-FFF2-40B4-BE49-F238E27FC236}">
+                    <a16:creationId xmlns:a16="http://schemas.microsoft.com/office/drawing/2014/main" id="{344DB035-65D8-7B29-DEDD-D52A6571BD1E}"/>
+                  </a:ext>
+                </a:extLst>
+              </p:cNvPr>
+              <p:cNvSpPr/>
+              <p:nvPr/>
+            </p:nvSpPr>
+            <p:spPr>
+              <a:xfrm>
+                <a:off x="16505109" y="1800784"/>
+                <a:ext cx="1508759" cy="428106"/>
+              </a:xfrm>
+              <a:prstGeom prst="rect">
+                <a:avLst/>
+              </a:prstGeom>
+              <a:ln w="28575">
+                <a:solidFill>
+                  <a:srgbClr val="FF0000"/>
+                </a:solidFill>
+              </a:ln>
+            </p:spPr>
+            <p:style>
+              <a:lnRef idx="2">
+                <a:schemeClr val="accent6"/>
+              </a:lnRef>
+              <a:fillRef idx="1">
+                <a:schemeClr val="lt1"/>
+              </a:fillRef>
+              <a:effectRef idx="0">
+                <a:schemeClr val="accent6"/>
+              </a:effectRef>
+              <a:fontRef idx="minor">
+                <a:schemeClr val="dk1"/>
+              </a:fontRef>
+            </p:style>
+            <p:txBody>
+              <a:bodyPr rtlCol="0" anchor="ctr"/>
+              <a:lstStyle>
+                <a:lvl1pPr marL="0" indent="0">
+                  <a:defRPr sz="1100">
+                    <a:solidFill>
+                      <a:schemeClr val="dk1"/>
+                    </a:solidFill>
+                    <a:latin typeface="+mn-lt"/>
+                    <a:ea typeface="+mn-ea"/>
+                    <a:cs typeface="+mn-cs"/>
+                  </a:defRPr>
+                </a:lvl1pPr>
+                <a:lvl2pPr marL="457200" indent="0">
+                  <a:defRPr sz="1100">
+                    <a:solidFill>
+                      <a:schemeClr val="dk1"/>
+                    </a:solidFill>
+                    <a:latin typeface="+mn-lt"/>
+                    <a:ea typeface="+mn-ea"/>
+                    <a:cs typeface="+mn-cs"/>
+                  </a:defRPr>
+                </a:lvl2pPr>
+                <a:lvl3pPr marL="914400" indent="0">
+                  <a:defRPr sz="1100">
+                    <a:solidFill>
+                      <a:schemeClr val="dk1"/>
+                    </a:solidFill>
+                    <a:latin typeface="+mn-lt"/>
+                    <a:ea typeface="+mn-ea"/>
+                    <a:cs typeface="+mn-cs"/>
+                  </a:defRPr>
+                </a:lvl3pPr>
+                <a:lvl4pPr marL="1371600" indent="0">
+                  <a:defRPr sz="1100">
+                    <a:solidFill>
+                      <a:schemeClr val="dk1"/>
+                    </a:solidFill>
+                    <a:latin typeface="+mn-lt"/>
+                    <a:ea typeface="+mn-ea"/>
+                    <a:cs typeface="+mn-cs"/>
+                  </a:defRPr>
+                </a:lvl4pPr>
+                <a:lvl5pPr marL="1828800" indent="0">
+                  <a:defRPr sz="1100">
+                    <a:solidFill>
+                      <a:schemeClr val="dk1"/>
+                    </a:solidFill>
+                    <a:latin typeface="+mn-lt"/>
+                    <a:ea typeface="+mn-ea"/>
+                    <a:cs typeface="+mn-cs"/>
+                  </a:defRPr>
+                </a:lvl5pPr>
+                <a:lvl6pPr marL="2286000" indent="0">
+                  <a:defRPr sz="1100">
+                    <a:solidFill>
+                      <a:schemeClr val="dk1"/>
+                    </a:solidFill>
+                    <a:latin typeface="+mn-lt"/>
+                    <a:ea typeface="+mn-ea"/>
+                    <a:cs typeface="+mn-cs"/>
+                  </a:defRPr>
+                </a:lvl6pPr>
+                <a:lvl7pPr marL="2743200" indent="0">
+                  <a:defRPr sz="1100">
+                    <a:solidFill>
+                      <a:schemeClr val="dk1"/>
+                    </a:solidFill>
+                    <a:latin typeface="+mn-lt"/>
+                    <a:ea typeface="+mn-ea"/>
+                    <a:cs typeface="+mn-cs"/>
+                  </a:defRPr>
+                </a:lvl7pPr>
+                <a:lvl8pPr marL="3200400" indent="0">
+                  <a:defRPr sz="1100">
+                    <a:solidFill>
+                      <a:schemeClr val="dk1"/>
+                    </a:solidFill>
+                    <a:latin typeface="+mn-lt"/>
+                    <a:ea typeface="+mn-ea"/>
+                    <a:cs typeface="+mn-cs"/>
+                  </a:defRPr>
+                </a:lvl8pPr>
+                <a:lvl9pPr marL="3657600" indent="0">
+                  <a:defRPr sz="1100">
+                    <a:solidFill>
+                      <a:schemeClr val="dk1"/>
+                    </a:solidFill>
+                    <a:latin typeface="+mn-lt"/>
+                    <a:ea typeface="+mn-ea"/>
+                    <a:cs typeface="+mn-cs"/>
+                  </a:defRPr>
+                </a:lvl9pPr>
+              </a:lstStyle>
+              <a:p>
+                <a:pPr algn="l"/>
+                <a:r>
+                  <a:rPr kumimoji="1" lang="ja-JP" altLang="en-US" sz="1200" b="1">
+                    <a:solidFill>
+                      <a:srgbClr val="FF0000"/>
+                    </a:solidFill>
+                  </a:rPr>
+                  <a:t>①タブの切り替え</a:t>
+                </a:r>
+              </a:p>
+            </p:txBody>
+          </p:sp>
+          <p:sp>
+            <p:nvSpPr>
+              <p:cNvPr id="27" name="正方形/長方形 26">
+                <a:extLst>
+                  <a:ext uri="{FF2B5EF4-FFF2-40B4-BE49-F238E27FC236}">
+                    <a16:creationId xmlns:a16="http://schemas.microsoft.com/office/drawing/2014/main" id="{5EEB965C-B075-8789-8CE6-76E0050B1B39}"/>
+                  </a:ext>
+                </a:extLst>
+              </p:cNvPr>
+              <p:cNvSpPr/>
+              <p:nvPr/>
+            </p:nvSpPr>
+            <p:spPr>
+              <a:xfrm>
+                <a:off x="19142742" y="2174480"/>
+                <a:ext cx="1127378" cy="420485"/>
+              </a:xfrm>
+              <a:prstGeom prst="rect">
+                <a:avLst/>
+              </a:prstGeom>
+              <a:ln w="28575">
+                <a:solidFill>
+                  <a:srgbClr val="FF0000"/>
+                </a:solidFill>
+              </a:ln>
+            </p:spPr>
+            <p:style>
+              <a:lnRef idx="2">
+                <a:schemeClr val="accent6"/>
+              </a:lnRef>
+              <a:fillRef idx="1">
+                <a:schemeClr val="lt1"/>
+              </a:fillRef>
+              <a:effectRef idx="0">
+                <a:schemeClr val="accent6"/>
+              </a:effectRef>
+              <a:fontRef idx="minor">
+                <a:schemeClr val="dk1"/>
+              </a:fontRef>
+            </p:style>
+            <p:txBody>
+              <a:bodyPr rtlCol="0" anchor="ctr"/>
+              <a:lstStyle>
+                <a:lvl1pPr marL="0" indent="0">
+                  <a:defRPr sz="1100">
+                    <a:solidFill>
+                      <a:schemeClr val="dk1"/>
+                    </a:solidFill>
+                    <a:latin typeface="+mn-lt"/>
+                    <a:ea typeface="+mn-ea"/>
+                    <a:cs typeface="+mn-cs"/>
+                  </a:defRPr>
+                </a:lvl1pPr>
+                <a:lvl2pPr marL="457200" indent="0">
+                  <a:defRPr sz="1100">
+                    <a:solidFill>
+                      <a:schemeClr val="dk1"/>
+                    </a:solidFill>
+                    <a:latin typeface="+mn-lt"/>
+                    <a:ea typeface="+mn-ea"/>
+                    <a:cs typeface="+mn-cs"/>
+                  </a:defRPr>
+                </a:lvl2pPr>
+                <a:lvl3pPr marL="914400" indent="0">
+                  <a:defRPr sz="1100">
+                    <a:solidFill>
+                      <a:schemeClr val="dk1"/>
+                    </a:solidFill>
+                    <a:latin typeface="+mn-lt"/>
+                    <a:ea typeface="+mn-ea"/>
+                    <a:cs typeface="+mn-cs"/>
+                  </a:defRPr>
+                </a:lvl3pPr>
+                <a:lvl4pPr marL="1371600" indent="0">
+                  <a:defRPr sz="1100">
+                    <a:solidFill>
+                      <a:schemeClr val="dk1"/>
+                    </a:solidFill>
+                    <a:latin typeface="+mn-lt"/>
+                    <a:ea typeface="+mn-ea"/>
+                    <a:cs typeface="+mn-cs"/>
+                  </a:defRPr>
+                </a:lvl4pPr>
+                <a:lvl5pPr marL="1828800" indent="0">
+                  <a:defRPr sz="1100">
+                    <a:solidFill>
+                      <a:schemeClr val="dk1"/>
+                    </a:solidFill>
+                    <a:latin typeface="+mn-lt"/>
+                    <a:ea typeface="+mn-ea"/>
+                    <a:cs typeface="+mn-cs"/>
+                  </a:defRPr>
+                </a:lvl5pPr>
+                <a:lvl6pPr marL="2286000" indent="0">
+                  <a:defRPr sz="1100">
+                    <a:solidFill>
+                      <a:schemeClr val="dk1"/>
+                    </a:solidFill>
+                    <a:latin typeface="+mn-lt"/>
+                    <a:ea typeface="+mn-ea"/>
+                    <a:cs typeface="+mn-cs"/>
+                  </a:defRPr>
+                </a:lvl6pPr>
+                <a:lvl7pPr marL="2743200" indent="0">
+                  <a:defRPr sz="1100">
+                    <a:solidFill>
+                      <a:schemeClr val="dk1"/>
+                    </a:solidFill>
+                    <a:latin typeface="+mn-lt"/>
+                    <a:ea typeface="+mn-ea"/>
+                    <a:cs typeface="+mn-cs"/>
+                  </a:defRPr>
+                </a:lvl7pPr>
+                <a:lvl8pPr marL="3200400" indent="0">
+                  <a:defRPr sz="1100">
+                    <a:solidFill>
+                      <a:schemeClr val="dk1"/>
+                    </a:solidFill>
+                    <a:latin typeface="+mn-lt"/>
+                    <a:ea typeface="+mn-ea"/>
+                    <a:cs typeface="+mn-cs"/>
+                  </a:defRPr>
+                </a:lvl8pPr>
+                <a:lvl9pPr marL="3657600" indent="0">
+                  <a:defRPr sz="1100">
+                    <a:solidFill>
+                      <a:schemeClr val="dk1"/>
+                    </a:solidFill>
+                    <a:latin typeface="+mn-lt"/>
+                    <a:ea typeface="+mn-ea"/>
+                    <a:cs typeface="+mn-cs"/>
+                  </a:defRPr>
+                </a:lvl9pPr>
+              </a:lstStyle>
+              <a:p>
+                <a:pPr algn="l"/>
+                <a:r>
+                  <a:rPr kumimoji="1" lang="ja-JP" altLang="en-US" sz="1200" b="1">
+                    <a:solidFill>
+                      <a:srgbClr val="FF0000"/>
+                    </a:solidFill>
+                  </a:rPr>
+                  <a:t>②特技の例</a:t>
+                </a:r>
+              </a:p>
+            </p:txBody>
+          </p:sp>
+        </p:grpSp>
+        <p:cxnSp>
+          <p:nvCxnSpPr>
+            <p:cNvPr id="22" name="直線矢印コネクタ 21">
+              <a:extLst>
+                <a:ext uri="{FF2B5EF4-FFF2-40B4-BE49-F238E27FC236}">
+                  <a16:creationId xmlns:a16="http://schemas.microsoft.com/office/drawing/2014/main" id="{14FC2B18-A5DD-4313-C428-703EFEF74C12}"/>
+                </a:ext>
+              </a:extLst>
+            </p:cNvPr>
+            <p:cNvCxnSpPr/>
+            <p:nvPr/>
+          </p:nvCxnSpPr>
+          <p:spPr>
+            <a:xfrm>
+              <a:off x="19544433" y="2708018"/>
+              <a:ext cx="491" cy="237122"/>
+            </a:xfrm>
+            <a:prstGeom prst="straightConnector1">
+              <a:avLst/>
+            </a:prstGeom>
+            <a:ln w="28575">
+              <a:solidFill>
+                <a:srgbClr val="FF0000"/>
+              </a:solidFill>
+              <a:tailEnd type="triangle"/>
+            </a:ln>
+          </p:spPr>
+          <p:style>
+            <a:lnRef idx="2">
+              <a:schemeClr val="accent1"/>
+            </a:lnRef>
+            <a:fillRef idx="0">
+              <a:schemeClr val="accent1"/>
+            </a:fillRef>
+            <a:effectRef idx="1">
+              <a:schemeClr val="accent1"/>
+            </a:effectRef>
+            <a:fontRef idx="minor">
+              <a:schemeClr val="tx1"/>
+            </a:fontRef>
+          </p:style>
+        </p:cxnSp>
+      </p:grpSp>
+    </p:spTree>
+    <p:extLst>
+      <p:ext uri="{BB962C8B-B14F-4D97-AF65-F5344CB8AC3E}">
+        <p14:creationId xmlns:p14="http://schemas.microsoft.com/office/powerpoint/2010/main" val="3640006775"/>
+      </p:ext>
+    </p:extLst>
+  </p:cSld>
+  <p:clrMapOvr>
+    <a:masterClrMapping/>
+  </p:clrMapOvr>
+</p:sld>
+</file>
+
+<file path=ppt/slides/slide11.xml><?xml version="1.0" encoding="utf-8"?>
+<p:sld xmlns:a="http://schemas.openxmlformats.org/drawingml/2006/main" xmlns:r="http://schemas.openxmlformats.org/officeDocument/2006/relationships" xmlns:p="http://schemas.openxmlformats.org/presentationml/2006/main">
+  <p:cSld>
+    <p:spTree>
+      <p:nvGrpSpPr>
+        <p:cNvPr id="1" name="">
+          <a:extLst>
+            <a:ext uri="{FF2B5EF4-FFF2-40B4-BE49-F238E27FC236}">
+              <a16:creationId xmlns:a16="http://schemas.microsoft.com/office/drawing/2014/main" id="{EB21DFDC-4CC6-F25F-9D8B-8D1ACDDD5591}"/>
+            </a:ext>
+          </a:extLst>
+        </p:cNvPr>
+        <p:cNvGrpSpPr/>
+        <p:nvPr/>
+      </p:nvGrpSpPr>
+      <p:grpSpPr>
+        <a:xfrm>
+          <a:off x="0" y="0"/>
+          <a:ext cx="0" cy="0"/>
+          <a:chOff x="0" y="0"/>
+          <a:chExt cx="0" cy="0"/>
+        </a:xfrm>
+      </p:grpSpPr>
+      <p:grpSp>
+        <p:nvGrpSpPr>
+          <p:cNvPr id="6" name="グループ化 5">
+            <a:extLst>
+              <a:ext uri="{FF2B5EF4-FFF2-40B4-BE49-F238E27FC236}">
+                <a16:creationId xmlns:a16="http://schemas.microsoft.com/office/drawing/2014/main" id="{34422385-AB94-0DDF-A3BB-0760260918A5}"/>
+              </a:ext>
+            </a:extLst>
+          </p:cNvPr>
+          <p:cNvGrpSpPr/>
+          <p:nvPr/>
+        </p:nvGrpSpPr>
+        <p:grpSpPr>
+          <a:xfrm>
+            <a:off x="490812" y="-1953707"/>
+            <a:ext cx="11210375" cy="10765413"/>
+            <a:chOff x="22563427" y="0"/>
+            <a:chExt cx="11615187" cy="9000136"/>
+          </a:xfrm>
+        </p:grpSpPr>
+        <p:sp>
+          <p:nvSpPr>
+            <p:cNvPr id="7" name="正方形/長方形 6">
+              <a:extLst>
+                <a:ext uri="{FF2B5EF4-FFF2-40B4-BE49-F238E27FC236}">
+                  <a16:creationId xmlns:a16="http://schemas.microsoft.com/office/drawing/2014/main" id="{259965BE-6F31-3694-FEC6-95C7C9701470}"/>
+                </a:ext>
+              </a:extLst>
+            </p:cNvPr>
+            <p:cNvSpPr/>
+            <p:nvPr/>
+          </p:nvSpPr>
+          <p:spPr>
+            <a:xfrm>
+              <a:off x="22563427" y="0"/>
+              <a:ext cx="11615187" cy="9000136"/>
+            </a:xfrm>
+            <a:prstGeom prst="rect">
+              <a:avLst/>
+            </a:prstGeom>
+            <a:ln>
+              <a:noFill/>
+            </a:ln>
+          </p:spPr>
+          <p:style>
+            <a:lnRef idx="2">
+              <a:schemeClr val="dk1"/>
+            </a:lnRef>
+            <a:fillRef idx="1">
+              <a:schemeClr val="lt1"/>
+            </a:fillRef>
+            <a:effectRef idx="0">
+              <a:schemeClr val="dk1"/>
+            </a:effectRef>
+            <a:fontRef idx="minor">
+              <a:schemeClr val="dk1"/>
+            </a:fontRef>
+          </p:style>
+          <p:txBody>
+            <a:bodyPr wrap="square" rtlCol="0" anchor="ctr"/>
+            <a:lstStyle>
+              <a:defPPr>
+                <a:defRPr lang="ja-JP"/>
+              </a:defPPr>
+              <a:lvl1pPr marL="0" indent="0" algn="l" defTabSz="914400" rtl="0" eaLnBrk="1" latinLnBrk="0" hangingPunct="1">
+                <a:defRPr kumimoji="1" sz="1800" kern="1200">
+                  <a:solidFill>
+                    <a:schemeClr val="dk1"/>
+                  </a:solidFill>
+                  <a:latin typeface="+mn-lt"/>
+                  <a:ea typeface="+mn-ea"/>
+                  <a:cs typeface="+mn-cs"/>
+                </a:defRPr>
+              </a:lvl1pPr>
+              <a:lvl2pPr marL="457200" indent="0" algn="l" defTabSz="914400" rtl="0" eaLnBrk="1" latinLnBrk="0" hangingPunct="1">
+                <a:defRPr kumimoji="1" sz="1800" kern="1200">
+                  <a:solidFill>
+                    <a:schemeClr val="dk1"/>
+                  </a:solidFill>
+                  <a:latin typeface="+mn-lt"/>
+                  <a:ea typeface="+mn-ea"/>
+                  <a:cs typeface="+mn-cs"/>
+                </a:defRPr>
+              </a:lvl2pPr>
+              <a:lvl3pPr marL="914400" indent="0" algn="l" defTabSz="914400" rtl="0" eaLnBrk="1" latinLnBrk="0" hangingPunct="1">
+                <a:defRPr kumimoji="1" sz="1800" kern="1200">
+                  <a:solidFill>
+                    <a:schemeClr val="dk1"/>
+                  </a:solidFill>
+                  <a:latin typeface="+mn-lt"/>
+                  <a:ea typeface="+mn-ea"/>
+                  <a:cs typeface="+mn-cs"/>
+                </a:defRPr>
+              </a:lvl3pPr>
+              <a:lvl4pPr marL="1371600" indent="0" algn="l" defTabSz="914400" rtl="0" eaLnBrk="1" latinLnBrk="0" hangingPunct="1">
+                <a:defRPr kumimoji="1" sz="1800" kern="1200">
+                  <a:solidFill>
+                    <a:schemeClr val="dk1"/>
+                  </a:solidFill>
+                  <a:latin typeface="+mn-lt"/>
+                  <a:ea typeface="+mn-ea"/>
+                  <a:cs typeface="+mn-cs"/>
+                </a:defRPr>
+              </a:lvl4pPr>
+              <a:lvl5pPr marL="1828800" indent="0" algn="l" defTabSz="914400" rtl="0" eaLnBrk="1" latinLnBrk="0" hangingPunct="1">
+                <a:defRPr kumimoji="1" sz="1800" kern="1200">
+                  <a:solidFill>
+                    <a:schemeClr val="dk1"/>
+                  </a:solidFill>
+                  <a:latin typeface="+mn-lt"/>
+                  <a:ea typeface="+mn-ea"/>
+                  <a:cs typeface="+mn-cs"/>
+                </a:defRPr>
+              </a:lvl5pPr>
+              <a:lvl6pPr marL="2286000" indent="0" algn="l" defTabSz="914400" rtl="0" eaLnBrk="1" latinLnBrk="0" hangingPunct="1">
+                <a:defRPr kumimoji="1" sz="1800" kern="1200">
+                  <a:solidFill>
+                    <a:schemeClr val="dk1"/>
+                  </a:solidFill>
+                  <a:latin typeface="+mn-lt"/>
+                  <a:ea typeface="+mn-ea"/>
+                  <a:cs typeface="+mn-cs"/>
+                </a:defRPr>
+              </a:lvl6pPr>
+              <a:lvl7pPr marL="2743200" indent="0" algn="l" defTabSz="914400" rtl="0" eaLnBrk="1" latinLnBrk="0" hangingPunct="1">
+                <a:defRPr kumimoji="1" sz="1800" kern="1200">
+                  <a:solidFill>
+                    <a:schemeClr val="dk1"/>
+                  </a:solidFill>
+                  <a:latin typeface="+mn-lt"/>
+                  <a:ea typeface="+mn-ea"/>
+                  <a:cs typeface="+mn-cs"/>
+                </a:defRPr>
+              </a:lvl7pPr>
+              <a:lvl8pPr marL="3200400" indent="0" algn="l" defTabSz="914400" rtl="0" eaLnBrk="1" latinLnBrk="0" hangingPunct="1">
+                <a:defRPr kumimoji="1" sz="1800" kern="1200">
+                  <a:solidFill>
+                    <a:schemeClr val="dk1"/>
+                  </a:solidFill>
+                  <a:latin typeface="+mn-lt"/>
+                  <a:ea typeface="+mn-ea"/>
+                  <a:cs typeface="+mn-cs"/>
+                </a:defRPr>
+              </a:lvl8pPr>
+              <a:lvl9pPr marL="3657600" indent="0" algn="l" defTabSz="914400" rtl="0" eaLnBrk="1" latinLnBrk="0" hangingPunct="1">
+                <a:defRPr kumimoji="1" sz="1800" kern="1200">
+                  <a:solidFill>
+                    <a:schemeClr val="dk1"/>
+                  </a:solidFill>
+                  <a:latin typeface="+mn-lt"/>
+                  <a:ea typeface="+mn-ea"/>
+                  <a:cs typeface="+mn-cs"/>
+                </a:defRPr>
+              </a:lvl9pPr>
+            </a:lstStyle>
+            <a:p>
+              <a:pPr algn="ctr"/>
+              <a:endParaRPr kumimoji="1" lang="ja-JP" altLang="en-US"/>
+            </a:p>
+          </p:txBody>
+        </p:sp>
+        <p:grpSp>
+          <p:nvGrpSpPr>
+            <p:cNvPr id="8" name="グループ化 7">
+              <a:extLst>
+                <a:ext uri="{FF2B5EF4-FFF2-40B4-BE49-F238E27FC236}">
+                  <a16:creationId xmlns:a16="http://schemas.microsoft.com/office/drawing/2014/main" id="{4D6A5859-A5CB-B0EA-96C0-D910816BC2E1}"/>
+                </a:ext>
+              </a:extLst>
+            </p:cNvPr>
+            <p:cNvGrpSpPr/>
+            <p:nvPr/>
+          </p:nvGrpSpPr>
+          <p:grpSpPr>
+            <a:xfrm>
+              <a:off x="24024833" y="153084"/>
+              <a:ext cx="8749542" cy="8535500"/>
+              <a:chOff x="24024833" y="153084"/>
+              <a:chExt cx="10601325" cy="10414228"/>
+            </a:xfrm>
+          </p:grpSpPr>
+          <p:pic>
+            <p:nvPicPr>
+              <p:cNvPr id="16" name="図 15">
+                <a:extLst>
+                  <a:ext uri="{FF2B5EF4-FFF2-40B4-BE49-F238E27FC236}">
+                    <a16:creationId xmlns:a16="http://schemas.microsoft.com/office/drawing/2014/main" id="{C68341EB-8B79-6364-A68D-2A5B6E407882}"/>
+                  </a:ext>
+                </a:extLst>
+              </p:cNvPr>
+              <p:cNvPicPr>
+                <a:picLocks noChangeAspect="1"/>
+              </p:cNvPicPr>
+              <p:nvPr/>
+            </p:nvPicPr>
+            <p:blipFill rotWithShape="1">
+              <a:blip r:embed="rId2">
+                <a:alphaModFix/>
+              </a:blip>
+              <a:srcRect l="3250" t="65160" r="4513"/>
+              <a:stretch>
+                <a:fillRect/>
+              </a:stretch>
+            </p:blipFill>
+            <p:spPr>
+              <a:xfrm>
+                <a:off x="24024833" y="153084"/>
+                <a:ext cx="10544175" cy="3033518"/>
+              </a:xfrm>
+              <a:prstGeom prst="rect">
+                <a:avLst/>
+              </a:prstGeom>
+            </p:spPr>
+          </p:pic>
+          <p:pic>
+            <p:nvPicPr>
+              <p:cNvPr id="17" name="図 16">
+                <a:extLst>
+                  <a:ext uri="{FF2B5EF4-FFF2-40B4-BE49-F238E27FC236}">
+                    <a16:creationId xmlns:a16="http://schemas.microsoft.com/office/drawing/2014/main" id="{1E7DC174-D55E-180C-6B25-01A7EC0898D9}"/>
+                  </a:ext>
+                </a:extLst>
+              </p:cNvPr>
+              <p:cNvPicPr>
+                <a:picLocks noChangeAspect="1"/>
+              </p:cNvPicPr>
+              <p:nvPr/>
+            </p:nvPicPr>
+            <p:blipFill rotWithShape="1">
+              <a:blip r:embed="rId3">
+                <a:alphaModFix/>
+              </a:blip>
+              <a:srcRect l="5255" t="15043" r="6156"/>
+              <a:stretch>
+                <a:fillRect/>
+              </a:stretch>
+            </p:blipFill>
+            <p:spPr>
+              <a:xfrm>
+                <a:off x="24120083" y="1476652"/>
+                <a:ext cx="10439400" cy="7299923"/>
+              </a:xfrm>
+              <a:prstGeom prst="rect">
+                <a:avLst/>
+              </a:prstGeom>
+            </p:spPr>
+          </p:pic>
+          <p:pic>
+            <p:nvPicPr>
+              <p:cNvPr id="18" name="図 17">
+                <a:extLst>
+                  <a:ext uri="{FF2B5EF4-FFF2-40B4-BE49-F238E27FC236}">
+                    <a16:creationId xmlns:a16="http://schemas.microsoft.com/office/drawing/2014/main" id="{5F477284-DE1E-BF56-871B-0FA5EF6F07C2}"/>
+                  </a:ext>
+                </a:extLst>
+              </p:cNvPr>
+              <p:cNvPicPr>
+                <a:picLocks noChangeAspect="1"/>
+              </p:cNvPicPr>
+              <p:nvPr/>
+            </p:nvPicPr>
+            <p:blipFill rotWithShape="1">
+              <a:blip r:embed="rId4">
+                <a:alphaModFix/>
+              </a:blip>
+              <a:srcRect l="6479" t="14685" r="1118" b="4147"/>
+              <a:stretch>
+                <a:fillRect/>
+              </a:stretch>
+            </p:blipFill>
+            <p:spPr>
+              <a:xfrm>
+                <a:off x="24062933" y="5750044"/>
+                <a:ext cx="10563225" cy="4817268"/>
+              </a:xfrm>
+              <a:prstGeom prst="rect">
+                <a:avLst/>
+              </a:prstGeom>
+            </p:spPr>
+          </p:pic>
+        </p:grpSp>
+        <p:grpSp>
+          <p:nvGrpSpPr>
+            <p:cNvPr id="9" name="グループ化 8">
+              <a:extLst>
+                <a:ext uri="{FF2B5EF4-FFF2-40B4-BE49-F238E27FC236}">
+                  <a16:creationId xmlns:a16="http://schemas.microsoft.com/office/drawing/2014/main" id="{B4F7BA5B-3590-2066-3DE3-590B7516E6FE}"/>
+                </a:ext>
+              </a:extLst>
+            </p:cNvPr>
+            <p:cNvGrpSpPr/>
+            <p:nvPr/>
+          </p:nvGrpSpPr>
+          <p:grpSpPr>
+            <a:xfrm>
+              <a:off x="24219490" y="276180"/>
+              <a:ext cx="8354353" cy="8211272"/>
+              <a:chOff x="24219488" y="276180"/>
+              <a:chExt cx="8555619" cy="7178228"/>
+            </a:xfrm>
+          </p:grpSpPr>
+          <p:sp>
+            <p:nvSpPr>
+              <p:cNvPr id="11" name="正方形/長方形 10">
+                <a:extLst>
+                  <a:ext uri="{FF2B5EF4-FFF2-40B4-BE49-F238E27FC236}">
+                    <a16:creationId xmlns:a16="http://schemas.microsoft.com/office/drawing/2014/main" id="{E3E9C6BB-950B-03DC-9E58-A1C19553896C}"/>
+                  </a:ext>
+                </a:extLst>
+              </p:cNvPr>
+              <p:cNvSpPr/>
+              <p:nvPr/>
+            </p:nvSpPr>
+            <p:spPr>
+              <a:xfrm>
+                <a:off x="24219488" y="356412"/>
+                <a:ext cx="1027438" cy="372243"/>
+              </a:xfrm>
+              <a:prstGeom prst="rect">
+                <a:avLst/>
+              </a:prstGeom>
+              <a:noFill/>
+              <a:ln w="28575">
+                <a:solidFill>
+                  <a:srgbClr val="FF0000"/>
+                </a:solidFill>
+                <a:prstDash val="solid"/>
+              </a:ln>
+            </p:spPr>
+            <p:style>
+              <a:lnRef idx="2">
+                <a:schemeClr val="accent6"/>
+              </a:lnRef>
+              <a:fillRef idx="1">
+                <a:schemeClr val="lt1"/>
+              </a:fillRef>
+              <a:effectRef idx="0">
+                <a:schemeClr val="accent6"/>
+              </a:effectRef>
+              <a:fontRef idx="minor">
+                <a:schemeClr val="dk1"/>
+              </a:fontRef>
+            </p:style>
+            <p:txBody>
+              <a:bodyPr rtlCol="0" anchor="t"/>
+              <a:lstStyle>
+                <a:lvl1pPr marL="0" indent="0">
+                  <a:defRPr sz="1100">
+                    <a:solidFill>
+                      <a:schemeClr val="dk1"/>
+                    </a:solidFill>
+                    <a:latin typeface="+mn-lt"/>
+                    <a:ea typeface="+mn-ea"/>
+                    <a:cs typeface="+mn-cs"/>
+                  </a:defRPr>
+                </a:lvl1pPr>
+                <a:lvl2pPr marL="457200" indent="0">
+                  <a:defRPr sz="1100">
+                    <a:solidFill>
+                      <a:schemeClr val="dk1"/>
+                    </a:solidFill>
+                    <a:latin typeface="+mn-lt"/>
+                    <a:ea typeface="+mn-ea"/>
+                    <a:cs typeface="+mn-cs"/>
+                  </a:defRPr>
+                </a:lvl2pPr>
+                <a:lvl3pPr marL="914400" indent="0">
+                  <a:defRPr sz="1100">
+                    <a:solidFill>
+                      <a:schemeClr val="dk1"/>
+                    </a:solidFill>
+                    <a:latin typeface="+mn-lt"/>
+                    <a:ea typeface="+mn-ea"/>
+                    <a:cs typeface="+mn-cs"/>
+                  </a:defRPr>
+                </a:lvl3pPr>
+                <a:lvl4pPr marL="1371600" indent="0">
+                  <a:defRPr sz="1100">
+                    <a:solidFill>
+                      <a:schemeClr val="dk1"/>
+                    </a:solidFill>
+                    <a:latin typeface="+mn-lt"/>
+                    <a:ea typeface="+mn-ea"/>
+                    <a:cs typeface="+mn-cs"/>
+                  </a:defRPr>
+                </a:lvl4pPr>
+                <a:lvl5pPr marL="1828800" indent="0">
+                  <a:defRPr sz="1100">
+                    <a:solidFill>
+                      <a:schemeClr val="dk1"/>
+                    </a:solidFill>
+                    <a:latin typeface="+mn-lt"/>
+                    <a:ea typeface="+mn-ea"/>
+                    <a:cs typeface="+mn-cs"/>
+                  </a:defRPr>
+                </a:lvl5pPr>
+                <a:lvl6pPr marL="2286000" indent="0">
+                  <a:defRPr sz="1100">
+                    <a:solidFill>
+                      <a:schemeClr val="dk1"/>
+                    </a:solidFill>
+                    <a:latin typeface="+mn-lt"/>
+                    <a:ea typeface="+mn-ea"/>
+                    <a:cs typeface="+mn-cs"/>
+                  </a:defRPr>
+                </a:lvl6pPr>
+                <a:lvl7pPr marL="2743200" indent="0">
+                  <a:defRPr sz="1100">
+                    <a:solidFill>
+                      <a:schemeClr val="dk1"/>
+                    </a:solidFill>
+                    <a:latin typeface="+mn-lt"/>
+                    <a:ea typeface="+mn-ea"/>
+                    <a:cs typeface="+mn-cs"/>
+                  </a:defRPr>
+                </a:lvl7pPr>
+                <a:lvl8pPr marL="3200400" indent="0">
+                  <a:defRPr sz="1100">
+                    <a:solidFill>
+                      <a:schemeClr val="dk1"/>
+                    </a:solidFill>
+                    <a:latin typeface="+mn-lt"/>
+                    <a:ea typeface="+mn-ea"/>
+                    <a:cs typeface="+mn-cs"/>
+                  </a:defRPr>
+                </a:lvl8pPr>
+                <a:lvl9pPr marL="3657600" indent="0">
+                  <a:defRPr sz="1100">
+                    <a:solidFill>
+                      <a:schemeClr val="dk1"/>
+                    </a:solidFill>
+                    <a:latin typeface="+mn-lt"/>
+                    <a:ea typeface="+mn-ea"/>
+                    <a:cs typeface="+mn-cs"/>
+                  </a:defRPr>
+                </a:lvl9pPr>
+              </a:lstStyle>
+              <a:p>
+                <a:pPr algn="l"/>
+                <a:endParaRPr kumimoji="1" lang="ja-JP" altLang="en-US" sz="1100"/>
+              </a:p>
+            </p:txBody>
+          </p:sp>
+          <p:sp>
+            <p:nvSpPr>
+              <p:cNvPr id="12" name="正方形/長方形 11">
+                <a:extLst>
+                  <a:ext uri="{FF2B5EF4-FFF2-40B4-BE49-F238E27FC236}">
+                    <a16:creationId xmlns:a16="http://schemas.microsoft.com/office/drawing/2014/main" id="{149A7462-C999-12E6-B675-F1EBA43363B5}"/>
+                  </a:ext>
+                </a:extLst>
+              </p:cNvPr>
+              <p:cNvSpPr/>
+              <p:nvPr/>
+            </p:nvSpPr>
+            <p:spPr>
+              <a:xfrm>
+                <a:off x="25830877" y="327018"/>
+                <a:ext cx="1640081" cy="400743"/>
+              </a:xfrm>
+              <a:prstGeom prst="rect">
+                <a:avLst/>
+              </a:prstGeom>
+              <a:ln w="28575">
+                <a:solidFill>
+                  <a:srgbClr val="FF0000"/>
+                </a:solidFill>
+              </a:ln>
+            </p:spPr>
+            <p:style>
+              <a:lnRef idx="2">
+                <a:schemeClr val="accent6"/>
+              </a:lnRef>
+              <a:fillRef idx="1">
+                <a:schemeClr val="lt1"/>
+              </a:fillRef>
+              <a:effectRef idx="0">
+                <a:schemeClr val="accent6"/>
+              </a:effectRef>
+              <a:fontRef idx="minor">
+                <a:schemeClr val="dk1"/>
+              </a:fontRef>
+            </p:style>
+            <p:txBody>
+              <a:bodyPr rtlCol="0" anchor="ctr"/>
+              <a:lstStyle>
+                <a:lvl1pPr marL="0" indent="0">
+                  <a:defRPr sz="1100">
+                    <a:solidFill>
+                      <a:schemeClr val="dk1"/>
+                    </a:solidFill>
+                    <a:latin typeface="+mn-lt"/>
+                    <a:ea typeface="+mn-ea"/>
+                    <a:cs typeface="+mn-cs"/>
+                  </a:defRPr>
+                </a:lvl1pPr>
+                <a:lvl2pPr marL="457200" indent="0">
+                  <a:defRPr sz="1100">
+                    <a:solidFill>
+                      <a:schemeClr val="dk1"/>
+                    </a:solidFill>
+                    <a:latin typeface="+mn-lt"/>
+                    <a:ea typeface="+mn-ea"/>
+                    <a:cs typeface="+mn-cs"/>
+                  </a:defRPr>
+                </a:lvl2pPr>
+                <a:lvl3pPr marL="914400" indent="0">
+                  <a:defRPr sz="1100">
+                    <a:solidFill>
+                      <a:schemeClr val="dk1"/>
+                    </a:solidFill>
+                    <a:latin typeface="+mn-lt"/>
+                    <a:ea typeface="+mn-ea"/>
+                    <a:cs typeface="+mn-cs"/>
+                  </a:defRPr>
+                </a:lvl3pPr>
+                <a:lvl4pPr marL="1371600" indent="0">
+                  <a:defRPr sz="1100">
+                    <a:solidFill>
+                      <a:schemeClr val="dk1"/>
+                    </a:solidFill>
+                    <a:latin typeface="+mn-lt"/>
+                    <a:ea typeface="+mn-ea"/>
+                    <a:cs typeface="+mn-cs"/>
+                  </a:defRPr>
+                </a:lvl4pPr>
+                <a:lvl5pPr marL="1828800" indent="0">
+                  <a:defRPr sz="1100">
+                    <a:solidFill>
+                      <a:schemeClr val="dk1"/>
+                    </a:solidFill>
+                    <a:latin typeface="+mn-lt"/>
+                    <a:ea typeface="+mn-ea"/>
+                    <a:cs typeface="+mn-cs"/>
+                  </a:defRPr>
+                </a:lvl5pPr>
+                <a:lvl6pPr marL="2286000" indent="0">
+                  <a:defRPr sz="1100">
+                    <a:solidFill>
+                      <a:schemeClr val="dk1"/>
+                    </a:solidFill>
+                    <a:latin typeface="+mn-lt"/>
+                    <a:ea typeface="+mn-ea"/>
+                    <a:cs typeface="+mn-cs"/>
+                  </a:defRPr>
+                </a:lvl6pPr>
+                <a:lvl7pPr marL="2743200" indent="0">
+                  <a:defRPr sz="1100">
+                    <a:solidFill>
+                      <a:schemeClr val="dk1"/>
+                    </a:solidFill>
+                    <a:latin typeface="+mn-lt"/>
+                    <a:ea typeface="+mn-ea"/>
+                    <a:cs typeface="+mn-cs"/>
+                  </a:defRPr>
+                </a:lvl7pPr>
+                <a:lvl8pPr marL="3200400" indent="0">
+                  <a:defRPr sz="1100">
+                    <a:solidFill>
+                      <a:schemeClr val="dk1"/>
+                    </a:solidFill>
+                    <a:latin typeface="+mn-lt"/>
+                    <a:ea typeface="+mn-ea"/>
+                    <a:cs typeface="+mn-cs"/>
+                  </a:defRPr>
+                </a:lvl8pPr>
+                <a:lvl9pPr marL="3657600" indent="0">
+                  <a:defRPr sz="1100">
+                    <a:solidFill>
+                      <a:schemeClr val="dk1"/>
+                    </a:solidFill>
+                    <a:latin typeface="+mn-lt"/>
+                    <a:ea typeface="+mn-ea"/>
+                    <a:cs typeface="+mn-cs"/>
+                  </a:defRPr>
+                </a:lvl9pPr>
+              </a:lstStyle>
+              <a:p>
+                <a:pPr algn="l"/>
+                <a:r>
+                  <a:rPr kumimoji="1" lang="ja-JP" altLang="en-US" sz="1200" b="1">
+                    <a:solidFill>
+                      <a:srgbClr val="FF0000"/>
+                    </a:solidFill>
+                  </a:rPr>
+                  <a:t>③特技の数を設定</a:t>
+                </a:r>
+              </a:p>
+            </p:txBody>
+          </p:sp>
+          <p:cxnSp>
+            <p:nvCxnSpPr>
+              <p:cNvPr id="13" name="直線矢印コネクタ 12">
+                <a:extLst>
+                  <a:ext uri="{FF2B5EF4-FFF2-40B4-BE49-F238E27FC236}">
+                    <a16:creationId xmlns:a16="http://schemas.microsoft.com/office/drawing/2014/main" id="{6B218F7A-B3A4-0D88-7638-02B8215A43B1}"/>
+                  </a:ext>
+                </a:extLst>
+              </p:cNvPr>
+              <p:cNvCxnSpPr/>
+              <p:nvPr/>
+            </p:nvCxnSpPr>
+            <p:spPr>
+              <a:xfrm flipH="1">
+                <a:off x="25264597" y="540921"/>
+                <a:ext cx="547825" cy="1195"/>
+              </a:xfrm>
+              <a:prstGeom prst="straightConnector1">
+                <a:avLst/>
+              </a:prstGeom>
+              <a:ln w="28575">
+                <a:solidFill>
+                  <a:srgbClr val="FF0000"/>
+                </a:solidFill>
+                <a:tailEnd type="triangle"/>
+              </a:ln>
+            </p:spPr>
+            <p:style>
+              <a:lnRef idx="2">
+                <a:schemeClr val="accent1"/>
+              </a:lnRef>
+              <a:fillRef idx="0">
+                <a:schemeClr val="accent1"/>
+              </a:fillRef>
+              <a:effectRef idx="1">
+                <a:schemeClr val="accent1"/>
+              </a:effectRef>
+              <a:fontRef idx="minor">
+                <a:schemeClr val="tx1"/>
+              </a:fontRef>
+            </p:style>
+          </p:cxnSp>
+          <p:sp>
+            <p:nvSpPr>
+              <p:cNvPr id="14" name="正方形/長方形 13">
+                <a:extLst>
+                  <a:ext uri="{FF2B5EF4-FFF2-40B4-BE49-F238E27FC236}">
+                    <a16:creationId xmlns:a16="http://schemas.microsoft.com/office/drawing/2014/main" id="{524FFAF7-04AC-357F-A046-B2BB65C3BDC7}"/>
+                  </a:ext>
+                </a:extLst>
+              </p:cNvPr>
+              <p:cNvSpPr/>
+              <p:nvPr/>
+            </p:nvSpPr>
+            <p:spPr>
+              <a:xfrm>
+                <a:off x="24219489" y="839552"/>
+                <a:ext cx="8555618" cy="6614856"/>
+              </a:xfrm>
+              <a:prstGeom prst="rect">
+                <a:avLst/>
+              </a:prstGeom>
+              <a:noFill/>
+              <a:ln w="28575">
+                <a:solidFill>
+                  <a:srgbClr val="FF0000"/>
+                </a:solidFill>
+                <a:prstDash val="solid"/>
+              </a:ln>
+            </p:spPr>
+            <p:style>
+              <a:lnRef idx="2">
+                <a:schemeClr val="accent6"/>
+              </a:lnRef>
+              <a:fillRef idx="1">
+                <a:schemeClr val="lt1"/>
+              </a:fillRef>
+              <a:effectRef idx="0">
+                <a:schemeClr val="accent6"/>
+              </a:effectRef>
+              <a:fontRef idx="minor">
+                <a:schemeClr val="dk1"/>
+              </a:fontRef>
+            </p:style>
+            <p:txBody>
+              <a:bodyPr rtlCol="0" anchor="t"/>
+              <a:lstStyle>
+                <a:lvl1pPr marL="0" indent="0">
+                  <a:defRPr sz="1100">
+                    <a:solidFill>
+                      <a:schemeClr val="dk1"/>
+                    </a:solidFill>
+                    <a:latin typeface="+mn-lt"/>
+                    <a:ea typeface="+mn-ea"/>
+                    <a:cs typeface="+mn-cs"/>
+                  </a:defRPr>
+                </a:lvl1pPr>
+                <a:lvl2pPr marL="457200" indent="0">
+                  <a:defRPr sz="1100">
+                    <a:solidFill>
+                      <a:schemeClr val="dk1"/>
+                    </a:solidFill>
+                    <a:latin typeface="+mn-lt"/>
+                    <a:ea typeface="+mn-ea"/>
+                    <a:cs typeface="+mn-cs"/>
+                  </a:defRPr>
+                </a:lvl2pPr>
+                <a:lvl3pPr marL="914400" indent="0">
+                  <a:defRPr sz="1100">
+                    <a:solidFill>
+                      <a:schemeClr val="dk1"/>
+                    </a:solidFill>
+                    <a:latin typeface="+mn-lt"/>
+                    <a:ea typeface="+mn-ea"/>
+                    <a:cs typeface="+mn-cs"/>
+                  </a:defRPr>
+                </a:lvl3pPr>
+                <a:lvl4pPr marL="1371600" indent="0">
+                  <a:defRPr sz="1100">
+                    <a:solidFill>
+                      <a:schemeClr val="dk1"/>
+                    </a:solidFill>
+                    <a:latin typeface="+mn-lt"/>
+                    <a:ea typeface="+mn-ea"/>
+                    <a:cs typeface="+mn-cs"/>
+                  </a:defRPr>
+                </a:lvl4pPr>
+                <a:lvl5pPr marL="1828800" indent="0">
+                  <a:defRPr sz="1100">
+                    <a:solidFill>
+                      <a:schemeClr val="dk1"/>
+                    </a:solidFill>
+                    <a:latin typeface="+mn-lt"/>
+                    <a:ea typeface="+mn-ea"/>
+                    <a:cs typeface="+mn-cs"/>
+                  </a:defRPr>
+                </a:lvl5pPr>
+                <a:lvl6pPr marL="2286000" indent="0">
+                  <a:defRPr sz="1100">
+                    <a:solidFill>
+                      <a:schemeClr val="dk1"/>
+                    </a:solidFill>
+                    <a:latin typeface="+mn-lt"/>
+                    <a:ea typeface="+mn-ea"/>
+                    <a:cs typeface="+mn-cs"/>
+                  </a:defRPr>
+                </a:lvl6pPr>
+                <a:lvl7pPr marL="2743200" indent="0">
+                  <a:defRPr sz="1100">
+                    <a:solidFill>
+                      <a:schemeClr val="dk1"/>
+                    </a:solidFill>
+                    <a:latin typeface="+mn-lt"/>
+                    <a:ea typeface="+mn-ea"/>
+                    <a:cs typeface="+mn-cs"/>
+                  </a:defRPr>
+                </a:lvl7pPr>
+                <a:lvl8pPr marL="3200400" indent="0">
+                  <a:defRPr sz="1100">
+                    <a:solidFill>
+                      <a:schemeClr val="dk1"/>
+                    </a:solidFill>
+                    <a:latin typeface="+mn-lt"/>
+                    <a:ea typeface="+mn-ea"/>
+                    <a:cs typeface="+mn-cs"/>
+                  </a:defRPr>
+                </a:lvl8pPr>
+                <a:lvl9pPr marL="3657600" indent="0">
+                  <a:defRPr sz="1100">
+                    <a:solidFill>
+                      <a:schemeClr val="dk1"/>
+                    </a:solidFill>
+                    <a:latin typeface="+mn-lt"/>
+                    <a:ea typeface="+mn-ea"/>
+                    <a:cs typeface="+mn-cs"/>
+                  </a:defRPr>
+                </a:lvl9pPr>
+              </a:lstStyle>
+              <a:p>
+                <a:pPr algn="l"/>
+                <a:endParaRPr kumimoji="1" lang="ja-JP" altLang="en-US" sz="1100"/>
+              </a:p>
+            </p:txBody>
+          </p:sp>
+          <p:sp>
+            <p:nvSpPr>
+              <p:cNvPr id="15" name="正方形/長方形 14">
+                <a:extLst>
+                  <a:ext uri="{FF2B5EF4-FFF2-40B4-BE49-F238E27FC236}">
+                    <a16:creationId xmlns:a16="http://schemas.microsoft.com/office/drawing/2014/main" id="{518C7AB8-C111-A4F7-5441-EAC15C81D7E8}"/>
+                  </a:ext>
+                </a:extLst>
+              </p:cNvPr>
+              <p:cNvSpPr/>
+              <p:nvPr/>
+            </p:nvSpPr>
+            <p:spPr>
+              <a:xfrm>
+                <a:off x="29874008" y="276180"/>
+                <a:ext cx="1151417" cy="420485"/>
+              </a:xfrm>
+              <a:prstGeom prst="rect">
+                <a:avLst/>
+              </a:prstGeom>
+              <a:ln w="28575">
+                <a:solidFill>
+                  <a:srgbClr val="FF0000"/>
+                </a:solidFill>
+              </a:ln>
+            </p:spPr>
+            <p:style>
+              <a:lnRef idx="2">
+                <a:schemeClr val="accent6"/>
+              </a:lnRef>
+              <a:fillRef idx="1">
+                <a:schemeClr val="lt1"/>
+              </a:fillRef>
+              <a:effectRef idx="0">
+                <a:schemeClr val="accent6"/>
+              </a:effectRef>
+              <a:fontRef idx="minor">
+                <a:schemeClr val="dk1"/>
+              </a:fontRef>
+            </p:style>
+            <p:txBody>
+              <a:bodyPr rtlCol="0" anchor="ctr"/>
+              <a:lstStyle>
+                <a:lvl1pPr marL="0" indent="0">
+                  <a:defRPr sz="1100">
+                    <a:solidFill>
+                      <a:schemeClr val="dk1"/>
+                    </a:solidFill>
+                    <a:latin typeface="+mn-lt"/>
+                    <a:ea typeface="+mn-ea"/>
+                    <a:cs typeface="+mn-cs"/>
+                  </a:defRPr>
+                </a:lvl1pPr>
+                <a:lvl2pPr marL="457200" indent="0">
+                  <a:defRPr sz="1100">
+                    <a:solidFill>
+                      <a:schemeClr val="dk1"/>
+                    </a:solidFill>
+                    <a:latin typeface="+mn-lt"/>
+                    <a:ea typeface="+mn-ea"/>
+                    <a:cs typeface="+mn-cs"/>
+                  </a:defRPr>
+                </a:lvl2pPr>
+                <a:lvl3pPr marL="914400" indent="0">
+                  <a:defRPr sz="1100">
+                    <a:solidFill>
+                      <a:schemeClr val="dk1"/>
+                    </a:solidFill>
+                    <a:latin typeface="+mn-lt"/>
+                    <a:ea typeface="+mn-ea"/>
+                    <a:cs typeface="+mn-cs"/>
+                  </a:defRPr>
+                </a:lvl3pPr>
+                <a:lvl4pPr marL="1371600" indent="0">
+                  <a:defRPr sz="1100">
+                    <a:solidFill>
+                      <a:schemeClr val="dk1"/>
+                    </a:solidFill>
+                    <a:latin typeface="+mn-lt"/>
+                    <a:ea typeface="+mn-ea"/>
+                    <a:cs typeface="+mn-cs"/>
+                  </a:defRPr>
+                </a:lvl4pPr>
+                <a:lvl5pPr marL="1828800" indent="0">
+                  <a:defRPr sz="1100">
+                    <a:solidFill>
+                      <a:schemeClr val="dk1"/>
+                    </a:solidFill>
+                    <a:latin typeface="+mn-lt"/>
+                    <a:ea typeface="+mn-ea"/>
+                    <a:cs typeface="+mn-cs"/>
+                  </a:defRPr>
+                </a:lvl5pPr>
+                <a:lvl6pPr marL="2286000" indent="0">
+                  <a:defRPr sz="1100">
+                    <a:solidFill>
+                      <a:schemeClr val="dk1"/>
+                    </a:solidFill>
+                    <a:latin typeface="+mn-lt"/>
+                    <a:ea typeface="+mn-ea"/>
+                    <a:cs typeface="+mn-cs"/>
+                  </a:defRPr>
+                </a:lvl6pPr>
+                <a:lvl7pPr marL="2743200" indent="0">
+                  <a:defRPr sz="1100">
+                    <a:solidFill>
+                      <a:schemeClr val="dk1"/>
+                    </a:solidFill>
+                    <a:latin typeface="+mn-lt"/>
+                    <a:ea typeface="+mn-ea"/>
+                    <a:cs typeface="+mn-cs"/>
+                  </a:defRPr>
+                </a:lvl7pPr>
+                <a:lvl8pPr marL="3200400" indent="0">
+                  <a:defRPr sz="1100">
+                    <a:solidFill>
+                      <a:schemeClr val="dk1"/>
+                    </a:solidFill>
+                    <a:latin typeface="+mn-lt"/>
+                    <a:ea typeface="+mn-ea"/>
+                    <a:cs typeface="+mn-cs"/>
+                  </a:defRPr>
+                </a:lvl8pPr>
+                <a:lvl9pPr marL="3657600" indent="0">
+                  <a:defRPr sz="1100">
+                    <a:solidFill>
+                      <a:schemeClr val="dk1"/>
+                    </a:solidFill>
+                    <a:latin typeface="+mn-lt"/>
+                    <a:ea typeface="+mn-ea"/>
+                    <a:cs typeface="+mn-cs"/>
+                  </a:defRPr>
+                </a:lvl9pPr>
+              </a:lstStyle>
+              <a:p>
+                <a:pPr algn="l"/>
+                <a:r>
+                  <a:rPr kumimoji="1" lang="ja-JP" altLang="en-US" sz="1200" b="1">
+                    <a:solidFill>
+                      <a:srgbClr val="FF0000"/>
+                    </a:solidFill>
+                  </a:rPr>
+                  <a:t>④特技の入力</a:t>
+                </a:r>
+              </a:p>
+            </p:txBody>
+          </p:sp>
+        </p:grpSp>
+        <p:cxnSp>
+          <p:nvCxnSpPr>
+            <p:cNvPr id="10" name="直線矢印コネクタ 9">
+              <a:extLst>
+                <a:ext uri="{FF2B5EF4-FFF2-40B4-BE49-F238E27FC236}">
+                  <a16:creationId xmlns:a16="http://schemas.microsoft.com/office/drawing/2014/main" id="{EF8C64C6-AE19-3031-E195-2DA1209387ED}"/>
+                </a:ext>
+              </a:extLst>
+            </p:cNvPr>
+            <p:cNvCxnSpPr/>
+            <p:nvPr/>
+          </p:nvCxnSpPr>
+          <p:spPr>
+            <a:xfrm>
+              <a:off x="30297352" y="748947"/>
+              <a:ext cx="0" cy="156961"/>
+            </a:xfrm>
+            <a:prstGeom prst="straightConnector1">
+              <a:avLst/>
+            </a:prstGeom>
+            <a:ln w="28575">
+              <a:solidFill>
+                <a:srgbClr val="FF0000"/>
+              </a:solidFill>
+              <a:tailEnd type="triangle"/>
+            </a:ln>
+          </p:spPr>
+          <p:style>
+            <a:lnRef idx="2">
+              <a:schemeClr val="accent1"/>
+            </a:lnRef>
+            <a:fillRef idx="0">
+              <a:schemeClr val="accent1"/>
+            </a:fillRef>
+            <a:effectRef idx="1">
+              <a:schemeClr val="accent1"/>
+            </a:effectRef>
+            <a:fontRef idx="minor">
+              <a:schemeClr val="tx1"/>
+            </a:fontRef>
+          </p:style>
+        </p:cxnSp>
+      </p:grpSp>
+    </p:spTree>
+    <p:extLst>
+      <p:ext uri="{BB962C8B-B14F-4D97-AF65-F5344CB8AC3E}">
+        <p14:creationId xmlns:p14="http://schemas.microsoft.com/office/powerpoint/2010/main" val="1756455467"/>
+      </p:ext>
+    </p:extLst>
+  </p:cSld>
+  <p:clrMapOvr>
+    <a:masterClrMapping/>
+  </p:clrMapOvr>
+</p:sld>
+</file>
+
+<file path=ppt/slides/slide12.xml><?xml version="1.0" encoding="utf-8"?>
+<p:sld xmlns:a="http://schemas.openxmlformats.org/drawingml/2006/main" xmlns:r="http://schemas.openxmlformats.org/officeDocument/2006/relationships" xmlns:p="http://schemas.openxmlformats.org/presentationml/2006/main">
+  <p:cSld>
+    <p:spTree>
+      <p:nvGrpSpPr>
+        <p:cNvPr id="1" name=""/>
+        <p:cNvGrpSpPr/>
+        <p:nvPr/>
+      </p:nvGrpSpPr>
+      <p:grpSpPr>
+        <a:xfrm>
+          <a:off x="0" y="0"/>
+          <a:ext cx="0" cy="0"/>
+          <a:chOff x="0" y="0"/>
+          <a:chExt cx="0" cy="0"/>
+        </a:xfrm>
+      </p:grpSpPr>
+      <p:cxnSp>
+        <p:nvCxnSpPr>
+          <p:cNvPr id="10" name="直線コネクタ 9">
+            <a:extLst>
+              <a:ext uri="{FF2B5EF4-FFF2-40B4-BE49-F238E27FC236}">
+                <a16:creationId xmlns:a16="http://schemas.microsoft.com/office/drawing/2014/main" id="{C66946D2-118D-CBB0-DF7F-5BBEC80646C0}"/>
+              </a:ext>
+            </a:extLst>
+          </p:cNvPr>
+          <p:cNvCxnSpPr/>
+          <p:nvPr/>
+        </p:nvCxnSpPr>
+        <p:spPr>
+          <a:xfrm>
+            <a:off x="-294000" y="1989000"/>
+            <a:ext cx="12780000" cy="0"/>
+          </a:xfrm>
+          <a:prstGeom prst="line">
+            <a:avLst/>
+          </a:prstGeom>
+        </p:spPr>
+        <p:style>
+          <a:lnRef idx="2">
+            <a:schemeClr val="accent1"/>
+          </a:lnRef>
+          <a:fillRef idx="0">
+            <a:schemeClr val="accent1"/>
+          </a:fillRef>
+          <a:effectRef idx="1">
+            <a:schemeClr val="accent1"/>
+          </a:effectRef>
+          <a:fontRef idx="minor">
+            <a:schemeClr val="tx1"/>
+          </a:fontRef>
+        </p:style>
+      </p:cxnSp>
+      <p:cxnSp>
+        <p:nvCxnSpPr>
+          <p:cNvPr id="11" name="直線コネクタ 10">
+            <a:extLst>
+              <a:ext uri="{FF2B5EF4-FFF2-40B4-BE49-F238E27FC236}">
+                <a16:creationId xmlns:a16="http://schemas.microsoft.com/office/drawing/2014/main" id="{EE454536-4BBE-B1E2-2E9D-5E8CE521304D}"/>
+              </a:ext>
+            </a:extLst>
+          </p:cNvPr>
+          <p:cNvCxnSpPr/>
+          <p:nvPr/>
+        </p:nvCxnSpPr>
+        <p:spPr>
+          <a:xfrm>
+            <a:off x="-294000" y="2709000"/>
+            <a:ext cx="12780000" cy="0"/>
+          </a:xfrm>
+          <a:prstGeom prst="line">
+            <a:avLst/>
+          </a:prstGeom>
+        </p:spPr>
+        <p:style>
+          <a:lnRef idx="2">
+            <a:schemeClr val="accent1"/>
+          </a:lnRef>
+          <a:fillRef idx="0">
+            <a:schemeClr val="accent1"/>
+          </a:fillRef>
+          <a:effectRef idx="1">
+            <a:schemeClr val="accent1"/>
+          </a:effectRef>
+          <a:fontRef idx="minor">
+            <a:schemeClr val="tx1"/>
+          </a:fontRef>
+        </p:style>
+      </p:cxnSp>
+      <p:cxnSp>
+        <p:nvCxnSpPr>
+          <p:cNvPr id="13" name="直線コネクタ 12">
+            <a:extLst>
+              <a:ext uri="{FF2B5EF4-FFF2-40B4-BE49-F238E27FC236}">
+                <a16:creationId xmlns:a16="http://schemas.microsoft.com/office/drawing/2014/main" id="{776F4B59-FE6E-3ED8-D4B6-8E09D94136EA}"/>
+              </a:ext>
+            </a:extLst>
+          </p:cNvPr>
+          <p:cNvCxnSpPr/>
+          <p:nvPr/>
+        </p:nvCxnSpPr>
+        <p:spPr>
+          <a:xfrm>
+            <a:off x="1056000" y="324000"/>
+            <a:ext cx="0" cy="4230000"/>
+          </a:xfrm>
+          <a:prstGeom prst="line">
+            <a:avLst/>
+          </a:prstGeom>
+        </p:spPr>
+        <p:style>
+          <a:lnRef idx="2">
+            <a:schemeClr val="accent1"/>
+          </a:lnRef>
+          <a:fillRef idx="0">
+            <a:schemeClr val="accent1"/>
+          </a:fillRef>
+          <a:effectRef idx="1">
+            <a:schemeClr val="accent1"/>
+          </a:effectRef>
+          <a:fontRef idx="minor">
+            <a:schemeClr val="tx1"/>
+          </a:fontRef>
+        </p:style>
+      </p:cxnSp>
+      <p:cxnSp>
+        <p:nvCxnSpPr>
+          <p:cNvPr id="14" name="直線コネクタ 13">
+            <a:extLst>
+              <a:ext uri="{FF2B5EF4-FFF2-40B4-BE49-F238E27FC236}">
+                <a16:creationId xmlns:a16="http://schemas.microsoft.com/office/drawing/2014/main" id="{33CD2525-4521-7275-C40B-D77F122AA8DA}"/>
+              </a:ext>
+            </a:extLst>
+          </p:cNvPr>
+          <p:cNvCxnSpPr/>
+          <p:nvPr/>
+        </p:nvCxnSpPr>
+        <p:spPr>
+          <a:xfrm>
+            <a:off x="1776000" y="324000"/>
+            <a:ext cx="0" cy="4230000"/>
+          </a:xfrm>
+          <a:prstGeom prst="line">
+            <a:avLst/>
+          </a:prstGeom>
+        </p:spPr>
+        <p:style>
+          <a:lnRef idx="2">
+            <a:schemeClr val="accent1"/>
+          </a:lnRef>
+          <a:fillRef idx="0">
+            <a:schemeClr val="accent1"/>
+          </a:fillRef>
+          <a:effectRef idx="1">
+            <a:schemeClr val="accent1"/>
+          </a:effectRef>
+          <a:fontRef idx="minor">
+            <a:schemeClr val="tx1"/>
+          </a:fontRef>
+        </p:style>
+      </p:cxnSp>
+      <p:cxnSp>
+        <p:nvCxnSpPr>
+          <p:cNvPr id="15" name="直線コネクタ 14">
+            <a:extLst>
+              <a:ext uri="{FF2B5EF4-FFF2-40B4-BE49-F238E27FC236}">
+                <a16:creationId xmlns:a16="http://schemas.microsoft.com/office/drawing/2014/main" id="{006275BB-A962-9A24-9DA7-1CA0A13E114D}"/>
+              </a:ext>
+            </a:extLst>
+          </p:cNvPr>
+          <p:cNvCxnSpPr/>
+          <p:nvPr/>
+        </p:nvCxnSpPr>
+        <p:spPr>
+          <a:xfrm>
+            <a:off x="2496000" y="324000"/>
+            <a:ext cx="0" cy="4230000"/>
+          </a:xfrm>
+          <a:prstGeom prst="line">
+            <a:avLst/>
+          </a:prstGeom>
+        </p:spPr>
+        <p:style>
+          <a:lnRef idx="2">
+            <a:schemeClr val="accent1"/>
+          </a:lnRef>
+          <a:fillRef idx="0">
+            <a:schemeClr val="accent1"/>
+          </a:fillRef>
+          <a:effectRef idx="1">
+            <a:schemeClr val="accent1"/>
+          </a:effectRef>
+          <a:fontRef idx="minor">
+            <a:schemeClr val="tx1"/>
+          </a:fontRef>
+        </p:style>
+      </p:cxnSp>
+      <p:cxnSp>
+        <p:nvCxnSpPr>
+          <p:cNvPr id="16" name="直線コネクタ 15">
+            <a:extLst>
+              <a:ext uri="{FF2B5EF4-FFF2-40B4-BE49-F238E27FC236}">
+                <a16:creationId xmlns:a16="http://schemas.microsoft.com/office/drawing/2014/main" id="{67F9A795-9664-0AF9-98F3-2F52BDAF25D4}"/>
+              </a:ext>
+            </a:extLst>
+          </p:cNvPr>
+          <p:cNvCxnSpPr/>
+          <p:nvPr/>
+        </p:nvCxnSpPr>
+        <p:spPr>
+          <a:xfrm>
+            <a:off x="3216000" y="324000"/>
+            <a:ext cx="0" cy="4230000"/>
+          </a:xfrm>
+          <a:prstGeom prst="line">
+            <a:avLst/>
+          </a:prstGeom>
+        </p:spPr>
+        <p:style>
+          <a:lnRef idx="2">
+            <a:schemeClr val="accent1"/>
+          </a:lnRef>
+          <a:fillRef idx="0">
+            <a:schemeClr val="accent1"/>
+          </a:fillRef>
+          <a:effectRef idx="1">
+            <a:schemeClr val="accent1"/>
+          </a:effectRef>
+          <a:fontRef idx="minor">
+            <a:schemeClr val="tx1"/>
+          </a:fontRef>
+        </p:style>
+      </p:cxnSp>
+      <p:cxnSp>
+        <p:nvCxnSpPr>
+          <p:cNvPr id="17" name="直線コネクタ 16">
+            <a:extLst>
+              <a:ext uri="{FF2B5EF4-FFF2-40B4-BE49-F238E27FC236}">
+                <a16:creationId xmlns:a16="http://schemas.microsoft.com/office/drawing/2014/main" id="{F0F52377-FD82-1EC1-AA2D-CCAF8324676D}"/>
+              </a:ext>
+            </a:extLst>
+          </p:cNvPr>
+          <p:cNvCxnSpPr/>
+          <p:nvPr/>
+        </p:nvCxnSpPr>
+        <p:spPr>
+          <a:xfrm>
+            <a:off x="3936000" y="324000"/>
+            <a:ext cx="0" cy="4230000"/>
+          </a:xfrm>
+          <a:prstGeom prst="line">
+            <a:avLst/>
+          </a:prstGeom>
+        </p:spPr>
+        <p:style>
+          <a:lnRef idx="2">
+            <a:schemeClr val="accent1"/>
+          </a:lnRef>
+          <a:fillRef idx="0">
+            <a:schemeClr val="accent1"/>
+          </a:fillRef>
+          <a:effectRef idx="1">
+            <a:schemeClr val="accent1"/>
+          </a:effectRef>
+          <a:fontRef idx="minor">
+            <a:schemeClr val="tx1"/>
+          </a:fontRef>
+        </p:style>
+      </p:cxnSp>
+      <p:cxnSp>
+        <p:nvCxnSpPr>
+          <p:cNvPr id="18" name="直線コネクタ 17">
+            <a:extLst>
+              <a:ext uri="{FF2B5EF4-FFF2-40B4-BE49-F238E27FC236}">
+                <a16:creationId xmlns:a16="http://schemas.microsoft.com/office/drawing/2014/main" id="{92DF3EC3-7CC4-22D3-8D42-516AEF99DD50}"/>
+              </a:ext>
+            </a:extLst>
+          </p:cNvPr>
+          <p:cNvCxnSpPr/>
+          <p:nvPr/>
+        </p:nvCxnSpPr>
+        <p:spPr>
+          <a:xfrm>
+            <a:off x="4656000" y="324000"/>
+            <a:ext cx="0" cy="4230000"/>
+          </a:xfrm>
+          <a:prstGeom prst="line">
+            <a:avLst/>
+          </a:prstGeom>
+        </p:spPr>
+        <p:style>
+          <a:lnRef idx="2">
+            <a:schemeClr val="accent1"/>
+          </a:lnRef>
+          <a:fillRef idx="0">
+            <a:schemeClr val="accent1"/>
+          </a:fillRef>
+          <a:effectRef idx="1">
+            <a:schemeClr val="accent1"/>
+          </a:effectRef>
+          <a:fontRef idx="minor">
+            <a:schemeClr val="tx1"/>
+          </a:fontRef>
+        </p:style>
+      </p:cxnSp>
+      <p:cxnSp>
+        <p:nvCxnSpPr>
+          <p:cNvPr id="19" name="直線コネクタ 18">
+            <a:extLst>
+              <a:ext uri="{FF2B5EF4-FFF2-40B4-BE49-F238E27FC236}">
+                <a16:creationId xmlns:a16="http://schemas.microsoft.com/office/drawing/2014/main" id="{65AD26DC-9ED6-C198-EC4A-0082E003DD8C}"/>
+              </a:ext>
+            </a:extLst>
+          </p:cNvPr>
+          <p:cNvCxnSpPr/>
+          <p:nvPr/>
+        </p:nvCxnSpPr>
+        <p:spPr>
+          <a:xfrm>
+            <a:off x="5376000" y="324000"/>
+            <a:ext cx="0" cy="4230000"/>
+          </a:xfrm>
+          <a:prstGeom prst="line">
+            <a:avLst/>
+          </a:prstGeom>
+        </p:spPr>
+        <p:style>
+          <a:lnRef idx="2">
+            <a:schemeClr val="accent1"/>
+          </a:lnRef>
+          <a:fillRef idx="0">
+            <a:schemeClr val="accent1"/>
+          </a:fillRef>
+          <a:effectRef idx="1">
+            <a:schemeClr val="accent1"/>
+          </a:effectRef>
+          <a:fontRef idx="minor">
+            <a:schemeClr val="tx1"/>
+          </a:fontRef>
+        </p:style>
+      </p:cxnSp>
+      <p:cxnSp>
+        <p:nvCxnSpPr>
+          <p:cNvPr id="20" name="直線コネクタ 19">
+            <a:extLst>
+              <a:ext uri="{FF2B5EF4-FFF2-40B4-BE49-F238E27FC236}">
+                <a16:creationId xmlns:a16="http://schemas.microsoft.com/office/drawing/2014/main" id="{344310EC-5C11-8A14-E5F9-3ED9D6F6D998}"/>
+              </a:ext>
+            </a:extLst>
+          </p:cNvPr>
+          <p:cNvCxnSpPr/>
+          <p:nvPr/>
+        </p:nvCxnSpPr>
+        <p:spPr>
+          <a:xfrm>
+            <a:off x="6096000" y="324000"/>
+            <a:ext cx="0" cy="4230000"/>
+          </a:xfrm>
+          <a:prstGeom prst="line">
+            <a:avLst/>
+          </a:prstGeom>
+        </p:spPr>
+        <p:style>
+          <a:lnRef idx="2">
+            <a:schemeClr val="accent1"/>
+          </a:lnRef>
+          <a:fillRef idx="0">
+            <a:schemeClr val="accent1"/>
+          </a:fillRef>
+          <a:effectRef idx="1">
+            <a:schemeClr val="accent1"/>
+          </a:effectRef>
+          <a:fontRef idx="minor">
+            <a:schemeClr val="tx1"/>
+          </a:fontRef>
+        </p:style>
+      </p:cxnSp>
+      <p:cxnSp>
+        <p:nvCxnSpPr>
+          <p:cNvPr id="21" name="直線コネクタ 20">
+            <a:extLst>
+              <a:ext uri="{FF2B5EF4-FFF2-40B4-BE49-F238E27FC236}">
+                <a16:creationId xmlns:a16="http://schemas.microsoft.com/office/drawing/2014/main" id="{5E5F79A6-24F3-19DD-FAE4-03A382AF9840}"/>
+              </a:ext>
+            </a:extLst>
+          </p:cNvPr>
+          <p:cNvCxnSpPr/>
+          <p:nvPr/>
+        </p:nvCxnSpPr>
+        <p:spPr>
+          <a:xfrm>
+            <a:off x="6816000" y="324000"/>
+            <a:ext cx="0" cy="4230000"/>
+          </a:xfrm>
+          <a:prstGeom prst="line">
+            <a:avLst/>
+          </a:prstGeom>
+        </p:spPr>
+        <p:style>
+          <a:lnRef idx="2">
+            <a:schemeClr val="accent1"/>
+          </a:lnRef>
+          <a:fillRef idx="0">
+            <a:schemeClr val="accent1"/>
+          </a:fillRef>
+          <a:effectRef idx="1">
+            <a:schemeClr val="accent1"/>
+          </a:effectRef>
+          <a:fontRef idx="minor">
+            <a:schemeClr val="tx1"/>
+          </a:fontRef>
+        </p:style>
+      </p:cxnSp>
+      <p:cxnSp>
+        <p:nvCxnSpPr>
+          <p:cNvPr id="22" name="直線コネクタ 21">
+            <a:extLst>
+              <a:ext uri="{FF2B5EF4-FFF2-40B4-BE49-F238E27FC236}">
+                <a16:creationId xmlns:a16="http://schemas.microsoft.com/office/drawing/2014/main" id="{74D0A4A8-522A-20D5-A4E1-AFA3C5F0F0FB}"/>
+              </a:ext>
+            </a:extLst>
+          </p:cNvPr>
+          <p:cNvCxnSpPr/>
+          <p:nvPr/>
+        </p:nvCxnSpPr>
+        <p:spPr>
+          <a:xfrm>
+            <a:off x="7536000" y="324000"/>
+            <a:ext cx="0" cy="4230000"/>
+          </a:xfrm>
+          <a:prstGeom prst="line">
+            <a:avLst/>
+          </a:prstGeom>
+        </p:spPr>
+        <p:style>
+          <a:lnRef idx="2">
+            <a:schemeClr val="accent1"/>
+          </a:lnRef>
+          <a:fillRef idx="0">
+            <a:schemeClr val="accent1"/>
+          </a:fillRef>
+          <a:effectRef idx="1">
+            <a:schemeClr val="accent1"/>
+          </a:effectRef>
+          <a:fontRef idx="minor">
+            <a:schemeClr val="tx1"/>
+          </a:fontRef>
+        </p:style>
+      </p:cxnSp>
+      <p:cxnSp>
+        <p:nvCxnSpPr>
+          <p:cNvPr id="23" name="直線コネクタ 22">
+            <a:extLst>
+              <a:ext uri="{FF2B5EF4-FFF2-40B4-BE49-F238E27FC236}">
+                <a16:creationId xmlns:a16="http://schemas.microsoft.com/office/drawing/2014/main" id="{C2A5ABB4-4F17-A826-CA1A-A48FAFD918EF}"/>
+              </a:ext>
+            </a:extLst>
+          </p:cNvPr>
+          <p:cNvCxnSpPr/>
+          <p:nvPr/>
+        </p:nvCxnSpPr>
+        <p:spPr>
+          <a:xfrm>
+            <a:off x="8256000" y="324000"/>
+            <a:ext cx="0" cy="4230000"/>
+          </a:xfrm>
+          <a:prstGeom prst="line">
+            <a:avLst/>
+          </a:prstGeom>
+        </p:spPr>
+        <p:style>
+          <a:lnRef idx="2">
+            <a:schemeClr val="accent1"/>
+          </a:lnRef>
+          <a:fillRef idx="0">
+            <a:schemeClr val="accent1"/>
+          </a:fillRef>
+          <a:effectRef idx="1">
+            <a:schemeClr val="accent1"/>
+          </a:effectRef>
+          <a:fontRef idx="minor">
+            <a:schemeClr val="tx1"/>
+          </a:fontRef>
+        </p:style>
+      </p:cxnSp>
+      <p:cxnSp>
+        <p:nvCxnSpPr>
+          <p:cNvPr id="24" name="直線コネクタ 23">
+            <a:extLst>
+              <a:ext uri="{FF2B5EF4-FFF2-40B4-BE49-F238E27FC236}">
+                <a16:creationId xmlns:a16="http://schemas.microsoft.com/office/drawing/2014/main" id="{C9357BFA-0478-6F8B-355A-B4BA56CFF8A9}"/>
+              </a:ext>
+            </a:extLst>
+          </p:cNvPr>
+          <p:cNvCxnSpPr/>
+          <p:nvPr/>
+        </p:nvCxnSpPr>
+        <p:spPr>
+          <a:xfrm>
+            <a:off x="8976000" y="324000"/>
+            <a:ext cx="0" cy="4230000"/>
+          </a:xfrm>
+          <a:prstGeom prst="line">
+            <a:avLst/>
+          </a:prstGeom>
+        </p:spPr>
+        <p:style>
+          <a:lnRef idx="2">
+            <a:schemeClr val="accent1"/>
+          </a:lnRef>
+          <a:fillRef idx="0">
+            <a:schemeClr val="accent1"/>
+          </a:fillRef>
+          <a:effectRef idx="1">
+            <a:schemeClr val="accent1"/>
+          </a:effectRef>
+          <a:fontRef idx="minor">
+            <a:schemeClr val="tx1"/>
+          </a:fontRef>
+        </p:style>
+      </p:cxnSp>
+      <p:cxnSp>
+        <p:nvCxnSpPr>
+          <p:cNvPr id="25" name="直線コネクタ 24">
+            <a:extLst>
+              <a:ext uri="{FF2B5EF4-FFF2-40B4-BE49-F238E27FC236}">
+                <a16:creationId xmlns:a16="http://schemas.microsoft.com/office/drawing/2014/main" id="{4A764EA4-C7AF-F58F-79FB-89A88DB1DA6B}"/>
+              </a:ext>
+            </a:extLst>
+          </p:cNvPr>
+          <p:cNvCxnSpPr/>
+          <p:nvPr/>
+        </p:nvCxnSpPr>
+        <p:spPr>
+          <a:xfrm>
+            <a:off x="9696000" y="324000"/>
+            <a:ext cx="0" cy="4230000"/>
+          </a:xfrm>
+          <a:prstGeom prst="line">
+            <a:avLst/>
+          </a:prstGeom>
+        </p:spPr>
+        <p:style>
+          <a:lnRef idx="2">
+            <a:schemeClr val="accent1"/>
+          </a:lnRef>
+          <a:fillRef idx="0">
+            <a:schemeClr val="accent1"/>
+          </a:fillRef>
+          <a:effectRef idx="1">
+            <a:schemeClr val="accent1"/>
+          </a:effectRef>
+          <a:fontRef idx="minor">
+            <a:schemeClr val="tx1"/>
+          </a:fontRef>
+        </p:style>
+      </p:cxnSp>
+      <p:cxnSp>
+        <p:nvCxnSpPr>
+          <p:cNvPr id="26" name="直線コネクタ 25">
+            <a:extLst>
+              <a:ext uri="{FF2B5EF4-FFF2-40B4-BE49-F238E27FC236}">
+                <a16:creationId xmlns:a16="http://schemas.microsoft.com/office/drawing/2014/main" id="{4C433CEC-90AB-F6B4-2510-69A181F87455}"/>
+              </a:ext>
+            </a:extLst>
+          </p:cNvPr>
+          <p:cNvCxnSpPr/>
+          <p:nvPr/>
+        </p:nvCxnSpPr>
+        <p:spPr>
+          <a:xfrm>
+            <a:off x="10416000" y="324000"/>
+            <a:ext cx="0" cy="4230000"/>
+          </a:xfrm>
+          <a:prstGeom prst="line">
+            <a:avLst/>
+          </a:prstGeom>
+        </p:spPr>
+        <p:style>
+          <a:lnRef idx="2">
+            <a:schemeClr val="accent1"/>
+          </a:lnRef>
+          <a:fillRef idx="0">
+            <a:schemeClr val="accent1"/>
+          </a:fillRef>
+          <a:effectRef idx="1">
+            <a:schemeClr val="accent1"/>
+          </a:effectRef>
+          <a:fontRef idx="minor">
+            <a:schemeClr val="tx1"/>
+          </a:fontRef>
+        </p:style>
+      </p:cxnSp>
+      <p:cxnSp>
+        <p:nvCxnSpPr>
+          <p:cNvPr id="27" name="直線コネクタ 26">
+            <a:extLst>
+              <a:ext uri="{FF2B5EF4-FFF2-40B4-BE49-F238E27FC236}">
+                <a16:creationId xmlns:a16="http://schemas.microsoft.com/office/drawing/2014/main" id="{5160F551-6AF9-56E2-72B9-1ECBFF1DD7D3}"/>
+              </a:ext>
+            </a:extLst>
+          </p:cNvPr>
+          <p:cNvCxnSpPr/>
+          <p:nvPr/>
+        </p:nvCxnSpPr>
+        <p:spPr>
+          <a:xfrm>
+            <a:off x="11136000" y="324000"/>
+            <a:ext cx="0" cy="4230000"/>
+          </a:xfrm>
+          <a:prstGeom prst="line">
+            <a:avLst/>
+          </a:prstGeom>
+        </p:spPr>
+        <p:style>
+          <a:lnRef idx="2">
+            <a:schemeClr val="accent1"/>
+          </a:lnRef>
+          <a:fillRef idx="0">
+            <a:schemeClr val="accent1"/>
+          </a:fillRef>
+          <a:effectRef idx="1">
+            <a:schemeClr val="accent1"/>
+          </a:effectRef>
+          <a:fontRef idx="minor">
+            <a:schemeClr val="tx1"/>
+          </a:fontRef>
+        </p:style>
+      </p:cxnSp>
+      <p:cxnSp>
+        <p:nvCxnSpPr>
+          <p:cNvPr id="28" name="直線コネクタ 27">
+            <a:extLst>
+              <a:ext uri="{FF2B5EF4-FFF2-40B4-BE49-F238E27FC236}">
+                <a16:creationId xmlns:a16="http://schemas.microsoft.com/office/drawing/2014/main" id="{B08AD175-55DC-F91A-65E9-B5A4BA48F228}"/>
+              </a:ext>
+            </a:extLst>
+          </p:cNvPr>
+          <p:cNvCxnSpPr/>
+          <p:nvPr/>
+        </p:nvCxnSpPr>
+        <p:spPr>
+          <a:xfrm>
+            <a:off x="11856000" y="324000"/>
+            <a:ext cx="0" cy="4230000"/>
+          </a:xfrm>
+          <a:prstGeom prst="line">
+            <a:avLst/>
+          </a:prstGeom>
+        </p:spPr>
+        <p:style>
+          <a:lnRef idx="2">
+            <a:schemeClr val="accent1"/>
+          </a:lnRef>
+          <a:fillRef idx="0">
+            <a:schemeClr val="accent1"/>
+          </a:fillRef>
+          <a:effectRef idx="1">
+            <a:schemeClr val="accent1"/>
+          </a:effectRef>
+          <a:fontRef idx="minor">
+            <a:schemeClr val="tx1"/>
+          </a:fontRef>
+        </p:style>
+      </p:cxnSp>
+      <p:sp>
+        <p:nvSpPr>
+          <p:cNvPr id="32" name="フリーフォーム: 図形 31">
+            <a:extLst>
+              <a:ext uri="{FF2B5EF4-FFF2-40B4-BE49-F238E27FC236}">
+                <a16:creationId xmlns:a16="http://schemas.microsoft.com/office/drawing/2014/main" id="{D604B652-E947-4C29-901B-8EF8B5BE9D55}"/>
+              </a:ext>
+            </a:extLst>
+          </p:cNvPr>
+          <p:cNvSpPr/>
+          <p:nvPr/>
+        </p:nvSpPr>
+        <p:spPr>
+          <a:xfrm>
+            <a:off x="1413510" y="5853240"/>
+            <a:ext cx="9364980" cy="731520"/>
+          </a:xfrm>
+          <a:custGeom>
+            <a:avLst/>
+            <a:gdLst>
+              <a:gd name="csX0" fmla="*/ 0 w 10703002"/>
+              <a:gd name="csY0" fmla="*/ 723900 h 731634"/>
+              <a:gd name="csX1" fmla="*/ 716280 w 10703002"/>
+              <a:gd name="csY1" fmla="*/ 0 h 731634"/>
+              <a:gd name="csX2" fmla="*/ 1440180 w 10703002"/>
+              <a:gd name="csY2" fmla="*/ 723900 h 731634"/>
+              <a:gd name="csX3" fmla="*/ 2156460 w 10703002"/>
+              <a:gd name="csY3" fmla="*/ 7620 h 731634"/>
+              <a:gd name="csX4" fmla="*/ 2880360 w 10703002"/>
+              <a:gd name="csY4" fmla="*/ 723900 h 731634"/>
+              <a:gd name="csX5" fmla="*/ 3604260 w 10703002"/>
+              <a:gd name="csY5" fmla="*/ 0 h 731634"/>
+              <a:gd name="csX6" fmla="*/ 4328160 w 10703002"/>
+              <a:gd name="csY6" fmla="*/ 723900 h 731634"/>
+              <a:gd name="csX7" fmla="*/ 5036820 w 10703002"/>
+              <a:gd name="csY7" fmla="*/ 0 h 731634"/>
+              <a:gd name="csX8" fmla="*/ 5753100 w 10703002"/>
+              <a:gd name="csY8" fmla="*/ 723900 h 731634"/>
+              <a:gd name="csX9" fmla="*/ 6477000 w 10703002"/>
+              <a:gd name="csY9" fmla="*/ 0 h 731634"/>
+              <a:gd name="csX10" fmla="*/ 7193280 w 10703002"/>
+              <a:gd name="csY10" fmla="*/ 723900 h 731634"/>
+              <a:gd name="csX11" fmla="*/ 7917180 w 10703002"/>
+              <a:gd name="csY11" fmla="*/ 7620 h 731634"/>
+              <a:gd name="csX12" fmla="*/ 8633460 w 10703002"/>
+              <a:gd name="csY12" fmla="*/ 723900 h 731634"/>
+              <a:gd name="csX13" fmla="*/ 9357360 w 10703002"/>
+              <a:gd name="csY13" fmla="*/ 7620 h 731634"/>
+              <a:gd name="csX14" fmla="*/ 10081260 w 10703002"/>
+              <a:gd name="csY14" fmla="*/ 731520 h 731634"/>
+              <a:gd name="csX15" fmla="*/ 10683240 w 10703002"/>
+              <a:gd name="csY15" fmla="*/ 68580 h 731634"/>
+              <a:gd name="csX0" fmla="*/ 0 w 10806734"/>
+              <a:gd name="csY0" fmla="*/ 723900 h 731623"/>
+              <a:gd name="csX1" fmla="*/ 716280 w 10806734"/>
+              <a:gd name="csY1" fmla="*/ 0 h 731623"/>
+              <a:gd name="csX2" fmla="*/ 1440180 w 10806734"/>
+              <a:gd name="csY2" fmla="*/ 723900 h 731623"/>
+              <a:gd name="csX3" fmla="*/ 2156460 w 10806734"/>
+              <a:gd name="csY3" fmla="*/ 7620 h 731623"/>
+              <a:gd name="csX4" fmla="*/ 2880360 w 10806734"/>
+              <a:gd name="csY4" fmla="*/ 723900 h 731623"/>
+              <a:gd name="csX5" fmla="*/ 3604260 w 10806734"/>
+              <a:gd name="csY5" fmla="*/ 0 h 731623"/>
+              <a:gd name="csX6" fmla="*/ 4328160 w 10806734"/>
+              <a:gd name="csY6" fmla="*/ 723900 h 731623"/>
+              <a:gd name="csX7" fmla="*/ 5036820 w 10806734"/>
+              <a:gd name="csY7" fmla="*/ 0 h 731623"/>
+              <a:gd name="csX8" fmla="*/ 5753100 w 10806734"/>
+              <a:gd name="csY8" fmla="*/ 723900 h 731623"/>
+              <a:gd name="csX9" fmla="*/ 6477000 w 10806734"/>
+              <a:gd name="csY9" fmla="*/ 0 h 731623"/>
+              <a:gd name="csX10" fmla="*/ 7193280 w 10806734"/>
+              <a:gd name="csY10" fmla="*/ 723900 h 731623"/>
+              <a:gd name="csX11" fmla="*/ 7917180 w 10806734"/>
+              <a:gd name="csY11" fmla="*/ 7620 h 731623"/>
+              <a:gd name="csX12" fmla="*/ 8633460 w 10806734"/>
+              <a:gd name="csY12" fmla="*/ 723900 h 731623"/>
+              <a:gd name="csX13" fmla="*/ 9357360 w 10806734"/>
+              <a:gd name="csY13" fmla="*/ 7620 h 731623"/>
+              <a:gd name="csX14" fmla="*/ 10081260 w 10806734"/>
+              <a:gd name="csY14" fmla="*/ 731520 h 731623"/>
+              <a:gd name="csX15" fmla="*/ 10789920 w 10806734"/>
+              <a:gd name="csY15" fmla="*/ 0 h 731623"/>
+              <a:gd name="csX0" fmla="*/ 0 w 10789986"/>
+              <a:gd name="csY0" fmla="*/ 723900 h 732889"/>
+              <a:gd name="csX1" fmla="*/ 716280 w 10789986"/>
+              <a:gd name="csY1" fmla="*/ 0 h 732889"/>
+              <a:gd name="csX2" fmla="*/ 1440180 w 10789986"/>
+              <a:gd name="csY2" fmla="*/ 723900 h 732889"/>
+              <a:gd name="csX3" fmla="*/ 2156460 w 10789986"/>
+              <a:gd name="csY3" fmla="*/ 7620 h 732889"/>
+              <a:gd name="csX4" fmla="*/ 2880360 w 10789986"/>
+              <a:gd name="csY4" fmla="*/ 723900 h 732889"/>
+              <a:gd name="csX5" fmla="*/ 3604260 w 10789986"/>
+              <a:gd name="csY5" fmla="*/ 0 h 732889"/>
+              <a:gd name="csX6" fmla="*/ 4328160 w 10789986"/>
+              <a:gd name="csY6" fmla="*/ 723900 h 732889"/>
+              <a:gd name="csX7" fmla="*/ 5036820 w 10789986"/>
+              <a:gd name="csY7" fmla="*/ 0 h 732889"/>
+              <a:gd name="csX8" fmla="*/ 5753100 w 10789986"/>
+              <a:gd name="csY8" fmla="*/ 723900 h 732889"/>
+              <a:gd name="csX9" fmla="*/ 6477000 w 10789986"/>
+              <a:gd name="csY9" fmla="*/ 0 h 732889"/>
+              <a:gd name="csX10" fmla="*/ 7193280 w 10789986"/>
+              <a:gd name="csY10" fmla="*/ 723900 h 732889"/>
+              <a:gd name="csX11" fmla="*/ 7917180 w 10789986"/>
+              <a:gd name="csY11" fmla="*/ 7620 h 732889"/>
+              <a:gd name="csX12" fmla="*/ 8633460 w 10789986"/>
+              <a:gd name="csY12" fmla="*/ 723900 h 732889"/>
+              <a:gd name="csX13" fmla="*/ 9357360 w 10789986"/>
+              <a:gd name="csY13" fmla="*/ 7620 h 732889"/>
+              <a:gd name="csX14" fmla="*/ 10081260 w 10789986"/>
+              <a:gd name="csY14" fmla="*/ 731520 h 732889"/>
+              <a:gd name="csX15" fmla="*/ 10789920 w 10789986"/>
+              <a:gd name="csY15" fmla="*/ 0 h 732889"/>
+              <a:gd name="csX0" fmla="*/ 0 w 10418702"/>
+              <a:gd name="csY0" fmla="*/ 723900 h 733077"/>
+              <a:gd name="csX1" fmla="*/ 716280 w 10418702"/>
+              <a:gd name="csY1" fmla="*/ 0 h 733077"/>
+              <a:gd name="csX2" fmla="*/ 1440180 w 10418702"/>
+              <a:gd name="csY2" fmla="*/ 723900 h 733077"/>
+              <a:gd name="csX3" fmla="*/ 2156460 w 10418702"/>
+              <a:gd name="csY3" fmla="*/ 7620 h 733077"/>
+              <a:gd name="csX4" fmla="*/ 2880360 w 10418702"/>
+              <a:gd name="csY4" fmla="*/ 723900 h 733077"/>
+              <a:gd name="csX5" fmla="*/ 3604260 w 10418702"/>
+              <a:gd name="csY5" fmla="*/ 0 h 733077"/>
+              <a:gd name="csX6" fmla="*/ 4328160 w 10418702"/>
+              <a:gd name="csY6" fmla="*/ 723900 h 733077"/>
+              <a:gd name="csX7" fmla="*/ 5036820 w 10418702"/>
+              <a:gd name="csY7" fmla="*/ 0 h 733077"/>
+              <a:gd name="csX8" fmla="*/ 5753100 w 10418702"/>
+              <a:gd name="csY8" fmla="*/ 723900 h 733077"/>
+              <a:gd name="csX9" fmla="*/ 6477000 w 10418702"/>
+              <a:gd name="csY9" fmla="*/ 0 h 733077"/>
+              <a:gd name="csX10" fmla="*/ 7193280 w 10418702"/>
+              <a:gd name="csY10" fmla="*/ 723900 h 733077"/>
+              <a:gd name="csX11" fmla="*/ 7917180 w 10418702"/>
+              <a:gd name="csY11" fmla="*/ 7620 h 733077"/>
+              <a:gd name="csX12" fmla="*/ 8633460 w 10418702"/>
+              <a:gd name="csY12" fmla="*/ 723900 h 733077"/>
+              <a:gd name="csX13" fmla="*/ 9357360 w 10418702"/>
+              <a:gd name="csY13" fmla="*/ 7620 h 733077"/>
+              <a:gd name="csX14" fmla="*/ 10081260 w 10418702"/>
+              <a:gd name="csY14" fmla="*/ 731520 h 733077"/>
+              <a:gd name="csX15" fmla="*/ 10418445 w 10418702"/>
+              <a:gd name="csY15" fmla="*/ 9525 h 733077"/>
+              <a:gd name="csX0" fmla="*/ 0 w 10180719"/>
+              <a:gd name="csY0" fmla="*/ 723900 h 1052272"/>
+              <a:gd name="csX1" fmla="*/ 716280 w 10180719"/>
+              <a:gd name="csY1" fmla="*/ 0 h 1052272"/>
+              <a:gd name="csX2" fmla="*/ 1440180 w 10180719"/>
+              <a:gd name="csY2" fmla="*/ 723900 h 1052272"/>
+              <a:gd name="csX3" fmla="*/ 2156460 w 10180719"/>
+              <a:gd name="csY3" fmla="*/ 7620 h 1052272"/>
+              <a:gd name="csX4" fmla="*/ 2880360 w 10180719"/>
+              <a:gd name="csY4" fmla="*/ 723900 h 1052272"/>
+              <a:gd name="csX5" fmla="*/ 3604260 w 10180719"/>
+              <a:gd name="csY5" fmla="*/ 0 h 1052272"/>
+              <a:gd name="csX6" fmla="*/ 4328160 w 10180719"/>
+              <a:gd name="csY6" fmla="*/ 723900 h 1052272"/>
+              <a:gd name="csX7" fmla="*/ 5036820 w 10180719"/>
+              <a:gd name="csY7" fmla="*/ 0 h 1052272"/>
+              <a:gd name="csX8" fmla="*/ 5753100 w 10180719"/>
+              <a:gd name="csY8" fmla="*/ 723900 h 1052272"/>
+              <a:gd name="csX9" fmla="*/ 6477000 w 10180719"/>
+              <a:gd name="csY9" fmla="*/ 0 h 1052272"/>
+              <a:gd name="csX10" fmla="*/ 7193280 w 10180719"/>
+              <a:gd name="csY10" fmla="*/ 723900 h 1052272"/>
+              <a:gd name="csX11" fmla="*/ 7917180 w 10180719"/>
+              <a:gd name="csY11" fmla="*/ 7620 h 1052272"/>
+              <a:gd name="csX12" fmla="*/ 8633460 w 10180719"/>
+              <a:gd name="csY12" fmla="*/ 723900 h 1052272"/>
+              <a:gd name="csX13" fmla="*/ 9357360 w 10180719"/>
+              <a:gd name="csY13" fmla="*/ 7620 h 1052272"/>
+              <a:gd name="csX14" fmla="*/ 10081260 w 10180719"/>
+              <a:gd name="csY14" fmla="*/ 731520 h 1052272"/>
+              <a:gd name="csX15" fmla="*/ 10080307 w 10180719"/>
+              <a:gd name="csY15" fmla="*/ 733425 h 1052272"/>
+              <a:gd name="csX0" fmla="*/ 0 w 10359304"/>
+              <a:gd name="csY0" fmla="*/ 723900 h 733525"/>
+              <a:gd name="csX1" fmla="*/ 716280 w 10359304"/>
+              <a:gd name="csY1" fmla="*/ 0 h 733525"/>
+              <a:gd name="csX2" fmla="*/ 1440180 w 10359304"/>
+              <a:gd name="csY2" fmla="*/ 723900 h 733525"/>
+              <a:gd name="csX3" fmla="*/ 2156460 w 10359304"/>
+              <a:gd name="csY3" fmla="*/ 7620 h 733525"/>
+              <a:gd name="csX4" fmla="*/ 2880360 w 10359304"/>
+              <a:gd name="csY4" fmla="*/ 723900 h 733525"/>
+              <a:gd name="csX5" fmla="*/ 3604260 w 10359304"/>
+              <a:gd name="csY5" fmla="*/ 0 h 733525"/>
+              <a:gd name="csX6" fmla="*/ 4328160 w 10359304"/>
+              <a:gd name="csY6" fmla="*/ 723900 h 733525"/>
+              <a:gd name="csX7" fmla="*/ 5036820 w 10359304"/>
+              <a:gd name="csY7" fmla="*/ 0 h 733525"/>
+              <a:gd name="csX8" fmla="*/ 5753100 w 10359304"/>
+              <a:gd name="csY8" fmla="*/ 723900 h 733525"/>
+              <a:gd name="csX9" fmla="*/ 6477000 w 10359304"/>
+              <a:gd name="csY9" fmla="*/ 0 h 733525"/>
+              <a:gd name="csX10" fmla="*/ 7193280 w 10359304"/>
+              <a:gd name="csY10" fmla="*/ 723900 h 733525"/>
+              <a:gd name="csX11" fmla="*/ 7917180 w 10359304"/>
+              <a:gd name="csY11" fmla="*/ 7620 h 733525"/>
+              <a:gd name="csX12" fmla="*/ 8633460 w 10359304"/>
+              <a:gd name="csY12" fmla="*/ 723900 h 733525"/>
+              <a:gd name="csX13" fmla="*/ 9357360 w 10359304"/>
+              <a:gd name="csY13" fmla="*/ 7620 h 733525"/>
+              <a:gd name="csX14" fmla="*/ 10081260 w 10359304"/>
+              <a:gd name="csY14" fmla="*/ 731520 h 733525"/>
+              <a:gd name="csX15" fmla="*/ 10080307 w 10359304"/>
+              <a:gd name="csY15" fmla="*/ 733425 h 733525"/>
+              <a:gd name="csX0" fmla="*/ 0 w 10368372"/>
+              <a:gd name="csY0" fmla="*/ 723900 h 731913"/>
+              <a:gd name="csX1" fmla="*/ 716280 w 10368372"/>
+              <a:gd name="csY1" fmla="*/ 0 h 731913"/>
+              <a:gd name="csX2" fmla="*/ 1440180 w 10368372"/>
+              <a:gd name="csY2" fmla="*/ 723900 h 731913"/>
+              <a:gd name="csX3" fmla="*/ 2156460 w 10368372"/>
+              <a:gd name="csY3" fmla="*/ 7620 h 731913"/>
+              <a:gd name="csX4" fmla="*/ 2880360 w 10368372"/>
+              <a:gd name="csY4" fmla="*/ 723900 h 731913"/>
+              <a:gd name="csX5" fmla="*/ 3604260 w 10368372"/>
+              <a:gd name="csY5" fmla="*/ 0 h 731913"/>
+              <a:gd name="csX6" fmla="*/ 4328160 w 10368372"/>
+              <a:gd name="csY6" fmla="*/ 723900 h 731913"/>
+              <a:gd name="csX7" fmla="*/ 5036820 w 10368372"/>
+              <a:gd name="csY7" fmla="*/ 0 h 731913"/>
+              <a:gd name="csX8" fmla="*/ 5753100 w 10368372"/>
+              <a:gd name="csY8" fmla="*/ 723900 h 731913"/>
+              <a:gd name="csX9" fmla="*/ 6477000 w 10368372"/>
+              <a:gd name="csY9" fmla="*/ 0 h 731913"/>
+              <a:gd name="csX10" fmla="*/ 7193280 w 10368372"/>
+              <a:gd name="csY10" fmla="*/ 723900 h 731913"/>
+              <a:gd name="csX11" fmla="*/ 7917180 w 10368372"/>
+              <a:gd name="csY11" fmla="*/ 7620 h 731913"/>
+              <a:gd name="csX12" fmla="*/ 8633460 w 10368372"/>
+              <a:gd name="csY12" fmla="*/ 723900 h 731913"/>
+              <a:gd name="csX13" fmla="*/ 9357360 w 10368372"/>
+              <a:gd name="csY13" fmla="*/ 7620 h 731913"/>
+              <a:gd name="csX14" fmla="*/ 10081260 w 10368372"/>
+              <a:gd name="csY14" fmla="*/ 731520 h 731913"/>
+              <a:gd name="csX15" fmla="*/ 10094595 w 10368372"/>
+              <a:gd name="csY15" fmla="*/ 576262 h 731913"/>
+              <a:gd name="csX0" fmla="*/ 0 w 10183505"/>
+              <a:gd name="csY0" fmla="*/ 723900 h 731967"/>
+              <a:gd name="csX1" fmla="*/ 716280 w 10183505"/>
+              <a:gd name="csY1" fmla="*/ 0 h 731967"/>
+              <a:gd name="csX2" fmla="*/ 1440180 w 10183505"/>
+              <a:gd name="csY2" fmla="*/ 723900 h 731967"/>
+              <a:gd name="csX3" fmla="*/ 2156460 w 10183505"/>
+              <a:gd name="csY3" fmla="*/ 7620 h 731967"/>
+              <a:gd name="csX4" fmla="*/ 2880360 w 10183505"/>
+              <a:gd name="csY4" fmla="*/ 723900 h 731967"/>
+              <a:gd name="csX5" fmla="*/ 3604260 w 10183505"/>
+              <a:gd name="csY5" fmla="*/ 0 h 731967"/>
+              <a:gd name="csX6" fmla="*/ 4328160 w 10183505"/>
+              <a:gd name="csY6" fmla="*/ 723900 h 731967"/>
+              <a:gd name="csX7" fmla="*/ 5036820 w 10183505"/>
+              <a:gd name="csY7" fmla="*/ 0 h 731967"/>
+              <a:gd name="csX8" fmla="*/ 5753100 w 10183505"/>
+              <a:gd name="csY8" fmla="*/ 723900 h 731967"/>
+              <a:gd name="csX9" fmla="*/ 6477000 w 10183505"/>
+              <a:gd name="csY9" fmla="*/ 0 h 731967"/>
+              <a:gd name="csX10" fmla="*/ 7193280 w 10183505"/>
+              <a:gd name="csY10" fmla="*/ 723900 h 731967"/>
+              <a:gd name="csX11" fmla="*/ 7917180 w 10183505"/>
+              <a:gd name="csY11" fmla="*/ 7620 h 731967"/>
+              <a:gd name="csX12" fmla="*/ 8633460 w 10183505"/>
+              <a:gd name="csY12" fmla="*/ 723900 h 731967"/>
+              <a:gd name="csX13" fmla="*/ 9357360 w 10183505"/>
+              <a:gd name="csY13" fmla="*/ 7620 h 731967"/>
+              <a:gd name="csX14" fmla="*/ 10081260 w 10183505"/>
+              <a:gd name="csY14" fmla="*/ 731520 h 731967"/>
+              <a:gd name="csX15" fmla="*/ 10094595 w 10183505"/>
+              <a:gd name="csY15" fmla="*/ 576262 h 731967"/>
+              <a:gd name="csX0" fmla="*/ 0 w 10176069"/>
+              <a:gd name="csY0" fmla="*/ 723900 h 731979"/>
+              <a:gd name="csX1" fmla="*/ 716280 w 10176069"/>
+              <a:gd name="csY1" fmla="*/ 0 h 731979"/>
+              <a:gd name="csX2" fmla="*/ 1440180 w 10176069"/>
+              <a:gd name="csY2" fmla="*/ 723900 h 731979"/>
+              <a:gd name="csX3" fmla="*/ 2156460 w 10176069"/>
+              <a:gd name="csY3" fmla="*/ 7620 h 731979"/>
+              <a:gd name="csX4" fmla="*/ 2880360 w 10176069"/>
+              <a:gd name="csY4" fmla="*/ 723900 h 731979"/>
+              <a:gd name="csX5" fmla="*/ 3604260 w 10176069"/>
+              <a:gd name="csY5" fmla="*/ 0 h 731979"/>
+              <a:gd name="csX6" fmla="*/ 4328160 w 10176069"/>
+              <a:gd name="csY6" fmla="*/ 723900 h 731979"/>
+              <a:gd name="csX7" fmla="*/ 5036820 w 10176069"/>
+              <a:gd name="csY7" fmla="*/ 0 h 731979"/>
+              <a:gd name="csX8" fmla="*/ 5753100 w 10176069"/>
+              <a:gd name="csY8" fmla="*/ 723900 h 731979"/>
+              <a:gd name="csX9" fmla="*/ 6477000 w 10176069"/>
+              <a:gd name="csY9" fmla="*/ 0 h 731979"/>
+              <a:gd name="csX10" fmla="*/ 7193280 w 10176069"/>
+              <a:gd name="csY10" fmla="*/ 723900 h 731979"/>
+              <a:gd name="csX11" fmla="*/ 7917180 w 10176069"/>
+              <a:gd name="csY11" fmla="*/ 7620 h 731979"/>
+              <a:gd name="csX12" fmla="*/ 8633460 w 10176069"/>
+              <a:gd name="csY12" fmla="*/ 723900 h 731979"/>
+              <a:gd name="csX13" fmla="*/ 9357360 w 10176069"/>
+              <a:gd name="csY13" fmla="*/ 7620 h 731979"/>
+              <a:gd name="csX14" fmla="*/ 10081260 w 10176069"/>
+              <a:gd name="csY14" fmla="*/ 731520 h 731979"/>
+              <a:gd name="csX15" fmla="*/ 10066020 w 10176069"/>
+              <a:gd name="csY15" fmla="*/ 581024 h 731979"/>
+              <a:gd name="csX0" fmla="*/ 0 w 10081260"/>
+              <a:gd name="csY0" fmla="*/ 723900 h 731520"/>
+              <a:gd name="csX1" fmla="*/ 716280 w 10081260"/>
+              <a:gd name="csY1" fmla="*/ 0 h 731520"/>
+              <a:gd name="csX2" fmla="*/ 1440180 w 10081260"/>
+              <a:gd name="csY2" fmla="*/ 723900 h 731520"/>
+              <a:gd name="csX3" fmla="*/ 2156460 w 10081260"/>
+              <a:gd name="csY3" fmla="*/ 7620 h 731520"/>
+              <a:gd name="csX4" fmla="*/ 2880360 w 10081260"/>
+              <a:gd name="csY4" fmla="*/ 723900 h 731520"/>
+              <a:gd name="csX5" fmla="*/ 3604260 w 10081260"/>
+              <a:gd name="csY5" fmla="*/ 0 h 731520"/>
+              <a:gd name="csX6" fmla="*/ 4328160 w 10081260"/>
+              <a:gd name="csY6" fmla="*/ 723900 h 731520"/>
+              <a:gd name="csX7" fmla="*/ 5036820 w 10081260"/>
+              <a:gd name="csY7" fmla="*/ 0 h 731520"/>
+              <a:gd name="csX8" fmla="*/ 5753100 w 10081260"/>
+              <a:gd name="csY8" fmla="*/ 723900 h 731520"/>
+              <a:gd name="csX9" fmla="*/ 6477000 w 10081260"/>
+              <a:gd name="csY9" fmla="*/ 0 h 731520"/>
+              <a:gd name="csX10" fmla="*/ 7193280 w 10081260"/>
+              <a:gd name="csY10" fmla="*/ 723900 h 731520"/>
+              <a:gd name="csX11" fmla="*/ 7917180 w 10081260"/>
+              <a:gd name="csY11" fmla="*/ 7620 h 731520"/>
+              <a:gd name="csX12" fmla="*/ 8633460 w 10081260"/>
+              <a:gd name="csY12" fmla="*/ 723900 h 731520"/>
+              <a:gd name="csX13" fmla="*/ 9357360 w 10081260"/>
+              <a:gd name="csY13" fmla="*/ 7620 h 731520"/>
+              <a:gd name="csX14" fmla="*/ 10081260 w 10081260"/>
+              <a:gd name="csY14" fmla="*/ 731520 h 731520"/>
+              <a:gd name="csX0" fmla="*/ 0 w 9364980"/>
+              <a:gd name="csY0" fmla="*/ 0 h 731520"/>
+              <a:gd name="csX1" fmla="*/ 723900 w 9364980"/>
+              <a:gd name="csY1" fmla="*/ 723900 h 731520"/>
+              <a:gd name="csX2" fmla="*/ 1440180 w 9364980"/>
+              <a:gd name="csY2" fmla="*/ 7620 h 731520"/>
+              <a:gd name="csX3" fmla="*/ 2164080 w 9364980"/>
+              <a:gd name="csY3" fmla="*/ 723900 h 731520"/>
+              <a:gd name="csX4" fmla="*/ 2887980 w 9364980"/>
+              <a:gd name="csY4" fmla="*/ 0 h 731520"/>
+              <a:gd name="csX5" fmla="*/ 3611880 w 9364980"/>
+              <a:gd name="csY5" fmla="*/ 723900 h 731520"/>
+              <a:gd name="csX6" fmla="*/ 4320540 w 9364980"/>
+              <a:gd name="csY6" fmla="*/ 0 h 731520"/>
+              <a:gd name="csX7" fmla="*/ 5036820 w 9364980"/>
+              <a:gd name="csY7" fmla="*/ 723900 h 731520"/>
+              <a:gd name="csX8" fmla="*/ 5760720 w 9364980"/>
+              <a:gd name="csY8" fmla="*/ 0 h 731520"/>
+              <a:gd name="csX9" fmla="*/ 6477000 w 9364980"/>
+              <a:gd name="csY9" fmla="*/ 723900 h 731520"/>
+              <a:gd name="csX10" fmla="*/ 7200900 w 9364980"/>
+              <a:gd name="csY10" fmla="*/ 7620 h 731520"/>
+              <a:gd name="csX11" fmla="*/ 7917180 w 9364980"/>
+              <a:gd name="csY11" fmla="*/ 723900 h 731520"/>
+              <a:gd name="csX12" fmla="*/ 8641080 w 9364980"/>
+              <a:gd name="csY12" fmla="*/ 7620 h 731520"/>
+              <a:gd name="csX13" fmla="*/ 9364980 w 9364980"/>
+              <a:gd name="csY13" fmla="*/ 731520 h 731520"/>
+              <a:gd name="csX0" fmla="*/ 0 w 9364980"/>
+              <a:gd name="csY0" fmla="*/ 0 h 731520"/>
+              <a:gd name="csX1" fmla="*/ 723900 w 9364980"/>
+              <a:gd name="csY1" fmla="*/ 723900 h 731520"/>
+              <a:gd name="csX2" fmla="*/ 1440180 w 9364980"/>
+              <a:gd name="csY2" fmla="*/ 7620 h 731520"/>
+              <a:gd name="csX3" fmla="*/ 2164080 w 9364980"/>
+              <a:gd name="csY3" fmla="*/ 723900 h 731520"/>
+              <a:gd name="csX4" fmla="*/ 2887980 w 9364980"/>
+              <a:gd name="csY4" fmla="*/ 0 h 731520"/>
+              <a:gd name="csX5" fmla="*/ 3611880 w 9364980"/>
+              <a:gd name="csY5" fmla="*/ 723900 h 731520"/>
+              <a:gd name="csX6" fmla="*/ 4320540 w 9364980"/>
+              <a:gd name="csY6" fmla="*/ 0 h 731520"/>
+              <a:gd name="csX7" fmla="*/ 5036820 w 9364980"/>
+              <a:gd name="csY7" fmla="*/ 723900 h 731520"/>
+              <a:gd name="csX8" fmla="*/ 5760720 w 9364980"/>
+              <a:gd name="csY8" fmla="*/ 0 h 731520"/>
+              <a:gd name="csX9" fmla="*/ 6477000 w 9364980"/>
+              <a:gd name="csY9" fmla="*/ 723900 h 731520"/>
+              <a:gd name="csX10" fmla="*/ 7200900 w 9364980"/>
+              <a:gd name="csY10" fmla="*/ 7620 h 731520"/>
+              <a:gd name="csX11" fmla="*/ 7917180 w 9364980"/>
+              <a:gd name="csY11" fmla="*/ 723900 h 731520"/>
+              <a:gd name="csX12" fmla="*/ 8641080 w 9364980"/>
+              <a:gd name="csY12" fmla="*/ 7620 h 731520"/>
+              <a:gd name="csX13" fmla="*/ 9364980 w 9364980"/>
+              <a:gd name="csY13" fmla="*/ 731520 h 731520"/>
+              <a:gd name="csX0" fmla="*/ 0 w 9364980"/>
+              <a:gd name="csY0" fmla="*/ 0 h 731520"/>
+              <a:gd name="csX1" fmla="*/ 723900 w 9364980"/>
+              <a:gd name="csY1" fmla="*/ 723900 h 731520"/>
+              <a:gd name="csX2" fmla="*/ 1440180 w 9364980"/>
+              <a:gd name="csY2" fmla="*/ 7620 h 731520"/>
+              <a:gd name="csX3" fmla="*/ 2164080 w 9364980"/>
+              <a:gd name="csY3" fmla="*/ 723900 h 731520"/>
+              <a:gd name="csX4" fmla="*/ 2887980 w 9364980"/>
+              <a:gd name="csY4" fmla="*/ 0 h 731520"/>
+              <a:gd name="csX5" fmla="*/ 3611880 w 9364980"/>
+              <a:gd name="csY5" fmla="*/ 723900 h 731520"/>
+              <a:gd name="csX6" fmla="*/ 4320540 w 9364980"/>
+              <a:gd name="csY6" fmla="*/ 0 h 731520"/>
+              <a:gd name="csX7" fmla="*/ 5036820 w 9364980"/>
+              <a:gd name="csY7" fmla="*/ 723900 h 731520"/>
+              <a:gd name="csX8" fmla="*/ 5760720 w 9364980"/>
+              <a:gd name="csY8" fmla="*/ 0 h 731520"/>
+              <a:gd name="csX9" fmla="*/ 6477000 w 9364980"/>
+              <a:gd name="csY9" fmla="*/ 723900 h 731520"/>
+              <a:gd name="csX10" fmla="*/ 7200900 w 9364980"/>
+              <a:gd name="csY10" fmla="*/ 7620 h 731520"/>
+              <a:gd name="csX11" fmla="*/ 7917180 w 9364980"/>
+              <a:gd name="csY11" fmla="*/ 723900 h 731520"/>
+              <a:gd name="csX12" fmla="*/ 8641080 w 9364980"/>
+              <a:gd name="csY12" fmla="*/ 7620 h 731520"/>
+              <a:gd name="csX13" fmla="*/ 9364980 w 9364980"/>
+              <a:gd name="csY13" fmla="*/ 731520 h 731520"/>
+              <a:gd name="csX0" fmla="*/ 0 w 9364980"/>
+              <a:gd name="csY0" fmla="*/ 0 h 731520"/>
+              <a:gd name="csX1" fmla="*/ 723900 w 9364980"/>
+              <a:gd name="csY1" fmla="*/ 723900 h 731520"/>
+              <a:gd name="csX2" fmla="*/ 1440180 w 9364980"/>
+              <a:gd name="csY2" fmla="*/ 7620 h 731520"/>
+              <a:gd name="csX3" fmla="*/ 2164080 w 9364980"/>
+              <a:gd name="csY3" fmla="*/ 723900 h 731520"/>
+              <a:gd name="csX4" fmla="*/ 2887980 w 9364980"/>
+              <a:gd name="csY4" fmla="*/ 0 h 731520"/>
+              <a:gd name="csX5" fmla="*/ 3611880 w 9364980"/>
+              <a:gd name="csY5" fmla="*/ 723900 h 731520"/>
+              <a:gd name="csX6" fmla="*/ 4320540 w 9364980"/>
+              <a:gd name="csY6" fmla="*/ 0 h 731520"/>
+              <a:gd name="csX7" fmla="*/ 5036820 w 9364980"/>
+              <a:gd name="csY7" fmla="*/ 723900 h 731520"/>
+              <a:gd name="csX8" fmla="*/ 5760720 w 9364980"/>
+              <a:gd name="csY8" fmla="*/ 0 h 731520"/>
+              <a:gd name="csX9" fmla="*/ 6477000 w 9364980"/>
+              <a:gd name="csY9" fmla="*/ 723900 h 731520"/>
+              <a:gd name="csX10" fmla="*/ 7200900 w 9364980"/>
+              <a:gd name="csY10" fmla="*/ 7620 h 731520"/>
+              <a:gd name="csX11" fmla="*/ 7917180 w 9364980"/>
+              <a:gd name="csY11" fmla="*/ 723900 h 731520"/>
+              <a:gd name="csX12" fmla="*/ 8641080 w 9364980"/>
+              <a:gd name="csY12" fmla="*/ 7620 h 731520"/>
+              <a:gd name="csX13" fmla="*/ 9364980 w 9364980"/>
+              <a:gd name="csY13" fmla="*/ 731520 h 731520"/>
+              <a:gd name="csX0" fmla="*/ 0 w 9364980"/>
+              <a:gd name="csY0" fmla="*/ 0 h 731520"/>
+              <a:gd name="csX1" fmla="*/ 723900 w 9364980"/>
+              <a:gd name="csY1" fmla="*/ 723900 h 731520"/>
+              <a:gd name="csX2" fmla="*/ 1440180 w 9364980"/>
+              <a:gd name="csY2" fmla="*/ 7620 h 731520"/>
+              <a:gd name="csX3" fmla="*/ 2164080 w 9364980"/>
+              <a:gd name="csY3" fmla="*/ 723900 h 731520"/>
+              <a:gd name="csX4" fmla="*/ 2887980 w 9364980"/>
+              <a:gd name="csY4" fmla="*/ 0 h 731520"/>
+              <a:gd name="csX5" fmla="*/ 3611880 w 9364980"/>
+              <a:gd name="csY5" fmla="*/ 723900 h 731520"/>
+              <a:gd name="csX6" fmla="*/ 4320540 w 9364980"/>
+              <a:gd name="csY6" fmla="*/ 0 h 731520"/>
+              <a:gd name="csX7" fmla="*/ 5036820 w 9364980"/>
+              <a:gd name="csY7" fmla="*/ 723900 h 731520"/>
+              <a:gd name="csX8" fmla="*/ 5760720 w 9364980"/>
+              <a:gd name="csY8" fmla="*/ 0 h 731520"/>
+              <a:gd name="csX9" fmla="*/ 6477000 w 9364980"/>
+              <a:gd name="csY9" fmla="*/ 723900 h 731520"/>
+              <a:gd name="csX10" fmla="*/ 7200900 w 9364980"/>
+              <a:gd name="csY10" fmla="*/ 7620 h 731520"/>
+              <a:gd name="csX11" fmla="*/ 7917180 w 9364980"/>
+              <a:gd name="csY11" fmla="*/ 723900 h 731520"/>
+              <a:gd name="csX12" fmla="*/ 8641080 w 9364980"/>
+              <a:gd name="csY12" fmla="*/ 7620 h 731520"/>
+              <a:gd name="csX13" fmla="*/ 9364980 w 9364980"/>
+              <a:gd name="csY13" fmla="*/ 731520 h 731520"/>
+            </a:gdLst>
+            <a:ahLst/>
+            <a:cxnLst>
+              <a:cxn ang="0">
+                <a:pos x="csX0" y="csY0"/>
+              </a:cxn>
+              <a:cxn ang="0">
+                <a:pos x="csX1" y="csY1"/>
+              </a:cxn>
+              <a:cxn ang="0">
+                <a:pos x="csX2" y="csY2"/>
+              </a:cxn>
+              <a:cxn ang="0">
+                <a:pos x="csX3" y="csY3"/>
+              </a:cxn>
+              <a:cxn ang="0">
+                <a:pos x="csX4" y="csY4"/>
+              </a:cxn>
+              <a:cxn ang="0">
+                <a:pos x="csX5" y="csY5"/>
+              </a:cxn>
+              <a:cxn ang="0">
+                <a:pos x="csX6" y="csY6"/>
+              </a:cxn>
+              <a:cxn ang="0">
+                <a:pos x="csX7" y="csY7"/>
+              </a:cxn>
+              <a:cxn ang="0">
+                <a:pos x="csX8" y="csY8"/>
+              </a:cxn>
+              <a:cxn ang="0">
+                <a:pos x="csX9" y="csY9"/>
+              </a:cxn>
+              <a:cxn ang="0">
+                <a:pos x="csX10" y="csY10"/>
+              </a:cxn>
+              <a:cxn ang="0">
+                <a:pos x="csX11" y="csY11"/>
+              </a:cxn>
+              <a:cxn ang="0">
+                <a:pos x="csX12" y="csY12"/>
+              </a:cxn>
+              <a:cxn ang="0">
+                <a:pos x="csX13" y="csY13"/>
+              </a:cxn>
+            </a:cxnLst>
+            <a:rect l="l" t="t" r="r" b="b"/>
+            <a:pathLst>
+              <a:path w="9364980" h="731520">
+                <a:moveTo>
+                  <a:pt x="0" y="0"/>
+                </a:moveTo>
+                <a:cubicBezTo>
+                  <a:pt x="240030" y="0"/>
+                  <a:pt x="483870" y="722630"/>
+                  <a:pt x="723900" y="723900"/>
+                </a:cubicBezTo>
+                <a:cubicBezTo>
+                  <a:pt x="963930" y="725170"/>
+                  <a:pt x="1200150" y="7620"/>
+                  <a:pt x="1440180" y="7620"/>
+                </a:cubicBezTo>
+                <a:cubicBezTo>
+                  <a:pt x="1680210" y="7620"/>
+                  <a:pt x="1922780" y="725170"/>
+                  <a:pt x="2164080" y="723900"/>
+                </a:cubicBezTo>
+                <a:cubicBezTo>
+                  <a:pt x="2405380" y="722630"/>
+                  <a:pt x="2646680" y="0"/>
+                  <a:pt x="2887980" y="0"/>
+                </a:cubicBezTo>
+                <a:cubicBezTo>
+                  <a:pt x="3129280" y="0"/>
+                  <a:pt x="3373120" y="723900"/>
+                  <a:pt x="3611880" y="723900"/>
+                </a:cubicBezTo>
+                <a:cubicBezTo>
+                  <a:pt x="3850640" y="723900"/>
+                  <a:pt x="4083050" y="0"/>
+                  <a:pt x="4320540" y="0"/>
+                </a:cubicBezTo>
+                <a:cubicBezTo>
+                  <a:pt x="4558030" y="0"/>
+                  <a:pt x="4796790" y="723900"/>
+                  <a:pt x="5036820" y="723900"/>
+                </a:cubicBezTo>
+                <a:cubicBezTo>
+                  <a:pt x="5276850" y="723900"/>
+                  <a:pt x="5520690" y="0"/>
+                  <a:pt x="5760720" y="0"/>
+                </a:cubicBezTo>
+                <a:cubicBezTo>
+                  <a:pt x="6000750" y="0"/>
+                  <a:pt x="6236970" y="722630"/>
+                  <a:pt x="6477000" y="723900"/>
+                </a:cubicBezTo>
+                <a:cubicBezTo>
+                  <a:pt x="6717030" y="725170"/>
+                  <a:pt x="6960870" y="7620"/>
+                  <a:pt x="7200900" y="7620"/>
+                </a:cubicBezTo>
+                <a:cubicBezTo>
+                  <a:pt x="7440930" y="7620"/>
+                  <a:pt x="7677150" y="723900"/>
+                  <a:pt x="7917180" y="723900"/>
+                </a:cubicBezTo>
+                <a:cubicBezTo>
+                  <a:pt x="8157210" y="723900"/>
+                  <a:pt x="8399780" y="6350"/>
+                  <a:pt x="8641080" y="7620"/>
+                </a:cubicBezTo>
+                <a:cubicBezTo>
+                  <a:pt x="8882380" y="8890"/>
+                  <a:pt x="9144000" y="721360"/>
+                  <a:pt x="9364980" y="731520"/>
+                </a:cubicBezTo>
+              </a:path>
+            </a:pathLst>
+          </a:custGeom>
+          <a:noFill/>
+          <a:ln w="76200"/>
+        </p:spPr>
+        <p:style>
+          <a:lnRef idx="2">
+            <a:schemeClr val="accent1">
+              <a:shade val="15000"/>
+            </a:schemeClr>
+          </a:lnRef>
+          <a:fillRef idx="1">
+            <a:schemeClr val="accent1"/>
+          </a:fillRef>
+          <a:effectRef idx="0">
+            <a:schemeClr val="accent1"/>
+          </a:effectRef>
+          <a:fontRef idx="minor">
+            <a:schemeClr val="lt1"/>
+          </a:fontRef>
+        </p:style>
+        <p:txBody>
+          <a:bodyPr rtlCol="0" anchor="ctr"/>
+          <a:lstStyle/>
+          <a:p>
+            <a:pPr algn="ctr"/>
+            <a:endParaRPr kumimoji="1" lang="ja-JP" altLang="en-US" dirty="0"/>
+          </a:p>
+        </p:txBody>
+      </p:sp>
+      <p:sp>
+        <p:nvSpPr>
+          <p:cNvPr id="33" name="フリーフォーム: 図形 32">
+            <a:extLst>
+              <a:ext uri="{FF2B5EF4-FFF2-40B4-BE49-F238E27FC236}">
+                <a16:creationId xmlns:a16="http://schemas.microsoft.com/office/drawing/2014/main" id="{2FB2DE13-56FF-D7E7-4F85-CA39270EAC3B}"/>
+              </a:ext>
+            </a:extLst>
+          </p:cNvPr>
+          <p:cNvSpPr/>
+          <p:nvPr/>
+        </p:nvSpPr>
+        <p:spPr>
+          <a:xfrm>
+            <a:off x="1413510" y="5634000"/>
+            <a:ext cx="9364980" cy="731520"/>
+          </a:xfrm>
+          <a:custGeom>
+            <a:avLst/>
+            <a:gdLst>
+              <a:gd name="csX0" fmla="*/ 0 w 10703002"/>
+              <a:gd name="csY0" fmla="*/ 723900 h 731634"/>
+              <a:gd name="csX1" fmla="*/ 716280 w 10703002"/>
+              <a:gd name="csY1" fmla="*/ 0 h 731634"/>
+              <a:gd name="csX2" fmla="*/ 1440180 w 10703002"/>
+              <a:gd name="csY2" fmla="*/ 723900 h 731634"/>
+              <a:gd name="csX3" fmla="*/ 2156460 w 10703002"/>
+              <a:gd name="csY3" fmla="*/ 7620 h 731634"/>
+              <a:gd name="csX4" fmla="*/ 2880360 w 10703002"/>
+              <a:gd name="csY4" fmla="*/ 723900 h 731634"/>
+              <a:gd name="csX5" fmla="*/ 3604260 w 10703002"/>
+              <a:gd name="csY5" fmla="*/ 0 h 731634"/>
+              <a:gd name="csX6" fmla="*/ 4328160 w 10703002"/>
+              <a:gd name="csY6" fmla="*/ 723900 h 731634"/>
+              <a:gd name="csX7" fmla="*/ 5036820 w 10703002"/>
+              <a:gd name="csY7" fmla="*/ 0 h 731634"/>
+              <a:gd name="csX8" fmla="*/ 5753100 w 10703002"/>
+              <a:gd name="csY8" fmla="*/ 723900 h 731634"/>
+              <a:gd name="csX9" fmla="*/ 6477000 w 10703002"/>
+              <a:gd name="csY9" fmla="*/ 0 h 731634"/>
+              <a:gd name="csX10" fmla="*/ 7193280 w 10703002"/>
+              <a:gd name="csY10" fmla="*/ 723900 h 731634"/>
+              <a:gd name="csX11" fmla="*/ 7917180 w 10703002"/>
+              <a:gd name="csY11" fmla="*/ 7620 h 731634"/>
+              <a:gd name="csX12" fmla="*/ 8633460 w 10703002"/>
+              <a:gd name="csY12" fmla="*/ 723900 h 731634"/>
+              <a:gd name="csX13" fmla="*/ 9357360 w 10703002"/>
+              <a:gd name="csY13" fmla="*/ 7620 h 731634"/>
+              <a:gd name="csX14" fmla="*/ 10081260 w 10703002"/>
+              <a:gd name="csY14" fmla="*/ 731520 h 731634"/>
+              <a:gd name="csX15" fmla="*/ 10683240 w 10703002"/>
+              <a:gd name="csY15" fmla="*/ 68580 h 731634"/>
+              <a:gd name="csX0" fmla="*/ 0 w 10806734"/>
+              <a:gd name="csY0" fmla="*/ 723900 h 731623"/>
+              <a:gd name="csX1" fmla="*/ 716280 w 10806734"/>
+              <a:gd name="csY1" fmla="*/ 0 h 731623"/>
+              <a:gd name="csX2" fmla="*/ 1440180 w 10806734"/>
+              <a:gd name="csY2" fmla="*/ 723900 h 731623"/>
+              <a:gd name="csX3" fmla="*/ 2156460 w 10806734"/>
+              <a:gd name="csY3" fmla="*/ 7620 h 731623"/>
+              <a:gd name="csX4" fmla="*/ 2880360 w 10806734"/>
+              <a:gd name="csY4" fmla="*/ 723900 h 731623"/>
+              <a:gd name="csX5" fmla="*/ 3604260 w 10806734"/>
+              <a:gd name="csY5" fmla="*/ 0 h 731623"/>
+              <a:gd name="csX6" fmla="*/ 4328160 w 10806734"/>
+              <a:gd name="csY6" fmla="*/ 723900 h 731623"/>
+              <a:gd name="csX7" fmla="*/ 5036820 w 10806734"/>
+              <a:gd name="csY7" fmla="*/ 0 h 731623"/>
+              <a:gd name="csX8" fmla="*/ 5753100 w 10806734"/>
+              <a:gd name="csY8" fmla="*/ 723900 h 731623"/>
+              <a:gd name="csX9" fmla="*/ 6477000 w 10806734"/>
+              <a:gd name="csY9" fmla="*/ 0 h 731623"/>
+              <a:gd name="csX10" fmla="*/ 7193280 w 10806734"/>
+              <a:gd name="csY10" fmla="*/ 723900 h 731623"/>
+              <a:gd name="csX11" fmla="*/ 7917180 w 10806734"/>
+              <a:gd name="csY11" fmla="*/ 7620 h 731623"/>
+              <a:gd name="csX12" fmla="*/ 8633460 w 10806734"/>
+              <a:gd name="csY12" fmla="*/ 723900 h 731623"/>
+              <a:gd name="csX13" fmla="*/ 9357360 w 10806734"/>
+              <a:gd name="csY13" fmla="*/ 7620 h 731623"/>
+              <a:gd name="csX14" fmla="*/ 10081260 w 10806734"/>
+              <a:gd name="csY14" fmla="*/ 731520 h 731623"/>
+              <a:gd name="csX15" fmla="*/ 10789920 w 10806734"/>
+              <a:gd name="csY15" fmla="*/ 0 h 731623"/>
+              <a:gd name="csX0" fmla="*/ 0 w 10789986"/>
+              <a:gd name="csY0" fmla="*/ 723900 h 732889"/>
+              <a:gd name="csX1" fmla="*/ 716280 w 10789986"/>
+              <a:gd name="csY1" fmla="*/ 0 h 732889"/>
+              <a:gd name="csX2" fmla="*/ 1440180 w 10789986"/>
+              <a:gd name="csY2" fmla="*/ 723900 h 732889"/>
+              <a:gd name="csX3" fmla="*/ 2156460 w 10789986"/>
+              <a:gd name="csY3" fmla="*/ 7620 h 732889"/>
+              <a:gd name="csX4" fmla="*/ 2880360 w 10789986"/>
+              <a:gd name="csY4" fmla="*/ 723900 h 732889"/>
+              <a:gd name="csX5" fmla="*/ 3604260 w 10789986"/>
+              <a:gd name="csY5" fmla="*/ 0 h 732889"/>
+              <a:gd name="csX6" fmla="*/ 4328160 w 10789986"/>
+              <a:gd name="csY6" fmla="*/ 723900 h 732889"/>
+              <a:gd name="csX7" fmla="*/ 5036820 w 10789986"/>
+              <a:gd name="csY7" fmla="*/ 0 h 732889"/>
+              <a:gd name="csX8" fmla="*/ 5753100 w 10789986"/>
+              <a:gd name="csY8" fmla="*/ 723900 h 732889"/>
+              <a:gd name="csX9" fmla="*/ 6477000 w 10789986"/>
+              <a:gd name="csY9" fmla="*/ 0 h 732889"/>
+              <a:gd name="csX10" fmla="*/ 7193280 w 10789986"/>
+              <a:gd name="csY10" fmla="*/ 723900 h 732889"/>
+              <a:gd name="csX11" fmla="*/ 7917180 w 10789986"/>
+              <a:gd name="csY11" fmla="*/ 7620 h 732889"/>
+              <a:gd name="csX12" fmla="*/ 8633460 w 10789986"/>
+              <a:gd name="csY12" fmla="*/ 723900 h 732889"/>
+              <a:gd name="csX13" fmla="*/ 9357360 w 10789986"/>
+              <a:gd name="csY13" fmla="*/ 7620 h 732889"/>
+              <a:gd name="csX14" fmla="*/ 10081260 w 10789986"/>
+              <a:gd name="csY14" fmla="*/ 731520 h 732889"/>
+              <a:gd name="csX15" fmla="*/ 10789920 w 10789986"/>
+              <a:gd name="csY15" fmla="*/ 0 h 732889"/>
+              <a:gd name="csX0" fmla="*/ 0 w 10418702"/>
+              <a:gd name="csY0" fmla="*/ 723900 h 733077"/>
+              <a:gd name="csX1" fmla="*/ 716280 w 10418702"/>
+              <a:gd name="csY1" fmla="*/ 0 h 733077"/>
+              <a:gd name="csX2" fmla="*/ 1440180 w 10418702"/>
+              <a:gd name="csY2" fmla="*/ 723900 h 733077"/>
+              <a:gd name="csX3" fmla="*/ 2156460 w 10418702"/>
+              <a:gd name="csY3" fmla="*/ 7620 h 733077"/>
+              <a:gd name="csX4" fmla="*/ 2880360 w 10418702"/>
+              <a:gd name="csY4" fmla="*/ 723900 h 733077"/>
+              <a:gd name="csX5" fmla="*/ 3604260 w 10418702"/>
+              <a:gd name="csY5" fmla="*/ 0 h 733077"/>
+              <a:gd name="csX6" fmla="*/ 4328160 w 10418702"/>
+              <a:gd name="csY6" fmla="*/ 723900 h 733077"/>
+              <a:gd name="csX7" fmla="*/ 5036820 w 10418702"/>
+              <a:gd name="csY7" fmla="*/ 0 h 733077"/>
+              <a:gd name="csX8" fmla="*/ 5753100 w 10418702"/>
+              <a:gd name="csY8" fmla="*/ 723900 h 733077"/>
+              <a:gd name="csX9" fmla="*/ 6477000 w 10418702"/>
+              <a:gd name="csY9" fmla="*/ 0 h 733077"/>
+              <a:gd name="csX10" fmla="*/ 7193280 w 10418702"/>
+              <a:gd name="csY10" fmla="*/ 723900 h 733077"/>
+              <a:gd name="csX11" fmla="*/ 7917180 w 10418702"/>
+              <a:gd name="csY11" fmla="*/ 7620 h 733077"/>
+              <a:gd name="csX12" fmla="*/ 8633460 w 10418702"/>
+              <a:gd name="csY12" fmla="*/ 723900 h 733077"/>
+              <a:gd name="csX13" fmla="*/ 9357360 w 10418702"/>
+              <a:gd name="csY13" fmla="*/ 7620 h 733077"/>
+              <a:gd name="csX14" fmla="*/ 10081260 w 10418702"/>
+              <a:gd name="csY14" fmla="*/ 731520 h 733077"/>
+              <a:gd name="csX15" fmla="*/ 10418445 w 10418702"/>
+              <a:gd name="csY15" fmla="*/ 9525 h 733077"/>
+              <a:gd name="csX0" fmla="*/ 0 w 10180719"/>
+              <a:gd name="csY0" fmla="*/ 723900 h 1052272"/>
+              <a:gd name="csX1" fmla="*/ 716280 w 10180719"/>
+              <a:gd name="csY1" fmla="*/ 0 h 1052272"/>
+              <a:gd name="csX2" fmla="*/ 1440180 w 10180719"/>
+              <a:gd name="csY2" fmla="*/ 723900 h 1052272"/>
+              <a:gd name="csX3" fmla="*/ 2156460 w 10180719"/>
+              <a:gd name="csY3" fmla="*/ 7620 h 1052272"/>
+              <a:gd name="csX4" fmla="*/ 2880360 w 10180719"/>
+              <a:gd name="csY4" fmla="*/ 723900 h 1052272"/>
+              <a:gd name="csX5" fmla="*/ 3604260 w 10180719"/>
+              <a:gd name="csY5" fmla="*/ 0 h 1052272"/>
+              <a:gd name="csX6" fmla="*/ 4328160 w 10180719"/>
+              <a:gd name="csY6" fmla="*/ 723900 h 1052272"/>
+              <a:gd name="csX7" fmla="*/ 5036820 w 10180719"/>
+              <a:gd name="csY7" fmla="*/ 0 h 1052272"/>
+              <a:gd name="csX8" fmla="*/ 5753100 w 10180719"/>
+              <a:gd name="csY8" fmla="*/ 723900 h 1052272"/>
+              <a:gd name="csX9" fmla="*/ 6477000 w 10180719"/>
+              <a:gd name="csY9" fmla="*/ 0 h 1052272"/>
+              <a:gd name="csX10" fmla="*/ 7193280 w 10180719"/>
+              <a:gd name="csY10" fmla="*/ 723900 h 1052272"/>
+              <a:gd name="csX11" fmla="*/ 7917180 w 10180719"/>
+              <a:gd name="csY11" fmla="*/ 7620 h 1052272"/>
+              <a:gd name="csX12" fmla="*/ 8633460 w 10180719"/>
+              <a:gd name="csY12" fmla="*/ 723900 h 1052272"/>
+              <a:gd name="csX13" fmla="*/ 9357360 w 10180719"/>
+              <a:gd name="csY13" fmla="*/ 7620 h 1052272"/>
+              <a:gd name="csX14" fmla="*/ 10081260 w 10180719"/>
+              <a:gd name="csY14" fmla="*/ 731520 h 1052272"/>
+              <a:gd name="csX15" fmla="*/ 10080307 w 10180719"/>
+              <a:gd name="csY15" fmla="*/ 733425 h 1052272"/>
+              <a:gd name="csX0" fmla="*/ 0 w 10359304"/>
+              <a:gd name="csY0" fmla="*/ 723900 h 733525"/>
+              <a:gd name="csX1" fmla="*/ 716280 w 10359304"/>
+              <a:gd name="csY1" fmla="*/ 0 h 733525"/>
+              <a:gd name="csX2" fmla="*/ 1440180 w 10359304"/>
+              <a:gd name="csY2" fmla="*/ 723900 h 733525"/>
+              <a:gd name="csX3" fmla="*/ 2156460 w 10359304"/>
+              <a:gd name="csY3" fmla="*/ 7620 h 733525"/>
+              <a:gd name="csX4" fmla="*/ 2880360 w 10359304"/>
+              <a:gd name="csY4" fmla="*/ 723900 h 733525"/>
+              <a:gd name="csX5" fmla="*/ 3604260 w 10359304"/>
+              <a:gd name="csY5" fmla="*/ 0 h 733525"/>
+              <a:gd name="csX6" fmla="*/ 4328160 w 10359304"/>
+              <a:gd name="csY6" fmla="*/ 723900 h 733525"/>
+              <a:gd name="csX7" fmla="*/ 5036820 w 10359304"/>
+              <a:gd name="csY7" fmla="*/ 0 h 733525"/>
+              <a:gd name="csX8" fmla="*/ 5753100 w 10359304"/>
+              <a:gd name="csY8" fmla="*/ 723900 h 733525"/>
+              <a:gd name="csX9" fmla="*/ 6477000 w 10359304"/>
+              <a:gd name="csY9" fmla="*/ 0 h 733525"/>
+              <a:gd name="csX10" fmla="*/ 7193280 w 10359304"/>
+              <a:gd name="csY10" fmla="*/ 723900 h 733525"/>
+              <a:gd name="csX11" fmla="*/ 7917180 w 10359304"/>
+              <a:gd name="csY11" fmla="*/ 7620 h 733525"/>
+              <a:gd name="csX12" fmla="*/ 8633460 w 10359304"/>
+              <a:gd name="csY12" fmla="*/ 723900 h 733525"/>
+              <a:gd name="csX13" fmla="*/ 9357360 w 10359304"/>
+              <a:gd name="csY13" fmla="*/ 7620 h 733525"/>
+              <a:gd name="csX14" fmla="*/ 10081260 w 10359304"/>
+              <a:gd name="csY14" fmla="*/ 731520 h 733525"/>
+              <a:gd name="csX15" fmla="*/ 10080307 w 10359304"/>
+              <a:gd name="csY15" fmla="*/ 733425 h 733525"/>
+              <a:gd name="csX0" fmla="*/ 0 w 10368372"/>
+              <a:gd name="csY0" fmla="*/ 723900 h 731913"/>
+              <a:gd name="csX1" fmla="*/ 716280 w 10368372"/>
+              <a:gd name="csY1" fmla="*/ 0 h 731913"/>
+              <a:gd name="csX2" fmla="*/ 1440180 w 10368372"/>
+              <a:gd name="csY2" fmla="*/ 723900 h 731913"/>
+              <a:gd name="csX3" fmla="*/ 2156460 w 10368372"/>
+              <a:gd name="csY3" fmla="*/ 7620 h 731913"/>
+              <a:gd name="csX4" fmla="*/ 2880360 w 10368372"/>
+              <a:gd name="csY4" fmla="*/ 723900 h 731913"/>
+              <a:gd name="csX5" fmla="*/ 3604260 w 10368372"/>
+              <a:gd name="csY5" fmla="*/ 0 h 731913"/>
+              <a:gd name="csX6" fmla="*/ 4328160 w 10368372"/>
+              <a:gd name="csY6" fmla="*/ 723900 h 731913"/>
+              <a:gd name="csX7" fmla="*/ 5036820 w 10368372"/>
+              <a:gd name="csY7" fmla="*/ 0 h 731913"/>
+              <a:gd name="csX8" fmla="*/ 5753100 w 10368372"/>
+              <a:gd name="csY8" fmla="*/ 723900 h 731913"/>
+              <a:gd name="csX9" fmla="*/ 6477000 w 10368372"/>
+              <a:gd name="csY9" fmla="*/ 0 h 731913"/>
+              <a:gd name="csX10" fmla="*/ 7193280 w 10368372"/>
+              <a:gd name="csY10" fmla="*/ 723900 h 731913"/>
+              <a:gd name="csX11" fmla="*/ 7917180 w 10368372"/>
+              <a:gd name="csY11" fmla="*/ 7620 h 731913"/>
+              <a:gd name="csX12" fmla="*/ 8633460 w 10368372"/>
+              <a:gd name="csY12" fmla="*/ 723900 h 731913"/>
+              <a:gd name="csX13" fmla="*/ 9357360 w 10368372"/>
+              <a:gd name="csY13" fmla="*/ 7620 h 731913"/>
+              <a:gd name="csX14" fmla="*/ 10081260 w 10368372"/>
+              <a:gd name="csY14" fmla="*/ 731520 h 731913"/>
+              <a:gd name="csX15" fmla="*/ 10094595 w 10368372"/>
+              <a:gd name="csY15" fmla="*/ 576262 h 731913"/>
+              <a:gd name="csX0" fmla="*/ 0 w 10183505"/>
+              <a:gd name="csY0" fmla="*/ 723900 h 731967"/>
+              <a:gd name="csX1" fmla="*/ 716280 w 10183505"/>
+              <a:gd name="csY1" fmla="*/ 0 h 731967"/>
+              <a:gd name="csX2" fmla="*/ 1440180 w 10183505"/>
+              <a:gd name="csY2" fmla="*/ 723900 h 731967"/>
+              <a:gd name="csX3" fmla="*/ 2156460 w 10183505"/>
+              <a:gd name="csY3" fmla="*/ 7620 h 731967"/>
+              <a:gd name="csX4" fmla="*/ 2880360 w 10183505"/>
+              <a:gd name="csY4" fmla="*/ 723900 h 731967"/>
+              <a:gd name="csX5" fmla="*/ 3604260 w 10183505"/>
+              <a:gd name="csY5" fmla="*/ 0 h 731967"/>
+              <a:gd name="csX6" fmla="*/ 4328160 w 10183505"/>
+              <a:gd name="csY6" fmla="*/ 723900 h 731967"/>
+              <a:gd name="csX7" fmla="*/ 5036820 w 10183505"/>
+              <a:gd name="csY7" fmla="*/ 0 h 731967"/>
+              <a:gd name="csX8" fmla="*/ 5753100 w 10183505"/>
+              <a:gd name="csY8" fmla="*/ 723900 h 731967"/>
+              <a:gd name="csX9" fmla="*/ 6477000 w 10183505"/>
+              <a:gd name="csY9" fmla="*/ 0 h 731967"/>
+              <a:gd name="csX10" fmla="*/ 7193280 w 10183505"/>
+              <a:gd name="csY10" fmla="*/ 723900 h 731967"/>
+              <a:gd name="csX11" fmla="*/ 7917180 w 10183505"/>
+              <a:gd name="csY11" fmla="*/ 7620 h 731967"/>
+              <a:gd name="csX12" fmla="*/ 8633460 w 10183505"/>
+              <a:gd name="csY12" fmla="*/ 723900 h 731967"/>
+              <a:gd name="csX13" fmla="*/ 9357360 w 10183505"/>
+              <a:gd name="csY13" fmla="*/ 7620 h 731967"/>
+              <a:gd name="csX14" fmla="*/ 10081260 w 10183505"/>
+              <a:gd name="csY14" fmla="*/ 731520 h 731967"/>
+              <a:gd name="csX15" fmla="*/ 10094595 w 10183505"/>
+              <a:gd name="csY15" fmla="*/ 576262 h 731967"/>
+              <a:gd name="csX0" fmla="*/ 0 w 10176069"/>
+              <a:gd name="csY0" fmla="*/ 723900 h 731979"/>
+              <a:gd name="csX1" fmla="*/ 716280 w 10176069"/>
+              <a:gd name="csY1" fmla="*/ 0 h 731979"/>
+              <a:gd name="csX2" fmla="*/ 1440180 w 10176069"/>
+              <a:gd name="csY2" fmla="*/ 723900 h 731979"/>
+              <a:gd name="csX3" fmla="*/ 2156460 w 10176069"/>
+              <a:gd name="csY3" fmla="*/ 7620 h 731979"/>
+              <a:gd name="csX4" fmla="*/ 2880360 w 10176069"/>
+              <a:gd name="csY4" fmla="*/ 723900 h 731979"/>
+              <a:gd name="csX5" fmla="*/ 3604260 w 10176069"/>
+              <a:gd name="csY5" fmla="*/ 0 h 731979"/>
+              <a:gd name="csX6" fmla="*/ 4328160 w 10176069"/>
+              <a:gd name="csY6" fmla="*/ 723900 h 731979"/>
+              <a:gd name="csX7" fmla="*/ 5036820 w 10176069"/>
+              <a:gd name="csY7" fmla="*/ 0 h 731979"/>
+              <a:gd name="csX8" fmla="*/ 5753100 w 10176069"/>
+              <a:gd name="csY8" fmla="*/ 723900 h 731979"/>
+              <a:gd name="csX9" fmla="*/ 6477000 w 10176069"/>
+              <a:gd name="csY9" fmla="*/ 0 h 731979"/>
+              <a:gd name="csX10" fmla="*/ 7193280 w 10176069"/>
+              <a:gd name="csY10" fmla="*/ 723900 h 731979"/>
+              <a:gd name="csX11" fmla="*/ 7917180 w 10176069"/>
+              <a:gd name="csY11" fmla="*/ 7620 h 731979"/>
+              <a:gd name="csX12" fmla="*/ 8633460 w 10176069"/>
+              <a:gd name="csY12" fmla="*/ 723900 h 731979"/>
+              <a:gd name="csX13" fmla="*/ 9357360 w 10176069"/>
+              <a:gd name="csY13" fmla="*/ 7620 h 731979"/>
+              <a:gd name="csX14" fmla="*/ 10081260 w 10176069"/>
+              <a:gd name="csY14" fmla="*/ 731520 h 731979"/>
+              <a:gd name="csX15" fmla="*/ 10066020 w 10176069"/>
+              <a:gd name="csY15" fmla="*/ 581024 h 731979"/>
+              <a:gd name="csX0" fmla="*/ 0 w 10081260"/>
+              <a:gd name="csY0" fmla="*/ 723900 h 731520"/>
+              <a:gd name="csX1" fmla="*/ 716280 w 10081260"/>
+              <a:gd name="csY1" fmla="*/ 0 h 731520"/>
+              <a:gd name="csX2" fmla="*/ 1440180 w 10081260"/>
+              <a:gd name="csY2" fmla="*/ 723900 h 731520"/>
+              <a:gd name="csX3" fmla="*/ 2156460 w 10081260"/>
+              <a:gd name="csY3" fmla="*/ 7620 h 731520"/>
+              <a:gd name="csX4" fmla="*/ 2880360 w 10081260"/>
+              <a:gd name="csY4" fmla="*/ 723900 h 731520"/>
+              <a:gd name="csX5" fmla="*/ 3604260 w 10081260"/>
+              <a:gd name="csY5" fmla="*/ 0 h 731520"/>
+              <a:gd name="csX6" fmla="*/ 4328160 w 10081260"/>
+              <a:gd name="csY6" fmla="*/ 723900 h 731520"/>
+              <a:gd name="csX7" fmla="*/ 5036820 w 10081260"/>
+              <a:gd name="csY7" fmla="*/ 0 h 731520"/>
+              <a:gd name="csX8" fmla="*/ 5753100 w 10081260"/>
+              <a:gd name="csY8" fmla="*/ 723900 h 731520"/>
+              <a:gd name="csX9" fmla="*/ 6477000 w 10081260"/>
+              <a:gd name="csY9" fmla="*/ 0 h 731520"/>
+              <a:gd name="csX10" fmla="*/ 7193280 w 10081260"/>
+              <a:gd name="csY10" fmla="*/ 723900 h 731520"/>
+              <a:gd name="csX11" fmla="*/ 7917180 w 10081260"/>
+              <a:gd name="csY11" fmla="*/ 7620 h 731520"/>
+              <a:gd name="csX12" fmla="*/ 8633460 w 10081260"/>
+              <a:gd name="csY12" fmla="*/ 723900 h 731520"/>
+              <a:gd name="csX13" fmla="*/ 9357360 w 10081260"/>
+              <a:gd name="csY13" fmla="*/ 7620 h 731520"/>
+              <a:gd name="csX14" fmla="*/ 10081260 w 10081260"/>
+              <a:gd name="csY14" fmla="*/ 731520 h 731520"/>
+              <a:gd name="csX0" fmla="*/ 0 w 9364980"/>
+              <a:gd name="csY0" fmla="*/ 0 h 731520"/>
+              <a:gd name="csX1" fmla="*/ 723900 w 9364980"/>
+              <a:gd name="csY1" fmla="*/ 723900 h 731520"/>
+              <a:gd name="csX2" fmla="*/ 1440180 w 9364980"/>
+              <a:gd name="csY2" fmla="*/ 7620 h 731520"/>
+              <a:gd name="csX3" fmla="*/ 2164080 w 9364980"/>
+              <a:gd name="csY3" fmla="*/ 723900 h 731520"/>
+              <a:gd name="csX4" fmla="*/ 2887980 w 9364980"/>
+              <a:gd name="csY4" fmla="*/ 0 h 731520"/>
+              <a:gd name="csX5" fmla="*/ 3611880 w 9364980"/>
+              <a:gd name="csY5" fmla="*/ 723900 h 731520"/>
+              <a:gd name="csX6" fmla="*/ 4320540 w 9364980"/>
+              <a:gd name="csY6" fmla="*/ 0 h 731520"/>
+              <a:gd name="csX7" fmla="*/ 5036820 w 9364980"/>
+              <a:gd name="csY7" fmla="*/ 723900 h 731520"/>
+              <a:gd name="csX8" fmla="*/ 5760720 w 9364980"/>
+              <a:gd name="csY8" fmla="*/ 0 h 731520"/>
+              <a:gd name="csX9" fmla="*/ 6477000 w 9364980"/>
+              <a:gd name="csY9" fmla="*/ 723900 h 731520"/>
+              <a:gd name="csX10" fmla="*/ 7200900 w 9364980"/>
+              <a:gd name="csY10" fmla="*/ 7620 h 731520"/>
+              <a:gd name="csX11" fmla="*/ 7917180 w 9364980"/>
+              <a:gd name="csY11" fmla="*/ 723900 h 731520"/>
+              <a:gd name="csX12" fmla="*/ 8641080 w 9364980"/>
+              <a:gd name="csY12" fmla="*/ 7620 h 731520"/>
+              <a:gd name="csX13" fmla="*/ 9364980 w 9364980"/>
+              <a:gd name="csY13" fmla="*/ 731520 h 731520"/>
+              <a:gd name="csX0" fmla="*/ 0 w 9364980"/>
+              <a:gd name="csY0" fmla="*/ 0 h 731520"/>
+              <a:gd name="csX1" fmla="*/ 723900 w 9364980"/>
+              <a:gd name="csY1" fmla="*/ 723900 h 731520"/>
+              <a:gd name="csX2" fmla="*/ 1440180 w 9364980"/>
+              <a:gd name="csY2" fmla="*/ 7620 h 731520"/>
+              <a:gd name="csX3" fmla="*/ 2164080 w 9364980"/>
+              <a:gd name="csY3" fmla="*/ 723900 h 731520"/>
+              <a:gd name="csX4" fmla="*/ 2887980 w 9364980"/>
+              <a:gd name="csY4" fmla="*/ 0 h 731520"/>
+              <a:gd name="csX5" fmla="*/ 3611880 w 9364980"/>
+              <a:gd name="csY5" fmla="*/ 723900 h 731520"/>
+              <a:gd name="csX6" fmla="*/ 4320540 w 9364980"/>
+              <a:gd name="csY6" fmla="*/ 0 h 731520"/>
+              <a:gd name="csX7" fmla="*/ 5036820 w 9364980"/>
+              <a:gd name="csY7" fmla="*/ 723900 h 731520"/>
+              <a:gd name="csX8" fmla="*/ 5760720 w 9364980"/>
+              <a:gd name="csY8" fmla="*/ 0 h 731520"/>
+              <a:gd name="csX9" fmla="*/ 6477000 w 9364980"/>
+              <a:gd name="csY9" fmla="*/ 723900 h 731520"/>
+              <a:gd name="csX10" fmla="*/ 7200900 w 9364980"/>
+              <a:gd name="csY10" fmla="*/ 7620 h 731520"/>
+              <a:gd name="csX11" fmla="*/ 7917180 w 9364980"/>
+              <a:gd name="csY11" fmla="*/ 723900 h 731520"/>
+              <a:gd name="csX12" fmla="*/ 8641080 w 9364980"/>
+              <a:gd name="csY12" fmla="*/ 7620 h 731520"/>
+              <a:gd name="csX13" fmla="*/ 9364980 w 9364980"/>
+              <a:gd name="csY13" fmla="*/ 731520 h 731520"/>
+              <a:gd name="csX0" fmla="*/ 0 w 9364980"/>
+              <a:gd name="csY0" fmla="*/ 0 h 731520"/>
+              <a:gd name="csX1" fmla="*/ 723900 w 9364980"/>
+              <a:gd name="csY1" fmla="*/ 723900 h 731520"/>
+              <a:gd name="csX2" fmla="*/ 1440180 w 9364980"/>
+              <a:gd name="csY2" fmla="*/ 7620 h 731520"/>
+              <a:gd name="csX3" fmla="*/ 2164080 w 9364980"/>
+              <a:gd name="csY3" fmla="*/ 723900 h 731520"/>
+              <a:gd name="csX4" fmla="*/ 2887980 w 9364980"/>
+              <a:gd name="csY4" fmla="*/ 0 h 731520"/>
+              <a:gd name="csX5" fmla="*/ 3611880 w 9364980"/>
+              <a:gd name="csY5" fmla="*/ 723900 h 731520"/>
+              <a:gd name="csX6" fmla="*/ 4320540 w 9364980"/>
+              <a:gd name="csY6" fmla="*/ 0 h 731520"/>
+              <a:gd name="csX7" fmla="*/ 5036820 w 9364980"/>
+              <a:gd name="csY7" fmla="*/ 723900 h 731520"/>
+              <a:gd name="csX8" fmla="*/ 5760720 w 9364980"/>
+              <a:gd name="csY8" fmla="*/ 0 h 731520"/>
+              <a:gd name="csX9" fmla="*/ 6477000 w 9364980"/>
+              <a:gd name="csY9" fmla="*/ 723900 h 731520"/>
+              <a:gd name="csX10" fmla="*/ 7200900 w 9364980"/>
+              <a:gd name="csY10" fmla="*/ 7620 h 731520"/>
+              <a:gd name="csX11" fmla="*/ 7917180 w 9364980"/>
+              <a:gd name="csY11" fmla="*/ 723900 h 731520"/>
+              <a:gd name="csX12" fmla="*/ 8641080 w 9364980"/>
+              <a:gd name="csY12" fmla="*/ 7620 h 731520"/>
+              <a:gd name="csX13" fmla="*/ 9364980 w 9364980"/>
+              <a:gd name="csY13" fmla="*/ 731520 h 731520"/>
+              <a:gd name="csX0" fmla="*/ 0 w 9364980"/>
+              <a:gd name="csY0" fmla="*/ 0 h 731520"/>
+              <a:gd name="csX1" fmla="*/ 723900 w 9364980"/>
+              <a:gd name="csY1" fmla="*/ 723900 h 731520"/>
+              <a:gd name="csX2" fmla="*/ 1440180 w 9364980"/>
+              <a:gd name="csY2" fmla="*/ 7620 h 731520"/>
+              <a:gd name="csX3" fmla="*/ 2164080 w 9364980"/>
+              <a:gd name="csY3" fmla="*/ 723900 h 731520"/>
+              <a:gd name="csX4" fmla="*/ 2887980 w 9364980"/>
+              <a:gd name="csY4" fmla="*/ 0 h 731520"/>
+              <a:gd name="csX5" fmla="*/ 3611880 w 9364980"/>
+              <a:gd name="csY5" fmla="*/ 723900 h 731520"/>
+              <a:gd name="csX6" fmla="*/ 4320540 w 9364980"/>
+              <a:gd name="csY6" fmla="*/ 0 h 731520"/>
+              <a:gd name="csX7" fmla="*/ 5036820 w 9364980"/>
+              <a:gd name="csY7" fmla="*/ 723900 h 731520"/>
+              <a:gd name="csX8" fmla="*/ 5760720 w 9364980"/>
+              <a:gd name="csY8" fmla="*/ 0 h 731520"/>
+              <a:gd name="csX9" fmla="*/ 6477000 w 9364980"/>
+              <a:gd name="csY9" fmla="*/ 723900 h 731520"/>
+              <a:gd name="csX10" fmla="*/ 7200900 w 9364980"/>
+              <a:gd name="csY10" fmla="*/ 7620 h 731520"/>
+              <a:gd name="csX11" fmla="*/ 7917180 w 9364980"/>
+              <a:gd name="csY11" fmla="*/ 723900 h 731520"/>
+              <a:gd name="csX12" fmla="*/ 8641080 w 9364980"/>
+              <a:gd name="csY12" fmla="*/ 7620 h 731520"/>
+              <a:gd name="csX13" fmla="*/ 9364980 w 9364980"/>
+              <a:gd name="csY13" fmla="*/ 731520 h 731520"/>
+              <a:gd name="csX0" fmla="*/ 0 w 9364980"/>
+              <a:gd name="csY0" fmla="*/ 0 h 731520"/>
+              <a:gd name="csX1" fmla="*/ 723900 w 9364980"/>
+              <a:gd name="csY1" fmla="*/ 723900 h 731520"/>
+              <a:gd name="csX2" fmla="*/ 1440180 w 9364980"/>
+              <a:gd name="csY2" fmla="*/ 7620 h 731520"/>
+              <a:gd name="csX3" fmla="*/ 2164080 w 9364980"/>
+              <a:gd name="csY3" fmla="*/ 723900 h 731520"/>
+              <a:gd name="csX4" fmla="*/ 2887980 w 9364980"/>
+              <a:gd name="csY4" fmla="*/ 0 h 731520"/>
+              <a:gd name="csX5" fmla="*/ 3611880 w 9364980"/>
+              <a:gd name="csY5" fmla="*/ 723900 h 731520"/>
+              <a:gd name="csX6" fmla="*/ 4320540 w 9364980"/>
+              <a:gd name="csY6" fmla="*/ 0 h 731520"/>
+              <a:gd name="csX7" fmla="*/ 5036820 w 9364980"/>
+              <a:gd name="csY7" fmla="*/ 723900 h 731520"/>
+              <a:gd name="csX8" fmla="*/ 5760720 w 9364980"/>
+              <a:gd name="csY8" fmla="*/ 0 h 731520"/>
+              <a:gd name="csX9" fmla="*/ 6477000 w 9364980"/>
+              <a:gd name="csY9" fmla="*/ 723900 h 731520"/>
+              <a:gd name="csX10" fmla="*/ 7200900 w 9364980"/>
+              <a:gd name="csY10" fmla="*/ 7620 h 731520"/>
+              <a:gd name="csX11" fmla="*/ 7917180 w 9364980"/>
+              <a:gd name="csY11" fmla="*/ 723900 h 731520"/>
+              <a:gd name="csX12" fmla="*/ 8641080 w 9364980"/>
+              <a:gd name="csY12" fmla="*/ 7620 h 731520"/>
+              <a:gd name="csX13" fmla="*/ 9364980 w 9364980"/>
+              <a:gd name="csY13" fmla="*/ 731520 h 731520"/>
+            </a:gdLst>
+            <a:ahLst/>
+            <a:cxnLst>
+              <a:cxn ang="0">
+                <a:pos x="csX0" y="csY0"/>
+              </a:cxn>
+              <a:cxn ang="0">
+                <a:pos x="csX1" y="csY1"/>
+              </a:cxn>
+              <a:cxn ang="0">
+                <a:pos x="csX2" y="csY2"/>
+              </a:cxn>
+              <a:cxn ang="0">
+                <a:pos x="csX3" y="csY3"/>
+              </a:cxn>
+              <a:cxn ang="0">
+                <a:pos x="csX4" y="csY4"/>
+              </a:cxn>
+              <a:cxn ang="0">
+                <a:pos x="csX5" y="csY5"/>
+              </a:cxn>
+              <a:cxn ang="0">
+                <a:pos x="csX6" y="csY6"/>
+              </a:cxn>
+              <a:cxn ang="0">
+                <a:pos x="csX7" y="csY7"/>
+              </a:cxn>
+              <a:cxn ang="0">
+                <a:pos x="csX8" y="csY8"/>
+              </a:cxn>
+              <a:cxn ang="0">
+                <a:pos x="csX9" y="csY9"/>
+              </a:cxn>
+              <a:cxn ang="0">
+                <a:pos x="csX10" y="csY10"/>
+              </a:cxn>
+              <a:cxn ang="0">
+                <a:pos x="csX11" y="csY11"/>
+              </a:cxn>
+              <a:cxn ang="0">
+                <a:pos x="csX12" y="csY12"/>
+              </a:cxn>
+              <a:cxn ang="0">
+                <a:pos x="csX13" y="csY13"/>
+              </a:cxn>
+            </a:cxnLst>
+            <a:rect l="l" t="t" r="r" b="b"/>
+            <a:pathLst>
+              <a:path w="9364980" h="731520">
+                <a:moveTo>
+                  <a:pt x="0" y="0"/>
+                </a:moveTo>
+                <a:cubicBezTo>
+                  <a:pt x="240030" y="0"/>
+                  <a:pt x="483870" y="722630"/>
+                  <a:pt x="723900" y="723900"/>
+                </a:cubicBezTo>
+                <a:cubicBezTo>
+                  <a:pt x="963930" y="725170"/>
+                  <a:pt x="1200150" y="7620"/>
+                  <a:pt x="1440180" y="7620"/>
+                </a:cubicBezTo>
+                <a:cubicBezTo>
+                  <a:pt x="1680210" y="7620"/>
+                  <a:pt x="1922780" y="725170"/>
+                  <a:pt x="2164080" y="723900"/>
+                </a:cubicBezTo>
+                <a:cubicBezTo>
+                  <a:pt x="2405380" y="722630"/>
+                  <a:pt x="2646680" y="0"/>
+                  <a:pt x="2887980" y="0"/>
+                </a:cubicBezTo>
+                <a:cubicBezTo>
+                  <a:pt x="3129280" y="0"/>
+                  <a:pt x="3373120" y="723900"/>
+                  <a:pt x="3611880" y="723900"/>
+                </a:cubicBezTo>
+                <a:cubicBezTo>
+                  <a:pt x="3850640" y="723900"/>
+                  <a:pt x="4083050" y="0"/>
+                  <a:pt x="4320540" y="0"/>
+                </a:cubicBezTo>
+                <a:cubicBezTo>
+                  <a:pt x="4558030" y="0"/>
+                  <a:pt x="4796790" y="723900"/>
+                  <a:pt x="5036820" y="723900"/>
+                </a:cubicBezTo>
+                <a:cubicBezTo>
+                  <a:pt x="5276850" y="723900"/>
+                  <a:pt x="5520690" y="0"/>
+                  <a:pt x="5760720" y="0"/>
+                </a:cubicBezTo>
+                <a:cubicBezTo>
+                  <a:pt x="6000750" y="0"/>
+                  <a:pt x="6236970" y="722630"/>
+                  <a:pt x="6477000" y="723900"/>
+                </a:cubicBezTo>
+                <a:cubicBezTo>
+                  <a:pt x="6717030" y="725170"/>
+                  <a:pt x="6960870" y="7620"/>
+                  <a:pt x="7200900" y="7620"/>
+                </a:cubicBezTo>
+                <a:cubicBezTo>
+                  <a:pt x="7440930" y="7620"/>
+                  <a:pt x="7677150" y="723900"/>
+                  <a:pt x="7917180" y="723900"/>
+                </a:cubicBezTo>
+                <a:cubicBezTo>
+                  <a:pt x="8157210" y="723900"/>
+                  <a:pt x="8399780" y="6350"/>
+                  <a:pt x="8641080" y="7620"/>
+                </a:cubicBezTo>
+                <a:cubicBezTo>
+                  <a:pt x="8882380" y="8890"/>
+                  <a:pt x="9144000" y="721360"/>
+                  <a:pt x="9364980" y="731520"/>
+                </a:cubicBezTo>
+              </a:path>
+            </a:pathLst>
+          </a:custGeom>
+          <a:noFill/>
+          <a:ln w="76200"/>
+        </p:spPr>
+        <p:style>
+          <a:lnRef idx="2">
+            <a:schemeClr val="accent1">
+              <a:shade val="15000"/>
+            </a:schemeClr>
+          </a:lnRef>
+          <a:fillRef idx="1">
+            <a:schemeClr val="accent1"/>
+          </a:fillRef>
+          <a:effectRef idx="0">
+            <a:schemeClr val="accent1"/>
+          </a:effectRef>
+          <a:fontRef idx="minor">
+            <a:schemeClr val="lt1"/>
+          </a:fontRef>
+        </p:style>
+        <p:txBody>
+          <a:bodyPr rtlCol="0" anchor="ctr"/>
+          <a:lstStyle/>
+          <a:p>
+            <a:pPr algn="ctr"/>
+            <a:endParaRPr kumimoji="1" lang="ja-JP" altLang="en-US" dirty="0"/>
+          </a:p>
+        </p:txBody>
+      </p:sp>
+      <p:sp>
+        <p:nvSpPr>
+          <p:cNvPr id="34" name="フリーフォーム: 図形 33">
+            <a:extLst>
+              <a:ext uri="{FF2B5EF4-FFF2-40B4-BE49-F238E27FC236}">
+                <a16:creationId xmlns:a16="http://schemas.microsoft.com/office/drawing/2014/main" id="{85DA2D8C-4CA5-FAFD-CDE5-13961094A041}"/>
+              </a:ext>
+            </a:extLst>
+          </p:cNvPr>
+          <p:cNvSpPr/>
+          <p:nvPr/>
+        </p:nvSpPr>
+        <p:spPr>
+          <a:xfrm>
+            <a:off x="1048875" y="5071499"/>
+            <a:ext cx="10079998" cy="405000"/>
+          </a:xfrm>
+          <a:custGeom>
+            <a:avLst/>
+            <a:gdLst>
+              <a:gd name="csX0" fmla="*/ 0 w 10703002"/>
+              <a:gd name="csY0" fmla="*/ 723900 h 731634"/>
+              <a:gd name="csX1" fmla="*/ 716280 w 10703002"/>
+              <a:gd name="csY1" fmla="*/ 0 h 731634"/>
+              <a:gd name="csX2" fmla="*/ 1440180 w 10703002"/>
+              <a:gd name="csY2" fmla="*/ 723900 h 731634"/>
+              <a:gd name="csX3" fmla="*/ 2156460 w 10703002"/>
+              <a:gd name="csY3" fmla="*/ 7620 h 731634"/>
+              <a:gd name="csX4" fmla="*/ 2880360 w 10703002"/>
+              <a:gd name="csY4" fmla="*/ 723900 h 731634"/>
+              <a:gd name="csX5" fmla="*/ 3604260 w 10703002"/>
+              <a:gd name="csY5" fmla="*/ 0 h 731634"/>
+              <a:gd name="csX6" fmla="*/ 4328160 w 10703002"/>
+              <a:gd name="csY6" fmla="*/ 723900 h 731634"/>
+              <a:gd name="csX7" fmla="*/ 5036820 w 10703002"/>
+              <a:gd name="csY7" fmla="*/ 0 h 731634"/>
+              <a:gd name="csX8" fmla="*/ 5753100 w 10703002"/>
+              <a:gd name="csY8" fmla="*/ 723900 h 731634"/>
+              <a:gd name="csX9" fmla="*/ 6477000 w 10703002"/>
+              <a:gd name="csY9" fmla="*/ 0 h 731634"/>
+              <a:gd name="csX10" fmla="*/ 7193280 w 10703002"/>
+              <a:gd name="csY10" fmla="*/ 723900 h 731634"/>
+              <a:gd name="csX11" fmla="*/ 7917180 w 10703002"/>
+              <a:gd name="csY11" fmla="*/ 7620 h 731634"/>
+              <a:gd name="csX12" fmla="*/ 8633460 w 10703002"/>
+              <a:gd name="csY12" fmla="*/ 723900 h 731634"/>
+              <a:gd name="csX13" fmla="*/ 9357360 w 10703002"/>
+              <a:gd name="csY13" fmla="*/ 7620 h 731634"/>
+              <a:gd name="csX14" fmla="*/ 10081260 w 10703002"/>
+              <a:gd name="csY14" fmla="*/ 731520 h 731634"/>
+              <a:gd name="csX15" fmla="*/ 10683240 w 10703002"/>
+              <a:gd name="csY15" fmla="*/ 68580 h 731634"/>
+              <a:gd name="csX0" fmla="*/ 0 w 10806734"/>
+              <a:gd name="csY0" fmla="*/ 723900 h 731623"/>
+              <a:gd name="csX1" fmla="*/ 716280 w 10806734"/>
+              <a:gd name="csY1" fmla="*/ 0 h 731623"/>
+              <a:gd name="csX2" fmla="*/ 1440180 w 10806734"/>
+              <a:gd name="csY2" fmla="*/ 723900 h 731623"/>
+              <a:gd name="csX3" fmla="*/ 2156460 w 10806734"/>
+              <a:gd name="csY3" fmla="*/ 7620 h 731623"/>
+              <a:gd name="csX4" fmla="*/ 2880360 w 10806734"/>
+              <a:gd name="csY4" fmla="*/ 723900 h 731623"/>
+              <a:gd name="csX5" fmla="*/ 3604260 w 10806734"/>
+              <a:gd name="csY5" fmla="*/ 0 h 731623"/>
+              <a:gd name="csX6" fmla="*/ 4328160 w 10806734"/>
+              <a:gd name="csY6" fmla="*/ 723900 h 731623"/>
+              <a:gd name="csX7" fmla="*/ 5036820 w 10806734"/>
+              <a:gd name="csY7" fmla="*/ 0 h 731623"/>
+              <a:gd name="csX8" fmla="*/ 5753100 w 10806734"/>
+              <a:gd name="csY8" fmla="*/ 723900 h 731623"/>
+              <a:gd name="csX9" fmla="*/ 6477000 w 10806734"/>
+              <a:gd name="csY9" fmla="*/ 0 h 731623"/>
+              <a:gd name="csX10" fmla="*/ 7193280 w 10806734"/>
+              <a:gd name="csY10" fmla="*/ 723900 h 731623"/>
+              <a:gd name="csX11" fmla="*/ 7917180 w 10806734"/>
+              <a:gd name="csY11" fmla="*/ 7620 h 731623"/>
+              <a:gd name="csX12" fmla="*/ 8633460 w 10806734"/>
+              <a:gd name="csY12" fmla="*/ 723900 h 731623"/>
+              <a:gd name="csX13" fmla="*/ 9357360 w 10806734"/>
+              <a:gd name="csY13" fmla="*/ 7620 h 731623"/>
+              <a:gd name="csX14" fmla="*/ 10081260 w 10806734"/>
+              <a:gd name="csY14" fmla="*/ 731520 h 731623"/>
+              <a:gd name="csX15" fmla="*/ 10789920 w 10806734"/>
+              <a:gd name="csY15" fmla="*/ 0 h 731623"/>
+              <a:gd name="csX0" fmla="*/ 0 w 10789986"/>
+              <a:gd name="csY0" fmla="*/ 723900 h 732889"/>
+              <a:gd name="csX1" fmla="*/ 716280 w 10789986"/>
+              <a:gd name="csY1" fmla="*/ 0 h 732889"/>
+              <a:gd name="csX2" fmla="*/ 1440180 w 10789986"/>
+              <a:gd name="csY2" fmla="*/ 723900 h 732889"/>
+              <a:gd name="csX3" fmla="*/ 2156460 w 10789986"/>
+              <a:gd name="csY3" fmla="*/ 7620 h 732889"/>
+              <a:gd name="csX4" fmla="*/ 2880360 w 10789986"/>
+              <a:gd name="csY4" fmla="*/ 723900 h 732889"/>
+              <a:gd name="csX5" fmla="*/ 3604260 w 10789986"/>
+              <a:gd name="csY5" fmla="*/ 0 h 732889"/>
+              <a:gd name="csX6" fmla="*/ 4328160 w 10789986"/>
+              <a:gd name="csY6" fmla="*/ 723900 h 732889"/>
+              <a:gd name="csX7" fmla="*/ 5036820 w 10789986"/>
+              <a:gd name="csY7" fmla="*/ 0 h 732889"/>
+              <a:gd name="csX8" fmla="*/ 5753100 w 10789986"/>
+              <a:gd name="csY8" fmla="*/ 723900 h 732889"/>
+              <a:gd name="csX9" fmla="*/ 6477000 w 10789986"/>
+              <a:gd name="csY9" fmla="*/ 0 h 732889"/>
+              <a:gd name="csX10" fmla="*/ 7193280 w 10789986"/>
+              <a:gd name="csY10" fmla="*/ 723900 h 732889"/>
+              <a:gd name="csX11" fmla="*/ 7917180 w 10789986"/>
+              <a:gd name="csY11" fmla="*/ 7620 h 732889"/>
+              <a:gd name="csX12" fmla="*/ 8633460 w 10789986"/>
+              <a:gd name="csY12" fmla="*/ 723900 h 732889"/>
+              <a:gd name="csX13" fmla="*/ 9357360 w 10789986"/>
+              <a:gd name="csY13" fmla="*/ 7620 h 732889"/>
+              <a:gd name="csX14" fmla="*/ 10081260 w 10789986"/>
+              <a:gd name="csY14" fmla="*/ 731520 h 732889"/>
+              <a:gd name="csX15" fmla="*/ 10789920 w 10789986"/>
+              <a:gd name="csY15" fmla="*/ 0 h 732889"/>
+              <a:gd name="csX0" fmla="*/ 0 w 10418702"/>
+              <a:gd name="csY0" fmla="*/ 723900 h 733077"/>
+              <a:gd name="csX1" fmla="*/ 716280 w 10418702"/>
+              <a:gd name="csY1" fmla="*/ 0 h 733077"/>
+              <a:gd name="csX2" fmla="*/ 1440180 w 10418702"/>
+              <a:gd name="csY2" fmla="*/ 723900 h 733077"/>
+              <a:gd name="csX3" fmla="*/ 2156460 w 10418702"/>
+              <a:gd name="csY3" fmla="*/ 7620 h 733077"/>
+              <a:gd name="csX4" fmla="*/ 2880360 w 10418702"/>
+              <a:gd name="csY4" fmla="*/ 723900 h 733077"/>
+              <a:gd name="csX5" fmla="*/ 3604260 w 10418702"/>
+              <a:gd name="csY5" fmla="*/ 0 h 733077"/>
+              <a:gd name="csX6" fmla="*/ 4328160 w 10418702"/>
+              <a:gd name="csY6" fmla="*/ 723900 h 733077"/>
+              <a:gd name="csX7" fmla="*/ 5036820 w 10418702"/>
+              <a:gd name="csY7" fmla="*/ 0 h 733077"/>
+              <a:gd name="csX8" fmla="*/ 5753100 w 10418702"/>
+              <a:gd name="csY8" fmla="*/ 723900 h 733077"/>
+              <a:gd name="csX9" fmla="*/ 6477000 w 10418702"/>
+              <a:gd name="csY9" fmla="*/ 0 h 733077"/>
+              <a:gd name="csX10" fmla="*/ 7193280 w 10418702"/>
+              <a:gd name="csY10" fmla="*/ 723900 h 733077"/>
+              <a:gd name="csX11" fmla="*/ 7917180 w 10418702"/>
+              <a:gd name="csY11" fmla="*/ 7620 h 733077"/>
+              <a:gd name="csX12" fmla="*/ 8633460 w 10418702"/>
+              <a:gd name="csY12" fmla="*/ 723900 h 733077"/>
+              <a:gd name="csX13" fmla="*/ 9357360 w 10418702"/>
+              <a:gd name="csY13" fmla="*/ 7620 h 733077"/>
+              <a:gd name="csX14" fmla="*/ 10081260 w 10418702"/>
+              <a:gd name="csY14" fmla="*/ 731520 h 733077"/>
+              <a:gd name="csX15" fmla="*/ 10418445 w 10418702"/>
+              <a:gd name="csY15" fmla="*/ 9525 h 733077"/>
+              <a:gd name="csX0" fmla="*/ 0 w 10180719"/>
+              <a:gd name="csY0" fmla="*/ 723900 h 1052272"/>
+              <a:gd name="csX1" fmla="*/ 716280 w 10180719"/>
+              <a:gd name="csY1" fmla="*/ 0 h 1052272"/>
+              <a:gd name="csX2" fmla="*/ 1440180 w 10180719"/>
+              <a:gd name="csY2" fmla="*/ 723900 h 1052272"/>
+              <a:gd name="csX3" fmla="*/ 2156460 w 10180719"/>
+              <a:gd name="csY3" fmla="*/ 7620 h 1052272"/>
+              <a:gd name="csX4" fmla="*/ 2880360 w 10180719"/>
+              <a:gd name="csY4" fmla="*/ 723900 h 1052272"/>
+              <a:gd name="csX5" fmla="*/ 3604260 w 10180719"/>
+              <a:gd name="csY5" fmla="*/ 0 h 1052272"/>
+              <a:gd name="csX6" fmla="*/ 4328160 w 10180719"/>
+              <a:gd name="csY6" fmla="*/ 723900 h 1052272"/>
+              <a:gd name="csX7" fmla="*/ 5036820 w 10180719"/>
+              <a:gd name="csY7" fmla="*/ 0 h 1052272"/>
+              <a:gd name="csX8" fmla="*/ 5753100 w 10180719"/>
+              <a:gd name="csY8" fmla="*/ 723900 h 1052272"/>
+              <a:gd name="csX9" fmla="*/ 6477000 w 10180719"/>
+              <a:gd name="csY9" fmla="*/ 0 h 1052272"/>
+              <a:gd name="csX10" fmla="*/ 7193280 w 10180719"/>
+              <a:gd name="csY10" fmla="*/ 723900 h 1052272"/>
+              <a:gd name="csX11" fmla="*/ 7917180 w 10180719"/>
+              <a:gd name="csY11" fmla="*/ 7620 h 1052272"/>
+              <a:gd name="csX12" fmla="*/ 8633460 w 10180719"/>
+              <a:gd name="csY12" fmla="*/ 723900 h 1052272"/>
+              <a:gd name="csX13" fmla="*/ 9357360 w 10180719"/>
+              <a:gd name="csY13" fmla="*/ 7620 h 1052272"/>
+              <a:gd name="csX14" fmla="*/ 10081260 w 10180719"/>
+              <a:gd name="csY14" fmla="*/ 731520 h 1052272"/>
+              <a:gd name="csX15" fmla="*/ 10080307 w 10180719"/>
+              <a:gd name="csY15" fmla="*/ 733425 h 1052272"/>
+              <a:gd name="csX0" fmla="*/ 0 w 10359304"/>
+              <a:gd name="csY0" fmla="*/ 723900 h 733525"/>
+              <a:gd name="csX1" fmla="*/ 716280 w 10359304"/>
+              <a:gd name="csY1" fmla="*/ 0 h 733525"/>
+              <a:gd name="csX2" fmla="*/ 1440180 w 10359304"/>
+              <a:gd name="csY2" fmla="*/ 723900 h 733525"/>
+              <a:gd name="csX3" fmla="*/ 2156460 w 10359304"/>
+              <a:gd name="csY3" fmla="*/ 7620 h 733525"/>
+              <a:gd name="csX4" fmla="*/ 2880360 w 10359304"/>
+              <a:gd name="csY4" fmla="*/ 723900 h 733525"/>
+              <a:gd name="csX5" fmla="*/ 3604260 w 10359304"/>
+              <a:gd name="csY5" fmla="*/ 0 h 733525"/>
+              <a:gd name="csX6" fmla="*/ 4328160 w 10359304"/>
+              <a:gd name="csY6" fmla="*/ 723900 h 733525"/>
+              <a:gd name="csX7" fmla="*/ 5036820 w 10359304"/>
+              <a:gd name="csY7" fmla="*/ 0 h 733525"/>
+              <a:gd name="csX8" fmla="*/ 5753100 w 10359304"/>
+              <a:gd name="csY8" fmla="*/ 723900 h 733525"/>
+              <a:gd name="csX9" fmla="*/ 6477000 w 10359304"/>
+              <a:gd name="csY9" fmla="*/ 0 h 733525"/>
+              <a:gd name="csX10" fmla="*/ 7193280 w 10359304"/>
+              <a:gd name="csY10" fmla="*/ 723900 h 733525"/>
+              <a:gd name="csX11" fmla="*/ 7917180 w 10359304"/>
+              <a:gd name="csY11" fmla="*/ 7620 h 733525"/>
+              <a:gd name="csX12" fmla="*/ 8633460 w 10359304"/>
+              <a:gd name="csY12" fmla="*/ 723900 h 733525"/>
+              <a:gd name="csX13" fmla="*/ 9357360 w 10359304"/>
+              <a:gd name="csY13" fmla="*/ 7620 h 733525"/>
+              <a:gd name="csX14" fmla="*/ 10081260 w 10359304"/>
+              <a:gd name="csY14" fmla="*/ 731520 h 733525"/>
+              <a:gd name="csX15" fmla="*/ 10080307 w 10359304"/>
+              <a:gd name="csY15" fmla="*/ 733425 h 733525"/>
+              <a:gd name="csX0" fmla="*/ 0 w 10368372"/>
+              <a:gd name="csY0" fmla="*/ 723900 h 731913"/>
+              <a:gd name="csX1" fmla="*/ 716280 w 10368372"/>
+              <a:gd name="csY1" fmla="*/ 0 h 731913"/>
+              <a:gd name="csX2" fmla="*/ 1440180 w 10368372"/>
+              <a:gd name="csY2" fmla="*/ 723900 h 731913"/>
+              <a:gd name="csX3" fmla="*/ 2156460 w 10368372"/>
+              <a:gd name="csY3" fmla="*/ 7620 h 731913"/>
+              <a:gd name="csX4" fmla="*/ 2880360 w 10368372"/>
+              <a:gd name="csY4" fmla="*/ 723900 h 731913"/>
+              <a:gd name="csX5" fmla="*/ 3604260 w 10368372"/>
+              <a:gd name="csY5" fmla="*/ 0 h 731913"/>
+              <a:gd name="csX6" fmla="*/ 4328160 w 10368372"/>
+              <a:gd name="csY6" fmla="*/ 723900 h 731913"/>
+              <a:gd name="csX7" fmla="*/ 5036820 w 10368372"/>
+              <a:gd name="csY7" fmla="*/ 0 h 731913"/>
+              <a:gd name="csX8" fmla="*/ 5753100 w 10368372"/>
+              <a:gd name="csY8" fmla="*/ 723900 h 731913"/>
+              <a:gd name="csX9" fmla="*/ 6477000 w 10368372"/>
+              <a:gd name="csY9" fmla="*/ 0 h 731913"/>
+              <a:gd name="csX10" fmla="*/ 7193280 w 10368372"/>
+              <a:gd name="csY10" fmla="*/ 723900 h 731913"/>
+              <a:gd name="csX11" fmla="*/ 7917180 w 10368372"/>
+              <a:gd name="csY11" fmla="*/ 7620 h 731913"/>
+              <a:gd name="csX12" fmla="*/ 8633460 w 10368372"/>
+              <a:gd name="csY12" fmla="*/ 723900 h 731913"/>
+              <a:gd name="csX13" fmla="*/ 9357360 w 10368372"/>
+              <a:gd name="csY13" fmla="*/ 7620 h 731913"/>
+              <a:gd name="csX14" fmla="*/ 10081260 w 10368372"/>
+              <a:gd name="csY14" fmla="*/ 731520 h 731913"/>
+              <a:gd name="csX15" fmla="*/ 10094595 w 10368372"/>
+              <a:gd name="csY15" fmla="*/ 576262 h 731913"/>
+              <a:gd name="csX0" fmla="*/ 0 w 10183505"/>
+              <a:gd name="csY0" fmla="*/ 723900 h 731967"/>
+              <a:gd name="csX1" fmla="*/ 716280 w 10183505"/>
+              <a:gd name="csY1" fmla="*/ 0 h 731967"/>
+              <a:gd name="csX2" fmla="*/ 1440180 w 10183505"/>
+              <a:gd name="csY2" fmla="*/ 723900 h 731967"/>
+              <a:gd name="csX3" fmla="*/ 2156460 w 10183505"/>
+              <a:gd name="csY3" fmla="*/ 7620 h 731967"/>
+              <a:gd name="csX4" fmla="*/ 2880360 w 10183505"/>
+              <a:gd name="csY4" fmla="*/ 723900 h 731967"/>
+              <a:gd name="csX5" fmla="*/ 3604260 w 10183505"/>
+              <a:gd name="csY5" fmla="*/ 0 h 731967"/>
+              <a:gd name="csX6" fmla="*/ 4328160 w 10183505"/>
+              <a:gd name="csY6" fmla="*/ 723900 h 731967"/>
+              <a:gd name="csX7" fmla="*/ 5036820 w 10183505"/>
+              <a:gd name="csY7" fmla="*/ 0 h 731967"/>
+              <a:gd name="csX8" fmla="*/ 5753100 w 10183505"/>
+              <a:gd name="csY8" fmla="*/ 723900 h 731967"/>
+              <a:gd name="csX9" fmla="*/ 6477000 w 10183505"/>
+              <a:gd name="csY9" fmla="*/ 0 h 731967"/>
+              <a:gd name="csX10" fmla="*/ 7193280 w 10183505"/>
+              <a:gd name="csY10" fmla="*/ 723900 h 731967"/>
+              <a:gd name="csX11" fmla="*/ 7917180 w 10183505"/>
+              <a:gd name="csY11" fmla="*/ 7620 h 731967"/>
+              <a:gd name="csX12" fmla="*/ 8633460 w 10183505"/>
+              <a:gd name="csY12" fmla="*/ 723900 h 731967"/>
+              <a:gd name="csX13" fmla="*/ 9357360 w 10183505"/>
+              <a:gd name="csY13" fmla="*/ 7620 h 731967"/>
+              <a:gd name="csX14" fmla="*/ 10081260 w 10183505"/>
+              <a:gd name="csY14" fmla="*/ 731520 h 731967"/>
+              <a:gd name="csX15" fmla="*/ 10094595 w 10183505"/>
+              <a:gd name="csY15" fmla="*/ 576262 h 731967"/>
+              <a:gd name="csX0" fmla="*/ 0 w 10176069"/>
+              <a:gd name="csY0" fmla="*/ 723900 h 731979"/>
+              <a:gd name="csX1" fmla="*/ 716280 w 10176069"/>
+              <a:gd name="csY1" fmla="*/ 0 h 731979"/>
+              <a:gd name="csX2" fmla="*/ 1440180 w 10176069"/>
+              <a:gd name="csY2" fmla="*/ 723900 h 731979"/>
+              <a:gd name="csX3" fmla="*/ 2156460 w 10176069"/>
+              <a:gd name="csY3" fmla="*/ 7620 h 731979"/>
+              <a:gd name="csX4" fmla="*/ 2880360 w 10176069"/>
+              <a:gd name="csY4" fmla="*/ 723900 h 731979"/>
+              <a:gd name="csX5" fmla="*/ 3604260 w 10176069"/>
+              <a:gd name="csY5" fmla="*/ 0 h 731979"/>
+              <a:gd name="csX6" fmla="*/ 4328160 w 10176069"/>
+              <a:gd name="csY6" fmla="*/ 723900 h 731979"/>
+              <a:gd name="csX7" fmla="*/ 5036820 w 10176069"/>
+              <a:gd name="csY7" fmla="*/ 0 h 731979"/>
+              <a:gd name="csX8" fmla="*/ 5753100 w 10176069"/>
+              <a:gd name="csY8" fmla="*/ 723900 h 731979"/>
+              <a:gd name="csX9" fmla="*/ 6477000 w 10176069"/>
+              <a:gd name="csY9" fmla="*/ 0 h 731979"/>
+              <a:gd name="csX10" fmla="*/ 7193280 w 10176069"/>
+              <a:gd name="csY10" fmla="*/ 723900 h 731979"/>
+              <a:gd name="csX11" fmla="*/ 7917180 w 10176069"/>
+              <a:gd name="csY11" fmla="*/ 7620 h 731979"/>
+              <a:gd name="csX12" fmla="*/ 8633460 w 10176069"/>
+              <a:gd name="csY12" fmla="*/ 723900 h 731979"/>
+              <a:gd name="csX13" fmla="*/ 9357360 w 10176069"/>
+              <a:gd name="csY13" fmla="*/ 7620 h 731979"/>
+              <a:gd name="csX14" fmla="*/ 10081260 w 10176069"/>
+              <a:gd name="csY14" fmla="*/ 731520 h 731979"/>
+              <a:gd name="csX15" fmla="*/ 10066020 w 10176069"/>
+              <a:gd name="csY15" fmla="*/ 581024 h 731979"/>
+              <a:gd name="csX0" fmla="*/ 0 w 10081260"/>
+              <a:gd name="csY0" fmla="*/ 723900 h 731520"/>
+              <a:gd name="csX1" fmla="*/ 716280 w 10081260"/>
+              <a:gd name="csY1" fmla="*/ 0 h 731520"/>
+              <a:gd name="csX2" fmla="*/ 1440180 w 10081260"/>
+              <a:gd name="csY2" fmla="*/ 723900 h 731520"/>
+              <a:gd name="csX3" fmla="*/ 2156460 w 10081260"/>
+              <a:gd name="csY3" fmla="*/ 7620 h 731520"/>
+              <a:gd name="csX4" fmla="*/ 2880360 w 10081260"/>
+              <a:gd name="csY4" fmla="*/ 723900 h 731520"/>
+              <a:gd name="csX5" fmla="*/ 3604260 w 10081260"/>
+              <a:gd name="csY5" fmla="*/ 0 h 731520"/>
+              <a:gd name="csX6" fmla="*/ 4328160 w 10081260"/>
+              <a:gd name="csY6" fmla="*/ 723900 h 731520"/>
+              <a:gd name="csX7" fmla="*/ 5036820 w 10081260"/>
+              <a:gd name="csY7" fmla="*/ 0 h 731520"/>
+              <a:gd name="csX8" fmla="*/ 5753100 w 10081260"/>
+              <a:gd name="csY8" fmla="*/ 723900 h 731520"/>
+              <a:gd name="csX9" fmla="*/ 6477000 w 10081260"/>
+              <a:gd name="csY9" fmla="*/ 0 h 731520"/>
+              <a:gd name="csX10" fmla="*/ 7193280 w 10081260"/>
+              <a:gd name="csY10" fmla="*/ 723900 h 731520"/>
+              <a:gd name="csX11" fmla="*/ 7917180 w 10081260"/>
+              <a:gd name="csY11" fmla="*/ 7620 h 731520"/>
+              <a:gd name="csX12" fmla="*/ 8633460 w 10081260"/>
+              <a:gd name="csY12" fmla="*/ 723900 h 731520"/>
+              <a:gd name="csX13" fmla="*/ 9357360 w 10081260"/>
+              <a:gd name="csY13" fmla="*/ 7620 h 731520"/>
+              <a:gd name="csX14" fmla="*/ 10081260 w 10081260"/>
+              <a:gd name="csY14" fmla="*/ 731520 h 731520"/>
+              <a:gd name="csX0" fmla="*/ 0 w 9364980"/>
+              <a:gd name="csY0" fmla="*/ 0 h 731520"/>
+              <a:gd name="csX1" fmla="*/ 723900 w 9364980"/>
+              <a:gd name="csY1" fmla="*/ 723900 h 731520"/>
+              <a:gd name="csX2" fmla="*/ 1440180 w 9364980"/>
+              <a:gd name="csY2" fmla="*/ 7620 h 731520"/>
+              <a:gd name="csX3" fmla="*/ 2164080 w 9364980"/>
+              <a:gd name="csY3" fmla="*/ 723900 h 731520"/>
+              <a:gd name="csX4" fmla="*/ 2887980 w 9364980"/>
+              <a:gd name="csY4" fmla="*/ 0 h 731520"/>
+              <a:gd name="csX5" fmla="*/ 3611880 w 9364980"/>
+              <a:gd name="csY5" fmla="*/ 723900 h 731520"/>
+              <a:gd name="csX6" fmla="*/ 4320540 w 9364980"/>
+              <a:gd name="csY6" fmla="*/ 0 h 731520"/>
+              <a:gd name="csX7" fmla="*/ 5036820 w 9364980"/>
+              <a:gd name="csY7" fmla="*/ 723900 h 731520"/>
+              <a:gd name="csX8" fmla="*/ 5760720 w 9364980"/>
+              <a:gd name="csY8" fmla="*/ 0 h 731520"/>
+              <a:gd name="csX9" fmla="*/ 6477000 w 9364980"/>
+              <a:gd name="csY9" fmla="*/ 723900 h 731520"/>
+              <a:gd name="csX10" fmla="*/ 7200900 w 9364980"/>
+              <a:gd name="csY10" fmla="*/ 7620 h 731520"/>
+              <a:gd name="csX11" fmla="*/ 7917180 w 9364980"/>
+              <a:gd name="csY11" fmla="*/ 723900 h 731520"/>
+              <a:gd name="csX12" fmla="*/ 8641080 w 9364980"/>
+              <a:gd name="csY12" fmla="*/ 7620 h 731520"/>
+              <a:gd name="csX13" fmla="*/ 9364980 w 9364980"/>
+              <a:gd name="csY13" fmla="*/ 731520 h 731520"/>
+              <a:gd name="csX0" fmla="*/ 0 w 9364980"/>
+              <a:gd name="csY0" fmla="*/ 0 h 731520"/>
+              <a:gd name="csX1" fmla="*/ 723900 w 9364980"/>
+              <a:gd name="csY1" fmla="*/ 723900 h 731520"/>
+              <a:gd name="csX2" fmla="*/ 1440180 w 9364980"/>
+              <a:gd name="csY2" fmla="*/ 7620 h 731520"/>
+              <a:gd name="csX3" fmla="*/ 2164080 w 9364980"/>
+              <a:gd name="csY3" fmla="*/ 723900 h 731520"/>
+              <a:gd name="csX4" fmla="*/ 2887980 w 9364980"/>
+              <a:gd name="csY4" fmla="*/ 0 h 731520"/>
+              <a:gd name="csX5" fmla="*/ 3611880 w 9364980"/>
+              <a:gd name="csY5" fmla="*/ 723900 h 731520"/>
+              <a:gd name="csX6" fmla="*/ 4320540 w 9364980"/>
+              <a:gd name="csY6" fmla="*/ 0 h 731520"/>
+              <a:gd name="csX7" fmla="*/ 5036820 w 9364980"/>
+              <a:gd name="csY7" fmla="*/ 723900 h 731520"/>
+              <a:gd name="csX8" fmla="*/ 5760720 w 9364980"/>
+              <a:gd name="csY8" fmla="*/ 0 h 731520"/>
+              <a:gd name="csX9" fmla="*/ 6477000 w 9364980"/>
+              <a:gd name="csY9" fmla="*/ 723900 h 731520"/>
+              <a:gd name="csX10" fmla="*/ 7200900 w 9364980"/>
+              <a:gd name="csY10" fmla="*/ 7620 h 731520"/>
+              <a:gd name="csX11" fmla="*/ 7917180 w 9364980"/>
+              <a:gd name="csY11" fmla="*/ 723900 h 731520"/>
+              <a:gd name="csX12" fmla="*/ 8641080 w 9364980"/>
+              <a:gd name="csY12" fmla="*/ 7620 h 731520"/>
+              <a:gd name="csX13" fmla="*/ 9364980 w 9364980"/>
+              <a:gd name="csY13" fmla="*/ 731520 h 731520"/>
+              <a:gd name="csX0" fmla="*/ 0 w 9364980"/>
+              <a:gd name="csY0" fmla="*/ 0 h 731520"/>
+              <a:gd name="csX1" fmla="*/ 723900 w 9364980"/>
+              <a:gd name="csY1" fmla="*/ 723900 h 731520"/>
+              <a:gd name="csX2" fmla="*/ 1440180 w 9364980"/>
+              <a:gd name="csY2" fmla="*/ 7620 h 731520"/>
+              <a:gd name="csX3" fmla="*/ 2164080 w 9364980"/>
+              <a:gd name="csY3" fmla="*/ 723900 h 731520"/>
+              <a:gd name="csX4" fmla="*/ 2887980 w 9364980"/>
+              <a:gd name="csY4" fmla="*/ 0 h 731520"/>
+              <a:gd name="csX5" fmla="*/ 3611880 w 9364980"/>
+              <a:gd name="csY5" fmla="*/ 723900 h 731520"/>
+              <a:gd name="csX6" fmla="*/ 4320540 w 9364980"/>
+              <a:gd name="csY6" fmla="*/ 0 h 731520"/>
+              <a:gd name="csX7" fmla="*/ 5036820 w 9364980"/>
+              <a:gd name="csY7" fmla="*/ 723900 h 731520"/>
+              <a:gd name="csX8" fmla="*/ 5760720 w 9364980"/>
+              <a:gd name="csY8" fmla="*/ 0 h 731520"/>
+              <a:gd name="csX9" fmla="*/ 6477000 w 9364980"/>
+              <a:gd name="csY9" fmla="*/ 723900 h 731520"/>
+              <a:gd name="csX10" fmla="*/ 7200900 w 9364980"/>
+              <a:gd name="csY10" fmla="*/ 7620 h 731520"/>
+              <a:gd name="csX11" fmla="*/ 7917180 w 9364980"/>
+              <a:gd name="csY11" fmla="*/ 723900 h 731520"/>
+              <a:gd name="csX12" fmla="*/ 8641080 w 9364980"/>
+              <a:gd name="csY12" fmla="*/ 7620 h 731520"/>
+              <a:gd name="csX13" fmla="*/ 9364980 w 9364980"/>
+              <a:gd name="csY13" fmla="*/ 731520 h 731520"/>
+              <a:gd name="csX0" fmla="*/ 0 w 9364980"/>
+              <a:gd name="csY0" fmla="*/ 0 h 731520"/>
+              <a:gd name="csX1" fmla="*/ 723900 w 9364980"/>
+              <a:gd name="csY1" fmla="*/ 723900 h 731520"/>
+              <a:gd name="csX2" fmla="*/ 1440180 w 9364980"/>
+              <a:gd name="csY2" fmla="*/ 7620 h 731520"/>
+              <a:gd name="csX3" fmla="*/ 2164080 w 9364980"/>
+              <a:gd name="csY3" fmla="*/ 723900 h 731520"/>
+              <a:gd name="csX4" fmla="*/ 2887980 w 9364980"/>
+              <a:gd name="csY4" fmla="*/ 0 h 731520"/>
+              <a:gd name="csX5" fmla="*/ 3611880 w 9364980"/>
+              <a:gd name="csY5" fmla="*/ 723900 h 731520"/>
+              <a:gd name="csX6" fmla="*/ 4320540 w 9364980"/>
+              <a:gd name="csY6" fmla="*/ 0 h 731520"/>
+              <a:gd name="csX7" fmla="*/ 5036820 w 9364980"/>
+              <a:gd name="csY7" fmla="*/ 723900 h 731520"/>
+              <a:gd name="csX8" fmla="*/ 5760720 w 9364980"/>
+              <a:gd name="csY8" fmla="*/ 0 h 731520"/>
+              <a:gd name="csX9" fmla="*/ 6477000 w 9364980"/>
+              <a:gd name="csY9" fmla="*/ 723900 h 731520"/>
+              <a:gd name="csX10" fmla="*/ 7200900 w 9364980"/>
+              <a:gd name="csY10" fmla="*/ 7620 h 731520"/>
+              <a:gd name="csX11" fmla="*/ 7917180 w 9364980"/>
+              <a:gd name="csY11" fmla="*/ 723900 h 731520"/>
+              <a:gd name="csX12" fmla="*/ 8641080 w 9364980"/>
+              <a:gd name="csY12" fmla="*/ 7620 h 731520"/>
+              <a:gd name="csX13" fmla="*/ 9364980 w 9364980"/>
+              <a:gd name="csY13" fmla="*/ 731520 h 731520"/>
+              <a:gd name="csX0" fmla="*/ 0 w 9364980"/>
+              <a:gd name="csY0" fmla="*/ 0 h 731520"/>
+              <a:gd name="csX1" fmla="*/ 723900 w 9364980"/>
+              <a:gd name="csY1" fmla="*/ 723900 h 731520"/>
+              <a:gd name="csX2" fmla="*/ 1440180 w 9364980"/>
+              <a:gd name="csY2" fmla="*/ 7620 h 731520"/>
+              <a:gd name="csX3" fmla="*/ 2164080 w 9364980"/>
+              <a:gd name="csY3" fmla="*/ 723900 h 731520"/>
+              <a:gd name="csX4" fmla="*/ 2887980 w 9364980"/>
+              <a:gd name="csY4" fmla="*/ 0 h 731520"/>
+              <a:gd name="csX5" fmla="*/ 3611880 w 9364980"/>
+              <a:gd name="csY5" fmla="*/ 723900 h 731520"/>
+              <a:gd name="csX6" fmla="*/ 4320540 w 9364980"/>
+              <a:gd name="csY6" fmla="*/ 0 h 731520"/>
+              <a:gd name="csX7" fmla="*/ 5036820 w 9364980"/>
+              <a:gd name="csY7" fmla="*/ 723900 h 731520"/>
+              <a:gd name="csX8" fmla="*/ 5760720 w 9364980"/>
+              <a:gd name="csY8" fmla="*/ 0 h 731520"/>
+              <a:gd name="csX9" fmla="*/ 6477000 w 9364980"/>
+              <a:gd name="csY9" fmla="*/ 723900 h 731520"/>
+              <a:gd name="csX10" fmla="*/ 7200900 w 9364980"/>
+              <a:gd name="csY10" fmla="*/ 7620 h 731520"/>
+              <a:gd name="csX11" fmla="*/ 7917180 w 9364980"/>
+              <a:gd name="csY11" fmla="*/ 723900 h 731520"/>
+              <a:gd name="csX12" fmla="*/ 8641080 w 9364980"/>
+              <a:gd name="csY12" fmla="*/ 7620 h 731520"/>
+              <a:gd name="csX13" fmla="*/ 9364980 w 9364980"/>
+              <a:gd name="csY13" fmla="*/ 731520 h 731520"/>
+            </a:gdLst>
+            <a:ahLst/>
+            <a:cxnLst>
+              <a:cxn ang="0">
+                <a:pos x="csX0" y="csY0"/>
+              </a:cxn>
+              <a:cxn ang="0">
+                <a:pos x="csX1" y="csY1"/>
+              </a:cxn>
+              <a:cxn ang="0">
+                <a:pos x="csX2" y="csY2"/>
+              </a:cxn>
+              <a:cxn ang="0">
+                <a:pos x="csX3" y="csY3"/>
+              </a:cxn>
+              <a:cxn ang="0">
+                <a:pos x="csX4" y="csY4"/>
+              </a:cxn>
+              <a:cxn ang="0">
+                <a:pos x="csX5" y="csY5"/>
+              </a:cxn>
+              <a:cxn ang="0">
+                <a:pos x="csX6" y="csY6"/>
+              </a:cxn>
+              <a:cxn ang="0">
+                <a:pos x="csX7" y="csY7"/>
+              </a:cxn>
+              <a:cxn ang="0">
+                <a:pos x="csX8" y="csY8"/>
+              </a:cxn>
+              <a:cxn ang="0">
+                <a:pos x="csX9" y="csY9"/>
+              </a:cxn>
+              <a:cxn ang="0">
+                <a:pos x="csX10" y="csY10"/>
+              </a:cxn>
+              <a:cxn ang="0">
+                <a:pos x="csX11" y="csY11"/>
+              </a:cxn>
+              <a:cxn ang="0">
+                <a:pos x="csX12" y="csY12"/>
+              </a:cxn>
+              <a:cxn ang="0">
+                <a:pos x="csX13" y="csY13"/>
+              </a:cxn>
+            </a:cxnLst>
+            <a:rect l="l" t="t" r="r" b="b"/>
+            <a:pathLst>
+              <a:path w="9364980" h="731520">
+                <a:moveTo>
+                  <a:pt x="0" y="0"/>
+                </a:moveTo>
+                <a:cubicBezTo>
+                  <a:pt x="240030" y="0"/>
+                  <a:pt x="483870" y="722630"/>
+                  <a:pt x="723900" y="723900"/>
+                </a:cubicBezTo>
+                <a:cubicBezTo>
+                  <a:pt x="963930" y="725170"/>
+                  <a:pt x="1200150" y="7620"/>
+                  <a:pt x="1440180" y="7620"/>
+                </a:cubicBezTo>
+                <a:cubicBezTo>
+                  <a:pt x="1680210" y="7620"/>
+                  <a:pt x="1922780" y="725170"/>
+                  <a:pt x="2164080" y="723900"/>
+                </a:cubicBezTo>
+                <a:cubicBezTo>
+                  <a:pt x="2405380" y="722630"/>
+                  <a:pt x="2646680" y="0"/>
+                  <a:pt x="2887980" y="0"/>
+                </a:cubicBezTo>
+                <a:cubicBezTo>
+                  <a:pt x="3129280" y="0"/>
+                  <a:pt x="3373120" y="723900"/>
+                  <a:pt x="3611880" y="723900"/>
+                </a:cubicBezTo>
+                <a:cubicBezTo>
+                  <a:pt x="3850640" y="723900"/>
+                  <a:pt x="4083050" y="0"/>
+                  <a:pt x="4320540" y="0"/>
+                </a:cubicBezTo>
+                <a:cubicBezTo>
+                  <a:pt x="4558030" y="0"/>
+                  <a:pt x="4796790" y="723900"/>
+                  <a:pt x="5036820" y="723900"/>
+                </a:cubicBezTo>
+                <a:cubicBezTo>
+                  <a:pt x="5276850" y="723900"/>
+                  <a:pt x="5520690" y="0"/>
+                  <a:pt x="5760720" y="0"/>
+                </a:cubicBezTo>
+                <a:cubicBezTo>
+                  <a:pt x="6000750" y="0"/>
+                  <a:pt x="6236970" y="722630"/>
+                  <a:pt x="6477000" y="723900"/>
+                </a:cubicBezTo>
+                <a:cubicBezTo>
+                  <a:pt x="6717030" y="725170"/>
+                  <a:pt x="6960870" y="7620"/>
+                  <a:pt x="7200900" y="7620"/>
+                </a:cubicBezTo>
+                <a:cubicBezTo>
+                  <a:pt x="7440930" y="7620"/>
+                  <a:pt x="7677150" y="723900"/>
+                  <a:pt x="7917180" y="723900"/>
+                </a:cubicBezTo>
+                <a:cubicBezTo>
+                  <a:pt x="8157210" y="723900"/>
+                  <a:pt x="8399780" y="6350"/>
+                  <a:pt x="8641080" y="7620"/>
+                </a:cubicBezTo>
+                <a:cubicBezTo>
+                  <a:pt x="8882380" y="8890"/>
+                  <a:pt x="9144000" y="721360"/>
+                  <a:pt x="9364980" y="731520"/>
+                </a:cubicBezTo>
+              </a:path>
+            </a:pathLst>
+          </a:custGeom>
+          <a:noFill/>
+          <a:ln w="57150">
+            <a:solidFill>
+              <a:schemeClr val="accent1">
+                <a:shade val="15000"/>
+              </a:schemeClr>
+            </a:solidFill>
+          </a:ln>
+          <a:effectLst>
+            <a:outerShdw dist="165100" dir="5400000" algn="t" rotWithShape="0">
+              <a:schemeClr val="tx2"/>
+            </a:outerShdw>
+          </a:effectLst>
+        </p:spPr>
+        <p:style>
+          <a:lnRef idx="2">
+            <a:schemeClr val="accent1">
+              <a:shade val="15000"/>
+            </a:schemeClr>
+          </a:lnRef>
+          <a:fillRef idx="1">
+            <a:schemeClr val="accent1"/>
+          </a:fillRef>
+          <a:effectRef idx="0">
+            <a:schemeClr val="accent1"/>
+          </a:effectRef>
+          <a:fontRef idx="minor">
+            <a:schemeClr val="lt1"/>
+          </a:fontRef>
+        </p:style>
+        <p:txBody>
+          <a:bodyPr rtlCol="0" anchor="ctr"/>
+          <a:lstStyle/>
+          <a:p>
+            <a:pPr algn="ctr"/>
+            <a:endParaRPr kumimoji="1" lang="ja-JP" altLang="en-US" dirty="0"/>
+          </a:p>
+        </p:txBody>
+      </p:sp>
+    </p:spTree>
+    <p:extLst>
+      <p:ext uri="{BB962C8B-B14F-4D97-AF65-F5344CB8AC3E}">
+        <p14:creationId xmlns:p14="http://schemas.microsoft.com/office/powerpoint/2010/main" val="3211206668"/>
+      </p:ext>
+    </p:extLst>
+  </p:cSld>
+  <p:clrMapOvr>
+    <a:masterClrMapping/>
+  </p:clrMapOvr>
+</p:sld>
+</file>
+
 <file path=ppt/slides/slide2.xml><?xml version="1.0" encoding="utf-8"?>
 <p:sld xmlns:a="http://schemas.openxmlformats.org/drawingml/2006/main" xmlns:r="http://schemas.openxmlformats.org/officeDocument/2006/relationships" xmlns:p="http://schemas.openxmlformats.org/presentationml/2006/main" show="0">
   <p:cSld>
@@ -11009,6 +15509,1666 @@
 </p:sld>
 </file>
 
+<file path=ppt/slides/slide9.xml><?xml version="1.0" encoding="utf-8"?>
+<p:sld xmlns:a="http://schemas.openxmlformats.org/drawingml/2006/main" xmlns:r="http://schemas.openxmlformats.org/officeDocument/2006/relationships" xmlns:p="http://schemas.openxmlformats.org/presentationml/2006/main">
+  <p:cSld>
+    <p:spTree>
+      <p:nvGrpSpPr>
+        <p:cNvPr id="1" name=""/>
+        <p:cNvGrpSpPr/>
+        <p:nvPr/>
+      </p:nvGrpSpPr>
+      <p:grpSpPr>
+        <a:xfrm>
+          <a:off x="0" y="0"/>
+          <a:ext cx="0" cy="0"/>
+          <a:chOff x="0" y="0"/>
+          <a:chExt cx="0" cy="0"/>
+        </a:xfrm>
+      </p:grpSpPr>
+      <p:grpSp>
+        <p:nvGrpSpPr>
+          <p:cNvPr id="4" name="グループ化 3">
+            <a:extLst>
+              <a:ext uri="{FF2B5EF4-FFF2-40B4-BE49-F238E27FC236}">
+                <a16:creationId xmlns:a16="http://schemas.microsoft.com/office/drawing/2014/main" id="{D34AD894-73F6-D0BE-9775-55BC5794939C}"/>
+              </a:ext>
+            </a:extLst>
+          </p:cNvPr>
+          <p:cNvGrpSpPr/>
+          <p:nvPr/>
+        </p:nvGrpSpPr>
+        <p:grpSpPr>
+          <a:xfrm>
+            <a:off x="800425" y="-4440877"/>
+            <a:ext cx="11210374" cy="15739754"/>
+            <a:chOff x="0" y="292551"/>
+            <a:chExt cx="11615187" cy="13120379"/>
+          </a:xfrm>
+        </p:grpSpPr>
+        <p:sp>
+          <p:nvSpPr>
+            <p:cNvPr id="28" name="正方形/長方形 27">
+              <a:extLst>
+                <a:ext uri="{FF2B5EF4-FFF2-40B4-BE49-F238E27FC236}">
+                  <a16:creationId xmlns:a16="http://schemas.microsoft.com/office/drawing/2014/main" id="{82EFC521-04B3-A544-B2A4-7B412D68067E}"/>
+                </a:ext>
+              </a:extLst>
+            </p:cNvPr>
+            <p:cNvSpPr/>
+            <p:nvPr/>
+          </p:nvSpPr>
+          <p:spPr>
+            <a:xfrm>
+              <a:off x="0" y="292551"/>
+              <a:ext cx="11615187" cy="13120379"/>
+            </a:xfrm>
+            <a:prstGeom prst="rect">
+              <a:avLst/>
+            </a:prstGeom>
+            <a:ln>
+              <a:noFill/>
+            </a:ln>
+          </p:spPr>
+          <p:style>
+            <a:lnRef idx="2">
+              <a:schemeClr val="dk1"/>
+            </a:lnRef>
+            <a:fillRef idx="1">
+              <a:schemeClr val="lt1"/>
+            </a:fillRef>
+            <a:effectRef idx="0">
+              <a:schemeClr val="dk1"/>
+            </a:effectRef>
+            <a:fontRef idx="minor">
+              <a:schemeClr val="dk1"/>
+            </a:fontRef>
+          </p:style>
+          <p:txBody>
+            <a:bodyPr wrap="square" rtlCol="0" anchor="ctr"/>
+            <a:lstStyle>
+              <a:defPPr>
+                <a:defRPr lang="ja-JP"/>
+              </a:defPPr>
+              <a:lvl1pPr marL="0" indent="0" algn="l" defTabSz="914400" rtl="0" eaLnBrk="1" latinLnBrk="0" hangingPunct="1">
+                <a:defRPr kumimoji="1" sz="1800" kern="1200">
+                  <a:solidFill>
+                    <a:schemeClr val="dk1"/>
+                  </a:solidFill>
+                  <a:latin typeface="+mn-lt"/>
+                  <a:ea typeface="+mn-ea"/>
+                  <a:cs typeface="+mn-cs"/>
+                </a:defRPr>
+              </a:lvl1pPr>
+              <a:lvl2pPr marL="457200" indent="0" algn="l" defTabSz="914400" rtl="0" eaLnBrk="1" latinLnBrk="0" hangingPunct="1">
+                <a:defRPr kumimoji="1" sz="1800" kern="1200">
+                  <a:solidFill>
+                    <a:schemeClr val="dk1"/>
+                  </a:solidFill>
+                  <a:latin typeface="+mn-lt"/>
+                  <a:ea typeface="+mn-ea"/>
+                  <a:cs typeface="+mn-cs"/>
+                </a:defRPr>
+              </a:lvl2pPr>
+              <a:lvl3pPr marL="914400" indent="0" algn="l" defTabSz="914400" rtl="0" eaLnBrk="1" latinLnBrk="0" hangingPunct="1">
+                <a:defRPr kumimoji="1" sz="1800" kern="1200">
+                  <a:solidFill>
+                    <a:schemeClr val="dk1"/>
+                  </a:solidFill>
+                  <a:latin typeface="+mn-lt"/>
+                  <a:ea typeface="+mn-ea"/>
+                  <a:cs typeface="+mn-cs"/>
+                </a:defRPr>
+              </a:lvl3pPr>
+              <a:lvl4pPr marL="1371600" indent="0" algn="l" defTabSz="914400" rtl="0" eaLnBrk="1" latinLnBrk="0" hangingPunct="1">
+                <a:defRPr kumimoji="1" sz="1800" kern="1200">
+                  <a:solidFill>
+                    <a:schemeClr val="dk1"/>
+                  </a:solidFill>
+                  <a:latin typeface="+mn-lt"/>
+                  <a:ea typeface="+mn-ea"/>
+                  <a:cs typeface="+mn-cs"/>
+                </a:defRPr>
+              </a:lvl4pPr>
+              <a:lvl5pPr marL="1828800" indent="0" algn="l" defTabSz="914400" rtl="0" eaLnBrk="1" latinLnBrk="0" hangingPunct="1">
+                <a:defRPr kumimoji="1" sz="1800" kern="1200">
+                  <a:solidFill>
+                    <a:schemeClr val="dk1"/>
+                  </a:solidFill>
+                  <a:latin typeface="+mn-lt"/>
+                  <a:ea typeface="+mn-ea"/>
+                  <a:cs typeface="+mn-cs"/>
+                </a:defRPr>
+              </a:lvl5pPr>
+              <a:lvl6pPr marL="2286000" indent="0" algn="l" defTabSz="914400" rtl="0" eaLnBrk="1" latinLnBrk="0" hangingPunct="1">
+                <a:defRPr kumimoji="1" sz="1800" kern="1200">
+                  <a:solidFill>
+                    <a:schemeClr val="dk1"/>
+                  </a:solidFill>
+                  <a:latin typeface="+mn-lt"/>
+                  <a:ea typeface="+mn-ea"/>
+                  <a:cs typeface="+mn-cs"/>
+                </a:defRPr>
+              </a:lvl6pPr>
+              <a:lvl7pPr marL="2743200" indent="0" algn="l" defTabSz="914400" rtl="0" eaLnBrk="1" latinLnBrk="0" hangingPunct="1">
+                <a:defRPr kumimoji="1" sz="1800" kern="1200">
+                  <a:solidFill>
+                    <a:schemeClr val="dk1"/>
+                  </a:solidFill>
+                  <a:latin typeface="+mn-lt"/>
+                  <a:ea typeface="+mn-ea"/>
+                  <a:cs typeface="+mn-cs"/>
+                </a:defRPr>
+              </a:lvl7pPr>
+              <a:lvl8pPr marL="3200400" indent="0" algn="l" defTabSz="914400" rtl="0" eaLnBrk="1" latinLnBrk="0" hangingPunct="1">
+                <a:defRPr kumimoji="1" sz="1800" kern="1200">
+                  <a:solidFill>
+                    <a:schemeClr val="dk1"/>
+                  </a:solidFill>
+                  <a:latin typeface="+mn-lt"/>
+                  <a:ea typeface="+mn-ea"/>
+                  <a:cs typeface="+mn-cs"/>
+                </a:defRPr>
+              </a:lvl8pPr>
+              <a:lvl9pPr marL="3657600" indent="0" algn="l" defTabSz="914400" rtl="0" eaLnBrk="1" latinLnBrk="0" hangingPunct="1">
+                <a:defRPr kumimoji="1" sz="1800" kern="1200">
+                  <a:solidFill>
+                    <a:schemeClr val="dk1"/>
+                  </a:solidFill>
+                  <a:latin typeface="+mn-lt"/>
+                  <a:ea typeface="+mn-ea"/>
+                  <a:cs typeface="+mn-cs"/>
+                </a:defRPr>
+              </a:lvl9pPr>
+            </a:lstStyle>
+            <a:p>
+              <a:pPr algn="ctr"/>
+              <a:endParaRPr kumimoji="1" lang="ja-JP" altLang="en-US"/>
+            </a:p>
+          </p:txBody>
+        </p:sp>
+        <p:grpSp>
+          <p:nvGrpSpPr>
+            <p:cNvPr id="29" name="グループ化 28">
+              <a:extLst>
+                <a:ext uri="{FF2B5EF4-FFF2-40B4-BE49-F238E27FC236}">
+                  <a16:creationId xmlns:a16="http://schemas.microsoft.com/office/drawing/2014/main" id="{E6105164-CEE3-8735-000F-E6787D601891}"/>
+                </a:ext>
+              </a:extLst>
+            </p:cNvPr>
+            <p:cNvGrpSpPr/>
+            <p:nvPr/>
+          </p:nvGrpSpPr>
+          <p:grpSpPr>
+            <a:xfrm>
+              <a:off x="1461406" y="852684"/>
+              <a:ext cx="8749542" cy="12248694"/>
+              <a:chOff x="1461406" y="852684"/>
+              <a:chExt cx="10601325" cy="14944725"/>
+            </a:xfrm>
+          </p:grpSpPr>
+          <p:pic>
+            <p:nvPicPr>
+              <p:cNvPr id="43" name="図 42">
+                <a:extLst>
+                  <a:ext uri="{FF2B5EF4-FFF2-40B4-BE49-F238E27FC236}">
+                    <a16:creationId xmlns:a16="http://schemas.microsoft.com/office/drawing/2014/main" id="{6386A049-800B-303C-8321-70665D467BA7}"/>
+                  </a:ext>
+                </a:extLst>
+              </p:cNvPr>
+              <p:cNvPicPr>
+                <a:picLocks noChangeAspect="1"/>
+              </p:cNvPicPr>
+              <p:nvPr/>
+            </p:nvPicPr>
+            <p:blipFill rotWithShape="1">
+              <a:blip r:embed="rId2">
+                <a:alphaModFix/>
+              </a:blip>
+              <a:srcRect l="3250" t="13128" r="4513"/>
+              <a:stretch>
+                <a:fillRect/>
+              </a:stretch>
+            </p:blipFill>
+            <p:spPr>
+              <a:xfrm>
+                <a:off x="1461406" y="852684"/>
+                <a:ext cx="10544175" cy="7564017"/>
+              </a:xfrm>
+              <a:prstGeom prst="rect">
+                <a:avLst/>
+              </a:prstGeom>
+            </p:spPr>
+          </p:pic>
+          <p:pic>
+            <p:nvPicPr>
+              <p:cNvPr id="44" name="図 43">
+                <a:extLst>
+                  <a:ext uri="{FF2B5EF4-FFF2-40B4-BE49-F238E27FC236}">
+                    <a16:creationId xmlns:a16="http://schemas.microsoft.com/office/drawing/2014/main" id="{B46A3AEA-0088-3F49-C5A2-2D610BACF850}"/>
+                  </a:ext>
+                </a:extLst>
+              </p:cNvPr>
+              <p:cNvPicPr>
+                <a:picLocks noChangeAspect="1"/>
+              </p:cNvPicPr>
+              <p:nvPr/>
+            </p:nvPicPr>
+            <p:blipFill rotWithShape="1">
+              <a:blip r:embed="rId3">
+                <a:alphaModFix/>
+              </a:blip>
+              <a:srcRect l="5255" t="15043" r="6156"/>
+              <a:stretch>
+                <a:fillRect/>
+              </a:stretch>
+            </p:blipFill>
+            <p:spPr>
+              <a:xfrm>
+                <a:off x="1556656" y="6706749"/>
+                <a:ext cx="10439400" cy="7299923"/>
+              </a:xfrm>
+              <a:prstGeom prst="rect">
+                <a:avLst/>
+              </a:prstGeom>
+            </p:spPr>
+          </p:pic>
+          <p:pic>
+            <p:nvPicPr>
+              <p:cNvPr id="45" name="図 44">
+                <a:extLst>
+                  <a:ext uri="{FF2B5EF4-FFF2-40B4-BE49-F238E27FC236}">
+                    <a16:creationId xmlns:a16="http://schemas.microsoft.com/office/drawing/2014/main" id="{E415B419-0472-861A-0E05-E2E5FA0C8931}"/>
+                  </a:ext>
+                </a:extLst>
+              </p:cNvPr>
+              <p:cNvPicPr>
+                <a:picLocks noChangeAspect="1"/>
+              </p:cNvPicPr>
+              <p:nvPr/>
+            </p:nvPicPr>
+            <p:blipFill rotWithShape="1">
+              <a:blip r:embed="rId4">
+                <a:alphaModFix/>
+              </a:blip>
+              <a:srcRect l="6479" t="14685" r="1118" b="4147"/>
+              <a:stretch>
+                <a:fillRect/>
+              </a:stretch>
+            </p:blipFill>
+            <p:spPr>
+              <a:xfrm>
+                <a:off x="1499506" y="10980141"/>
+                <a:ext cx="10563225" cy="4817268"/>
+              </a:xfrm>
+              <a:prstGeom prst="rect">
+                <a:avLst/>
+              </a:prstGeom>
+            </p:spPr>
+          </p:pic>
+        </p:grpSp>
+        <p:grpSp>
+          <p:nvGrpSpPr>
+            <p:cNvPr id="30" name="グループ化 29">
+              <a:extLst>
+                <a:ext uri="{FF2B5EF4-FFF2-40B4-BE49-F238E27FC236}">
+                  <a16:creationId xmlns:a16="http://schemas.microsoft.com/office/drawing/2014/main" id="{D6271005-8921-50A2-0D01-7789575A2374}"/>
+                </a:ext>
+              </a:extLst>
+            </p:cNvPr>
+            <p:cNvGrpSpPr/>
+            <p:nvPr/>
+          </p:nvGrpSpPr>
+          <p:grpSpPr>
+            <a:xfrm>
+              <a:off x="1490601" y="1205473"/>
+              <a:ext cx="8519813" cy="11694801"/>
+              <a:chOff x="1490601" y="1205472"/>
+              <a:chExt cx="8725065" cy="10223473"/>
+            </a:xfrm>
+          </p:grpSpPr>
+          <p:sp>
+            <p:nvSpPr>
+              <p:cNvPr id="33" name="正方形/長方形 32">
+                <a:extLst>
+                  <a:ext uri="{FF2B5EF4-FFF2-40B4-BE49-F238E27FC236}">
+                    <a16:creationId xmlns:a16="http://schemas.microsoft.com/office/drawing/2014/main" id="{3B945DF4-4807-DD83-FE6D-A22E020EA53E}"/>
+                  </a:ext>
+                </a:extLst>
+              </p:cNvPr>
+              <p:cNvSpPr/>
+              <p:nvPr/>
+            </p:nvSpPr>
+            <p:spPr>
+              <a:xfrm>
+                <a:off x="1490601" y="1243188"/>
+                <a:ext cx="2578686" cy="357256"/>
+              </a:xfrm>
+              <a:prstGeom prst="rect">
+                <a:avLst/>
+              </a:prstGeom>
+              <a:noFill/>
+              <a:ln w="28575">
+                <a:solidFill>
+                  <a:srgbClr val="FF0000"/>
+                </a:solidFill>
+                <a:prstDash val="solid"/>
+              </a:ln>
+            </p:spPr>
+            <p:style>
+              <a:lnRef idx="2">
+                <a:schemeClr val="accent6"/>
+              </a:lnRef>
+              <a:fillRef idx="1">
+                <a:schemeClr val="lt1"/>
+              </a:fillRef>
+              <a:effectRef idx="0">
+                <a:schemeClr val="accent6"/>
+              </a:effectRef>
+              <a:fontRef idx="minor">
+                <a:schemeClr val="dk1"/>
+              </a:fontRef>
+            </p:style>
+            <p:txBody>
+              <a:bodyPr rtlCol="0" anchor="t"/>
+              <a:lstStyle>
+                <a:lvl1pPr marL="0" indent="0">
+                  <a:defRPr sz="1100">
+                    <a:solidFill>
+                      <a:schemeClr val="dk1"/>
+                    </a:solidFill>
+                    <a:latin typeface="+mn-lt"/>
+                    <a:ea typeface="+mn-ea"/>
+                    <a:cs typeface="+mn-cs"/>
+                  </a:defRPr>
+                </a:lvl1pPr>
+                <a:lvl2pPr marL="457200" indent="0">
+                  <a:defRPr sz="1100">
+                    <a:solidFill>
+                      <a:schemeClr val="dk1"/>
+                    </a:solidFill>
+                    <a:latin typeface="+mn-lt"/>
+                    <a:ea typeface="+mn-ea"/>
+                    <a:cs typeface="+mn-cs"/>
+                  </a:defRPr>
+                </a:lvl2pPr>
+                <a:lvl3pPr marL="914400" indent="0">
+                  <a:defRPr sz="1100">
+                    <a:solidFill>
+                      <a:schemeClr val="dk1"/>
+                    </a:solidFill>
+                    <a:latin typeface="+mn-lt"/>
+                    <a:ea typeface="+mn-ea"/>
+                    <a:cs typeface="+mn-cs"/>
+                  </a:defRPr>
+                </a:lvl3pPr>
+                <a:lvl4pPr marL="1371600" indent="0">
+                  <a:defRPr sz="1100">
+                    <a:solidFill>
+                      <a:schemeClr val="dk1"/>
+                    </a:solidFill>
+                    <a:latin typeface="+mn-lt"/>
+                    <a:ea typeface="+mn-ea"/>
+                    <a:cs typeface="+mn-cs"/>
+                  </a:defRPr>
+                </a:lvl4pPr>
+                <a:lvl5pPr marL="1828800" indent="0">
+                  <a:defRPr sz="1100">
+                    <a:solidFill>
+                      <a:schemeClr val="dk1"/>
+                    </a:solidFill>
+                    <a:latin typeface="+mn-lt"/>
+                    <a:ea typeface="+mn-ea"/>
+                    <a:cs typeface="+mn-cs"/>
+                  </a:defRPr>
+                </a:lvl5pPr>
+                <a:lvl6pPr marL="2286000" indent="0">
+                  <a:defRPr sz="1100">
+                    <a:solidFill>
+                      <a:schemeClr val="dk1"/>
+                    </a:solidFill>
+                    <a:latin typeface="+mn-lt"/>
+                    <a:ea typeface="+mn-ea"/>
+                    <a:cs typeface="+mn-cs"/>
+                  </a:defRPr>
+                </a:lvl6pPr>
+                <a:lvl7pPr marL="2743200" indent="0">
+                  <a:defRPr sz="1100">
+                    <a:solidFill>
+                      <a:schemeClr val="dk1"/>
+                    </a:solidFill>
+                    <a:latin typeface="+mn-lt"/>
+                    <a:ea typeface="+mn-ea"/>
+                    <a:cs typeface="+mn-cs"/>
+                  </a:defRPr>
+                </a:lvl7pPr>
+                <a:lvl8pPr marL="3200400" indent="0">
+                  <a:defRPr sz="1100">
+                    <a:solidFill>
+                      <a:schemeClr val="dk1"/>
+                    </a:solidFill>
+                    <a:latin typeface="+mn-lt"/>
+                    <a:ea typeface="+mn-ea"/>
+                    <a:cs typeface="+mn-cs"/>
+                  </a:defRPr>
+                </a:lvl8pPr>
+                <a:lvl9pPr marL="3657600" indent="0">
+                  <a:defRPr sz="1100">
+                    <a:solidFill>
+                      <a:schemeClr val="dk1"/>
+                    </a:solidFill>
+                    <a:latin typeface="+mn-lt"/>
+                    <a:ea typeface="+mn-ea"/>
+                    <a:cs typeface="+mn-cs"/>
+                  </a:defRPr>
+                </a:lvl9pPr>
+              </a:lstStyle>
+              <a:p>
+                <a:pPr algn="l"/>
+                <a:endParaRPr kumimoji="1" lang="ja-JP" altLang="en-US" sz="1100"/>
+              </a:p>
+            </p:txBody>
+          </p:sp>
+          <p:sp>
+            <p:nvSpPr>
+              <p:cNvPr id="34" name="正方形/長方形 33">
+                <a:extLst>
+                  <a:ext uri="{FF2B5EF4-FFF2-40B4-BE49-F238E27FC236}">
+                    <a16:creationId xmlns:a16="http://schemas.microsoft.com/office/drawing/2014/main" id="{8DAE86F7-ED40-C142-4AD4-A28F50B75186}"/>
+                  </a:ext>
+                </a:extLst>
+              </p:cNvPr>
+              <p:cNvSpPr/>
+              <p:nvPr/>
+            </p:nvSpPr>
+            <p:spPr>
+              <a:xfrm>
+                <a:off x="1706733" y="2219182"/>
+                <a:ext cx="8508933" cy="1805236"/>
+              </a:xfrm>
+              <a:prstGeom prst="rect">
+                <a:avLst/>
+              </a:prstGeom>
+              <a:noFill/>
+              <a:ln w="28575">
+                <a:solidFill>
+                  <a:srgbClr val="FF0000"/>
+                </a:solidFill>
+                <a:prstDash val="solid"/>
+              </a:ln>
+            </p:spPr>
+            <p:style>
+              <a:lnRef idx="2">
+                <a:schemeClr val="accent6"/>
+              </a:lnRef>
+              <a:fillRef idx="1">
+                <a:schemeClr val="lt1"/>
+              </a:fillRef>
+              <a:effectRef idx="0">
+                <a:schemeClr val="accent6"/>
+              </a:effectRef>
+              <a:fontRef idx="minor">
+                <a:schemeClr val="dk1"/>
+              </a:fontRef>
+            </p:style>
+            <p:txBody>
+              <a:bodyPr rtlCol="0" anchor="t"/>
+              <a:lstStyle>
+                <a:lvl1pPr marL="0" indent="0">
+                  <a:defRPr sz="1100">
+                    <a:solidFill>
+                      <a:schemeClr val="dk1"/>
+                    </a:solidFill>
+                    <a:latin typeface="+mn-lt"/>
+                    <a:ea typeface="+mn-ea"/>
+                    <a:cs typeface="+mn-cs"/>
+                  </a:defRPr>
+                </a:lvl1pPr>
+                <a:lvl2pPr marL="457200" indent="0">
+                  <a:defRPr sz="1100">
+                    <a:solidFill>
+                      <a:schemeClr val="dk1"/>
+                    </a:solidFill>
+                    <a:latin typeface="+mn-lt"/>
+                    <a:ea typeface="+mn-ea"/>
+                    <a:cs typeface="+mn-cs"/>
+                  </a:defRPr>
+                </a:lvl2pPr>
+                <a:lvl3pPr marL="914400" indent="0">
+                  <a:defRPr sz="1100">
+                    <a:solidFill>
+                      <a:schemeClr val="dk1"/>
+                    </a:solidFill>
+                    <a:latin typeface="+mn-lt"/>
+                    <a:ea typeface="+mn-ea"/>
+                    <a:cs typeface="+mn-cs"/>
+                  </a:defRPr>
+                </a:lvl3pPr>
+                <a:lvl4pPr marL="1371600" indent="0">
+                  <a:defRPr sz="1100">
+                    <a:solidFill>
+                      <a:schemeClr val="dk1"/>
+                    </a:solidFill>
+                    <a:latin typeface="+mn-lt"/>
+                    <a:ea typeface="+mn-ea"/>
+                    <a:cs typeface="+mn-cs"/>
+                  </a:defRPr>
+                </a:lvl4pPr>
+                <a:lvl5pPr marL="1828800" indent="0">
+                  <a:defRPr sz="1100">
+                    <a:solidFill>
+                      <a:schemeClr val="dk1"/>
+                    </a:solidFill>
+                    <a:latin typeface="+mn-lt"/>
+                    <a:ea typeface="+mn-ea"/>
+                    <a:cs typeface="+mn-cs"/>
+                  </a:defRPr>
+                </a:lvl5pPr>
+                <a:lvl6pPr marL="2286000" indent="0">
+                  <a:defRPr sz="1100">
+                    <a:solidFill>
+                      <a:schemeClr val="dk1"/>
+                    </a:solidFill>
+                    <a:latin typeface="+mn-lt"/>
+                    <a:ea typeface="+mn-ea"/>
+                    <a:cs typeface="+mn-cs"/>
+                  </a:defRPr>
+                </a:lvl6pPr>
+                <a:lvl7pPr marL="2743200" indent="0">
+                  <a:defRPr sz="1100">
+                    <a:solidFill>
+                      <a:schemeClr val="dk1"/>
+                    </a:solidFill>
+                    <a:latin typeface="+mn-lt"/>
+                    <a:ea typeface="+mn-ea"/>
+                    <a:cs typeface="+mn-cs"/>
+                  </a:defRPr>
+                </a:lvl7pPr>
+                <a:lvl8pPr marL="3200400" indent="0">
+                  <a:defRPr sz="1100">
+                    <a:solidFill>
+                      <a:schemeClr val="dk1"/>
+                    </a:solidFill>
+                    <a:latin typeface="+mn-lt"/>
+                    <a:ea typeface="+mn-ea"/>
+                    <a:cs typeface="+mn-cs"/>
+                  </a:defRPr>
+                </a:lvl8pPr>
+                <a:lvl9pPr marL="3657600" indent="0">
+                  <a:defRPr sz="1100">
+                    <a:solidFill>
+                      <a:schemeClr val="dk1"/>
+                    </a:solidFill>
+                    <a:latin typeface="+mn-lt"/>
+                    <a:ea typeface="+mn-ea"/>
+                    <a:cs typeface="+mn-cs"/>
+                  </a:defRPr>
+                </a:lvl9pPr>
+              </a:lstStyle>
+              <a:p>
+                <a:pPr algn="l"/>
+                <a:endParaRPr kumimoji="1" lang="ja-JP" altLang="en-US" sz="1100"/>
+              </a:p>
+            </p:txBody>
+          </p:sp>
+          <p:sp>
+            <p:nvSpPr>
+              <p:cNvPr id="35" name="正方形/長方形 34">
+                <a:extLst>
+                  <a:ext uri="{FF2B5EF4-FFF2-40B4-BE49-F238E27FC236}">
+                    <a16:creationId xmlns:a16="http://schemas.microsoft.com/office/drawing/2014/main" id="{3C7037D3-860C-C58D-AC0F-299DBA81919F}"/>
+                  </a:ext>
+                </a:extLst>
+              </p:cNvPr>
+              <p:cNvSpPr/>
+              <p:nvPr/>
+            </p:nvSpPr>
+            <p:spPr>
+              <a:xfrm>
+                <a:off x="1660047" y="4330949"/>
+                <a:ext cx="1027438" cy="372243"/>
+              </a:xfrm>
+              <a:prstGeom prst="rect">
+                <a:avLst/>
+              </a:prstGeom>
+              <a:noFill/>
+              <a:ln w="28575">
+                <a:solidFill>
+                  <a:srgbClr val="FF0000"/>
+                </a:solidFill>
+                <a:prstDash val="solid"/>
+              </a:ln>
+            </p:spPr>
+            <p:style>
+              <a:lnRef idx="2">
+                <a:schemeClr val="accent6"/>
+              </a:lnRef>
+              <a:fillRef idx="1">
+                <a:schemeClr val="lt1"/>
+              </a:fillRef>
+              <a:effectRef idx="0">
+                <a:schemeClr val="accent6"/>
+              </a:effectRef>
+              <a:fontRef idx="minor">
+                <a:schemeClr val="dk1"/>
+              </a:fontRef>
+            </p:style>
+            <p:txBody>
+              <a:bodyPr rtlCol="0" anchor="t"/>
+              <a:lstStyle>
+                <a:lvl1pPr marL="0" indent="0">
+                  <a:defRPr sz="1100">
+                    <a:solidFill>
+                      <a:schemeClr val="dk1"/>
+                    </a:solidFill>
+                    <a:latin typeface="+mn-lt"/>
+                    <a:ea typeface="+mn-ea"/>
+                    <a:cs typeface="+mn-cs"/>
+                  </a:defRPr>
+                </a:lvl1pPr>
+                <a:lvl2pPr marL="457200" indent="0">
+                  <a:defRPr sz="1100">
+                    <a:solidFill>
+                      <a:schemeClr val="dk1"/>
+                    </a:solidFill>
+                    <a:latin typeface="+mn-lt"/>
+                    <a:ea typeface="+mn-ea"/>
+                    <a:cs typeface="+mn-cs"/>
+                  </a:defRPr>
+                </a:lvl2pPr>
+                <a:lvl3pPr marL="914400" indent="0">
+                  <a:defRPr sz="1100">
+                    <a:solidFill>
+                      <a:schemeClr val="dk1"/>
+                    </a:solidFill>
+                    <a:latin typeface="+mn-lt"/>
+                    <a:ea typeface="+mn-ea"/>
+                    <a:cs typeface="+mn-cs"/>
+                  </a:defRPr>
+                </a:lvl3pPr>
+                <a:lvl4pPr marL="1371600" indent="0">
+                  <a:defRPr sz="1100">
+                    <a:solidFill>
+                      <a:schemeClr val="dk1"/>
+                    </a:solidFill>
+                    <a:latin typeface="+mn-lt"/>
+                    <a:ea typeface="+mn-ea"/>
+                    <a:cs typeface="+mn-cs"/>
+                  </a:defRPr>
+                </a:lvl4pPr>
+                <a:lvl5pPr marL="1828800" indent="0">
+                  <a:defRPr sz="1100">
+                    <a:solidFill>
+                      <a:schemeClr val="dk1"/>
+                    </a:solidFill>
+                    <a:latin typeface="+mn-lt"/>
+                    <a:ea typeface="+mn-ea"/>
+                    <a:cs typeface="+mn-cs"/>
+                  </a:defRPr>
+                </a:lvl5pPr>
+                <a:lvl6pPr marL="2286000" indent="0">
+                  <a:defRPr sz="1100">
+                    <a:solidFill>
+                      <a:schemeClr val="dk1"/>
+                    </a:solidFill>
+                    <a:latin typeface="+mn-lt"/>
+                    <a:ea typeface="+mn-ea"/>
+                    <a:cs typeface="+mn-cs"/>
+                  </a:defRPr>
+                </a:lvl6pPr>
+                <a:lvl7pPr marL="2743200" indent="0">
+                  <a:defRPr sz="1100">
+                    <a:solidFill>
+                      <a:schemeClr val="dk1"/>
+                    </a:solidFill>
+                    <a:latin typeface="+mn-lt"/>
+                    <a:ea typeface="+mn-ea"/>
+                    <a:cs typeface="+mn-cs"/>
+                  </a:defRPr>
+                </a:lvl7pPr>
+                <a:lvl8pPr marL="3200400" indent="0">
+                  <a:defRPr sz="1100">
+                    <a:solidFill>
+                      <a:schemeClr val="dk1"/>
+                    </a:solidFill>
+                    <a:latin typeface="+mn-lt"/>
+                    <a:ea typeface="+mn-ea"/>
+                    <a:cs typeface="+mn-cs"/>
+                  </a:defRPr>
+                </a:lvl8pPr>
+                <a:lvl9pPr marL="3657600" indent="0">
+                  <a:defRPr sz="1100">
+                    <a:solidFill>
+                      <a:schemeClr val="dk1"/>
+                    </a:solidFill>
+                    <a:latin typeface="+mn-lt"/>
+                    <a:ea typeface="+mn-ea"/>
+                    <a:cs typeface="+mn-cs"/>
+                  </a:defRPr>
+                </a:lvl9pPr>
+              </a:lstStyle>
+              <a:p>
+                <a:pPr algn="l"/>
+                <a:endParaRPr kumimoji="1" lang="ja-JP" altLang="en-US" sz="1100"/>
+              </a:p>
+            </p:txBody>
+          </p:sp>
+          <p:cxnSp>
+            <p:nvCxnSpPr>
+              <p:cNvPr id="36" name="直線矢印コネクタ 35">
+                <a:extLst>
+                  <a:ext uri="{FF2B5EF4-FFF2-40B4-BE49-F238E27FC236}">
+                    <a16:creationId xmlns:a16="http://schemas.microsoft.com/office/drawing/2014/main" id="{85E61E1C-106C-37E9-C0A1-BBA69266BEAA}"/>
+                  </a:ext>
+                </a:extLst>
+              </p:cNvPr>
+              <p:cNvCxnSpPr>
+                <a:stCxn id="37" idx="1"/>
+                <a:endCxn id="33" idx="3"/>
+              </p:cNvCxnSpPr>
+              <p:nvPr/>
+            </p:nvCxnSpPr>
+            <p:spPr>
+              <a:xfrm flipH="1">
+                <a:off x="4069287" y="1419525"/>
+                <a:ext cx="624821" cy="2291"/>
+              </a:xfrm>
+              <a:prstGeom prst="straightConnector1">
+                <a:avLst/>
+              </a:prstGeom>
+              <a:ln w="28575">
+                <a:solidFill>
+                  <a:srgbClr val="FF0000"/>
+                </a:solidFill>
+                <a:tailEnd type="triangle"/>
+              </a:ln>
+            </p:spPr>
+            <p:style>
+              <a:lnRef idx="2">
+                <a:schemeClr val="accent1"/>
+              </a:lnRef>
+              <a:fillRef idx="0">
+                <a:schemeClr val="accent1"/>
+              </a:fillRef>
+              <a:effectRef idx="1">
+                <a:schemeClr val="accent1"/>
+              </a:effectRef>
+              <a:fontRef idx="minor">
+                <a:schemeClr val="tx1"/>
+              </a:fontRef>
+            </p:style>
+          </p:cxnSp>
+          <p:sp>
+            <p:nvSpPr>
+              <p:cNvPr id="37" name="正方形/長方形 36">
+                <a:extLst>
+                  <a:ext uri="{FF2B5EF4-FFF2-40B4-BE49-F238E27FC236}">
+                    <a16:creationId xmlns:a16="http://schemas.microsoft.com/office/drawing/2014/main" id="{B8AB9CC2-1187-A04F-8E08-52F86CC8C888}"/>
+                  </a:ext>
+                </a:extLst>
+              </p:cNvPr>
+              <p:cNvSpPr/>
+              <p:nvPr/>
+            </p:nvSpPr>
+            <p:spPr>
+              <a:xfrm>
+                <a:off x="4694108" y="1205472"/>
+                <a:ext cx="1508759" cy="428106"/>
+              </a:xfrm>
+              <a:prstGeom prst="rect">
+                <a:avLst/>
+              </a:prstGeom>
+              <a:ln w="28575">
+                <a:solidFill>
+                  <a:srgbClr val="FF0000"/>
+                </a:solidFill>
+              </a:ln>
+            </p:spPr>
+            <p:style>
+              <a:lnRef idx="2">
+                <a:schemeClr val="accent6"/>
+              </a:lnRef>
+              <a:fillRef idx="1">
+                <a:schemeClr val="lt1"/>
+              </a:fillRef>
+              <a:effectRef idx="0">
+                <a:schemeClr val="accent6"/>
+              </a:effectRef>
+              <a:fontRef idx="minor">
+                <a:schemeClr val="dk1"/>
+              </a:fontRef>
+            </p:style>
+            <p:txBody>
+              <a:bodyPr rtlCol="0" anchor="ctr"/>
+              <a:lstStyle>
+                <a:lvl1pPr marL="0" indent="0">
+                  <a:defRPr sz="1100">
+                    <a:solidFill>
+                      <a:schemeClr val="dk1"/>
+                    </a:solidFill>
+                    <a:latin typeface="+mn-lt"/>
+                    <a:ea typeface="+mn-ea"/>
+                    <a:cs typeface="+mn-cs"/>
+                  </a:defRPr>
+                </a:lvl1pPr>
+                <a:lvl2pPr marL="457200" indent="0">
+                  <a:defRPr sz="1100">
+                    <a:solidFill>
+                      <a:schemeClr val="dk1"/>
+                    </a:solidFill>
+                    <a:latin typeface="+mn-lt"/>
+                    <a:ea typeface="+mn-ea"/>
+                    <a:cs typeface="+mn-cs"/>
+                  </a:defRPr>
+                </a:lvl2pPr>
+                <a:lvl3pPr marL="914400" indent="0">
+                  <a:defRPr sz="1100">
+                    <a:solidFill>
+                      <a:schemeClr val="dk1"/>
+                    </a:solidFill>
+                    <a:latin typeface="+mn-lt"/>
+                    <a:ea typeface="+mn-ea"/>
+                    <a:cs typeface="+mn-cs"/>
+                  </a:defRPr>
+                </a:lvl3pPr>
+                <a:lvl4pPr marL="1371600" indent="0">
+                  <a:defRPr sz="1100">
+                    <a:solidFill>
+                      <a:schemeClr val="dk1"/>
+                    </a:solidFill>
+                    <a:latin typeface="+mn-lt"/>
+                    <a:ea typeface="+mn-ea"/>
+                    <a:cs typeface="+mn-cs"/>
+                  </a:defRPr>
+                </a:lvl4pPr>
+                <a:lvl5pPr marL="1828800" indent="0">
+                  <a:defRPr sz="1100">
+                    <a:solidFill>
+                      <a:schemeClr val="dk1"/>
+                    </a:solidFill>
+                    <a:latin typeface="+mn-lt"/>
+                    <a:ea typeface="+mn-ea"/>
+                    <a:cs typeface="+mn-cs"/>
+                  </a:defRPr>
+                </a:lvl5pPr>
+                <a:lvl6pPr marL="2286000" indent="0">
+                  <a:defRPr sz="1100">
+                    <a:solidFill>
+                      <a:schemeClr val="dk1"/>
+                    </a:solidFill>
+                    <a:latin typeface="+mn-lt"/>
+                    <a:ea typeface="+mn-ea"/>
+                    <a:cs typeface="+mn-cs"/>
+                  </a:defRPr>
+                </a:lvl6pPr>
+                <a:lvl7pPr marL="2743200" indent="0">
+                  <a:defRPr sz="1100">
+                    <a:solidFill>
+                      <a:schemeClr val="dk1"/>
+                    </a:solidFill>
+                    <a:latin typeface="+mn-lt"/>
+                    <a:ea typeface="+mn-ea"/>
+                    <a:cs typeface="+mn-cs"/>
+                  </a:defRPr>
+                </a:lvl7pPr>
+                <a:lvl8pPr marL="3200400" indent="0">
+                  <a:defRPr sz="1100">
+                    <a:solidFill>
+                      <a:schemeClr val="dk1"/>
+                    </a:solidFill>
+                    <a:latin typeface="+mn-lt"/>
+                    <a:ea typeface="+mn-ea"/>
+                    <a:cs typeface="+mn-cs"/>
+                  </a:defRPr>
+                </a:lvl8pPr>
+                <a:lvl9pPr marL="3657600" indent="0">
+                  <a:defRPr sz="1100">
+                    <a:solidFill>
+                      <a:schemeClr val="dk1"/>
+                    </a:solidFill>
+                    <a:latin typeface="+mn-lt"/>
+                    <a:ea typeface="+mn-ea"/>
+                    <a:cs typeface="+mn-cs"/>
+                  </a:defRPr>
+                </a:lvl9pPr>
+              </a:lstStyle>
+              <a:p>
+                <a:pPr algn="l"/>
+                <a:r>
+                  <a:rPr kumimoji="1" lang="ja-JP" altLang="en-US" sz="1200" b="1">
+                    <a:solidFill>
+                      <a:srgbClr val="FF0000"/>
+                    </a:solidFill>
+                  </a:rPr>
+                  <a:t>①タブの切り替え</a:t>
+                </a:r>
+              </a:p>
+            </p:txBody>
+          </p:sp>
+          <p:sp>
+            <p:nvSpPr>
+              <p:cNvPr id="38" name="正方形/長方形 37">
+                <a:extLst>
+                  <a:ext uri="{FF2B5EF4-FFF2-40B4-BE49-F238E27FC236}">
+                    <a16:creationId xmlns:a16="http://schemas.microsoft.com/office/drawing/2014/main" id="{A124CAFD-D2FD-5BB6-3A36-0F7C7E54BC8B}"/>
+                  </a:ext>
+                </a:extLst>
+              </p:cNvPr>
+              <p:cNvSpPr/>
+              <p:nvPr/>
+            </p:nvSpPr>
+            <p:spPr>
+              <a:xfrm>
+                <a:off x="7331741" y="1579168"/>
+                <a:ext cx="1127378" cy="420485"/>
+              </a:xfrm>
+              <a:prstGeom prst="rect">
+                <a:avLst/>
+              </a:prstGeom>
+              <a:ln w="28575">
+                <a:solidFill>
+                  <a:srgbClr val="FF0000"/>
+                </a:solidFill>
+              </a:ln>
+            </p:spPr>
+            <p:style>
+              <a:lnRef idx="2">
+                <a:schemeClr val="accent6"/>
+              </a:lnRef>
+              <a:fillRef idx="1">
+                <a:schemeClr val="lt1"/>
+              </a:fillRef>
+              <a:effectRef idx="0">
+                <a:schemeClr val="accent6"/>
+              </a:effectRef>
+              <a:fontRef idx="minor">
+                <a:schemeClr val="dk1"/>
+              </a:fontRef>
+            </p:style>
+            <p:txBody>
+              <a:bodyPr rtlCol="0" anchor="ctr"/>
+              <a:lstStyle>
+                <a:lvl1pPr marL="0" indent="0">
+                  <a:defRPr sz="1100">
+                    <a:solidFill>
+                      <a:schemeClr val="dk1"/>
+                    </a:solidFill>
+                    <a:latin typeface="+mn-lt"/>
+                    <a:ea typeface="+mn-ea"/>
+                    <a:cs typeface="+mn-cs"/>
+                  </a:defRPr>
+                </a:lvl1pPr>
+                <a:lvl2pPr marL="457200" indent="0">
+                  <a:defRPr sz="1100">
+                    <a:solidFill>
+                      <a:schemeClr val="dk1"/>
+                    </a:solidFill>
+                    <a:latin typeface="+mn-lt"/>
+                    <a:ea typeface="+mn-ea"/>
+                    <a:cs typeface="+mn-cs"/>
+                  </a:defRPr>
+                </a:lvl2pPr>
+                <a:lvl3pPr marL="914400" indent="0">
+                  <a:defRPr sz="1100">
+                    <a:solidFill>
+                      <a:schemeClr val="dk1"/>
+                    </a:solidFill>
+                    <a:latin typeface="+mn-lt"/>
+                    <a:ea typeface="+mn-ea"/>
+                    <a:cs typeface="+mn-cs"/>
+                  </a:defRPr>
+                </a:lvl3pPr>
+                <a:lvl4pPr marL="1371600" indent="0">
+                  <a:defRPr sz="1100">
+                    <a:solidFill>
+                      <a:schemeClr val="dk1"/>
+                    </a:solidFill>
+                    <a:latin typeface="+mn-lt"/>
+                    <a:ea typeface="+mn-ea"/>
+                    <a:cs typeface="+mn-cs"/>
+                  </a:defRPr>
+                </a:lvl4pPr>
+                <a:lvl5pPr marL="1828800" indent="0">
+                  <a:defRPr sz="1100">
+                    <a:solidFill>
+                      <a:schemeClr val="dk1"/>
+                    </a:solidFill>
+                    <a:latin typeface="+mn-lt"/>
+                    <a:ea typeface="+mn-ea"/>
+                    <a:cs typeface="+mn-cs"/>
+                  </a:defRPr>
+                </a:lvl5pPr>
+                <a:lvl6pPr marL="2286000" indent="0">
+                  <a:defRPr sz="1100">
+                    <a:solidFill>
+                      <a:schemeClr val="dk1"/>
+                    </a:solidFill>
+                    <a:latin typeface="+mn-lt"/>
+                    <a:ea typeface="+mn-ea"/>
+                    <a:cs typeface="+mn-cs"/>
+                  </a:defRPr>
+                </a:lvl6pPr>
+                <a:lvl7pPr marL="2743200" indent="0">
+                  <a:defRPr sz="1100">
+                    <a:solidFill>
+                      <a:schemeClr val="dk1"/>
+                    </a:solidFill>
+                    <a:latin typeface="+mn-lt"/>
+                    <a:ea typeface="+mn-ea"/>
+                    <a:cs typeface="+mn-cs"/>
+                  </a:defRPr>
+                </a:lvl7pPr>
+                <a:lvl8pPr marL="3200400" indent="0">
+                  <a:defRPr sz="1100">
+                    <a:solidFill>
+                      <a:schemeClr val="dk1"/>
+                    </a:solidFill>
+                    <a:latin typeface="+mn-lt"/>
+                    <a:ea typeface="+mn-ea"/>
+                    <a:cs typeface="+mn-cs"/>
+                  </a:defRPr>
+                </a:lvl8pPr>
+                <a:lvl9pPr marL="3657600" indent="0">
+                  <a:defRPr sz="1100">
+                    <a:solidFill>
+                      <a:schemeClr val="dk1"/>
+                    </a:solidFill>
+                    <a:latin typeface="+mn-lt"/>
+                    <a:ea typeface="+mn-ea"/>
+                    <a:cs typeface="+mn-cs"/>
+                  </a:defRPr>
+                </a:lvl9pPr>
+              </a:lstStyle>
+              <a:p>
+                <a:pPr algn="l"/>
+                <a:r>
+                  <a:rPr kumimoji="1" lang="ja-JP" altLang="en-US" sz="1200" b="1">
+                    <a:solidFill>
+                      <a:srgbClr val="FF0000"/>
+                    </a:solidFill>
+                  </a:rPr>
+                  <a:t>②特技の例</a:t>
+                </a:r>
+              </a:p>
+            </p:txBody>
+          </p:sp>
+          <p:sp>
+            <p:nvSpPr>
+              <p:cNvPr id="39" name="正方形/長方形 38">
+                <a:extLst>
+                  <a:ext uri="{FF2B5EF4-FFF2-40B4-BE49-F238E27FC236}">
+                    <a16:creationId xmlns:a16="http://schemas.microsoft.com/office/drawing/2014/main" id="{ABF2B896-DEBA-76BC-4A98-CF9CE3C2DD91}"/>
+                  </a:ext>
+                </a:extLst>
+              </p:cNvPr>
+              <p:cNvSpPr/>
+              <p:nvPr/>
+            </p:nvSpPr>
+            <p:spPr>
+              <a:xfrm>
+                <a:off x="3271436" y="4301555"/>
+                <a:ext cx="1640081" cy="400743"/>
+              </a:xfrm>
+              <a:prstGeom prst="rect">
+                <a:avLst/>
+              </a:prstGeom>
+              <a:ln w="28575">
+                <a:solidFill>
+                  <a:srgbClr val="FF0000"/>
+                </a:solidFill>
+              </a:ln>
+            </p:spPr>
+            <p:style>
+              <a:lnRef idx="2">
+                <a:schemeClr val="accent6"/>
+              </a:lnRef>
+              <a:fillRef idx="1">
+                <a:schemeClr val="lt1"/>
+              </a:fillRef>
+              <a:effectRef idx="0">
+                <a:schemeClr val="accent6"/>
+              </a:effectRef>
+              <a:fontRef idx="minor">
+                <a:schemeClr val="dk1"/>
+              </a:fontRef>
+            </p:style>
+            <p:txBody>
+              <a:bodyPr rtlCol="0" anchor="ctr"/>
+              <a:lstStyle>
+                <a:lvl1pPr marL="0" indent="0">
+                  <a:defRPr sz="1100">
+                    <a:solidFill>
+                      <a:schemeClr val="dk1"/>
+                    </a:solidFill>
+                    <a:latin typeface="+mn-lt"/>
+                    <a:ea typeface="+mn-ea"/>
+                    <a:cs typeface="+mn-cs"/>
+                  </a:defRPr>
+                </a:lvl1pPr>
+                <a:lvl2pPr marL="457200" indent="0">
+                  <a:defRPr sz="1100">
+                    <a:solidFill>
+                      <a:schemeClr val="dk1"/>
+                    </a:solidFill>
+                    <a:latin typeface="+mn-lt"/>
+                    <a:ea typeface="+mn-ea"/>
+                    <a:cs typeface="+mn-cs"/>
+                  </a:defRPr>
+                </a:lvl2pPr>
+                <a:lvl3pPr marL="914400" indent="0">
+                  <a:defRPr sz="1100">
+                    <a:solidFill>
+                      <a:schemeClr val="dk1"/>
+                    </a:solidFill>
+                    <a:latin typeface="+mn-lt"/>
+                    <a:ea typeface="+mn-ea"/>
+                    <a:cs typeface="+mn-cs"/>
+                  </a:defRPr>
+                </a:lvl3pPr>
+                <a:lvl4pPr marL="1371600" indent="0">
+                  <a:defRPr sz="1100">
+                    <a:solidFill>
+                      <a:schemeClr val="dk1"/>
+                    </a:solidFill>
+                    <a:latin typeface="+mn-lt"/>
+                    <a:ea typeface="+mn-ea"/>
+                    <a:cs typeface="+mn-cs"/>
+                  </a:defRPr>
+                </a:lvl4pPr>
+                <a:lvl5pPr marL="1828800" indent="0">
+                  <a:defRPr sz="1100">
+                    <a:solidFill>
+                      <a:schemeClr val="dk1"/>
+                    </a:solidFill>
+                    <a:latin typeface="+mn-lt"/>
+                    <a:ea typeface="+mn-ea"/>
+                    <a:cs typeface="+mn-cs"/>
+                  </a:defRPr>
+                </a:lvl5pPr>
+                <a:lvl6pPr marL="2286000" indent="0">
+                  <a:defRPr sz="1100">
+                    <a:solidFill>
+                      <a:schemeClr val="dk1"/>
+                    </a:solidFill>
+                    <a:latin typeface="+mn-lt"/>
+                    <a:ea typeface="+mn-ea"/>
+                    <a:cs typeface="+mn-cs"/>
+                  </a:defRPr>
+                </a:lvl6pPr>
+                <a:lvl7pPr marL="2743200" indent="0">
+                  <a:defRPr sz="1100">
+                    <a:solidFill>
+                      <a:schemeClr val="dk1"/>
+                    </a:solidFill>
+                    <a:latin typeface="+mn-lt"/>
+                    <a:ea typeface="+mn-ea"/>
+                    <a:cs typeface="+mn-cs"/>
+                  </a:defRPr>
+                </a:lvl7pPr>
+                <a:lvl8pPr marL="3200400" indent="0">
+                  <a:defRPr sz="1100">
+                    <a:solidFill>
+                      <a:schemeClr val="dk1"/>
+                    </a:solidFill>
+                    <a:latin typeface="+mn-lt"/>
+                    <a:ea typeface="+mn-ea"/>
+                    <a:cs typeface="+mn-cs"/>
+                  </a:defRPr>
+                </a:lvl8pPr>
+                <a:lvl9pPr marL="3657600" indent="0">
+                  <a:defRPr sz="1100">
+                    <a:solidFill>
+                      <a:schemeClr val="dk1"/>
+                    </a:solidFill>
+                    <a:latin typeface="+mn-lt"/>
+                    <a:ea typeface="+mn-ea"/>
+                    <a:cs typeface="+mn-cs"/>
+                  </a:defRPr>
+                </a:lvl9pPr>
+              </a:lstStyle>
+              <a:p>
+                <a:pPr algn="l"/>
+                <a:r>
+                  <a:rPr kumimoji="1" lang="ja-JP" altLang="en-US" sz="1200" b="1">
+                    <a:solidFill>
+                      <a:srgbClr val="FF0000"/>
+                    </a:solidFill>
+                  </a:rPr>
+                  <a:t>③特技の数を設定</a:t>
+                </a:r>
+              </a:p>
+            </p:txBody>
+          </p:sp>
+          <p:cxnSp>
+            <p:nvCxnSpPr>
+              <p:cNvPr id="40" name="直線矢印コネクタ 39">
+                <a:extLst>
+                  <a:ext uri="{FF2B5EF4-FFF2-40B4-BE49-F238E27FC236}">
+                    <a16:creationId xmlns:a16="http://schemas.microsoft.com/office/drawing/2014/main" id="{9531DF12-26A9-4D7C-CE24-20585C2DD1A7}"/>
+                  </a:ext>
+                </a:extLst>
+              </p:cNvPr>
+              <p:cNvCxnSpPr/>
+              <p:nvPr/>
+            </p:nvCxnSpPr>
+            <p:spPr>
+              <a:xfrm flipH="1">
+                <a:off x="2705156" y="4515458"/>
+                <a:ext cx="547825" cy="1195"/>
+              </a:xfrm>
+              <a:prstGeom prst="straightConnector1">
+                <a:avLst/>
+              </a:prstGeom>
+              <a:ln w="28575">
+                <a:solidFill>
+                  <a:srgbClr val="FF0000"/>
+                </a:solidFill>
+                <a:tailEnd type="triangle"/>
+              </a:ln>
+            </p:spPr>
+            <p:style>
+              <a:lnRef idx="2">
+                <a:schemeClr val="accent1"/>
+              </a:lnRef>
+              <a:fillRef idx="0">
+                <a:schemeClr val="accent1"/>
+              </a:fillRef>
+              <a:effectRef idx="1">
+                <a:schemeClr val="accent1"/>
+              </a:effectRef>
+              <a:fontRef idx="minor">
+                <a:schemeClr val="tx1"/>
+              </a:fontRef>
+            </p:style>
+          </p:cxnSp>
+          <p:sp>
+            <p:nvSpPr>
+              <p:cNvPr id="41" name="正方形/長方形 40">
+                <a:extLst>
+                  <a:ext uri="{FF2B5EF4-FFF2-40B4-BE49-F238E27FC236}">
+                    <a16:creationId xmlns:a16="http://schemas.microsoft.com/office/drawing/2014/main" id="{4921E6F5-3086-5ACA-48AE-1EE7A949899F}"/>
+                  </a:ext>
+                </a:extLst>
+              </p:cNvPr>
+              <p:cNvSpPr/>
+              <p:nvPr/>
+            </p:nvSpPr>
+            <p:spPr>
+              <a:xfrm>
+                <a:off x="1660048" y="4814089"/>
+                <a:ext cx="8555618" cy="6614856"/>
+              </a:xfrm>
+              <a:prstGeom prst="rect">
+                <a:avLst/>
+              </a:prstGeom>
+              <a:noFill/>
+              <a:ln w="28575">
+                <a:solidFill>
+                  <a:srgbClr val="FF0000"/>
+                </a:solidFill>
+                <a:prstDash val="solid"/>
+              </a:ln>
+            </p:spPr>
+            <p:style>
+              <a:lnRef idx="2">
+                <a:schemeClr val="accent6"/>
+              </a:lnRef>
+              <a:fillRef idx="1">
+                <a:schemeClr val="lt1"/>
+              </a:fillRef>
+              <a:effectRef idx="0">
+                <a:schemeClr val="accent6"/>
+              </a:effectRef>
+              <a:fontRef idx="minor">
+                <a:schemeClr val="dk1"/>
+              </a:fontRef>
+            </p:style>
+            <p:txBody>
+              <a:bodyPr rtlCol="0" anchor="t"/>
+              <a:lstStyle>
+                <a:lvl1pPr marL="0" indent="0">
+                  <a:defRPr sz="1100">
+                    <a:solidFill>
+                      <a:schemeClr val="dk1"/>
+                    </a:solidFill>
+                    <a:latin typeface="+mn-lt"/>
+                    <a:ea typeface="+mn-ea"/>
+                    <a:cs typeface="+mn-cs"/>
+                  </a:defRPr>
+                </a:lvl1pPr>
+                <a:lvl2pPr marL="457200" indent="0">
+                  <a:defRPr sz="1100">
+                    <a:solidFill>
+                      <a:schemeClr val="dk1"/>
+                    </a:solidFill>
+                    <a:latin typeface="+mn-lt"/>
+                    <a:ea typeface="+mn-ea"/>
+                    <a:cs typeface="+mn-cs"/>
+                  </a:defRPr>
+                </a:lvl2pPr>
+                <a:lvl3pPr marL="914400" indent="0">
+                  <a:defRPr sz="1100">
+                    <a:solidFill>
+                      <a:schemeClr val="dk1"/>
+                    </a:solidFill>
+                    <a:latin typeface="+mn-lt"/>
+                    <a:ea typeface="+mn-ea"/>
+                    <a:cs typeface="+mn-cs"/>
+                  </a:defRPr>
+                </a:lvl3pPr>
+                <a:lvl4pPr marL="1371600" indent="0">
+                  <a:defRPr sz="1100">
+                    <a:solidFill>
+                      <a:schemeClr val="dk1"/>
+                    </a:solidFill>
+                    <a:latin typeface="+mn-lt"/>
+                    <a:ea typeface="+mn-ea"/>
+                    <a:cs typeface="+mn-cs"/>
+                  </a:defRPr>
+                </a:lvl4pPr>
+                <a:lvl5pPr marL="1828800" indent="0">
+                  <a:defRPr sz="1100">
+                    <a:solidFill>
+                      <a:schemeClr val="dk1"/>
+                    </a:solidFill>
+                    <a:latin typeface="+mn-lt"/>
+                    <a:ea typeface="+mn-ea"/>
+                    <a:cs typeface="+mn-cs"/>
+                  </a:defRPr>
+                </a:lvl5pPr>
+                <a:lvl6pPr marL="2286000" indent="0">
+                  <a:defRPr sz="1100">
+                    <a:solidFill>
+                      <a:schemeClr val="dk1"/>
+                    </a:solidFill>
+                    <a:latin typeface="+mn-lt"/>
+                    <a:ea typeface="+mn-ea"/>
+                    <a:cs typeface="+mn-cs"/>
+                  </a:defRPr>
+                </a:lvl6pPr>
+                <a:lvl7pPr marL="2743200" indent="0">
+                  <a:defRPr sz="1100">
+                    <a:solidFill>
+                      <a:schemeClr val="dk1"/>
+                    </a:solidFill>
+                    <a:latin typeface="+mn-lt"/>
+                    <a:ea typeface="+mn-ea"/>
+                    <a:cs typeface="+mn-cs"/>
+                  </a:defRPr>
+                </a:lvl7pPr>
+                <a:lvl8pPr marL="3200400" indent="0">
+                  <a:defRPr sz="1100">
+                    <a:solidFill>
+                      <a:schemeClr val="dk1"/>
+                    </a:solidFill>
+                    <a:latin typeface="+mn-lt"/>
+                    <a:ea typeface="+mn-ea"/>
+                    <a:cs typeface="+mn-cs"/>
+                  </a:defRPr>
+                </a:lvl8pPr>
+                <a:lvl9pPr marL="3657600" indent="0">
+                  <a:defRPr sz="1100">
+                    <a:solidFill>
+                      <a:schemeClr val="dk1"/>
+                    </a:solidFill>
+                    <a:latin typeface="+mn-lt"/>
+                    <a:ea typeface="+mn-ea"/>
+                    <a:cs typeface="+mn-cs"/>
+                  </a:defRPr>
+                </a:lvl9pPr>
+              </a:lstStyle>
+              <a:p>
+                <a:pPr algn="l"/>
+                <a:endParaRPr kumimoji="1" lang="ja-JP" altLang="en-US" sz="1100"/>
+              </a:p>
+            </p:txBody>
+          </p:sp>
+          <p:sp>
+            <p:nvSpPr>
+              <p:cNvPr id="42" name="正方形/長方形 41">
+                <a:extLst>
+                  <a:ext uri="{FF2B5EF4-FFF2-40B4-BE49-F238E27FC236}">
+                    <a16:creationId xmlns:a16="http://schemas.microsoft.com/office/drawing/2014/main" id="{DE7CCB65-8130-C53E-9026-73196F617BCD}"/>
+                  </a:ext>
+                </a:extLst>
+              </p:cNvPr>
+              <p:cNvSpPr/>
+              <p:nvPr/>
+            </p:nvSpPr>
+            <p:spPr>
+              <a:xfrm>
+                <a:off x="7314567" y="4250717"/>
+                <a:ext cx="1151417" cy="420485"/>
+              </a:xfrm>
+              <a:prstGeom prst="rect">
+                <a:avLst/>
+              </a:prstGeom>
+              <a:ln w="28575">
+                <a:solidFill>
+                  <a:srgbClr val="FF0000"/>
+                </a:solidFill>
+              </a:ln>
+            </p:spPr>
+            <p:style>
+              <a:lnRef idx="2">
+                <a:schemeClr val="accent6"/>
+              </a:lnRef>
+              <a:fillRef idx="1">
+                <a:schemeClr val="lt1"/>
+              </a:fillRef>
+              <a:effectRef idx="0">
+                <a:schemeClr val="accent6"/>
+              </a:effectRef>
+              <a:fontRef idx="minor">
+                <a:schemeClr val="dk1"/>
+              </a:fontRef>
+            </p:style>
+            <p:txBody>
+              <a:bodyPr rtlCol="0" anchor="ctr"/>
+              <a:lstStyle>
+                <a:lvl1pPr marL="0" indent="0">
+                  <a:defRPr sz="1100">
+                    <a:solidFill>
+                      <a:schemeClr val="dk1"/>
+                    </a:solidFill>
+                    <a:latin typeface="+mn-lt"/>
+                    <a:ea typeface="+mn-ea"/>
+                    <a:cs typeface="+mn-cs"/>
+                  </a:defRPr>
+                </a:lvl1pPr>
+                <a:lvl2pPr marL="457200" indent="0">
+                  <a:defRPr sz="1100">
+                    <a:solidFill>
+                      <a:schemeClr val="dk1"/>
+                    </a:solidFill>
+                    <a:latin typeface="+mn-lt"/>
+                    <a:ea typeface="+mn-ea"/>
+                    <a:cs typeface="+mn-cs"/>
+                  </a:defRPr>
+                </a:lvl2pPr>
+                <a:lvl3pPr marL="914400" indent="0">
+                  <a:defRPr sz="1100">
+                    <a:solidFill>
+                      <a:schemeClr val="dk1"/>
+                    </a:solidFill>
+                    <a:latin typeface="+mn-lt"/>
+                    <a:ea typeface="+mn-ea"/>
+                    <a:cs typeface="+mn-cs"/>
+                  </a:defRPr>
+                </a:lvl3pPr>
+                <a:lvl4pPr marL="1371600" indent="0">
+                  <a:defRPr sz="1100">
+                    <a:solidFill>
+                      <a:schemeClr val="dk1"/>
+                    </a:solidFill>
+                    <a:latin typeface="+mn-lt"/>
+                    <a:ea typeface="+mn-ea"/>
+                    <a:cs typeface="+mn-cs"/>
+                  </a:defRPr>
+                </a:lvl4pPr>
+                <a:lvl5pPr marL="1828800" indent="0">
+                  <a:defRPr sz="1100">
+                    <a:solidFill>
+                      <a:schemeClr val="dk1"/>
+                    </a:solidFill>
+                    <a:latin typeface="+mn-lt"/>
+                    <a:ea typeface="+mn-ea"/>
+                    <a:cs typeface="+mn-cs"/>
+                  </a:defRPr>
+                </a:lvl5pPr>
+                <a:lvl6pPr marL="2286000" indent="0">
+                  <a:defRPr sz="1100">
+                    <a:solidFill>
+                      <a:schemeClr val="dk1"/>
+                    </a:solidFill>
+                    <a:latin typeface="+mn-lt"/>
+                    <a:ea typeface="+mn-ea"/>
+                    <a:cs typeface="+mn-cs"/>
+                  </a:defRPr>
+                </a:lvl6pPr>
+                <a:lvl7pPr marL="2743200" indent="0">
+                  <a:defRPr sz="1100">
+                    <a:solidFill>
+                      <a:schemeClr val="dk1"/>
+                    </a:solidFill>
+                    <a:latin typeface="+mn-lt"/>
+                    <a:ea typeface="+mn-ea"/>
+                    <a:cs typeface="+mn-cs"/>
+                  </a:defRPr>
+                </a:lvl7pPr>
+                <a:lvl8pPr marL="3200400" indent="0">
+                  <a:defRPr sz="1100">
+                    <a:solidFill>
+                      <a:schemeClr val="dk1"/>
+                    </a:solidFill>
+                    <a:latin typeface="+mn-lt"/>
+                    <a:ea typeface="+mn-ea"/>
+                    <a:cs typeface="+mn-cs"/>
+                  </a:defRPr>
+                </a:lvl8pPr>
+                <a:lvl9pPr marL="3657600" indent="0">
+                  <a:defRPr sz="1100">
+                    <a:solidFill>
+                      <a:schemeClr val="dk1"/>
+                    </a:solidFill>
+                    <a:latin typeface="+mn-lt"/>
+                    <a:ea typeface="+mn-ea"/>
+                    <a:cs typeface="+mn-cs"/>
+                  </a:defRPr>
+                </a:lvl9pPr>
+              </a:lstStyle>
+              <a:p>
+                <a:pPr algn="l"/>
+                <a:r>
+                  <a:rPr kumimoji="1" lang="ja-JP" altLang="en-US" sz="1200" b="1">
+                    <a:solidFill>
+                      <a:srgbClr val="FF0000"/>
+                    </a:solidFill>
+                  </a:rPr>
+                  <a:t>④特技の入力</a:t>
+                </a:r>
+              </a:p>
+            </p:txBody>
+          </p:sp>
+        </p:grpSp>
+        <p:cxnSp>
+          <p:nvCxnSpPr>
+            <p:cNvPr id="31" name="直線矢印コネクタ 30">
+              <a:extLst>
+                <a:ext uri="{FF2B5EF4-FFF2-40B4-BE49-F238E27FC236}">
+                  <a16:creationId xmlns:a16="http://schemas.microsoft.com/office/drawing/2014/main" id="{3FC586A4-3CD7-A80B-E848-D2A716BB9339}"/>
+                </a:ext>
+              </a:extLst>
+            </p:cNvPr>
+            <p:cNvCxnSpPr/>
+            <p:nvPr/>
+          </p:nvCxnSpPr>
+          <p:spPr>
+            <a:xfrm>
+              <a:off x="7733432" y="2112706"/>
+              <a:ext cx="491" cy="237122"/>
+            </a:xfrm>
+            <a:prstGeom prst="straightConnector1">
+              <a:avLst/>
+            </a:prstGeom>
+            <a:ln w="28575">
+              <a:solidFill>
+                <a:srgbClr val="FF0000"/>
+              </a:solidFill>
+              <a:tailEnd type="triangle"/>
+            </a:ln>
+          </p:spPr>
+          <p:style>
+            <a:lnRef idx="2">
+              <a:schemeClr val="accent1"/>
+            </a:lnRef>
+            <a:fillRef idx="0">
+              <a:schemeClr val="accent1"/>
+            </a:fillRef>
+            <a:effectRef idx="1">
+              <a:schemeClr val="accent1"/>
+            </a:effectRef>
+            <a:fontRef idx="minor">
+              <a:schemeClr val="tx1"/>
+            </a:fontRef>
+          </p:style>
+        </p:cxnSp>
+        <p:cxnSp>
+          <p:nvCxnSpPr>
+            <p:cNvPr id="32" name="直線矢印コネクタ 31">
+              <a:extLst>
+                <a:ext uri="{FF2B5EF4-FFF2-40B4-BE49-F238E27FC236}">
+                  <a16:creationId xmlns:a16="http://schemas.microsoft.com/office/drawing/2014/main" id="{F48CF319-1286-8005-6CDE-1348AEF0F36D}"/>
+                </a:ext>
+              </a:extLst>
+            </p:cNvPr>
+            <p:cNvCxnSpPr/>
+            <p:nvPr/>
+          </p:nvCxnSpPr>
+          <p:spPr>
+            <a:xfrm>
+              <a:off x="7733925" y="5161741"/>
+              <a:ext cx="0" cy="156961"/>
+            </a:xfrm>
+            <a:prstGeom prst="straightConnector1">
+              <a:avLst/>
+            </a:prstGeom>
+            <a:ln w="28575">
+              <a:solidFill>
+                <a:srgbClr val="FF0000"/>
+              </a:solidFill>
+              <a:tailEnd type="triangle"/>
+            </a:ln>
+          </p:spPr>
+          <p:style>
+            <a:lnRef idx="2">
+              <a:schemeClr val="accent1"/>
+            </a:lnRef>
+            <a:fillRef idx="0">
+              <a:schemeClr val="accent1"/>
+            </a:fillRef>
+            <a:effectRef idx="1">
+              <a:schemeClr val="accent1"/>
+            </a:effectRef>
+            <a:fontRef idx="minor">
+              <a:schemeClr val="tx1"/>
+            </a:fontRef>
+          </p:style>
+        </p:cxnSp>
+      </p:grpSp>
+    </p:spTree>
+    <p:extLst>
+      <p:ext uri="{BB962C8B-B14F-4D97-AF65-F5344CB8AC3E}">
+        <p14:creationId xmlns:p14="http://schemas.microsoft.com/office/powerpoint/2010/main" val="1896282833"/>
+      </p:ext>
+    </p:extLst>
+  </p:cSld>
+  <p:clrMapOvr>
+    <a:masterClrMapping/>
+  </p:clrMapOvr>
+</p:sld>
+</file>
+
 <file path=ppt/theme/theme1.xml><?xml version="1.0" encoding="utf-8"?>
 <a:theme xmlns:a="http://schemas.openxmlformats.org/drawingml/2006/main" name="Office テーマ">
   <a:themeElements>

--- a/スクリーンショット_使い方_エネミー.pptx
+++ b/スクリーンショット_使い方_エネミー.pptx
@@ -17,6 +17,8 @@
     <p:sldId id="271" r:id="rId11"/>
     <p:sldId id="272" r:id="rId12"/>
     <p:sldId id="273" r:id="rId13"/>
+    <p:sldId id="274" r:id="rId14"/>
+    <p:sldId id="275" r:id="rId15"/>
   </p:sldIdLst>
   <p:sldSz cx="12192000" cy="6858000"/>
   <p:notesSz cx="6858000" cy="9144000"/>
@@ -132,6 +134,599 @@
     </p:ext>
   </p:extLst>
 </p:presentation>
+</file>
+
+<file path=ppt/revisionInfo.xml><?xml version="1.0" encoding="utf-8"?>
+<p1510:revInfo xmlns:a="http://schemas.openxmlformats.org/drawingml/2006/main" xmlns:r="http://schemas.openxmlformats.org/officeDocument/2006/relationships" xmlns:p1510="http://schemas.microsoft.com/office/powerpoint/2015/10/main">
+  <p1510:revLst>
+    <p1510:client id="{DEA640BC-8F80-40F9-B50F-545CB9213F0C}" v="39" dt="2026-05-20T16:09:19.711"/>
+  </p1510:revLst>
+</p1510:revInfo>
+</file>
+
+<file path=ppt/changesInfos/changesInfo1.xml><?xml version="1.0" encoding="utf-8"?>
+<pc:chgInfo xmlns:a="http://schemas.openxmlformats.org/drawingml/2006/main" xmlns:r="http://schemas.openxmlformats.org/officeDocument/2006/relationships" xmlns:ac="http://schemas.microsoft.com/office/drawing/2013/main/command" xmlns:pc="http://schemas.microsoft.com/office/powerpoint/2013/main/command">
+  <pc:docChgLst>
+    <pc:chgData name="克利 寳迫" userId="d1807dd80cee582b" providerId="LiveId" clId="{F79782EE-D85D-46E2-B3E9-FAE15D6BED98}"/>
+    <pc:docChg chg="undo custSel addSld modSld">
+      <pc:chgData name="克利 寳迫" userId="d1807dd80cee582b" providerId="LiveId" clId="{F79782EE-D85D-46E2-B3E9-FAE15D6BED98}" dt="2026-05-20T16:09:19.711" v="329"/>
+      <pc:docMkLst>
+        <pc:docMk/>
+      </pc:docMkLst>
+      <pc:sldChg chg="addSp delSp modSp mod">
+        <pc:chgData name="克利 寳迫" userId="d1807dd80cee582b" providerId="LiveId" clId="{F79782EE-D85D-46E2-B3E9-FAE15D6BED98}" dt="2026-05-20T15:53:19.799" v="305"/>
+        <pc:sldMkLst>
+          <pc:docMk/>
+          <pc:sldMk cId="1896282833" sldId="270"/>
+        </pc:sldMkLst>
+        <pc:spChg chg="add del mod">
+          <ac:chgData name="克利 寳迫" userId="d1807dd80cee582b" providerId="LiveId" clId="{F79782EE-D85D-46E2-B3E9-FAE15D6BED98}" dt="2026-05-20T15:52:27.166" v="284" actId="478"/>
+          <ac:spMkLst>
+            <pc:docMk/>
+            <pc:sldMk cId="1896282833" sldId="270"/>
+            <ac:spMk id="6" creationId="{25618F3C-95F9-AF0A-F824-E74739EC0F6E}"/>
+          </ac:spMkLst>
+        </pc:spChg>
+        <pc:spChg chg="add mod ord">
+          <ac:chgData name="克利 寳迫" userId="d1807dd80cee582b" providerId="LiveId" clId="{F79782EE-D85D-46E2-B3E9-FAE15D6BED98}" dt="2026-05-20T15:53:19.799" v="305"/>
+          <ac:spMkLst>
+            <pc:docMk/>
+            <pc:sldMk cId="1896282833" sldId="270"/>
+            <ac:spMk id="9" creationId="{01CE8B1A-7AC7-9D1E-10CE-ACA3234A23B3}"/>
+          </ac:spMkLst>
+        </pc:spChg>
+        <pc:spChg chg="mod">
+          <ac:chgData name="克利 寳迫" userId="d1807dd80cee582b" providerId="LiveId" clId="{F79782EE-D85D-46E2-B3E9-FAE15D6BED98}" dt="2026-05-20T15:52:24.895" v="283" actId="571"/>
+          <ac:spMkLst>
+            <pc:docMk/>
+            <pc:sldMk cId="1896282833" sldId="270"/>
+            <ac:spMk id="28" creationId="{82EFC521-04B3-A544-B2A4-7B412D68067E}"/>
+          </ac:spMkLst>
+        </pc:spChg>
+        <pc:spChg chg="mod">
+          <ac:chgData name="克利 寳迫" userId="d1807dd80cee582b" providerId="LiveId" clId="{F79782EE-D85D-46E2-B3E9-FAE15D6BED98}" dt="2026-05-20T15:52:24.895" v="283" actId="571"/>
+          <ac:spMkLst>
+            <pc:docMk/>
+            <pc:sldMk cId="1896282833" sldId="270"/>
+            <ac:spMk id="33" creationId="{3B945DF4-4807-DD83-FE6D-A22E020EA53E}"/>
+          </ac:spMkLst>
+        </pc:spChg>
+        <pc:spChg chg="mod">
+          <ac:chgData name="克利 寳迫" userId="d1807dd80cee582b" providerId="LiveId" clId="{F79782EE-D85D-46E2-B3E9-FAE15D6BED98}" dt="2026-05-20T15:52:24.895" v="283" actId="571"/>
+          <ac:spMkLst>
+            <pc:docMk/>
+            <pc:sldMk cId="1896282833" sldId="270"/>
+            <ac:spMk id="34" creationId="{8DAE86F7-ED40-C142-4AD4-A28F50B75186}"/>
+          </ac:spMkLst>
+        </pc:spChg>
+        <pc:spChg chg="del">
+          <ac:chgData name="克利 寳迫" userId="d1807dd80cee582b" providerId="LiveId" clId="{F79782EE-D85D-46E2-B3E9-FAE15D6BED98}" dt="2026-05-20T15:51:42.775" v="269" actId="478"/>
+          <ac:spMkLst>
+            <pc:docMk/>
+            <pc:sldMk cId="1896282833" sldId="270"/>
+            <ac:spMk id="35" creationId="{3C7037D3-860C-C58D-AC0F-299DBA81919F}"/>
+          </ac:spMkLst>
+        </pc:spChg>
+        <pc:spChg chg="mod">
+          <ac:chgData name="克利 寳迫" userId="d1807dd80cee582b" providerId="LiveId" clId="{F79782EE-D85D-46E2-B3E9-FAE15D6BED98}" dt="2026-05-20T15:52:24.895" v="283" actId="571"/>
+          <ac:spMkLst>
+            <pc:docMk/>
+            <pc:sldMk cId="1896282833" sldId="270"/>
+            <ac:spMk id="37" creationId="{B8AB9CC2-1187-A04F-8E08-52F86CC8C888}"/>
+          </ac:spMkLst>
+        </pc:spChg>
+        <pc:spChg chg="mod">
+          <ac:chgData name="克利 寳迫" userId="d1807dd80cee582b" providerId="LiveId" clId="{F79782EE-D85D-46E2-B3E9-FAE15D6BED98}" dt="2026-05-20T15:52:24.895" v="283" actId="571"/>
+          <ac:spMkLst>
+            <pc:docMk/>
+            <pc:sldMk cId="1896282833" sldId="270"/>
+            <ac:spMk id="38" creationId="{A124CAFD-D2FD-5BB6-3A36-0F7C7E54BC8B}"/>
+          </ac:spMkLst>
+        </pc:spChg>
+        <pc:spChg chg="del">
+          <ac:chgData name="克利 寳迫" userId="d1807dd80cee582b" providerId="LiveId" clId="{F79782EE-D85D-46E2-B3E9-FAE15D6BED98}" dt="2026-05-20T15:51:41.149" v="268" actId="478"/>
+          <ac:spMkLst>
+            <pc:docMk/>
+            <pc:sldMk cId="1896282833" sldId="270"/>
+            <ac:spMk id="39" creationId="{ABF2B896-DEBA-76BC-4A98-CF9CE3C2DD91}"/>
+          </ac:spMkLst>
+        </pc:spChg>
+        <pc:spChg chg="mod">
+          <ac:chgData name="克利 寳迫" userId="d1807dd80cee582b" providerId="LiveId" clId="{F79782EE-D85D-46E2-B3E9-FAE15D6BED98}" dt="2026-05-20T15:52:24.895" v="283" actId="571"/>
+          <ac:spMkLst>
+            <pc:docMk/>
+            <pc:sldMk cId="1896282833" sldId="270"/>
+            <ac:spMk id="41" creationId="{4921E6F5-3086-5ACA-48AE-1EE7A949899F}"/>
+          </ac:spMkLst>
+        </pc:spChg>
+        <pc:spChg chg="del mod">
+          <ac:chgData name="克利 寳迫" userId="d1807dd80cee582b" providerId="LiveId" clId="{F79782EE-D85D-46E2-B3E9-FAE15D6BED98}" dt="2026-05-20T15:52:27.166" v="284" actId="478"/>
+          <ac:spMkLst>
+            <pc:docMk/>
+            <pc:sldMk cId="1896282833" sldId="270"/>
+            <ac:spMk id="42" creationId="{DE7CCB65-8130-C53E-9026-73196F617BCD}"/>
+          </ac:spMkLst>
+        </pc:spChg>
+        <pc:grpChg chg="mod">
+          <ac:chgData name="克利 寳迫" userId="d1807dd80cee582b" providerId="LiveId" clId="{F79782EE-D85D-46E2-B3E9-FAE15D6BED98}" dt="2026-05-20T15:52:32.818" v="286" actId="1076"/>
+          <ac:grpSpMkLst>
+            <pc:docMk/>
+            <pc:sldMk cId="1896282833" sldId="270"/>
+            <ac:grpSpMk id="4" creationId="{D34AD894-73F6-D0BE-9775-55BC5794939C}"/>
+          </ac:grpSpMkLst>
+        </pc:grpChg>
+        <pc:picChg chg="mod">
+          <ac:chgData name="克利 寳迫" userId="d1807dd80cee582b" providerId="LiveId" clId="{F79782EE-D85D-46E2-B3E9-FAE15D6BED98}" dt="2026-05-20T15:52:24.895" v="283" actId="571"/>
+          <ac:picMkLst>
+            <pc:docMk/>
+            <pc:sldMk cId="1896282833" sldId="270"/>
+            <ac:picMk id="44" creationId="{B46A3AEA-0088-3F49-C5A2-2D610BACF850}"/>
+          </ac:picMkLst>
+        </pc:picChg>
+        <pc:picChg chg="mod">
+          <ac:chgData name="克利 寳迫" userId="d1807dd80cee582b" providerId="LiveId" clId="{F79782EE-D85D-46E2-B3E9-FAE15D6BED98}" dt="2026-05-20T15:52:13.883" v="278" actId="571"/>
+          <ac:picMkLst>
+            <pc:docMk/>
+            <pc:sldMk cId="1896282833" sldId="270"/>
+            <ac:picMk id="45" creationId="{E415B419-0472-861A-0E05-E2E5FA0C8931}"/>
+          </ac:picMkLst>
+        </pc:picChg>
+        <pc:cxnChg chg="add del mod">
+          <ac:chgData name="克利 寳迫" userId="d1807dd80cee582b" providerId="LiveId" clId="{F79782EE-D85D-46E2-B3E9-FAE15D6BED98}" dt="2026-05-20T15:52:10.429" v="277" actId="478"/>
+          <ac:cxnSpMkLst>
+            <pc:docMk/>
+            <pc:sldMk cId="1896282833" sldId="270"/>
+            <ac:cxnSpMk id="3" creationId="{6491D303-BEE3-99B9-02CF-0DC3A00E34D4}"/>
+          </ac:cxnSpMkLst>
+        </pc:cxnChg>
+        <pc:cxnChg chg="mod">
+          <ac:chgData name="克利 寳迫" userId="d1807dd80cee582b" providerId="LiveId" clId="{F79782EE-D85D-46E2-B3E9-FAE15D6BED98}" dt="2026-05-20T15:52:48.495" v="293" actId="14100"/>
+          <ac:cxnSpMkLst>
+            <pc:docMk/>
+            <pc:sldMk cId="1896282833" sldId="270"/>
+            <ac:cxnSpMk id="32" creationId="{F48CF319-1286-8005-6CDE-1348AEF0F36D}"/>
+          </ac:cxnSpMkLst>
+        </pc:cxnChg>
+        <pc:cxnChg chg="del">
+          <ac:chgData name="克利 寳迫" userId="d1807dd80cee582b" providerId="LiveId" clId="{F79782EE-D85D-46E2-B3E9-FAE15D6BED98}" dt="2026-05-20T15:51:41.149" v="268" actId="478"/>
+          <ac:cxnSpMkLst>
+            <pc:docMk/>
+            <pc:sldMk cId="1896282833" sldId="270"/>
+            <ac:cxnSpMk id="40" creationId="{9531DF12-26A9-4D7C-CE24-20585C2DD1A7}"/>
+          </ac:cxnSpMkLst>
+        </pc:cxnChg>
+      </pc:sldChg>
+      <pc:sldChg chg="delSp modSp mod">
+        <pc:chgData name="克利 寳迫" userId="d1807dd80cee582b" providerId="LiveId" clId="{F79782EE-D85D-46E2-B3E9-FAE15D6BED98}" dt="2026-05-20T15:54:02.400" v="324" actId="14100"/>
+        <pc:sldMkLst>
+          <pc:docMk/>
+          <pc:sldMk cId="1756455467" sldId="272"/>
+        </pc:sldMkLst>
+        <pc:spChg chg="mod">
+          <ac:chgData name="克利 寳迫" userId="d1807dd80cee582b" providerId="LiveId" clId="{F79782EE-D85D-46E2-B3E9-FAE15D6BED98}" dt="2026-05-20T15:54:02.400" v="324" actId="14100"/>
+          <ac:spMkLst>
+            <pc:docMk/>
+            <pc:sldMk cId="1756455467" sldId="272"/>
+            <ac:spMk id="7" creationId="{259965BE-6F31-3694-FEC6-95C7C9701470}"/>
+          </ac:spMkLst>
+        </pc:spChg>
+        <pc:spChg chg="del">
+          <ac:chgData name="克利 寳迫" userId="d1807dd80cee582b" providerId="LiveId" clId="{F79782EE-D85D-46E2-B3E9-FAE15D6BED98}" dt="2026-05-20T15:53:40.908" v="315" actId="478"/>
+          <ac:spMkLst>
+            <pc:docMk/>
+            <pc:sldMk cId="1756455467" sldId="272"/>
+            <ac:spMk id="11" creationId="{E3E9C6BB-950B-03DC-9E58-A1C19553896C}"/>
+          </ac:spMkLst>
+        </pc:spChg>
+        <pc:spChg chg="del">
+          <ac:chgData name="克利 寳迫" userId="d1807dd80cee582b" providerId="LiveId" clId="{F79782EE-D85D-46E2-B3E9-FAE15D6BED98}" dt="2026-05-20T15:53:38.147" v="313" actId="478"/>
+          <ac:spMkLst>
+            <pc:docMk/>
+            <pc:sldMk cId="1756455467" sldId="272"/>
+            <ac:spMk id="12" creationId="{149A7462-C999-12E6-B675-F1EBA43363B5}"/>
+          </ac:spMkLst>
+        </pc:spChg>
+        <pc:spChg chg="mod">
+          <ac:chgData name="克利 寳迫" userId="d1807dd80cee582b" providerId="LiveId" clId="{F79782EE-D85D-46E2-B3E9-FAE15D6BED98}" dt="2026-05-20T15:53:44.438" v="316" actId="14100"/>
+          <ac:spMkLst>
+            <pc:docMk/>
+            <pc:sldMk cId="1756455467" sldId="272"/>
+            <ac:spMk id="14" creationId="{524FFAF7-04AC-357F-A046-B2BB65C3BDC7}"/>
+          </ac:spMkLst>
+        </pc:spChg>
+        <pc:spChg chg="mod">
+          <ac:chgData name="克利 寳迫" userId="d1807dd80cee582b" providerId="LiveId" clId="{F79782EE-D85D-46E2-B3E9-FAE15D6BED98}" dt="2026-05-20T15:53:49.493" v="320" actId="1035"/>
+          <ac:spMkLst>
+            <pc:docMk/>
+            <pc:sldMk cId="1756455467" sldId="272"/>
+            <ac:spMk id="15" creationId="{518C7AB8-C111-A4F7-5441-EAC15C81D7E8}"/>
+          </ac:spMkLst>
+        </pc:spChg>
+        <pc:grpChg chg="mod">
+          <ac:chgData name="克利 寳迫" userId="d1807dd80cee582b" providerId="LiveId" clId="{F79782EE-D85D-46E2-B3E9-FAE15D6BED98}" dt="2026-05-20T15:53:10.975" v="294" actId="1076"/>
+          <ac:grpSpMkLst>
+            <pc:docMk/>
+            <pc:sldMk cId="1756455467" sldId="272"/>
+            <ac:grpSpMk id="6" creationId="{34422385-AB94-0DDF-A3BB-0760260918A5}"/>
+          </ac:grpSpMkLst>
+        </pc:grpChg>
+        <pc:picChg chg="mod modCrop">
+          <ac:chgData name="克利 寳迫" userId="d1807dd80cee582b" providerId="LiveId" clId="{F79782EE-D85D-46E2-B3E9-FAE15D6BED98}" dt="2026-05-20T15:53:54.024" v="321" actId="732"/>
+          <ac:picMkLst>
+            <pc:docMk/>
+            <pc:sldMk cId="1756455467" sldId="272"/>
+            <ac:picMk id="16" creationId="{C68341EB-8B79-6364-A68D-2A5B6E407882}"/>
+          </ac:picMkLst>
+        </pc:picChg>
+        <pc:cxnChg chg="mod">
+          <ac:chgData name="克利 寳迫" userId="d1807dd80cee582b" providerId="LiveId" clId="{F79782EE-D85D-46E2-B3E9-FAE15D6BED98}" dt="2026-05-20T15:53:49.493" v="320" actId="1035"/>
+          <ac:cxnSpMkLst>
+            <pc:docMk/>
+            <pc:sldMk cId="1756455467" sldId="272"/>
+            <ac:cxnSpMk id="10" creationId="{EF8C64C6-AE19-3031-E195-2DA1209387ED}"/>
+          </ac:cxnSpMkLst>
+        </pc:cxnChg>
+        <pc:cxnChg chg="del">
+          <ac:chgData name="克利 寳迫" userId="d1807dd80cee582b" providerId="LiveId" clId="{F79782EE-D85D-46E2-B3E9-FAE15D6BED98}" dt="2026-05-20T15:53:39.516" v="314" actId="478"/>
+          <ac:cxnSpMkLst>
+            <pc:docMk/>
+            <pc:sldMk cId="1756455467" sldId="272"/>
+            <ac:cxnSpMk id="13" creationId="{6B218F7A-B3A4-0D88-7638-02B8215A43B1}"/>
+          </ac:cxnSpMkLst>
+        </pc:cxnChg>
+      </pc:sldChg>
+      <pc:sldChg chg="addSp delSp modSp mod">
+        <pc:chgData name="克利 寳迫" userId="d1807dd80cee582b" providerId="LiveId" clId="{F79782EE-D85D-46E2-B3E9-FAE15D6BED98}" dt="2026-05-20T14:23:22.371" v="5"/>
+        <pc:sldMkLst>
+          <pc:docMk/>
+          <pc:sldMk cId="3211206668" sldId="273"/>
+        </pc:sldMkLst>
+        <pc:spChg chg="add mod">
+          <ac:chgData name="克利 寳迫" userId="d1807dd80cee582b" providerId="LiveId" clId="{F79782EE-D85D-46E2-B3E9-FAE15D6BED98}" dt="2026-05-20T14:23:22.371" v="5"/>
+          <ac:spMkLst>
+            <pc:docMk/>
+            <pc:sldMk cId="3211206668" sldId="273"/>
+            <ac:spMk id="2" creationId="{85DA2D8C-4CA5-FAFD-CDE5-13961094A041}"/>
+          </ac:spMkLst>
+        </pc:spChg>
+        <pc:spChg chg="del mod">
+          <ac:chgData name="克利 寳迫" userId="d1807dd80cee582b" providerId="LiveId" clId="{F79782EE-D85D-46E2-B3E9-FAE15D6BED98}" dt="2026-05-20T14:23:21.027" v="4" actId="21"/>
+          <ac:spMkLst>
+            <pc:docMk/>
+            <pc:sldMk cId="3211206668" sldId="273"/>
+            <ac:spMk id="34" creationId="{85DA2D8C-4CA5-FAFD-CDE5-13961094A041}"/>
+          </ac:spMkLst>
+        </pc:spChg>
+      </pc:sldChg>
+      <pc:sldChg chg="addSp delSp modSp new mod">
+        <pc:chgData name="克利 寳迫" userId="d1807dd80cee582b" providerId="LiveId" clId="{F79782EE-D85D-46E2-B3E9-FAE15D6BED98}" dt="2026-05-20T16:09:19.711" v="329"/>
+        <pc:sldMkLst>
+          <pc:docMk/>
+          <pc:sldMk cId="4128653299" sldId="274"/>
+        </pc:sldMkLst>
+        <pc:spChg chg="add mod">
+          <ac:chgData name="克利 寳迫" userId="d1807dd80cee582b" providerId="LiveId" clId="{F79782EE-D85D-46E2-B3E9-FAE15D6BED98}" dt="2026-05-20T15:05:40.018" v="207"/>
+          <ac:spMkLst>
+            <pc:docMk/>
+            <pc:sldMk cId="4128653299" sldId="274"/>
+            <ac:spMk id="2" creationId="{9A560A32-3E6F-F6E9-44C7-81089225D15D}"/>
+          </ac:spMkLst>
+        </pc:spChg>
+        <pc:spChg chg="del">
+          <ac:chgData name="克利 寳迫" userId="d1807dd80cee582b" providerId="LiveId" clId="{F79782EE-D85D-46E2-B3E9-FAE15D6BED98}" dt="2026-05-20T14:23:13.398" v="1" actId="478"/>
+          <ac:spMkLst>
+            <pc:docMk/>
+            <pc:sldMk cId="4128653299" sldId="274"/>
+            <ac:spMk id="2" creationId="{C86739D6-A2B2-D60A-C994-E5508E5C7F27}"/>
+          </ac:spMkLst>
+        </pc:spChg>
+        <pc:spChg chg="del">
+          <ac:chgData name="克利 寳迫" userId="d1807dd80cee582b" providerId="LiveId" clId="{F79782EE-D85D-46E2-B3E9-FAE15D6BED98}" dt="2026-05-20T14:23:13.398" v="1" actId="478"/>
+          <ac:spMkLst>
+            <pc:docMk/>
+            <pc:sldMk cId="4128653299" sldId="274"/>
+            <ac:spMk id="3" creationId="{52280AD5-FED0-ACBE-E28A-4A09EC30F1A4}"/>
+          </ac:spMkLst>
+        </pc:spChg>
+        <pc:spChg chg="add mod">
+          <ac:chgData name="克利 寳迫" userId="d1807dd80cee582b" providerId="LiveId" clId="{F79782EE-D85D-46E2-B3E9-FAE15D6BED98}" dt="2026-05-20T15:06:34.905" v="222" actId="14100"/>
+          <ac:spMkLst>
+            <pc:docMk/>
+            <pc:sldMk cId="4128653299" sldId="274"/>
+            <ac:spMk id="3" creationId="{ADBB93EF-B0AF-CD72-BA95-21FE12CD3C6D}"/>
+          </ac:spMkLst>
+        </pc:spChg>
+        <pc:spChg chg="add mod">
+          <ac:chgData name="克利 寳迫" userId="d1807dd80cee582b" providerId="LiveId" clId="{F79782EE-D85D-46E2-B3E9-FAE15D6BED98}" dt="2026-05-20T15:06:14.057" v="217" actId="571"/>
+          <ac:spMkLst>
+            <pc:docMk/>
+            <pc:sldMk cId="4128653299" sldId="274"/>
+            <ac:spMk id="6" creationId="{EA27C95E-54AC-FB79-A105-0376377D36E4}"/>
+          </ac:spMkLst>
+        </pc:spChg>
+        <pc:spChg chg="add mod">
+          <ac:chgData name="克利 寳迫" userId="d1807dd80cee582b" providerId="LiveId" clId="{F79782EE-D85D-46E2-B3E9-FAE15D6BED98}" dt="2026-05-20T15:07:21.145" v="249" actId="14100"/>
+          <ac:spMkLst>
+            <pc:docMk/>
+            <pc:sldMk cId="4128653299" sldId="274"/>
+            <ac:spMk id="8" creationId="{23BBA5F6-74BB-708F-E231-F64EB82C02B3}"/>
+          </ac:spMkLst>
+        </pc:spChg>
+        <pc:spChg chg="add del mod ord">
+          <ac:chgData name="克利 寳迫" userId="d1807dd80cee582b" providerId="LiveId" clId="{F79782EE-D85D-46E2-B3E9-FAE15D6BED98}" dt="2026-05-20T14:25:43.342" v="39" actId="478"/>
+          <ac:spMkLst>
+            <pc:docMk/>
+            <pc:sldMk cId="4128653299" sldId="274"/>
+            <ac:spMk id="8" creationId="{68D8182B-5487-C606-A4B2-B0527BE80903}"/>
+          </ac:spMkLst>
+        </pc:spChg>
+        <pc:spChg chg="add del mod">
+          <ac:chgData name="克利 寳迫" userId="d1807dd80cee582b" providerId="LiveId" clId="{F79782EE-D85D-46E2-B3E9-FAE15D6BED98}" dt="2026-05-20T15:06:00.416" v="211" actId="478"/>
+          <ac:spMkLst>
+            <pc:docMk/>
+            <pc:sldMk cId="4128653299" sldId="274"/>
+            <ac:spMk id="9" creationId="{6AB54591-48CF-1E75-4095-192EBE144360}"/>
+          </ac:spMkLst>
+        </pc:spChg>
+        <pc:spChg chg="add del mod ord topLvl">
+          <ac:chgData name="克利 寳迫" userId="d1807dd80cee582b" providerId="LiveId" clId="{F79782EE-D85D-46E2-B3E9-FAE15D6BED98}" dt="2026-05-20T15:07:56.131" v="259" actId="14100"/>
+          <ac:spMkLst>
+            <pc:docMk/>
+            <pc:sldMk cId="4128653299" sldId="274"/>
+            <ac:spMk id="11" creationId="{BDCADD1E-0985-3801-AE1C-7040717B24A8}"/>
+          </ac:spMkLst>
+        </pc:spChg>
+        <pc:spChg chg="add mod">
+          <ac:chgData name="克利 寳迫" userId="d1807dd80cee582b" providerId="LiveId" clId="{F79782EE-D85D-46E2-B3E9-FAE15D6BED98}" dt="2026-05-20T15:06:10.161" v="216" actId="571"/>
+          <ac:spMkLst>
+            <pc:docMk/>
+            <pc:sldMk cId="4128653299" sldId="274"/>
+            <ac:spMk id="12" creationId="{D68EB991-8043-FCE2-6F73-DFD890F23725}"/>
+          </ac:spMkLst>
+        </pc:spChg>
+        <pc:spChg chg="add del mod topLvl">
+          <ac:chgData name="克利 寳迫" userId="d1807dd80cee582b" providerId="LiveId" clId="{F79782EE-D85D-46E2-B3E9-FAE15D6BED98}" dt="2026-05-20T14:26:58.599" v="59" actId="478"/>
+          <ac:spMkLst>
+            <pc:docMk/>
+            <pc:sldMk cId="4128653299" sldId="274"/>
+            <ac:spMk id="15" creationId="{B86641E8-F67F-BD5C-982D-3BDC441A821A}"/>
+          </ac:spMkLst>
+        </pc:spChg>
+        <pc:spChg chg="del mod">
+          <ac:chgData name="克利 寳迫" userId="d1807dd80cee582b" providerId="LiveId" clId="{F79782EE-D85D-46E2-B3E9-FAE15D6BED98}" dt="2026-05-20T14:26:48.648" v="54" actId="478"/>
+          <ac:spMkLst>
+            <pc:docMk/>
+            <pc:sldMk cId="4128653299" sldId="274"/>
+            <ac:spMk id="16" creationId="{585A215F-17C1-D1BB-9E8D-21DA9BAB9369}"/>
+          </ac:spMkLst>
+        </pc:spChg>
+        <pc:spChg chg="del mod">
+          <ac:chgData name="克利 寳迫" userId="d1807dd80cee582b" providerId="LiveId" clId="{F79782EE-D85D-46E2-B3E9-FAE15D6BED98}" dt="2026-05-20T14:26:42.759" v="52" actId="478"/>
+          <ac:spMkLst>
+            <pc:docMk/>
+            <pc:sldMk cId="4128653299" sldId="274"/>
+            <ac:spMk id="18" creationId="{A7BA06CF-51A0-9040-BC52-35598AF515C0}"/>
+          </ac:spMkLst>
+        </pc:spChg>
+        <pc:spChg chg="del mod">
+          <ac:chgData name="克利 寳迫" userId="d1807dd80cee582b" providerId="LiveId" clId="{F79782EE-D85D-46E2-B3E9-FAE15D6BED98}" dt="2026-05-20T14:26:49.832" v="55" actId="478"/>
+          <ac:spMkLst>
+            <pc:docMk/>
+            <pc:sldMk cId="4128653299" sldId="274"/>
+            <ac:spMk id="19" creationId="{E6C0B2FE-190A-84E6-154C-800725891501}"/>
+          </ac:spMkLst>
+        </pc:spChg>
+        <pc:spChg chg="add mod">
+          <ac:chgData name="克利 寳迫" userId="d1807dd80cee582b" providerId="LiveId" clId="{F79782EE-D85D-46E2-B3E9-FAE15D6BED98}" dt="2026-05-20T15:06:14.057" v="217" actId="571"/>
+          <ac:spMkLst>
+            <pc:docMk/>
+            <pc:sldMk cId="4128653299" sldId="274"/>
+            <ac:spMk id="20" creationId="{610A502D-AC79-633A-55B5-6E3244F00B67}"/>
+          </ac:spMkLst>
+        </pc:spChg>
+        <pc:spChg chg="add mod">
+          <ac:chgData name="克利 寳迫" userId="d1807dd80cee582b" providerId="LiveId" clId="{F79782EE-D85D-46E2-B3E9-FAE15D6BED98}" dt="2026-05-20T15:06:14.057" v="217" actId="571"/>
+          <ac:spMkLst>
+            <pc:docMk/>
+            <pc:sldMk cId="4128653299" sldId="274"/>
+            <ac:spMk id="22" creationId="{770809E8-4657-14A3-1982-B8C3F9B7F4F2}"/>
+          </ac:spMkLst>
+        </pc:spChg>
+        <pc:spChg chg="add mod">
+          <ac:chgData name="克利 寳迫" userId="d1807dd80cee582b" providerId="LiveId" clId="{F79782EE-D85D-46E2-B3E9-FAE15D6BED98}" dt="2026-05-20T15:06:14.057" v="217" actId="571"/>
+          <ac:spMkLst>
+            <pc:docMk/>
+            <pc:sldMk cId="4128653299" sldId="274"/>
+            <ac:spMk id="23" creationId="{6EEBAE4E-AE95-D98E-94A0-17D2A598AD1A}"/>
+          </ac:spMkLst>
+        </pc:spChg>
+        <pc:spChg chg="add del mod">
+          <ac:chgData name="克利 寳迫" userId="d1807dd80cee582b" providerId="LiveId" clId="{F79782EE-D85D-46E2-B3E9-FAE15D6BED98}" dt="2026-05-20T14:28:22.103" v="90" actId="478"/>
+          <ac:spMkLst>
+            <pc:docMk/>
+            <pc:sldMk cId="4128653299" sldId="274"/>
+            <ac:spMk id="24" creationId="{D72F3EC8-CA6F-8235-ABBF-E48863E1F6C6}"/>
+          </ac:spMkLst>
+        </pc:spChg>
+        <pc:spChg chg="add mod">
+          <ac:chgData name="克利 寳迫" userId="d1807dd80cee582b" providerId="LiveId" clId="{F79782EE-D85D-46E2-B3E9-FAE15D6BED98}" dt="2026-05-20T15:06:14.057" v="217" actId="571"/>
+          <ac:spMkLst>
+            <pc:docMk/>
+            <pc:sldMk cId="4128653299" sldId="274"/>
+            <ac:spMk id="26" creationId="{1494FE8A-82E4-785F-62B9-69B7F50EBED9}"/>
+          </ac:spMkLst>
+        </pc:spChg>
+        <pc:spChg chg="add mod ord">
+          <ac:chgData name="克利 寳迫" userId="d1807dd80cee582b" providerId="LiveId" clId="{F79782EE-D85D-46E2-B3E9-FAE15D6BED98}" dt="2026-05-20T15:06:47.106" v="229" actId="6549"/>
+          <ac:spMkLst>
+            <pc:docMk/>
+            <pc:sldMk cId="4128653299" sldId="274"/>
+            <ac:spMk id="28" creationId="{244BF4C7-A25A-5F65-8C1C-B782C474FB9E}"/>
+          </ac:spMkLst>
+        </pc:spChg>
+        <pc:spChg chg="add mod">
+          <ac:chgData name="克利 寳迫" userId="d1807dd80cee582b" providerId="LiveId" clId="{F79782EE-D85D-46E2-B3E9-FAE15D6BED98}" dt="2026-05-20T16:09:19.711" v="329"/>
+          <ac:spMkLst>
+            <pc:docMk/>
+            <pc:sldMk cId="4128653299" sldId="274"/>
+            <ac:spMk id="30" creationId="{9DD442DF-8B4A-8F81-F54B-C3E6F7B6079B}"/>
+          </ac:spMkLst>
+        </pc:spChg>
+        <pc:grpChg chg="add del mod">
+          <ac:chgData name="克利 寳迫" userId="d1807dd80cee582b" providerId="LiveId" clId="{F79782EE-D85D-46E2-B3E9-FAE15D6BED98}" dt="2026-05-20T14:29:24.298" v="108" actId="164"/>
+          <ac:grpSpMkLst>
+            <pc:docMk/>
+            <pc:sldMk cId="4128653299" sldId="274"/>
+            <ac:grpSpMk id="7" creationId="{48B5744D-7749-0557-44E5-20CDE70C1CCD}"/>
+          </ac:grpSpMkLst>
+        </pc:grpChg>
+        <pc:grpChg chg="add del mod ord">
+          <ac:chgData name="克利 寳迫" userId="d1807dd80cee582b" providerId="LiveId" clId="{F79782EE-D85D-46E2-B3E9-FAE15D6BED98}" dt="2026-05-20T14:26:58.599" v="59" actId="478"/>
+          <ac:grpSpMkLst>
+            <pc:docMk/>
+            <pc:sldMk cId="4128653299" sldId="274"/>
+            <ac:grpSpMk id="10" creationId="{A57A364F-92CA-01E6-673E-C718D65F2B0B}"/>
+          </ac:grpSpMkLst>
+        </pc:grpChg>
+        <pc:grpChg chg="del mod">
+          <ac:chgData name="克利 寳迫" userId="d1807dd80cee582b" providerId="LiveId" clId="{F79782EE-D85D-46E2-B3E9-FAE15D6BED98}" dt="2026-05-20T14:26:49.832" v="55" actId="478"/>
+          <ac:grpSpMkLst>
+            <pc:docMk/>
+            <pc:sldMk cId="4128653299" sldId="274"/>
+            <ac:grpSpMk id="13" creationId="{9D136E67-E075-E810-E352-66BF09D6AB17}"/>
+          </ac:grpSpMkLst>
+        </pc:grpChg>
+        <pc:grpChg chg="add mod">
+          <ac:chgData name="克利 寳迫" userId="d1807dd80cee582b" providerId="LiveId" clId="{F79782EE-D85D-46E2-B3E9-FAE15D6BED98}" dt="2026-05-20T15:07:57.511" v="260" actId="1076"/>
+          <ac:grpSpMkLst>
+            <pc:docMk/>
+            <pc:sldMk cId="4128653299" sldId="274"/>
+            <ac:grpSpMk id="35" creationId="{F24242AD-E084-A267-717F-8A3E880178EC}"/>
+          </ac:grpSpMkLst>
+        </pc:grpChg>
+        <pc:picChg chg="add mod modCrop">
+          <ac:chgData name="克利 寳迫" userId="d1807dd80cee582b" providerId="LiveId" clId="{F79782EE-D85D-46E2-B3E9-FAE15D6BED98}" dt="2026-05-20T15:05:44.473" v="208" actId="571"/>
+          <ac:picMkLst>
+            <pc:docMk/>
+            <pc:sldMk cId="4128653299" sldId="274"/>
+            <ac:picMk id="4" creationId="{C326EA64-3A13-2414-910A-696E327BC751}"/>
+          </ac:picMkLst>
+        </pc:picChg>
+        <pc:picChg chg="add mod modCrop">
+          <ac:chgData name="克利 寳迫" userId="d1807dd80cee582b" providerId="LiveId" clId="{F79782EE-D85D-46E2-B3E9-FAE15D6BED98}" dt="2026-05-20T15:07:52.464" v="258" actId="732"/>
+          <ac:picMkLst>
+            <pc:docMk/>
+            <pc:sldMk cId="4128653299" sldId="274"/>
+            <ac:picMk id="5" creationId="{6F542B94-45EB-51AC-0F05-42649FF80ED0}"/>
+          </ac:picMkLst>
+        </pc:picChg>
+        <pc:picChg chg="add mod">
+          <ac:chgData name="克利 寳迫" userId="d1807dd80cee582b" providerId="LiveId" clId="{F79782EE-D85D-46E2-B3E9-FAE15D6BED98}" dt="2026-05-20T14:25:29.849" v="35" actId="1076"/>
+          <ac:picMkLst>
+            <pc:docMk/>
+            <pc:sldMk cId="4128653299" sldId="274"/>
+            <ac:picMk id="9" creationId="{62E830BD-0BDE-1C60-63FB-836217AD130F}"/>
+          </ac:picMkLst>
+        </pc:picChg>
+        <pc:picChg chg="del mod">
+          <ac:chgData name="克利 寳迫" userId="d1807dd80cee582b" providerId="LiveId" clId="{F79782EE-D85D-46E2-B3E9-FAE15D6BED98}" dt="2026-05-20T14:26:40.718" v="51" actId="478"/>
+          <ac:picMkLst>
+            <pc:docMk/>
+            <pc:sldMk cId="4128653299" sldId="274"/>
+            <ac:picMk id="12" creationId="{47917DB2-D1F5-CA8E-4C28-1C8683B9711B}"/>
+          </ac:picMkLst>
+        </pc:picChg>
+        <pc:cxnChg chg="mod">
+          <ac:chgData name="克利 寳迫" userId="d1807dd80cee582b" providerId="LiveId" clId="{F79782EE-D85D-46E2-B3E9-FAE15D6BED98}" dt="2026-05-20T15:06:16.457" v="218" actId="14100"/>
+          <ac:cxnSpMkLst>
+            <pc:docMk/>
+            <pc:sldMk cId="4128653299" sldId="274"/>
+            <ac:cxnSpMk id="13" creationId="{774674FF-C8B1-47B6-DD2E-BA11F583BE01}"/>
+          </ac:cxnSpMkLst>
+        </pc:cxnChg>
+        <pc:cxnChg chg="del mod">
+          <ac:chgData name="克利 寳迫" userId="d1807dd80cee582b" providerId="LiveId" clId="{F79782EE-D85D-46E2-B3E9-FAE15D6BED98}" dt="2026-05-20T14:26:51.030" v="56" actId="478"/>
+          <ac:cxnSpMkLst>
+            <pc:docMk/>
+            <pc:sldMk cId="4128653299" sldId="274"/>
+            <ac:cxnSpMk id="14" creationId="{B7C1BFA3-F4EF-9B4F-268F-733C22892DA4}"/>
+          </ac:cxnSpMkLst>
+        </pc:cxnChg>
+        <pc:cxnChg chg="del mod">
+          <ac:chgData name="克利 寳迫" userId="d1807dd80cee582b" providerId="LiveId" clId="{F79782EE-D85D-46E2-B3E9-FAE15D6BED98}" dt="2026-05-20T14:26:44.751" v="53" actId="478"/>
+          <ac:cxnSpMkLst>
+            <pc:docMk/>
+            <pc:sldMk cId="4128653299" sldId="274"/>
+            <ac:cxnSpMk id="17" creationId="{11A3D5F5-2C2A-3F1B-6547-8E03B071F3FB}"/>
+          </ac:cxnSpMkLst>
+        </pc:cxnChg>
+        <pc:cxnChg chg="add mod">
+          <ac:chgData name="克利 寳迫" userId="d1807dd80cee582b" providerId="LiveId" clId="{F79782EE-D85D-46E2-B3E9-FAE15D6BED98}" dt="2026-05-20T14:27:34.584" v="64" actId="1076"/>
+          <ac:cxnSpMkLst>
+            <pc:docMk/>
+            <pc:sldMk cId="4128653299" sldId="274"/>
+            <ac:cxnSpMk id="21" creationId="{6A5980CD-5F52-0E08-7E44-BCA67EA7097E}"/>
+          </ac:cxnSpMkLst>
+        </pc:cxnChg>
+        <pc:cxnChg chg="add mod">
+          <ac:chgData name="克利 寳迫" userId="d1807dd80cee582b" providerId="LiveId" clId="{F79782EE-D85D-46E2-B3E9-FAE15D6BED98}" dt="2026-05-20T15:05:17.468" v="202" actId="1076"/>
+          <ac:cxnSpMkLst>
+            <pc:docMk/>
+            <pc:sldMk cId="4128653299" sldId="274"/>
+            <ac:cxnSpMk id="29" creationId="{37BEDA1C-8FA3-24EB-8CEC-B4095372F9A0}"/>
+          </ac:cxnSpMkLst>
+        </pc:cxnChg>
+        <pc:cxnChg chg="add mod">
+          <ac:chgData name="克利 寳迫" userId="d1807dd80cee582b" providerId="LiveId" clId="{F79782EE-D85D-46E2-B3E9-FAE15D6BED98}" dt="2026-05-20T15:06:21.469" v="219" actId="1076"/>
+          <ac:cxnSpMkLst>
+            <pc:docMk/>
+            <pc:sldMk cId="4128653299" sldId="274"/>
+            <ac:cxnSpMk id="34" creationId="{CC2F1245-81AC-1F8C-87A3-53D6B2B905CB}"/>
+          </ac:cxnSpMkLst>
+        </pc:cxnChg>
+      </pc:sldChg>
+      <pc:sldChg chg="addSp delSp modSp new mod">
+        <pc:chgData name="克利 寳迫" userId="d1807dd80cee582b" providerId="LiveId" clId="{F79782EE-D85D-46E2-B3E9-FAE15D6BED98}" dt="2026-05-20T15:27:34.141" v="267" actId="732"/>
+        <pc:sldMkLst>
+          <pc:docMk/>
+          <pc:sldMk cId="1558768036" sldId="275"/>
+        </pc:sldMkLst>
+        <pc:spChg chg="del">
+          <ac:chgData name="克利 寳迫" userId="d1807dd80cee582b" providerId="LiveId" clId="{F79782EE-D85D-46E2-B3E9-FAE15D6BED98}" dt="2026-05-20T15:26:28.053" v="262" actId="478"/>
+          <ac:spMkLst>
+            <pc:docMk/>
+            <pc:sldMk cId="1558768036" sldId="275"/>
+            <ac:spMk id="2" creationId="{15D6DDC5-9964-8577-9549-CD093FF638AF}"/>
+          </ac:spMkLst>
+        </pc:spChg>
+        <pc:spChg chg="del">
+          <ac:chgData name="克利 寳迫" userId="d1807dd80cee582b" providerId="LiveId" clId="{F79782EE-D85D-46E2-B3E9-FAE15D6BED98}" dt="2026-05-20T15:26:28.053" v="262" actId="478"/>
+          <ac:spMkLst>
+            <pc:docMk/>
+            <pc:sldMk cId="1558768036" sldId="275"/>
+            <ac:spMk id="3" creationId="{FAEB16B2-6AA3-F415-CB49-445C840B68A1}"/>
+          </ac:spMkLst>
+        </pc:spChg>
+        <pc:picChg chg="add mod modCrop">
+          <ac:chgData name="克利 寳迫" userId="d1807dd80cee582b" providerId="LiveId" clId="{F79782EE-D85D-46E2-B3E9-FAE15D6BED98}" dt="2026-05-20T15:27:34.141" v="267" actId="732"/>
+          <ac:picMkLst>
+            <pc:docMk/>
+            <pc:sldMk cId="1558768036" sldId="275"/>
+            <ac:picMk id="5" creationId="{5872C2C5-250A-C120-82D3-BF91F13B4745}"/>
+          </ac:picMkLst>
+        </pc:picChg>
+        <pc:picChg chg="add">
+          <ac:chgData name="克利 寳迫" userId="d1807dd80cee582b" providerId="LiveId" clId="{F79782EE-D85D-46E2-B3E9-FAE15D6BED98}" dt="2026-05-20T15:26:58.594" v="265" actId="22"/>
+          <ac:picMkLst>
+            <pc:docMk/>
+            <pc:sldMk cId="1558768036" sldId="275"/>
+            <ac:picMk id="7" creationId="{40D457F4-59B6-647E-19D7-F67F20DD63F7}"/>
+          </ac:picMkLst>
+        </pc:picChg>
+      </pc:sldChg>
+    </pc:docChg>
+  </pc:docChgLst>
+</pc:chgInfo>
 </file>
 
 <file path=ppt/slideLayouts/slideLayout1.xml><?xml version="1.0" encoding="utf-8"?>
@@ -281,7 +876,7 @@
           <a:p>
             <a:fld id="{CB957B6A-6E51-4212-A048-7E8AFB564F0B}" type="datetimeFigureOut">
               <a:rPr kumimoji="1" lang="ja-JP" altLang="en-US" smtClean="0"/>
-              <a:t>2026/5/20</a:t>
+              <a:t>2026/5/21</a:t>
             </a:fld>
             <a:endParaRPr kumimoji="1" lang="ja-JP" altLang="en-US"/>
           </a:p>
@@ -511,7 +1106,7 @@
           <a:p>
             <a:fld id="{CB957B6A-6E51-4212-A048-7E8AFB564F0B}" type="datetimeFigureOut">
               <a:rPr kumimoji="1" lang="ja-JP" altLang="en-US" smtClean="0"/>
-              <a:t>2026/5/20</a:t>
+              <a:t>2026/5/21</a:t>
             </a:fld>
             <a:endParaRPr kumimoji="1" lang="ja-JP" altLang="en-US"/>
           </a:p>
@@ -751,7 +1346,7 @@
           <a:p>
             <a:fld id="{CB957B6A-6E51-4212-A048-7E8AFB564F0B}" type="datetimeFigureOut">
               <a:rPr kumimoji="1" lang="ja-JP" altLang="en-US" smtClean="0"/>
-              <a:t>2026/5/20</a:t>
+              <a:t>2026/5/21</a:t>
             </a:fld>
             <a:endParaRPr kumimoji="1" lang="ja-JP" altLang="en-US"/>
           </a:p>
@@ -981,7 +1576,7 @@
           <a:p>
             <a:fld id="{CB957B6A-6E51-4212-A048-7E8AFB564F0B}" type="datetimeFigureOut">
               <a:rPr kumimoji="1" lang="ja-JP" altLang="en-US" smtClean="0"/>
-              <a:t>2026/5/20</a:t>
+              <a:t>2026/5/21</a:t>
             </a:fld>
             <a:endParaRPr kumimoji="1" lang="ja-JP" altLang="en-US"/>
           </a:p>
@@ -1256,7 +1851,7 @@
           <a:p>
             <a:fld id="{CB957B6A-6E51-4212-A048-7E8AFB564F0B}" type="datetimeFigureOut">
               <a:rPr kumimoji="1" lang="ja-JP" altLang="en-US" smtClean="0"/>
-              <a:t>2026/5/20</a:t>
+              <a:t>2026/5/21</a:t>
             </a:fld>
             <a:endParaRPr kumimoji="1" lang="ja-JP" altLang="en-US"/>
           </a:p>
@@ -1585,7 +2180,7 @@
           <a:p>
             <a:fld id="{CB957B6A-6E51-4212-A048-7E8AFB564F0B}" type="datetimeFigureOut">
               <a:rPr kumimoji="1" lang="ja-JP" altLang="en-US" smtClean="0"/>
-              <a:t>2026/5/20</a:t>
+              <a:t>2026/5/21</a:t>
             </a:fld>
             <a:endParaRPr kumimoji="1" lang="ja-JP" altLang="en-US"/>
           </a:p>
@@ -2061,7 +2656,7 @@
           <a:p>
             <a:fld id="{CB957B6A-6E51-4212-A048-7E8AFB564F0B}" type="datetimeFigureOut">
               <a:rPr kumimoji="1" lang="ja-JP" altLang="en-US" smtClean="0"/>
-              <a:t>2026/5/20</a:t>
+              <a:t>2026/5/21</a:t>
             </a:fld>
             <a:endParaRPr kumimoji="1" lang="ja-JP" altLang="en-US"/>
           </a:p>
@@ -2202,7 +2797,7 @@
           <a:p>
             <a:fld id="{CB957B6A-6E51-4212-A048-7E8AFB564F0B}" type="datetimeFigureOut">
               <a:rPr kumimoji="1" lang="ja-JP" altLang="en-US" smtClean="0"/>
-              <a:t>2026/5/20</a:t>
+              <a:t>2026/5/21</a:t>
             </a:fld>
             <a:endParaRPr kumimoji="1" lang="ja-JP" altLang="en-US"/>
           </a:p>
@@ -2315,7 +2910,7 @@
           <a:p>
             <a:fld id="{CB957B6A-6E51-4212-A048-7E8AFB564F0B}" type="datetimeFigureOut">
               <a:rPr kumimoji="1" lang="ja-JP" altLang="en-US" smtClean="0"/>
-              <a:t>2026/5/20</a:t>
+              <a:t>2026/5/21</a:t>
             </a:fld>
             <a:endParaRPr kumimoji="1" lang="ja-JP" altLang="en-US"/>
           </a:p>
@@ -2658,7 +3253,7 @@
           <a:p>
             <a:fld id="{CB957B6A-6E51-4212-A048-7E8AFB564F0B}" type="datetimeFigureOut">
               <a:rPr kumimoji="1" lang="ja-JP" altLang="en-US" smtClean="0"/>
-              <a:t>2026/5/20</a:t>
+              <a:t>2026/5/21</a:t>
             </a:fld>
             <a:endParaRPr kumimoji="1" lang="ja-JP" altLang="en-US"/>
           </a:p>
@@ -2946,7 +3541,7 @@
           <a:p>
             <a:fld id="{CB957B6A-6E51-4212-A048-7E8AFB564F0B}" type="datetimeFigureOut">
               <a:rPr kumimoji="1" lang="ja-JP" altLang="en-US" smtClean="0"/>
-              <a:t>2026/5/20</a:t>
+              <a:t>2026/5/21</a:t>
             </a:fld>
             <a:endParaRPr kumimoji="1" lang="ja-JP" altLang="en-US"/>
           </a:p>
@@ -3219,7 +3814,7 @@
           <a:p>
             <a:fld id="{CB957B6A-6E51-4212-A048-7E8AFB564F0B}" type="datetimeFigureOut">
               <a:rPr kumimoji="1" lang="ja-JP" altLang="en-US" smtClean="0"/>
-              <a:t>2026/5/20</a:t>
+              <a:t>2026/5/21</a:t>
             </a:fld>
             <a:endParaRPr kumimoji="1" lang="ja-JP" altLang="en-US"/>
           </a:p>
@@ -4508,7 +5103,7 @@
               <a:p>
                 <a:pPr algn="l"/>
                 <a:r>
-                  <a:rPr kumimoji="1" lang="ja-JP" altLang="en-US" sz="1200" b="1">
+                  <a:rPr kumimoji="1" lang="ja-JP" altLang="en-US" sz="1200" b="1" dirty="0">
                     <a:solidFill>
                       <a:srgbClr val="FF0000"/>
                     </a:solidFill>
@@ -4759,10 +5354,10 @@
         </p:nvGrpSpPr>
         <p:grpSpPr>
           <a:xfrm>
-            <a:off x="490812" y="-1953707"/>
-            <a:ext cx="11210375" cy="10765413"/>
-            <a:chOff x="22563427" y="0"/>
-            <a:chExt cx="11615187" cy="9000136"/>
+            <a:off x="490812" y="348343"/>
+            <a:ext cx="11210375" cy="11520070"/>
+            <a:chOff x="22563427" y="-630912"/>
+            <a:chExt cx="11615187" cy="9631047"/>
           </a:xfrm>
         </p:grpSpPr>
         <p:sp>
@@ -4779,8 +5374,8 @@
           </p:nvSpPr>
           <p:spPr>
             <a:xfrm>
-              <a:off x="22563427" y="0"/>
-              <a:ext cx="11615187" cy="9000136"/>
+              <a:off x="22563427" y="-630912"/>
+              <a:ext cx="11615187" cy="9631047"/>
             </a:xfrm>
             <a:prstGeom prst="rect">
               <a:avLst/>
@@ -4920,10 +5515,10 @@
           </p:nvGrpSpPr>
           <p:grpSpPr>
             <a:xfrm>
-              <a:off x="24024833" y="153084"/>
-              <a:ext cx="8749542" cy="8535500"/>
-              <a:chOff x="24024833" y="153084"/>
-              <a:chExt cx="10601325" cy="10414228"/>
+              <a:off x="24024833" y="-252322"/>
+              <a:ext cx="8749542" cy="8940906"/>
+              <a:chOff x="24024833" y="-341555"/>
+              <a:chExt cx="10601325" cy="10908867"/>
             </a:xfrm>
           </p:grpSpPr>
           <p:pic>
@@ -4944,15 +5539,15 @@
               <a:blip r:embed="rId2">
                 <a:alphaModFix/>
               </a:blip>
-              <a:srcRect l="3250" t="65160" r="4513"/>
+              <a:srcRect l="3250" t="59479" r="4513"/>
               <a:stretch>
                 <a:fillRect/>
               </a:stretch>
             </p:blipFill>
             <p:spPr>
               <a:xfrm>
-                <a:off x="24024833" y="153084"/>
-                <a:ext cx="10544175" cy="3033518"/>
+                <a:off x="24024833" y="-341555"/>
+                <a:ext cx="10544176" cy="3528157"/>
               </a:xfrm>
               <a:prstGeom prst="rect">
                 <a:avLst/>
@@ -5040,18 +5635,18 @@
           </p:nvGrpSpPr>
           <p:grpSpPr>
             <a:xfrm>
-              <a:off x="24219490" y="276180"/>
-              <a:ext cx="8354353" cy="8211272"/>
-              <a:chOff x="24219488" y="276180"/>
-              <a:chExt cx="8555619" cy="7178228"/>
+              <a:off x="24219491" y="-481000"/>
+              <a:ext cx="8354352" cy="8968453"/>
+              <a:chOff x="24219489" y="-385741"/>
+              <a:chExt cx="8555618" cy="7840150"/>
             </a:xfrm>
           </p:grpSpPr>
           <p:sp>
             <p:nvSpPr>
-              <p:cNvPr id="11" name="正方形/長方形 10">
+              <p:cNvPr id="14" name="正方形/長方形 13">
                 <a:extLst>
                   <a:ext uri="{FF2B5EF4-FFF2-40B4-BE49-F238E27FC236}">
-                    <a16:creationId xmlns:a16="http://schemas.microsoft.com/office/drawing/2014/main" id="{E3E9C6BB-950B-03DC-9E58-A1C19553896C}"/>
+                    <a16:creationId xmlns:a16="http://schemas.microsoft.com/office/drawing/2014/main" id="{524FFAF7-04AC-357F-A046-B2BB65C3BDC7}"/>
                   </a:ext>
                 </a:extLst>
               </p:cNvPr>
@@ -5060,8 +5655,8 @@
             </p:nvSpPr>
             <p:spPr>
               <a:xfrm>
-                <a:off x="24219488" y="356412"/>
-                <a:ext cx="1027438" cy="372243"/>
+                <a:off x="24219489" y="176951"/>
+                <a:ext cx="8555618" cy="7277458"/>
               </a:xfrm>
               <a:prstGeom prst="rect">
                 <a:avLst/>
@@ -5190,10 +5785,10 @@
           </p:sp>
           <p:sp>
             <p:nvSpPr>
-              <p:cNvPr id="12" name="正方形/長方形 11">
+              <p:cNvPr id="15" name="正方形/長方形 14">
                 <a:extLst>
                   <a:ext uri="{FF2B5EF4-FFF2-40B4-BE49-F238E27FC236}">
-                    <a16:creationId xmlns:a16="http://schemas.microsoft.com/office/drawing/2014/main" id="{149A7462-C999-12E6-B675-F1EBA43363B5}"/>
+                    <a16:creationId xmlns:a16="http://schemas.microsoft.com/office/drawing/2014/main" id="{518C7AB8-C111-A4F7-5441-EAC15C81D7E8}"/>
                   </a:ext>
                 </a:extLst>
               </p:cNvPr>
@@ -5202,8 +5797,8 @@
             </p:nvSpPr>
             <p:spPr>
               <a:xfrm>
-                <a:off x="25830877" y="327018"/>
-                <a:ext cx="1640081" cy="400743"/>
+                <a:off x="29831840" y="-385741"/>
+                <a:ext cx="1235754" cy="420485"/>
               </a:xfrm>
               <a:prstGeom prst="rect">
                 <a:avLst/>
@@ -5325,343 +5920,12 @@
               <a:p>
                 <a:pPr algn="l"/>
                 <a:r>
-                  <a:rPr kumimoji="1" lang="ja-JP" altLang="en-US" sz="1200" b="1">
+                  <a:rPr kumimoji="1" lang="ja-JP" altLang="en-US" sz="1200" b="1" dirty="0">
                     <a:solidFill>
                       <a:srgbClr val="FF0000"/>
                     </a:solidFill>
                   </a:rPr>
-                  <a:t>③特技の数を設定</a:t>
-                </a:r>
-              </a:p>
-            </p:txBody>
-          </p:sp>
-          <p:cxnSp>
-            <p:nvCxnSpPr>
-              <p:cNvPr id="13" name="直線矢印コネクタ 12">
-                <a:extLst>
-                  <a:ext uri="{FF2B5EF4-FFF2-40B4-BE49-F238E27FC236}">
-                    <a16:creationId xmlns:a16="http://schemas.microsoft.com/office/drawing/2014/main" id="{6B218F7A-B3A4-0D88-7638-02B8215A43B1}"/>
-                  </a:ext>
-                </a:extLst>
-              </p:cNvPr>
-              <p:cNvCxnSpPr/>
-              <p:nvPr/>
-            </p:nvCxnSpPr>
-            <p:spPr>
-              <a:xfrm flipH="1">
-                <a:off x="25264597" y="540921"/>
-                <a:ext cx="547825" cy="1195"/>
-              </a:xfrm>
-              <a:prstGeom prst="straightConnector1">
-                <a:avLst/>
-              </a:prstGeom>
-              <a:ln w="28575">
-                <a:solidFill>
-                  <a:srgbClr val="FF0000"/>
-                </a:solidFill>
-                <a:tailEnd type="triangle"/>
-              </a:ln>
-            </p:spPr>
-            <p:style>
-              <a:lnRef idx="2">
-                <a:schemeClr val="accent1"/>
-              </a:lnRef>
-              <a:fillRef idx="0">
-                <a:schemeClr val="accent1"/>
-              </a:fillRef>
-              <a:effectRef idx="1">
-                <a:schemeClr val="accent1"/>
-              </a:effectRef>
-              <a:fontRef idx="minor">
-                <a:schemeClr val="tx1"/>
-              </a:fontRef>
-            </p:style>
-          </p:cxnSp>
-          <p:sp>
-            <p:nvSpPr>
-              <p:cNvPr id="14" name="正方形/長方形 13">
-                <a:extLst>
-                  <a:ext uri="{FF2B5EF4-FFF2-40B4-BE49-F238E27FC236}">
-                    <a16:creationId xmlns:a16="http://schemas.microsoft.com/office/drawing/2014/main" id="{524FFAF7-04AC-357F-A046-B2BB65C3BDC7}"/>
-                  </a:ext>
-                </a:extLst>
-              </p:cNvPr>
-              <p:cNvSpPr/>
-              <p:nvPr/>
-            </p:nvSpPr>
-            <p:spPr>
-              <a:xfrm>
-                <a:off x="24219489" y="839552"/>
-                <a:ext cx="8555618" cy="6614856"/>
-              </a:xfrm>
-              <a:prstGeom prst="rect">
-                <a:avLst/>
-              </a:prstGeom>
-              <a:noFill/>
-              <a:ln w="28575">
-                <a:solidFill>
-                  <a:srgbClr val="FF0000"/>
-                </a:solidFill>
-                <a:prstDash val="solid"/>
-              </a:ln>
-            </p:spPr>
-            <p:style>
-              <a:lnRef idx="2">
-                <a:schemeClr val="accent6"/>
-              </a:lnRef>
-              <a:fillRef idx="1">
-                <a:schemeClr val="lt1"/>
-              </a:fillRef>
-              <a:effectRef idx="0">
-                <a:schemeClr val="accent6"/>
-              </a:effectRef>
-              <a:fontRef idx="minor">
-                <a:schemeClr val="dk1"/>
-              </a:fontRef>
-            </p:style>
-            <p:txBody>
-              <a:bodyPr rtlCol="0" anchor="t"/>
-              <a:lstStyle>
-                <a:lvl1pPr marL="0" indent="0">
-                  <a:defRPr sz="1100">
-                    <a:solidFill>
-                      <a:schemeClr val="dk1"/>
-                    </a:solidFill>
-                    <a:latin typeface="+mn-lt"/>
-                    <a:ea typeface="+mn-ea"/>
-                    <a:cs typeface="+mn-cs"/>
-                  </a:defRPr>
-                </a:lvl1pPr>
-                <a:lvl2pPr marL="457200" indent="0">
-                  <a:defRPr sz="1100">
-                    <a:solidFill>
-                      <a:schemeClr val="dk1"/>
-                    </a:solidFill>
-                    <a:latin typeface="+mn-lt"/>
-                    <a:ea typeface="+mn-ea"/>
-                    <a:cs typeface="+mn-cs"/>
-                  </a:defRPr>
-                </a:lvl2pPr>
-                <a:lvl3pPr marL="914400" indent="0">
-                  <a:defRPr sz="1100">
-                    <a:solidFill>
-                      <a:schemeClr val="dk1"/>
-                    </a:solidFill>
-                    <a:latin typeface="+mn-lt"/>
-                    <a:ea typeface="+mn-ea"/>
-                    <a:cs typeface="+mn-cs"/>
-                  </a:defRPr>
-                </a:lvl3pPr>
-                <a:lvl4pPr marL="1371600" indent="0">
-                  <a:defRPr sz="1100">
-                    <a:solidFill>
-                      <a:schemeClr val="dk1"/>
-                    </a:solidFill>
-                    <a:latin typeface="+mn-lt"/>
-                    <a:ea typeface="+mn-ea"/>
-                    <a:cs typeface="+mn-cs"/>
-                  </a:defRPr>
-                </a:lvl4pPr>
-                <a:lvl5pPr marL="1828800" indent="0">
-                  <a:defRPr sz="1100">
-                    <a:solidFill>
-                      <a:schemeClr val="dk1"/>
-                    </a:solidFill>
-                    <a:latin typeface="+mn-lt"/>
-                    <a:ea typeface="+mn-ea"/>
-                    <a:cs typeface="+mn-cs"/>
-                  </a:defRPr>
-                </a:lvl5pPr>
-                <a:lvl6pPr marL="2286000" indent="0">
-                  <a:defRPr sz="1100">
-                    <a:solidFill>
-                      <a:schemeClr val="dk1"/>
-                    </a:solidFill>
-                    <a:latin typeface="+mn-lt"/>
-                    <a:ea typeface="+mn-ea"/>
-                    <a:cs typeface="+mn-cs"/>
-                  </a:defRPr>
-                </a:lvl6pPr>
-                <a:lvl7pPr marL="2743200" indent="0">
-                  <a:defRPr sz="1100">
-                    <a:solidFill>
-                      <a:schemeClr val="dk1"/>
-                    </a:solidFill>
-                    <a:latin typeface="+mn-lt"/>
-                    <a:ea typeface="+mn-ea"/>
-                    <a:cs typeface="+mn-cs"/>
-                  </a:defRPr>
-                </a:lvl7pPr>
-                <a:lvl8pPr marL="3200400" indent="0">
-                  <a:defRPr sz="1100">
-                    <a:solidFill>
-                      <a:schemeClr val="dk1"/>
-                    </a:solidFill>
-                    <a:latin typeface="+mn-lt"/>
-                    <a:ea typeface="+mn-ea"/>
-                    <a:cs typeface="+mn-cs"/>
-                  </a:defRPr>
-                </a:lvl8pPr>
-                <a:lvl9pPr marL="3657600" indent="0">
-                  <a:defRPr sz="1100">
-                    <a:solidFill>
-                      <a:schemeClr val="dk1"/>
-                    </a:solidFill>
-                    <a:latin typeface="+mn-lt"/>
-                    <a:ea typeface="+mn-ea"/>
-                    <a:cs typeface="+mn-cs"/>
-                  </a:defRPr>
-                </a:lvl9pPr>
-              </a:lstStyle>
-              <a:p>
-                <a:pPr algn="l"/>
-                <a:endParaRPr kumimoji="1" lang="ja-JP" altLang="en-US" sz="1100"/>
-              </a:p>
-            </p:txBody>
-          </p:sp>
-          <p:sp>
-            <p:nvSpPr>
-              <p:cNvPr id="15" name="正方形/長方形 14">
-                <a:extLst>
-                  <a:ext uri="{FF2B5EF4-FFF2-40B4-BE49-F238E27FC236}">
-                    <a16:creationId xmlns:a16="http://schemas.microsoft.com/office/drawing/2014/main" id="{518C7AB8-C111-A4F7-5441-EAC15C81D7E8}"/>
-                  </a:ext>
-                </a:extLst>
-              </p:cNvPr>
-              <p:cNvSpPr/>
-              <p:nvPr/>
-            </p:nvSpPr>
-            <p:spPr>
-              <a:xfrm>
-                <a:off x="29874008" y="276180"/>
-                <a:ext cx="1151417" cy="420485"/>
-              </a:xfrm>
-              <a:prstGeom prst="rect">
-                <a:avLst/>
-              </a:prstGeom>
-              <a:ln w="28575">
-                <a:solidFill>
-                  <a:srgbClr val="FF0000"/>
-                </a:solidFill>
-              </a:ln>
-            </p:spPr>
-            <p:style>
-              <a:lnRef idx="2">
-                <a:schemeClr val="accent6"/>
-              </a:lnRef>
-              <a:fillRef idx="1">
-                <a:schemeClr val="lt1"/>
-              </a:fillRef>
-              <a:effectRef idx="0">
-                <a:schemeClr val="accent6"/>
-              </a:effectRef>
-              <a:fontRef idx="minor">
-                <a:schemeClr val="dk1"/>
-              </a:fontRef>
-            </p:style>
-            <p:txBody>
-              <a:bodyPr rtlCol="0" anchor="ctr"/>
-              <a:lstStyle>
-                <a:lvl1pPr marL="0" indent="0">
-                  <a:defRPr sz="1100">
-                    <a:solidFill>
-                      <a:schemeClr val="dk1"/>
-                    </a:solidFill>
-                    <a:latin typeface="+mn-lt"/>
-                    <a:ea typeface="+mn-ea"/>
-                    <a:cs typeface="+mn-cs"/>
-                  </a:defRPr>
-                </a:lvl1pPr>
-                <a:lvl2pPr marL="457200" indent="0">
-                  <a:defRPr sz="1100">
-                    <a:solidFill>
-                      <a:schemeClr val="dk1"/>
-                    </a:solidFill>
-                    <a:latin typeface="+mn-lt"/>
-                    <a:ea typeface="+mn-ea"/>
-                    <a:cs typeface="+mn-cs"/>
-                  </a:defRPr>
-                </a:lvl2pPr>
-                <a:lvl3pPr marL="914400" indent="0">
-                  <a:defRPr sz="1100">
-                    <a:solidFill>
-                      <a:schemeClr val="dk1"/>
-                    </a:solidFill>
-                    <a:latin typeface="+mn-lt"/>
-                    <a:ea typeface="+mn-ea"/>
-                    <a:cs typeface="+mn-cs"/>
-                  </a:defRPr>
-                </a:lvl3pPr>
-                <a:lvl4pPr marL="1371600" indent="0">
-                  <a:defRPr sz="1100">
-                    <a:solidFill>
-                      <a:schemeClr val="dk1"/>
-                    </a:solidFill>
-                    <a:latin typeface="+mn-lt"/>
-                    <a:ea typeface="+mn-ea"/>
-                    <a:cs typeface="+mn-cs"/>
-                  </a:defRPr>
-                </a:lvl4pPr>
-                <a:lvl5pPr marL="1828800" indent="0">
-                  <a:defRPr sz="1100">
-                    <a:solidFill>
-                      <a:schemeClr val="dk1"/>
-                    </a:solidFill>
-                    <a:latin typeface="+mn-lt"/>
-                    <a:ea typeface="+mn-ea"/>
-                    <a:cs typeface="+mn-cs"/>
-                  </a:defRPr>
-                </a:lvl5pPr>
-                <a:lvl6pPr marL="2286000" indent="0">
-                  <a:defRPr sz="1100">
-                    <a:solidFill>
-                      <a:schemeClr val="dk1"/>
-                    </a:solidFill>
-                    <a:latin typeface="+mn-lt"/>
-                    <a:ea typeface="+mn-ea"/>
-                    <a:cs typeface="+mn-cs"/>
-                  </a:defRPr>
-                </a:lvl6pPr>
-                <a:lvl7pPr marL="2743200" indent="0">
-                  <a:defRPr sz="1100">
-                    <a:solidFill>
-                      <a:schemeClr val="dk1"/>
-                    </a:solidFill>
-                    <a:latin typeface="+mn-lt"/>
-                    <a:ea typeface="+mn-ea"/>
-                    <a:cs typeface="+mn-cs"/>
-                  </a:defRPr>
-                </a:lvl7pPr>
-                <a:lvl8pPr marL="3200400" indent="0">
-                  <a:defRPr sz="1100">
-                    <a:solidFill>
-                      <a:schemeClr val="dk1"/>
-                    </a:solidFill>
-                    <a:latin typeface="+mn-lt"/>
-                    <a:ea typeface="+mn-ea"/>
-                    <a:cs typeface="+mn-cs"/>
-                  </a:defRPr>
-                </a:lvl8pPr>
-                <a:lvl9pPr marL="3657600" indent="0">
-                  <a:defRPr sz="1100">
-                    <a:solidFill>
-                      <a:schemeClr val="dk1"/>
-                    </a:solidFill>
-                    <a:latin typeface="+mn-lt"/>
-                    <a:ea typeface="+mn-ea"/>
-                    <a:cs typeface="+mn-cs"/>
-                  </a:defRPr>
-                </a:lvl9pPr>
-              </a:lstStyle>
-              <a:p>
-                <a:pPr algn="l"/>
-                <a:r>
-                  <a:rPr kumimoji="1" lang="ja-JP" altLang="en-US" sz="1200" b="1">
-                    <a:solidFill>
-                      <a:srgbClr val="FF0000"/>
-                    </a:solidFill>
-                  </a:rPr>
-                  <a:t>④特技の入力</a:t>
+                  <a:t>③特技の入力</a:t>
                 </a:r>
               </a:p>
             </p:txBody>
@@ -5681,7 +5945,7 @@
           </p:nvCxnSpPr>
           <p:spPr>
             <a:xfrm>
-              <a:off x="30297352" y="748947"/>
+              <a:off x="30297352" y="-8234"/>
               <a:ext cx="0" cy="156961"/>
             </a:xfrm>
             <a:prstGeom prst="straightConnector1">
@@ -7642,7 +7906,7 @@
       </p:sp>
       <p:sp>
         <p:nvSpPr>
-          <p:cNvPr id="34" name="フリーフォーム: 図形 33">
+          <p:cNvPr id="2" name="フリーフォーム: 図形 1">
             <a:extLst>
               <a:ext uri="{FF2B5EF4-FFF2-40B4-BE49-F238E27FC236}">
                 <a16:creationId xmlns:a16="http://schemas.microsoft.com/office/drawing/2014/main" id="{85DA2D8C-4CA5-FAFD-CDE5-13961094A041}"/>
@@ -7654,7 +7918,7 @@
         </p:nvSpPr>
         <p:spPr>
           <a:xfrm>
-            <a:off x="1048875" y="5071499"/>
+            <a:off x="1067316" y="4570740"/>
             <a:ext cx="10079998" cy="405000"/>
           </a:xfrm>
           <a:custGeom>
@@ -8290,6 +8554,2381 @@
 </p:sld>
 </file>
 
+<file path=ppt/slides/slide13.xml><?xml version="1.0" encoding="utf-8"?>
+<p:sld xmlns:a="http://schemas.openxmlformats.org/drawingml/2006/main" xmlns:r="http://schemas.openxmlformats.org/officeDocument/2006/relationships" xmlns:p="http://schemas.openxmlformats.org/presentationml/2006/main">
+  <p:cSld>
+    <p:spTree>
+      <p:nvGrpSpPr>
+        <p:cNvPr id="1" name=""/>
+        <p:cNvGrpSpPr/>
+        <p:nvPr/>
+      </p:nvGrpSpPr>
+      <p:grpSpPr>
+        <a:xfrm>
+          <a:off x="0" y="0"/>
+          <a:ext cx="0" cy="0"/>
+          <a:chOff x="0" y="0"/>
+          <a:chExt cx="0" cy="0"/>
+        </a:xfrm>
+      </p:grpSpPr>
+      <p:grpSp>
+        <p:nvGrpSpPr>
+          <p:cNvPr id="35" name="グループ化 34">
+            <a:extLst>
+              <a:ext uri="{FF2B5EF4-FFF2-40B4-BE49-F238E27FC236}">
+                <a16:creationId xmlns:a16="http://schemas.microsoft.com/office/drawing/2014/main" id="{F24242AD-E084-A267-717F-8A3E880178EC}"/>
+              </a:ext>
+            </a:extLst>
+          </p:cNvPr>
+          <p:cNvGrpSpPr/>
+          <p:nvPr/>
+        </p:nvGrpSpPr>
+        <p:grpSpPr>
+          <a:xfrm>
+            <a:off x="391886" y="-3241295"/>
+            <a:ext cx="11210374" cy="10367809"/>
+            <a:chOff x="-227804" y="198591"/>
+            <a:chExt cx="11210374" cy="10367809"/>
+          </a:xfrm>
+        </p:grpSpPr>
+        <p:sp>
+          <p:nvSpPr>
+            <p:cNvPr id="11" name="正方形/長方形 10">
+              <a:extLst>
+                <a:ext uri="{FF2B5EF4-FFF2-40B4-BE49-F238E27FC236}">
+                  <a16:creationId xmlns:a16="http://schemas.microsoft.com/office/drawing/2014/main" id="{BDCADD1E-0985-3801-AE1C-7040717B24A8}"/>
+                </a:ext>
+              </a:extLst>
+            </p:cNvPr>
+            <p:cNvSpPr/>
+            <p:nvPr/>
+          </p:nvSpPr>
+          <p:spPr>
+            <a:xfrm>
+              <a:off x="-227804" y="198591"/>
+              <a:ext cx="11210374" cy="10280723"/>
+            </a:xfrm>
+            <a:prstGeom prst="rect">
+              <a:avLst/>
+            </a:prstGeom>
+            <a:ln>
+              <a:noFill/>
+            </a:ln>
+          </p:spPr>
+          <p:style>
+            <a:lnRef idx="2">
+              <a:schemeClr val="dk1"/>
+            </a:lnRef>
+            <a:fillRef idx="1">
+              <a:schemeClr val="lt1"/>
+            </a:fillRef>
+            <a:effectRef idx="0">
+              <a:schemeClr val="dk1"/>
+            </a:effectRef>
+            <a:fontRef idx="minor">
+              <a:schemeClr val="dk1"/>
+            </a:fontRef>
+          </p:style>
+          <p:txBody>
+            <a:bodyPr wrap="square" rtlCol="0" anchor="ctr"/>
+            <a:lstStyle>
+              <a:defPPr>
+                <a:defRPr lang="ja-JP"/>
+              </a:defPPr>
+              <a:lvl1pPr marL="0" indent="0" algn="l" defTabSz="914400" rtl="0" eaLnBrk="1" latinLnBrk="0" hangingPunct="1">
+                <a:defRPr kumimoji="1" sz="1800" kern="1200">
+                  <a:solidFill>
+                    <a:schemeClr val="dk1"/>
+                  </a:solidFill>
+                  <a:latin typeface="+mn-lt"/>
+                  <a:ea typeface="+mn-ea"/>
+                  <a:cs typeface="+mn-cs"/>
+                </a:defRPr>
+              </a:lvl1pPr>
+              <a:lvl2pPr marL="457200" indent="0" algn="l" defTabSz="914400" rtl="0" eaLnBrk="1" latinLnBrk="0" hangingPunct="1">
+                <a:defRPr kumimoji="1" sz="1800" kern="1200">
+                  <a:solidFill>
+                    <a:schemeClr val="dk1"/>
+                  </a:solidFill>
+                  <a:latin typeface="+mn-lt"/>
+                  <a:ea typeface="+mn-ea"/>
+                  <a:cs typeface="+mn-cs"/>
+                </a:defRPr>
+              </a:lvl2pPr>
+              <a:lvl3pPr marL="914400" indent="0" algn="l" defTabSz="914400" rtl="0" eaLnBrk="1" latinLnBrk="0" hangingPunct="1">
+                <a:defRPr kumimoji="1" sz="1800" kern="1200">
+                  <a:solidFill>
+                    <a:schemeClr val="dk1"/>
+                  </a:solidFill>
+                  <a:latin typeface="+mn-lt"/>
+                  <a:ea typeface="+mn-ea"/>
+                  <a:cs typeface="+mn-cs"/>
+                </a:defRPr>
+              </a:lvl3pPr>
+              <a:lvl4pPr marL="1371600" indent="0" algn="l" defTabSz="914400" rtl="0" eaLnBrk="1" latinLnBrk="0" hangingPunct="1">
+                <a:defRPr kumimoji="1" sz="1800" kern="1200">
+                  <a:solidFill>
+                    <a:schemeClr val="dk1"/>
+                  </a:solidFill>
+                  <a:latin typeface="+mn-lt"/>
+                  <a:ea typeface="+mn-ea"/>
+                  <a:cs typeface="+mn-cs"/>
+                </a:defRPr>
+              </a:lvl4pPr>
+              <a:lvl5pPr marL="1828800" indent="0" algn="l" defTabSz="914400" rtl="0" eaLnBrk="1" latinLnBrk="0" hangingPunct="1">
+                <a:defRPr kumimoji="1" sz="1800" kern="1200">
+                  <a:solidFill>
+                    <a:schemeClr val="dk1"/>
+                  </a:solidFill>
+                  <a:latin typeface="+mn-lt"/>
+                  <a:ea typeface="+mn-ea"/>
+                  <a:cs typeface="+mn-cs"/>
+                </a:defRPr>
+              </a:lvl5pPr>
+              <a:lvl6pPr marL="2286000" indent="0" algn="l" defTabSz="914400" rtl="0" eaLnBrk="1" latinLnBrk="0" hangingPunct="1">
+                <a:defRPr kumimoji="1" sz="1800" kern="1200">
+                  <a:solidFill>
+                    <a:schemeClr val="dk1"/>
+                  </a:solidFill>
+                  <a:latin typeface="+mn-lt"/>
+                  <a:ea typeface="+mn-ea"/>
+                  <a:cs typeface="+mn-cs"/>
+                </a:defRPr>
+              </a:lvl6pPr>
+              <a:lvl7pPr marL="2743200" indent="0" algn="l" defTabSz="914400" rtl="0" eaLnBrk="1" latinLnBrk="0" hangingPunct="1">
+                <a:defRPr kumimoji="1" sz="1800" kern="1200">
+                  <a:solidFill>
+                    <a:schemeClr val="dk1"/>
+                  </a:solidFill>
+                  <a:latin typeface="+mn-lt"/>
+                  <a:ea typeface="+mn-ea"/>
+                  <a:cs typeface="+mn-cs"/>
+                </a:defRPr>
+              </a:lvl7pPr>
+              <a:lvl8pPr marL="3200400" indent="0" algn="l" defTabSz="914400" rtl="0" eaLnBrk="1" latinLnBrk="0" hangingPunct="1">
+                <a:defRPr kumimoji="1" sz="1800" kern="1200">
+                  <a:solidFill>
+                    <a:schemeClr val="dk1"/>
+                  </a:solidFill>
+                  <a:latin typeface="+mn-lt"/>
+                  <a:ea typeface="+mn-ea"/>
+                  <a:cs typeface="+mn-cs"/>
+                </a:defRPr>
+              </a:lvl8pPr>
+              <a:lvl9pPr marL="3657600" indent="0" algn="l" defTabSz="914400" rtl="0" eaLnBrk="1" latinLnBrk="0" hangingPunct="1">
+                <a:defRPr kumimoji="1" sz="1800" kern="1200">
+                  <a:solidFill>
+                    <a:schemeClr val="dk1"/>
+                  </a:solidFill>
+                  <a:latin typeface="+mn-lt"/>
+                  <a:ea typeface="+mn-ea"/>
+                  <a:cs typeface="+mn-cs"/>
+                </a:defRPr>
+              </a:lvl9pPr>
+            </a:lstStyle>
+            <a:p>
+              <a:pPr algn="ctr"/>
+              <a:endParaRPr kumimoji="1" lang="ja-JP" altLang="en-US" dirty="0"/>
+            </a:p>
+          </p:txBody>
+        </p:sp>
+        <p:grpSp>
+          <p:nvGrpSpPr>
+            <p:cNvPr id="7" name="グループ化 6">
+              <a:extLst>
+                <a:ext uri="{FF2B5EF4-FFF2-40B4-BE49-F238E27FC236}">
+                  <a16:creationId xmlns:a16="http://schemas.microsoft.com/office/drawing/2014/main" id="{48B5744D-7749-0557-44E5-20CDE70C1CCD}"/>
+                </a:ext>
+              </a:extLst>
+            </p:cNvPr>
+            <p:cNvGrpSpPr/>
+            <p:nvPr/>
+          </p:nvGrpSpPr>
+          <p:grpSpPr>
+            <a:xfrm>
+              <a:off x="1169158" y="902885"/>
+              <a:ext cx="8470142" cy="9663515"/>
+              <a:chOff x="889758" y="226229"/>
+              <a:chExt cx="10460514" cy="11934314"/>
+            </a:xfrm>
+          </p:grpSpPr>
+          <p:pic>
+            <p:nvPicPr>
+              <p:cNvPr id="4" name="図 3">
+                <a:extLst>
+                  <a:ext uri="{FF2B5EF4-FFF2-40B4-BE49-F238E27FC236}">
+                    <a16:creationId xmlns:a16="http://schemas.microsoft.com/office/drawing/2014/main" id="{C326EA64-3A13-2414-910A-696E327BC751}"/>
+                  </a:ext>
+                </a:extLst>
+              </p:cNvPr>
+              <p:cNvPicPr>
+                <a:picLocks noChangeAspect="1"/>
+              </p:cNvPicPr>
+              <p:nvPr/>
+            </p:nvPicPr>
+            <p:blipFill rotWithShape="1">
+              <a:blip r:embed="rId2">
+                <a:alphaModFix/>
+              </a:blip>
+              <a:srcRect l="4529" t="9223" r="3557" b="39938"/>
+              <a:stretch>
+                <a:fillRect/>
+              </a:stretch>
+            </p:blipFill>
+            <p:spPr>
+              <a:xfrm>
+                <a:off x="966000" y="226229"/>
+                <a:ext cx="10301969" cy="4459609"/>
+              </a:xfrm>
+              <a:prstGeom prst="rect">
+                <a:avLst/>
+              </a:prstGeom>
+            </p:spPr>
+          </p:pic>
+          <p:pic>
+            <p:nvPicPr>
+              <p:cNvPr id="5" name="図 4">
+                <a:extLst>
+                  <a:ext uri="{FF2B5EF4-FFF2-40B4-BE49-F238E27FC236}">
+                    <a16:creationId xmlns:a16="http://schemas.microsoft.com/office/drawing/2014/main" id="{6F542B94-45EB-51AC-0F05-42649FF80ED0}"/>
+                  </a:ext>
+                </a:extLst>
+              </p:cNvPr>
+              <p:cNvPicPr>
+                <a:picLocks noChangeAspect="1"/>
+              </p:cNvPicPr>
+              <p:nvPr/>
+            </p:nvPicPr>
+            <p:blipFill rotWithShape="1">
+              <a:blip r:embed="rId3">
+                <a:alphaModFix/>
+              </a:blip>
+              <a:srcRect l="2925" t="22154" r="4032" b="2289"/>
+              <a:stretch>
+                <a:fillRect/>
+              </a:stretch>
+            </p:blipFill>
+            <p:spPr>
+              <a:xfrm>
+                <a:off x="961238" y="5510387"/>
+                <a:ext cx="10341428" cy="6650156"/>
+              </a:xfrm>
+              <a:prstGeom prst="rect">
+                <a:avLst/>
+              </a:prstGeom>
+            </p:spPr>
+          </p:pic>
+          <p:sp>
+            <p:nvSpPr>
+              <p:cNvPr id="6" name="フリーフォーム: 図形 5">
+                <a:extLst>
+                  <a:ext uri="{FF2B5EF4-FFF2-40B4-BE49-F238E27FC236}">
+                    <a16:creationId xmlns:a16="http://schemas.microsoft.com/office/drawing/2014/main" id="{EA27C95E-54AC-FB79-A105-0376377D36E4}"/>
+                  </a:ext>
+                </a:extLst>
+              </p:cNvPr>
+              <p:cNvSpPr/>
+              <p:nvPr/>
+            </p:nvSpPr>
+            <p:spPr>
+              <a:xfrm>
+                <a:off x="889758" y="4832063"/>
+                <a:ext cx="10460514" cy="405000"/>
+              </a:xfrm>
+              <a:custGeom>
+                <a:avLst/>
+                <a:gdLst>
+                  <a:gd name="csX0" fmla="*/ 0 w 10703002"/>
+                  <a:gd name="csY0" fmla="*/ 723900 h 731634"/>
+                  <a:gd name="csX1" fmla="*/ 716280 w 10703002"/>
+                  <a:gd name="csY1" fmla="*/ 0 h 731634"/>
+                  <a:gd name="csX2" fmla="*/ 1440180 w 10703002"/>
+                  <a:gd name="csY2" fmla="*/ 723900 h 731634"/>
+                  <a:gd name="csX3" fmla="*/ 2156460 w 10703002"/>
+                  <a:gd name="csY3" fmla="*/ 7620 h 731634"/>
+                  <a:gd name="csX4" fmla="*/ 2880360 w 10703002"/>
+                  <a:gd name="csY4" fmla="*/ 723900 h 731634"/>
+                  <a:gd name="csX5" fmla="*/ 3604260 w 10703002"/>
+                  <a:gd name="csY5" fmla="*/ 0 h 731634"/>
+                  <a:gd name="csX6" fmla="*/ 4328160 w 10703002"/>
+                  <a:gd name="csY6" fmla="*/ 723900 h 731634"/>
+                  <a:gd name="csX7" fmla="*/ 5036820 w 10703002"/>
+                  <a:gd name="csY7" fmla="*/ 0 h 731634"/>
+                  <a:gd name="csX8" fmla="*/ 5753100 w 10703002"/>
+                  <a:gd name="csY8" fmla="*/ 723900 h 731634"/>
+                  <a:gd name="csX9" fmla="*/ 6477000 w 10703002"/>
+                  <a:gd name="csY9" fmla="*/ 0 h 731634"/>
+                  <a:gd name="csX10" fmla="*/ 7193280 w 10703002"/>
+                  <a:gd name="csY10" fmla="*/ 723900 h 731634"/>
+                  <a:gd name="csX11" fmla="*/ 7917180 w 10703002"/>
+                  <a:gd name="csY11" fmla="*/ 7620 h 731634"/>
+                  <a:gd name="csX12" fmla="*/ 8633460 w 10703002"/>
+                  <a:gd name="csY12" fmla="*/ 723900 h 731634"/>
+                  <a:gd name="csX13" fmla="*/ 9357360 w 10703002"/>
+                  <a:gd name="csY13" fmla="*/ 7620 h 731634"/>
+                  <a:gd name="csX14" fmla="*/ 10081260 w 10703002"/>
+                  <a:gd name="csY14" fmla="*/ 731520 h 731634"/>
+                  <a:gd name="csX15" fmla="*/ 10683240 w 10703002"/>
+                  <a:gd name="csY15" fmla="*/ 68580 h 731634"/>
+                  <a:gd name="csX0" fmla="*/ 0 w 10806734"/>
+                  <a:gd name="csY0" fmla="*/ 723900 h 731623"/>
+                  <a:gd name="csX1" fmla="*/ 716280 w 10806734"/>
+                  <a:gd name="csY1" fmla="*/ 0 h 731623"/>
+                  <a:gd name="csX2" fmla="*/ 1440180 w 10806734"/>
+                  <a:gd name="csY2" fmla="*/ 723900 h 731623"/>
+                  <a:gd name="csX3" fmla="*/ 2156460 w 10806734"/>
+                  <a:gd name="csY3" fmla="*/ 7620 h 731623"/>
+                  <a:gd name="csX4" fmla="*/ 2880360 w 10806734"/>
+                  <a:gd name="csY4" fmla="*/ 723900 h 731623"/>
+                  <a:gd name="csX5" fmla="*/ 3604260 w 10806734"/>
+                  <a:gd name="csY5" fmla="*/ 0 h 731623"/>
+                  <a:gd name="csX6" fmla="*/ 4328160 w 10806734"/>
+                  <a:gd name="csY6" fmla="*/ 723900 h 731623"/>
+                  <a:gd name="csX7" fmla="*/ 5036820 w 10806734"/>
+                  <a:gd name="csY7" fmla="*/ 0 h 731623"/>
+                  <a:gd name="csX8" fmla="*/ 5753100 w 10806734"/>
+                  <a:gd name="csY8" fmla="*/ 723900 h 731623"/>
+                  <a:gd name="csX9" fmla="*/ 6477000 w 10806734"/>
+                  <a:gd name="csY9" fmla="*/ 0 h 731623"/>
+                  <a:gd name="csX10" fmla="*/ 7193280 w 10806734"/>
+                  <a:gd name="csY10" fmla="*/ 723900 h 731623"/>
+                  <a:gd name="csX11" fmla="*/ 7917180 w 10806734"/>
+                  <a:gd name="csY11" fmla="*/ 7620 h 731623"/>
+                  <a:gd name="csX12" fmla="*/ 8633460 w 10806734"/>
+                  <a:gd name="csY12" fmla="*/ 723900 h 731623"/>
+                  <a:gd name="csX13" fmla="*/ 9357360 w 10806734"/>
+                  <a:gd name="csY13" fmla="*/ 7620 h 731623"/>
+                  <a:gd name="csX14" fmla="*/ 10081260 w 10806734"/>
+                  <a:gd name="csY14" fmla="*/ 731520 h 731623"/>
+                  <a:gd name="csX15" fmla="*/ 10789920 w 10806734"/>
+                  <a:gd name="csY15" fmla="*/ 0 h 731623"/>
+                  <a:gd name="csX0" fmla="*/ 0 w 10789986"/>
+                  <a:gd name="csY0" fmla="*/ 723900 h 732889"/>
+                  <a:gd name="csX1" fmla="*/ 716280 w 10789986"/>
+                  <a:gd name="csY1" fmla="*/ 0 h 732889"/>
+                  <a:gd name="csX2" fmla="*/ 1440180 w 10789986"/>
+                  <a:gd name="csY2" fmla="*/ 723900 h 732889"/>
+                  <a:gd name="csX3" fmla="*/ 2156460 w 10789986"/>
+                  <a:gd name="csY3" fmla="*/ 7620 h 732889"/>
+                  <a:gd name="csX4" fmla="*/ 2880360 w 10789986"/>
+                  <a:gd name="csY4" fmla="*/ 723900 h 732889"/>
+                  <a:gd name="csX5" fmla="*/ 3604260 w 10789986"/>
+                  <a:gd name="csY5" fmla="*/ 0 h 732889"/>
+                  <a:gd name="csX6" fmla="*/ 4328160 w 10789986"/>
+                  <a:gd name="csY6" fmla="*/ 723900 h 732889"/>
+                  <a:gd name="csX7" fmla="*/ 5036820 w 10789986"/>
+                  <a:gd name="csY7" fmla="*/ 0 h 732889"/>
+                  <a:gd name="csX8" fmla="*/ 5753100 w 10789986"/>
+                  <a:gd name="csY8" fmla="*/ 723900 h 732889"/>
+                  <a:gd name="csX9" fmla="*/ 6477000 w 10789986"/>
+                  <a:gd name="csY9" fmla="*/ 0 h 732889"/>
+                  <a:gd name="csX10" fmla="*/ 7193280 w 10789986"/>
+                  <a:gd name="csY10" fmla="*/ 723900 h 732889"/>
+                  <a:gd name="csX11" fmla="*/ 7917180 w 10789986"/>
+                  <a:gd name="csY11" fmla="*/ 7620 h 732889"/>
+                  <a:gd name="csX12" fmla="*/ 8633460 w 10789986"/>
+                  <a:gd name="csY12" fmla="*/ 723900 h 732889"/>
+                  <a:gd name="csX13" fmla="*/ 9357360 w 10789986"/>
+                  <a:gd name="csY13" fmla="*/ 7620 h 732889"/>
+                  <a:gd name="csX14" fmla="*/ 10081260 w 10789986"/>
+                  <a:gd name="csY14" fmla="*/ 731520 h 732889"/>
+                  <a:gd name="csX15" fmla="*/ 10789920 w 10789986"/>
+                  <a:gd name="csY15" fmla="*/ 0 h 732889"/>
+                  <a:gd name="csX0" fmla="*/ 0 w 10418702"/>
+                  <a:gd name="csY0" fmla="*/ 723900 h 733077"/>
+                  <a:gd name="csX1" fmla="*/ 716280 w 10418702"/>
+                  <a:gd name="csY1" fmla="*/ 0 h 733077"/>
+                  <a:gd name="csX2" fmla="*/ 1440180 w 10418702"/>
+                  <a:gd name="csY2" fmla="*/ 723900 h 733077"/>
+                  <a:gd name="csX3" fmla="*/ 2156460 w 10418702"/>
+                  <a:gd name="csY3" fmla="*/ 7620 h 733077"/>
+                  <a:gd name="csX4" fmla="*/ 2880360 w 10418702"/>
+                  <a:gd name="csY4" fmla="*/ 723900 h 733077"/>
+                  <a:gd name="csX5" fmla="*/ 3604260 w 10418702"/>
+                  <a:gd name="csY5" fmla="*/ 0 h 733077"/>
+                  <a:gd name="csX6" fmla="*/ 4328160 w 10418702"/>
+                  <a:gd name="csY6" fmla="*/ 723900 h 733077"/>
+                  <a:gd name="csX7" fmla="*/ 5036820 w 10418702"/>
+                  <a:gd name="csY7" fmla="*/ 0 h 733077"/>
+                  <a:gd name="csX8" fmla="*/ 5753100 w 10418702"/>
+                  <a:gd name="csY8" fmla="*/ 723900 h 733077"/>
+                  <a:gd name="csX9" fmla="*/ 6477000 w 10418702"/>
+                  <a:gd name="csY9" fmla="*/ 0 h 733077"/>
+                  <a:gd name="csX10" fmla="*/ 7193280 w 10418702"/>
+                  <a:gd name="csY10" fmla="*/ 723900 h 733077"/>
+                  <a:gd name="csX11" fmla="*/ 7917180 w 10418702"/>
+                  <a:gd name="csY11" fmla="*/ 7620 h 733077"/>
+                  <a:gd name="csX12" fmla="*/ 8633460 w 10418702"/>
+                  <a:gd name="csY12" fmla="*/ 723900 h 733077"/>
+                  <a:gd name="csX13" fmla="*/ 9357360 w 10418702"/>
+                  <a:gd name="csY13" fmla="*/ 7620 h 733077"/>
+                  <a:gd name="csX14" fmla="*/ 10081260 w 10418702"/>
+                  <a:gd name="csY14" fmla="*/ 731520 h 733077"/>
+                  <a:gd name="csX15" fmla="*/ 10418445 w 10418702"/>
+                  <a:gd name="csY15" fmla="*/ 9525 h 733077"/>
+                  <a:gd name="csX0" fmla="*/ 0 w 10180719"/>
+                  <a:gd name="csY0" fmla="*/ 723900 h 1052272"/>
+                  <a:gd name="csX1" fmla="*/ 716280 w 10180719"/>
+                  <a:gd name="csY1" fmla="*/ 0 h 1052272"/>
+                  <a:gd name="csX2" fmla="*/ 1440180 w 10180719"/>
+                  <a:gd name="csY2" fmla="*/ 723900 h 1052272"/>
+                  <a:gd name="csX3" fmla="*/ 2156460 w 10180719"/>
+                  <a:gd name="csY3" fmla="*/ 7620 h 1052272"/>
+                  <a:gd name="csX4" fmla="*/ 2880360 w 10180719"/>
+                  <a:gd name="csY4" fmla="*/ 723900 h 1052272"/>
+                  <a:gd name="csX5" fmla="*/ 3604260 w 10180719"/>
+                  <a:gd name="csY5" fmla="*/ 0 h 1052272"/>
+                  <a:gd name="csX6" fmla="*/ 4328160 w 10180719"/>
+                  <a:gd name="csY6" fmla="*/ 723900 h 1052272"/>
+                  <a:gd name="csX7" fmla="*/ 5036820 w 10180719"/>
+                  <a:gd name="csY7" fmla="*/ 0 h 1052272"/>
+                  <a:gd name="csX8" fmla="*/ 5753100 w 10180719"/>
+                  <a:gd name="csY8" fmla="*/ 723900 h 1052272"/>
+                  <a:gd name="csX9" fmla="*/ 6477000 w 10180719"/>
+                  <a:gd name="csY9" fmla="*/ 0 h 1052272"/>
+                  <a:gd name="csX10" fmla="*/ 7193280 w 10180719"/>
+                  <a:gd name="csY10" fmla="*/ 723900 h 1052272"/>
+                  <a:gd name="csX11" fmla="*/ 7917180 w 10180719"/>
+                  <a:gd name="csY11" fmla="*/ 7620 h 1052272"/>
+                  <a:gd name="csX12" fmla="*/ 8633460 w 10180719"/>
+                  <a:gd name="csY12" fmla="*/ 723900 h 1052272"/>
+                  <a:gd name="csX13" fmla="*/ 9357360 w 10180719"/>
+                  <a:gd name="csY13" fmla="*/ 7620 h 1052272"/>
+                  <a:gd name="csX14" fmla="*/ 10081260 w 10180719"/>
+                  <a:gd name="csY14" fmla="*/ 731520 h 1052272"/>
+                  <a:gd name="csX15" fmla="*/ 10080307 w 10180719"/>
+                  <a:gd name="csY15" fmla="*/ 733425 h 1052272"/>
+                  <a:gd name="csX0" fmla="*/ 0 w 10359304"/>
+                  <a:gd name="csY0" fmla="*/ 723900 h 733525"/>
+                  <a:gd name="csX1" fmla="*/ 716280 w 10359304"/>
+                  <a:gd name="csY1" fmla="*/ 0 h 733525"/>
+                  <a:gd name="csX2" fmla="*/ 1440180 w 10359304"/>
+                  <a:gd name="csY2" fmla="*/ 723900 h 733525"/>
+                  <a:gd name="csX3" fmla="*/ 2156460 w 10359304"/>
+                  <a:gd name="csY3" fmla="*/ 7620 h 733525"/>
+                  <a:gd name="csX4" fmla="*/ 2880360 w 10359304"/>
+                  <a:gd name="csY4" fmla="*/ 723900 h 733525"/>
+                  <a:gd name="csX5" fmla="*/ 3604260 w 10359304"/>
+                  <a:gd name="csY5" fmla="*/ 0 h 733525"/>
+                  <a:gd name="csX6" fmla="*/ 4328160 w 10359304"/>
+                  <a:gd name="csY6" fmla="*/ 723900 h 733525"/>
+                  <a:gd name="csX7" fmla="*/ 5036820 w 10359304"/>
+                  <a:gd name="csY7" fmla="*/ 0 h 733525"/>
+                  <a:gd name="csX8" fmla="*/ 5753100 w 10359304"/>
+                  <a:gd name="csY8" fmla="*/ 723900 h 733525"/>
+                  <a:gd name="csX9" fmla="*/ 6477000 w 10359304"/>
+                  <a:gd name="csY9" fmla="*/ 0 h 733525"/>
+                  <a:gd name="csX10" fmla="*/ 7193280 w 10359304"/>
+                  <a:gd name="csY10" fmla="*/ 723900 h 733525"/>
+                  <a:gd name="csX11" fmla="*/ 7917180 w 10359304"/>
+                  <a:gd name="csY11" fmla="*/ 7620 h 733525"/>
+                  <a:gd name="csX12" fmla="*/ 8633460 w 10359304"/>
+                  <a:gd name="csY12" fmla="*/ 723900 h 733525"/>
+                  <a:gd name="csX13" fmla="*/ 9357360 w 10359304"/>
+                  <a:gd name="csY13" fmla="*/ 7620 h 733525"/>
+                  <a:gd name="csX14" fmla="*/ 10081260 w 10359304"/>
+                  <a:gd name="csY14" fmla="*/ 731520 h 733525"/>
+                  <a:gd name="csX15" fmla="*/ 10080307 w 10359304"/>
+                  <a:gd name="csY15" fmla="*/ 733425 h 733525"/>
+                  <a:gd name="csX0" fmla="*/ 0 w 10368372"/>
+                  <a:gd name="csY0" fmla="*/ 723900 h 731913"/>
+                  <a:gd name="csX1" fmla="*/ 716280 w 10368372"/>
+                  <a:gd name="csY1" fmla="*/ 0 h 731913"/>
+                  <a:gd name="csX2" fmla="*/ 1440180 w 10368372"/>
+                  <a:gd name="csY2" fmla="*/ 723900 h 731913"/>
+                  <a:gd name="csX3" fmla="*/ 2156460 w 10368372"/>
+                  <a:gd name="csY3" fmla="*/ 7620 h 731913"/>
+                  <a:gd name="csX4" fmla="*/ 2880360 w 10368372"/>
+                  <a:gd name="csY4" fmla="*/ 723900 h 731913"/>
+                  <a:gd name="csX5" fmla="*/ 3604260 w 10368372"/>
+                  <a:gd name="csY5" fmla="*/ 0 h 731913"/>
+                  <a:gd name="csX6" fmla="*/ 4328160 w 10368372"/>
+                  <a:gd name="csY6" fmla="*/ 723900 h 731913"/>
+                  <a:gd name="csX7" fmla="*/ 5036820 w 10368372"/>
+                  <a:gd name="csY7" fmla="*/ 0 h 731913"/>
+                  <a:gd name="csX8" fmla="*/ 5753100 w 10368372"/>
+                  <a:gd name="csY8" fmla="*/ 723900 h 731913"/>
+                  <a:gd name="csX9" fmla="*/ 6477000 w 10368372"/>
+                  <a:gd name="csY9" fmla="*/ 0 h 731913"/>
+                  <a:gd name="csX10" fmla="*/ 7193280 w 10368372"/>
+                  <a:gd name="csY10" fmla="*/ 723900 h 731913"/>
+                  <a:gd name="csX11" fmla="*/ 7917180 w 10368372"/>
+                  <a:gd name="csY11" fmla="*/ 7620 h 731913"/>
+                  <a:gd name="csX12" fmla="*/ 8633460 w 10368372"/>
+                  <a:gd name="csY12" fmla="*/ 723900 h 731913"/>
+                  <a:gd name="csX13" fmla="*/ 9357360 w 10368372"/>
+                  <a:gd name="csY13" fmla="*/ 7620 h 731913"/>
+                  <a:gd name="csX14" fmla="*/ 10081260 w 10368372"/>
+                  <a:gd name="csY14" fmla="*/ 731520 h 731913"/>
+                  <a:gd name="csX15" fmla="*/ 10094595 w 10368372"/>
+                  <a:gd name="csY15" fmla="*/ 576262 h 731913"/>
+                  <a:gd name="csX0" fmla="*/ 0 w 10183505"/>
+                  <a:gd name="csY0" fmla="*/ 723900 h 731967"/>
+                  <a:gd name="csX1" fmla="*/ 716280 w 10183505"/>
+                  <a:gd name="csY1" fmla="*/ 0 h 731967"/>
+                  <a:gd name="csX2" fmla="*/ 1440180 w 10183505"/>
+                  <a:gd name="csY2" fmla="*/ 723900 h 731967"/>
+                  <a:gd name="csX3" fmla="*/ 2156460 w 10183505"/>
+                  <a:gd name="csY3" fmla="*/ 7620 h 731967"/>
+                  <a:gd name="csX4" fmla="*/ 2880360 w 10183505"/>
+                  <a:gd name="csY4" fmla="*/ 723900 h 731967"/>
+                  <a:gd name="csX5" fmla="*/ 3604260 w 10183505"/>
+                  <a:gd name="csY5" fmla="*/ 0 h 731967"/>
+                  <a:gd name="csX6" fmla="*/ 4328160 w 10183505"/>
+                  <a:gd name="csY6" fmla="*/ 723900 h 731967"/>
+                  <a:gd name="csX7" fmla="*/ 5036820 w 10183505"/>
+                  <a:gd name="csY7" fmla="*/ 0 h 731967"/>
+                  <a:gd name="csX8" fmla="*/ 5753100 w 10183505"/>
+                  <a:gd name="csY8" fmla="*/ 723900 h 731967"/>
+                  <a:gd name="csX9" fmla="*/ 6477000 w 10183505"/>
+                  <a:gd name="csY9" fmla="*/ 0 h 731967"/>
+                  <a:gd name="csX10" fmla="*/ 7193280 w 10183505"/>
+                  <a:gd name="csY10" fmla="*/ 723900 h 731967"/>
+                  <a:gd name="csX11" fmla="*/ 7917180 w 10183505"/>
+                  <a:gd name="csY11" fmla="*/ 7620 h 731967"/>
+                  <a:gd name="csX12" fmla="*/ 8633460 w 10183505"/>
+                  <a:gd name="csY12" fmla="*/ 723900 h 731967"/>
+                  <a:gd name="csX13" fmla="*/ 9357360 w 10183505"/>
+                  <a:gd name="csY13" fmla="*/ 7620 h 731967"/>
+                  <a:gd name="csX14" fmla="*/ 10081260 w 10183505"/>
+                  <a:gd name="csY14" fmla="*/ 731520 h 731967"/>
+                  <a:gd name="csX15" fmla="*/ 10094595 w 10183505"/>
+                  <a:gd name="csY15" fmla="*/ 576262 h 731967"/>
+                  <a:gd name="csX0" fmla="*/ 0 w 10176069"/>
+                  <a:gd name="csY0" fmla="*/ 723900 h 731979"/>
+                  <a:gd name="csX1" fmla="*/ 716280 w 10176069"/>
+                  <a:gd name="csY1" fmla="*/ 0 h 731979"/>
+                  <a:gd name="csX2" fmla="*/ 1440180 w 10176069"/>
+                  <a:gd name="csY2" fmla="*/ 723900 h 731979"/>
+                  <a:gd name="csX3" fmla="*/ 2156460 w 10176069"/>
+                  <a:gd name="csY3" fmla="*/ 7620 h 731979"/>
+                  <a:gd name="csX4" fmla="*/ 2880360 w 10176069"/>
+                  <a:gd name="csY4" fmla="*/ 723900 h 731979"/>
+                  <a:gd name="csX5" fmla="*/ 3604260 w 10176069"/>
+                  <a:gd name="csY5" fmla="*/ 0 h 731979"/>
+                  <a:gd name="csX6" fmla="*/ 4328160 w 10176069"/>
+                  <a:gd name="csY6" fmla="*/ 723900 h 731979"/>
+                  <a:gd name="csX7" fmla="*/ 5036820 w 10176069"/>
+                  <a:gd name="csY7" fmla="*/ 0 h 731979"/>
+                  <a:gd name="csX8" fmla="*/ 5753100 w 10176069"/>
+                  <a:gd name="csY8" fmla="*/ 723900 h 731979"/>
+                  <a:gd name="csX9" fmla="*/ 6477000 w 10176069"/>
+                  <a:gd name="csY9" fmla="*/ 0 h 731979"/>
+                  <a:gd name="csX10" fmla="*/ 7193280 w 10176069"/>
+                  <a:gd name="csY10" fmla="*/ 723900 h 731979"/>
+                  <a:gd name="csX11" fmla="*/ 7917180 w 10176069"/>
+                  <a:gd name="csY11" fmla="*/ 7620 h 731979"/>
+                  <a:gd name="csX12" fmla="*/ 8633460 w 10176069"/>
+                  <a:gd name="csY12" fmla="*/ 723900 h 731979"/>
+                  <a:gd name="csX13" fmla="*/ 9357360 w 10176069"/>
+                  <a:gd name="csY13" fmla="*/ 7620 h 731979"/>
+                  <a:gd name="csX14" fmla="*/ 10081260 w 10176069"/>
+                  <a:gd name="csY14" fmla="*/ 731520 h 731979"/>
+                  <a:gd name="csX15" fmla="*/ 10066020 w 10176069"/>
+                  <a:gd name="csY15" fmla="*/ 581024 h 731979"/>
+                  <a:gd name="csX0" fmla="*/ 0 w 10081260"/>
+                  <a:gd name="csY0" fmla="*/ 723900 h 731520"/>
+                  <a:gd name="csX1" fmla="*/ 716280 w 10081260"/>
+                  <a:gd name="csY1" fmla="*/ 0 h 731520"/>
+                  <a:gd name="csX2" fmla="*/ 1440180 w 10081260"/>
+                  <a:gd name="csY2" fmla="*/ 723900 h 731520"/>
+                  <a:gd name="csX3" fmla="*/ 2156460 w 10081260"/>
+                  <a:gd name="csY3" fmla="*/ 7620 h 731520"/>
+                  <a:gd name="csX4" fmla="*/ 2880360 w 10081260"/>
+                  <a:gd name="csY4" fmla="*/ 723900 h 731520"/>
+                  <a:gd name="csX5" fmla="*/ 3604260 w 10081260"/>
+                  <a:gd name="csY5" fmla="*/ 0 h 731520"/>
+                  <a:gd name="csX6" fmla="*/ 4328160 w 10081260"/>
+                  <a:gd name="csY6" fmla="*/ 723900 h 731520"/>
+                  <a:gd name="csX7" fmla="*/ 5036820 w 10081260"/>
+                  <a:gd name="csY7" fmla="*/ 0 h 731520"/>
+                  <a:gd name="csX8" fmla="*/ 5753100 w 10081260"/>
+                  <a:gd name="csY8" fmla="*/ 723900 h 731520"/>
+                  <a:gd name="csX9" fmla="*/ 6477000 w 10081260"/>
+                  <a:gd name="csY9" fmla="*/ 0 h 731520"/>
+                  <a:gd name="csX10" fmla="*/ 7193280 w 10081260"/>
+                  <a:gd name="csY10" fmla="*/ 723900 h 731520"/>
+                  <a:gd name="csX11" fmla="*/ 7917180 w 10081260"/>
+                  <a:gd name="csY11" fmla="*/ 7620 h 731520"/>
+                  <a:gd name="csX12" fmla="*/ 8633460 w 10081260"/>
+                  <a:gd name="csY12" fmla="*/ 723900 h 731520"/>
+                  <a:gd name="csX13" fmla="*/ 9357360 w 10081260"/>
+                  <a:gd name="csY13" fmla="*/ 7620 h 731520"/>
+                  <a:gd name="csX14" fmla="*/ 10081260 w 10081260"/>
+                  <a:gd name="csY14" fmla="*/ 731520 h 731520"/>
+                  <a:gd name="csX0" fmla="*/ 0 w 9364980"/>
+                  <a:gd name="csY0" fmla="*/ 0 h 731520"/>
+                  <a:gd name="csX1" fmla="*/ 723900 w 9364980"/>
+                  <a:gd name="csY1" fmla="*/ 723900 h 731520"/>
+                  <a:gd name="csX2" fmla="*/ 1440180 w 9364980"/>
+                  <a:gd name="csY2" fmla="*/ 7620 h 731520"/>
+                  <a:gd name="csX3" fmla="*/ 2164080 w 9364980"/>
+                  <a:gd name="csY3" fmla="*/ 723900 h 731520"/>
+                  <a:gd name="csX4" fmla="*/ 2887980 w 9364980"/>
+                  <a:gd name="csY4" fmla="*/ 0 h 731520"/>
+                  <a:gd name="csX5" fmla="*/ 3611880 w 9364980"/>
+                  <a:gd name="csY5" fmla="*/ 723900 h 731520"/>
+                  <a:gd name="csX6" fmla="*/ 4320540 w 9364980"/>
+                  <a:gd name="csY6" fmla="*/ 0 h 731520"/>
+                  <a:gd name="csX7" fmla="*/ 5036820 w 9364980"/>
+                  <a:gd name="csY7" fmla="*/ 723900 h 731520"/>
+                  <a:gd name="csX8" fmla="*/ 5760720 w 9364980"/>
+                  <a:gd name="csY8" fmla="*/ 0 h 731520"/>
+                  <a:gd name="csX9" fmla="*/ 6477000 w 9364980"/>
+                  <a:gd name="csY9" fmla="*/ 723900 h 731520"/>
+                  <a:gd name="csX10" fmla="*/ 7200900 w 9364980"/>
+                  <a:gd name="csY10" fmla="*/ 7620 h 731520"/>
+                  <a:gd name="csX11" fmla="*/ 7917180 w 9364980"/>
+                  <a:gd name="csY11" fmla="*/ 723900 h 731520"/>
+                  <a:gd name="csX12" fmla="*/ 8641080 w 9364980"/>
+                  <a:gd name="csY12" fmla="*/ 7620 h 731520"/>
+                  <a:gd name="csX13" fmla="*/ 9364980 w 9364980"/>
+                  <a:gd name="csY13" fmla="*/ 731520 h 731520"/>
+                  <a:gd name="csX0" fmla="*/ 0 w 9364980"/>
+                  <a:gd name="csY0" fmla="*/ 0 h 731520"/>
+                  <a:gd name="csX1" fmla="*/ 723900 w 9364980"/>
+                  <a:gd name="csY1" fmla="*/ 723900 h 731520"/>
+                  <a:gd name="csX2" fmla="*/ 1440180 w 9364980"/>
+                  <a:gd name="csY2" fmla="*/ 7620 h 731520"/>
+                  <a:gd name="csX3" fmla="*/ 2164080 w 9364980"/>
+                  <a:gd name="csY3" fmla="*/ 723900 h 731520"/>
+                  <a:gd name="csX4" fmla="*/ 2887980 w 9364980"/>
+                  <a:gd name="csY4" fmla="*/ 0 h 731520"/>
+                  <a:gd name="csX5" fmla="*/ 3611880 w 9364980"/>
+                  <a:gd name="csY5" fmla="*/ 723900 h 731520"/>
+                  <a:gd name="csX6" fmla="*/ 4320540 w 9364980"/>
+                  <a:gd name="csY6" fmla="*/ 0 h 731520"/>
+                  <a:gd name="csX7" fmla="*/ 5036820 w 9364980"/>
+                  <a:gd name="csY7" fmla="*/ 723900 h 731520"/>
+                  <a:gd name="csX8" fmla="*/ 5760720 w 9364980"/>
+                  <a:gd name="csY8" fmla="*/ 0 h 731520"/>
+                  <a:gd name="csX9" fmla="*/ 6477000 w 9364980"/>
+                  <a:gd name="csY9" fmla="*/ 723900 h 731520"/>
+                  <a:gd name="csX10" fmla="*/ 7200900 w 9364980"/>
+                  <a:gd name="csY10" fmla="*/ 7620 h 731520"/>
+                  <a:gd name="csX11" fmla="*/ 7917180 w 9364980"/>
+                  <a:gd name="csY11" fmla="*/ 723900 h 731520"/>
+                  <a:gd name="csX12" fmla="*/ 8641080 w 9364980"/>
+                  <a:gd name="csY12" fmla="*/ 7620 h 731520"/>
+                  <a:gd name="csX13" fmla="*/ 9364980 w 9364980"/>
+                  <a:gd name="csY13" fmla="*/ 731520 h 731520"/>
+                  <a:gd name="csX0" fmla="*/ 0 w 9364980"/>
+                  <a:gd name="csY0" fmla="*/ 0 h 731520"/>
+                  <a:gd name="csX1" fmla="*/ 723900 w 9364980"/>
+                  <a:gd name="csY1" fmla="*/ 723900 h 731520"/>
+                  <a:gd name="csX2" fmla="*/ 1440180 w 9364980"/>
+                  <a:gd name="csY2" fmla="*/ 7620 h 731520"/>
+                  <a:gd name="csX3" fmla="*/ 2164080 w 9364980"/>
+                  <a:gd name="csY3" fmla="*/ 723900 h 731520"/>
+                  <a:gd name="csX4" fmla="*/ 2887980 w 9364980"/>
+                  <a:gd name="csY4" fmla="*/ 0 h 731520"/>
+                  <a:gd name="csX5" fmla="*/ 3611880 w 9364980"/>
+                  <a:gd name="csY5" fmla="*/ 723900 h 731520"/>
+                  <a:gd name="csX6" fmla="*/ 4320540 w 9364980"/>
+                  <a:gd name="csY6" fmla="*/ 0 h 731520"/>
+                  <a:gd name="csX7" fmla="*/ 5036820 w 9364980"/>
+                  <a:gd name="csY7" fmla="*/ 723900 h 731520"/>
+                  <a:gd name="csX8" fmla="*/ 5760720 w 9364980"/>
+                  <a:gd name="csY8" fmla="*/ 0 h 731520"/>
+                  <a:gd name="csX9" fmla="*/ 6477000 w 9364980"/>
+                  <a:gd name="csY9" fmla="*/ 723900 h 731520"/>
+                  <a:gd name="csX10" fmla="*/ 7200900 w 9364980"/>
+                  <a:gd name="csY10" fmla="*/ 7620 h 731520"/>
+                  <a:gd name="csX11" fmla="*/ 7917180 w 9364980"/>
+                  <a:gd name="csY11" fmla="*/ 723900 h 731520"/>
+                  <a:gd name="csX12" fmla="*/ 8641080 w 9364980"/>
+                  <a:gd name="csY12" fmla="*/ 7620 h 731520"/>
+                  <a:gd name="csX13" fmla="*/ 9364980 w 9364980"/>
+                  <a:gd name="csY13" fmla="*/ 731520 h 731520"/>
+                  <a:gd name="csX0" fmla="*/ 0 w 9364980"/>
+                  <a:gd name="csY0" fmla="*/ 0 h 731520"/>
+                  <a:gd name="csX1" fmla="*/ 723900 w 9364980"/>
+                  <a:gd name="csY1" fmla="*/ 723900 h 731520"/>
+                  <a:gd name="csX2" fmla="*/ 1440180 w 9364980"/>
+                  <a:gd name="csY2" fmla="*/ 7620 h 731520"/>
+                  <a:gd name="csX3" fmla="*/ 2164080 w 9364980"/>
+                  <a:gd name="csY3" fmla="*/ 723900 h 731520"/>
+                  <a:gd name="csX4" fmla="*/ 2887980 w 9364980"/>
+                  <a:gd name="csY4" fmla="*/ 0 h 731520"/>
+                  <a:gd name="csX5" fmla="*/ 3611880 w 9364980"/>
+                  <a:gd name="csY5" fmla="*/ 723900 h 731520"/>
+                  <a:gd name="csX6" fmla="*/ 4320540 w 9364980"/>
+                  <a:gd name="csY6" fmla="*/ 0 h 731520"/>
+                  <a:gd name="csX7" fmla="*/ 5036820 w 9364980"/>
+                  <a:gd name="csY7" fmla="*/ 723900 h 731520"/>
+                  <a:gd name="csX8" fmla="*/ 5760720 w 9364980"/>
+                  <a:gd name="csY8" fmla="*/ 0 h 731520"/>
+                  <a:gd name="csX9" fmla="*/ 6477000 w 9364980"/>
+                  <a:gd name="csY9" fmla="*/ 723900 h 731520"/>
+                  <a:gd name="csX10" fmla="*/ 7200900 w 9364980"/>
+                  <a:gd name="csY10" fmla="*/ 7620 h 731520"/>
+                  <a:gd name="csX11" fmla="*/ 7917180 w 9364980"/>
+                  <a:gd name="csY11" fmla="*/ 723900 h 731520"/>
+                  <a:gd name="csX12" fmla="*/ 8641080 w 9364980"/>
+                  <a:gd name="csY12" fmla="*/ 7620 h 731520"/>
+                  <a:gd name="csX13" fmla="*/ 9364980 w 9364980"/>
+                  <a:gd name="csY13" fmla="*/ 731520 h 731520"/>
+                  <a:gd name="csX0" fmla="*/ 0 w 9364980"/>
+                  <a:gd name="csY0" fmla="*/ 0 h 731520"/>
+                  <a:gd name="csX1" fmla="*/ 723900 w 9364980"/>
+                  <a:gd name="csY1" fmla="*/ 723900 h 731520"/>
+                  <a:gd name="csX2" fmla="*/ 1440180 w 9364980"/>
+                  <a:gd name="csY2" fmla="*/ 7620 h 731520"/>
+                  <a:gd name="csX3" fmla="*/ 2164080 w 9364980"/>
+                  <a:gd name="csY3" fmla="*/ 723900 h 731520"/>
+                  <a:gd name="csX4" fmla="*/ 2887980 w 9364980"/>
+                  <a:gd name="csY4" fmla="*/ 0 h 731520"/>
+                  <a:gd name="csX5" fmla="*/ 3611880 w 9364980"/>
+                  <a:gd name="csY5" fmla="*/ 723900 h 731520"/>
+                  <a:gd name="csX6" fmla="*/ 4320540 w 9364980"/>
+                  <a:gd name="csY6" fmla="*/ 0 h 731520"/>
+                  <a:gd name="csX7" fmla="*/ 5036820 w 9364980"/>
+                  <a:gd name="csY7" fmla="*/ 723900 h 731520"/>
+                  <a:gd name="csX8" fmla="*/ 5760720 w 9364980"/>
+                  <a:gd name="csY8" fmla="*/ 0 h 731520"/>
+                  <a:gd name="csX9" fmla="*/ 6477000 w 9364980"/>
+                  <a:gd name="csY9" fmla="*/ 723900 h 731520"/>
+                  <a:gd name="csX10" fmla="*/ 7200900 w 9364980"/>
+                  <a:gd name="csY10" fmla="*/ 7620 h 731520"/>
+                  <a:gd name="csX11" fmla="*/ 7917180 w 9364980"/>
+                  <a:gd name="csY11" fmla="*/ 723900 h 731520"/>
+                  <a:gd name="csX12" fmla="*/ 8641080 w 9364980"/>
+                  <a:gd name="csY12" fmla="*/ 7620 h 731520"/>
+                  <a:gd name="csX13" fmla="*/ 9364980 w 9364980"/>
+                  <a:gd name="csY13" fmla="*/ 731520 h 731520"/>
+                </a:gdLst>
+                <a:ahLst/>
+                <a:cxnLst>
+                  <a:cxn ang="0">
+                    <a:pos x="csX0" y="csY0"/>
+                  </a:cxn>
+                  <a:cxn ang="0">
+                    <a:pos x="csX1" y="csY1"/>
+                  </a:cxn>
+                  <a:cxn ang="0">
+                    <a:pos x="csX2" y="csY2"/>
+                  </a:cxn>
+                  <a:cxn ang="0">
+                    <a:pos x="csX3" y="csY3"/>
+                  </a:cxn>
+                  <a:cxn ang="0">
+                    <a:pos x="csX4" y="csY4"/>
+                  </a:cxn>
+                  <a:cxn ang="0">
+                    <a:pos x="csX5" y="csY5"/>
+                  </a:cxn>
+                  <a:cxn ang="0">
+                    <a:pos x="csX6" y="csY6"/>
+                  </a:cxn>
+                  <a:cxn ang="0">
+                    <a:pos x="csX7" y="csY7"/>
+                  </a:cxn>
+                  <a:cxn ang="0">
+                    <a:pos x="csX8" y="csY8"/>
+                  </a:cxn>
+                  <a:cxn ang="0">
+                    <a:pos x="csX9" y="csY9"/>
+                  </a:cxn>
+                  <a:cxn ang="0">
+                    <a:pos x="csX10" y="csY10"/>
+                  </a:cxn>
+                  <a:cxn ang="0">
+                    <a:pos x="csX11" y="csY11"/>
+                  </a:cxn>
+                  <a:cxn ang="0">
+                    <a:pos x="csX12" y="csY12"/>
+                  </a:cxn>
+                  <a:cxn ang="0">
+                    <a:pos x="csX13" y="csY13"/>
+                  </a:cxn>
+                </a:cxnLst>
+                <a:rect l="l" t="t" r="r" b="b"/>
+                <a:pathLst>
+                  <a:path w="9364980" h="731520">
+                    <a:moveTo>
+                      <a:pt x="0" y="0"/>
+                    </a:moveTo>
+                    <a:cubicBezTo>
+                      <a:pt x="240030" y="0"/>
+                      <a:pt x="483870" y="722630"/>
+                      <a:pt x="723900" y="723900"/>
+                    </a:cubicBezTo>
+                    <a:cubicBezTo>
+                      <a:pt x="963930" y="725170"/>
+                      <a:pt x="1200150" y="7620"/>
+                      <a:pt x="1440180" y="7620"/>
+                    </a:cubicBezTo>
+                    <a:cubicBezTo>
+                      <a:pt x="1680210" y="7620"/>
+                      <a:pt x="1922780" y="725170"/>
+                      <a:pt x="2164080" y="723900"/>
+                    </a:cubicBezTo>
+                    <a:cubicBezTo>
+                      <a:pt x="2405380" y="722630"/>
+                      <a:pt x="2646680" y="0"/>
+                      <a:pt x="2887980" y="0"/>
+                    </a:cubicBezTo>
+                    <a:cubicBezTo>
+                      <a:pt x="3129280" y="0"/>
+                      <a:pt x="3373120" y="723900"/>
+                      <a:pt x="3611880" y="723900"/>
+                    </a:cubicBezTo>
+                    <a:cubicBezTo>
+                      <a:pt x="3850640" y="723900"/>
+                      <a:pt x="4083050" y="0"/>
+                      <a:pt x="4320540" y="0"/>
+                    </a:cubicBezTo>
+                    <a:cubicBezTo>
+                      <a:pt x="4558030" y="0"/>
+                      <a:pt x="4796790" y="723900"/>
+                      <a:pt x="5036820" y="723900"/>
+                    </a:cubicBezTo>
+                    <a:cubicBezTo>
+                      <a:pt x="5276850" y="723900"/>
+                      <a:pt x="5520690" y="0"/>
+                      <a:pt x="5760720" y="0"/>
+                    </a:cubicBezTo>
+                    <a:cubicBezTo>
+                      <a:pt x="6000750" y="0"/>
+                      <a:pt x="6236970" y="722630"/>
+                      <a:pt x="6477000" y="723900"/>
+                    </a:cubicBezTo>
+                    <a:cubicBezTo>
+                      <a:pt x="6717030" y="725170"/>
+                      <a:pt x="6960870" y="7620"/>
+                      <a:pt x="7200900" y="7620"/>
+                    </a:cubicBezTo>
+                    <a:cubicBezTo>
+                      <a:pt x="7440930" y="7620"/>
+                      <a:pt x="7677150" y="723900"/>
+                      <a:pt x="7917180" y="723900"/>
+                    </a:cubicBezTo>
+                    <a:cubicBezTo>
+                      <a:pt x="8157210" y="723900"/>
+                      <a:pt x="8399780" y="6350"/>
+                      <a:pt x="8641080" y="7620"/>
+                    </a:cubicBezTo>
+                    <a:cubicBezTo>
+                      <a:pt x="8882380" y="8890"/>
+                      <a:pt x="9144000" y="721360"/>
+                      <a:pt x="9364980" y="731520"/>
+                    </a:cubicBezTo>
+                  </a:path>
+                </a:pathLst>
+              </a:custGeom>
+              <a:noFill/>
+              <a:ln w="57150">
+                <a:solidFill>
+                  <a:schemeClr val="accent1">
+                    <a:shade val="15000"/>
+                  </a:schemeClr>
+                </a:solidFill>
+              </a:ln>
+              <a:effectLst>
+                <a:outerShdw dist="165100" dir="5400000" algn="t" rotWithShape="0">
+                  <a:schemeClr val="tx2"/>
+                </a:outerShdw>
+              </a:effectLst>
+            </p:spPr>
+            <p:style>
+              <a:lnRef idx="2">
+                <a:schemeClr val="accent1">
+                  <a:shade val="15000"/>
+                </a:schemeClr>
+              </a:lnRef>
+              <a:fillRef idx="1">
+                <a:schemeClr val="accent1"/>
+              </a:fillRef>
+              <a:effectRef idx="0">
+                <a:schemeClr val="accent1"/>
+              </a:effectRef>
+              <a:fontRef idx="minor">
+                <a:schemeClr val="lt1"/>
+              </a:fontRef>
+            </p:style>
+            <p:txBody>
+              <a:bodyPr rtlCol="0" anchor="ctr"/>
+              <a:lstStyle/>
+              <a:p>
+                <a:pPr algn="ctr"/>
+                <a:endParaRPr kumimoji="1" lang="ja-JP" altLang="en-US" dirty="0"/>
+              </a:p>
+            </p:txBody>
+          </p:sp>
+        </p:grpSp>
+        <p:sp>
+          <p:nvSpPr>
+            <p:cNvPr id="20" name="正方形/長方形 19">
+              <a:extLst>
+                <a:ext uri="{FF2B5EF4-FFF2-40B4-BE49-F238E27FC236}">
+                  <a16:creationId xmlns:a16="http://schemas.microsoft.com/office/drawing/2014/main" id="{610A502D-AC79-633A-55B5-6E3244F00B67}"/>
+                </a:ext>
+              </a:extLst>
+            </p:cNvPr>
+            <p:cNvSpPr/>
+            <p:nvPr/>
+          </p:nvSpPr>
+          <p:spPr>
+            <a:xfrm>
+              <a:off x="1230805" y="1272092"/>
+              <a:ext cx="2430266" cy="490664"/>
+            </a:xfrm>
+            <a:prstGeom prst="rect">
+              <a:avLst/>
+            </a:prstGeom>
+            <a:noFill/>
+            <a:ln w="28575">
+              <a:solidFill>
+                <a:srgbClr val="FF0000"/>
+              </a:solidFill>
+              <a:prstDash val="solid"/>
+            </a:ln>
+          </p:spPr>
+          <p:style>
+            <a:lnRef idx="2">
+              <a:schemeClr val="accent6"/>
+            </a:lnRef>
+            <a:fillRef idx="1">
+              <a:schemeClr val="lt1"/>
+            </a:fillRef>
+            <a:effectRef idx="0">
+              <a:schemeClr val="accent6"/>
+            </a:effectRef>
+            <a:fontRef idx="minor">
+              <a:schemeClr val="dk1"/>
+            </a:fontRef>
+          </p:style>
+          <p:txBody>
+            <a:bodyPr rtlCol="0" anchor="t"/>
+            <a:lstStyle>
+              <a:lvl1pPr marL="0" indent="0">
+                <a:defRPr sz="1100">
+                  <a:solidFill>
+                    <a:schemeClr val="dk1"/>
+                  </a:solidFill>
+                  <a:latin typeface="+mn-lt"/>
+                  <a:ea typeface="+mn-ea"/>
+                  <a:cs typeface="+mn-cs"/>
+                </a:defRPr>
+              </a:lvl1pPr>
+              <a:lvl2pPr marL="457200" indent="0">
+                <a:defRPr sz="1100">
+                  <a:solidFill>
+                    <a:schemeClr val="dk1"/>
+                  </a:solidFill>
+                  <a:latin typeface="+mn-lt"/>
+                  <a:ea typeface="+mn-ea"/>
+                  <a:cs typeface="+mn-cs"/>
+                </a:defRPr>
+              </a:lvl2pPr>
+              <a:lvl3pPr marL="914400" indent="0">
+                <a:defRPr sz="1100">
+                  <a:solidFill>
+                    <a:schemeClr val="dk1"/>
+                  </a:solidFill>
+                  <a:latin typeface="+mn-lt"/>
+                  <a:ea typeface="+mn-ea"/>
+                  <a:cs typeface="+mn-cs"/>
+                </a:defRPr>
+              </a:lvl3pPr>
+              <a:lvl4pPr marL="1371600" indent="0">
+                <a:defRPr sz="1100">
+                  <a:solidFill>
+                    <a:schemeClr val="dk1"/>
+                  </a:solidFill>
+                  <a:latin typeface="+mn-lt"/>
+                  <a:ea typeface="+mn-ea"/>
+                  <a:cs typeface="+mn-cs"/>
+                </a:defRPr>
+              </a:lvl4pPr>
+              <a:lvl5pPr marL="1828800" indent="0">
+                <a:defRPr sz="1100">
+                  <a:solidFill>
+                    <a:schemeClr val="dk1"/>
+                  </a:solidFill>
+                  <a:latin typeface="+mn-lt"/>
+                  <a:ea typeface="+mn-ea"/>
+                  <a:cs typeface="+mn-cs"/>
+                </a:defRPr>
+              </a:lvl5pPr>
+              <a:lvl6pPr marL="2286000" indent="0">
+                <a:defRPr sz="1100">
+                  <a:solidFill>
+                    <a:schemeClr val="dk1"/>
+                  </a:solidFill>
+                  <a:latin typeface="+mn-lt"/>
+                  <a:ea typeface="+mn-ea"/>
+                  <a:cs typeface="+mn-cs"/>
+                </a:defRPr>
+              </a:lvl6pPr>
+              <a:lvl7pPr marL="2743200" indent="0">
+                <a:defRPr sz="1100">
+                  <a:solidFill>
+                    <a:schemeClr val="dk1"/>
+                  </a:solidFill>
+                  <a:latin typeface="+mn-lt"/>
+                  <a:ea typeface="+mn-ea"/>
+                  <a:cs typeface="+mn-cs"/>
+                </a:defRPr>
+              </a:lvl7pPr>
+              <a:lvl8pPr marL="3200400" indent="0">
+                <a:defRPr sz="1100">
+                  <a:solidFill>
+                    <a:schemeClr val="dk1"/>
+                  </a:solidFill>
+                  <a:latin typeface="+mn-lt"/>
+                  <a:ea typeface="+mn-ea"/>
+                  <a:cs typeface="+mn-cs"/>
+                </a:defRPr>
+              </a:lvl8pPr>
+              <a:lvl9pPr marL="3657600" indent="0">
+                <a:defRPr sz="1100">
+                  <a:solidFill>
+                    <a:schemeClr val="dk1"/>
+                  </a:solidFill>
+                  <a:latin typeface="+mn-lt"/>
+                  <a:ea typeface="+mn-ea"/>
+                  <a:cs typeface="+mn-cs"/>
+                </a:defRPr>
+              </a:lvl9pPr>
+            </a:lstStyle>
+            <a:p>
+              <a:pPr algn="l"/>
+              <a:endParaRPr kumimoji="1" lang="ja-JP" altLang="en-US" sz="1100"/>
+            </a:p>
+          </p:txBody>
+        </p:sp>
+        <p:cxnSp>
+          <p:nvCxnSpPr>
+            <p:cNvPr id="21" name="直線矢印コネクタ 20">
+              <a:extLst>
+                <a:ext uri="{FF2B5EF4-FFF2-40B4-BE49-F238E27FC236}">
+                  <a16:creationId xmlns:a16="http://schemas.microsoft.com/office/drawing/2014/main" id="{6A5980CD-5F52-0E08-7E44-BCA67EA7097E}"/>
+                </a:ext>
+              </a:extLst>
+            </p:cNvPr>
+            <p:cNvCxnSpPr>
+              <a:stCxn id="22" idx="1"/>
+              <a:endCxn id="20" idx="3"/>
+            </p:cNvCxnSpPr>
+            <p:nvPr/>
+          </p:nvCxnSpPr>
+          <p:spPr>
+            <a:xfrm flipH="1">
+              <a:off x="3661071" y="1514278"/>
+              <a:ext cx="588858" cy="3147"/>
+            </a:xfrm>
+            <a:prstGeom prst="straightConnector1">
+              <a:avLst/>
+            </a:prstGeom>
+            <a:ln w="28575">
+              <a:solidFill>
+                <a:srgbClr val="FF0000"/>
+              </a:solidFill>
+              <a:tailEnd type="triangle"/>
+            </a:ln>
+          </p:spPr>
+          <p:style>
+            <a:lnRef idx="2">
+              <a:schemeClr val="accent1"/>
+            </a:lnRef>
+            <a:fillRef idx="0">
+              <a:schemeClr val="accent1"/>
+            </a:fillRef>
+            <a:effectRef idx="1">
+              <a:schemeClr val="accent1"/>
+            </a:effectRef>
+            <a:fontRef idx="minor">
+              <a:schemeClr val="tx1"/>
+            </a:fontRef>
+          </p:style>
+        </p:cxnSp>
+        <p:sp>
+          <p:nvSpPr>
+            <p:cNvPr id="22" name="正方形/長方形 21">
+              <a:extLst>
+                <a:ext uri="{FF2B5EF4-FFF2-40B4-BE49-F238E27FC236}">
+                  <a16:creationId xmlns:a16="http://schemas.microsoft.com/office/drawing/2014/main" id="{770809E8-4657-14A3-1982-B8C3F9B7F4F2}"/>
+                </a:ext>
+              </a:extLst>
+            </p:cNvPr>
+            <p:cNvSpPr/>
+            <p:nvPr/>
+          </p:nvSpPr>
+          <p:spPr>
+            <a:xfrm>
+              <a:off x="4249929" y="1220292"/>
+              <a:ext cx="1421920" cy="587972"/>
+            </a:xfrm>
+            <a:prstGeom prst="rect">
+              <a:avLst/>
+            </a:prstGeom>
+            <a:ln w="28575">
+              <a:solidFill>
+                <a:srgbClr val="FF0000"/>
+              </a:solidFill>
+            </a:ln>
+          </p:spPr>
+          <p:style>
+            <a:lnRef idx="2">
+              <a:schemeClr val="accent6"/>
+            </a:lnRef>
+            <a:fillRef idx="1">
+              <a:schemeClr val="lt1"/>
+            </a:fillRef>
+            <a:effectRef idx="0">
+              <a:schemeClr val="accent6"/>
+            </a:effectRef>
+            <a:fontRef idx="minor">
+              <a:schemeClr val="dk1"/>
+            </a:fontRef>
+          </p:style>
+          <p:txBody>
+            <a:bodyPr rtlCol="0" anchor="ctr"/>
+            <a:lstStyle>
+              <a:lvl1pPr marL="0" indent="0">
+                <a:defRPr sz="1100">
+                  <a:solidFill>
+                    <a:schemeClr val="dk1"/>
+                  </a:solidFill>
+                  <a:latin typeface="+mn-lt"/>
+                  <a:ea typeface="+mn-ea"/>
+                  <a:cs typeface="+mn-cs"/>
+                </a:defRPr>
+              </a:lvl1pPr>
+              <a:lvl2pPr marL="457200" indent="0">
+                <a:defRPr sz="1100">
+                  <a:solidFill>
+                    <a:schemeClr val="dk1"/>
+                  </a:solidFill>
+                  <a:latin typeface="+mn-lt"/>
+                  <a:ea typeface="+mn-ea"/>
+                  <a:cs typeface="+mn-cs"/>
+                </a:defRPr>
+              </a:lvl2pPr>
+              <a:lvl3pPr marL="914400" indent="0">
+                <a:defRPr sz="1100">
+                  <a:solidFill>
+                    <a:schemeClr val="dk1"/>
+                  </a:solidFill>
+                  <a:latin typeface="+mn-lt"/>
+                  <a:ea typeface="+mn-ea"/>
+                  <a:cs typeface="+mn-cs"/>
+                </a:defRPr>
+              </a:lvl3pPr>
+              <a:lvl4pPr marL="1371600" indent="0">
+                <a:defRPr sz="1100">
+                  <a:solidFill>
+                    <a:schemeClr val="dk1"/>
+                  </a:solidFill>
+                  <a:latin typeface="+mn-lt"/>
+                  <a:ea typeface="+mn-ea"/>
+                  <a:cs typeface="+mn-cs"/>
+                </a:defRPr>
+              </a:lvl4pPr>
+              <a:lvl5pPr marL="1828800" indent="0">
+                <a:defRPr sz="1100">
+                  <a:solidFill>
+                    <a:schemeClr val="dk1"/>
+                  </a:solidFill>
+                  <a:latin typeface="+mn-lt"/>
+                  <a:ea typeface="+mn-ea"/>
+                  <a:cs typeface="+mn-cs"/>
+                </a:defRPr>
+              </a:lvl5pPr>
+              <a:lvl6pPr marL="2286000" indent="0">
+                <a:defRPr sz="1100">
+                  <a:solidFill>
+                    <a:schemeClr val="dk1"/>
+                  </a:solidFill>
+                  <a:latin typeface="+mn-lt"/>
+                  <a:ea typeface="+mn-ea"/>
+                  <a:cs typeface="+mn-cs"/>
+                </a:defRPr>
+              </a:lvl6pPr>
+              <a:lvl7pPr marL="2743200" indent="0">
+                <a:defRPr sz="1100">
+                  <a:solidFill>
+                    <a:schemeClr val="dk1"/>
+                  </a:solidFill>
+                  <a:latin typeface="+mn-lt"/>
+                  <a:ea typeface="+mn-ea"/>
+                  <a:cs typeface="+mn-cs"/>
+                </a:defRPr>
+              </a:lvl7pPr>
+              <a:lvl8pPr marL="3200400" indent="0">
+                <a:defRPr sz="1100">
+                  <a:solidFill>
+                    <a:schemeClr val="dk1"/>
+                  </a:solidFill>
+                  <a:latin typeface="+mn-lt"/>
+                  <a:ea typeface="+mn-ea"/>
+                  <a:cs typeface="+mn-cs"/>
+                </a:defRPr>
+              </a:lvl8pPr>
+              <a:lvl9pPr marL="3657600" indent="0">
+                <a:defRPr sz="1100">
+                  <a:solidFill>
+                    <a:schemeClr val="dk1"/>
+                  </a:solidFill>
+                  <a:latin typeface="+mn-lt"/>
+                  <a:ea typeface="+mn-ea"/>
+                  <a:cs typeface="+mn-cs"/>
+                </a:defRPr>
+              </a:lvl9pPr>
+            </a:lstStyle>
+            <a:p>
+              <a:pPr algn="l"/>
+              <a:r>
+                <a:rPr kumimoji="1" lang="ja-JP" altLang="en-US" sz="1200" b="1" dirty="0">
+                  <a:solidFill>
+                    <a:srgbClr val="FF0000"/>
+                  </a:solidFill>
+                </a:rPr>
+                <a:t>①タブの切り替え</a:t>
+              </a:r>
+            </a:p>
+          </p:txBody>
+        </p:sp>
+        <p:sp>
+          <p:nvSpPr>
+            <p:cNvPr id="23" name="正方形/長方形 22">
+              <a:extLst>
+                <a:ext uri="{FF2B5EF4-FFF2-40B4-BE49-F238E27FC236}">
+                  <a16:creationId xmlns:a16="http://schemas.microsoft.com/office/drawing/2014/main" id="{6EEBAE4E-AE95-D98E-94A0-17D2A598AD1A}"/>
+                </a:ext>
+              </a:extLst>
+            </p:cNvPr>
+            <p:cNvSpPr/>
+            <p:nvPr/>
+          </p:nvSpPr>
+          <p:spPr>
+            <a:xfrm>
+              <a:off x="1456397" y="7445117"/>
+              <a:ext cx="7934346" cy="2090768"/>
+            </a:xfrm>
+            <a:prstGeom prst="rect">
+              <a:avLst/>
+            </a:prstGeom>
+            <a:noFill/>
+            <a:ln w="28575">
+              <a:solidFill>
+                <a:srgbClr val="FF0000"/>
+              </a:solidFill>
+              <a:prstDash val="solid"/>
+            </a:ln>
+          </p:spPr>
+          <p:style>
+            <a:lnRef idx="2">
+              <a:schemeClr val="accent6"/>
+            </a:lnRef>
+            <a:fillRef idx="1">
+              <a:schemeClr val="lt1"/>
+            </a:fillRef>
+            <a:effectRef idx="0">
+              <a:schemeClr val="accent6"/>
+            </a:effectRef>
+            <a:fontRef idx="minor">
+              <a:schemeClr val="dk1"/>
+            </a:fontRef>
+          </p:style>
+          <p:txBody>
+            <a:bodyPr rtlCol="0" anchor="t"/>
+            <a:lstStyle>
+              <a:lvl1pPr marL="0" indent="0">
+                <a:defRPr sz="1100">
+                  <a:solidFill>
+                    <a:schemeClr val="dk1"/>
+                  </a:solidFill>
+                  <a:latin typeface="+mn-lt"/>
+                  <a:ea typeface="+mn-ea"/>
+                  <a:cs typeface="+mn-cs"/>
+                </a:defRPr>
+              </a:lvl1pPr>
+              <a:lvl2pPr marL="457200" indent="0">
+                <a:defRPr sz="1100">
+                  <a:solidFill>
+                    <a:schemeClr val="dk1"/>
+                  </a:solidFill>
+                  <a:latin typeface="+mn-lt"/>
+                  <a:ea typeface="+mn-ea"/>
+                  <a:cs typeface="+mn-cs"/>
+                </a:defRPr>
+              </a:lvl2pPr>
+              <a:lvl3pPr marL="914400" indent="0">
+                <a:defRPr sz="1100">
+                  <a:solidFill>
+                    <a:schemeClr val="dk1"/>
+                  </a:solidFill>
+                  <a:latin typeface="+mn-lt"/>
+                  <a:ea typeface="+mn-ea"/>
+                  <a:cs typeface="+mn-cs"/>
+                </a:defRPr>
+              </a:lvl3pPr>
+              <a:lvl4pPr marL="1371600" indent="0">
+                <a:defRPr sz="1100">
+                  <a:solidFill>
+                    <a:schemeClr val="dk1"/>
+                  </a:solidFill>
+                  <a:latin typeface="+mn-lt"/>
+                  <a:ea typeface="+mn-ea"/>
+                  <a:cs typeface="+mn-cs"/>
+                </a:defRPr>
+              </a:lvl4pPr>
+              <a:lvl5pPr marL="1828800" indent="0">
+                <a:defRPr sz="1100">
+                  <a:solidFill>
+                    <a:schemeClr val="dk1"/>
+                  </a:solidFill>
+                  <a:latin typeface="+mn-lt"/>
+                  <a:ea typeface="+mn-ea"/>
+                  <a:cs typeface="+mn-cs"/>
+                </a:defRPr>
+              </a:lvl5pPr>
+              <a:lvl6pPr marL="2286000" indent="0">
+                <a:defRPr sz="1100">
+                  <a:solidFill>
+                    <a:schemeClr val="dk1"/>
+                  </a:solidFill>
+                  <a:latin typeface="+mn-lt"/>
+                  <a:ea typeface="+mn-ea"/>
+                  <a:cs typeface="+mn-cs"/>
+                </a:defRPr>
+              </a:lvl6pPr>
+              <a:lvl7pPr marL="2743200" indent="0">
+                <a:defRPr sz="1100">
+                  <a:solidFill>
+                    <a:schemeClr val="dk1"/>
+                  </a:solidFill>
+                  <a:latin typeface="+mn-lt"/>
+                  <a:ea typeface="+mn-ea"/>
+                  <a:cs typeface="+mn-cs"/>
+                </a:defRPr>
+              </a:lvl7pPr>
+              <a:lvl8pPr marL="3200400" indent="0">
+                <a:defRPr sz="1100">
+                  <a:solidFill>
+                    <a:schemeClr val="dk1"/>
+                  </a:solidFill>
+                  <a:latin typeface="+mn-lt"/>
+                  <a:ea typeface="+mn-ea"/>
+                  <a:cs typeface="+mn-cs"/>
+                </a:defRPr>
+              </a:lvl8pPr>
+              <a:lvl9pPr marL="3657600" indent="0">
+                <a:defRPr sz="1100">
+                  <a:solidFill>
+                    <a:schemeClr val="dk1"/>
+                  </a:solidFill>
+                  <a:latin typeface="+mn-lt"/>
+                  <a:ea typeface="+mn-ea"/>
+                  <a:cs typeface="+mn-cs"/>
+                </a:defRPr>
+              </a:lvl9pPr>
+            </a:lstStyle>
+            <a:p>
+              <a:pPr algn="l"/>
+              <a:endParaRPr kumimoji="1" lang="ja-JP" altLang="en-US" sz="1100"/>
+            </a:p>
+          </p:txBody>
+        </p:sp>
+        <p:sp>
+          <p:nvSpPr>
+            <p:cNvPr id="26" name="正方形/長方形 25">
+              <a:extLst>
+                <a:ext uri="{FF2B5EF4-FFF2-40B4-BE49-F238E27FC236}">
+                  <a16:creationId xmlns:a16="http://schemas.microsoft.com/office/drawing/2014/main" id="{1494FE8A-82E4-785F-62B9-69B7F50EBED9}"/>
+                </a:ext>
+              </a:extLst>
+            </p:cNvPr>
+            <p:cNvSpPr/>
+            <p:nvPr/>
+          </p:nvSpPr>
+          <p:spPr>
+            <a:xfrm>
+              <a:off x="7022005" y="9719405"/>
+              <a:ext cx="2354224" cy="455109"/>
+            </a:xfrm>
+            <a:prstGeom prst="rect">
+              <a:avLst/>
+            </a:prstGeom>
+            <a:noFill/>
+            <a:ln w="28575">
+              <a:solidFill>
+                <a:srgbClr val="FF0000"/>
+              </a:solidFill>
+              <a:prstDash val="solid"/>
+            </a:ln>
+          </p:spPr>
+          <p:style>
+            <a:lnRef idx="2">
+              <a:schemeClr val="accent6"/>
+            </a:lnRef>
+            <a:fillRef idx="1">
+              <a:schemeClr val="lt1"/>
+            </a:fillRef>
+            <a:effectRef idx="0">
+              <a:schemeClr val="accent6"/>
+            </a:effectRef>
+            <a:fontRef idx="minor">
+              <a:schemeClr val="dk1"/>
+            </a:fontRef>
+          </p:style>
+          <p:txBody>
+            <a:bodyPr rtlCol="0" anchor="t"/>
+            <a:lstStyle>
+              <a:lvl1pPr marL="0" indent="0">
+                <a:defRPr sz="1100">
+                  <a:solidFill>
+                    <a:schemeClr val="dk1"/>
+                  </a:solidFill>
+                  <a:latin typeface="+mn-lt"/>
+                  <a:ea typeface="+mn-ea"/>
+                  <a:cs typeface="+mn-cs"/>
+                </a:defRPr>
+              </a:lvl1pPr>
+              <a:lvl2pPr marL="457200" indent="0">
+                <a:defRPr sz="1100">
+                  <a:solidFill>
+                    <a:schemeClr val="dk1"/>
+                  </a:solidFill>
+                  <a:latin typeface="+mn-lt"/>
+                  <a:ea typeface="+mn-ea"/>
+                  <a:cs typeface="+mn-cs"/>
+                </a:defRPr>
+              </a:lvl2pPr>
+              <a:lvl3pPr marL="914400" indent="0">
+                <a:defRPr sz="1100">
+                  <a:solidFill>
+                    <a:schemeClr val="dk1"/>
+                  </a:solidFill>
+                  <a:latin typeface="+mn-lt"/>
+                  <a:ea typeface="+mn-ea"/>
+                  <a:cs typeface="+mn-cs"/>
+                </a:defRPr>
+              </a:lvl3pPr>
+              <a:lvl4pPr marL="1371600" indent="0">
+                <a:defRPr sz="1100">
+                  <a:solidFill>
+                    <a:schemeClr val="dk1"/>
+                  </a:solidFill>
+                  <a:latin typeface="+mn-lt"/>
+                  <a:ea typeface="+mn-ea"/>
+                  <a:cs typeface="+mn-cs"/>
+                </a:defRPr>
+              </a:lvl4pPr>
+              <a:lvl5pPr marL="1828800" indent="0">
+                <a:defRPr sz="1100">
+                  <a:solidFill>
+                    <a:schemeClr val="dk1"/>
+                  </a:solidFill>
+                  <a:latin typeface="+mn-lt"/>
+                  <a:ea typeface="+mn-ea"/>
+                  <a:cs typeface="+mn-cs"/>
+                </a:defRPr>
+              </a:lvl5pPr>
+              <a:lvl6pPr marL="2286000" indent="0">
+                <a:defRPr sz="1100">
+                  <a:solidFill>
+                    <a:schemeClr val="dk1"/>
+                  </a:solidFill>
+                  <a:latin typeface="+mn-lt"/>
+                  <a:ea typeface="+mn-ea"/>
+                  <a:cs typeface="+mn-cs"/>
+                </a:defRPr>
+              </a:lvl6pPr>
+              <a:lvl7pPr marL="2743200" indent="0">
+                <a:defRPr sz="1100">
+                  <a:solidFill>
+                    <a:schemeClr val="dk1"/>
+                  </a:solidFill>
+                  <a:latin typeface="+mn-lt"/>
+                  <a:ea typeface="+mn-ea"/>
+                  <a:cs typeface="+mn-cs"/>
+                </a:defRPr>
+              </a:lvl7pPr>
+              <a:lvl8pPr marL="3200400" indent="0">
+                <a:defRPr sz="1100">
+                  <a:solidFill>
+                    <a:schemeClr val="dk1"/>
+                  </a:solidFill>
+                  <a:latin typeface="+mn-lt"/>
+                  <a:ea typeface="+mn-ea"/>
+                  <a:cs typeface="+mn-cs"/>
+                </a:defRPr>
+              </a:lvl8pPr>
+              <a:lvl9pPr marL="3657600" indent="0">
+                <a:defRPr sz="1100">
+                  <a:solidFill>
+                    <a:schemeClr val="dk1"/>
+                  </a:solidFill>
+                  <a:latin typeface="+mn-lt"/>
+                  <a:ea typeface="+mn-ea"/>
+                  <a:cs typeface="+mn-cs"/>
+                </a:defRPr>
+              </a:lvl9pPr>
+            </a:lstStyle>
+            <a:p>
+              <a:pPr algn="l"/>
+              <a:endParaRPr kumimoji="1" lang="ja-JP" altLang="en-US" sz="1100"/>
+            </a:p>
+          </p:txBody>
+        </p:sp>
+        <p:cxnSp>
+          <p:nvCxnSpPr>
+            <p:cNvPr id="29" name="直線矢印コネクタ 28">
+              <a:extLst>
+                <a:ext uri="{FF2B5EF4-FFF2-40B4-BE49-F238E27FC236}">
+                  <a16:creationId xmlns:a16="http://schemas.microsoft.com/office/drawing/2014/main" id="{37BEDA1C-8FA3-24EB-8CEC-B4095372F9A0}"/>
+                </a:ext>
+              </a:extLst>
+            </p:cNvPr>
+            <p:cNvCxnSpPr>
+              <a:cxnSpLocks/>
+            </p:cNvCxnSpPr>
+            <p:nvPr/>
+          </p:nvCxnSpPr>
+          <p:spPr>
+            <a:xfrm>
+              <a:off x="6647543" y="9950225"/>
+              <a:ext cx="377371" cy="0"/>
+            </a:xfrm>
+            <a:prstGeom prst="straightConnector1">
+              <a:avLst/>
+            </a:prstGeom>
+            <a:ln w="28575">
+              <a:solidFill>
+                <a:srgbClr val="FF0000"/>
+              </a:solidFill>
+              <a:tailEnd type="triangle"/>
+            </a:ln>
+          </p:spPr>
+          <p:style>
+            <a:lnRef idx="2">
+              <a:schemeClr val="accent1"/>
+            </a:lnRef>
+            <a:fillRef idx="0">
+              <a:schemeClr val="accent1"/>
+            </a:fillRef>
+            <a:effectRef idx="1">
+              <a:schemeClr val="accent1"/>
+            </a:effectRef>
+            <a:fontRef idx="minor">
+              <a:schemeClr val="tx1"/>
+            </a:fontRef>
+          </p:style>
+        </p:cxnSp>
+        <p:sp>
+          <p:nvSpPr>
+            <p:cNvPr id="30" name="正方形/長方形 29">
+              <a:extLst>
+                <a:ext uri="{FF2B5EF4-FFF2-40B4-BE49-F238E27FC236}">
+                  <a16:creationId xmlns:a16="http://schemas.microsoft.com/office/drawing/2014/main" id="{9DD442DF-8B4A-8F81-F54B-C3E6F7B6079B}"/>
+                </a:ext>
+              </a:extLst>
+            </p:cNvPr>
+            <p:cNvSpPr/>
+            <p:nvPr/>
+          </p:nvSpPr>
+          <p:spPr>
+            <a:xfrm>
+              <a:off x="4934857" y="9653092"/>
+              <a:ext cx="1709449" cy="587972"/>
+            </a:xfrm>
+            <a:prstGeom prst="rect">
+              <a:avLst/>
+            </a:prstGeom>
+            <a:ln w="28575">
+              <a:solidFill>
+                <a:srgbClr val="FF0000"/>
+              </a:solidFill>
+            </a:ln>
+          </p:spPr>
+          <p:style>
+            <a:lnRef idx="2">
+              <a:schemeClr val="accent6"/>
+            </a:lnRef>
+            <a:fillRef idx="1">
+              <a:schemeClr val="lt1"/>
+            </a:fillRef>
+            <a:effectRef idx="0">
+              <a:schemeClr val="accent6"/>
+            </a:effectRef>
+            <a:fontRef idx="minor">
+              <a:schemeClr val="dk1"/>
+            </a:fontRef>
+          </p:style>
+          <p:txBody>
+            <a:bodyPr rtlCol="0" anchor="ctr"/>
+            <a:lstStyle>
+              <a:lvl1pPr marL="0" indent="0">
+                <a:defRPr sz="1100">
+                  <a:solidFill>
+                    <a:schemeClr val="dk1"/>
+                  </a:solidFill>
+                  <a:latin typeface="+mn-lt"/>
+                  <a:ea typeface="+mn-ea"/>
+                  <a:cs typeface="+mn-cs"/>
+                </a:defRPr>
+              </a:lvl1pPr>
+              <a:lvl2pPr marL="457200" indent="0">
+                <a:defRPr sz="1100">
+                  <a:solidFill>
+                    <a:schemeClr val="dk1"/>
+                  </a:solidFill>
+                  <a:latin typeface="+mn-lt"/>
+                  <a:ea typeface="+mn-ea"/>
+                  <a:cs typeface="+mn-cs"/>
+                </a:defRPr>
+              </a:lvl2pPr>
+              <a:lvl3pPr marL="914400" indent="0">
+                <a:defRPr sz="1100">
+                  <a:solidFill>
+                    <a:schemeClr val="dk1"/>
+                  </a:solidFill>
+                  <a:latin typeface="+mn-lt"/>
+                  <a:ea typeface="+mn-ea"/>
+                  <a:cs typeface="+mn-cs"/>
+                </a:defRPr>
+              </a:lvl3pPr>
+              <a:lvl4pPr marL="1371600" indent="0">
+                <a:defRPr sz="1100">
+                  <a:solidFill>
+                    <a:schemeClr val="dk1"/>
+                  </a:solidFill>
+                  <a:latin typeface="+mn-lt"/>
+                  <a:ea typeface="+mn-ea"/>
+                  <a:cs typeface="+mn-cs"/>
+                </a:defRPr>
+              </a:lvl4pPr>
+              <a:lvl5pPr marL="1828800" indent="0">
+                <a:defRPr sz="1100">
+                  <a:solidFill>
+                    <a:schemeClr val="dk1"/>
+                  </a:solidFill>
+                  <a:latin typeface="+mn-lt"/>
+                  <a:ea typeface="+mn-ea"/>
+                  <a:cs typeface="+mn-cs"/>
+                </a:defRPr>
+              </a:lvl5pPr>
+              <a:lvl6pPr marL="2286000" indent="0">
+                <a:defRPr sz="1100">
+                  <a:solidFill>
+                    <a:schemeClr val="dk1"/>
+                  </a:solidFill>
+                  <a:latin typeface="+mn-lt"/>
+                  <a:ea typeface="+mn-ea"/>
+                  <a:cs typeface="+mn-cs"/>
+                </a:defRPr>
+              </a:lvl6pPr>
+              <a:lvl7pPr marL="2743200" indent="0">
+                <a:defRPr sz="1100">
+                  <a:solidFill>
+                    <a:schemeClr val="dk1"/>
+                  </a:solidFill>
+                  <a:latin typeface="+mn-lt"/>
+                  <a:ea typeface="+mn-ea"/>
+                  <a:cs typeface="+mn-cs"/>
+                </a:defRPr>
+              </a:lvl7pPr>
+              <a:lvl8pPr marL="3200400" indent="0">
+                <a:defRPr sz="1100">
+                  <a:solidFill>
+                    <a:schemeClr val="dk1"/>
+                  </a:solidFill>
+                  <a:latin typeface="+mn-lt"/>
+                  <a:ea typeface="+mn-ea"/>
+                  <a:cs typeface="+mn-cs"/>
+                </a:defRPr>
+              </a:lvl8pPr>
+              <a:lvl9pPr marL="3657600" indent="0">
+                <a:defRPr sz="1100">
+                  <a:solidFill>
+                    <a:schemeClr val="dk1"/>
+                  </a:solidFill>
+                  <a:latin typeface="+mn-lt"/>
+                  <a:ea typeface="+mn-ea"/>
+                  <a:cs typeface="+mn-cs"/>
+                </a:defRPr>
+              </a:lvl9pPr>
+            </a:lstStyle>
+            <a:p>
+              <a:pPr algn="l"/>
+              <a:r>
+                <a:rPr kumimoji="1" lang="ja-JP" altLang="en-US" sz="1200" b="1" dirty="0">
+                  <a:solidFill>
+                    <a:srgbClr val="FF0000"/>
+                  </a:solidFill>
+                </a:rPr>
+                <a:t>④</a:t>
+              </a:r>
+              <a:r>
+                <a:rPr lang="ja-JP" altLang="en-US" sz="1200" b="1" dirty="0">
+                  <a:solidFill>
+                    <a:srgbClr val="FF0000"/>
+                  </a:solidFill>
+                </a:rPr>
+                <a:t>データファイル出力</a:t>
+              </a:r>
+              <a:endParaRPr kumimoji="1" lang="ja-JP" altLang="en-US" sz="1200" b="1" dirty="0">
+                <a:solidFill>
+                  <a:srgbClr val="FF0000"/>
+                </a:solidFill>
+              </a:endParaRPr>
+            </a:p>
+          </p:txBody>
+        </p:sp>
+        <p:cxnSp>
+          <p:nvCxnSpPr>
+            <p:cNvPr id="34" name="直線矢印コネクタ 33">
+              <a:extLst>
+                <a:ext uri="{FF2B5EF4-FFF2-40B4-BE49-F238E27FC236}">
+                  <a16:creationId xmlns:a16="http://schemas.microsoft.com/office/drawing/2014/main" id="{CC2F1245-81AC-1F8C-87A3-53D6B2B905CB}"/>
+                </a:ext>
+              </a:extLst>
+            </p:cNvPr>
+            <p:cNvCxnSpPr/>
+            <p:nvPr/>
+          </p:nvCxnSpPr>
+          <p:spPr>
+            <a:xfrm>
+              <a:off x="7852228" y="7053942"/>
+              <a:ext cx="0" cy="391885"/>
+            </a:xfrm>
+            <a:prstGeom prst="straightConnector1">
+              <a:avLst/>
+            </a:prstGeom>
+            <a:ln w="28575">
+              <a:solidFill>
+                <a:srgbClr val="FF0000"/>
+              </a:solidFill>
+              <a:tailEnd type="triangle"/>
+            </a:ln>
+          </p:spPr>
+          <p:style>
+            <a:lnRef idx="2">
+              <a:schemeClr val="accent1"/>
+            </a:lnRef>
+            <a:fillRef idx="0">
+              <a:schemeClr val="accent1"/>
+            </a:fillRef>
+            <a:effectRef idx="1">
+              <a:schemeClr val="accent1"/>
+            </a:effectRef>
+            <a:fontRef idx="minor">
+              <a:schemeClr val="tx1"/>
+            </a:fontRef>
+          </p:style>
+        </p:cxnSp>
+        <p:sp>
+          <p:nvSpPr>
+            <p:cNvPr id="3" name="正方形/長方形 2">
+              <a:extLst>
+                <a:ext uri="{FF2B5EF4-FFF2-40B4-BE49-F238E27FC236}">
+                  <a16:creationId xmlns:a16="http://schemas.microsoft.com/office/drawing/2014/main" id="{ADBB93EF-B0AF-CD72-BA95-21FE12CD3C6D}"/>
+                </a:ext>
+              </a:extLst>
+            </p:cNvPr>
+            <p:cNvSpPr/>
+            <p:nvPr/>
+          </p:nvSpPr>
+          <p:spPr>
+            <a:xfrm>
+              <a:off x="1456397" y="2205459"/>
+              <a:ext cx="7934346" cy="4877513"/>
+            </a:xfrm>
+            <a:prstGeom prst="rect">
+              <a:avLst/>
+            </a:prstGeom>
+            <a:noFill/>
+            <a:ln w="28575">
+              <a:solidFill>
+                <a:srgbClr val="FF0000"/>
+              </a:solidFill>
+              <a:prstDash val="solid"/>
+            </a:ln>
+          </p:spPr>
+          <p:style>
+            <a:lnRef idx="2">
+              <a:schemeClr val="accent6"/>
+            </a:lnRef>
+            <a:fillRef idx="1">
+              <a:schemeClr val="lt1"/>
+            </a:fillRef>
+            <a:effectRef idx="0">
+              <a:schemeClr val="accent6"/>
+            </a:effectRef>
+            <a:fontRef idx="minor">
+              <a:schemeClr val="dk1"/>
+            </a:fontRef>
+          </p:style>
+          <p:txBody>
+            <a:bodyPr rtlCol="0" anchor="t"/>
+            <a:lstStyle>
+              <a:lvl1pPr marL="0" indent="0">
+                <a:defRPr sz="1100">
+                  <a:solidFill>
+                    <a:schemeClr val="dk1"/>
+                  </a:solidFill>
+                  <a:latin typeface="+mn-lt"/>
+                  <a:ea typeface="+mn-ea"/>
+                  <a:cs typeface="+mn-cs"/>
+                </a:defRPr>
+              </a:lvl1pPr>
+              <a:lvl2pPr marL="457200" indent="0">
+                <a:defRPr sz="1100">
+                  <a:solidFill>
+                    <a:schemeClr val="dk1"/>
+                  </a:solidFill>
+                  <a:latin typeface="+mn-lt"/>
+                  <a:ea typeface="+mn-ea"/>
+                  <a:cs typeface="+mn-cs"/>
+                </a:defRPr>
+              </a:lvl2pPr>
+              <a:lvl3pPr marL="914400" indent="0">
+                <a:defRPr sz="1100">
+                  <a:solidFill>
+                    <a:schemeClr val="dk1"/>
+                  </a:solidFill>
+                  <a:latin typeface="+mn-lt"/>
+                  <a:ea typeface="+mn-ea"/>
+                  <a:cs typeface="+mn-cs"/>
+                </a:defRPr>
+              </a:lvl3pPr>
+              <a:lvl4pPr marL="1371600" indent="0">
+                <a:defRPr sz="1100">
+                  <a:solidFill>
+                    <a:schemeClr val="dk1"/>
+                  </a:solidFill>
+                  <a:latin typeface="+mn-lt"/>
+                  <a:ea typeface="+mn-ea"/>
+                  <a:cs typeface="+mn-cs"/>
+                </a:defRPr>
+              </a:lvl4pPr>
+              <a:lvl5pPr marL="1828800" indent="0">
+                <a:defRPr sz="1100">
+                  <a:solidFill>
+                    <a:schemeClr val="dk1"/>
+                  </a:solidFill>
+                  <a:latin typeface="+mn-lt"/>
+                  <a:ea typeface="+mn-ea"/>
+                  <a:cs typeface="+mn-cs"/>
+                </a:defRPr>
+              </a:lvl5pPr>
+              <a:lvl6pPr marL="2286000" indent="0">
+                <a:defRPr sz="1100">
+                  <a:solidFill>
+                    <a:schemeClr val="dk1"/>
+                  </a:solidFill>
+                  <a:latin typeface="+mn-lt"/>
+                  <a:ea typeface="+mn-ea"/>
+                  <a:cs typeface="+mn-cs"/>
+                </a:defRPr>
+              </a:lvl6pPr>
+              <a:lvl7pPr marL="2743200" indent="0">
+                <a:defRPr sz="1100">
+                  <a:solidFill>
+                    <a:schemeClr val="dk1"/>
+                  </a:solidFill>
+                  <a:latin typeface="+mn-lt"/>
+                  <a:ea typeface="+mn-ea"/>
+                  <a:cs typeface="+mn-cs"/>
+                </a:defRPr>
+              </a:lvl7pPr>
+              <a:lvl8pPr marL="3200400" indent="0">
+                <a:defRPr sz="1100">
+                  <a:solidFill>
+                    <a:schemeClr val="dk1"/>
+                  </a:solidFill>
+                  <a:latin typeface="+mn-lt"/>
+                  <a:ea typeface="+mn-ea"/>
+                  <a:cs typeface="+mn-cs"/>
+                </a:defRPr>
+              </a:lvl8pPr>
+              <a:lvl9pPr marL="3657600" indent="0">
+                <a:defRPr sz="1100">
+                  <a:solidFill>
+                    <a:schemeClr val="dk1"/>
+                  </a:solidFill>
+                  <a:latin typeface="+mn-lt"/>
+                  <a:ea typeface="+mn-ea"/>
+                  <a:cs typeface="+mn-cs"/>
+                </a:defRPr>
+              </a:lvl9pPr>
+            </a:lstStyle>
+            <a:p>
+              <a:pPr algn="l"/>
+              <a:endParaRPr kumimoji="1" lang="ja-JP" altLang="en-US" sz="1100"/>
+            </a:p>
+          </p:txBody>
+        </p:sp>
+        <p:sp>
+          <p:nvSpPr>
+            <p:cNvPr id="8" name="正方形/長方形 7">
+              <a:extLst>
+                <a:ext uri="{FF2B5EF4-FFF2-40B4-BE49-F238E27FC236}">
+                  <a16:creationId xmlns:a16="http://schemas.microsoft.com/office/drawing/2014/main" id="{23BBA5F6-74BB-708F-E231-F64EB82C02B3}"/>
+                </a:ext>
+              </a:extLst>
+            </p:cNvPr>
+            <p:cNvSpPr/>
+            <p:nvPr/>
+          </p:nvSpPr>
+          <p:spPr>
+            <a:xfrm>
+              <a:off x="6296440" y="1365433"/>
+              <a:ext cx="1715446" cy="587972"/>
+            </a:xfrm>
+            <a:prstGeom prst="rect">
+              <a:avLst/>
+            </a:prstGeom>
+            <a:ln w="28575">
+              <a:solidFill>
+                <a:srgbClr val="FF0000"/>
+              </a:solidFill>
+            </a:ln>
+          </p:spPr>
+          <p:style>
+            <a:lnRef idx="2">
+              <a:schemeClr val="accent6"/>
+            </a:lnRef>
+            <a:fillRef idx="1">
+              <a:schemeClr val="lt1"/>
+            </a:fillRef>
+            <a:effectRef idx="0">
+              <a:schemeClr val="accent6"/>
+            </a:effectRef>
+            <a:fontRef idx="minor">
+              <a:schemeClr val="dk1"/>
+            </a:fontRef>
+          </p:style>
+          <p:txBody>
+            <a:bodyPr rtlCol="0" anchor="ctr"/>
+            <a:lstStyle>
+              <a:lvl1pPr marL="0" indent="0">
+                <a:defRPr sz="1100">
+                  <a:solidFill>
+                    <a:schemeClr val="dk1"/>
+                  </a:solidFill>
+                  <a:latin typeface="+mn-lt"/>
+                  <a:ea typeface="+mn-ea"/>
+                  <a:cs typeface="+mn-cs"/>
+                </a:defRPr>
+              </a:lvl1pPr>
+              <a:lvl2pPr marL="457200" indent="0">
+                <a:defRPr sz="1100">
+                  <a:solidFill>
+                    <a:schemeClr val="dk1"/>
+                  </a:solidFill>
+                  <a:latin typeface="+mn-lt"/>
+                  <a:ea typeface="+mn-ea"/>
+                  <a:cs typeface="+mn-cs"/>
+                </a:defRPr>
+              </a:lvl2pPr>
+              <a:lvl3pPr marL="914400" indent="0">
+                <a:defRPr sz="1100">
+                  <a:solidFill>
+                    <a:schemeClr val="dk1"/>
+                  </a:solidFill>
+                  <a:latin typeface="+mn-lt"/>
+                  <a:ea typeface="+mn-ea"/>
+                  <a:cs typeface="+mn-cs"/>
+                </a:defRPr>
+              </a:lvl3pPr>
+              <a:lvl4pPr marL="1371600" indent="0">
+                <a:defRPr sz="1100">
+                  <a:solidFill>
+                    <a:schemeClr val="dk1"/>
+                  </a:solidFill>
+                  <a:latin typeface="+mn-lt"/>
+                  <a:ea typeface="+mn-ea"/>
+                  <a:cs typeface="+mn-cs"/>
+                </a:defRPr>
+              </a:lvl4pPr>
+              <a:lvl5pPr marL="1828800" indent="0">
+                <a:defRPr sz="1100">
+                  <a:solidFill>
+                    <a:schemeClr val="dk1"/>
+                  </a:solidFill>
+                  <a:latin typeface="+mn-lt"/>
+                  <a:ea typeface="+mn-ea"/>
+                  <a:cs typeface="+mn-cs"/>
+                </a:defRPr>
+              </a:lvl5pPr>
+              <a:lvl6pPr marL="2286000" indent="0">
+                <a:defRPr sz="1100">
+                  <a:solidFill>
+                    <a:schemeClr val="dk1"/>
+                  </a:solidFill>
+                  <a:latin typeface="+mn-lt"/>
+                  <a:ea typeface="+mn-ea"/>
+                  <a:cs typeface="+mn-cs"/>
+                </a:defRPr>
+              </a:lvl6pPr>
+              <a:lvl7pPr marL="2743200" indent="0">
+                <a:defRPr sz="1100">
+                  <a:solidFill>
+                    <a:schemeClr val="dk1"/>
+                  </a:solidFill>
+                  <a:latin typeface="+mn-lt"/>
+                  <a:ea typeface="+mn-ea"/>
+                  <a:cs typeface="+mn-cs"/>
+                </a:defRPr>
+              </a:lvl7pPr>
+              <a:lvl8pPr marL="3200400" indent="0">
+                <a:defRPr sz="1100">
+                  <a:solidFill>
+                    <a:schemeClr val="dk1"/>
+                  </a:solidFill>
+                  <a:latin typeface="+mn-lt"/>
+                  <a:ea typeface="+mn-ea"/>
+                  <a:cs typeface="+mn-cs"/>
+                </a:defRPr>
+              </a:lvl8pPr>
+              <a:lvl9pPr marL="3657600" indent="0">
+                <a:defRPr sz="1100">
+                  <a:solidFill>
+                    <a:schemeClr val="dk1"/>
+                  </a:solidFill>
+                  <a:latin typeface="+mn-lt"/>
+                  <a:ea typeface="+mn-ea"/>
+                  <a:cs typeface="+mn-cs"/>
+                </a:defRPr>
+              </a:lvl9pPr>
+            </a:lstStyle>
+            <a:p>
+              <a:pPr algn="l"/>
+              <a:r>
+                <a:rPr lang="ja-JP" altLang="en-US" sz="1200" b="1" dirty="0">
+                  <a:solidFill>
+                    <a:srgbClr val="FF0000"/>
+                  </a:solidFill>
+                </a:rPr>
+                <a:t>②</a:t>
+              </a:r>
+              <a:r>
+                <a:rPr kumimoji="1" lang="ja-JP" altLang="en-US" sz="1200" b="1" dirty="0">
+                  <a:solidFill>
+                    <a:srgbClr val="FF0000"/>
+                  </a:solidFill>
+                </a:rPr>
+                <a:t>エネミーデータ確認</a:t>
+              </a:r>
+            </a:p>
+          </p:txBody>
+        </p:sp>
+        <p:cxnSp>
+          <p:nvCxnSpPr>
+            <p:cNvPr id="13" name="直線矢印コネクタ 12">
+              <a:extLst>
+                <a:ext uri="{FF2B5EF4-FFF2-40B4-BE49-F238E27FC236}">
+                  <a16:creationId xmlns:a16="http://schemas.microsoft.com/office/drawing/2014/main" id="{774674FF-C8B1-47B6-DD2E-BA11F583BE01}"/>
+                </a:ext>
+              </a:extLst>
+            </p:cNvPr>
+            <p:cNvCxnSpPr>
+              <a:cxnSpLocks/>
+            </p:cNvCxnSpPr>
+            <p:nvPr/>
+          </p:nvCxnSpPr>
+          <p:spPr>
+            <a:xfrm>
+              <a:off x="7141029" y="1959427"/>
+              <a:ext cx="0" cy="275774"/>
+            </a:xfrm>
+            <a:prstGeom prst="straightConnector1">
+              <a:avLst/>
+            </a:prstGeom>
+            <a:ln w="28575">
+              <a:solidFill>
+                <a:srgbClr val="FF0000"/>
+              </a:solidFill>
+              <a:tailEnd type="triangle"/>
+            </a:ln>
+          </p:spPr>
+          <p:style>
+            <a:lnRef idx="2">
+              <a:schemeClr val="accent1"/>
+            </a:lnRef>
+            <a:fillRef idx="0">
+              <a:schemeClr val="accent1"/>
+            </a:fillRef>
+            <a:effectRef idx="1">
+              <a:schemeClr val="accent1"/>
+            </a:effectRef>
+            <a:fontRef idx="minor">
+              <a:schemeClr val="tx1"/>
+            </a:fontRef>
+          </p:style>
+        </p:cxnSp>
+        <p:sp>
+          <p:nvSpPr>
+            <p:cNvPr id="28" name="正方形/長方形 27">
+              <a:extLst>
+                <a:ext uri="{FF2B5EF4-FFF2-40B4-BE49-F238E27FC236}">
+                  <a16:creationId xmlns:a16="http://schemas.microsoft.com/office/drawing/2014/main" id="{244BF4C7-A25A-5F65-8C1C-B782C474FB9E}"/>
+                </a:ext>
+              </a:extLst>
+            </p:cNvPr>
+            <p:cNvSpPr/>
+            <p:nvPr/>
+          </p:nvSpPr>
+          <p:spPr>
+            <a:xfrm>
+              <a:off x="7138270" y="6648633"/>
+              <a:ext cx="1541271" cy="587972"/>
+            </a:xfrm>
+            <a:prstGeom prst="rect">
+              <a:avLst/>
+            </a:prstGeom>
+            <a:ln w="28575">
+              <a:solidFill>
+                <a:srgbClr val="FF0000"/>
+              </a:solidFill>
+            </a:ln>
+          </p:spPr>
+          <p:style>
+            <a:lnRef idx="2">
+              <a:schemeClr val="accent6"/>
+            </a:lnRef>
+            <a:fillRef idx="1">
+              <a:schemeClr val="lt1"/>
+            </a:fillRef>
+            <a:effectRef idx="0">
+              <a:schemeClr val="accent6"/>
+            </a:effectRef>
+            <a:fontRef idx="minor">
+              <a:schemeClr val="dk1"/>
+            </a:fontRef>
+          </p:style>
+          <p:txBody>
+            <a:bodyPr rtlCol="0" anchor="ctr"/>
+            <a:lstStyle>
+              <a:lvl1pPr marL="0" indent="0">
+                <a:defRPr sz="1100">
+                  <a:solidFill>
+                    <a:schemeClr val="dk1"/>
+                  </a:solidFill>
+                  <a:latin typeface="+mn-lt"/>
+                  <a:ea typeface="+mn-ea"/>
+                  <a:cs typeface="+mn-cs"/>
+                </a:defRPr>
+              </a:lvl1pPr>
+              <a:lvl2pPr marL="457200" indent="0">
+                <a:defRPr sz="1100">
+                  <a:solidFill>
+                    <a:schemeClr val="dk1"/>
+                  </a:solidFill>
+                  <a:latin typeface="+mn-lt"/>
+                  <a:ea typeface="+mn-ea"/>
+                  <a:cs typeface="+mn-cs"/>
+                </a:defRPr>
+              </a:lvl2pPr>
+              <a:lvl3pPr marL="914400" indent="0">
+                <a:defRPr sz="1100">
+                  <a:solidFill>
+                    <a:schemeClr val="dk1"/>
+                  </a:solidFill>
+                  <a:latin typeface="+mn-lt"/>
+                  <a:ea typeface="+mn-ea"/>
+                  <a:cs typeface="+mn-cs"/>
+                </a:defRPr>
+              </a:lvl3pPr>
+              <a:lvl4pPr marL="1371600" indent="0">
+                <a:defRPr sz="1100">
+                  <a:solidFill>
+                    <a:schemeClr val="dk1"/>
+                  </a:solidFill>
+                  <a:latin typeface="+mn-lt"/>
+                  <a:ea typeface="+mn-ea"/>
+                  <a:cs typeface="+mn-cs"/>
+                </a:defRPr>
+              </a:lvl4pPr>
+              <a:lvl5pPr marL="1828800" indent="0">
+                <a:defRPr sz="1100">
+                  <a:solidFill>
+                    <a:schemeClr val="dk1"/>
+                  </a:solidFill>
+                  <a:latin typeface="+mn-lt"/>
+                  <a:ea typeface="+mn-ea"/>
+                  <a:cs typeface="+mn-cs"/>
+                </a:defRPr>
+              </a:lvl5pPr>
+              <a:lvl6pPr marL="2286000" indent="0">
+                <a:defRPr sz="1100">
+                  <a:solidFill>
+                    <a:schemeClr val="dk1"/>
+                  </a:solidFill>
+                  <a:latin typeface="+mn-lt"/>
+                  <a:ea typeface="+mn-ea"/>
+                  <a:cs typeface="+mn-cs"/>
+                </a:defRPr>
+              </a:lvl6pPr>
+              <a:lvl7pPr marL="2743200" indent="0">
+                <a:defRPr sz="1100">
+                  <a:solidFill>
+                    <a:schemeClr val="dk1"/>
+                  </a:solidFill>
+                  <a:latin typeface="+mn-lt"/>
+                  <a:ea typeface="+mn-ea"/>
+                  <a:cs typeface="+mn-cs"/>
+                </a:defRPr>
+              </a:lvl7pPr>
+              <a:lvl8pPr marL="3200400" indent="0">
+                <a:defRPr sz="1100">
+                  <a:solidFill>
+                    <a:schemeClr val="dk1"/>
+                  </a:solidFill>
+                  <a:latin typeface="+mn-lt"/>
+                  <a:ea typeface="+mn-ea"/>
+                  <a:cs typeface="+mn-cs"/>
+                </a:defRPr>
+              </a:lvl8pPr>
+              <a:lvl9pPr marL="3657600" indent="0">
+                <a:defRPr sz="1100">
+                  <a:solidFill>
+                    <a:schemeClr val="dk1"/>
+                  </a:solidFill>
+                  <a:latin typeface="+mn-lt"/>
+                  <a:ea typeface="+mn-ea"/>
+                  <a:cs typeface="+mn-cs"/>
+                </a:defRPr>
+              </a:lvl9pPr>
+            </a:lstStyle>
+            <a:p>
+              <a:pPr algn="l"/>
+              <a:r>
+                <a:rPr lang="ja-JP" altLang="en-US" sz="1200" b="1" dirty="0">
+                  <a:solidFill>
+                    <a:srgbClr val="FF0000"/>
+                  </a:solidFill>
+                </a:rPr>
+                <a:t>③</a:t>
+              </a:r>
+              <a:r>
+                <a:rPr kumimoji="1" lang="en-US" altLang="ja-JP" sz="1200" b="1" dirty="0">
+                  <a:solidFill>
+                    <a:srgbClr val="FF0000"/>
+                  </a:solidFill>
+                </a:rPr>
+                <a:t>CCFOLIA</a:t>
+              </a:r>
+              <a:r>
+                <a:rPr kumimoji="1" lang="ja-JP" altLang="en-US" sz="1200" b="1" dirty="0">
+                  <a:solidFill>
+                    <a:srgbClr val="FF0000"/>
+                  </a:solidFill>
+                </a:rPr>
+                <a:t>用出力</a:t>
+              </a:r>
+            </a:p>
+          </p:txBody>
+        </p:sp>
+      </p:grpSp>
+    </p:spTree>
+    <p:extLst>
+      <p:ext uri="{BB962C8B-B14F-4D97-AF65-F5344CB8AC3E}">
+        <p14:creationId xmlns:p14="http://schemas.microsoft.com/office/powerpoint/2010/main" val="4128653299"/>
+      </p:ext>
+    </p:extLst>
+  </p:cSld>
+  <p:clrMapOvr>
+    <a:masterClrMapping/>
+  </p:clrMapOvr>
+</p:sld>
+</file>
+
+<file path=ppt/slides/slide14.xml><?xml version="1.0" encoding="utf-8"?>
+<p:sld xmlns:a="http://schemas.openxmlformats.org/drawingml/2006/main" xmlns:r="http://schemas.openxmlformats.org/officeDocument/2006/relationships" xmlns:p="http://schemas.openxmlformats.org/presentationml/2006/main">
+  <p:cSld>
+    <p:spTree>
+      <p:nvGrpSpPr>
+        <p:cNvPr id="1" name=""/>
+        <p:cNvGrpSpPr/>
+        <p:nvPr/>
+      </p:nvGrpSpPr>
+      <p:grpSpPr>
+        <a:xfrm>
+          <a:off x="0" y="0"/>
+          <a:ext cx="0" cy="0"/>
+          <a:chOff x="0" y="0"/>
+          <a:chExt cx="0" cy="0"/>
+        </a:xfrm>
+      </p:grpSpPr>
+      <p:pic>
+        <p:nvPicPr>
+          <p:cNvPr id="5" name="図 4">
+            <a:extLst>
+              <a:ext uri="{FF2B5EF4-FFF2-40B4-BE49-F238E27FC236}">
+                <a16:creationId xmlns:a16="http://schemas.microsoft.com/office/drawing/2014/main" id="{5872C2C5-250A-C120-82D3-BF91F13B4745}"/>
+              </a:ext>
+            </a:extLst>
+          </p:cNvPr>
+          <p:cNvPicPr>
+            <a:picLocks noChangeAspect="1"/>
+          </p:cNvPicPr>
+          <p:nvPr/>
+        </p:nvPicPr>
+        <p:blipFill>
+          <a:blip r:embed="rId2"/>
+          <a:srcRect l="1" r="47500" b="25531"/>
+          <a:stretch>
+            <a:fillRect/>
+          </a:stretch>
+        </p:blipFill>
+        <p:spPr>
+          <a:xfrm>
+            <a:off x="174172" y="623464"/>
+            <a:ext cx="6400799" cy="4061747"/>
+          </a:xfrm>
+          <a:prstGeom prst="rect">
+            <a:avLst/>
+          </a:prstGeom>
+        </p:spPr>
+      </p:pic>
+      <p:pic>
+        <p:nvPicPr>
+          <p:cNvPr id="7" name="図 6">
+            <a:extLst>
+              <a:ext uri="{FF2B5EF4-FFF2-40B4-BE49-F238E27FC236}">
+                <a16:creationId xmlns:a16="http://schemas.microsoft.com/office/drawing/2014/main" id="{40D457F4-59B6-647E-19D7-F67F20DD63F7}"/>
+              </a:ext>
+            </a:extLst>
+          </p:cNvPr>
+          <p:cNvPicPr>
+            <a:picLocks noChangeAspect="1"/>
+          </p:cNvPicPr>
+          <p:nvPr/>
+        </p:nvPicPr>
+        <p:blipFill>
+          <a:blip r:embed="rId3"/>
+          <a:stretch>
+            <a:fillRect/>
+          </a:stretch>
+        </p:blipFill>
+        <p:spPr>
+          <a:xfrm>
+            <a:off x="3257237" y="0"/>
+            <a:ext cx="5677525" cy="6858000"/>
+          </a:xfrm>
+          <a:prstGeom prst="rect">
+            <a:avLst/>
+          </a:prstGeom>
+        </p:spPr>
+      </p:pic>
+    </p:spTree>
+    <p:extLst>
+      <p:ext uri="{BB962C8B-B14F-4D97-AF65-F5344CB8AC3E}">
+        <p14:creationId xmlns:p14="http://schemas.microsoft.com/office/powerpoint/2010/main" val="1558768036"/>
+      </p:ext>
+    </p:extLst>
+  </p:cSld>
+  <p:clrMapOvr>
+    <a:masterClrMapping/>
+  </p:clrMapOvr>
+</p:sld>
+</file>
+
 <file path=ppt/slides/slide2.xml><?xml version="1.0" encoding="utf-8"?>
 <p:sld xmlns:a="http://schemas.openxmlformats.org/drawingml/2006/main" xmlns:r="http://schemas.openxmlformats.org/officeDocument/2006/relationships" xmlns:p="http://schemas.openxmlformats.org/presentationml/2006/main" show="0">
   <p:cSld>
@@ -15540,7 +18179,7 @@
         </p:nvGrpSpPr>
         <p:grpSpPr>
           <a:xfrm>
-            <a:off x="800425" y="-4440877"/>
+            <a:off x="-1333175" y="-3888427"/>
             <a:ext cx="11210374" cy="15739754"/>
             <a:chOff x="0" y="292551"/>
             <a:chExt cx="11615187" cy="13120379"/>
@@ -16111,148 +18750,6 @@
               </a:p>
             </p:txBody>
           </p:sp>
-          <p:sp>
-            <p:nvSpPr>
-              <p:cNvPr id="35" name="正方形/長方形 34">
-                <a:extLst>
-                  <a:ext uri="{FF2B5EF4-FFF2-40B4-BE49-F238E27FC236}">
-                    <a16:creationId xmlns:a16="http://schemas.microsoft.com/office/drawing/2014/main" id="{3C7037D3-860C-C58D-AC0F-299DBA81919F}"/>
-                  </a:ext>
-                </a:extLst>
-              </p:cNvPr>
-              <p:cNvSpPr/>
-              <p:nvPr/>
-            </p:nvSpPr>
-            <p:spPr>
-              <a:xfrm>
-                <a:off x="1660047" y="4330949"/>
-                <a:ext cx="1027438" cy="372243"/>
-              </a:xfrm>
-              <a:prstGeom prst="rect">
-                <a:avLst/>
-              </a:prstGeom>
-              <a:noFill/>
-              <a:ln w="28575">
-                <a:solidFill>
-                  <a:srgbClr val="FF0000"/>
-                </a:solidFill>
-                <a:prstDash val="solid"/>
-              </a:ln>
-            </p:spPr>
-            <p:style>
-              <a:lnRef idx="2">
-                <a:schemeClr val="accent6"/>
-              </a:lnRef>
-              <a:fillRef idx="1">
-                <a:schemeClr val="lt1"/>
-              </a:fillRef>
-              <a:effectRef idx="0">
-                <a:schemeClr val="accent6"/>
-              </a:effectRef>
-              <a:fontRef idx="minor">
-                <a:schemeClr val="dk1"/>
-              </a:fontRef>
-            </p:style>
-            <p:txBody>
-              <a:bodyPr rtlCol="0" anchor="t"/>
-              <a:lstStyle>
-                <a:lvl1pPr marL="0" indent="0">
-                  <a:defRPr sz="1100">
-                    <a:solidFill>
-                      <a:schemeClr val="dk1"/>
-                    </a:solidFill>
-                    <a:latin typeface="+mn-lt"/>
-                    <a:ea typeface="+mn-ea"/>
-                    <a:cs typeface="+mn-cs"/>
-                  </a:defRPr>
-                </a:lvl1pPr>
-                <a:lvl2pPr marL="457200" indent="0">
-                  <a:defRPr sz="1100">
-                    <a:solidFill>
-                      <a:schemeClr val="dk1"/>
-                    </a:solidFill>
-                    <a:latin typeface="+mn-lt"/>
-                    <a:ea typeface="+mn-ea"/>
-                    <a:cs typeface="+mn-cs"/>
-                  </a:defRPr>
-                </a:lvl2pPr>
-                <a:lvl3pPr marL="914400" indent="0">
-                  <a:defRPr sz="1100">
-                    <a:solidFill>
-                      <a:schemeClr val="dk1"/>
-                    </a:solidFill>
-                    <a:latin typeface="+mn-lt"/>
-                    <a:ea typeface="+mn-ea"/>
-                    <a:cs typeface="+mn-cs"/>
-                  </a:defRPr>
-                </a:lvl3pPr>
-                <a:lvl4pPr marL="1371600" indent="0">
-                  <a:defRPr sz="1100">
-                    <a:solidFill>
-                      <a:schemeClr val="dk1"/>
-                    </a:solidFill>
-                    <a:latin typeface="+mn-lt"/>
-                    <a:ea typeface="+mn-ea"/>
-                    <a:cs typeface="+mn-cs"/>
-                  </a:defRPr>
-                </a:lvl4pPr>
-                <a:lvl5pPr marL="1828800" indent="0">
-                  <a:defRPr sz="1100">
-                    <a:solidFill>
-                      <a:schemeClr val="dk1"/>
-                    </a:solidFill>
-                    <a:latin typeface="+mn-lt"/>
-                    <a:ea typeface="+mn-ea"/>
-                    <a:cs typeface="+mn-cs"/>
-                  </a:defRPr>
-                </a:lvl5pPr>
-                <a:lvl6pPr marL="2286000" indent="0">
-                  <a:defRPr sz="1100">
-                    <a:solidFill>
-                      <a:schemeClr val="dk1"/>
-                    </a:solidFill>
-                    <a:latin typeface="+mn-lt"/>
-                    <a:ea typeface="+mn-ea"/>
-                    <a:cs typeface="+mn-cs"/>
-                  </a:defRPr>
-                </a:lvl6pPr>
-                <a:lvl7pPr marL="2743200" indent="0">
-                  <a:defRPr sz="1100">
-                    <a:solidFill>
-                      <a:schemeClr val="dk1"/>
-                    </a:solidFill>
-                    <a:latin typeface="+mn-lt"/>
-                    <a:ea typeface="+mn-ea"/>
-                    <a:cs typeface="+mn-cs"/>
-                  </a:defRPr>
-                </a:lvl7pPr>
-                <a:lvl8pPr marL="3200400" indent="0">
-                  <a:defRPr sz="1100">
-                    <a:solidFill>
-                      <a:schemeClr val="dk1"/>
-                    </a:solidFill>
-                    <a:latin typeface="+mn-lt"/>
-                    <a:ea typeface="+mn-ea"/>
-                    <a:cs typeface="+mn-cs"/>
-                  </a:defRPr>
-                </a:lvl8pPr>
-                <a:lvl9pPr marL="3657600" indent="0">
-                  <a:defRPr sz="1100">
-                    <a:solidFill>
-                      <a:schemeClr val="dk1"/>
-                    </a:solidFill>
-                    <a:latin typeface="+mn-lt"/>
-                    <a:ea typeface="+mn-ea"/>
-                    <a:cs typeface="+mn-cs"/>
-                  </a:defRPr>
-                </a:lvl9pPr>
-              </a:lstStyle>
-              <a:p>
-                <a:pPr algn="l"/>
-                <a:endParaRPr kumimoji="1" lang="ja-JP" altLang="en-US" sz="1100"/>
-              </a:p>
-            </p:txBody>
-          </p:sp>
           <p:cxnSp>
             <p:nvCxnSpPr>
               <p:cNvPr id="36" name="直線矢印コネクタ 35">
@@ -16594,195 +19091,6 @@
           </p:sp>
           <p:sp>
             <p:nvSpPr>
-              <p:cNvPr id="39" name="正方形/長方形 38">
-                <a:extLst>
-                  <a:ext uri="{FF2B5EF4-FFF2-40B4-BE49-F238E27FC236}">
-                    <a16:creationId xmlns:a16="http://schemas.microsoft.com/office/drawing/2014/main" id="{ABF2B896-DEBA-76BC-4A98-CF9CE3C2DD91}"/>
-                  </a:ext>
-                </a:extLst>
-              </p:cNvPr>
-              <p:cNvSpPr/>
-              <p:nvPr/>
-            </p:nvSpPr>
-            <p:spPr>
-              <a:xfrm>
-                <a:off x="3271436" y="4301555"/>
-                <a:ext cx="1640081" cy="400743"/>
-              </a:xfrm>
-              <a:prstGeom prst="rect">
-                <a:avLst/>
-              </a:prstGeom>
-              <a:ln w="28575">
-                <a:solidFill>
-                  <a:srgbClr val="FF0000"/>
-                </a:solidFill>
-              </a:ln>
-            </p:spPr>
-            <p:style>
-              <a:lnRef idx="2">
-                <a:schemeClr val="accent6"/>
-              </a:lnRef>
-              <a:fillRef idx="1">
-                <a:schemeClr val="lt1"/>
-              </a:fillRef>
-              <a:effectRef idx="0">
-                <a:schemeClr val="accent6"/>
-              </a:effectRef>
-              <a:fontRef idx="minor">
-                <a:schemeClr val="dk1"/>
-              </a:fontRef>
-            </p:style>
-            <p:txBody>
-              <a:bodyPr rtlCol="0" anchor="ctr"/>
-              <a:lstStyle>
-                <a:lvl1pPr marL="0" indent="0">
-                  <a:defRPr sz="1100">
-                    <a:solidFill>
-                      <a:schemeClr val="dk1"/>
-                    </a:solidFill>
-                    <a:latin typeface="+mn-lt"/>
-                    <a:ea typeface="+mn-ea"/>
-                    <a:cs typeface="+mn-cs"/>
-                  </a:defRPr>
-                </a:lvl1pPr>
-                <a:lvl2pPr marL="457200" indent="0">
-                  <a:defRPr sz="1100">
-                    <a:solidFill>
-                      <a:schemeClr val="dk1"/>
-                    </a:solidFill>
-                    <a:latin typeface="+mn-lt"/>
-                    <a:ea typeface="+mn-ea"/>
-                    <a:cs typeface="+mn-cs"/>
-                  </a:defRPr>
-                </a:lvl2pPr>
-                <a:lvl3pPr marL="914400" indent="0">
-                  <a:defRPr sz="1100">
-                    <a:solidFill>
-                      <a:schemeClr val="dk1"/>
-                    </a:solidFill>
-                    <a:latin typeface="+mn-lt"/>
-                    <a:ea typeface="+mn-ea"/>
-                    <a:cs typeface="+mn-cs"/>
-                  </a:defRPr>
-                </a:lvl3pPr>
-                <a:lvl4pPr marL="1371600" indent="0">
-                  <a:defRPr sz="1100">
-                    <a:solidFill>
-                      <a:schemeClr val="dk1"/>
-                    </a:solidFill>
-                    <a:latin typeface="+mn-lt"/>
-                    <a:ea typeface="+mn-ea"/>
-                    <a:cs typeface="+mn-cs"/>
-                  </a:defRPr>
-                </a:lvl4pPr>
-                <a:lvl5pPr marL="1828800" indent="0">
-                  <a:defRPr sz="1100">
-                    <a:solidFill>
-                      <a:schemeClr val="dk1"/>
-                    </a:solidFill>
-                    <a:latin typeface="+mn-lt"/>
-                    <a:ea typeface="+mn-ea"/>
-                    <a:cs typeface="+mn-cs"/>
-                  </a:defRPr>
-                </a:lvl5pPr>
-                <a:lvl6pPr marL="2286000" indent="0">
-                  <a:defRPr sz="1100">
-                    <a:solidFill>
-                      <a:schemeClr val="dk1"/>
-                    </a:solidFill>
-                    <a:latin typeface="+mn-lt"/>
-                    <a:ea typeface="+mn-ea"/>
-                    <a:cs typeface="+mn-cs"/>
-                  </a:defRPr>
-                </a:lvl6pPr>
-                <a:lvl7pPr marL="2743200" indent="0">
-                  <a:defRPr sz="1100">
-                    <a:solidFill>
-                      <a:schemeClr val="dk1"/>
-                    </a:solidFill>
-                    <a:latin typeface="+mn-lt"/>
-                    <a:ea typeface="+mn-ea"/>
-                    <a:cs typeface="+mn-cs"/>
-                  </a:defRPr>
-                </a:lvl7pPr>
-                <a:lvl8pPr marL="3200400" indent="0">
-                  <a:defRPr sz="1100">
-                    <a:solidFill>
-                      <a:schemeClr val="dk1"/>
-                    </a:solidFill>
-                    <a:latin typeface="+mn-lt"/>
-                    <a:ea typeface="+mn-ea"/>
-                    <a:cs typeface="+mn-cs"/>
-                  </a:defRPr>
-                </a:lvl8pPr>
-                <a:lvl9pPr marL="3657600" indent="0">
-                  <a:defRPr sz="1100">
-                    <a:solidFill>
-                      <a:schemeClr val="dk1"/>
-                    </a:solidFill>
-                    <a:latin typeface="+mn-lt"/>
-                    <a:ea typeface="+mn-ea"/>
-                    <a:cs typeface="+mn-cs"/>
-                  </a:defRPr>
-                </a:lvl9pPr>
-              </a:lstStyle>
-              <a:p>
-                <a:pPr algn="l"/>
-                <a:r>
-                  <a:rPr kumimoji="1" lang="ja-JP" altLang="en-US" sz="1200" b="1">
-                    <a:solidFill>
-                      <a:srgbClr val="FF0000"/>
-                    </a:solidFill>
-                  </a:rPr>
-                  <a:t>③特技の数を設定</a:t>
-                </a:r>
-              </a:p>
-            </p:txBody>
-          </p:sp>
-          <p:cxnSp>
-            <p:nvCxnSpPr>
-              <p:cNvPr id="40" name="直線矢印コネクタ 39">
-                <a:extLst>
-                  <a:ext uri="{FF2B5EF4-FFF2-40B4-BE49-F238E27FC236}">
-                    <a16:creationId xmlns:a16="http://schemas.microsoft.com/office/drawing/2014/main" id="{9531DF12-26A9-4D7C-CE24-20585C2DD1A7}"/>
-                  </a:ext>
-                </a:extLst>
-              </p:cNvPr>
-              <p:cNvCxnSpPr/>
-              <p:nvPr/>
-            </p:nvCxnSpPr>
-            <p:spPr>
-              <a:xfrm flipH="1">
-                <a:off x="2705156" y="4515458"/>
-                <a:ext cx="547825" cy="1195"/>
-              </a:xfrm>
-              <a:prstGeom prst="straightConnector1">
-                <a:avLst/>
-              </a:prstGeom>
-              <a:ln w="28575">
-                <a:solidFill>
-                  <a:srgbClr val="FF0000"/>
-                </a:solidFill>
-                <a:tailEnd type="triangle"/>
-              </a:ln>
-            </p:spPr>
-            <p:style>
-              <a:lnRef idx="2">
-                <a:schemeClr val="accent1"/>
-              </a:lnRef>
-              <a:fillRef idx="0">
-                <a:schemeClr val="accent1"/>
-              </a:fillRef>
-              <a:effectRef idx="1">
-                <a:schemeClr val="accent1"/>
-              </a:effectRef>
-              <a:fontRef idx="minor">
-                <a:schemeClr val="tx1"/>
-              </a:fontRef>
-            </p:style>
-          </p:cxnSp>
-          <p:sp>
-            <p:nvSpPr>
               <p:cNvPr id="41" name="正方形/長方形 40">
                 <a:extLst>
                   <a:ext uri="{FF2B5EF4-FFF2-40B4-BE49-F238E27FC236}">
@@ -16795,8 +19103,8 @@
             </p:nvSpPr>
             <p:spPr>
               <a:xfrm>
-                <a:off x="1660048" y="4814089"/>
-                <a:ext cx="8555618" cy="6614856"/>
+                <a:off x="1660048" y="4115497"/>
+                <a:ext cx="8555618" cy="7313448"/>
               </a:xfrm>
               <a:prstGeom prst="rect">
                 <a:avLst/>
@@ -16925,10 +19233,10 @@
           </p:sp>
           <p:sp>
             <p:nvSpPr>
-              <p:cNvPr id="42" name="正方形/長方形 41">
+              <p:cNvPr id="9" name="正方形/長方形 8">
                 <a:extLst>
                   <a:ext uri="{FF2B5EF4-FFF2-40B4-BE49-F238E27FC236}">
-                    <a16:creationId xmlns:a16="http://schemas.microsoft.com/office/drawing/2014/main" id="{DE7CCB65-8130-C53E-9026-73196F617BCD}"/>
+                    <a16:creationId xmlns:a16="http://schemas.microsoft.com/office/drawing/2014/main" id="{01CE8B1A-7AC7-9D1E-10CE-ACA3234A23B3}"/>
                   </a:ext>
                 </a:extLst>
               </p:cNvPr>
@@ -16937,8 +19245,8 @@
             </p:nvSpPr>
             <p:spPr>
               <a:xfrm>
-                <a:off x="7314567" y="4250717"/>
-                <a:ext cx="1151417" cy="420485"/>
+                <a:off x="7577779" y="3433269"/>
+                <a:ext cx="1166633" cy="420485"/>
               </a:xfrm>
               <a:prstGeom prst="rect">
                 <a:avLst/>
@@ -17060,12 +19368,12 @@
               <a:p>
                 <a:pPr algn="l"/>
                 <a:r>
-                  <a:rPr kumimoji="1" lang="ja-JP" altLang="en-US" sz="1200" b="1">
+                  <a:rPr kumimoji="1" lang="ja-JP" altLang="en-US" sz="1200" b="1" dirty="0">
                     <a:solidFill>
                       <a:srgbClr val="FF0000"/>
                     </a:solidFill>
                   </a:rPr>
-                  <a:t>④特技の入力</a:t>
+                  <a:t>③特技の入力</a:t>
                 </a:r>
               </a:p>
             </p:txBody>
@@ -17122,13 +19430,15 @@
                 </a:ext>
               </a:extLst>
             </p:cNvPr>
-            <p:cNvCxnSpPr/>
+            <p:cNvCxnSpPr>
+              <a:cxnSpLocks/>
+            </p:cNvCxnSpPr>
             <p:nvPr/>
           </p:nvCxnSpPr>
           <p:spPr>
             <a:xfrm>
-              <a:off x="7733925" y="5161741"/>
-              <a:ext cx="0" cy="156961"/>
+              <a:off x="7990518" y="4244300"/>
+              <a:ext cx="0" cy="296011"/>
             </a:xfrm>
             <a:prstGeom prst="straightConnector1">
               <a:avLst/>

--- a/スクリーンショット_使い方_エネミー.pptx
+++ b/スクリーンショット_使い方_エネミー.pptx
@@ -18,7 +18,9 @@
     <p:sldId id="272" r:id="rId12"/>
     <p:sldId id="273" r:id="rId13"/>
     <p:sldId id="274" r:id="rId14"/>
-    <p:sldId id="275" r:id="rId15"/>
+    <p:sldId id="276" r:id="rId15"/>
+    <p:sldId id="277" r:id="rId16"/>
+    <p:sldId id="275" r:id="rId17"/>
   </p:sldIdLst>
   <p:sldSz cx="12192000" cy="6858000"/>
   <p:notesSz cx="6858000" cy="9144000"/>
@@ -876,7 +878,7 @@
           <a:p>
             <a:fld id="{CB957B6A-6E51-4212-A048-7E8AFB564F0B}" type="datetimeFigureOut">
               <a:rPr kumimoji="1" lang="ja-JP" altLang="en-US" smtClean="0"/>
-              <a:t>2026/5/21</a:t>
+              <a:t>2026/5/22</a:t>
             </a:fld>
             <a:endParaRPr kumimoji="1" lang="ja-JP" altLang="en-US"/>
           </a:p>
@@ -1106,7 +1108,7 @@
           <a:p>
             <a:fld id="{CB957B6A-6E51-4212-A048-7E8AFB564F0B}" type="datetimeFigureOut">
               <a:rPr kumimoji="1" lang="ja-JP" altLang="en-US" smtClean="0"/>
-              <a:t>2026/5/21</a:t>
+              <a:t>2026/5/22</a:t>
             </a:fld>
             <a:endParaRPr kumimoji="1" lang="ja-JP" altLang="en-US"/>
           </a:p>
@@ -1346,7 +1348,7 @@
           <a:p>
             <a:fld id="{CB957B6A-6E51-4212-A048-7E8AFB564F0B}" type="datetimeFigureOut">
               <a:rPr kumimoji="1" lang="ja-JP" altLang="en-US" smtClean="0"/>
-              <a:t>2026/5/21</a:t>
+              <a:t>2026/5/22</a:t>
             </a:fld>
             <a:endParaRPr kumimoji="1" lang="ja-JP" altLang="en-US"/>
           </a:p>
@@ -1576,7 +1578,7 @@
           <a:p>
             <a:fld id="{CB957B6A-6E51-4212-A048-7E8AFB564F0B}" type="datetimeFigureOut">
               <a:rPr kumimoji="1" lang="ja-JP" altLang="en-US" smtClean="0"/>
-              <a:t>2026/5/21</a:t>
+              <a:t>2026/5/22</a:t>
             </a:fld>
             <a:endParaRPr kumimoji="1" lang="ja-JP" altLang="en-US"/>
           </a:p>
@@ -1851,7 +1853,7 @@
           <a:p>
             <a:fld id="{CB957B6A-6E51-4212-A048-7E8AFB564F0B}" type="datetimeFigureOut">
               <a:rPr kumimoji="1" lang="ja-JP" altLang="en-US" smtClean="0"/>
-              <a:t>2026/5/21</a:t>
+              <a:t>2026/5/22</a:t>
             </a:fld>
             <a:endParaRPr kumimoji="1" lang="ja-JP" altLang="en-US"/>
           </a:p>
@@ -2180,7 +2182,7 @@
           <a:p>
             <a:fld id="{CB957B6A-6E51-4212-A048-7E8AFB564F0B}" type="datetimeFigureOut">
               <a:rPr kumimoji="1" lang="ja-JP" altLang="en-US" smtClean="0"/>
-              <a:t>2026/5/21</a:t>
+              <a:t>2026/5/22</a:t>
             </a:fld>
             <a:endParaRPr kumimoji="1" lang="ja-JP" altLang="en-US"/>
           </a:p>
@@ -2656,7 +2658,7 @@
           <a:p>
             <a:fld id="{CB957B6A-6E51-4212-A048-7E8AFB564F0B}" type="datetimeFigureOut">
               <a:rPr kumimoji="1" lang="ja-JP" altLang="en-US" smtClean="0"/>
-              <a:t>2026/5/21</a:t>
+              <a:t>2026/5/22</a:t>
             </a:fld>
             <a:endParaRPr kumimoji="1" lang="ja-JP" altLang="en-US"/>
           </a:p>
@@ -2797,7 +2799,7 @@
           <a:p>
             <a:fld id="{CB957B6A-6E51-4212-A048-7E8AFB564F0B}" type="datetimeFigureOut">
               <a:rPr kumimoji="1" lang="ja-JP" altLang="en-US" smtClean="0"/>
-              <a:t>2026/5/21</a:t>
+              <a:t>2026/5/22</a:t>
             </a:fld>
             <a:endParaRPr kumimoji="1" lang="ja-JP" altLang="en-US"/>
           </a:p>
@@ -2910,7 +2912,7 @@
           <a:p>
             <a:fld id="{CB957B6A-6E51-4212-A048-7E8AFB564F0B}" type="datetimeFigureOut">
               <a:rPr kumimoji="1" lang="ja-JP" altLang="en-US" smtClean="0"/>
-              <a:t>2026/5/21</a:t>
+              <a:t>2026/5/22</a:t>
             </a:fld>
             <a:endParaRPr kumimoji="1" lang="ja-JP" altLang="en-US"/>
           </a:p>
@@ -3253,7 +3255,7 @@
           <a:p>
             <a:fld id="{CB957B6A-6E51-4212-A048-7E8AFB564F0B}" type="datetimeFigureOut">
               <a:rPr kumimoji="1" lang="ja-JP" altLang="en-US" smtClean="0"/>
-              <a:t>2026/5/21</a:t>
+              <a:t>2026/5/22</a:t>
             </a:fld>
             <a:endParaRPr kumimoji="1" lang="ja-JP" altLang="en-US"/>
           </a:p>
@@ -3541,7 +3543,7 @@
           <a:p>
             <a:fld id="{CB957B6A-6E51-4212-A048-7E8AFB564F0B}" type="datetimeFigureOut">
               <a:rPr kumimoji="1" lang="ja-JP" altLang="en-US" smtClean="0"/>
-              <a:t>2026/5/21</a:t>
+              <a:t>2026/5/22</a:t>
             </a:fld>
             <a:endParaRPr kumimoji="1" lang="ja-JP" altLang="en-US"/>
           </a:p>
@@ -3814,7 +3816,7 @@
           <a:p>
             <a:fld id="{CB957B6A-6E51-4212-A048-7E8AFB564F0B}" type="datetimeFigureOut">
               <a:rPr kumimoji="1" lang="ja-JP" altLang="en-US" smtClean="0"/>
-              <a:t>2026/5/21</a:t>
+              <a:t>2026/5/22</a:t>
             </a:fld>
             <a:endParaRPr kumimoji="1" lang="ja-JP" altLang="en-US"/>
           </a:p>
@@ -10843,6 +10845,1161 @@
   <p:cSld>
     <p:spTree>
       <p:nvGrpSpPr>
+        <p:cNvPr id="1" name="">
+          <a:extLst>
+            <a:ext uri="{FF2B5EF4-FFF2-40B4-BE49-F238E27FC236}">
+              <a16:creationId xmlns:a16="http://schemas.microsoft.com/office/drawing/2014/main" id="{71CBE652-523C-DA0F-06BB-B347DFA1E001}"/>
+            </a:ext>
+          </a:extLst>
+        </p:cNvPr>
+        <p:cNvGrpSpPr/>
+        <p:nvPr/>
+      </p:nvGrpSpPr>
+      <p:grpSpPr>
+        <a:xfrm>
+          <a:off x="0" y="0"/>
+          <a:ext cx="0" cy="0"/>
+          <a:chOff x="0" y="0"/>
+          <a:chExt cx="0" cy="0"/>
+        </a:xfrm>
+      </p:grpSpPr>
+      <p:grpSp>
+        <p:nvGrpSpPr>
+          <p:cNvPr id="35" name="グループ化 34">
+            <a:extLst>
+              <a:ext uri="{FF2B5EF4-FFF2-40B4-BE49-F238E27FC236}">
+                <a16:creationId xmlns:a16="http://schemas.microsoft.com/office/drawing/2014/main" id="{0856F552-CD69-828F-E68F-5A1E953894B3}"/>
+              </a:ext>
+            </a:extLst>
+          </p:cNvPr>
+          <p:cNvGrpSpPr/>
+          <p:nvPr/>
+        </p:nvGrpSpPr>
+        <p:grpSpPr>
+          <a:xfrm>
+            <a:off x="277586" y="1847850"/>
+            <a:ext cx="11210374" cy="3333750"/>
+            <a:chOff x="-227804" y="6449786"/>
+            <a:chExt cx="11210374" cy="3333750"/>
+          </a:xfrm>
+        </p:grpSpPr>
+        <p:sp>
+          <p:nvSpPr>
+            <p:cNvPr id="11" name="正方形/長方形 10">
+              <a:extLst>
+                <a:ext uri="{FF2B5EF4-FFF2-40B4-BE49-F238E27FC236}">
+                  <a16:creationId xmlns:a16="http://schemas.microsoft.com/office/drawing/2014/main" id="{E9EB724B-031D-B712-5443-53C35EEB9EF3}"/>
+                </a:ext>
+              </a:extLst>
+            </p:cNvPr>
+            <p:cNvSpPr/>
+            <p:nvPr/>
+          </p:nvSpPr>
+          <p:spPr>
+            <a:xfrm>
+              <a:off x="-227804" y="6449786"/>
+              <a:ext cx="11210374" cy="3333750"/>
+            </a:xfrm>
+            <a:prstGeom prst="rect">
+              <a:avLst/>
+            </a:prstGeom>
+            <a:ln>
+              <a:noFill/>
+            </a:ln>
+          </p:spPr>
+          <p:style>
+            <a:lnRef idx="2">
+              <a:schemeClr val="dk1"/>
+            </a:lnRef>
+            <a:fillRef idx="1">
+              <a:schemeClr val="lt1"/>
+            </a:fillRef>
+            <a:effectRef idx="0">
+              <a:schemeClr val="dk1"/>
+            </a:effectRef>
+            <a:fontRef idx="minor">
+              <a:schemeClr val="dk1"/>
+            </a:fontRef>
+          </p:style>
+          <p:txBody>
+            <a:bodyPr wrap="square" rtlCol="0" anchor="ctr"/>
+            <a:lstStyle>
+              <a:defPPr>
+                <a:defRPr lang="ja-JP"/>
+              </a:defPPr>
+              <a:lvl1pPr marL="0" indent="0" algn="l" defTabSz="914400" rtl="0" eaLnBrk="1" latinLnBrk="0" hangingPunct="1">
+                <a:defRPr kumimoji="1" sz="1800" kern="1200">
+                  <a:solidFill>
+                    <a:schemeClr val="dk1"/>
+                  </a:solidFill>
+                  <a:latin typeface="+mn-lt"/>
+                  <a:ea typeface="+mn-ea"/>
+                  <a:cs typeface="+mn-cs"/>
+                </a:defRPr>
+              </a:lvl1pPr>
+              <a:lvl2pPr marL="457200" indent="0" algn="l" defTabSz="914400" rtl="0" eaLnBrk="1" latinLnBrk="0" hangingPunct="1">
+                <a:defRPr kumimoji="1" sz="1800" kern="1200">
+                  <a:solidFill>
+                    <a:schemeClr val="dk1"/>
+                  </a:solidFill>
+                  <a:latin typeface="+mn-lt"/>
+                  <a:ea typeface="+mn-ea"/>
+                  <a:cs typeface="+mn-cs"/>
+                </a:defRPr>
+              </a:lvl2pPr>
+              <a:lvl3pPr marL="914400" indent="0" algn="l" defTabSz="914400" rtl="0" eaLnBrk="1" latinLnBrk="0" hangingPunct="1">
+                <a:defRPr kumimoji="1" sz="1800" kern="1200">
+                  <a:solidFill>
+                    <a:schemeClr val="dk1"/>
+                  </a:solidFill>
+                  <a:latin typeface="+mn-lt"/>
+                  <a:ea typeface="+mn-ea"/>
+                  <a:cs typeface="+mn-cs"/>
+                </a:defRPr>
+              </a:lvl3pPr>
+              <a:lvl4pPr marL="1371600" indent="0" algn="l" defTabSz="914400" rtl="0" eaLnBrk="1" latinLnBrk="0" hangingPunct="1">
+                <a:defRPr kumimoji="1" sz="1800" kern="1200">
+                  <a:solidFill>
+                    <a:schemeClr val="dk1"/>
+                  </a:solidFill>
+                  <a:latin typeface="+mn-lt"/>
+                  <a:ea typeface="+mn-ea"/>
+                  <a:cs typeface="+mn-cs"/>
+                </a:defRPr>
+              </a:lvl4pPr>
+              <a:lvl5pPr marL="1828800" indent="0" algn="l" defTabSz="914400" rtl="0" eaLnBrk="1" latinLnBrk="0" hangingPunct="1">
+                <a:defRPr kumimoji="1" sz="1800" kern="1200">
+                  <a:solidFill>
+                    <a:schemeClr val="dk1"/>
+                  </a:solidFill>
+                  <a:latin typeface="+mn-lt"/>
+                  <a:ea typeface="+mn-ea"/>
+                  <a:cs typeface="+mn-cs"/>
+                </a:defRPr>
+              </a:lvl5pPr>
+              <a:lvl6pPr marL="2286000" indent="0" algn="l" defTabSz="914400" rtl="0" eaLnBrk="1" latinLnBrk="0" hangingPunct="1">
+                <a:defRPr kumimoji="1" sz="1800" kern="1200">
+                  <a:solidFill>
+                    <a:schemeClr val="dk1"/>
+                  </a:solidFill>
+                  <a:latin typeface="+mn-lt"/>
+                  <a:ea typeface="+mn-ea"/>
+                  <a:cs typeface="+mn-cs"/>
+                </a:defRPr>
+              </a:lvl6pPr>
+              <a:lvl7pPr marL="2743200" indent="0" algn="l" defTabSz="914400" rtl="0" eaLnBrk="1" latinLnBrk="0" hangingPunct="1">
+                <a:defRPr kumimoji="1" sz="1800" kern="1200">
+                  <a:solidFill>
+                    <a:schemeClr val="dk1"/>
+                  </a:solidFill>
+                  <a:latin typeface="+mn-lt"/>
+                  <a:ea typeface="+mn-ea"/>
+                  <a:cs typeface="+mn-cs"/>
+                </a:defRPr>
+              </a:lvl7pPr>
+              <a:lvl8pPr marL="3200400" indent="0" algn="l" defTabSz="914400" rtl="0" eaLnBrk="1" latinLnBrk="0" hangingPunct="1">
+                <a:defRPr kumimoji="1" sz="1800" kern="1200">
+                  <a:solidFill>
+                    <a:schemeClr val="dk1"/>
+                  </a:solidFill>
+                  <a:latin typeface="+mn-lt"/>
+                  <a:ea typeface="+mn-ea"/>
+                  <a:cs typeface="+mn-cs"/>
+                </a:defRPr>
+              </a:lvl8pPr>
+              <a:lvl9pPr marL="3657600" indent="0" algn="l" defTabSz="914400" rtl="0" eaLnBrk="1" latinLnBrk="0" hangingPunct="1">
+                <a:defRPr kumimoji="1" sz="1800" kern="1200">
+                  <a:solidFill>
+                    <a:schemeClr val="dk1"/>
+                  </a:solidFill>
+                  <a:latin typeface="+mn-lt"/>
+                  <a:ea typeface="+mn-ea"/>
+                  <a:cs typeface="+mn-cs"/>
+                </a:defRPr>
+              </a:lvl9pPr>
+            </a:lstStyle>
+            <a:p>
+              <a:pPr algn="ctr"/>
+              <a:endParaRPr kumimoji="1" lang="ja-JP" altLang="en-US" dirty="0"/>
+            </a:p>
+          </p:txBody>
+        </p:sp>
+        <p:pic>
+          <p:nvPicPr>
+            <p:cNvPr id="5" name="図 4">
+              <a:extLst>
+                <a:ext uri="{FF2B5EF4-FFF2-40B4-BE49-F238E27FC236}">
+                  <a16:creationId xmlns:a16="http://schemas.microsoft.com/office/drawing/2014/main" id="{FB01CD7E-3329-EE3B-0468-C779BBB2C654}"/>
+                </a:ext>
+              </a:extLst>
+            </p:cNvPr>
+            <p:cNvPicPr>
+              <a:picLocks noChangeAspect="1"/>
+            </p:cNvPicPr>
+            <p:nvPr/>
+          </p:nvPicPr>
+          <p:blipFill rotWithShape="1">
+            <a:blip r:embed="rId2">
+              <a:alphaModFix/>
+            </a:blip>
+            <a:srcRect l="2925" t="45831" r="4032" b="14877"/>
+            <a:stretch>
+              <a:fillRect/>
+            </a:stretch>
+          </p:blipFill>
+          <p:spPr>
+            <a:xfrm>
+              <a:off x="1227037" y="6868887"/>
+              <a:ext cx="8373716" cy="2800350"/>
+            </a:xfrm>
+            <a:prstGeom prst="rect">
+              <a:avLst/>
+            </a:prstGeom>
+          </p:spPr>
+        </p:pic>
+        <p:sp>
+          <p:nvSpPr>
+            <p:cNvPr id="23" name="正方形/長方形 22">
+              <a:extLst>
+                <a:ext uri="{FF2B5EF4-FFF2-40B4-BE49-F238E27FC236}">
+                  <a16:creationId xmlns:a16="http://schemas.microsoft.com/office/drawing/2014/main" id="{DAFCA02D-B0E4-1D28-C8E6-C8E7EE1AE578}"/>
+                </a:ext>
+              </a:extLst>
+            </p:cNvPr>
+            <p:cNvSpPr/>
+            <p:nvPr/>
+          </p:nvSpPr>
+          <p:spPr>
+            <a:xfrm>
+              <a:off x="1456397" y="7445117"/>
+              <a:ext cx="7934346" cy="2090768"/>
+            </a:xfrm>
+            <a:prstGeom prst="rect">
+              <a:avLst/>
+            </a:prstGeom>
+            <a:noFill/>
+            <a:ln w="28575">
+              <a:solidFill>
+                <a:srgbClr val="FF0000"/>
+              </a:solidFill>
+              <a:prstDash val="solid"/>
+            </a:ln>
+          </p:spPr>
+          <p:style>
+            <a:lnRef idx="2">
+              <a:schemeClr val="accent6"/>
+            </a:lnRef>
+            <a:fillRef idx="1">
+              <a:schemeClr val="lt1"/>
+            </a:fillRef>
+            <a:effectRef idx="0">
+              <a:schemeClr val="accent6"/>
+            </a:effectRef>
+            <a:fontRef idx="minor">
+              <a:schemeClr val="dk1"/>
+            </a:fontRef>
+          </p:style>
+          <p:txBody>
+            <a:bodyPr rtlCol="0" anchor="t"/>
+            <a:lstStyle>
+              <a:lvl1pPr marL="0" indent="0">
+                <a:defRPr sz="1100">
+                  <a:solidFill>
+                    <a:schemeClr val="dk1"/>
+                  </a:solidFill>
+                  <a:latin typeface="+mn-lt"/>
+                  <a:ea typeface="+mn-ea"/>
+                  <a:cs typeface="+mn-cs"/>
+                </a:defRPr>
+              </a:lvl1pPr>
+              <a:lvl2pPr marL="457200" indent="0">
+                <a:defRPr sz="1100">
+                  <a:solidFill>
+                    <a:schemeClr val="dk1"/>
+                  </a:solidFill>
+                  <a:latin typeface="+mn-lt"/>
+                  <a:ea typeface="+mn-ea"/>
+                  <a:cs typeface="+mn-cs"/>
+                </a:defRPr>
+              </a:lvl2pPr>
+              <a:lvl3pPr marL="914400" indent="0">
+                <a:defRPr sz="1100">
+                  <a:solidFill>
+                    <a:schemeClr val="dk1"/>
+                  </a:solidFill>
+                  <a:latin typeface="+mn-lt"/>
+                  <a:ea typeface="+mn-ea"/>
+                  <a:cs typeface="+mn-cs"/>
+                </a:defRPr>
+              </a:lvl3pPr>
+              <a:lvl4pPr marL="1371600" indent="0">
+                <a:defRPr sz="1100">
+                  <a:solidFill>
+                    <a:schemeClr val="dk1"/>
+                  </a:solidFill>
+                  <a:latin typeface="+mn-lt"/>
+                  <a:ea typeface="+mn-ea"/>
+                  <a:cs typeface="+mn-cs"/>
+                </a:defRPr>
+              </a:lvl4pPr>
+              <a:lvl5pPr marL="1828800" indent="0">
+                <a:defRPr sz="1100">
+                  <a:solidFill>
+                    <a:schemeClr val="dk1"/>
+                  </a:solidFill>
+                  <a:latin typeface="+mn-lt"/>
+                  <a:ea typeface="+mn-ea"/>
+                  <a:cs typeface="+mn-cs"/>
+                </a:defRPr>
+              </a:lvl5pPr>
+              <a:lvl6pPr marL="2286000" indent="0">
+                <a:defRPr sz="1100">
+                  <a:solidFill>
+                    <a:schemeClr val="dk1"/>
+                  </a:solidFill>
+                  <a:latin typeface="+mn-lt"/>
+                  <a:ea typeface="+mn-ea"/>
+                  <a:cs typeface="+mn-cs"/>
+                </a:defRPr>
+              </a:lvl6pPr>
+              <a:lvl7pPr marL="2743200" indent="0">
+                <a:defRPr sz="1100">
+                  <a:solidFill>
+                    <a:schemeClr val="dk1"/>
+                  </a:solidFill>
+                  <a:latin typeface="+mn-lt"/>
+                  <a:ea typeface="+mn-ea"/>
+                  <a:cs typeface="+mn-cs"/>
+                </a:defRPr>
+              </a:lvl7pPr>
+              <a:lvl8pPr marL="3200400" indent="0">
+                <a:defRPr sz="1100">
+                  <a:solidFill>
+                    <a:schemeClr val="dk1"/>
+                  </a:solidFill>
+                  <a:latin typeface="+mn-lt"/>
+                  <a:ea typeface="+mn-ea"/>
+                  <a:cs typeface="+mn-cs"/>
+                </a:defRPr>
+              </a:lvl8pPr>
+              <a:lvl9pPr marL="3657600" indent="0">
+                <a:defRPr sz="1100">
+                  <a:solidFill>
+                    <a:schemeClr val="dk1"/>
+                  </a:solidFill>
+                  <a:latin typeface="+mn-lt"/>
+                  <a:ea typeface="+mn-ea"/>
+                  <a:cs typeface="+mn-cs"/>
+                </a:defRPr>
+              </a:lvl9pPr>
+            </a:lstStyle>
+            <a:p>
+              <a:pPr algn="l"/>
+              <a:endParaRPr kumimoji="1" lang="ja-JP" altLang="en-US" sz="1100"/>
+            </a:p>
+          </p:txBody>
+        </p:sp>
+        <p:cxnSp>
+          <p:nvCxnSpPr>
+            <p:cNvPr id="34" name="直線矢印コネクタ 33">
+              <a:extLst>
+                <a:ext uri="{FF2B5EF4-FFF2-40B4-BE49-F238E27FC236}">
+                  <a16:creationId xmlns:a16="http://schemas.microsoft.com/office/drawing/2014/main" id="{F6EDFA3D-4E3A-5D96-AD3A-B699A076FD0D}"/>
+                </a:ext>
+              </a:extLst>
+            </p:cNvPr>
+            <p:cNvCxnSpPr/>
+            <p:nvPr/>
+          </p:nvCxnSpPr>
+          <p:spPr>
+            <a:xfrm>
+              <a:off x="7852228" y="7053942"/>
+              <a:ext cx="0" cy="391885"/>
+            </a:xfrm>
+            <a:prstGeom prst="straightConnector1">
+              <a:avLst/>
+            </a:prstGeom>
+            <a:ln w="28575">
+              <a:solidFill>
+                <a:srgbClr val="FF0000"/>
+              </a:solidFill>
+              <a:tailEnd type="triangle"/>
+            </a:ln>
+          </p:spPr>
+          <p:style>
+            <a:lnRef idx="2">
+              <a:schemeClr val="accent1"/>
+            </a:lnRef>
+            <a:fillRef idx="0">
+              <a:schemeClr val="accent1"/>
+            </a:fillRef>
+            <a:effectRef idx="1">
+              <a:schemeClr val="accent1"/>
+            </a:effectRef>
+            <a:fontRef idx="minor">
+              <a:schemeClr val="tx1"/>
+            </a:fontRef>
+          </p:style>
+        </p:cxnSp>
+        <p:sp>
+          <p:nvSpPr>
+            <p:cNvPr id="28" name="正方形/長方形 27">
+              <a:extLst>
+                <a:ext uri="{FF2B5EF4-FFF2-40B4-BE49-F238E27FC236}">
+                  <a16:creationId xmlns:a16="http://schemas.microsoft.com/office/drawing/2014/main" id="{38D6F110-073A-084B-5BE8-ABFA4AECB223}"/>
+                </a:ext>
+              </a:extLst>
+            </p:cNvPr>
+            <p:cNvSpPr/>
+            <p:nvPr/>
+          </p:nvSpPr>
+          <p:spPr>
+            <a:xfrm>
+              <a:off x="7138270" y="6648633"/>
+              <a:ext cx="1541271" cy="587972"/>
+            </a:xfrm>
+            <a:prstGeom prst="rect">
+              <a:avLst/>
+            </a:prstGeom>
+            <a:ln w="28575">
+              <a:solidFill>
+                <a:srgbClr val="FF0000"/>
+              </a:solidFill>
+            </a:ln>
+          </p:spPr>
+          <p:style>
+            <a:lnRef idx="2">
+              <a:schemeClr val="accent6"/>
+            </a:lnRef>
+            <a:fillRef idx="1">
+              <a:schemeClr val="lt1"/>
+            </a:fillRef>
+            <a:effectRef idx="0">
+              <a:schemeClr val="accent6"/>
+            </a:effectRef>
+            <a:fontRef idx="minor">
+              <a:schemeClr val="dk1"/>
+            </a:fontRef>
+          </p:style>
+          <p:txBody>
+            <a:bodyPr rtlCol="0" anchor="ctr"/>
+            <a:lstStyle>
+              <a:lvl1pPr marL="0" indent="0">
+                <a:defRPr sz="1100">
+                  <a:solidFill>
+                    <a:schemeClr val="dk1"/>
+                  </a:solidFill>
+                  <a:latin typeface="+mn-lt"/>
+                  <a:ea typeface="+mn-ea"/>
+                  <a:cs typeface="+mn-cs"/>
+                </a:defRPr>
+              </a:lvl1pPr>
+              <a:lvl2pPr marL="457200" indent="0">
+                <a:defRPr sz="1100">
+                  <a:solidFill>
+                    <a:schemeClr val="dk1"/>
+                  </a:solidFill>
+                  <a:latin typeface="+mn-lt"/>
+                  <a:ea typeface="+mn-ea"/>
+                  <a:cs typeface="+mn-cs"/>
+                </a:defRPr>
+              </a:lvl2pPr>
+              <a:lvl3pPr marL="914400" indent="0">
+                <a:defRPr sz="1100">
+                  <a:solidFill>
+                    <a:schemeClr val="dk1"/>
+                  </a:solidFill>
+                  <a:latin typeface="+mn-lt"/>
+                  <a:ea typeface="+mn-ea"/>
+                  <a:cs typeface="+mn-cs"/>
+                </a:defRPr>
+              </a:lvl3pPr>
+              <a:lvl4pPr marL="1371600" indent="0">
+                <a:defRPr sz="1100">
+                  <a:solidFill>
+                    <a:schemeClr val="dk1"/>
+                  </a:solidFill>
+                  <a:latin typeface="+mn-lt"/>
+                  <a:ea typeface="+mn-ea"/>
+                  <a:cs typeface="+mn-cs"/>
+                </a:defRPr>
+              </a:lvl4pPr>
+              <a:lvl5pPr marL="1828800" indent="0">
+                <a:defRPr sz="1100">
+                  <a:solidFill>
+                    <a:schemeClr val="dk1"/>
+                  </a:solidFill>
+                  <a:latin typeface="+mn-lt"/>
+                  <a:ea typeface="+mn-ea"/>
+                  <a:cs typeface="+mn-cs"/>
+                </a:defRPr>
+              </a:lvl5pPr>
+              <a:lvl6pPr marL="2286000" indent="0">
+                <a:defRPr sz="1100">
+                  <a:solidFill>
+                    <a:schemeClr val="dk1"/>
+                  </a:solidFill>
+                  <a:latin typeface="+mn-lt"/>
+                  <a:ea typeface="+mn-ea"/>
+                  <a:cs typeface="+mn-cs"/>
+                </a:defRPr>
+              </a:lvl6pPr>
+              <a:lvl7pPr marL="2743200" indent="0">
+                <a:defRPr sz="1100">
+                  <a:solidFill>
+                    <a:schemeClr val="dk1"/>
+                  </a:solidFill>
+                  <a:latin typeface="+mn-lt"/>
+                  <a:ea typeface="+mn-ea"/>
+                  <a:cs typeface="+mn-cs"/>
+                </a:defRPr>
+              </a:lvl7pPr>
+              <a:lvl8pPr marL="3200400" indent="0">
+                <a:defRPr sz="1100">
+                  <a:solidFill>
+                    <a:schemeClr val="dk1"/>
+                  </a:solidFill>
+                  <a:latin typeface="+mn-lt"/>
+                  <a:ea typeface="+mn-ea"/>
+                  <a:cs typeface="+mn-cs"/>
+                </a:defRPr>
+              </a:lvl8pPr>
+              <a:lvl9pPr marL="3657600" indent="0">
+                <a:defRPr sz="1100">
+                  <a:solidFill>
+                    <a:schemeClr val="dk1"/>
+                  </a:solidFill>
+                  <a:latin typeface="+mn-lt"/>
+                  <a:ea typeface="+mn-ea"/>
+                  <a:cs typeface="+mn-cs"/>
+                </a:defRPr>
+              </a:lvl9pPr>
+            </a:lstStyle>
+            <a:p>
+              <a:pPr algn="l"/>
+              <a:r>
+                <a:rPr lang="ja-JP" altLang="en-US" sz="1200" b="1" dirty="0">
+                  <a:solidFill>
+                    <a:srgbClr val="FF0000"/>
+                  </a:solidFill>
+                </a:rPr>
+                <a:t>③</a:t>
+              </a:r>
+              <a:r>
+                <a:rPr kumimoji="1" lang="en-US" altLang="ja-JP" sz="1200" b="1" dirty="0">
+                  <a:solidFill>
+                    <a:srgbClr val="FF0000"/>
+                  </a:solidFill>
+                </a:rPr>
+                <a:t>CCFOLIA</a:t>
+              </a:r>
+              <a:r>
+                <a:rPr kumimoji="1" lang="ja-JP" altLang="en-US" sz="1200" b="1" dirty="0">
+                  <a:solidFill>
+                    <a:srgbClr val="FF0000"/>
+                  </a:solidFill>
+                </a:rPr>
+                <a:t>用出力</a:t>
+              </a:r>
+            </a:p>
+          </p:txBody>
+        </p:sp>
+      </p:grpSp>
+    </p:spTree>
+    <p:extLst>
+      <p:ext uri="{BB962C8B-B14F-4D97-AF65-F5344CB8AC3E}">
+        <p14:creationId xmlns:p14="http://schemas.microsoft.com/office/powerpoint/2010/main" val="816332800"/>
+      </p:ext>
+    </p:extLst>
+  </p:cSld>
+  <p:clrMapOvr>
+    <a:masterClrMapping/>
+  </p:clrMapOvr>
+</p:sld>
+</file>
+
+<file path=ppt/slides/slide15.xml><?xml version="1.0" encoding="utf-8"?>
+<p:sld xmlns:a="http://schemas.openxmlformats.org/drawingml/2006/main" xmlns:r="http://schemas.openxmlformats.org/officeDocument/2006/relationships" xmlns:p="http://schemas.openxmlformats.org/presentationml/2006/main">
+  <p:cSld>
+    <p:spTree>
+      <p:nvGrpSpPr>
+        <p:cNvPr id="1" name="">
+          <a:extLst>
+            <a:ext uri="{FF2B5EF4-FFF2-40B4-BE49-F238E27FC236}">
+              <a16:creationId xmlns:a16="http://schemas.microsoft.com/office/drawing/2014/main" id="{EE96E224-374D-D273-7C76-88F2DCDF66D1}"/>
+            </a:ext>
+          </a:extLst>
+        </p:cNvPr>
+        <p:cNvGrpSpPr/>
+        <p:nvPr/>
+      </p:nvGrpSpPr>
+      <p:grpSpPr>
+        <a:xfrm>
+          <a:off x="0" y="0"/>
+          <a:ext cx="0" cy="0"/>
+          <a:chOff x="0" y="0"/>
+          <a:chExt cx="0" cy="0"/>
+        </a:xfrm>
+      </p:grpSpPr>
+      <p:grpSp>
+        <p:nvGrpSpPr>
+          <p:cNvPr id="35" name="グループ化 34">
+            <a:extLst>
+              <a:ext uri="{FF2B5EF4-FFF2-40B4-BE49-F238E27FC236}">
+                <a16:creationId xmlns:a16="http://schemas.microsoft.com/office/drawing/2014/main" id="{1878DC1D-B1FC-963E-E9F1-93DD191EE4D9}"/>
+              </a:ext>
+            </a:extLst>
+          </p:cNvPr>
+          <p:cNvGrpSpPr/>
+          <p:nvPr/>
+        </p:nvGrpSpPr>
+        <p:grpSpPr>
+          <a:xfrm>
+            <a:off x="525236" y="2057400"/>
+            <a:ext cx="11210374" cy="3505200"/>
+            <a:chOff x="-227804" y="7173686"/>
+            <a:chExt cx="11210374" cy="3505200"/>
+          </a:xfrm>
+        </p:grpSpPr>
+        <p:sp>
+          <p:nvSpPr>
+            <p:cNvPr id="11" name="正方形/長方形 10">
+              <a:extLst>
+                <a:ext uri="{FF2B5EF4-FFF2-40B4-BE49-F238E27FC236}">
+                  <a16:creationId xmlns:a16="http://schemas.microsoft.com/office/drawing/2014/main" id="{223A71E6-9F50-010D-B348-DE9C7672B45C}"/>
+                </a:ext>
+              </a:extLst>
+            </p:cNvPr>
+            <p:cNvSpPr/>
+            <p:nvPr/>
+          </p:nvSpPr>
+          <p:spPr>
+            <a:xfrm>
+              <a:off x="-227804" y="7173686"/>
+              <a:ext cx="11210374" cy="3505200"/>
+            </a:xfrm>
+            <a:prstGeom prst="rect">
+              <a:avLst/>
+            </a:prstGeom>
+            <a:ln>
+              <a:noFill/>
+            </a:ln>
+          </p:spPr>
+          <p:style>
+            <a:lnRef idx="2">
+              <a:schemeClr val="dk1"/>
+            </a:lnRef>
+            <a:fillRef idx="1">
+              <a:schemeClr val="lt1"/>
+            </a:fillRef>
+            <a:effectRef idx="0">
+              <a:schemeClr val="dk1"/>
+            </a:effectRef>
+            <a:fontRef idx="minor">
+              <a:schemeClr val="dk1"/>
+            </a:fontRef>
+          </p:style>
+          <p:txBody>
+            <a:bodyPr wrap="square" rtlCol="0" anchor="ctr"/>
+            <a:lstStyle>
+              <a:defPPr>
+                <a:defRPr lang="ja-JP"/>
+              </a:defPPr>
+              <a:lvl1pPr marL="0" indent="0" algn="l" defTabSz="914400" rtl="0" eaLnBrk="1" latinLnBrk="0" hangingPunct="1">
+                <a:defRPr kumimoji="1" sz="1800" kern="1200">
+                  <a:solidFill>
+                    <a:schemeClr val="dk1"/>
+                  </a:solidFill>
+                  <a:latin typeface="+mn-lt"/>
+                  <a:ea typeface="+mn-ea"/>
+                  <a:cs typeface="+mn-cs"/>
+                </a:defRPr>
+              </a:lvl1pPr>
+              <a:lvl2pPr marL="457200" indent="0" algn="l" defTabSz="914400" rtl="0" eaLnBrk="1" latinLnBrk="0" hangingPunct="1">
+                <a:defRPr kumimoji="1" sz="1800" kern="1200">
+                  <a:solidFill>
+                    <a:schemeClr val="dk1"/>
+                  </a:solidFill>
+                  <a:latin typeface="+mn-lt"/>
+                  <a:ea typeface="+mn-ea"/>
+                  <a:cs typeface="+mn-cs"/>
+                </a:defRPr>
+              </a:lvl2pPr>
+              <a:lvl3pPr marL="914400" indent="0" algn="l" defTabSz="914400" rtl="0" eaLnBrk="1" latinLnBrk="0" hangingPunct="1">
+                <a:defRPr kumimoji="1" sz="1800" kern="1200">
+                  <a:solidFill>
+                    <a:schemeClr val="dk1"/>
+                  </a:solidFill>
+                  <a:latin typeface="+mn-lt"/>
+                  <a:ea typeface="+mn-ea"/>
+                  <a:cs typeface="+mn-cs"/>
+                </a:defRPr>
+              </a:lvl3pPr>
+              <a:lvl4pPr marL="1371600" indent="0" algn="l" defTabSz="914400" rtl="0" eaLnBrk="1" latinLnBrk="0" hangingPunct="1">
+                <a:defRPr kumimoji="1" sz="1800" kern="1200">
+                  <a:solidFill>
+                    <a:schemeClr val="dk1"/>
+                  </a:solidFill>
+                  <a:latin typeface="+mn-lt"/>
+                  <a:ea typeface="+mn-ea"/>
+                  <a:cs typeface="+mn-cs"/>
+                </a:defRPr>
+              </a:lvl4pPr>
+              <a:lvl5pPr marL="1828800" indent="0" algn="l" defTabSz="914400" rtl="0" eaLnBrk="1" latinLnBrk="0" hangingPunct="1">
+                <a:defRPr kumimoji="1" sz="1800" kern="1200">
+                  <a:solidFill>
+                    <a:schemeClr val="dk1"/>
+                  </a:solidFill>
+                  <a:latin typeface="+mn-lt"/>
+                  <a:ea typeface="+mn-ea"/>
+                  <a:cs typeface="+mn-cs"/>
+                </a:defRPr>
+              </a:lvl5pPr>
+              <a:lvl6pPr marL="2286000" indent="0" algn="l" defTabSz="914400" rtl="0" eaLnBrk="1" latinLnBrk="0" hangingPunct="1">
+                <a:defRPr kumimoji="1" sz="1800" kern="1200">
+                  <a:solidFill>
+                    <a:schemeClr val="dk1"/>
+                  </a:solidFill>
+                  <a:latin typeface="+mn-lt"/>
+                  <a:ea typeface="+mn-ea"/>
+                  <a:cs typeface="+mn-cs"/>
+                </a:defRPr>
+              </a:lvl6pPr>
+              <a:lvl7pPr marL="2743200" indent="0" algn="l" defTabSz="914400" rtl="0" eaLnBrk="1" latinLnBrk="0" hangingPunct="1">
+                <a:defRPr kumimoji="1" sz="1800" kern="1200">
+                  <a:solidFill>
+                    <a:schemeClr val="dk1"/>
+                  </a:solidFill>
+                  <a:latin typeface="+mn-lt"/>
+                  <a:ea typeface="+mn-ea"/>
+                  <a:cs typeface="+mn-cs"/>
+                </a:defRPr>
+              </a:lvl7pPr>
+              <a:lvl8pPr marL="3200400" indent="0" algn="l" defTabSz="914400" rtl="0" eaLnBrk="1" latinLnBrk="0" hangingPunct="1">
+                <a:defRPr kumimoji="1" sz="1800" kern="1200">
+                  <a:solidFill>
+                    <a:schemeClr val="dk1"/>
+                  </a:solidFill>
+                  <a:latin typeface="+mn-lt"/>
+                  <a:ea typeface="+mn-ea"/>
+                  <a:cs typeface="+mn-cs"/>
+                </a:defRPr>
+              </a:lvl8pPr>
+              <a:lvl9pPr marL="3657600" indent="0" algn="l" defTabSz="914400" rtl="0" eaLnBrk="1" latinLnBrk="0" hangingPunct="1">
+                <a:defRPr kumimoji="1" sz="1800" kern="1200">
+                  <a:solidFill>
+                    <a:schemeClr val="dk1"/>
+                  </a:solidFill>
+                  <a:latin typeface="+mn-lt"/>
+                  <a:ea typeface="+mn-ea"/>
+                  <a:cs typeface="+mn-cs"/>
+                </a:defRPr>
+              </a:lvl9pPr>
+            </a:lstStyle>
+            <a:p>
+              <a:pPr algn="ctr"/>
+              <a:endParaRPr kumimoji="1" lang="ja-JP" altLang="en-US" dirty="0"/>
+            </a:p>
+          </p:txBody>
+        </p:sp>
+        <p:pic>
+          <p:nvPicPr>
+            <p:cNvPr id="5" name="図 4">
+              <a:extLst>
+                <a:ext uri="{FF2B5EF4-FFF2-40B4-BE49-F238E27FC236}">
+                  <a16:creationId xmlns:a16="http://schemas.microsoft.com/office/drawing/2014/main" id="{582EC4D0-A002-1384-D3E1-EC0E92FC860C}"/>
+                </a:ext>
+              </a:extLst>
+            </p:cNvPr>
+            <p:cNvPicPr>
+              <a:picLocks noChangeAspect="1"/>
+            </p:cNvPicPr>
+            <p:nvPr/>
+          </p:nvPicPr>
+          <p:blipFill rotWithShape="1">
+            <a:blip r:embed="rId2">
+              <a:alphaModFix/>
+            </a:blip>
+            <a:srcRect l="2925" t="51978" r="4032" b="2288"/>
+            <a:stretch>
+              <a:fillRect/>
+            </a:stretch>
+          </p:blipFill>
+          <p:spPr>
+            <a:xfrm>
+              <a:off x="1227037" y="7307036"/>
+              <a:ext cx="8373715" cy="3259364"/>
+            </a:xfrm>
+            <a:prstGeom prst="rect">
+              <a:avLst/>
+            </a:prstGeom>
+          </p:spPr>
+        </p:pic>
+        <p:sp>
+          <p:nvSpPr>
+            <p:cNvPr id="26" name="正方形/長方形 25">
+              <a:extLst>
+                <a:ext uri="{FF2B5EF4-FFF2-40B4-BE49-F238E27FC236}">
+                  <a16:creationId xmlns:a16="http://schemas.microsoft.com/office/drawing/2014/main" id="{A514DD1C-654E-89ED-B07E-182D9BEDB235}"/>
+                </a:ext>
+              </a:extLst>
+            </p:cNvPr>
+            <p:cNvSpPr/>
+            <p:nvPr/>
+          </p:nvSpPr>
+          <p:spPr>
+            <a:xfrm>
+              <a:off x="7022005" y="9719405"/>
+              <a:ext cx="2354224" cy="455109"/>
+            </a:xfrm>
+            <a:prstGeom prst="rect">
+              <a:avLst/>
+            </a:prstGeom>
+            <a:noFill/>
+            <a:ln w="28575">
+              <a:solidFill>
+                <a:srgbClr val="FF0000"/>
+              </a:solidFill>
+              <a:prstDash val="solid"/>
+            </a:ln>
+          </p:spPr>
+          <p:style>
+            <a:lnRef idx="2">
+              <a:schemeClr val="accent6"/>
+            </a:lnRef>
+            <a:fillRef idx="1">
+              <a:schemeClr val="lt1"/>
+            </a:fillRef>
+            <a:effectRef idx="0">
+              <a:schemeClr val="accent6"/>
+            </a:effectRef>
+            <a:fontRef idx="minor">
+              <a:schemeClr val="dk1"/>
+            </a:fontRef>
+          </p:style>
+          <p:txBody>
+            <a:bodyPr rtlCol="0" anchor="t"/>
+            <a:lstStyle>
+              <a:lvl1pPr marL="0" indent="0">
+                <a:defRPr sz="1100">
+                  <a:solidFill>
+                    <a:schemeClr val="dk1"/>
+                  </a:solidFill>
+                  <a:latin typeface="+mn-lt"/>
+                  <a:ea typeface="+mn-ea"/>
+                  <a:cs typeface="+mn-cs"/>
+                </a:defRPr>
+              </a:lvl1pPr>
+              <a:lvl2pPr marL="457200" indent="0">
+                <a:defRPr sz="1100">
+                  <a:solidFill>
+                    <a:schemeClr val="dk1"/>
+                  </a:solidFill>
+                  <a:latin typeface="+mn-lt"/>
+                  <a:ea typeface="+mn-ea"/>
+                  <a:cs typeface="+mn-cs"/>
+                </a:defRPr>
+              </a:lvl2pPr>
+              <a:lvl3pPr marL="914400" indent="0">
+                <a:defRPr sz="1100">
+                  <a:solidFill>
+                    <a:schemeClr val="dk1"/>
+                  </a:solidFill>
+                  <a:latin typeface="+mn-lt"/>
+                  <a:ea typeface="+mn-ea"/>
+                  <a:cs typeface="+mn-cs"/>
+                </a:defRPr>
+              </a:lvl3pPr>
+              <a:lvl4pPr marL="1371600" indent="0">
+                <a:defRPr sz="1100">
+                  <a:solidFill>
+                    <a:schemeClr val="dk1"/>
+                  </a:solidFill>
+                  <a:latin typeface="+mn-lt"/>
+                  <a:ea typeface="+mn-ea"/>
+                  <a:cs typeface="+mn-cs"/>
+                </a:defRPr>
+              </a:lvl4pPr>
+              <a:lvl5pPr marL="1828800" indent="0">
+                <a:defRPr sz="1100">
+                  <a:solidFill>
+                    <a:schemeClr val="dk1"/>
+                  </a:solidFill>
+                  <a:latin typeface="+mn-lt"/>
+                  <a:ea typeface="+mn-ea"/>
+                  <a:cs typeface="+mn-cs"/>
+                </a:defRPr>
+              </a:lvl5pPr>
+              <a:lvl6pPr marL="2286000" indent="0">
+                <a:defRPr sz="1100">
+                  <a:solidFill>
+                    <a:schemeClr val="dk1"/>
+                  </a:solidFill>
+                  <a:latin typeface="+mn-lt"/>
+                  <a:ea typeface="+mn-ea"/>
+                  <a:cs typeface="+mn-cs"/>
+                </a:defRPr>
+              </a:lvl6pPr>
+              <a:lvl7pPr marL="2743200" indent="0">
+                <a:defRPr sz="1100">
+                  <a:solidFill>
+                    <a:schemeClr val="dk1"/>
+                  </a:solidFill>
+                  <a:latin typeface="+mn-lt"/>
+                  <a:ea typeface="+mn-ea"/>
+                  <a:cs typeface="+mn-cs"/>
+                </a:defRPr>
+              </a:lvl7pPr>
+              <a:lvl8pPr marL="3200400" indent="0">
+                <a:defRPr sz="1100">
+                  <a:solidFill>
+                    <a:schemeClr val="dk1"/>
+                  </a:solidFill>
+                  <a:latin typeface="+mn-lt"/>
+                  <a:ea typeface="+mn-ea"/>
+                  <a:cs typeface="+mn-cs"/>
+                </a:defRPr>
+              </a:lvl8pPr>
+              <a:lvl9pPr marL="3657600" indent="0">
+                <a:defRPr sz="1100">
+                  <a:solidFill>
+                    <a:schemeClr val="dk1"/>
+                  </a:solidFill>
+                  <a:latin typeface="+mn-lt"/>
+                  <a:ea typeface="+mn-ea"/>
+                  <a:cs typeface="+mn-cs"/>
+                </a:defRPr>
+              </a:lvl9pPr>
+            </a:lstStyle>
+            <a:p>
+              <a:pPr algn="l"/>
+              <a:endParaRPr kumimoji="1" lang="ja-JP" altLang="en-US" sz="1100"/>
+            </a:p>
+          </p:txBody>
+        </p:sp>
+        <p:cxnSp>
+          <p:nvCxnSpPr>
+            <p:cNvPr id="29" name="直線矢印コネクタ 28">
+              <a:extLst>
+                <a:ext uri="{FF2B5EF4-FFF2-40B4-BE49-F238E27FC236}">
+                  <a16:creationId xmlns:a16="http://schemas.microsoft.com/office/drawing/2014/main" id="{89CCC90B-BD0B-2DD2-F642-71B44EA99F24}"/>
+                </a:ext>
+              </a:extLst>
+            </p:cNvPr>
+            <p:cNvCxnSpPr>
+              <a:cxnSpLocks/>
+            </p:cNvCxnSpPr>
+            <p:nvPr/>
+          </p:nvCxnSpPr>
+          <p:spPr>
+            <a:xfrm>
+              <a:off x="6647543" y="9950225"/>
+              <a:ext cx="377371" cy="0"/>
+            </a:xfrm>
+            <a:prstGeom prst="straightConnector1">
+              <a:avLst/>
+            </a:prstGeom>
+            <a:ln w="28575">
+              <a:solidFill>
+                <a:srgbClr val="FF0000"/>
+              </a:solidFill>
+              <a:tailEnd type="triangle"/>
+            </a:ln>
+          </p:spPr>
+          <p:style>
+            <a:lnRef idx="2">
+              <a:schemeClr val="accent1"/>
+            </a:lnRef>
+            <a:fillRef idx="0">
+              <a:schemeClr val="accent1"/>
+            </a:fillRef>
+            <a:effectRef idx="1">
+              <a:schemeClr val="accent1"/>
+            </a:effectRef>
+            <a:fontRef idx="minor">
+              <a:schemeClr val="tx1"/>
+            </a:fontRef>
+          </p:style>
+        </p:cxnSp>
+        <p:sp>
+          <p:nvSpPr>
+            <p:cNvPr id="30" name="正方形/長方形 29">
+              <a:extLst>
+                <a:ext uri="{FF2B5EF4-FFF2-40B4-BE49-F238E27FC236}">
+                  <a16:creationId xmlns:a16="http://schemas.microsoft.com/office/drawing/2014/main" id="{6A1FD2BA-47C2-6E57-858B-A3889027BFDE}"/>
+                </a:ext>
+              </a:extLst>
+            </p:cNvPr>
+            <p:cNvSpPr/>
+            <p:nvPr/>
+          </p:nvSpPr>
+          <p:spPr>
+            <a:xfrm>
+              <a:off x="4934857" y="9653092"/>
+              <a:ext cx="1709449" cy="587972"/>
+            </a:xfrm>
+            <a:prstGeom prst="rect">
+              <a:avLst/>
+            </a:prstGeom>
+            <a:ln w="28575">
+              <a:solidFill>
+                <a:srgbClr val="FF0000"/>
+              </a:solidFill>
+            </a:ln>
+          </p:spPr>
+          <p:style>
+            <a:lnRef idx="2">
+              <a:schemeClr val="accent6"/>
+            </a:lnRef>
+            <a:fillRef idx="1">
+              <a:schemeClr val="lt1"/>
+            </a:fillRef>
+            <a:effectRef idx="0">
+              <a:schemeClr val="accent6"/>
+            </a:effectRef>
+            <a:fontRef idx="minor">
+              <a:schemeClr val="dk1"/>
+            </a:fontRef>
+          </p:style>
+          <p:txBody>
+            <a:bodyPr rtlCol="0" anchor="ctr"/>
+            <a:lstStyle>
+              <a:lvl1pPr marL="0" indent="0">
+                <a:defRPr sz="1100">
+                  <a:solidFill>
+                    <a:schemeClr val="dk1"/>
+                  </a:solidFill>
+                  <a:latin typeface="+mn-lt"/>
+                  <a:ea typeface="+mn-ea"/>
+                  <a:cs typeface="+mn-cs"/>
+                </a:defRPr>
+              </a:lvl1pPr>
+              <a:lvl2pPr marL="457200" indent="0">
+                <a:defRPr sz="1100">
+                  <a:solidFill>
+                    <a:schemeClr val="dk1"/>
+                  </a:solidFill>
+                  <a:latin typeface="+mn-lt"/>
+                  <a:ea typeface="+mn-ea"/>
+                  <a:cs typeface="+mn-cs"/>
+                </a:defRPr>
+              </a:lvl2pPr>
+              <a:lvl3pPr marL="914400" indent="0">
+                <a:defRPr sz="1100">
+                  <a:solidFill>
+                    <a:schemeClr val="dk1"/>
+                  </a:solidFill>
+                  <a:latin typeface="+mn-lt"/>
+                  <a:ea typeface="+mn-ea"/>
+                  <a:cs typeface="+mn-cs"/>
+                </a:defRPr>
+              </a:lvl3pPr>
+              <a:lvl4pPr marL="1371600" indent="0">
+                <a:defRPr sz="1100">
+                  <a:solidFill>
+                    <a:schemeClr val="dk1"/>
+                  </a:solidFill>
+                  <a:latin typeface="+mn-lt"/>
+                  <a:ea typeface="+mn-ea"/>
+                  <a:cs typeface="+mn-cs"/>
+                </a:defRPr>
+              </a:lvl4pPr>
+              <a:lvl5pPr marL="1828800" indent="0">
+                <a:defRPr sz="1100">
+                  <a:solidFill>
+                    <a:schemeClr val="dk1"/>
+                  </a:solidFill>
+                  <a:latin typeface="+mn-lt"/>
+                  <a:ea typeface="+mn-ea"/>
+                  <a:cs typeface="+mn-cs"/>
+                </a:defRPr>
+              </a:lvl5pPr>
+              <a:lvl6pPr marL="2286000" indent="0">
+                <a:defRPr sz="1100">
+                  <a:solidFill>
+                    <a:schemeClr val="dk1"/>
+                  </a:solidFill>
+                  <a:latin typeface="+mn-lt"/>
+                  <a:ea typeface="+mn-ea"/>
+                  <a:cs typeface="+mn-cs"/>
+                </a:defRPr>
+              </a:lvl6pPr>
+              <a:lvl7pPr marL="2743200" indent="0">
+                <a:defRPr sz="1100">
+                  <a:solidFill>
+                    <a:schemeClr val="dk1"/>
+                  </a:solidFill>
+                  <a:latin typeface="+mn-lt"/>
+                  <a:ea typeface="+mn-ea"/>
+                  <a:cs typeface="+mn-cs"/>
+                </a:defRPr>
+              </a:lvl7pPr>
+              <a:lvl8pPr marL="3200400" indent="0">
+                <a:defRPr sz="1100">
+                  <a:solidFill>
+                    <a:schemeClr val="dk1"/>
+                  </a:solidFill>
+                  <a:latin typeface="+mn-lt"/>
+                  <a:ea typeface="+mn-ea"/>
+                  <a:cs typeface="+mn-cs"/>
+                </a:defRPr>
+              </a:lvl8pPr>
+              <a:lvl9pPr marL="3657600" indent="0">
+                <a:defRPr sz="1100">
+                  <a:solidFill>
+                    <a:schemeClr val="dk1"/>
+                  </a:solidFill>
+                  <a:latin typeface="+mn-lt"/>
+                  <a:ea typeface="+mn-ea"/>
+                  <a:cs typeface="+mn-cs"/>
+                </a:defRPr>
+              </a:lvl9pPr>
+            </a:lstStyle>
+            <a:p>
+              <a:pPr algn="l"/>
+              <a:r>
+                <a:rPr kumimoji="1" lang="ja-JP" altLang="en-US" sz="1200" b="1" dirty="0">
+                  <a:solidFill>
+                    <a:srgbClr val="FF0000"/>
+                  </a:solidFill>
+                </a:rPr>
+                <a:t>④</a:t>
+              </a:r>
+              <a:r>
+                <a:rPr lang="ja-JP" altLang="en-US" sz="1200" b="1" dirty="0">
+                  <a:solidFill>
+                    <a:srgbClr val="FF0000"/>
+                  </a:solidFill>
+                </a:rPr>
+                <a:t>データファイル出力</a:t>
+              </a:r>
+              <a:endParaRPr kumimoji="1" lang="ja-JP" altLang="en-US" sz="1200" b="1" dirty="0">
+                <a:solidFill>
+                  <a:srgbClr val="FF0000"/>
+                </a:solidFill>
+              </a:endParaRPr>
+            </a:p>
+          </p:txBody>
+        </p:sp>
+      </p:grpSp>
+    </p:spTree>
+    <p:extLst>
+      <p:ext uri="{BB962C8B-B14F-4D97-AF65-F5344CB8AC3E}">
+        <p14:creationId xmlns:p14="http://schemas.microsoft.com/office/powerpoint/2010/main" val="3046786260"/>
+      </p:ext>
+    </p:extLst>
+  </p:cSld>
+  <p:clrMapOvr>
+    <a:masterClrMapping/>
+  </p:clrMapOvr>
+</p:sld>
+</file>
+
+<file path=ppt/slides/slide16.xml><?xml version="1.0" encoding="utf-8"?>
+<p:sld xmlns:a="http://schemas.openxmlformats.org/drawingml/2006/main" xmlns:r="http://schemas.openxmlformats.org/officeDocument/2006/relationships" xmlns:p="http://schemas.openxmlformats.org/presentationml/2006/main">
+  <p:cSld>
+    <p:spTree>
+      <p:nvGrpSpPr>
         <p:cNvPr id="1" name=""/>
         <p:cNvGrpSpPr/>
         <p:nvPr/>

--- a/スクリーンショット_使い方_エネミー.pptx
+++ b/スクリーンショット_使い方_エネミー.pptx
@@ -9,18 +9,21 @@
     <p:sldId id="261" r:id="rId3"/>
     <p:sldId id="258" r:id="rId4"/>
     <p:sldId id="262" r:id="rId5"/>
-    <p:sldId id="265" r:id="rId6"/>
-    <p:sldId id="263" r:id="rId7"/>
-    <p:sldId id="264" r:id="rId8"/>
-    <p:sldId id="266" r:id="rId9"/>
-    <p:sldId id="270" r:id="rId10"/>
-    <p:sldId id="271" r:id="rId11"/>
-    <p:sldId id="272" r:id="rId12"/>
-    <p:sldId id="273" r:id="rId13"/>
-    <p:sldId id="274" r:id="rId14"/>
-    <p:sldId id="276" r:id="rId15"/>
-    <p:sldId id="277" r:id="rId16"/>
-    <p:sldId id="275" r:id="rId17"/>
+    <p:sldId id="278" r:id="rId6"/>
+    <p:sldId id="279" r:id="rId7"/>
+    <p:sldId id="280" r:id="rId8"/>
+    <p:sldId id="265" r:id="rId9"/>
+    <p:sldId id="263" r:id="rId10"/>
+    <p:sldId id="264" r:id="rId11"/>
+    <p:sldId id="266" r:id="rId12"/>
+    <p:sldId id="270" r:id="rId13"/>
+    <p:sldId id="271" r:id="rId14"/>
+    <p:sldId id="272" r:id="rId15"/>
+    <p:sldId id="273" r:id="rId16"/>
+    <p:sldId id="274" r:id="rId17"/>
+    <p:sldId id="276" r:id="rId18"/>
+    <p:sldId id="277" r:id="rId19"/>
+    <p:sldId id="275" r:id="rId20"/>
   </p:sldIdLst>
   <p:sldSz cx="12192000" cy="6858000"/>
   <p:notesSz cx="6858000" cy="9144000"/>
@@ -4410,6 +4413,2537 @@
         <p:cNvPr id="1" name="">
           <a:extLst>
             <a:ext uri="{FF2B5EF4-FFF2-40B4-BE49-F238E27FC236}">
+              <a16:creationId xmlns:a16="http://schemas.microsoft.com/office/drawing/2014/main" id="{C5B15857-827A-6229-6113-E552ADAC6249}"/>
+            </a:ext>
+          </a:extLst>
+        </p:cNvPr>
+        <p:cNvGrpSpPr/>
+        <p:nvPr/>
+      </p:nvGrpSpPr>
+      <p:grpSpPr>
+        <a:xfrm>
+          <a:off x="0" y="0"/>
+          <a:ext cx="0" cy="0"/>
+          <a:chOff x="0" y="0"/>
+          <a:chExt cx="0" cy="0"/>
+        </a:xfrm>
+      </p:grpSpPr>
+      <p:grpSp>
+        <p:nvGrpSpPr>
+          <p:cNvPr id="5" name="グループ化 4">
+            <a:extLst>
+              <a:ext uri="{FF2B5EF4-FFF2-40B4-BE49-F238E27FC236}">
+                <a16:creationId xmlns:a16="http://schemas.microsoft.com/office/drawing/2014/main" id="{339F7668-3B6B-6140-6A0C-58595BED5135}"/>
+              </a:ext>
+            </a:extLst>
+          </p:cNvPr>
+          <p:cNvGrpSpPr/>
+          <p:nvPr/>
+        </p:nvGrpSpPr>
+        <p:grpSpPr>
+          <a:xfrm>
+            <a:off x="520410" y="0"/>
+            <a:ext cx="11436931" cy="6640884"/>
+            <a:chOff x="333375" y="4887767"/>
+            <a:chExt cx="11475801" cy="6683747"/>
+          </a:xfrm>
+        </p:grpSpPr>
+        <p:grpSp>
+          <p:nvGrpSpPr>
+            <p:cNvPr id="27" name="グループ化 26">
+              <a:extLst>
+                <a:ext uri="{FF2B5EF4-FFF2-40B4-BE49-F238E27FC236}">
+                  <a16:creationId xmlns:a16="http://schemas.microsoft.com/office/drawing/2014/main" id="{E0AA464E-254A-BCD5-7491-2B8D385FAC0C}"/>
+                </a:ext>
+              </a:extLst>
+            </p:cNvPr>
+            <p:cNvGrpSpPr/>
+            <p:nvPr/>
+          </p:nvGrpSpPr>
+          <p:grpSpPr>
+            <a:xfrm>
+              <a:off x="333375" y="4887767"/>
+              <a:ext cx="11475801" cy="6683747"/>
+              <a:chOff x="333375" y="4887767"/>
+              <a:chExt cx="11236058" cy="6526470"/>
+            </a:xfrm>
+          </p:grpSpPr>
+          <p:sp>
+            <p:nvSpPr>
+              <p:cNvPr id="31" name="正方形/長方形 30">
+                <a:extLst>
+                  <a:ext uri="{FF2B5EF4-FFF2-40B4-BE49-F238E27FC236}">
+                    <a16:creationId xmlns:a16="http://schemas.microsoft.com/office/drawing/2014/main" id="{8DC25741-1012-004A-8360-88CD98DE3327}"/>
+                  </a:ext>
+                </a:extLst>
+              </p:cNvPr>
+              <p:cNvSpPr/>
+              <p:nvPr/>
+            </p:nvSpPr>
+            <p:spPr>
+              <a:xfrm>
+                <a:off x="333375" y="4887767"/>
+                <a:ext cx="11236058" cy="6526470"/>
+              </a:xfrm>
+              <a:prstGeom prst="rect">
+                <a:avLst/>
+              </a:prstGeom>
+              <a:ln>
+                <a:noFill/>
+              </a:ln>
+            </p:spPr>
+            <p:style>
+              <a:lnRef idx="2">
+                <a:schemeClr val="dk1"/>
+              </a:lnRef>
+              <a:fillRef idx="1">
+                <a:schemeClr val="lt1"/>
+              </a:fillRef>
+              <a:effectRef idx="0">
+                <a:schemeClr val="dk1"/>
+              </a:effectRef>
+              <a:fontRef idx="minor">
+                <a:schemeClr val="dk1"/>
+              </a:fontRef>
+            </p:style>
+            <p:txBody>
+              <a:bodyPr wrap="square" rtlCol="0" anchor="ctr"/>
+              <a:lstStyle>
+                <a:defPPr>
+                  <a:defRPr lang="ja-JP"/>
+                </a:defPPr>
+                <a:lvl1pPr marL="0" indent="0" algn="l" defTabSz="914400" rtl="0" eaLnBrk="1" latinLnBrk="0" hangingPunct="1">
+                  <a:defRPr kumimoji="1" sz="1800" kern="1200">
+                    <a:solidFill>
+                      <a:schemeClr val="dk1"/>
+                    </a:solidFill>
+                    <a:latin typeface="+mn-lt"/>
+                    <a:ea typeface="+mn-ea"/>
+                    <a:cs typeface="+mn-cs"/>
+                  </a:defRPr>
+                </a:lvl1pPr>
+                <a:lvl2pPr marL="457200" indent="0" algn="l" defTabSz="914400" rtl="0" eaLnBrk="1" latinLnBrk="0" hangingPunct="1">
+                  <a:defRPr kumimoji="1" sz="1800" kern="1200">
+                    <a:solidFill>
+                      <a:schemeClr val="dk1"/>
+                    </a:solidFill>
+                    <a:latin typeface="+mn-lt"/>
+                    <a:ea typeface="+mn-ea"/>
+                    <a:cs typeface="+mn-cs"/>
+                  </a:defRPr>
+                </a:lvl2pPr>
+                <a:lvl3pPr marL="914400" indent="0" algn="l" defTabSz="914400" rtl="0" eaLnBrk="1" latinLnBrk="0" hangingPunct="1">
+                  <a:defRPr kumimoji="1" sz="1800" kern="1200">
+                    <a:solidFill>
+                      <a:schemeClr val="dk1"/>
+                    </a:solidFill>
+                    <a:latin typeface="+mn-lt"/>
+                    <a:ea typeface="+mn-ea"/>
+                    <a:cs typeface="+mn-cs"/>
+                  </a:defRPr>
+                </a:lvl3pPr>
+                <a:lvl4pPr marL="1371600" indent="0" algn="l" defTabSz="914400" rtl="0" eaLnBrk="1" latinLnBrk="0" hangingPunct="1">
+                  <a:defRPr kumimoji="1" sz="1800" kern="1200">
+                    <a:solidFill>
+                      <a:schemeClr val="dk1"/>
+                    </a:solidFill>
+                    <a:latin typeface="+mn-lt"/>
+                    <a:ea typeface="+mn-ea"/>
+                    <a:cs typeface="+mn-cs"/>
+                  </a:defRPr>
+                </a:lvl4pPr>
+                <a:lvl5pPr marL="1828800" indent="0" algn="l" defTabSz="914400" rtl="0" eaLnBrk="1" latinLnBrk="0" hangingPunct="1">
+                  <a:defRPr kumimoji="1" sz="1800" kern="1200">
+                    <a:solidFill>
+                      <a:schemeClr val="dk1"/>
+                    </a:solidFill>
+                    <a:latin typeface="+mn-lt"/>
+                    <a:ea typeface="+mn-ea"/>
+                    <a:cs typeface="+mn-cs"/>
+                  </a:defRPr>
+                </a:lvl5pPr>
+                <a:lvl6pPr marL="2286000" indent="0" algn="l" defTabSz="914400" rtl="0" eaLnBrk="1" latinLnBrk="0" hangingPunct="1">
+                  <a:defRPr kumimoji="1" sz="1800" kern="1200">
+                    <a:solidFill>
+                      <a:schemeClr val="dk1"/>
+                    </a:solidFill>
+                    <a:latin typeface="+mn-lt"/>
+                    <a:ea typeface="+mn-ea"/>
+                    <a:cs typeface="+mn-cs"/>
+                  </a:defRPr>
+                </a:lvl6pPr>
+                <a:lvl7pPr marL="2743200" indent="0" algn="l" defTabSz="914400" rtl="0" eaLnBrk="1" latinLnBrk="0" hangingPunct="1">
+                  <a:defRPr kumimoji="1" sz="1800" kern="1200">
+                    <a:solidFill>
+                      <a:schemeClr val="dk1"/>
+                    </a:solidFill>
+                    <a:latin typeface="+mn-lt"/>
+                    <a:ea typeface="+mn-ea"/>
+                    <a:cs typeface="+mn-cs"/>
+                  </a:defRPr>
+                </a:lvl7pPr>
+                <a:lvl8pPr marL="3200400" indent="0" algn="l" defTabSz="914400" rtl="0" eaLnBrk="1" latinLnBrk="0" hangingPunct="1">
+                  <a:defRPr kumimoji="1" sz="1800" kern="1200">
+                    <a:solidFill>
+                      <a:schemeClr val="dk1"/>
+                    </a:solidFill>
+                    <a:latin typeface="+mn-lt"/>
+                    <a:ea typeface="+mn-ea"/>
+                    <a:cs typeface="+mn-cs"/>
+                  </a:defRPr>
+                </a:lvl8pPr>
+                <a:lvl9pPr marL="3657600" indent="0" algn="l" defTabSz="914400" rtl="0" eaLnBrk="1" latinLnBrk="0" hangingPunct="1">
+                  <a:defRPr kumimoji="1" sz="1800" kern="1200">
+                    <a:solidFill>
+                      <a:schemeClr val="dk1"/>
+                    </a:solidFill>
+                    <a:latin typeface="+mn-lt"/>
+                    <a:ea typeface="+mn-ea"/>
+                    <a:cs typeface="+mn-cs"/>
+                  </a:defRPr>
+                </a:lvl9pPr>
+              </a:lstStyle>
+              <a:p>
+                <a:pPr algn="ctr"/>
+                <a:endParaRPr kumimoji="1" lang="ja-JP" altLang="en-US"/>
+              </a:p>
+            </p:txBody>
+          </p:sp>
+          <p:pic>
+            <p:nvPicPr>
+              <p:cNvPr id="32" name="図 31">
+                <a:extLst>
+                  <a:ext uri="{FF2B5EF4-FFF2-40B4-BE49-F238E27FC236}">
+                    <a16:creationId xmlns:a16="http://schemas.microsoft.com/office/drawing/2014/main" id="{AC970566-6562-751D-E782-572914D801D8}"/>
+                  </a:ext>
+                </a:extLst>
+              </p:cNvPr>
+              <p:cNvPicPr>
+                <a:picLocks noChangeAspect="1"/>
+              </p:cNvPicPr>
+              <p:nvPr/>
+            </p:nvPicPr>
+            <p:blipFill rotWithShape="1">
+              <a:blip r:embed="rId2"/>
+              <a:srcRect l="15627" t="4316" r="14777" b="8679"/>
+              <a:stretch>
+                <a:fillRect/>
+              </a:stretch>
+            </p:blipFill>
+            <p:spPr>
+              <a:xfrm>
+                <a:off x="1618176" y="5122335"/>
+                <a:ext cx="8869255" cy="6148906"/>
+              </a:xfrm>
+              <a:prstGeom prst="rect">
+                <a:avLst/>
+              </a:prstGeom>
+            </p:spPr>
+          </p:pic>
+        </p:grpSp>
+        <p:sp>
+          <p:nvSpPr>
+            <p:cNvPr id="28" name="正方形/長方形 27">
+              <a:extLst>
+                <a:ext uri="{FF2B5EF4-FFF2-40B4-BE49-F238E27FC236}">
+                  <a16:creationId xmlns:a16="http://schemas.microsoft.com/office/drawing/2014/main" id="{6AF3D99A-EDAD-1798-29B2-69A887A60946}"/>
+                </a:ext>
+              </a:extLst>
+            </p:cNvPr>
+            <p:cNvSpPr/>
+            <p:nvPr/>
+          </p:nvSpPr>
+          <p:spPr>
+            <a:xfrm>
+              <a:off x="1980990" y="5215465"/>
+              <a:ext cx="8259213" cy="5818043"/>
+            </a:xfrm>
+            <a:prstGeom prst="rect">
+              <a:avLst/>
+            </a:prstGeom>
+            <a:noFill/>
+            <a:ln w="28575">
+              <a:solidFill>
+                <a:srgbClr val="FF0000"/>
+              </a:solidFill>
+              <a:prstDash val="solid"/>
+            </a:ln>
+          </p:spPr>
+          <p:style>
+            <a:lnRef idx="2">
+              <a:schemeClr val="accent6"/>
+            </a:lnRef>
+            <a:fillRef idx="1">
+              <a:schemeClr val="lt1"/>
+            </a:fillRef>
+            <a:effectRef idx="0">
+              <a:schemeClr val="accent6"/>
+            </a:effectRef>
+            <a:fontRef idx="minor">
+              <a:schemeClr val="dk1"/>
+            </a:fontRef>
+          </p:style>
+          <p:txBody>
+            <a:bodyPr rtlCol="0" anchor="t"/>
+            <a:lstStyle>
+              <a:lvl1pPr marL="0" indent="0">
+                <a:defRPr sz="1100">
+                  <a:solidFill>
+                    <a:schemeClr val="dk1"/>
+                  </a:solidFill>
+                  <a:latin typeface="+mn-lt"/>
+                  <a:ea typeface="+mn-ea"/>
+                  <a:cs typeface="+mn-cs"/>
+                </a:defRPr>
+              </a:lvl1pPr>
+              <a:lvl2pPr marL="457200" indent="0">
+                <a:defRPr sz="1100">
+                  <a:solidFill>
+                    <a:schemeClr val="dk1"/>
+                  </a:solidFill>
+                  <a:latin typeface="+mn-lt"/>
+                  <a:ea typeface="+mn-ea"/>
+                  <a:cs typeface="+mn-cs"/>
+                </a:defRPr>
+              </a:lvl2pPr>
+              <a:lvl3pPr marL="914400" indent="0">
+                <a:defRPr sz="1100">
+                  <a:solidFill>
+                    <a:schemeClr val="dk1"/>
+                  </a:solidFill>
+                  <a:latin typeface="+mn-lt"/>
+                  <a:ea typeface="+mn-ea"/>
+                  <a:cs typeface="+mn-cs"/>
+                </a:defRPr>
+              </a:lvl3pPr>
+              <a:lvl4pPr marL="1371600" indent="0">
+                <a:defRPr sz="1100">
+                  <a:solidFill>
+                    <a:schemeClr val="dk1"/>
+                  </a:solidFill>
+                  <a:latin typeface="+mn-lt"/>
+                  <a:ea typeface="+mn-ea"/>
+                  <a:cs typeface="+mn-cs"/>
+                </a:defRPr>
+              </a:lvl4pPr>
+              <a:lvl5pPr marL="1828800" indent="0">
+                <a:defRPr sz="1100">
+                  <a:solidFill>
+                    <a:schemeClr val="dk1"/>
+                  </a:solidFill>
+                  <a:latin typeface="+mn-lt"/>
+                  <a:ea typeface="+mn-ea"/>
+                  <a:cs typeface="+mn-cs"/>
+                </a:defRPr>
+              </a:lvl5pPr>
+              <a:lvl6pPr marL="2286000" indent="0">
+                <a:defRPr sz="1100">
+                  <a:solidFill>
+                    <a:schemeClr val="dk1"/>
+                  </a:solidFill>
+                  <a:latin typeface="+mn-lt"/>
+                  <a:ea typeface="+mn-ea"/>
+                  <a:cs typeface="+mn-cs"/>
+                </a:defRPr>
+              </a:lvl6pPr>
+              <a:lvl7pPr marL="2743200" indent="0">
+                <a:defRPr sz="1100">
+                  <a:solidFill>
+                    <a:schemeClr val="dk1"/>
+                  </a:solidFill>
+                  <a:latin typeface="+mn-lt"/>
+                  <a:ea typeface="+mn-ea"/>
+                  <a:cs typeface="+mn-cs"/>
+                </a:defRPr>
+              </a:lvl7pPr>
+              <a:lvl8pPr marL="3200400" indent="0">
+                <a:defRPr sz="1100">
+                  <a:solidFill>
+                    <a:schemeClr val="dk1"/>
+                  </a:solidFill>
+                  <a:latin typeface="+mn-lt"/>
+                  <a:ea typeface="+mn-ea"/>
+                  <a:cs typeface="+mn-cs"/>
+                </a:defRPr>
+              </a:lvl8pPr>
+              <a:lvl9pPr marL="3657600" indent="0">
+                <a:defRPr sz="1100">
+                  <a:solidFill>
+                    <a:schemeClr val="dk1"/>
+                  </a:solidFill>
+                  <a:latin typeface="+mn-lt"/>
+                  <a:ea typeface="+mn-ea"/>
+                  <a:cs typeface="+mn-cs"/>
+                </a:defRPr>
+              </a:lvl9pPr>
+            </a:lstStyle>
+            <a:p>
+              <a:pPr algn="l"/>
+              <a:endParaRPr kumimoji="1" lang="ja-JP" altLang="en-US" sz="1100"/>
+            </a:p>
+          </p:txBody>
+        </p:sp>
+        <p:sp>
+          <p:nvSpPr>
+            <p:cNvPr id="29" name="正方形/長方形 28">
+              <a:extLst>
+                <a:ext uri="{FF2B5EF4-FFF2-40B4-BE49-F238E27FC236}">
+                  <a16:creationId xmlns:a16="http://schemas.microsoft.com/office/drawing/2014/main" id="{8A11EA04-7160-76FC-A60E-63742E5407FB}"/>
+                </a:ext>
+              </a:extLst>
+            </p:cNvPr>
+            <p:cNvSpPr/>
+            <p:nvPr/>
+          </p:nvSpPr>
+          <p:spPr>
+            <a:xfrm>
+              <a:off x="10512918" y="7766687"/>
+              <a:ext cx="1129367" cy="700000"/>
+            </a:xfrm>
+            <a:prstGeom prst="rect">
+              <a:avLst/>
+            </a:prstGeom>
+            <a:ln w="28575">
+              <a:solidFill>
+                <a:srgbClr val="FF0000"/>
+              </a:solidFill>
+            </a:ln>
+          </p:spPr>
+          <p:style>
+            <a:lnRef idx="2">
+              <a:schemeClr val="accent6"/>
+            </a:lnRef>
+            <a:fillRef idx="1">
+              <a:schemeClr val="lt1"/>
+            </a:fillRef>
+            <a:effectRef idx="0">
+              <a:schemeClr val="accent6"/>
+            </a:effectRef>
+            <a:fontRef idx="minor">
+              <a:schemeClr val="dk1"/>
+            </a:fontRef>
+          </p:style>
+          <p:txBody>
+            <a:bodyPr rtlCol="0" anchor="ctr"/>
+            <a:lstStyle>
+              <a:lvl1pPr marL="0" indent="0">
+                <a:defRPr sz="1100">
+                  <a:solidFill>
+                    <a:schemeClr val="dk1"/>
+                  </a:solidFill>
+                  <a:latin typeface="+mn-lt"/>
+                  <a:ea typeface="+mn-ea"/>
+                  <a:cs typeface="+mn-cs"/>
+                </a:defRPr>
+              </a:lvl1pPr>
+              <a:lvl2pPr marL="457200" indent="0">
+                <a:defRPr sz="1100">
+                  <a:solidFill>
+                    <a:schemeClr val="dk1"/>
+                  </a:solidFill>
+                  <a:latin typeface="+mn-lt"/>
+                  <a:ea typeface="+mn-ea"/>
+                  <a:cs typeface="+mn-cs"/>
+                </a:defRPr>
+              </a:lvl2pPr>
+              <a:lvl3pPr marL="914400" indent="0">
+                <a:defRPr sz="1100">
+                  <a:solidFill>
+                    <a:schemeClr val="dk1"/>
+                  </a:solidFill>
+                  <a:latin typeface="+mn-lt"/>
+                  <a:ea typeface="+mn-ea"/>
+                  <a:cs typeface="+mn-cs"/>
+                </a:defRPr>
+              </a:lvl3pPr>
+              <a:lvl4pPr marL="1371600" indent="0">
+                <a:defRPr sz="1100">
+                  <a:solidFill>
+                    <a:schemeClr val="dk1"/>
+                  </a:solidFill>
+                  <a:latin typeface="+mn-lt"/>
+                  <a:ea typeface="+mn-ea"/>
+                  <a:cs typeface="+mn-cs"/>
+                </a:defRPr>
+              </a:lvl4pPr>
+              <a:lvl5pPr marL="1828800" indent="0">
+                <a:defRPr sz="1100">
+                  <a:solidFill>
+                    <a:schemeClr val="dk1"/>
+                  </a:solidFill>
+                  <a:latin typeface="+mn-lt"/>
+                  <a:ea typeface="+mn-ea"/>
+                  <a:cs typeface="+mn-cs"/>
+                </a:defRPr>
+              </a:lvl5pPr>
+              <a:lvl6pPr marL="2286000" indent="0">
+                <a:defRPr sz="1100">
+                  <a:solidFill>
+                    <a:schemeClr val="dk1"/>
+                  </a:solidFill>
+                  <a:latin typeface="+mn-lt"/>
+                  <a:ea typeface="+mn-ea"/>
+                  <a:cs typeface="+mn-cs"/>
+                </a:defRPr>
+              </a:lvl6pPr>
+              <a:lvl7pPr marL="2743200" indent="0">
+                <a:defRPr sz="1100">
+                  <a:solidFill>
+                    <a:schemeClr val="dk1"/>
+                  </a:solidFill>
+                  <a:latin typeface="+mn-lt"/>
+                  <a:ea typeface="+mn-ea"/>
+                  <a:cs typeface="+mn-cs"/>
+                </a:defRPr>
+              </a:lvl7pPr>
+              <a:lvl8pPr marL="3200400" indent="0">
+                <a:defRPr sz="1100">
+                  <a:solidFill>
+                    <a:schemeClr val="dk1"/>
+                  </a:solidFill>
+                  <a:latin typeface="+mn-lt"/>
+                  <a:ea typeface="+mn-ea"/>
+                  <a:cs typeface="+mn-cs"/>
+                </a:defRPr>
+              </a:lvl8pPr>
+              <a:lvl9pPr marL="3657600" indent="0">
+                <a:defRPr sz="1100">
+                  <a:solidFill>
+                    <a:schemeClr val="dk1"/>
+                  </a:solidFill>
+                  <a:latin typeface="+mn-lt"/>
+                  <a:ea typeface="+mn-ea"/>
+                  <a:cs typeface="+mn-cs"/>
+                </a:defRPr>
+              </a:lvl9pPr>
+            </a:lstStyle>
+            <a:p>
+              <a:pPr algn="l"/>
+              <a:r>
+                <a:rPr kumimoji="1" lang="ja-JP" altLang="en-US" sz="1200" b="1">
+                  <a:solidFill>
+                    <a:srgbClr val="FF0000"/>
+                  </a:solidFill>
+                </a:rPr>
+                <a:t>⑤ドロップ</a:t>
+              </a:r>
+              <a:endParaRPr kumimoji="1" lang="en-US" altLang="ja-JP" sz="1200" b="1">
+                <a:solidFill>
+                  <a:srgbClr val="FF0000"/>
+                </a:solidFill>
+              </a:endParaRPr>
+            </a:p>
+            <a:p>
+              <a:pPr algn="l"/>
+              <a:r>
+                <a:rPr kumimoji="1" lang="ja-JP" altLang="en-US" sz="1200" b="1">
+                  <a:solidFill>
+                    <a:srgbClr val="FF0000"/>
+                  </a:solidFill>
+                </a:rPr>
+                <a:t>　入力欄</a:t>
+              </a:r>
+            </a:p>
+          </p:txBody>
+        </p:sp>
+        <p:cxnSp>
+          <p:nvCxnSpPr>
+            <p:cNvPr id="30" name="直線矢印コネクタ 29">
+              <a:extLst>
+                <a:ext uri="{FF2B5EF4-FFF2-40B4-BE49-F238E27FC236}">
+                  <a16:creationId xmlns:a16="http://schemas.microsoft.com/office/drawing/2014/main" id="{94BF8C1D-901C-95E3-FAC1-AA061E830872}"/>
+                </a:ext>
+              </a:extLst>
+            </p:cNvPr>
+            <p:cNvCxnSpPr>
+              <a:stCxn id="29" idx="1"/>
+              <a:endCxn id="28" idx="3"/>
+            </p:cNvCxnSpPr>
+            <p:nvPr/>
+          </p:nvCxnSpPr>
+          <p:spPr>
+            <a:xfrm flipH="1">
+              <a:off x="10240203" y="8116686"/>
+              <a:ext cx="272715" cy="7800"/>
+            </a:xfrm>
+            <a:prstGeom prst="straightConnector1">
+              <a:avLst/>
+            </a:prstGeom>
+            <a:ln w="28575">
+              <a:solidFill>
+                <a:srgbClr val="FF0000"/>
+              </a:solidFill>
+              <a:tailEnd type="triangle"/>
+            </a:ln>
+          </p:spPr>
+          <p:style>
+            <a:lnRef idx="2">
+              <a:schemeClr val="accent1"/>
+            </a:lnRef>
+            <a:fillRef idx="0">
+              <a:schemeClr val="accent1"/>
+            </a:fillRef>
+            <a:effectRef idx="1">
+              <a:schemeClr val="accent1"/>
+            </a:effectRef>
+            <a:fontRef idx="minor">
+              <a:schemeClr val="tx1"/>
+            </a:fontRef>
+          </p:style>
+        </p:cxnSp>
+      </p:grpSp>
+    </p:spTree>
+    <p:extLst>
+      <p:ext uri="{BB962C8B-B14F-4D97-AF65-F5344CB8AC3E}">
+        <p14:creationId xmlns:p14="http://schemas.microsoft.com/office/powerpoint/2010/main" val="3701427094"/>
+      </p:ext>
+    </p:extLst>
+  </p:cSld>
+  <p:clrMapOvr>
+    <a:masterClrMapping/>
+  </p:clrMapOvr>
+</p:sld>
+</file>
+
+<file path=ppt/slides/slide11.xml><?xml version="1.0" encoding="utf-8"?>
+<p:sld xmlns:a="http://schemas.openxmlformats.org/drawingml/2006/main" xmlns:r="http://schemas.openxmlformats.org/officeDocument/2006/relationships" xmlns:p="http://schemas.openxmlformats.org/presentationml/2006/main">
+  <p:cSld>
+    <p:spTree>
+      <p:nvGrpSpPr>
+        <p:cNvPr id="1" name="">
+          <a:extLst>
+            <a:ext uri="{FF2B5EF4-FFF2-40B4-BE49-F238E27FC236}">
+              <a16:creationId xmlns:a16="http://schemas.microsoft.com/office/drawing/2014/main" id="{9F980BDA-4A4C-7E94-0A20-011122EAC56E}"/>
+            </a:ext>
+          </a:extLst>
+        </p:cNvPr>
+        <p:cNvGrpSpPr/>
+        <p:nvPr/>
+      </p:nvGrpSpPr>
+      <p:grpSpPr>
+        <a:xfrm>
+          <a:off x="0" y="0"/>
+          <a:ext cx="0" cy="0"/>
+          <a:chOff x="0" y="0"/>
+          <a:chExt cx="0" cy="0"/>
+        </a:xfrm>
+      </p:grpSpPr>
+      <p:grpSp>
+        <p:nvGrpSpPr>
+          <p:cNvPr id="6" name="グループ化 5">
+            <a:extLst>
+              <a:ext uri="{FF2B5EF4-FFF2-40B4-BE49-F238E27FC236}">
+                <a16:creationId xmlns:a16="http://schemas.microsoft.com/office/drawing/2014/main" id="{117035BB-941E-434B-1B7D-FC0E88A58996}"/>
+              </a:ext>
+            </a:extLst>
+          </p:cNvPr>
+          <p:cNvGrpSpPr/>
+          <p:nvPr/>
+        </p:nvGrpSpPr>
+        <p:grpSpPr>
+          <a:xfrm>
+            <a:off x="375153" y="415637"/>
+            <a:ext cx="11441694" cy="6918613"/>
+            <a:chOff x="12301537" y="5082948"/>
+            <a:chExt cx="11475801" cy="6955591"/>
+          </a:xfrm>
+        </p:grpSpPr>
+        <p:grpSp>
+          <p:nvGrpSpPr>
+            <p:cNvPr id="21" name="グループ化 20">
+              <a:extLst>
+                <a:ext uri="{FF2B5EF4-FFF2-40B4-BE49-F238E27FC236}">
+                  <a16:creationId xmlns:a16="http://schemas.microsoft.com/office/drawing/2014/main" id="{E3A9B2BE-7263-7BEF-CF8A-8FBC14530D4D}"/>
+                </a:ext>
+              </a:extLst>
+            </p:cNvPr>
+            <p:cNvGrpSpPr/>
+            <p:nvPr/>
+          </p:nvGrpSpPr>
+          <p:grpSpPr>
+            <a:xfrm>
+              <a:off x="12301537" y="5082948"/>
+              <a:ext cx="11475801" cy="6955591"/>
+              <a:chOff x="12301537" y="5082948"/>
+              <a:chExt cx="11236058" cy="6791917"/>
+            </a:xfrm>
+          </p:grpSpPr>
+          <p:sp>
+            <p:nvSpPr>
+              <p:cNvPr id="25" name="正方形/長方形 24">
+                <a:extLst>
+                  <a:ext uri="{FF2B5EF4-FFF2-40B4-BE49-F238E27FC236}">
+                    <a16:creationId xmlns:a16="http://schemas.microsoft.com/office/drawing/2014/main" id="{BF470FBD-094D-577D-D12C-5F0DEA6E1F68}"/>
+                  </a:ext>
+                </a:extLst>
+              </p:cNvPr>
+              <p:cNvSpPr/>
+              <p:nvPr/>
+            </p:nvSpPr>
+            <p:spPr>
+              <a:xfrm>
+                <a:off x="12301537" y="5082948"/>
+                <a:ext cx="11236058" cy="6791917"/>
+              </a:xfrm>
+              <a:prstGeom prst="rect">
+                <a:avLst/>
+              </a:prstGeom>
+              <a:ln>
+                <a:noFill/>
+              </a:ln>
+            </p:spPr>
+            <p:style>
+              <a:lnRef idx="2">
+                <a:schemeClr val="dk1"/>
+              </a:lnRef>
+              <a:fillRef idx="1">
+                <a:schemeClr val="lt1"/>
+              </a:fillRef>
+              <a:effectRef idx="0">
+                <a:schemeClr val="dk1"/>
+              </a:effectRef>
+              <a:fontRef idx="minor">
+                <a:schemeClr val="dk1"/>
+              </a:fontRef>
+            </p:style>
+            <p:txBody>
+              <a:bodyPr wrap="square" rtlCol="0" anchor="ctr"/>
+              <a:lstStyle>
+                <a:defPPr>
+                  <a:defRPr lang="ja-JP"/>
+                </a:defPPr>
+                <a:lvl1pPr marL="0" indent="0" algn="l" defTabSz="914400" rtl="0" eaLnBrk="1" latinLnBrk="0" hangingPunct="1">
+                  <a:defRPr kumimoji="1" sz="1800" kern="1200">
+                    <a:solidFill>
+                      <a:schemeClr val="dk1"/>
+                    </a:solidFill>
+                    <a:latin typeface="+mn-lt"/>
+                    <a:ea typeface="+mn-ea"/>
+                    <a:cs typeface="+mn-cs"/>
+                  </a:defRPr>
+                </a:lvl1pPr>
+                <a:lvl2pPr marL="457200" indent="0" algn="l" defTabSz="914400" rtl="0" eaLnBrk="1" latinLnBrk="0" hangingPunct="1">
+                  <a:defRPr kumimoji="1" sz="1800" kern="1200">
+                    <a:solidFill>
+                      <a:schemeClr val="dk1"/>
+                    </a:solidFill>
+                    <a:latin typeface="+mn-lt"/>
+                    <a:ea typeface="+mn-ea"/>
+                    <a:cs typeface="+mn-cs"/>
+                  </a:defRPr>
+                </a:lvl2pPr>
+                <a:lvl3pPr marL="914400" indent="0" algn="l" defTabSz="914400" rtl="0" eaLnBrk="1" latinLnBrk="0" hangingPunct="1">
+                  <a:defRPr kumimoji="1" sz="1800" kern="1200">
+                    <a:solidFill>
+                      <a:schemeClr val="dk1"/>
+                    </a:solidFill>
+                    <a:latin typeface="+mn-lt"/>
+                    <a:ea typeface="+mn-ea"/>
+                    <a:cs typeface="+mn-cs"/>
+                  </a:defRPr>
+                </a:lvl3pPr>
+                <a:lvl4pPr marL="1371600" indent="0" algn="l" defTabSz="914400" rtl="0" eaLnBrk="1" latinLnBrk="0" hangingPunct="1">
+                  <a:defRPr kumimoji="1" sz="1800" kern="1200">
+                    <a:solidFill>
+                      <a:schemeClr val="dk1"/>
+                    </a:solidFill>
+                    <a:latin typeface="+mn-lt"/>
+                    <a:ea typeface="+mn-ea"/>
+                    <a:cs typeface="+mn-cs"/>
+                  </a:defRPr>
+                </a:lvl4pPr>
+                <a:lvl5pPr marL="1828800" indent="0" algn="l" defTabSz="914400" rtl="0" eaLnBrk="1" latinLnBrk="0" hangingPunct="1">
+                  <a:defRPr kumimoji="1" sz="1800" kern="1200">
+                    <a:solidFill>
+                      <a:schemeClr val="dk1"/>
+                    </a:solidFill>
+                    <a:latin typeface="+mn-lt"/>
+                    <a:ea typeface="+mn-ea"/>
+                    <a:cs typeface="+mn-cs"/>
+                  </a:defRPr>
+                </a:lvl5pPr>
+                <a:lvl6pPr marL="2286000" indent="0" algn="l" defTabSz="914400" rtl="0" eaLnBrk="1" latinLnBrk="0" hangingPunct="1">
+                  <a:defRPr kumimoji="1" sz="1800" kern="1200">
+                    <a:solidFill>
+                      <a:schemeClr val="dk1"/>
+                    </a:solidFill>
+                    <a:latin typeface="+mn-lt"/>
+                    <a:ea typeface="+mn-ea"/>
+                    <a:cs typeface="+mn-cs"/>
+                  </a:defRPr>
+                </a:lvl6pPr>
+                <a:lvl7pPr marL="2743200" indent="0" algn="l" defTabSz="914400" rtl="0" eaLnBrk="1" latinLnBrk="0" hangingPunct="1">
+                  <a:defRPr kumimoji="1" sz="1800" kern="1200">
+                    <a:solidFill>
+                      <a:schemeClr val="dk1"/>
+                    </a:solidFill>
+                    <a:latin typeface="+mn-lt"/>
+                    <a:ea typeface="+mn-ea"/>
+                    <a:cs typeface="+mn-cs"/>
+                  </a:defRPr>
+                </a:lvl7pPr>
+                <a:lvl8pPr marL="3200400" indent="0" algn="l" defTabSz="914400" rtl="0" eaLnBrk="1" latinLnBrk="0" hangingPunct="1">
+                  <a:defRPr kumimoji="1" sz="1800" kern="1200">
+                    <a:solidFill>
+                      <a:schemeClr val="dk1"/>
+                    </a:solidFill>
+                    <a:latin typeface="+mn-lt"/>
+                    <a:ea typeface="+mn-ea"/>
+                    <a:cs typeface="+mn-cs"/>
+                  </a:defRPr>
+                </a:lvl8pPr>
+                <a:lvl9pPr marL="3657600" indent="0" algn="l" defTabSz="914400" rtl="0" eaLnBrk="1" latinLnBrk="0" hangingPunct="1">
+                  <a:defRPr kumimoji="1" sz="1800" kern="1200">
+                    <a:solidFill>
+                      <a:schemeClr val="dk1"/>
+                    </a:solidFill>
+                    <a:latin typeface="+mn-lt"/>
+                    <a:ea typeface="+mn-ea"/>
+                    <a:cs typeface="+mn-cs"/>
+                  </a:defRPr>
+                </a:lvl9pPr>
+              </a:lstStyle>
+              <a:p>
+                <a:pPr algn="ctr"/>
+                <a:endParaRPr kumimoji="1" lang="ja-JP" altLang="en-US" dirty="0"/>
+              </a:p>
+            </p:txBody>
+          </p:sp>
+          <p:pic>
+            <p:nvPicPr>
+              <p:cNvPr id="26" name="図 25">
+                <a:extLst>
+                  <a:ext uri="{FF2B5EF4-FFF2-40B4-BE49-F238E27FC236}">
+                    <a16:creationId xmlns:a16="http://schemas.microsoft.com/office/drawing/2014/main" id="{80E4A9A0-2C8E-B345-1ECD-E0BDA39EC1AB}"/>
+                  </a:ext>
+                </a:extLst>
+              </p:cNvPr>
+              <p:cNvPicPr>
+                <a:picLocks noChangeAspect="1"/>
+              </p:cNvPicPr>
+              <p:nvPr/>
+            </p:nvPicPr>
+            <p:blipFill rotWithShape="1">
+              <a:blip r:embed="rId2"/>
+              <a:srcRect l="3511" t="2932" r="6080"/>
+              <a:stretch>
+                <a:fillRect/>
+              </a:stretch>
+            </p:blipFill>
+            <p:spPr>
+              <a:xfrm>
+                <a:off x="13662470" y="5292060"/>
+                <a:ext cx="8602795" cy="6518237"/>
+              </a:xfrm>
+              <a:prstGeom prst="rect">
+                <a:avLst/>
+              </a:prstGeom>
+            </p:spPr>
+          </p:pic>
+        </p:grpSp>
+        <p:sp>
+          <p:nvSpPr>
+            <p:cNvPr id="22" name="正方形/長方形 21">
+              <a:extLst>
+                <a:ext uri="{FF2B5EF4-FFF2-40B4-BE49-F238E27FC236}">
+                  <a16:creationId xmlns:a16="http://schemas.microsoft.com/office/drawing/2014/main" id="{6E5ACAE0-4FB1-E6CD-9B75-692B8604ABB3}"/>
+                </a:ext>
+              </a:extLst>
+            </p:cNvPr>
+            <p:cNvSpPr/>
+            <p:nvPr/>
+          </p:nvSpPr>
+          <p:spPr>
+            <a:xfrm>
+              <a:off x="13952962" y="5467490"/>
+              <a:ext cx="8253498" cy="6139468"/>
+            </a:xfrm>
+            <a:prstGeom prst="rect">
+              <a:avLst/>
+            </a:prstGeom>
+            <a:noFill/>
+            <a:ln w="28575">
+              <a:solidFill>
+                <a:srgbClr val="FF0000"/>
+              </a:solidFill>
+              <a:prstDash val="solid"/>
+            </a:ln>
+          </p:spPr>
+          <p:style>
+            <a:lnRef idx="2">
+              <a:schemeClr val="accent6"/>
+            </a:lnRef>
+            <a:fillRef idx="1">
+              <a:schemeClr val="lt1"/>
+            </a:fillRef>
+            <a:effectRef idx="0">
+              <a:schemeClr val="accent6"/>
+            </a:effectRef>
+            <a:fontRef idx="minor">
+              <a:schemeClr val="dk1"/>
+            </a:fontRef>
+          </p:style>
+          <p:txBody>
+            <a:bodyPr rtlCol="0" anchor="t"/>
+            <a:lstStyle>
+              <a:lvl1pPr marL="0" indent="0">
+                <a:defRPr sz="1100">
+                  <a:solidFill>
+                    <a:schemeClr val="dk1"/>
+                  </a:solidFill>
+                  <a:latin typeface="+mn-lt"/>
+                  <a:ea typeface="+mn-ea"/>
+                  <a:cs typeface="+mn-cs"/>
+                </a:defRPr>
+              </a:lvl1pPr>
+              <a:lvl2pPr marL="457200" indent="0">
+                <a:defRPr sz="1100">
+                  <a:solidFill>
+                    <a:schemeClr val="dk1"/>
+                  </a:solidFill>
+                  <a:latin typeface="+mn-lt"/>
+                  <a:ea typeface="+mn-ea"/>
+                  <a:cs typeface="+mn-cs"/>
+                </a:defRPr>
+              </a:lvl2pPr>
+              <a:lvl3pPr marL="914400" indent="0">
+                <a:defRPr sz="1100">
+                  <a:solidFill>
+                    <a:schemeClr val="dk1"/>
+                  </a:solidFill>
+                  <a:latin typeface="+mn-lt"/>
+                  <a:ea typeface="+mn-ea"/>
+                  <a:cs typeface="+mn-cs"/>
+                </a:defRPr>
+              </a:lvl3pPr>
+              <a:lvl4pPr marL="1371600" indent="0">
+                <a:defRPr sz="1100">
+                  <a:solidFill>
+                    <a:schemeClr val="dk1"/>
+                  </a:solidFill>
+                  <a:latin typeface="+mn-lt"/>
+                  <a:ea typeface="+mn-ea"/>
+                  <a:cs typeface="+mn-cs"/>
+                </a:defRPr>
+              </a:lvl4pPr>
+              <a:lvl5pPr marL="1828800" indent="0">
+                <a:defRPr sz="1100">
+                  <a:solidFill>
+                    <a:schemeClr val="dk1"/>
+                  </a:solidFill>
+                  <a:latin typeface="+mn-lt"/>
+                  <a:ea typeface="+mn-ea"/>
+                  <a:cs typeface="+mn-cs"/>
+                </a:defRPr>
+              </a:lvl5pPr>
+              <a:lvl6pPr marL="2286000" indent="0">
+                <a:defRPr sz="1100">
+                  <a:solidFill>
+                    <a:schemeClr val="dk1"/>
+                  </a:solidFill>
+                  <a:latin typeface="+mn-lt"/>
+                  <a:ea typeface="+mn-ea"/>
+                  <a:cs typeface="+mn-cs"/>
+                </a:defRPr>
+              </a:lvl6pPr>
+              <a:lvl7pPr marL="2743200" indent="0">
+                <a:defRPr sz="1100">
+                  <a:solidFill>
+                    <a:schemeClr val="dk1"/>
+                  </a:solidFill>
+                  <a:latin typeface="+mn-lt"/>
+                  <a:ea typeface="+mn-ea"/>
+                  <a:cs typeface="+mn-cs"/>
+                </a:defRPr>
+              </a:lvl7pPr>
+              <a:lvl8pPr marL="3200400" indent="0">
+                <a:defRPr sz="1100">
+                  <a:solidFill>
+                    <a:schemeClr val="dk1"/>
+                  </a:solidFill>
+                  <a:latin typeface="+mn-lt"/>
+                  <a:ea typeface="+mn-ea"/>
+                  <a:cs typeface="+mn-cs"/>
+                </a:defRPr>
+              </a:lvl8pPr>
+              <a:lvl9pPr marL="3657600" indent="0">
+                <a:defRPr sz="1100">
+                  <a:solidFill>
+                    <a:schemeClr val="dk1"/>
+                  </a:solidFill>
+                  <a:latin typeface="+mn-lt"/>
+                  <a:ea typeface="+mn-ea"/>
+                  <a:cs typeface="+mn-cs"/>
+                </a:defRPr>
+              </a:lvl9pPr>
+            </a:lstStyle>
+            <a:p>
+              <a:pPr algn="l"/>
+              <a:endParaRPr kumimoji="1" lang="ja-JP" altLang="en-US" sz="1100"/>
+            </a:p>
+          </p:txBody>
+        </p:sp>
+        <p:sp>
+          <p:nvSpPr>
+            <p:cNvPr id="23" name="正方形/長方形 22">
+              <a:extLst>
+                <a:ext uri="{FF2B5EF4-FFF2-40B4-BE49-F238E27FC236}">
+                  <a16:creationId xmlns:a16="http://schemas.microsoft.com/office/drawing/2014/main" id="{B058BDEA-2998-C4C9-96E0-3BCDCA6BA825}"/>
+                </a:ext>
+              </a:extLst>
+            </p:cNvPr>
+            <p:cNvSpPr/>
+            <p:nvPr/>
+          </p:nvSpPr>
+          <p:spPr>
+            <a:xfrm>
+              <a:off x="22481079" y="8115674"/>
+              <a:ext cx="1135083" cy="834908"/>
+            </a:xfrm>
+            <a:prstGeom prst="rect">
+              <a:avLst/>
+            </a:prstGeom>
+            <a:ln w="28575">
+              <a:solidFill>
+                <a:srgbClr val="FF0000"/>
+              </a:solidFill>
+            </a:ln>
+          </p:spPr>
+          <p:style>
+            <a:lnRef idx="2">
+              <a:schemeClr val="accent6"/>
+            </a:lnRef>
+            <a:fillRef idx="1">
+              <a:schemeClr val="lt1"/>
+            </a:fillRef>
+            <a:effectRef idx="0">
+              <a:schemeClr val="accent6"/>
+            </a:effectRef>
+            <a:fontRef idx="minor">
+              <a:schemeClr val="dk1"/>
+            </a:fontRef>
+          </p:style>
+          <p:txBody>
+            <a:bodyPr rtlCol="0" anchor="ctr"/>
+            <a:lstStyle>
+              <a:lvl1pPr marL="0" indent="0">
+                <a:defRPr sz="1100">
+                  <a:solidFill>
+                    <a:schemeClr val="dk1"/>
+                  </a:solidFill>
+                  <a:latin typeface="+mn-lt"/>
+                  <a:ea typeface="+mn-ea"/>
+                  <a:cs typeface="+mn-cs"/>
+                </a:defRPr>
+              </a:lvl1pPr>
+              <a:lvl2pPr marL="457200" indent="0">
+                <a:defRPr sz="1100">
+                  <a:solidFill>
+                    <a:schemeClr val="dk1"/>
+                  </a:solidFill>
+                  <a:latin typeface="+mn-lt"/>
+                  <a:ea typeface="+mn-ea"/>
+                  <a:cs typeface="+mn-cs"/>
+                </a:defRPr>
+              </a:lvl2pPr>
+              <a:lvl3pPr marL="914400" indent="0">
+                <a:defRPr sz="1100">
+                  <a:solidFill>
+                    <a:schemeClr val="dk1"/>
+                  </a:solidFill>
+                  <a:latin typeface="+mn-lt"/>
+                  <a:ea typeface="+mn-ea"/>
+                  <a:cs typeface="+mn-cs"/>
+                </a:defRPr>
+              </a:lvl3pPr>
+              <a:lvl4pPr marL="1371600" indent="0">
+                <a:defRPr sz="1100">
+                  <a:solidFill>
+                    <a:schemeClr val="dk1"/>
+                  </a:solidFill>
+                  <a:latin typeface="+mn-lt"/>
+                  <a:ea typeface="+mn-ea"/>
+                  <a:cs typeface="+mn-cs"/>
+                </a:defRPr>
+              </a:lvl4pPr>
+              <a:lvl5pPr marL="1828800" indent="0">
+                <a:defRPr sz="1100">
+                  <a:solidFill>
+                    <a:schemeClr val="dk1"/>
+                  </a:solidFill>
+                  <a:latin typeface="+mn-lt"/>
+                  <a:ea typeface="+mn-ea"/>
+                  <a:cs typeface="+mn-cs"/>
+                </a:defRPr>
+              </a:lvl5pPr>
+              <a:lvl6pPr marL="2286000" indent="0">
+                <a:defRPr sz="1100">
+                  <a:solidFill>
+                    <a:schemeClr val="dk1"/>
+                  </a:solidFill>
+                  <a:latin typeface="+mn-lt"/>
+                  <a:ea typeface="+mn-ea"/>
+                  <a:cs typeface="+mn-cs"/>
+                </a:defRPr>
+              </a:lvl6pPr>
+              <a:lvl7pPr marL="2743200" indent="0">
+                <a:defRPr sz="1100">
+                  <a:solidFill>
+                    <a:schemeClr val="dk1"/>
+                  </a:solidFill>
+                  <a:latin typeface="+mn-lt"/>
+                  <a:ea typeface="+mn-ea"/>
+                  <a:cs typeface="+mn-cs"/>
+                </a:defRPr>
+              </a:lvl7pPr>
+              <a:lvl8pPr marL="3200400" indent="0">
+                <a:defRPr sz="1100">
+                  <a:solidFill>
+                    <a:schemeClr val="dk1"/>
+                  </a:solidFill>
+                  <a:latin typeface="+mn-lt"/>
+                  <a:ea typeface="+mn-ea"/>
+                  <a:cs typeface="+mn-cs"/>
+                </a:defRPr>
+              </a:lvl8pPr>
+              <a:lvl9pPr marL="3657600" indent="0">
+                <a:defRPr sz="1100">
+                  <a:solidFill>
+                    <a:schemeClr val="dk1"/>
+                  </a:solidFill>
+                  <a:latin typeface="+mn-lt"/>
+                  <a:ea typeface="+mn-ea"/>
+                  <a:cs typeface="+mn-cs"/>
+                </a:defRPr>
+              </a:lvl9pPr>
+            </a:lstStyle>
+            <a:p>
+              <a:pPr algn="l"/>
+              <a:r>
+                <a:rPr kumimoji="1" lang="ja-JP" altLang="en-US" sz="1200" b="1">
+                  <a:solidFill>
+                    <a:srgbClr val="FF0000"/>
+                  </a:solidFill>
+                </a:rPr>
+                <a:t>⑥エネミー</a:t>
+              </a:r>
+              <a:endParaRPr kumimoji="1" lang="en-US" altLang="ja-JP" sz="1200" b="1">
+                <a:solidFill>
+                  <a:srgbClr val="FF0000"/>
+                </a:solidFill>
+              </a:endParaRPr>
+            </a:p>
+            <a:p>
+              <a:pPr algn="l"/>
+              <a:r>
+                <a:rPr kumimoji="1" lang="ja-JP" altLang="en-US" sz="1200" b="1">
+                  <a:solidFill>
+                    <a:srgbClr val="FF0000"/>
+                  </a:solidFill>
+                </a:rPr>
+                <a:t>　能力値欄</a:t>
+              </a:r>
+            </a:p>
+          </p:txBody>
+        </p:sp>
+        <p:cxnSp>
+          <p:nvCxnSpPr>
+            <p:cNvPr id="24" name="直線矢印コネクタ 23">
+              <a:extLst>
+                <a:ext uri="{FF2B5EF4-FFF2-40B4-BE49-F238E27FC236}">
+                  <a16:creationId xmlns:a16="http://schemas.microsoft.com/office/drawing/2014/main" id="{278AFAF8-C95B-67C7-A036-591C56A19F4E}"/>
+                </a:ext>
+              </a:extLst>
+            </p:cNvPr>
+            <p:cNvCxnSpPr>
+              <a:stCxn id="23" idx="1"/>
+              <a:endCxn id="22" idx="3"/>
+            </p:cNvCxnSpPr>
+            <p:nvPr/>
+          </p:nvCxnSpPr>
+          <p:spPr>
+            <a:xfrm flipH="1">
+              <a:off x="22206460" y="8533128"/>
+              <a:ext cx="274619" cy="4097"/>
+            </a:xfrm>
+            <a:prstGeom prst="straightConnector1">
+              <a:avLst/>
+            </a:prstGeom>
+            <a:ln w="28575">
+              <a:solidFill>
+                <a:srgbClr val="FF0000"/>
+              </a:solidFill>
+              <a:tailEnd type="triangle"/>
+            </a:ln>
+          </p:spPr>
+          <p:style>
+            <a:lnRef idx="2">
+              <a:schemeClr val="accent1"/>
+            </a:lnRef>
+            <a:fillRef idx="0">
+              <a:schemeClr val="accent1"/>
+            </a:fillRef>
+            <a:effectRef idx="1">
+              <a:schemeClr val="accent1"/>
+            </a:effectRef>
+            <a:fontRef idx="minor">
+              <a:schemeClr val="tx1"/>
+            </a:fontRef>
+          </p:style>
+        </p:cxnSp>
+      </p:grpSp>
+    </p:spTree>
+    <p:extLst>
+      <p:ext uri="{BB962C8B-B14F-4D97-AF65-F5344CB8AC3E}">
+        <p14:creationId xmlns:p14="http://schemas.microsoft.com/office/powerpoint/2010/main" val="3940630575"/>
+      </p:ext>
+    </p:extLst>
+  </p:cSld>
+  <p:clrMapOvr>
+    <a:masterClrMapping/>
+  </p:clrMapOvr>
+</p:sld>
+</file>
+
+<file path=ppt/slides/slide12.xml><?xml version="1.0" encoding="utf-8"?>
+<p:sld xmlns:a="http://schemas.openxmlformats.org/drawingml/2006/main" xmlns:r="http://schemas.openxmlformats.org/officeDocument/2006/relationships" xmlns:p="http://schemas.openxmlformats.org/presentationml/2006/main">
+  <p:cSld>
+    <p:spTree>
+      <p:nvGrpSpPr>
+        <p:cNvPr id="1" name=""/>
+        <p:cNvGrpSpPr/>
+        <p:nvPr/>
+      </p:nvGrpSpPr>
+      <p:grpSpPr>
+        <a:xfrm>
+          <a:off x="0" y="0"/>
+          <a:ext cx="0" cy="0"/>
+          <a:chOff x="0" y="0"/>
+          <a:chExt cx="0" cy="0"/>
+        </a:xfrm>
+      </p:grpSpPr>
+      <p:grpSp>
+        <p:nvGrpSpPr>
+          <p:cNvPr id="4" name="グループ化 3">
+            <a:extLst>
+              <a:ext uri="{FF2B5EF4-FFF2-40B4-BE49-F238E27FC236}">
+                <a16:creationId xmlns:a16="http://schemas.microsoft.com/office/drawing/2014/main" id="{D34AD894-73F6-D0BE-9775-55BC5794939C}"/>
+              </a:ext>
+            </a:extLst>
+          </p:cNvPr>
+          <p:cNvGrpSpPr/>
+          <p:nvPr/>
+        </p:nvGrpSpPr>
+        <p:grpSpPr>
+          <a:xfrm>
+            <a:off x="-1333175" y="-3888427"/>
+            <a:ext cx="11210374" cy="15739754"/>
+            <a:chOff x="0" y="292551"/>
+            <a:chExt cx="11615187" cy="13120379"/>
+          </a:xfrm>
+        </p:grpSpPr>
+        <p:sp>
+          <p:nvSpPr>
+            <p:cNvPr id="28" name="正方形/長方形 27">
+              <a:extLst>
+                <a:ext uri="{FF2B5EF4-FFF2-40B4-BE49-F238E27FC236}">
+                  <a16:creationId xmlns:a16="http://schemas.microsoft.com/office/drawing/2014/main" id="{82EFC521-04B3-A544-B2A4-7B412D68067E}"/>
+                </a:ext>
+              </a:extLst>
+            </p:cNvPr>
+            <p:cNvSpPr/>
+            <p:nvPr/>
+          </p:nvSpPr>
+          <p:spPr>
+            <a:xfrm>
+              <a:off x="0" y="292551"/>
+              <a:ext cx="11615187" cy="13120379"/>
+            </a:xfrm>
+            <a:prstGeom prst="rect">
+              <a:avLst/>
+            </a:prstGeom>
+            <a:ln>
+              <a:noFill/>
+            </a:ln>
+          </p:spPr>
+          <p:style>
+            <a:lnRef idx="2">
+              <a:schemeClr val="dk1"/>
+            </a:lnRef>
+            <a:fillRef idx="1">
+              <a:schemeClr val="lt1"/>
+            </a:fillRef>
+            <a:effectRef idx="0">
+              <a:schemeClr val="dk1"/>
+            </a:effectRef>
+            <a:fontRef idx="minor">
+              <a:schemeClr val="dk1"/>
+            </a:fontRef>
+          </p:style>
+          <p:txBody>
+            <a:bodyPr wrap="square" rtlCol="0" anchor="ctr"/>
+            <a:lstStyle>
+              <a:defPPr>
+                <a:defRPr lang="ja-JP"/>
+              </a:defPPr>
+              <a:lvl1pPr marL="0" indent="0" algn="l" defTabSz="914400" rtl="0" eaLnBrk="1" latinLnBrk="0" hangingPunct="1">
+                <a:defRPr kumimoji="1" sz="1800" kern="1200">
+                  <a:solidFill>
+                    <a:schemeClr val="dk1"/>
+                  </a:solidFill>
+                  <a:latin typeface="+mn-lt"/>
+                  <a:ea typeface="+mn-ea"/>
+                  <a:cs typeface="+mn-cs"/>
+                </a:defRPr>
+              </a:lvl1pPr>
+              <a:lvl2pPr marL="457200" indent="0" algn="l" defTabSz="914400" rtl="0" eaLnBrk="1" latinLnBrk="0" hangingPunct="1">
+                <a:defRPr kumimoji="1" sz="1800" kern="1200">
+                  <a:solidFill>
+                    <a:schemeClr val="dk1"/>
+                  </a:solidFill>
+                  <a:latin typeface="+mn-lt"/>
+                  <a:ea typeface="+mn-ea"/>
+                  <a:cs typeface="+mn-cs"/>
+                </a:defRPr>
+              </a:lvl2pPr>
+              <a:lvl3pPr marL="914400" indent="0" algn="l" defTabSz="914400" rtl="0" eaLnBrk="1" latinLnBrk="0" hangingPunct="1">
+                <a:defRPr kumimoji="1" sz="1800" kern="1200">
+                  <a:solidFill>
+                    <a:schemeClr val="dk1"/>
+                  </a:solidFill>
+                  <a:latin typeface="+mn-lt"/>
+                  <a:ea typeface="+mn-ea"/>
+                  <a:cs typeface="+mn-cs"/>
+                </a:defRPr>
+              </a:lvl3pPr>
+              <a:lvl4pPr marL="1371600" indent="0" algn="l" defTabSz="914400" rtl="0" eaLnBrk="1" latinLnBrk="0" hangingPunct="1">
+                <a:defRPr kumimoji="1" sz="1800" kern="1200">
+                  <a:solidFill>
+                    <a:schemeClr val="dk1"/>
+                  </a:solidFill>
+                  <a:latin typeface="+mn-lt"/>
+                  <a:ea typeface="+mn-ea"/>
+                  <a:cs typeface="+mn-cs"/>
+                </a:defRPr>
+              </a:lvl4pPr>
+              <a:lvl5pPr marL="1828800" indent="0" algn="l" defTabSz="914400" rtl="0" eaLnBrk="1" latinLnBrk="0" hangingPunct="1">
+                <a:defRPr kumimoji="1" sz="1800" kern="1200">
+                  <a:solidFill>
+                    <a:schemeClr val="dk1"/>
+                  </a:solidFill>
+                  <a:latin typeface="+mn-lt"/>
+                  <a:ea typeface="+mn-ea"/>
+                  <a:cs typeface="+mn-cs"/>
+                </a:defRPr>
+              </a:lvl5pPr>
+              <a:lvl6pPr marL="2286000" indent="0" algn="l" defTabSz="914400" rtl="0" eaLnBrk="1" latinLnBrk="0" hangingPunct="1">
+                <a:defRPr kumimoji="1" sz="1800" kern="1200">
+                  <a:solidFill>
+                    <a:schemeClr val="dk1"/>
+                  </a:solidFill>
+                  <a:latin typeface="+mn-lt"/>
+                  <a:ea typeface="+mn-ea"/>
+                  <a:cs typeface="+mn-cs"/>
+                </a:defRPr>
+              </a:lvl6pPr>
+              <a:lvl7pPr marL="2743200" indent="0" algn="l" defTabSz="914400" rtl="0" eaLnBrk="1" latinLnBrk="0" hangingPunct="1">
+                <a:defRPr kumimoji="1" sz="1800" kern="1200">
+                  <a:solidFill>
+                    <a:schemeClr val="dk1"/>
+                  </a:solidFill>
+                  <a:latin typeface="+mn-lt"/>
+                  <a:ea typeface="+mn-ea"/>
+                  <a:cs typeface="+mn-cs"/>
+                </a:defRPr>
+              </a:lvl7pPr>
+              <a:lvl8pPr marL="3200400" indent="0" algn="l" defTabSz="914400" rtl="0" eaLnBrk="1" latinLnBrk="0" hangingPunct="1">
+                <a:defRPr kumimoji="1" sz="1800" kern="1200">
+                  <a:solidFill>
+                    <a:schemeClr val="dk1"/>
+                  </a:solidFill>
+                  <a:latin typeface="+mn-lt"/>
+                  <a:ea typeface="+mn-ea"/>
+                  <a:cs typeface="+mn-cs"/>
+                </a:defRPr>
+              </a:lvl8pPr>
+              <a:lvl9pPr marL="3657600" indent="0" algn="l" defTabSz="914400" rtl="0" eaLnBrk="1" latinLnBrk="0" hangingPunct="1">
+                <a:defRPr kumimoji="1" sz="1800" kern="1200">
+                  <a:solidFill>
+                    <a:schemeClr val="dk1"/>
+                  </a:solidFill>
+                  <a:latin typeface="+mn-lt"/>
+                  <a:ea typeface="+mn-ea"/>
+                  <a:cs typeface="+mn-cs"/>
+                </a:defRPr>
+              </a:lvl9pPr>
+            </a:lstStyle>
+            <a:p>
+              <a:pPr algn="ctr"/>
+              <a:endParaRPr kumimoji="1" lang="ja-JP" altLang="en-US"/>
+            </a:p>
+          </p:txBody>
+        </p:sp>
+        <p:grpSp>
+          <p:nvGrpSpPr>
+            <p:cNvPr id="29" name="グループ化 28">
+              <a:extLst>
+                <a:ext uri="{FF2B5EF4-FFF2-40B4-BE49-F238E27FC236}">
+                  <a16:creationId xmlns:a16="http://schemas.microsoft.com/office/drawing/2014/main" id="{E6105164-CEE3-8735-000F-E6787D601891}"/>
+                </a:ext>
+              </a:extLst>
+            </p:cNvPr>
+            <p:cNvGrpSpPr/>
+            <p:nvPr/>
+          </p:nvGrpSpPr>
+          <p:grpSpPr>
+            <a:xfrm>
+              <a:off x="1461406" y="852684"/>
+              <a:ext cx="8749542" cy="12248694"/>
+              <a:chOff x="1461406" y="852684"/>
+              <a:chExt cx="10601325" cy="14944725"/>
+            </a:xfrm>
+          </p:grpSpPr>
+          <p:pic>
+            <p:nvPicPr>
+              <p:cNvPr id="43" name="図 42">
+                <a:extLst>
+                  <a:ext uri="{FF2B5EF4-FFF2-40B4-BE49-F238E27FC236}">
+                    <a16:creationId xmlns:a16="http://schemas.microsoft.com/office/drawing/2014/main" id="{6386A049-800B-303C-8321-70665D467BA7}"/>
+                  </a:ext>
+                </a:extLst>
+              </p:cNvPr>
+              <p:cNvPicPr>
+                <a:picLocks noChangeAspect="1"/>
+              </p:cNvPicPr>
+              <p:nvPr/>
+            </p:nvPicPr>
+            <p:blipFill rotWithShape="1">
+              <a:blip r:embed="rId2">
+                <a:alphaModFix/>
+              </a:blip>
+              <a:srcRect l="3250" t="13128" r="4513"/>
+              <a:stretch>
+                <a:fillRect/>
+              </a:stretch>
+            </p:blipFill>
+            <p:spPr>
+              <a:xfrm>
+                <a:off x="1461406" y="852684"/>
+                <a:ext cx="10544175" cy="7564017"/>
+              </a:xfrm>
+              <a:prstGeom prst="rect">
+                <a:avLst/>
+              </a:prstGeom>
+            </p:spPr>
+          </p:pic>
+          <p:pic>
+            <p:nvPicPr>
+              <p:cNvPr id="44" name="図 43">
+                <a:extLst>
+                  <a:ext uri="{FF2B5EF4-FFF2-40B4-BE49-F238E27FC236}">
+                    <a16:creationId xmlns:a16="http://schemas.microsoft.com/office/drawing/2014/main" id="{B46A3AEA-0088-3F49-C5A2-2D610BACF850}"/>
+                  </a:ext>
+                </a:extLst>
+              </p:cNvPr>
+              <p:cNvPicPr>
+                <a:picLocks noChangeAspect="1"/>
+              </p:cNvPicPr>
+              <p:nvPr/>
+            </p:nvPicPr>
+            <p:blipFill rotWithShape="1">
+              <a:blip r:embed="rId3">
+                <a:alphaModFix/>
+              </a:blip>
+              <a:srcRect l="5255" t="15043" r="6156"/>
+              <a:stretch>
+                <a:fillRect/>
+              </a:stretch>
+            </p:blipFill>
+            <p:spPr>
+              <a:xfrm>
+                <a:off x="1556656" y="6706749"/>
+                <a:ext cx="10439400" cy="7299923"/>
+              </a:xfrm>
+              <a:prstGeom prst="rect">
+                <a:avLst/>
+              </a:prstGeom>
+            </p:spPr>
+          </p:pic>
+          <p:pic>
+            <p:nvPicPr>
+              <p:cNvPr id="45" name="図 44">
+                <a:extLst>
+                  <a:ext uri="{FF2B5EF4-FFF2-40B4-BE49-F238E27FC236}">
+                    <a16:creationId xmlns:a16="http://schemas.microsoft.com/office/drawing/2014/main" id="{E415B419-0472-861A-0E05-E2E5FA0C8931}"/>
+                  </a:ext>
+                </a:extLst>
+              </p:cNvPr>
+              <p:cNvPicPr>
+                <a:picLocks noChangeAspect="1"/>
+              </p:cNvPicPr>
+              <p:nvPr/>
+            </p:nvPicPr>
+            <p:blipFill rotWithShape="1">
+              <a:blip r:embed="rId4">
+                <a:alphaModFix/>
+              </a:blip>
+              <a:srcRect l="6479" t="14685" r="1118" b="4147"/>
+              <a:stretch>
+                <a:fillRect/>
+              </a:stretch>
+            </p:blipFill>
+            <p:spPr>
+              <a:xfrm>
+                <a:off x="1499506" y="10980141"/>
+                <a:ext cx="10563225" cy="4817268"/>
+              </a:xfrm>
+              <a:prstGeom prst="rect">
+                <a:avLst/>
+              </a:prstGeom>
+            </p:spPr>
+          </p:pic>
+        </p:grpSp>
+        <p:grpSp>
+          <p:nvGrpSpPr>
+            <p:cNvPr id="30" name="グループ化 29">
+              <a:extLst>
+                <a:ext uri="{FF2B5EF4-FFF2-40B4-BE49-F238E27FC236}">
+                  <a16:creationId xmlns:a16="http://schemas.microsoft.com/office/drawing/2014/main" id="{D6271005-8921-50A2-0D01-7789575A2374}"/>
+                </a:ext>
+              </a:extLst>
+            </p:cNvPr>
+            <p:cNvGrpSpPr/>
+            <p:nvPr/>
+          </p:nvGrpSpPr>
+          <p:grpSpPr>
+            <a:xfrm>
+              <a:off x="1490601" y="1205473"/>
+              <a:ext cx="8519813" cy="11694801"/>
+              <a:chOff x="1490601" y="1205472"/>
+              <a:chExt cx="8725065" cy="10223473"/>
+            </a:xfrm>
+          </p:grpSpPr>
+          <p:sp>
+            <p:nvSpPr>
+              <p:cNvPr id="33" name="正方形/長方形 32">
+                <a:extLst>
+                  <a:ext uri="{FF2B5EF4-FFF2-40B4-BE49-F238E27FC236}">
+                    <a16:creationId xmlns:a16="http://schemas.microsoft.com/office/drawing/2014/main" id="{3B945DF4-4807-DD83-FE6D-A22E020EA53E}"/>
+                  </a:ext>
+                </a:extLst>
+              </p:cNvPr>
+              <p:cNvSpPr/>
+              <p:nvPr/>
+            </p:nvSpPr>
+            <p:spPr>
+              <a:xfrm>
+                <a:off x="1490601" y="1243188"/>
+                <a:ext cx="2578686" cy="357256"/>
+              </a:xfrm>
+              <a:prstGeom prst="rect">
+                <a:avLst/>
+              </a:prstGeom>
+              <a:noFill/>
+              <a:ln w="28575">
+                <a:solidFill>
+                  <a:srgbClr val="FF0000"/>
+                </a:solidFill>
+                <a:prstDash val="solid"/>
+              </a:ln>
+            </p:spPr>
+            <p:style>
+              <a:lnRef idx="2">
+                <a:schemeClr val="accent6"/>
+              </a:lnRef>
+              <a:fillRef idx="1">
+                <a:schemeClr val="lt1"/>
+              </a:fillRef>
+              <a:effectRef idx="0">
+                <a:schemeClr val="accent6"/>
+              </a:effectRef>
+              <a:fontRef idx="minor">
+                <a:schemeClr val="dk1"/>
+              </a:fontRef>
+            </p:style>
+            <p:txBody>
+              <a:bodyPr rtlCol="0" anchor="t"/>
+              <a:lstStyle>
+                <a:lvl1pPr marL="0" indent="0">
+                  <a:defRPr sz="1100">
+                    <a:solidFill>
+                      <a:schemeClr val="dk1"/>
+                    </a:solidFill>
+                    <a:latin typeface="+mn-lt"/>
+                    <a:ea typeface="+mn-ea"/>
+                    <a:cs typeface="+mn-cs"/>
+                  </a:defRPr>
+                </a:lvl1pPr>
+                <a:lvl2pPr marL="457200" indent="0">
+                  <a:defRPr sz="1100">
+                    <a:solidFill>
+                      <a:schemeClr val="dk1"/>
+                    </a:solidFill>
+                    <a:latin typeface="+mn-lt"/>
+                    <a:ea typeface="+mn-ea"/>
+                    <a:cs typeface="+mn-cs"/>
+                  </a:defRPr>
+                </a:lvl2pPr>
+                <a:lvl3pPr marL="914400" indent="0">
+                  <a:defRPr sz="1100">
+                    <a:solidFill>
+                      <a:schemeClr val="dk1"/>
+                    </a:solidFill>
+                    <a:latin typeface="+mn-lt"/>
+                    <a:ea typeface="+mn-ea"/>
+                    <a:cs typeface="+mn-cs"/>
+                  </a:defRPr>
+                </a:lvl3pPr>
+                <a:lvl4pPr marL="1371600" indent="0">
+                  <a:defRPr sz="1100">
+                    <a:solidFill>
+                      <a:schemeClr val="dk1"/>
+                    </a:solidFill>
+                    <a:latin typeface="+mn-lt"/>
+                    <a:ea typeface="+mn-ea"/>
+                    <a:cs typeface="+mn-cs"/>
+                  </a:defRPr>
+                </a:lvl4pPr>
+                <a:lvl5pPr marL="1828800" indent="0">
+                  <a:defRPr sz="1100">
+                    <a:solidFill>
+                      <a:schemeClr val="dk1"/>
+                    </a:solidFill>
+                    <a:latin typeface="+mn-lt"/>
+                    <a:ea typeface="+mn-ea"/>
+                    <a:cs typeface="+mn-cs"/>
+                  </a:defRPr>
+                </a:lvl5pPr>
+                <a:lvl6pPr marL="2286000" indent="0">
+                  <a:defRPr sz="1100">
+                    <a:solidFill>
+                      <a:schemeClr val="dk1"/>
+                    </a:solidFill>
+                    <a:latin typeface="+mn-lt"/>
+                    <a:ea typeface="+mn-ea"/>
+                    <a:cs typeface="+mn-cs"/>
+                  </a:defRPr>
+                </a:lvl6pPr>
+                <a:lvl7pPr marL="2743200" indent="0">
+                  <a:defRPr sz="1100">
+                    <a:solidFill>
+                      <a:schemeClr val="dk1"/>
+                    </a:solidFill>
+                    <a:latin typeface="+mn-lt"/>
+                    <a:ea typeface="+mn-ea"/>
+                    <a:cs typeface="+mn-cs"/>
+                  </a:defRPr>
+                </a:lvl7pPr>
+                <a:lvl8pPr marL="3200400" indent="0">
+                  <a:defRPr sz="1100">
+                    <a:solidFill>
+                      <a:schemeClr val="dk1"/>
+                    </a:solidFill>
+                    <a:latin typeface="+mn-lt"/>
+                    <a:ea typeface="+mn-ea"/>
+                    <a:cs typeface="+mn-cs"/>
+                  </a:defRPr>
+                </a:lvl8pPr>
+                <a:lvl9pPr marL="3657600" indent="0">
+                  <a:defRPr sz="1100">
+                    <a:solidFill>
+                      <a:schemeClr val="dk1"/>
+                    </a:solidFill>
+                    <a:latin typeface="+mn-lt"/>
+                    <a:ea typeface="+mn-ea"/>
+                    <a:cs typeface="+mn-cs"/>
+                  </a:defRPr>
+                </a:lvl9pPr>
+              </a:lstStyle>
+              <a:p>
+                <a:pPr algn="l"/>
+                <a:endParaRPr kumimoji="1" lang="ja-JP" altLang="en-US" sz="1100"/>
+              </a:p>
+            </p:txBody>
+          </p:sp>
+          <p:sp>
+            <p:nvSpPr>
+              <p:cNvPr id="34" name="正方形/長方形 33">
+                <a:extLst>
+                  <a:ext uri="{FF2B5EF4-FFF2-40B4-BE49-F238E27FC236}">
+                    <a16:creationId xmlns:a16="http://schemas.microsoft.com/office/drawing/2014/main" id="{8DAE86F7-ED40-C142-4AD4-A28F50B75186}"/>
+                  </a:ext>
+                </a:extLst>
+              </p:cNvPr>
+              <p:cNvSpPr/>
+              <p:nvPr/>
+            </p:nvSpPr>
+            <p:spPr>
+              <a:xfrm>
+                <a:off x="1706733" y="2219182"/>
+                <a:ext cx="8508933" cy="1805236"/>
+              </a:xfrm>
+              <a:prstGeom prst="rect">
+                <a:avLst/>
+              </a:prstGeom>
+              <a:noFill/>
+              <a:ln w="28575">
+                <a:solidFill>
+                  <a:srgbClr val="FF0000"/>
+                </a:solidFill>
+                <a:prstDash val="solid"/>
+              </a:ln>
+            </p:spPr>
+            <p:style>
+              <a:lnRef idx="2">
+                <a:schemeClr val="accent6"/>
+              </a:lnRef>
+              <a:fillRef idx="1">
+                <a:schemeClr val="lt1"/>
+              </a:fillRef>
+              <a:effectRef idx="0">
+                <a:schemeClr val="accent6"/>
+              </a:effectRef>
+              <a:fontRef idx="minor">
+                <a:schemeClr val="dk1"/>
+              </a:fontRef>
+            </p:style>
+            <p:txBody>
+              <a:bodyPr rtlCol="0" anchor="t"/>
+              <a:lstStyle>
+                <a:lvl1pPr marL="0" indent="0">
+                  <a:defRPr sz="1100">
+                    <a:solidFill>
+                      <a:schemeClr val="dk1"/>
+                    </a:solidFill>
+                    <a:latin typeface="+mn-lt"/>
+                    <a:ea typeface="+mn-ea"/>
+                    <a:cs typeface="+mn-cs"/>
+                  </a:defRPr>
+                </a:lvl1pPr>
+                <a:lvl2pPr marL="457200" indent="0">
+                  <a:defRPr sz="1100">
+                    <a:solidFill>
+                      <a:schemeClr val="dk1"/>
+                    </a:solidFill>
+                    <a:latin typeface="+mn-lt"/>
+                    <a:ea typeface="+mn-ea"/>
+                    <a:cs typeface="+mn-cs"/>
+                  </a:defRPr>
+                </a:lvl2pPr>
+                <a:lvl3pPr marL="914400" indent="0">
+                  <a:defRPr sz="1100">
+                    <a:solidFill>
+                      <a:schemeClr val="dk1"/>
+                    </a:solidFill>
+                    <a:latin typeface="+mn-lt"/>
+                    <a:ea typeface="+mn-ea"/>
+                    <a:cs typeface="+mn-cs"/>
+                  </a:defRPr>
+                </a:lvl3pPr>
+                <a:lvl4pPr marL="1371600" indent="0">
+                  <a:defRPr sz="1100">
+                    <a:solidFill>
+                      <a:schemeClr val="dk1"/>
+                    </a:solidFill>
+                    <a:latin typeface="+mn-lt"/>
+                    <a:ea typeface="+mn-ea"/>
+                    <a:cs typeface="+mn-cs"/>
+                  </a:defRPr>
+                </a:lvl4pPr>
+                <a:lvl5pPr marL="1828800" indent="0">
+                  <a:defRPr sz="1100">
+                    <a:solidFill>
+                      <a:schemeClr val="dk1"/>
+                    </a:solidFill>
+                    <a:latin typeface="+mn-lt"/>
+                    <a:ea typeface="+mn-ea"/>
+                    <a:cs typeface="+mn-cs"/>
+                  </a:defRPr>
+                </a:lvl5pPr>
+                <a:lvl6pPr marL="2286000" indent="0">
+                  <a:defRPr sz="1100">
+                    <a:solidFill>
+                      <a:schemeClr val="dk1"/>
+                    </a:solidFill>
+                    <a:latin typeface="+mn-lt"/>
+                    <a:ea typeface="+mn-ea"/>
+                    <a:cs typeface="+mn-cs"/>
+                  </a:defRPr>
+                </a:lvl6pPr>
+                <a:lvl7pPr marL="2743200" indent="0">
+                  <a:defRPr sz="1100">
+                    <a:solidFill>
+                      <a:schemeClr val="dk1"/>
+                    </a:solidFill>
+                    <a:latin typeface="+mn-lt"/>
+                    <a:ea typeface="+mn-ea"/>
+                    <a:cs typeface="+mn-cs"/>
+                  </a:defRPr>
+                </a:lvl7pPr>
+                <a:lvl8pPr marL="3200400" indent="0">
+                  <a:defRPr sz="1100">
+                    <a:solidFill>
+                      <a:schemeClr val="dk1"/>
+                    </a:solidFill>
+                    <a:latin typeface="+mn-lt"/>
+                    <a:ea typeface="+mn-ea"/>
+                    <a:cs typeface="+mn-cs"/>
+                  </a:defRPr>
+                </a:lvl8pPr>
+                <a:lvl9pPr marL="3657600" indent="0">
+                  <a:defRPr sz="1100">
+                    <a:solidFill>
+                      <a:schemeClr val="dk1"/>
+                    </a:solidFill>
+                    <a:latin typeface="+mn-lt"/>
+                    <a:ea typeface="+mn-ea"/>
+                    <a:cs typeface="+mn-cs"/>
+                  </a:defRPr>
+                </a:lvl9pPr>
+              </a:lstStyle>
+              <a:p>
+                <a:pPr algn="l"/>
+                <a:endParaRPr kumimoji="1" lang="ja-JP" altLang="en-US" sz="1100"/>
+              </a:p>
+            </p:txBody>
+          </p:sp>
+          <p:cxnSp>
+            <p:nvCxnSpPr>
+              <p:cNvPr id="36" name="直線矢印コネクタ 35">
+                <a:extLst>
+                  <a:ext uri="{FF2B5EF4-FFF2-40B4-BE49-F238E27FC236}">
+                    <a16:creationId xmlns:a16="http://schemas.microsoft.com/office/drawing/2014/main" id="{85E61E1C-106C-37E9-C0A1-BBA69266BEAA}"/>
+                  </a:ext>
+                </a:extLst>
+              </p:cNvPr>
+              <p:cNvCxnSpPr>
+                <a:stCxn id="37" idx="1"/>
+                <a:endCxn id="33" idx="3"/>
+              </p:cNvCxnSpPr>
+              <p:nvPr/>
+            </p:nvCxnSpPr>
+            <p:spPr>
+              <a:xfrm flipH="1">
+                <a:off x="4069287" y="1419525"/>
+                <a:ext cx="624821" cy="2291"/>
+              </a:xfrm>
+              <a:prstGeom prst="straightConnector1">
+                <a:avLst/>
+              </a:prstGeom>
+              <a:ln w="28575">
+                <a:solidFill>
+                  <a:srgbClr val="FF0000"/>
+                </a:solidFill>
+                <a:tailEnd type="triangle"/>
+              </a:ln>
+            </p:spPr>
+            <p:style>
+              <a:lnRef idx="2">
+                <a:schemeClr val="accent1"/>
+              </a:lnRef>
+              <a:fillRef idx="0">
+                <a:schemeClr val="accent1"/>
+              </a:fillRef>
+              <a:effectRef idx="1">
+                <a:schemeClr val="accent1"/>
+              </a:effectRef>
+              <a:fontRef idx="minor">
+                <a:schemeClr val="tx1"/>
+              </a:fontRef>
+            </p:style>
+          </p:cxnSp>
+          <p:sp>
+            <p:nvSpPr>
+              <p:cNvPr id="37" name="正方形/長方形 36">
+                <a:extLst>
+                  <a:ext uri="{FF2B5EF4-FFF2-40B4-BE49-F238E27FC236}">
+                    <a16:creationId xmlns:a16="http://schemas.microsoft.com/office/drawing/2014/main" id="{B8AB9CC2-1187-A04F-8E08-52F86CC8C888}"/>
+                  </a:ext>
+                </a:extLst>
+              </p:cNvPr>
+              <p:cNvSpPr/>
+              <p:nvPr/>
+            </p:nvSpPr>
+            <p:spPr>
+              <a:xfrm>
+                <a:off x="4694108" y="1205472"/>
+                <a:ext cx="1508759" cy="428106"/>
+              </a:xfrm>
+              <a:prstGeom prst="rect">
+                <a:avLst/>
+              </a:prstGeom>
+              <a:ln w="28575">
+                <a:solidFill>
+                  <a:srgbClr val="FF0000"/>
+                </a:solidFill>
+              </a:ln>
+            </p:spPr>
+            <p:style>
+              <a:lnRef idx="2">
+                <a:schemeClr val="accent6"/>
+              </a:lnRef>
+              <a:fillRef idx="1">
+                <a:schemeClr val="lt1"/>
+              </a:fillRef>
+              <a:effectRef idx="0">
+                <a:schemeClr val="accent6"/>
+              </a:effectRef>
+              <a:fontRef idx="minor">
+                <a:schemeClr val="dk1"/>
+              </a:fontRef>
+            </p:style>
+            <p:txBody>
+              <a:bodyPr rtlCol="0" anchor="ctr"/>
+              <a:lstStyle>
+                <a:lvl1pPr marL="0" indent="0">
+                  <a:defRPr sz="1100">
+                    <a:solidFill>
+                      <a:schemeClr val="dk1"/>
+                    </a:solidFill>
+                    <a:latin typeface="+mn-lt"/>
+                    <a:ea typeface="+mn-ea"/>
+                    <a:cs typeface="+mn-cs"/>
+                  </a:defRPr>
+                </a:lvl1pPr>
+                <a:lvl2pPr marL="457200" indent="0">
+                  <a:defRPr sz="1100">
+                    <a:solidFill>
+                      <a:schemeClr val="dk1"/>
+                    </a:solidFill>
+                    <a:latin typeface="+mn-lt"/>
+                    <a:ea typeface="+mn-ea"/>
+                    <a:cs typeface="+mn-cs"/>
+                  </a:defRPr>
+                </a:lvl2pPr>
+                <a:lvl3pPr marL="914400" indent="0">
+                  <a:defRPr sz="1100">
+                    <a:solidFill>
+                      <a:schemeClr val="dk1"/>
+                    </a:solidFill>
+                    <a:latin typeface="+mn-lt"/>
+                    <a:ea typeface="+mn-ea"/>
+                    <a:cs typeface="+mn-cs"/>
+                  </a:defRPr>
+                </a:lvl3pPr>
+                <a:lvl4pPr marL="1371600" indent="0">
+                  <a:defRPr sz="1100">
+                    <a:solidFill>
+                      <a:schemeClr val="dk1"/>
+                    </a:solidFill>
+                    <a:latin typeface="+mn-lt"/>
+                    <a:ea typeface="+mn-ea"/>
+                    <a:cs typeface="+mn-cs"/>
+                  </a:defRPr>
+                </a:lvl4pPr>
+                <a:lvl5pPr marL="1828800" indent="0">
+                  <a:defRPr sz="1100">
+                    <a:solidFill>
+                      <a:schemeClr val="dk1"/>
+                    </a:solidFill>
+                    <a:latin typeface="+mn-lt"/>
+                    <a:ea typeface="+mn-ea"/>
+                    <a:cs typeface="+mn-cs"/>
+                  </a:defRPr>
+                </a:lvl5pPr>
+                <a:lvl6pPr marL="2286000" indent="0">
+                  <a:defRPr sz="1100">
+                    <a:solidFill>
+                      <a:schemeClr val="dk1"/>
+                    </a:solidFill>
+                    <a:latin typeface="+mn-lt"/>
+                    <a:ea typeface="+mn-ea"/>
+                    <a:cs typeface="+mn-cs"/>
+                  </a:defRPr>
+                </a:lvl6pPr>
+                <a:lvl7pPr marL="2743200" indent="0">
+                  <a:defRPr sz="1100">
+                    <a:solidFill>
+                      <a:schemeClr val="dk1"/>
+                    </a:solidFill>
+                    <a:latin typeface="+mn-lt"/>
+                    <a:ea typeface="+mn-ea"/>
+                    <a:cs typeface="+mn-cs"/>
+                  </a:defRPr>
+                </a:lvl7pPr>
+                <a:lvl8pPr marL="3200400" indent="0">
+                  <a:defRPr sz="1100">
+                    <a:solidFill>
+                      <a:schemeClr val="dk1"/>
+                    </a:solidFill>
+                    <a:latin typeface="+mn-lt"/>
+                    <a:ea typeface="+mn-ea"/>
+                    <a:cs typeface="+mn-cs"/>
+                  </a:defRPr>
+                </a:lvl8pPr>
+                <a:lvl9pPr marL="3657600" indent="0">
+                  <a:defRPr sz="1100">
+                    <a:solidFill>
+                      <a:schemeClr val="dk1"/>
+                    </a:solidFill>
+                    <a:latin typeface="+mn-lt"/>
+                    <a:ea typeface="+mn-ea"/>
+                    <a:cs typeface="+mn-cs"/>
+                  </a:defRPr>
+                </a:lvl9pPr>
+              </a:lstStyle>
+              <a:p>
+                <a:pPr algn="l"/>
+                <a:r>
+                  <a:rPr kumimoji="1" lang="ja-JP" altLang="en-US" sz="1200" b="1">
+                    <a:solidFill>
+                      <a:srgbClr val="FF0000"/>
+                    </a:solidFill>
+                  </a:rPr>
+                  <a:t>①タブの切り替え</a:t>
+                </a:r>
+              </a:p>
+            </p:txBody>
+          </p:sp>
+          <p:sp>
+            <p:nvSpPr>
+              <p:cNvPr id="38" name="正方形/長方形 37">
+                <a:extLst>
+                  <a:ext uri="{FF2B5EF4-FFF2-40B4-BE49-F238E27FC236}">
+                    <a16:creationId xmlns:a16="http://schemas.microsoft.com/office/drawing/2014/main" id="{A124CAFD-D2FD-5BB6-3A36-0F7C7E54BC8B}"/>
+                  </a:ext>
+                </a:extLst>
+              </p:cNvPr>
+              <p:cNvSpPr/>
+              <p:nvPr/>
+            </p:nvSpPr>
+            <p:spPr>
+              <a:xfrm>
+                <a:off x="7331741" y="1579168"/>
+                <a:ext cx="1127378" cy="420485"/>
+              </a:xfrm>
+              <a:prstGeom prst="rect">
+                <a:avLst/>
+              </a:prstGeom>
+              <a:ln w="28575">
+                <a:solidFill>
+                  <a:srgbClr val="FF0000"/>
+                </a:solidFill>
+              </a:ln>
+            </p:spPr>
+            <p:style>
+              <a:lnRef idx="2">
+                <a:schemeClr val="accent6"/>
+              </a:lnRef>
+              <a:fillRef idx="1">
+                <a:schemeClr val="lt1"/>
+              </a:fillRef>
+              <a:effectRef idx="0">
+                <a:schemeClr val="accent6"/>
+              </a:effectRef>
+              <a:fontRef idx="minor">
+                <a:schemeClr val="dk1"/>
+              </a:fontRef>
+            </p:style>
+            <p:txBody>
+              <a:bodyPr rtlCol="0" anchor="ctr"/>
+              <a:lstStyle>
+                <a:lvl1pPr marL="0" indent="0">
+                  <a:defRPr sz="1100">
+                    <a:solidFill>
+                      <a:schemeClr val="dk1"/>
+                    </a:solidFill>
+                    <a:latin typeface="+mn-lt"/>
+                    <a:ea typeface="+mn-ea"/>
+                    <a:cs typeface="+mn-cs"/>
+                  </a:defRPr>
+                </a:lvl1pPr>
+                <a:lvl2pPr marL="457200" indent="0">
+                  <a:defRPr sz="1100">
+                    <a:solidFill>
+                      <a:schemeClr val="dk1"/>
+                    </a:solidFill>
+                    <a:latin typeface="+mn-lt"/>
+                    <a:ea typeface="+mn-ea"/>
+                    <a:cs typeface="+mn-cs"/>
+                  </a:defRPr>
+                </a:lvl2pPr>
+                <a:lvl3pPr marL="914400" indent="0">
+                  <a:defRPr sz="1100">
+                    <a:solidFill>
+                      <a:schemeClr val="dk1"/>
+                    </a:solidFill>
+                    <a:latin typeface="+mn-lt"/>
+                    <a:ea typeface="+mn-ea"/>
+                    <a:cs typeface="+mn-cs"/>
+                  </a:defRPr>
+                </a:lvl3pPr>
+                <a:lvl4pPr marL="1371600" indent="0">
+                  <a:defRPr sz="1100">
+                    <a:solidFill>
+                      <a:schemeClr val="dk1"/>
+                    </a:solidFill>
+                    <a:latin typeface="+mn-lt"/>
+                    <a:ea typeface="+mn-ea"/>
+                    <a:cs typeface="+mn-cs"/>
+                  </a:defRPr>
+                </a:lvl4pPr>
+                <a:lvl5pPr marL="1828800" indent="0">
+                  <a:defRPr sz="1100">
+                    <a:solidFill>
+                      <a:schemeClr val="dk1"/>
+                    </a:solidFill>
+                    <a:latin typeface="+mn-lt"/>
+                    <a:ea typeface="+mn-ea"/>
+                    <a:cs typeface="+mn-cs"/>
+                  </a:defRPr>
+                </a:lvl5pPr>
+                <a:lvl6pPr marL="2286000" indent="0">
+                  <a:defRPr sz="1100">
+                    <a:solidFill>
+                      <a:schemeClr val="dk1"/>
+                    </a:solidFill>
+                    <a:latin typeface="+mn-lt"/>
+                    <a:ea typeface="+mn-ea"/>
+                    <a:cs typeface="+mn-cs"/>
+                  </a:defRPr>
+                </a:lvl6pPr>
+                <a:lvl7pPr marL="2743200" indent="0">
+                  <a:defRPr sz="1100">
+                    <a:solidFill>
+                      <a:schemeClr val="dk1"/>
+                    </a:solidFill>
+                    <a:latin typeface="+mn-lt"/>
+                    <a:ea typeface="+mn-ea"/>
+                    <a:cs typeface="+mn-cs"/>
+                  </a:defRPr>
+                </a:lvl7pPr>
+                <a:lvl8pPr marL="3200400" indent="0">
+                  <a:defRPr sz="1100">
+                    <a:solidFill>
+                      <a:schemeClr val="dk1"/>
+                    </a:solidFill>
+                    <a:latin typeface="+mn-lt"/>
+                    <a:ea typeface="+mn-ea"/>
+                    <a:cs typeface="+mn-cs"/>
+                  </a:defRPr>
+                </a:lvl8pPr>
+                <a:lvl9pPr marL="3657600" indent="0">
+                  <a:defRPr sz="1100">
+                    <a:solidFill>
+                      <a:schemeClr val="dk1"/>
+                    </a:solidFill>
+                    <a:latin typeface="+mn-lt"/>
+                    <a:ea typeface="+mn-ea"/>
+                    <a:cs typeface="+mn-cs"/>
+                  </a:defRPr>
+                </a:lvl9pPr>
+              </a:lstStyle>
+              <a:p>
+                <a:pPr algn="l"/>
+                <a:r>
+                  <a:rPr kumimoji="1" lang="ja-JP" altLang="en-US" sz="1200" b="1">
+                    <a:solidFill>
+                      <a:srgbClr val="FF0000"/>
+                    </a:solidFill>
+                  </a:rPr>
+                  <a:t>②特技の例</a:t>
+                </a:r>
+              </a:p>
+            </p:txBody>
+          </p:sp>
+          <p:sp>
+            <p:nvSpPr>
+              <p:cNvPr id="41" name="正方形/長方形 40">
+                <a:extLst>
+                  <a:ext uri="{FF2B5EF4-FFF2-40B4-BE49-F238E27FC236}">
+                    <a16:creationId xmlns:a16="http://schemas.microsoft.com/office/drawing/2014/main" id="{4921E6F5-3086-5ACA-48AE-1EE7A949899F}"/>
+                  </a:ext>
+                </a:extLst>
+              </p:cNvPr>
+              <p:cNvSpPr/>
+              <p:nvPr/>
+            </p:nvSpPr>
+            <p:spPr>
+              <a:xfrm>
+                <a:off x="1660048" y="4115497"/>
+                <a:ext cx="8555618" cy="7313448"/>
+              </a:xfrm>
+              <a:prstGeom prst="rect">
+                <a:avLst/>
+              </a:prstGeom>
+              <a:noFill/>
+              <a:ln w="28575">
+                <a:solidFill>
+                  <a:srgbClr val="FF0000"/>
+                </a:solidFill>
+                <a:prstDash val="solid"/>
+              </a:ln>
+            </p:spPr>
+            <p:style>
+              <a:lnRef idx="2">
+                <a:schemeClr val="accent6"/>
+              </a:lnRef>
+              <a:fillRef idx="1">
+                <a:schemeClr val="lt1"/>
+              </a:fillRef>
+              <a:effectRef idx="0">
+                <a:schemeClr val="accent6"/>
+              </a:effectRef>
+              <a:fontRef idx="minor">
+                <a:schemeClr val="dk1"/>
+              </a:fontRef>
+            </p:style>
+            <p:txBody>
+              <a:bodyPr rtlCol="0" anchor="t"/>
+              <a:lstStyle>
+                <a:lvl1pPr marL="0" indent="0">
+                  <a:defRPr sz="1100">
+                    <a:solidFill>
+                      <a:schemeClr val="dk1"/>
+                    </a:solidFill>
+                    <a:latin typeface="+mn-lt"/>
+                    <a:ea typeface="+mn-ea"/>
+                    <a:cs typeface="+mn-cs"/>
+                  </a:defRPr>
+                </a:lvl1pPr>
+                <a:lvl2pPr marL="457200" indent="0">
+                  <a:defRPr sz="1100">
+                    <a:solidFill>
+                      <a:schemeClr val="dk1"/>
+                    </a:solidFill>
+                    <a:latin typeface="+mn-lt"/>
+                    <a:ea typeface="+mn-ea"/>
+                    <a:cs typeface="+mn-cs"/>
+                  </a:defRPr>
+                </a:lvl2pPr>
+                <a:lvl3pPr marL="914400" indent="0">
+                  <a:defRPr sz="1100">
+                    <a:solidFill>
+                      <a:schemeClr val="dk1"/>
+                    </a:solidFill>
+                    <a:latin typeface="+mn-lt"/>
+                    <a:ea typeface="+mn-ea"/>
+                    <a:cs typeface="+mn-cs"/>
+                  </a:defRPr>
+                </a:lvl3pPr>
+                <a:lvl4pPr marL="1371600" indent="0">
+                  <a:defRPr sz="1100">
+                    <a:solidFill>
+                      <a:schemeClr val="dk1"/>
+                    </a:solidFill>
+                    <a:latin typeface="+mn-lt"/>
+                    <a:ea typeface="+mn-ea"/>
+                    <a:cs typeface="+mn-cs"/>
+                  </a:defRPr>
+                </a:lvl4pPr>
+                <a:lvl5pPr marL="1828800" indent="0">
+                  <a:defRPr sz="1100">
+                    <a:solidFill>
+                      <a:schemeClr val="dk1"/>
+                    </a:solidFill>
+                    <a:latin typeface="+mn-lt"/>
+                    <a:ea typeface="+mn-ea"/>
+                    <a:cs typeface="+mn-cs"/>
+                  </a:defRPr>
+                </a:lvl5pPr>
+                <a:lvl6pPr marL="2286000" indent="0">
+                  <a:defRPr sz="1100">
+                    <a:solidFill>
+                      <a:schemeClr val="dk1"/>
+                    </a:solidFill>
+                    <a:latin typeface="+mn-lt"/>
+                    <a:ea typeface="+mn-ea"/>
+                    <a:cs typeface="+mn-cs"/>
+                  </a:defRPr>
+                </a:lvl6pPr>
+                <a:lvl7pPr marL="2743200" indent="0">
+                  <a:defRPr sz="1100">
+                    <a:solidFill>
+                      <a:schemeClr val="dk1"/>
+                    </a:solidFill>
+                    <a:latin typeface="+mn-lt"/>
+                    <a:ea typeface="+mn-ea"/>
+                    <a:cs typeface="+mn-cs"/>
+                  </a:defRPr>
+                </a:lvl7pPr>
+                <a:lvl8pPr marL="3200400" indent="0">
+                  <a:defRPr sz="1100">
+                    <a:solidFill>
+                      <a:schemeClr val="dk1"/>
+                    </a:solidFill>
+                    <a:latin typeface="+mn-lt"/>
+                    <a:ea typeface="+mn-ea"/>
+                    <a:cs typeface="+mn-cs"/>
+                  </a:defRPr>
+                </a:lvl8pPr>
+                <a:lvl9pPr marL="3657600" indent="0">
+                  <a:defRPr sz="1100">
+                    <a:solidFill>
+                      <a:schemeClr val="dk1"/>
+                    </a:solidFill>
+                    <a:latin typeface="+mn-lt"/>
+                    <a:ea typeface="+mn-ea"/>
+                    <a:cs typeface="+mn-cs"/>
+                  </a:defRPr>
+                </a:lvl9pPr>
+              </a:lstStyle>
+              <a:p>
+                <a:pPr algn="l"/>
+                <a:endParaRPr kumimoji="1" lang="ja-JP" altLang="en-US" sz="1100"/>
+              </a:p>
+            </p:txBody>
+          </p:sp>
+          <p:sp>
+            <p:nvSpPr>
+              <p:cNvPr id="9" name="正方形/長方形 8">
+                <a:extLst>
+                  <a:ext uri="{FF2B5EF4-FFF2-40B4-BE49-F238E27FC236}">
+                    <a16:creationId xmlns:a16="http://schemas.microsoft.com/office/drawing/2014/main" id="{01CE8B1A-7AC7-9D1E-10CE-ACA3234A23B3}"/>
+                  </a:ext>
+                </a:extLst>
+              </p:cNvPr>
+              <p:cNvSpPr/>
+              <p:nvPr/>
+            </p:nvSpPr>
+            <p:spPr>
+              <a:xfrm>
+                <a:off x="7577779" y="3433269"/>
+                <a:ext cx="1166633" cy="420485"/>
+              </a:xfrm>
+              <a:prstGeom prst="rect">
+                <a:avLst/>
+              </a:prstGeom>
+              <a:ln w="28575">
+                <a:solidFill>
+                  <a:srgbClr val="FF0000"/>
+                </a:solidFill>
+              </a:ln>
+            </p:spPr>
+            <p:style>
+              <a:lnRef idx="2">
+                <a:schemeClr val="accent6"/>
+              </a:lnRef>
+              <a:fillRef idx="1">
+                <a:schemeClr val="lt1"/>
+              </a:fillRef>
+              <a:effectRef idx="0">
+                <a:schemeClr val="accent6"/>
+              </a:effectRef>
+              <a:fontRef idx="minor">
+                <a:schemeClr val="dk1"/>
+              </a:fontRef>
+            </p:style>
+            <p:txBody>
+              <a:bodyPr rtlCol="0" anchor="ctr"/>
+              <a:lstStyle>
+                <a:lvl1pPr marL="0" indent="0">
+                  <a:defRPr sz="1100">
+                    <a:solidFill>
+                      <a:schemeClr val="dk1"/>
+                    </a:solidFill>
+                    <a:latin typeface="+mn-lt"/>
+                    <a:ea typeface="+mn-ea"/>
+                    <a:cs typeface="+mn-cs"/>
+                  </a:defRPr>
+                </a:lvl1pPr>
+                <a:lvl2pPr marL="457200" indent="0">
+                  <a:defRPr sz="1100">
+                    <a:solidFill>
+                      <a:schemeClr val="dk1"/>
+                    </a:solidFill>
+                    <a:latin typeface="+mn-lt"/>
+                    <a:ea typeface="+mn-ea"/>
+                    <a:cs typeface="+mn-cs"/>
+                  </a:defRPr>
+                </a:lvl2pPr>
+                <a:lvl3pPr marL="914400" indent="0">
+                  <a:defRPr sz="1100">
+                    <a:solidFill>
+                      <a:schemeClr val="dk1"/>
+                    </a:solidFill>
+                    <a:latin typeface="+mn-lt"/>
+                    <a:ea typeface="+mn-ea"/>
+                    <a:cs typeface="+mn-cs"/>
+                  </a:defRPr>
+                </a:lvl3pPr>
+                <a:lvl4pPr marL="1371600" indent="0">
+                  <a:defRPr sz="1100">
+                    <a:solidFill>
+                      <a:schemeClr val="dk1"/>
+                    </a:solidFill>
+                    <a:latin typeface="+mn-lt"/>
+                    <a:ea typeface="+mn-ea"/>
+                    <a:cs typeface="+mn-cs"/>
+                  </a:defRPr>
+                </a:lvl4pPr>
+                <a:lvl5pPr marL="1828800" indent="0">
+                  <a:defRPr sz="1100">
+                    <a:solidFill>
+                      <a:schemeClr val="dk1"/>
+                    </a:solidFill>
+                    <a:latin typeface="+mn-lt"/>
+                    <a:ea typeface="+mn-ea"/>
+                    <a:cs typeface="+mn-cs"/>
+                  </a:defRPr>
+                </a:lvl5pPr>
+                <a:lvl6pPr marL="2286000" indent="0">
+                  <a:defRPr sz="1100">
+                    <a:solidFill>
+                      <a:schemeClr val="dk1"/>
+                    </a:solidFill>
+                    <a:latin typeface="+mn-lt"/>
+                    <a:ea typeface="+mn-ea"/>
+                    <a:cs typeface="+mn-cs"/>
+                  </a:defRPr>
+                </a:lvl6pPr>
+                <a:lvl7pPr marL="2743200" indent="0">
+                  <a:defRPr sz="1100">
+                    <a:solidFill>
+                      <a:schemeClr val="dk1"/>
+                    </a:solidFill>
+                    <a:latin typeface="+mn-lt"/>
+                    <a:ea typeface="+mn-ea"/>
+                    <a:cs typeface="+mn-cs"/>
+                  </a:defRPr>
+                </a:lvl7pPr>
+                <a:lvl8pPr marL="3200400" indent="0">
+                  <a:defRPr sz="1100">
+                    <a:solidFill>
+                      <a:schemeClr val="dk1"/>
+                    </a:solidFill>
+                    <a:latin typeface="+mn-lt"/>
+                    <a:ea typeface="+mn-ea"/>
+                    <a:cs typeface="+mn-cs"/>
+                  </a:defRPr>
+                </a:lvl8pPr>
+                <a:lvl9pPr marL="3657600" indent="0">
+                  <a:defRPr sz="1100">
+                    <a:solidFill>
+                      <a:schemeClr val="dk1"/>
+                    </a:solidFill>
+                    <a:latin typeface="+mn-lt"/>
+                    <a:ea typeface="+mn-ea"/>
+                    <a:cs typeface="+mn-cs"/>
+                  </a:defRPr>
+                </a:lvl9pPr>
+              </a:lstStyle>
+              <a:p>
+                <a:pPr algn="l"/>
+                <a:r>
+                  <a:rPr kumimoji="1" lang="ja-JP" altLang="en-US" sz="1200" b="1" dirty="0">
+                    <a:solidFill>
+                      <a:srgbClr val="FF0000"/>
+                    </a:solidFill>
+                  </a:rPr>
+                  <a:t>③特技の入力</a:t>
+                </a:r>
+              </a:p>
+            </p:txBody>
+          </p:sp>
+        </p:grpSp>
+        <p:cxnSp>
+          <p:nvCxnSpPr>
+            <p:cNvPr id="31" name="直線矢印コネクタ 30">
+              <a:extLst>
+                <a:ext uri="{FF2B5EF4-FFF2-40B4-BE49-F238E27FC236}">
+                  <a16:creationId xmlns:a16="http://schemas.microsoft.com/office/drawing/2014/main" id="{3FC586A4-3CD7-A80B-E848-D2A716BB9339}"/>
+                </a:ext>
+              </a:extLst>
+            </p:cNvPr>
+            <p:cNvCxnSpPr/>
+            <p:nvPr/>
+          </p:nvCxnSpPr>
+          <p:spPr>
+            <a:xfrm>
+              <a:off x="7733432" y="2112706"/>
+              <a:ext cx="491" cy="237122"/>
+            </a:xfrm>
+            <a:prstGeom prst="straightConnector1">
+              <a:avLst/>
+            </a:prstGeom>
+            <a:ln w="28575">
+              <a:solidFill>
+                <a:srgbClr val="FF0000"/>
+              </a:solidFill>
+              <a:tailEnd type="triangle"/>
+            </a:ln>
+          </p:spPr>
+          <p:style>
+            <a:lnRef idx="2">
+              <a:schemeClr val="accent1"/>
+            </a:lnRef>
+            <a:fillRef idx="0">
+              <a:schemeClr val="accent1"/>
+            </a:fillRef>
+            <a:effectRef idx="1">
+              <a:schemeClr val="accent1"/>
+            </a:effectRef>
+            <a:fontRef idx="minor">
+              <a:schemeClr val="tx1"/>
+            </a:fontRef>
+          </p:style>
+        </p:cxnSp>
+        <p:cxnSp>
+          <p:nvCxnSpPr>
+            <p:cNvPr id="32" name="直線矢印コネクタ 31">
+              <a:extLst>
+                <a:ext uri="{FF2B5EF4-FFF2-40B4-BE49-F238E27FC236}">
+                  <a16:creationId xmlns:a16="http://schemas.microsoft.com/office/drawing/2014/main" id="{F48CF319-1286-8005-6CDE-1348AEF0F36D}"/>
+                </a:ext>
+              </a:extLst>
+            </p:cNvPr>
+            <p:cNvCxnSpPr>
+              <a:cxnSpLocks/>
+            </p:cNvCxnSpPr>
+            <p:nvPr/>
+          </p:nvCxnSpPr>
+          <p:spPr>
+            <a:xfrm>
+              <a:off x="7990518" y="4244300"/>
+              <a:ext cx="0" cy="296011"/>
+            </a:xfrm>
+            <a:prstGeom prst="straightConnector1">
+              <a:avLst/>
+            </a:prstGeom>
+            <a:ln w="28575">
+              <a:solidFill>
+                <a:srgbClr val="FF0000"/>
+              </a:solidFill>
+              <a:tailEnd type="triangle"/>
+            </a:ln>
+          </p:spPr>
+          <p:style>
+            <a:lnRef idx="2">
+              <a:schemeClr val="accent1"/>
+            </a:lnRef>
+            <a:fillRef idx="0">
+              <a:schemeClr val="accent1"/>
+            </a:fillRef>
+            <a:effectRef idx="1">
+              <a:schemeClr val="accent1"/>
+            </a:effectRef>
+            <a:fontRef idx="minor">
+              <a:schemeClr val="tx1"/>
+            </a:fontRef>
+          </p:style>
+        </p:cxnSp>
+      </p:grpSp>
+    </p:spTree>
+    <p:extLst>
+      <p:ext uri="{BB962C8B-B14F-4D97-AF65-F5344CB8AC3E}">
+        <p14:creationId xmlns:p14="http://schemas.microsoft.com/office/powerpoint/2010/main" val="1896282833"/>
+      </p:ext>
+    </p:extLst>
+  </p:cSld>
+  <p:clrMapOvr>
+    <a:masterClrMapping/>
+  </p:clrMapOvr>
+</p:sld>
+</file>
+
+<file path=ppt/slides/slide13.xml><?xml version="1.0" encoding="utf-8"?>
+<p:sld xmlns:a="http://schemas.openxmlformats.org/drawingml/2006/main" xmlns:r="http://schemas.openxmlformats.org/officeDocument/2006/relationships" xmlns:p="http://schemas.openxmlformats.org/presentationml/2006/main">
+  <p:cSld>
+    <p:spTree>
+      <p:nvGrpSpPr>
+        <p:cNvPr id="1" name="">
+          <a:extLst>
+            <a:ext uri="{FF2B5EF4-FFF2-40B4-BE49-F238E27FC236}">
               <a16:creationId xmlns:a16="http://schemas.microsoft.com/office/drawing/2014/main" id="{10095EDD-5C5D-A834-0D34-A6661AABE3FD}"/>
             </a:ext>
           </a:extLst>
@@ -5319,7 +7853,7 @@
 </p:sld>
 </file>
 
-<file path=ppt/slides/slide11.xml><?xml version="1.0" encoding="utf-8"?>
+<file path=ppt/slides/slide14.xml><?xml version="1.0" encoding="utf-8"?>
 <p:sld xmlns:a="http://schemas.openxmlformats.org/drawingml/2006/main" xmlns:r="http://schemas.openxmlformats.org/officeDocument/2006/relationships" xmlns:p="http://schemas.openxmlformats.org/presentationml/2006/main">
   <p:cSld>
     <p:spTree>
@@ -5989,7 +8523,7 @@
 </p:sld>
 </file>
 
-<file path=ppt/slides/slide12.xml><?xml version="1.0" encoding="utf-8"?>
+<file path=ppt/slides/slide15.xml><?xml version="1.0" encoding="utf-8"?>
 <p:sld xmlns:a="http://schemas.openxmlformats.org/drawingml/2006/main" xmlns:r="http://schemas.openxmlformats.org/officeDocument/2006/relationships" xmlns:p="http://schemas.openxmlformats.org/presentationml/2006/main">
   <p:cSld>
     <p:spTree>
@@ -8556,7 +11090,7 @@
 </p:sld>
 </file>
 
-<file path=ppt/slides/slide13.xml><?xml version="1.0" encoding="utf-8"?>
+<file path=ppt/slides/slide16.xml><?xml version="1.0" encoding="utf-8"?>
 <p:sld xmlns:a="http://schemas.openxmlformats.org/drawingml/2006/main" xmlns:r="http://schemas.openxmlformats.org/officeDocument/2006/relationships" xmlns:p="http://schemas.openxmlformats.org/presentationml/2006/main">
   <p:cSld>
     <p:spTree>
@@ -10840,7 +13374,7 @@
 </p:sld>
 </file>
 
-<file path=ppt/slides/slide14.xml><?xml version="1.0" encoding="utf-8"?>
+<file path=ppt/slides/slide17.xml><?xml version="1.0" encoding="utf-8"?>
 <p:sld xmlns:a="http://schemas.openxmlformats.org/drawingml/2006/main" xmlns:r="http://schemas.openxmlformats.org/officeDocument/2006/relationships" xmlns:p="http://schemas.openxmlformats.org/presentationml/2006/main">
   <p:cSld>
     <p:spTree>
@@ -11418,7 +13952,7 @@
 </p:sld>
 </file>
 
-<file path=ppt/slides/slide15.xml><?xml version="1.0" encoding="utf-8"?>
+<file path=ppt/slides/slide18.xml><?xml version="1.0" encoding="utf-8"?>
 <p:sld xmlns:a="http://schemas.openxmlformats.org/drawingml/2006/main" xmlns:r="http://schemas.openxmlformats.org/officeDocument/2006/relationships" xmlns:p="http://schemas.openxmlformats.org/presentationml/2006/main">
   <p:cSld>
     <p:spTree>
@@ -11995,7 +14529,7 @@
 </p:sld>
 </file>
 
-<file path=ppt/slides/slide16.xml><?xml version="1.0" encoding="utf-8"?>
+<file path=ppt/slides/slide19.xml><?xml version="1.0" encoding="utf-8"?>
 <p:sld xmlns:a="http://schemas.openxmlformats.org/drawingml/2006/main" xmlns:r="http://schemas.openxmlformats.org/officeDocument/2006/relationships" xmlns:p="http://schemas.openxmlformats.org/presentationml/2006/main">
   <p:cSld>
     <p:spTree>
@@ -13869,7 +16403,7 @@
         </p:nvGrpSpPr>
         <p:grpSpPr>
           <a:xfrm>
-            <a:off x="456796" y="-6352185"/>
+            <a:off x="-310120" y="-6470172"/>
             <a:ext cx="11278408" cy="19562370"/>
             <a:chOff x="0" y="0"/>
             <a:chExt cx="11441694" cy="19024888"/>
@@ -16243,6 +18777,663 @@
   <p:cSld>
     <p:spTree>
       <p:nvGrpSpPr>
+        <p:cNvPr id="1" name=""/>
+        <p:cNvGrpSpPr/>
+        <p:nvPr/>
+      </p:nvGrpSpPr>
+      <p:grpSpPr>
+        <a:xfrm>
+          <a:off x="0" y="0"/>
+          <a:ext cx="0" cy="0"/>
+          <a:chOff x="0" y="0"/>
+          <a:chExt cx="0" cy="0"/>
+        </a:xfrm>
+      </p:grpSpPr>
+      <p:grpSp>
+        <p:nvGrpSpPr>
+          <p:cNvPr id="50" name="グループ化 49">
+            <a:extLst>
+              <a:ext uri="{FF2B5EF4-FFF2-40B4-BE49-F238E27FC236}">
+                <a16:creationId xmlns:a16="http://schemas.microsoft.com/office/drawing/2014/main" id="{D9BD2DDE-D380-086C-06B9-971205894338}"/>
+              </a:ext>
+            </a:extLst>
+          </p:cNvPr>
+          <p:cNvGrpSpPr/>
+          <p:nvPr/>
+        </p:nvGrpSpPr>
+        <p:grpSpPr>
+          <a:xfrm>
+            <a:off x="2545557" y="-2378679"/>
+            <a:ext cx="7013517" cy="15705559"/>
+            <a:chOff x="2545557" y="-2378679"/>
+            <a:chExt cx="7013517" cy="15705559"/>
+          </a:xfrm>
+        </p:grpSpPr>
+        <p:pic>
+          <p:nvPicPr>
+            <p:cNvPr id="25" name="図 24">
+              <a:extLst>
+                <a:ext uri="{FF2B5EF4-FFF2-40B4-BE49-F238E27FC236}">
+                  <a16:creationId xmlns:a16="http://schemas.microsoft.com/office/drawing/2014/main" id="{2A3C3AB3-454B-934F-A125-56AD37D3BA84}"/>
+                </a:ext>
+              </a:extLst>
+            </p:cNvPr>
+            <p:cNvPicPr>
+              <a:picLocks noChangeAspect="1"/>
+            </p:cNvPicPr>
+            <p:nvPr/>
+          </p:nvPicPr>
+          <p:blipFill>
+            <a:blip r:embed="rId2"/>
+            <a:srcRect l="20878" t="12904" r="21613"/>
+            <a:stretch>
+              <a:fillRect/>
+            </a:stretch>
+          </p:blipFill>
+          <p:spPr>
+            <a:xfrm>
+              <a:off x="2545557" y="-2378679"/>
+              <a:ext cx="7011386" cy="5707604"/>
+            </a:xfrm>
+            <a:prstGeom prst="rect">
+              <a:avLst/>
+            </a:prstGeom>
+          </p:spPr>
+        </p:pic>
+        <p:pic>
+          <p:nvPicPr>
+            <p:cNvPr id="29" name="図 28">
+              <a:extLst>
+                <a:ext uri="{FF2B5EF4-FFF2-40B4-BE49-F238E27FC236}">
+                  <a16:creationId xmlns:a16="http://schemas.microsoft.com/office/drawing/2014/main" id="{DCD2B91D-A529-2F05-8253-C6505020D97F}"/>
+                </a:ext>
+              </a:extLst>
+            </p:cNvPr>
+            <p:cNvPicPr>
+              <a:picLocks noChangeAspect="1"/>
+            </p:cNvPicPr>
+            <p:nvPr/>
+          </p:nvPicPr>
+          <p:blipFill>
+            <a:blip r:embed="rId3"/>
+            <a:srcRect l="20878" t="18033" r="21613"/>
+            <a:stretch>
+              <a:fillRect/>
+            </a:stretch>
+          </p:blipFill>
+          <p:spPr>
+            <a:xfrm>
+              <a:off x="2547124" y="2400301"/>
+              <a:ext cx="7011407" cy="5371613"/>
+            </a:xfrm>
+            <a:prstGeom prst="rect">
+              <a:avLst/>
+            </a:prstGeom>
+          </p:spPr>
+        </p:pic>
+        <p:pic>
+          <p:nvPicPr>
+            <p:cNvPr id="31" name="図 30">
+              <a:extLst>
+                <a:ext uri="{FF2B5EF4-FFF2-40B4-BE49-F238E27FC236}">
+                  <a16:creationId xmlns:a16="http://schemas.microsoft.com/office/drawing/2014/main" id="{6D0EB867-6FF5-8789-5823-B03AD1D7D28C}"/>
+                </a:ext>
+              </a:extLst>
+            </p:cNvPr>
+            <p:cNvPicPr>
+              <a:picLocks noChangeAspect="1"/>
+            </p:cNvPicPr>
+            <p:nvPr/>
+          </p:nvPicPr>
+          <p:blipFill>
+            <a:blip r:embed="rId4"/>
+            <a:srcRect l="20878" t="11685" r="21613" b="1"/>
+            <a:stretch>
+              <a:fillRect/>
+            </a:stretch>
+          </p:blipFill>
+          <p:spPr>
+            <a:xfrm>
+              <a:off x="2547134" y="5797550"/>
+              <a:ext cx="7011402" cy="5787479"/>
+            </a:xfrm>
+            <a:prstGeom prst="rect">
+              <a:avLst/>
+            </a:prstGeom>
+          </p:spPr>
+        </p:pic>
+        <p:pic>
+          <p:nvPicPr>
+            <p:cNvPr id="35" name="図 34">
+              <a:extLst>
+                <a:ext uri="{FF2B5EF4-FFF2-40B4-BE49-F238E27FC236}">
+                  <a16:creationId xmlns:a16="http://schemas.microsoft.com/office/drawing/2014/main" id="{56E27F2A-3857-262B-1963-0E0E3AF0FFD2}"/>
+                </a:ext>
+              </a:extLst>
+            </p:cNvPr>
+            <p:cNvPicPr>
+              <a:picLocks noChangeAspect="1"/>
+            </p:cNvPicPr>
+            <p:nvPr/>
+          </p:nvPicPr>
+          <p:blipFill>
+            <a:blip r:embed="rId5"/>
+            <a:srcRect l="20880" t="18532" r="21612" b="2520"/>
+            <a:stretch>
+              <a:fillRect/>
+            </a:stretch>
+          </p:blipFill>
+          <p:spPr>
+            <a:xfrm>
+              <a:off x="2545558" y="8151789"/>
+              <a:ext cx="7013516" cy="5175091"/>
+            </a:xfrm>
+            <a:prstGeom prst="rect">
+              <a:avLst/>
+            </a:prstGeom>
+          </p:spPr>
+        </p:pic>
+      </p:grpSp>
+      <p:cxnSp>
+        <p:nvCxnSpPr>
+          <p:cNvPr id="37" name="直線コネクタ 36">
+            <a:extLst>
+              <a:ext uri="{FF2B5EF4-FFF2-40B4-BE49-F238E27FC236}">
+                <a16:creationId xmlns:a16="http://schemas.microsoft.com/office/drawing/2014/main" id="{FC46516C-2A89-C244-695C-196ED88B5DE5}"/>
+              </a:ext>
+            </a:extLst>
+          </p:cNvPr>
+          <p:cNvCxnSpPr>
+            <a:cxnSpLocks/>
+          </p:cNvCxnSpPr>
+          <p:nvPr/>
+        </p:nvCxnSpPr>
+        <p:spPr>
+          <a:xfrm>
+            <a:off x="2545557" y="-2438400"/>
+            <a:ext cx="0" cy="14382750"/>
+          </a:xfrm>
+          <a:prstGeom prst="line">
+            <a:avLst/>
+          </a:prstGeom>
+          <a:ln w="76200"/>
+        </p:spPr>
+        <p:style>
+          <a:lnRef idx="2">
+            <a:schemeClr val="accent1"/>
+          </a:lnRef>
+          <a:fillRef idx="0">
+            <a:schemeClr val="accent1"/>
+          </a:fillRef>
+          <a:effectRef idx="1">
+            <a:schemeClr val="accent1"/>
+          </a:effectRef>
+          <a:fontRef idx="minor">
+            <a:schemeClr val="tx1"/>
+          </a:fontRef>
+        </p:style>
+      </p:cxnSp>
+      <p:cxnSp>
+        <p:nvCxnSpPr>
+          <p:cNvPr id="40" name="直線コネクタ 39">
+            <a:extLst>
+              <a:ext uri="{FF2B5EF4-FFF2-40B4-BE49-F238E27FC236}">
+                <a16:creationId xmlns:a16="http://schemas.microsoft.com/office/drawing/2014/main" id="{792B71B8-795C-77EC-4ABF-90096F7A6F43}"/>
+              </a:ext>
+            </a:extLst>
+          </p:cNvPr>
+          <p:cNvCxnSpPr>
+            <a:cxnSpLocks/>
+          </p:cNvCxnSpPr>
+          <p:nvPr/>
+        </p:nvCxnSpPr>
+        <p:spPr>
+          <a:xfrm>
+            <a:off x="9556954" y="-2438400"/>
+            <a:ext cx="0" cy="14382750"/>
+          </a:xfrm>
+          <a:prstGeom prst="line">
+            <a:avLst/>
+          </a:prstGeom>
+          <a:ln w="76200"/>
+        </p:spPr>
+        <p:style>
+          <a:lnRef idx="2">
+            <a:schemeClr val="accent1"/>
+          </a:lnRef>
+          <a:fillRef idx="0">
+            <a:schemeClr val="accent1"/>
+          </a:fillRef>
+          <a:effectRef idx="1">
+            <a:schemeClr val="accent1"/>
+          </a:effectRef>
+          <a:fontRef idx="minor">
+            <a:schemeClr val="tx1"/>
+          </a:fontRef>
+        </p:style>
+      </p:cxnSp>
+      <p:cxnSp>
+        <p:nvCxnSpPr>
+          <p:cNvPr id="44" name="直線コネクタ 43">
+            <a:extLst>
+              <a:ext uri="{FF2B5EF4-FFF2-40B4-BE49-F238E27FC236}">
+                <a16:creationId xmlns:a16="http://schemas.microsoft.com/office/drawing/2014/main" id="{0724F746-4E8F-0AEC-337A-25CBDA099778}"/>
+              </a:ext>
+            </a:extLst>
+          </p:cNvPr>
+          <p:cNvCxnSpPr>
+            <a:cxnSpLocks/>
+          </p:cNvCxnSpPr>
+          <p:nvPr/>
+        </p:nvCxnSpPr>
+        <p:spPr>
+          <a:xfrm>
+            <a:off x="2072217" y="845598"/>
+            <a:ext cx="10276996" cy="0"/>
+          </a:xfrm>
+          <a:prstGeom prst="line">
+            <a:avLst/>
+          </a:prstGeom>
+          <a:ln w="9525">
+            <a:solidFill>
+              <a:srgbClr val="FF0000"/>
+            </a:solidFill>
+          </a:ln>
+        </p:spPr>
+        <p:style>
+          <a:lnRef idx="2">
+            <a:schemeClr val="accent1"/>
+          </a:lnRef>
+          <a:fillRef idx="0">
+            <a:schemeClr val="accent1"/>
+          </a:fillRef>
+          <a:effectRef idx="1">
+            <a:schemeClr val="accent1"/>
+          </a:effectRef>
+          <a:fontRef idx="minor">
+            <a:schemeClr val="tx1"/>
+          </a:fontRef>
+        </p:style>
+      </p:cxnSp>
+    </p:spTree>
+    <p:extLst>
+      <p:ext uri="{BB962C8B-B14F-4D97-AF65-F5344CB8AC3E}">
+        <p14:creationId xmlns:p14="http://schemas.microsoft.com/office/powerpoint/2010/main" val="473762481"/>
+      </p:ext>
+    </p:extLst>
+  </p:cSld>
+  <p:clrMapOvr>
+    <a:masterClrMapping/>
+  </p:clrMapOvr>
+</p:sld>
+</file>
+
+<file path=ppt/slides/slide6.xml><?xml version="1.0" encoding="utf-8"?>
+<p:sld xmlns:a="http://schemas.openxmlformats.org/drawingml/2006/main" xmlns:r="http://schemas.openxmlformats.org/officeDocument/2006/relationships" xmlns:p="http://schemas.openxmlformats.org/presentationml/2006/main">
+  <p:cSld>
+    <p:spTree>
+      <p:nvGrpSpPr>
+        <p:cNvPr id="1" name=""/>
+        <p:cNvGrpSpPr/>
+        <p:nvPr/>
+      </p:nvGrpSpPr>
+      <p:grpSpPr>
+        <a:xfrm>
+          <a:off x="0" y="0"/>
+          <a:ext cx="0" cy="0"/>
+          <a:chOff x="0" y="0"/>
+          <a:chExt cx="0" cy="0"/>
+        </a:xfrm>
+      </p:grpSpPr>
+      <p:cxnSp>
+        <p:nvCxnSpPr>
+          <p:cNvPr id="14" name="直線コネクタ 13">
+            <a:extLst>
+              <a:ext uri="{FF2B5EF4-FFF2-40B4-BE49-F238E27FC236}">
+                <a16:creationId xmlns:a16="http://schemas.microsoft.com/office/drawing/2014/main" id="{7F16366F-929C-D376-30C1-644989990B50}"/>
+              </a:ext>
+            </a:extLst>
+          </p:cNvPr>
+          <p:cNvCxnSpPr>
+            <a:cxnSpLocks/>
+          </p:cNvCxnSpPr>
+          <p:nvPr/>
+        </p:nvCxnSpPr>
+        <p:spPr>
+          <a:xfrm>
+            <a:off x="2545557" y="-2438400"/>
+            <a:ext cx="0" cy="14382750"/>
+          </a:xfrm>
+          <a:prstGeom prst="line">
+            <a:avLst/>
+          </a:prstGeom>
+          <a:ln w="76200"/>
+        </p:spPr>
+        <p:style>
+          <a:lnRef idx="2">
+            <a:schemeClr val="accent1"/>
+          </a:lnRef>
+          <a:fillRef idx="0">
+            <a:schemeClr val="accent1"/>
+          </a:fillRef>
+          <a:effectRef idx="1">
+            <a:schemeClr val="accent1"/>
+          </a:effectRef>
+          <a:fontRef idx="minor">
+            <a:schemeClr val="tx1"/>
+          </a:fontRef>
+        </p:style>
+      </p:cxnSp>
+      <p:cxnSp>
+        <p:nvCxnSpPr>
+          <p:cNvPr id="15" name="直線コネクタ 14">
+            <a:extLst>
+              <a:ext uri="{FF2B5EF4-FFF2-40B4-BE49-F238E27FC236}">
+                <a16:creationId xmlns:a16="http://schemas.microsoft.com/office/drawing/2014/main" id="{5B6403A0-7A61-03DF-AA4B-A317CB781957}"/>
+              </a:ext>
+            </a:extLst>
+          </p:cNvPr>
+          <p:cNvCxnSpPr>
+            <a:cxnSpLocks/>
+          </p:cNvCxnSpPr>
+          <p:nvPr/>
+        </p:nvCxnSpPr>
+        <p:spPr>
+          <a:xfrm>
+            <a:off x="9556954" y="-2438400"/>
+            <a:ext cx="0" cy="14382750"/>
+          </a:xfrm>
+          <a:prstGeom prst="line">
+            <a:avLst/>
+          </a:prstGeom>
+          <a:ln w="76200"/>
+        </p:spPr>
+        <p:style>
+          <a:lnRef idx="2">
+            <a:schemeClr val="accent1"/>
+          </a:lnRef>
+          <a:fillRef idx="0">
+            <a:schemeClr val="accent1"/>
+          </a:fillRef>
+          <a:effectRef idx="1">
+            <a:schemeClr val="accent1"/>
+          </a:effectRef>
+          <a:fontRef idx="minor">
+            <a:schemeClr val="tx1"/>
+          </a:fontRef>
+        </p:style>
+      </p:cxnSp>
+      <p:grpSp>
+        <p:nvGrpSpPr>
+          <p:cNvPr id="16" name="グループ化 15">
+            <a:extLst>
+              <a:ext uri="{FF2B5EF4-FFF2-40B4-BE49-F238E27FC236}">
+                <a16:creationId xmlns:a16="http://schemas.microsoft.com/office/drawing/2014/main" id="{A0D2CCB0-3BD7-2E0E-B604-B771EEFDD85A}"/>
+              </a:ext>
+            </a:extLst>
+          </p:cNvPr>
+          <p:cNvGrpSpPr/>
+          <p:nvPr/>
+        </p:nvGrpSpPr>
+        <p:grpSpPr>
+          <a:xfrm>
+            <a:off x="2545555" y="75127"/>
+            <a:ext cx="7011395" cy="10194941"/>
+            <a:chOff x="2545555" y="75127"/>
+            <a:chExt cx="7011395" cy="10194941"/>
+          </a:xfrm>
+        </p:grpSpPr>
+        <p:pic>
+          <p:nvPicPr>
+            <p:cNvPr id="41" name="図 40">
+              <a:extLst>
+                <a:ext uri="{FF2B5EF4-FFF2-40B4-BE49-F238E27FC236}">
+                  <a16:creationId xmlns:a16="http://schemas.microsoft.com/office/drawing/2014/main" id="{EAFAC8EC-3B4C-52C4-651D-8C9963CF71E6}"/>
+                </a:ext>
+              </a:extLst>
+            </p:cNvPr>
+            <p:cNvPicPr>
+              <a:picLocks noChangeAspect="1"/>
+            </p:cNvPicPr>
+            <p:nvPr/>
+          </p:nvPicPr>
+          <p:blipFill>
+            <a:blip r:embed="rId2"/>
+            <a:srcRect l="20879" t="12904" r="21614"/>
+            <a:stretch>
+              <a:fillRect/>
+            </a:stretch>
+          </p:blipFill>
+          <p:spPr>
+            <a:xfrm>
+              <a:off x="2545556" y="75127"/>
+              <a:ext cx="7011393" cy="5707605"/>
+            </a:xfrm>
+            <a:prstGeom prst="rect">
+              <a:avLst/>
+            </a:prstGeom>
+          </p:spPr>
+        </p:pic>
+        <p:pic>
+          <p:nvPicPr>
+            <p:cNvPr id="13" name="図 12">
+              <a:extLst>
+                <a:ext uri="{FF2B5EF4-FFF2-40B4-BE49-F238E27FC236}">
+                  <a16:creationId xmlns:a16="http://schemas.microsoft.com/office/drawing/2014/main" id="{9413DCEF-89E2-15D2-58A1-E670BAA0685C}"/>
+                </a:ext>
+              </a:extLst>
+            </p:cNvPr>
+            <p:cNvPicPr>
+              <a:picLocks noChangeAspect="1"/>
+            </p:cNvPicPr>
+            <p:nvPr/>
+          </p:nvPicPr>
+          <p:blipFill>
+            <a:blip r:embed="rId3"/>
+            <a:srcRect l="20878" t="20627" r="21613" b="4695"/>
+            <a:stretch>
+              <a:fillRect/>
+            </a:stretch>
+          </p:blipFill>
+          <p:spPr>
+            <a:xfrm>
+              <a:off x="2545555" y="5376334"/>
+              <a:ext cx="7011395" cy="4893734"/>
+            </a:xfrm>
+            <a:prstGeom prst="rect">
+              <a:avLst/>
+            </a:prstGeom>
+          </p:spPr>
+        </p:pic>
+      </p:grpSp>
+    </p:spTree>
+    <p:extLst>
+      <p:ext uri="{BB962C8B-B14F-4D97-AF65-F5344CB8AC3E}">
+        <p14:creationId xmlns:p14="http://schemas.microsoft.com/office/powerpoint/2010/main" val="1181273484"/>
+      </p:ext>
+    </p:extLst>
+  </p:cSld>
+  <p:clrMapOvr>
+    <a:masterClrMapping/>
+  </p:clrMapOvr>
+</p:sld>
+</file>
+
+<file path=ppt/slides/slide7.xml><?xml version="1.0" encoding="utf-8"?>
+<p:sld xmlns:a="http://schemas.openxmlformats.org/drawingml/2006/main" xmlns:r="http://schemas.openxmlformats.org/officeDocument/2006/relationships" xmlns:p="http://schemas.openxmlformats.org/presentationml/2006/main">
+  <p:cSld>
+    <p:spTree>
+      <p:nvGrpSpPr>
+        <p:cNvPr id="1" name=""/>
+        <p:cNvGrpSpPr/>
+        <p:nvPr/>
+      </p:nvGrpSpPr>
+      <p:grpSpPr>
+        <a:xfrm>
+          <a:off x="0" y="0"/>
+          <a:ext cx="0" cy="0"/>
+          <a:chOff x="0" y="0"/>
+          <a:chExt cx="0" cy="0"/>
+        </a:xfrm>
+      </p:grpSpPr>
+      <p:cxnSp>
+        <p:nvCxnSpPr>
+          <p:cNvPr id="8" name="直線コネクタ 7">
+            <a:extLst>
+              <a:ext uri="{FF2B5EF4-FFF2-40B4-BE49-F238E27FC236}">
+                <a16:creationId xmlns:a16="http://schemas.microsoft.com/office/drawing/2014/main" id="{C44D8A9D-2071-5677-D60E-255BCFC34E24}"/>
+              </a:ext>
+            </a:extLst>
+          </p:cNvPr>
+          <p:cNvCxnSpPr>
+            <a:cxnSpLocks/>
+          </p:cNvCxnSpPr>
+          <p:nvPr/>
+        </p:nvCxnSpPr>
+        <p:spPr>
+          <a:xfrm>
+            <a:off x="2545557" y="-2438400"/>
+            <a:ext cx="0" cy="14382750"/>
+          </a:xfrm>
+          <a:prstGeom prst="line">
+            <a:avLst/>
+          </a:prstGeom>
+          <a:ln w="76200"/>
+        </p:spPr>
+        <p:style>
+          <a:lnRef idx="2">
+            <a:schemeClr val="accent1"/>
+          </a:lnRef>
+          <a:fillRef idx="0">
+            <a:schemeClr val="accent1"/>
+          </a:fillRef>
+          <a:effectRef idx="1">
+            <a:schemeClr val="accent1"/>
+          </a:effectRef>
+          <a:fontRef idx="minor">
+            <a:schemeClr val="tx1"/>
+          </a:fontRef>
+        </p:style>
+      </p:cxnSp>
+      <p:cxnSp>
+        <p:nvCxnSpPr>
+          <p:cNvPr id="9" name="直線コネクタ 8">
+            <a:extLst>
+              <a:ext uri="{FF2B5EF4-FFF2-40B4-BE49-F238E27FC236}">
+                <a16:creationId xmlns:a16="http://schemas.microsoft.com/office/drawing/2014/main" id="{EA53AC83-AC3A-7258-E2CF-BA445F272F07}"/>
+              </a:ext>
+            </a:extLst>
+          </p:cNvPr>
+          <p:cNvCxnSpPr>
+            <a:cxnSpLocks/>
+          </p:cNvCxnSpPr>
+          <p:nvPr/>
+        </p:nvCxnSpPr>
+        <p:spPr>
+          <a:xfrm>
+            <a:off x="9556954" y="-2438400"/>
+            <a:ext cx="0" cy="14382750"/>
+          </a:xfrm>
+          <a:prstGeom prst="line">
+            <a:avLst/>
+          </a:prstGeom>
+          <a:ln w="76200"/>
+        </p:spPr>
+        <p:style>
+          <a:lnRef idx="2">
+            <a:schemeClr val="accent1"/>
+          </a:lnRef>
+          <a:fillRef idx="0">
+            <a:schemeClr val="accent1"/>
+          </a:fillRef>
+          <a:effectRef idx="1">
+            <a:schemeClr val="accent1"/>
+          </a:effectRef>
+          <a:fontRef idx="minor">
+            <a:schemeClr val="tx1"/>
+          </a:fontRef>
+        </p:style>
+      </p:cxnSp>
+      <p:pic>
+        <p:nvPicPr>
+          <p:cNvPr id="42" name="図 41">
+            <a:extLst>
+              <a:ext uri="{FF2B5EF4-FFF2-40B4-BE49-F238E27FC236}">
+                <a16:creationId xmlns:a16="http://schemas.microsoft.com/office/drawing/2014/main" id="{EEBCC856-D25B-CD91-FD2D-168CDEF4A727}"/>
+              </a:ext>
+            </a:extLst>
+          </p:cNvPr>
+          <p:cNvPicPr>
+            <a:picLocks noChangeAspect="1"/>
+          </p:cNvPicPr>
+          <p:nvPr/>
+        </p:nvPicPr>
+        <p:blipFill>
+          <a:blip r:embed="rId2"/>
+          <a:srcRect l="20879" t="13670" r="21614"/>
+          <a:stretch>
+            <a:fillRect/>
+          </a:stretch>
+        </p:blipFill>
+        <p:spPr>
+          <a:xfrm>
+            <a:off x="2545556" y="-720737"/>
+            <a:ext cx="7011396" cy="5657413"/>
+          </a:xfrm>
+          <a:prstGeom prst="rect">
+            <a:avLst/>
+          </a:prstGeom>
+        </p:spPr>
+      </p:pic>
+      <p:pic>
+        <p:nvPicPr>
+          <p:cNvPr id="7" name="図 6">
+            <a:extLst>
+              <a:ext uri="{FF2B5EF4-FFF2-40B4-BE49-F238E27FC236}">
+                <a16:creationId xmlns:a16="http://schemas.microsoft.com/office/drawing/2014/main" id="{64CCC063-5CA4-FEF7-E700-68CB6864080A}"/>
+              </a:ext>
+            </a:extLst>
+          </p:cNvPr>
+          <p:cNvPicPr>
+            <a:picLocks noChangeAspect="1"/>
+          </p:cNvPicPr>
+          <p:nvPr/>
+        </p:nvPicPr>
+        <p:blipFill>
+          <a:blip r:embed="rId3"/>
+          <a:srcRect l="20881" t="53004" r="21613" b="4876"/>
+          <a:stretch>
+            <a:fillRect/>
+          </a:stretch>
+        </p:blipFill>
+        <p:spPr>
+          <a:xfrm>
+            <a:off x="2545554" y="4614333"/>
+            <a:ext cx="7011398" cy="2760133"/>
+          </a:xfrm>
+          <a:prstGeom prst="rect">
+            <a:avLst/>
+          </a:prstGeom>
+        </p:spPr>
+      </p:pic>
+    </p:spTree>
+    <p:extLst>
+      <p:ext uri="{BB962C8B-B14F-4D97-AF65-F5344CB8AC3E}">
+        <p14:creationId xmlns:p14="http://schemas.microsoft.com/office/powerpoint/2010/main" val="495831895"/>
+      </p:ext>
+    </p:extLst>
+  </p:cSld>
+  <p:clrMapOvr>
+    <a:masterClrMapping/>
+  </p:clrMapOvr>
+</p:sld>
+</file>
+
+<file path=ppt/slides/slide8.xml><?xml version="1.0" encoding="utf-8"?>
+<p:sld xmlns:a="http://schemas.openxmlformats.org/drawingml/2006/main" xmlns:r="http://schemas.openxmlformats.org/officeDocument/2006/relationships" xmlns:p="http://schemas.openxmlformats.org/presentationml/2006/main">
+  <p:cSld>
+    <p:spTree>
+      <p:nvGrpSpPr>
         <p:cNvPr id="1" name="">
           <a:extLst>
             <a:ext uri="{FF2B5EF4-FFF2-40B4-BE49-F238E27FC236}">
@@ -17511,7 +20702,7 @@
 </p:sld>
 </file>
 
-<file path=ppt/slides/slide6.xml><?xml version="1.0" encoding="utf-8"?>
+<file path=ppt/slides/slide9.xml><?xml version="1.0" encoding="utf-8"?>
 <p:sld xmlns:a="http://schemas.openxmlformats.org/drawingml/2006/main" xmlns:r="http://schemas.openxmlformats.org/officeDocument/2006/relationships" xmlns:p="http://schemas.openxmlformats.org/presentationml/2006/main">
   <p:cSld>
     <p:spTree>
@@ -18096,2537 +21287,6 @@
     <p:extLst>
       <p:ext uri="{BB962C8B-B14F-4D97-AF65-F5344CB8AC3E}">
         <p14:creationId xmlns:p14="http://schemas.microsoft.com/office/powerpoint/2010/main" val="773752062"/>
-      </p:ext>
-    </p:extLst>
-  </p:cSld>
-  <p:clrMapOvr>
-    <a:masterClrMapping/>
-  </p:clrMapOvr>
-</p:sld>
-</file>
-
-<file path=ppt/slides/slide7.xml><?xml version="1.0" encoding="utf-8"?>
-<p:sld xmlns:a="http://schemas.openxmlformats.org/drawingml/2006/main" xmlns:r="http://schemas.openxmlformats.org/officeDocument/2006/relationships" xmlns:p="http://schemas.openxmlformats.org/presentationml/2006/main">
-  <p:cSld>
-    <p:spTree>
-      <p:nvGrpSpPr>
-        <p:cNvPr id="1" name="">
-          <a:extLst>
-            <a:ext uri="{FF2B5EF4-FFF2-40B4-BE49-F238E27FC236}">
-              <a16:creationId xmlns:a16="http://schemas.microsoft.com/office/drawing/2014/main" id="{C5B15857-827A-6229-6113-E552ADAC6249}"/>
-            </a:ext>
-          </a:extLst>
-        </p:cNvPr>
-        <p:cNvGrpSpPr/>
-        <p:nvPr/>
-      </p:nvGrpSpPr>
-      <p:grpSpPr>
-        <a:xfrm>
-          <a:off x="0" y="0"/>
-          <a:ext cx="0" cy="0"/>
-          <a:chOff x="0" y="0"/>
-          <a:chExt cx="0" cy="0"/>
-        </a:xfrm>
-      </p:grpSpPr>
-      <p:grpSp>
-        <p:nvGrpSpPr>
-          <p:cNvPr id="5" name="グループ化 4">
-            <a:extLst>
-              <a:ext uri="{FF2B5EF4-FFF2-40B4-BE49-F238E27FC236}">
-                <a16:creationId xmlns:a16="http://schemas.microsoft.com/office/drawing/2014/main" id="{339F7668-3B6B-6140-6A0C-58595BED5135}"/>
-              </a:ext>
-            </a:extLst>
-          </p:cNvPr>
-          <p:cNvGrpSpPr/>
-          <p:nvPr/>
-        </p:nvGrpSpPr>
-        <p:grpSpPr>
-          <a:xfrm>
-            <a:off x="520410" y="0"/>
-            <a:ext cx="11436931" cy="6640884"/>
-            <a:chOff x="333375" y="4887767"/>
-            <a:chExt cx="11475801" cy="6683747"/>
-          </a:xfrm>
-        </p:grpSpPr>
-        <p:grpSp>
-          <p:nvGrpSpPr>
-            <p:cNvPr id="27" name="グループ化 26">
-              <a:extLst>
-                <a:ext uri="{FF2B5EF4-FFF2-40B4-BE49-F238E27FC236}">
-                  <a16:creationId xmlns:a16="http://schemas.microsoft.com/office/drawing/2014/main" id="{E0AA464E-254A-BCD5-7491-2B8D385FAC0C}"/>
-                </a:ext>
-              </a:extLst>
-            </p:cNvPr>
-            <p:cNvGrpSpPr/>
-            <p:nvPr/>
-          </p:nvGrpSpPr>
-          <p:grpSpPr>
-            <a:xfrm>
-              <a:off x="333375" y="4887767"/>
-              <a:ext cx="11475801" cy="6683747"/>
-              <a:chOff x="333375" y="4887767"/>
-              <a:chExt cx="11236058" cy="6526470"/>
-            </a:xfrm>
-          </p:grpSpPr>
-          <p:sp>
-            <p:nvSpPr>
-              <p:cNvPr id="31" name="正方形/長方形 30">
-                <a:extLst>
-                  <a:ext uri="{FF2B5EF4-FFF2-40B4-BE49-F238E27FC236}">
-                    <a16:creationId xmlns:a16="http://schemas.microsoft.com/office/drawing/2014/main" id="{8DC25741-1012-004A-8360-88CD98DE3327}"/>
-                  </a:ext>
-                </a:extLst>
-              </p:cNvPr>
-              <p:cNvSpPr/>
-              <p:nvPr/>
-            </p:nvSpPr>
-            <p:spPr>
-              <a:xfrm>
-                <a:off x="333375" y="4887767"/>
-                <a:ext cx="11236058" cy="6526470"/>
-              </a:xfrm>
-              <a:prstGeom prst="rect">
-                <a:avLst/>
-              </a:prstGeom>
-              <a:ln>
-                <a:noFill/>
-              </a:ln>
-            </p:spPr>
-            <p:style>
-              <a:lnRef idx="2">
-                <a:schemeClr val="dk1"/>
-              </a:lnRef>
-              <a:fillRef idx="1">
-                <a:schemeClr val="lt1"/>
-              </a:fillRef>
-              <a:effectRef idx="0">
-                <a:schemeClr val="dk1"/>
-              </a:effectRef>
-              <a:fontRef idx="minor">
-                <a:schemeClr val="dk1"/>
-              </a:fontRef>
-            </p:style>
-            <p:txBody>
-              <a:bodyPr wrap="square" rtlCol="0" anchor="ctr"/>
-              <a:lstStyle>
-                <a:defPPr>
-                  <a:defRPr lang="ja-JP"/>
-                </a:defPPr>
-                <a:lvl1pPr marL="0" indent="0" algn="l" defTabSz="914400" rtl="0" eaLnBrk="1" latinLnBrk="0" hangingPunct="1">
-                  <a:defRPr kumimoji="1" sz="1800" kern="1200">
-                    <a:solidFill>
-                      <a:schemeClr val="dk1"/>
-                    </a:solidFill>
-                    <a:latin typeface="+mn-lt"/>
-                    <a:ea typeface="+mn-ea"/>
-                    <a:cs typeface="+mn-cs"/>
-                  </a:defRPr>
-                </a:lvl1pPr>
-                <a:lvl2pPr marL="457200" indent="0" algn="l" defTabSz="914400" rtl="0" eaLnBrk="1" latinLnBrk="0" hangingPunct="1">
-                  <a:defRPr kumimoji="1" sz="1800" kern="1200">
-                    <a:solidFill>
-                      <a:schemeClr val="dk1"/>
-                    </a:solidFill>
-                    <a:latin typeface="+mn-lt"/>
-                    <a:ea typeface="+mn-ea"/>
-                    <a:cs typeface="+mn-cs"/>
-                  </a:defRPr>
-                </a:lvl2pPr>
-                <a:lvl3pPr marL="914400" indent="0" algn="l" defTabSz="914400" rtl="0" eaLnBrk="1" latinLnBrk="0" hangingPunct="1">
-                  <a:defRPr kumimoji="1" sz="1800" kern="1200">
-                    <a:solidFill>
-                      <a:schemeClr val="dk1"/>
-                    </a:solidFill>
-                    <a:latin typeface="+mn-lt"/>
-                    <a:ea typeface="+mn-ea"/>
-                    <a:cs typeface="+mn-cs"/>
-                  </a:defRPr>
-                </a:lvl3pPr>
-                <a:lvl4pPr marL="1371600" indent="0" algn="l" defTabSz="914400" rtl="0" eaLnBrk="1" latinLnBrk="0" hangingPunct="1">
-                  <a:defRPr kumimoji="1" sz="1800" kern="1200">
-                    <a:solidFill>
-                      <a:schemeClr val="dk1"/>
-                    </a:solidFill>
-                    <a:latin typeface="+mn-lt"/>
-                    <a:ea typeface="+mn-ea"/>
-                    <a:cs typeface="+mn-cs"/>
-                  </a:defRPr>
-                </a:lvl4pPr>
-                <a:lvl5pPr marL="1828800" indent="0" algn="l" defTabSz="914400" rtl="0" eaLnBrk="1" latinLnBrk="0" hangingPunct="1">
-                  <a:defRPr kumimoji="1" sz="1800" kern="1200">
-                    <a:solidFill>
-                      <a:schemeClr val="dk1"/>
-                    </a:solidFill>
-                    <a:latin typeface="+mn-lt"/>
-                    <a:ea typeface="+mn-ea"/>
-                    <a:cs typeface="+mn-cs"/>
-                  </a:defRPr>
-                </a:lvl5pPr>
-                <a:lvl6pPr marL="2286000" indent="0" algn="l" defTabSz="914400" rtl="0" eaLnBrk="1" latinLnBrk="0" hangingPunct="1">
-                  <a:defRPr kumimoji="1" sz="1800" kern="1200">
-                    <a:solidFill>
-                      <a:schemeClr val="dk1"/>
-                    </a:solidFill>
-                    <a:latin typeface="+mn-lt"/>
-                    <a:ea typeface="+mn-ea"/>
-                    <a:cs typeface="+mn-cs"/>
-                  </a:defRPr>
-                </a:lvl6pPr>
-                <a:lvl7pPr marL="2743200" indent="0" algn="l" defTabSz="914400" rtl="0" eaLnBrk="1" latinLnBrk="0" hangingPunct="1">
-                  <a:defRPr kumimoji="1" sz="1800" kern="1200">
-                    <a:solidFill>
-                      <a:schemeClr val="dk1"/>
-                    </a:solidFill>
-                    <a:latin typeface="+mn-lt"/>
-                    <a:ea typeface="+mn-ea"/>
-                    <a:cs typeface="+mn-cs"/>
-                  </a:defRPr>
-                </a:lvl7pPr>
-                <a:lvl8pPr marL="3200400" indent="0" algn="l" defTabSz="914400" rtl="0" eaLnBrk="1" latinLnBrk="0" hangingPunct="1">
-                  <a:defRPr kumimoji="1" sz="1800" kern="1200">
-                    <a:solidFill>
-                      <a:schemeClr val="dk1"/>
-                    </a:solidFill>
-                    <a:latin typeface="+mn-lt"/>
-                    <a:ea typeface="+mn-ea"/>
-                    <a:cs typeface="+mn-cs"/>
-                  </a:defRPr>
-                </a:lvl8pPr>
-                <a:lvl9pPr marL="3657600" indent="0" algn="l" defTabSz="914400" rtl="0" eaLnBrk="1" latinLnBrk="0" hangingPunct="1">
-                  <a:defRPr kumimoji="1" sz="1800" kern="1200">
-                    <a:solidFill>
-                      <a:schemeClr val="dk1"/>
-                    </a:solidFill>
-                    <a:latin typeface="+mn-lt"/>
-                    <a:ea typeface="+mn-ea"/>
-                    <a:cs typeface="+mn-cs"/>
-                  </a:defRPr>
-                </a:lvl9pPr>
-              </a:lstStyle>
-              <a:p>
-                <a:pPr algn="ctr"/>
-                <a:endParaRPr kumimoji="1" lang="ja-JP" altLang="en-US"/>
-              </a:p>
-            </p:txBody>
-          </p:sp>
-          <p:pic>
-            <p:nvPicPr>
-              <p:cNvPr id="32" name="図 31">
-                <a:extLst>
-                  <a:ext uri="{FF2B5EF4-FFF2-40B4-BE49-F238E27FC236}">
-                    <a16:creationId xmlns:a16="http://schemas.microsoft.com/office/drawing/2014/main" id="{AC970566-6562-751D-E782-572914D801D8}"/>
-                  </a:ext>
-                </a:extLst>
-              </p:cNvPr>
-              <p:cNvPicPr>
-                <a:picLocks noChangeAspect="1"/>
-              </p:cNvPicPr>
-              <p:nvPr/>
-            </p:nvPicPr>
-            <p:blipFill rotWithShape="1">
-              <a:blip r:embed="rId2"/>
-              <a:srcRect l="15627" t="4316" r="14777" b="8679"/>
-              <a:stretch>
-                <a:fillRect/>
-              </a:stretch>
-            </p:blipFill>
-            <p:spPr>
-              <a:xfrm>
-                <a:off x="1618176" y="5122335"/>
-                <a:ext cx="8869255" cy="6148906"/>
-              </a:xfrm>
-              <a:prstGeom prst="rect">
-                <a:avLst/>
-              </a:prstGeom>
-            </p:spPr>
-          </p:pic>
-        </p:grpSp>
-        <p:sp>
-          <p:nvSpPr>
-            <p:cNvPr id="28" name="正方形/長方形 27">
-              <a:extLst>
-                <a:ext uri="{FF2B5EF4-FFF2-40B4-BE49-F238E27FC236}">
-                  <a16:creationId xmlns:a16="http://schemas.microsoft.com/office/drawing/2014/main" id="{6AF3D99A-EDAD-1798-29B2-69A887A60946}"/>
-                </a:ext>
-              </a:extLst>
-            </p:cNvPr>
-            <p:cNvSpPr/>
-            <p:nvPr/>
-          </p:nvSpPr>
-          <p:spPr>
-            <a:xfrm>
-              <a:off x="1980990" y="5215465"/>
-              <a:ext cx="8259213" cy="5818043"/>
-            </a:xfrm>
-            <a:prstGeom prst="rect">
-              <a:avLst/>
-            </a:prstGeom>
-            <a:noFill/>
-            <a:ln w="28575">
-              <a:solidFill>
-                <a:srgbClr val="FF0000"/>
-              </a:solidFill>
-              <a:prstDash val="solid"/>
-            </a:ln>
-          </p:spPr>
-          <p:style>
-            <a:lnRef idx="2">
-              <a:schemeClr val="accent6"/>
-            </a:lnRef>
-            <a:fillRef idx="1">
-              <a:schemeClr val="lt1"/>
-            </a:fillRef>
-            <a:effectRef idx="0">
-              <a:schemeClr val="accent6"/>
-            </a:effectRef>
-            <a:fontRef idx="minor">
-              <a:schemeClr val="dk1"/>
-            </a:fontRef>
-          </p:style>
-          <p:txBody>
-            <a:bodyPr rtlCol="0" anchor="t"/>
-            <a:lstStyle>
-              <a:lvl1pPr marL="0" indent="0">
-                <a:defRPr sz="1100">
-                  <a:solidFill>
-                    <a:schemeClr val="dk1"/>
-                  </a:solidFill>
-                  <a:latin typeface="+mn-lt"/>
-                  <a:ea typeface="+mn-ea"/>
-                  <a:cs typeface="+mn-cs"/>
-                </a:defRPr>
-              </a:lvl1pPr>
-              <a:lvl2pPr marL="457200" indent="0">
-                <a:defRPr sz="1100">
-                  <a:solidFill>
-                    <a:schemeClr val="dk1"/>
-                  </a:solidFill>
-                  <a:latin typeface="+mn-lt"/>
-                  <a:ea typeface="+mn-ea"/>
-                  <a:cs typeface="+mn-cs"/>
-                </a:defRPr>
-              </a:lvl2pPr>
-              <a:lvl3pPr marL="914400" indent="0">
-                <a:defRPr sz="1100">
-                  <a:solidFill>
-                    <a:schemeClr val="dk1"/>
-                  </a:solidFill>
-                  <a:latin typeface="+mn-lt"/>
-                  <a:ea typeface="+mn-ea"/>
-                  <a:cs typeface="+mn-cs"/>
-                </a:defRPr>
-              </a:lvl3pPr>
-              <a:lvl4pPr marL="1371600" indent="0">
-                <a:defRPr sz="1100">
-                  <a:solidFill>
-                    <a:schemeClr val="dk1"/>
-                  </a:solidFill>
-                  <a:latin typeface="+mn-lt"/>
-                  <a:ea typeface="+mn-ea"/>
-                  <a:cs typeface="+mn-cs"/>
-                </a:defRPr>
-              </a:lvl4pPr>
-              <a:lvl5pPr marL="1828800" indent="0">
-                <a:defRPr sz="1100">
-                  <a:solidFill>
-                    <a:schemeClr val="dk1"/>
-                  </a:solidFill>
-                  <a:latin typeface="+mn-lt"/>
-                  <a:ea typeface="+mn-ea"/>
-                  <a:cs typeface="+mn-cs"/>
-                </a:defRPr>
-              </a:lvl5pPr>
-              <a:lvl6pPr marL="2286000" indent="0">
-                <a:defRPr sz="1100">
-                  <a:solidFill>
-                    <a:schemeClr val="dk1"/>
-                  </a:solidFill>
-                  <a:latin typeface="+mn-lt"/>
-                  <a:ea typeface="+mn-ea"/>
-                  <a:cs typeface="+mn-cs"/>
-                </a:defRPr>
-              </a:lvl6pPr>
-              <a:lvl7pPr marL="2743200" indent="0">
-                <a:defRPr sz="1100">
-                  <a:solidFill>
-                    <a:schemeClr val="dk1"/>
-                  </a:solidFill>
-                  <a:latin typeface="+mn-lt"/>
-                  <a:ea typeface="+mn-ea"/>
-                  <a:cs typeface="+mn-cs"/>
-                </a:defRPr>
-              </a:lvl7pPr>
-              <a:lvl8pPr marL="3200400" indent="0">
-                <a:defRPr sz="1100">
-                  <a:solidFill>
-                    <a:schemeClr val="dk1"/>
-                  </a:solidFill>
-                  <a:latin typeface="+mn-lt"/>
-                  <a:ea typeface="+mn-ea"/>
-                  <a:cs typeface="+mn-cs"/>
-                </a:defRPr>
-              </a:lvl8pPr>
-              <a:lvl9pPr marL="3657600" indent="0">
-                <a:defRPr sz="1100">
-                  <a:solidFill>
-                    <a:schemeClr val="dk1"/>
-                  </a:solidFill>
-                  <a:latin typeface="+mn-lt"/>
-                  <a:ea typeface="+mn-ea"/>
-                  <a:cs typeface="+mn-cs"/>
-                </a:defRPr>
-              </a:lvl9pPr>
-            </a:lstStyle>
-            <a:p>
-              <a:pPr algn="l"/>
-              <a:endParaRPr kumimoji="1" lang="ja-JP" altLang="en-US" sz="1100"/>
-            </a:p>
-          </p:txBody>
-        </p:sp>
-        <p:sp>
-          <p:nvSpPr>
-            <p:cNvPr id="29" name="正方形/長方形 28">
-              <a:extLst>
-                <a:ext uri="{FF2B5EF4-FFF2-40B4-BE49-F238E27FC236}">
-                  <a16:creationId xmlns:a16="http://schemas.microsoft.com/office/drawing/2014/main" id="{8A11EA04-7160-76FC-A60E-63742E5407FB}"/>
-                </a:ext>
-              </a:extLst>
-            </p:cNvPr>
-            <p:cNvSpPr/>
-            <p:nvPr/>
-          </p:nvSpPr>
-          <p:spPr>
-            <a:xfrm>
-              <a:off x="10512918" y="7766687"/>
-              <a:ext cx="1129367" cy="700000"/>
-            </a:xfrm>
-            <a:prstGeom prst="rect">
-              <a:avLst/>
-            </a:prstGeom>
-            <a:ln w="28575">
-              <a:solidFill>
-                <a:srgbClr val="FF0000"/>
-              </a:solidFill>
-            </a:ln>
-          </p:spPr>
-          <p:style>
-            <a:lnRef idx="2">
-              <a:schemeClr val="accent6"/>
-            </a:lnRef>
-            <a:fillRef idx="1">
-              <a:schemeClr val="lt1"/>
-            </a:fillRef>
-            <a:effectRef idx="0">
-              <a:schemeClr val="accent6"/>
-            </a:effectRef>
-            <a:fontRef idx="minor">
-              <a:schemeClr val="dk1"/>
-            </a:fontRef>
-          </p:style>
-          <p:txBody>
-            <a:bodyPr rtlCol="0" anchor="ctr"/>
-            <a:lstStyle>
-              <a:lvl1pPr marL="0" indent="0">
-                <a:defRPr sz="1100">
-                  <a:solidFill>
-                    <a:schemeClr val="dk1"/>
-                  </a:solidFill>
-                  <a:latin typeface="+mn-lt"/>
-                  <a:ea typeface="+mn-ea"/>
-                  <a:cs typeface="+mn-cs"/>
-                </a:defRPr>
-              </a:lvl1pPr>
-              <a:lvl2pPr marL="457200" indent="0">
-                <a:defRPr sz="1100">
-                  <a:solidFill>
-                    <a:schemeClr val="dk1"/>
-                  </a:solidFill>
-                  <a:latin typeface="+mn-lt"/>
-                  <a:ea typeface="+mn-ea"/>
-                  <a:cs typeface="+mn-cs"/>
-                </a:defRPr>
-              </a:lvl2pPr>
-              <a:lvl3pPr marL="914400" indent="0">
-                <a:defRPr sz="1100">
-                  <a:solidFill>
-                    <a:schemeClr val="dk1"/>
-                  </a:solidFill>
-                  <a:latin typeface="+mn-lt"/>
-                  <a:ea typeface="+mn-ea"/>
-                  <a:cs typeface="+mn-cs"/>
-                </a:defRPr>
-              </a:lvl3pPr>
-              <a:lvl4pPr marL="1371600" indent="0">
-                <a:defRPr sz="1100">
-                  <a:solidFill>
-                    <a:schemeClr val="dk1"/>
-                  </a:solidFill>
-                  <a:latin typeface="+mn-lt"/>
-                  <a:ea typeface="+mn-ea"/>
-                  <a:cs typeface="+mn-cs"/>
-                </a:defRPr>
-              </a:lvl4pPr>
-              <a:lvl5pPr marL="1828800" indent="0">
-                <a:defRPr sz="1100">
-                  <a:solidFill>
-                    <a:schemeClr val="dk1"/>
-                  </a:solidFill>
-                  <a:latin typeface="+mn-lt"/>
-                  <a:ea typeface="+mn-ea"/>
-                  <a:cs typeface="+mn-cs"/>
-                </a:defRPr>
-              </a:lvl5pPr>
-              <a:lvl6pPr marL="2286000" indent="0">
-                <a:defRPr sz="1100">
-                  <a:solidFill>
-                    <a:schemeClr val="dk1"/>
-                  </a:solidFill>
-                  <a:latin typeface="+mn-lt"/>
-                  <a:ea typeface="+mn-ea"/>
-                  <a:cs typeface="+mn-cs"/>
-                </a:defRPr>
-              </a:lvl6pPr>
-              <a:lvl7pPr marL="2743200" indent="0">
-                <a:defRPr sz="1100">
-                  <a:solidFill>
-                    <a:schemeClr val="dk1"/>
-                  </a:solidFill>
-                  <a:latin typeface="+mn-lt"/>
-                  <a:ea typeface="+mn-ea"/>
-                  <a:cs typeface="+mn-cs"/>
-                </a:defRPr>
-              </a:lvl7pPr>
-              <a:lvl8pPr marL="3200400" indent="0">
-                <a:defRPr sz="1100">
-                  <a:solidFill>
-                    <a:schemeClr val="dk1"/>
-                  </a:solidFill>
-                  <a:latin typeface="+mn-lt"/>
-                  <a:ea typeface="+mn-ea"/>
-                  <a:cs typeface="+mn-cs"/>
-                </a:defRPr>
-              </a:lvl8pPr>
-              <a:lvl9pPr marL="3657600" indent="0">
-                <a:defRPr sz="1100">
-                  <a:solidFill>
-                    <a:schemeClr val="dk1"/>
-                  </a:solidFill>
-                  <a:latin typeface="+mn-lt"/>
-                  <a:ea typeface="+mn-ea"/>
-                  <a:cs typeface="+mn-cs"/>
-                </a:defRPr>
-              </a:lvl9pPr>
-            </a:lstStyle>
-            <a:p>
-              <a:pPr algn="l"/>
-              <a:r>
-                <a:rPr kumimoji="1" lang="ja-JP" altLang="en-US" sz="1200" b="1">
-                  <a:solidFill>
-                    <a:srgbClr val="FF0000"/>
-                  </a:solidFill>
-                </a:rPr>
-                <a:t>⑤ドロップ</a:t>
-              </a:r>
-              <a:endParaRPr kumimoji="1" lang="en-US" altLang="ja-JP" sz="1200" b="1">
-                <a:solidFill>
-                  <a:srgbClr val="FF0000"/>
-                </a:solidFill>
-              </a:endParaRPr>
-            </a:p>
-            <a:p>
-              <a:pPr algn="l"/>
-              <a:r>
-                <a:rPr kumimoji="1" lang="ja-JP" altLang="en-US" sz="1200" b="1">
-                  <a:solidFill>
-                    <a:srgbClr val="FF0000"/>
-                  </a:solidFill>
-                </a:rPr>
-                <a:t>　入力欄</a:t>
-              </a:r>
-            </a:p>
-          </p:txBody>
-        </p:sp>
-        <p:cxnSp>
-          <p:nvCxnSpPr>
-            <p:cNvPr id="30" name="直線矢印コネクタ 29">
-              <a:extLst>
-                <a:ext uri="{FF2B5EF4-FFF2-40B4-BE49-F238E27FC236}">
-                  <a16:creationId xmlns:a16="http://schemas.microsoft.com/office/drawing/2014/main" id="{94BF8C1D-901C-95E3-FAC1-AA061E830872}"/>
-                </a:ext>
-              </a:extLst>
-            </p:cNvPr>
-            <p:cNvCxnSpPr>
-              <a:stCxn id="29" idx="1"/>
-              <a:endCxn id="28" idx="3"/>
-            </p:cNvCxnSpPr>
-            <p:nvPr/>
-          </p:nvCxnSpPr>
-          <p:spPr>
-            <a:xfrm flipH="1">
-              <a:off x="10240203" y="8116686"/>
-              <a:ext cx="272715" cy="7800"/>
-            </a:xfrm>
-            <a:prstGeom prst="straightConnector1">
-              <a:avLst/>
-            </a:prstGeom>
-            <a:ln w="28575">
-              <a:solidFill>
-                <a:srgbClr val="FF0000"/>
-              </a:solidFill>
-              <a:tailEnd type="triangle"/>
-            </a:ln>
-          </p:spPr>
-          <p:style>
-            <a:lnRef idx="2">
-              <a:schemeClr val="accent1"/>
-            </a:lnRef>
-            <a:fillRef idx="0">
-              <a:schemeClr val="accent1"/>
-            </a:fillRef>
-            <a:effectRef idx="1">
-              <a:schemeClr val="accent1"/>
-            </a:effectRef>
-            <a:fontRef idx="minor">
-              <a:schemeClr val="tx1"/>
-            </a:fontRef>
-          </p:style>
-        </p:cxnSp>
-      </p:grpSp>
-    </p:spTree>
-    <p:extLst>
-      <p:ext uri="{BB962C8B-B14F-4D97-AF65-F5344CB8AC3E}">
-        <p14:creationId xmlns:p14="http://schemas.microsoft.com/office/powerpoint/2010/main" val="3701427094"/>
-      </p:ext>
-    </p:extLst>
-  </p:cSld>
-  <p:clrMapOvr>
-    <a:masterClrMapping/>
-  </p:clrMapOvr>
-</p:sld>
-</file>
-
-<file path=ppt/slides/slide8.xml><?xml version="1.0" encoding="utf-8"?>
-<p:sld xmlns:a="http://schemas.openxmlformats.org/drawingml/2006/main" xmlns:r="http://schemas.openxmlformats.org/officeDocument/2006/relationships" xmlns:p="http://schemas.openxmlformats.org/presentationml/2006/main">
-  <p:cSld>
-    <p:spTree>
-      <p:nvGrpSpPr>
-        <p:cNvPr id="1" name="">
-          <a:extLst>
-            <a:ext uri="{FF2B5EF4-FFF2-40B4-BE49-F238E27FC236}">
-              <a16:creationId xmlns:a16="http://schemas.microsoft.com/office/drawing/2014/main" id="{9F980BDA-4A4C-7E94-0A20-011122EAC56E}"/>
-            </a:ext>
-          </a:extLst>
-        </p:cNvPr>
-        <p:cNvGrpSpPr/>
-        <p:nvPr/>
-      </p:nvGrpSpPr>
-      <p:grpSpPr>
-        <a:xfrm>
-          <a:off x="0" y="0"/>
-          <a:ext cx="0" cy="0"/>
-          <a:chOff x="0" y="0"/>
-          <a:chExt cx="0" cy="0"/>
-        </a:xfrm>
-      </p:grpSpPr>
-      <p:grpSp>
-        <p:nvGrpSpPr>
-          <p:cNvPr id="6" name="グループ化 5">
-            <a:extLst>
-              <a:ext uri="{FF2B5EF4-FFF2-40B4-BE49-F238E27FC236}">
-                <a16:creationId xmlns:a16="http://schemas.microsoft.com/office/drawing/2014/main" id="{117035BB-941E-434B-1B7D-FC0E88A58996}"/>
-              </a:ext>
-            </a:extLst>
-          </p:cNvPr>
-          <p:cNvGrpSpPr/>
-          <p:nvPr/>
-        </p:nvGrpSpPr>
-        <p:grpSpPr>
-          <a:xfrm>
-            <a:off x="375153" y="415637"/>
-            <a:ext cx="11441694" cy="6918613"/>
-            <a:chOff x="12301537" y="5082948"/>
-            <a:chExt cx="11475801" cy="6955591"/>
-          </a:xfrm>
-        </p:grpSpPr>
-        <p:grpSp>
-          <p:nvGrpSpPr>
-            <p:cNvPr id="21" name="グループ化 20">
-              <a:extLst>
-                <a:ext uri="{FF2B5EF4-FFF2-40B4-BE49-F238E27FC236}">
-                  <a16:creationId xmlns:a16="http://schemas.microsoft.com/office/drawing/2014/main" id="{E3A9B2BE-7263-7BEF-CF8A-8FBC14530D4D}"/>
-                </a:ext>
-              </a:extLst>
-            </p:cNvPr>
-            <p:cNvGrpSpPr/>
-            <p:nvPr/>
-          </p:nvGrpSpPr>
-          <p:grpSpPr>
-            <a:xfrm>
-              <a:off x="12301537" y="5082948"/>
-              <a:ext cx="11475801" cy="6955591"/>
-              <a:chOff x="12301537" y="5082948"/>
-              <a:chExt cx="11236058" cy="6791917"/>
-            </a:xfrm>
-          </p:grpSpPr>
-          <p:sp>
-            <p:nvSpPr>
-              <p:cNvPr id="25" name="正方形/長方形 24">
-                <a:extLst>
-                  <a:ext uri="{FF2B5EF4-FFF2-40B4-BE49-F238E27FC236}">
-                    <a16:creationId xmlns:a16="http://schemas.microsoft.com/office/drawing/2014/main" id="{BF470FBD-094D-577D-D12C-5F0DEA6E1F68}"/>
-                  </a:ext>
-                </a:extLst>
-              </p:cNvPr>
-              <p:cNvSpPr/>
-              <p:nvPr/>
-            </p:nvSpPr>
-            <p:spPr>
-              <a:xfrm>
-                <a:off x="12301537" y="5082948"/>
-                <a:ext cx="11236058" cy="6791917"/>
-              </a:xfrm>
-              <a:prstGeom prst="rect">
-                <a:avLst/>
-              </a:prstGeom>
-              <a:ln>
-                <a:noFill/>
-              </a:ln>
-            </p:spPr>
-            <p:style>
-              <a:lnRef idx="2">
-                <a:schemeClr val="dk1"/>
-              </a:lnRef>
-              <a:fillRef idx="1">
-                <a:schemeClr val="lt1"/>
-              </a:fillRef>
-              <a:effectRef idx="0">
-                <a:schemeClr val="dk1"/>
-              </a:effectRef>
-              <a:fontRef idx="minor">
-                <a:schemeClr val="dk1"/>
-              </a:fontRef>
-            </p:style>
-            <p:txBody>
-              <a:bodyPr wrap="square" rtlCol="0" anchor="ctr"/>
-              <a:lstStyle>
-                <a:defPPr>
-                  <a:defRPr lang="ja-JP"/>
-                </a:defPPr>
-                <a:lvl1pPr marL="0" indent="0" algn="l" defTabSz="914400" rtl="0" eaLnBrk="1" latinLnBrk="0" hangingPunct="1">
-                  <a:defRPr kumimoji="1" sz="1800" kern="1200">
-                    <a:solidFill>
-                      <a:schemeClr val="dk1"/>
-                    </a:solidFill>
-                    <a:latin typeface="+mn-lt"/>
-                    <a:ea typeface="+mn-ea"/>
-                    <a:cs typeface="+mn-cs"/>
-                  </a:defRPr>
-                </a:lvl1pPr>
-                <a:lvl2pPr marL="457200" indent="0" algn="l" defTabSz="914400" rtl="0" eaLnBrk="1" latinLnBrk="0" hangingPunct="1">
-                  <a:defRPr kumimoji="1" sz="1800" kern="1200">
-                    <a:solidFill>
-                      <a:schemeClr val="dk1"/>
-                    </a:solidFill>
-                    <a:latin typeface="+mn-lt"/>
-                    <a:ea typeface="+mn-ea"/>
-                    <a:cs typeface="+mn-cs"/>
-                  </a:defRPr>
-                </a:lvl2pPr>
-                <a:lvl3pPr marL="914400" indent="0" algn="l" defTabSz="914400" rtl="0" eaLnBrk="1" latinLnBrk="0" hangingPunct="1">
-                  <a:defRPr kumimoji="1" sz="1800" kern="1200">
-                    <a:solidFill>
-                      <a:schemeClr val="dk1"/>
-                    </a:solidFill>
-                    <a:latin typeface="+mn-lt"/>
-                    <a:ea typeface="+mn-ea"/>
-                    <a:cs typeface="+mn-cs"/>
-                  </a:defRPr>
-                </a:lvl3pPr>
-                <a:lvl4pPr marL="1371600" indent="0" algn="l" defTabSz="914400" rtl="0" eaLnBrk="1" latinLnBrk="0" hangingPunct="1">
-                  <a:defRPr kumimoji="1" sz="1800" kern="1200">
-                    <a:solidFill>
-                      <a:schemeClr val="dk1"/>
-                    </a:solidFill>
-                    <a:latin typeface="+mn-lt"/>
-                    <a:ea typeface="+mn-ea"/>
-                    <a:cs typeface="+mn-cs"/>
-                  </a:defRPr>
-                </a:lvl4pPr>
-                <a:lvl5pPr marL="1828800" indent="0" algn="l" defTabSz="914400" rtl="0" eaLnBrk="1" latinLnBrk="0" hangingPunct="1">
-                  <a:defRPr kumimoji="1" sz="1800" kern="1200">
-                    <a:solidFill>
-                      <a:schemeClr val="dk1"/>
-                    </a:solidFill>
-                    <a:latin typeface="+mn-lt"/>
-                    <a:ea typeface="+mn-ea"/>
-                    <a:cs typeface="+mn-cs"/>
-                  </a:defRPr>
-                </a:lvl5pPr>
-                <a:lvl6pPr marL="2286000" indent="0" algn="l" defTabSz="914400" rtl="0" eaLnBrk="1" latinLnBrk="0" hangingPunct="1">
-                  <a:defRPr kumimoji="1" sz="1800" kern="1200">
-                    <a:solidFill>
-                      <a:schemeClr val="dk1"/>
-                    </a:solidFill>
-                    <a:latin typeface="+mn-lt"/>
-                    <a:ea typeface="+mn-ea"/>
-                    <a:cs typeface="+mn-cs"/>
-                  </a:defRPr>
-                </a:lvl6pPr>
-                <a:lvl7pPr marL="2743200" indent="0" algn="l" defTabSz="914400" rtl="0" eaLnBrk="1" latinLnBrk="0" hangingPunct="1">
-                  <a:defRPr kumimoji="1" sz="1800" kern="1200">
-                    <a:solidFill>
-                      <a:schemeClr val="dk1"/>
-                    </a:solidFill>
-                    <a:latin typeface="+mn-lt"/>
-                    <a:ea typeface="+mn-ea"/>
-                    <a:cs typeface="+mn-cs"/>
-                  </a:defRPr>
-                </a:lvl7pPr>
-                <a:lvl8pPr marL="3200400" indent="0" algn="l" defTabSz="914400" rtl="0" eaLnBrk="1" latinLnBrk="0" hangingPunct="1">
-                  <a:defRPr kumimoji="1" sz="1800" kern="1200">
-                    <a:solidFill>
-                      <a:schemeClr val="dk1"/>
-                    </a:solidFill>
-                    <a:latin typeface="+mn-lt"/>
-                    <a:ea typeface="+mn-ea"/>
-                    <a:cs typeface="+mn-cs"/>
-                  </a:defRPr>
-                </a:lvl8pPr>
-                <a:lvl9pPr marL="3657600" indent="0" algn="l" defTabSz="914400" rtl="0" eaLnBrk="1" latinLnBrk="0" hangingPunct="1">
-                  <a:defRPr kumimoji="1" sz="1800" kern="1200">
-                    <a:solidFill>
-                      <a:schemeClr val="dk1"/>
-                    </a:solidFill>
-                    <a:latin typeface="+mn-lt"/>
-                    <a:ea typeface="+mn-ea"/>
-                    <a:cs typeface="+mn-cs"/>
-                  </a:defRPr>
-                </a:lvl9pPr>
-              </a:lstStyle>
-              <a:p>
-                <a:pPr algn="ctr"/>
-                <a:endParaRPr kumimoji="1" lang="ja-JP" altLang="en-US" dirty="0"/>
-              </a:p>
-            </p:txBody>
-          </p:sp>
-          <p:pic>
-            <p:nvPicPr>
-              <p:cNvPr id="26" name="図 25">
-                <a:extLst>
-                  <a:ext uri="{FF2B5EF4-FFF2-40B4-BE49-F238E27FC236}">
-                    <a16:creationId xmlns:a16="http://schemas.microsoft.com/office/drawing/2014/main" id="{80E4A9A0-2C8E-B345-1ECD-E0BDA39EC1AB}"/>
-                  </a:ext>
-                </a:extLst>
-              </p:cNvPr>
-              <p:cNvPicPr>
-                <a:picLocks noChangeAspect="1"/>
-              </p:cNvPicPr>
-              <p:nvPr/>
-            </p:nvPicPr>
-            <p:blipFill rotWithShape="1">
-              <a:blip r:embed="rId2"/>
-              <a:srcRect l="3511" t="2932" r="6080"/>
-              <a:stretch>
-                <a:fillRect/>
-              </a:stretch>
-            </p:blipFill>
-            <p:spPr>
-              <a:xfrm>
-                <a:off x="13662470" y="5292060"/>
-                <a:ext cx="8602795" cy="6518237"/>
-              </a:xfrm>
-              <a:prstGeom prst="rect">
-                <a:avLst/>
-              </a:prstGeom>
-            </p:spPr>
-          </p:pic>
-        </p:grpSp>
-        <p:sp>
-          <p:nvSpPr>
-            <p:cNvPr id="22" name="正方形/長方形 21">
-              <a:extLst>
-                <a:ext uri="{FF2B5EF4-FFF2-40B4-BE49-F238E27FC236}">
-                  <a16:creationId xmlns:a16="http://schemas.microsoft.com/office/drawing/2014/main" id="{6E5ACAE0-4FB1-E6CD-9B75-692B8604ABB3}"/>
-                </a:ext>
-              </a:extLst>
-            </p:cNvPr>
-            <p:cNvSpPr/>
-            <p:nvPr/>
-          </p:nvSpPr>
-          <p:spPr>
-            <a:xfrm>
-              <a:off x="13952962" y="5467490"/>
-              <a:ext cx="8253498" cy="6139468"/>
-            </a:xfrm>
-            <a:prstGeom prst="rect">
-              <a:avLst/>
-            </a:prstGeom>
-            <a:noFill/>
-            <a:ln w="28575">
-              <a:solidFill>
-                <a:srgbClr val="FF0000"/>
-              </a:solidFill>
-              <a:prstDash val="solid"/>
-            </a:ln>
-          </p:spPr>
-          <p:style>
-            <a:lnRef idx="2">
-              <a:schemeClr val="accent6"/>
-            </a:lnRef>
-            <a:fillRef idx="1">
-              <a:schemeClr val="lt1"/>
-            </a:fillRef>
-            <a:effectRef idx="0">
-              <a:schemeClr val="accent6"/>
-            </a:effectRef>
-            <a:fontRef idx="minor">
-              <a:schemeClr val="dk1"/>
-            </a:fontRef>
-          </p:style>
-          <p:txBody>
-            <a:bodyPr rtlCol="0" anchor="t"/>
-            <a:lstStyle>
-              <a:lvl1pPr marL="0" indent="0">
-                <a:defRPr sz="1100">
-                  <a:solidFill>
-                    <a:schemeClr val="dk1"/>
-                  </a:solidFill>
-                  <a:latin typeface="+mn-lt"/>
-                  <a:ea typeface="+mn-ea"/>
-                  <a:cs typeface="+mn-cs"/>
-                </a:defRPr>
-              </a:lvl1pPr>
-              <a:lvl2pPr marL="457200" indent="0">
-                <a:defRPr sz="1100">
-                  <a:solidFill>
-                    <a:schemeClr val="dk1"/>
-                  </a:solidFill>
-                  <a:latin typeface="+mn-lt"/>
-                  <a:ea typeface="+mn-ea"/>
-                  <a:cs typeface="+mn-cs"/>
-                </a:defRPr>
-              </a:lvl2pPr>
-              <a:lvl3pPr marL="914400" indent="0">
-                <a:defRPr sz="1100">
-                  <a:solidFill>
-                    <a:schemeClr val="dk1"/>
-                  </a:solidFill>
-                  <a:latin typeface="+mn-lt"/>
-                  <a:ea typeface="+mn-ea"/>
-                  <a:cs typeface="+mn-cs"/>
-                </a:defRPr>
-              </a:lvl3pPr>
-              <a:lvl4pPr marL="1371600" indent="0">
-                <a:defRPr sz="1100">
-                  <a:solidFill>
-                    <a:schemeClr val="dk1"/>
-                  </a:solidFill>
-                  <a:latin typeface="+mn-lt"/>
-                  <a:ea typeface="+mn-ea"/>
-                  <a:cs typeface="+mn-cs"/>
-                </a:defRPr>
-              </a:lvl4pPr>
-              <a:lvl5pPr marL="1828800" indent="0">
-                <a:defRPr sz="1100">
-                  <a:solidFill>
-                    <a:schemeClr val="dk1"/>
-                  </a:solidFill>
-                  <a:latin typeface="+mn-lt"/>
-                  <a:ea typeface="+mn-ea"/>
-                  <a:cs typeface="+mn-cs"/>
-                </a:defRPr>
-              </a:lvl5pPr>
-              <a:lvl6pPr marL="2286000" indent="0">
-                <a:defRPr sz="1100">
-                  <a:solidFill>
-                    <a:schemeClr val="dk1"/>
-                  </a:solidFill>
-                  <a:latin typeface="+mn-lt"/>
-                  <a:ea typeface="+mn-ea"/>
-                  <a:cs typeface="+mn-cs"/>
-                </a:defRPr>
-              </a:lvl6pPr>
-              <a:lvl7pPr marL="2743200" indent="0">
-                <a:defRPr sz="1100">
-                  <a:solidFill>
-                    <a:schemeClr val="dk1"/>
-                  </a:solidFill>
-                  <a:latin typeface="+mn-lt"/>
-                  <a:ea typeface="+mn-ea"/>
-                  <a:cs typeface="+mn-cs"/>
-                </a:defRPr>
-              </a:lvl7pPr>
-              <a:lvl8pPr marL="3200400" indent="0">
-                <a:defRPr sz="1100">
-                  <a:solidFill>
-                    <a:schemeClr val="dk1"/>
-                  </a:solidFill>
-                  <a:latin typeface="+mn-lt"/>
-                  <a:ea typeface="+mn-ea"/>
-                  <a:cs typeface="+mn-cs"/>
-                </a:defRPr>
-              </a:lvl8pPr>
-              <a:lvl9pPr marL="3657600" indent="0">
-                <a:defRPr sz="1100">
-                  <a:solidFill>
-                    <a:schemeClr val="dk1"/>
-                  </a:solidFill>
-                  <a:latin typeface="+mn-lt"/>
-                  <a:ea typeface="+mn-ea"/>
-                  <a:cs typeface="+mn-cs"/>
-                </a:defRPr>
-              </a:lvl9pPr>
-            </a:lstStyle>
-            <a:p>
-              <a:pPr algn="l"/>
-              <a:endParaRPr kumimoji="1" lang="ja-JP" altLang="en-US" sz="1100"/>
-            </a:p>
-          </p:txBody>
-        </p:sp>
-        <p:sp>
-          <p:nvSpPr>
-            <p:cNvPr id="23" name="正方形/長方形 22">
-              <a:extLst>
-                <a:ext uri="{FF2B5EF4-FFF2-40B4-BE49-F238E27FC236}">
-                  <a16:creationId xmlns:a16="http://schemas.microsoft.com/office/drawing/2014/main" id="{B058BDEA-2998-C4C9-96E0-3BCDCA6BA825}"/>
-                </a:ext>
-              </a:extLst>
-            </p:cNvPr>
-            <p:cNvSpPr/>
-            <p:nvPr/>
-          </p:nvSpPr>
-          <p:spPr>
-            <a:xfrm>
-              <a:off x="22481079" y="8115674"/>
-              <a:ext cx="1135083" cy="834908"/>
-            </a:xfrm>
-            <a:prstGeom prst="rect">
-              <a:avLst/>
-            </a:prstGeom>
-            <a:ln w="28575">
-              <a:solidFill>
-                <a:srgbClr val="FF0000"/>
-              </a:solidFill>
-            </a:ln>
-          </p:spPr>
-          <p:style>
-            <a:lnRef idx="2">
-              <a:schemeClr val="accent6"/>
-            </a:lnRef>
-            <a:fillRef idx="1">
-              <a:schemeClr val="lt1"/>
-            </a:fillRef>
-            <a:effectRef idx="0">
-              <a:schemeClr val="accent6"/>
-            </a:effectRef>
-            <a:fontRef idx="minor">
-              <a:schemeClr val="dk1"/>
-            </a:fontRef>
-          </p:style>
-          <p:txBody>
-            <a:bodyPr rtlCol="0" anchor="ctr"/>
-            <a:lstStyle>
-              <a:lvl1pPr marL="0" indent="0">
-                <a:defRPr sz="1100">
-                  <a:solidFill>
-                    <a:schemeClr val="dk1"/>
-                  </a:solidFill>
-                  <a:latin typeface="+mn-lt"/>
-                  <a:ea typeface="+mn-ea"/>
-                  <a:cs typeface="+mn-cs"/>
-                </a:defRPr>
-              </a:lvl1pPr>
-              <a:lvl2pPr marL="457200" indent="0">
-                <a:defRPr sz="1100">
-                  <a:solidFill>
-                    <a:schemeClr val="dk1"/>
-                  </a:solidFill>
-                  <a:latin typeface="+mn-lt"/>
-                  <a:ea typeface="+mn-ea"/>
-                  <a:cs typeface="+mn-cs"/>
-                </a:defRPr>
-              </a:lvl2pPr>
-              <a:lvl3pPr marL="914400" indent="0">
-                <a:defRPr sz="1100">
-                  <a:solidFill>
-                    <a:schemeClr val="dk1"/>
-                  </a:solidFill>
-                  <a:latin typeface="+mn-lt"/>
-                  <a:ea typeface="+mn-ea"/>
-                  <a:cs typeface="+mn-cs"/>
-                </a:defRPr>
-              </a:lvl3pPr>
-              <a:lvl4pPr marL="1371600" indent="0">
-                <a:defRPr sz="1100">
-                  <a:solidFill>
-                    <a:schemeClr val="dk1"/>
-                  </a:solidFill>
-                  <a:latin typeface="+mn-lt"/>
-                  <a:ea typeface="+mn-ea"/>
-                  <a:cs typeface="+mn-cs"/>
-                </a:defRPr>
-              </a:lvl4pPr>
-              <a:lvl5pPr marL="1828800" indent="0">
-                <a:defRPr sz="1100">
-                  <a:solidFill>
-                    <a:schemeClr val="dk1"/>
-                  </a:solidFill>
-                  <a:latin typeface="+mn-lt"/>
-                  <a:ea typeface="+mn-ea"/>
-                  <a:cs typeface="+mn-cs"/>
-                </a:defRPr>
-              </a:lvl5pPr>
-              <a:lvl6pPr marL="2286000" indent="0">
-                <a:defRPr sz="1100">
-                  <a:solidFill>
-                    <a:schemeClr val="dk1"/>
-                  </a:solidFill>
-                  <a:latin typeface="+mn-lt"/>
-                  <a:ea typeface="+mn-ea"/>
-                  <a:cs typeface="+mn-cs"/>
-                </a:defRPr>
-              </a:lvl6pPr>
-              <a:lvl7pPr marL="2743200" indent="0">
-                <a:defRPr sz="1100">
-                  <a:solidFill>
-                    <a:schemeClr val="dk1"/>
-                  </a:solidFill>
-                  <a:latin typeface="+mn-lt"/>
-                  <a:ea typeface="+mn-ea"/>
-                  <a:cs typeface="+mn-cs"/>
-                </a:defRPr>
-              </a:lvl7pPr>
-              <a:lvl8pPr marL="3200400" indent="0">
-                <a:defRPr sz="1100">
-                  <a:solidFill>
-                    <a:schemeClr val="dk1"/>
-                  </a:solidFill>
-                  <a:latin typeface="+mn-lt"/>
-                  <a:ea typeface="+mn-ea"/>
-                  <a:cs typeface="+mn-cs"/>
-                </a:defRPr>
-              </a:lvl8pPr>
-              <a:lvl9pPr marL="3657600" indent="0">
-                <a:defRPr sz="1100">
-                  <a:solidFill>
-                    <a:schemeClr val="dk1"/>
-                  </a:solidFill>
-                  <a:latin typeface="+mn-lt"/>
-                  <a:ea typeface="+mn-ea"/>
-                  <a:cs typeface="+mn-cs"/>
-                </a:defRPr>
-              </a:lvl9pPr>
-            </a:lstStyle>
-            <a:p>
-              <a:pPr algn="l"/>
-              <a:r>
-                <a:rPr kumimoji="1" lang="ja-JP" altLang="en-US" sz="1200" b="1">
-                  <a:solidFill>
-                    <a:srgbClr val="FF0000"/>
-                  </a:solidFill>
-                </a:rPr>
-                <a:t>⑥エネミー</a:t>
-              </a:r>
-              <a:endParaRPr kumimoji="1" lang="en-US" altLang="ja-JP" sz="1200" b="1">
-                <a:solidFill>
-                  <a:srgbClr val="FF0000"/>
-                </a:solidFill>
-              </a:endParaRPr>
-            </a:p>
-            <a:p>
-              <a:pPr algn="l"/>
-              <a:r>
-                <a:rPr kumimoji="1" lang="ja-JP" altLang="en-US" sz="1200" b="1">
-                  <a:solidFill>
-                    <a:srgbClr val="FF0000"/>
-                  </a:solidFill>
-                </a:rPr>
-                <a:t>　能力値欄</a:t>
-              </a:r>
-            </a:p>
-          </p:txBody>
-        </p:sp>
-        <p:cxnSp>
-          <p:nvCxnSpPr>
-            <p:cNvPr id="24" name="直線矢印コネクタ 23">
-              <a:extLst>
-                <a:ext uri="{FF2B5EF4-FFF2-40B4-BE49-F238E27FC236}">
-                  <a16:creationId xmlns:a16="http://schemas.microsoft.com/office/drawing/2014/main" id="{278AFAF8-C95B-67C7-A036-591C56A19F4E}"/>
-                </a:ext>
-              </a:extLst>
-            </p:cNvPr>
-            <p:cNvCxnSpPr>
-              <a:stCxn id="23" idx="1"/>
-              <a:endCxn id="22" idx="3"/>
-            </p:cNvCxnSpPr>
-            <p:nvPr/>
-          </p:nvCxnSpPr>
-          <p:spPr>
-            <a:xfrm flipH="1">
-              <a:off x="22206460" y="8533128"/>
-              <a:ext cx="274619" cy="4097"/>
-            </a:xfrm>
-            <a:prstGeom prst="straightConnector1">
-              <a:avLst/>
-            </a:prstGeom>
-            <a:ln w="28575">
-              <a:solidFill>
-                <a:srgbClr val="FF0000"/>
-              </a:solidFill>
-              <a:tailEnd type="triangle"/>
-            </a:ln>
-          </p:spPr>
-          <p:style>
-            <a:lnRef idx="2">
-              <a:schemeClr val="accent1"/>
-            </a:lnRef>
-            <a:fillRef idx="0">
-              <a:schemeClr val="accent1"/>
-            </a:fillRef>
-            <a:effectRef idx="1">
-              <a:schemeClr val="accent1"/>
-            </a:effectRef>
-            <a:fontRef idx="minor">
-              <a:schemeClr val="tx1"/>
-            </a:fontRef>
-          </p:style>
-        </p:cxnSp>
-      </p:grpSp>
-    </p:spTree>
-    <p:extLst>
-      <p:ext uri="{BB962C8B-B14F-4D97-AF65-F5344CB8AC3E}">
-        <p14:creationId xmlns:p14="http://schemas.microsoft.com/office/powerpoint/2010/main" val="3940630575"/>
-      </p:ext>
-    </p:extLst>
-  </p:cSld>
-  <p:clrMapOvr>
-    <a:masterClrMapping/>
-  </p:clrMapOvr>
-</p:sld>
-</file>
-
-<file path=ppt/slides/slide9.xml><?xml version="1.0" encoding="utf-8"?>
-<p:sld xmlns:a="http://schemas.openxmlformats.org/drawingml/2006/main" xmlns:r="http://schemas.openxmlformats.org/officeDocument/2006/relationships" xmlns:p="http://schemas.openxmlformats.org/presentationml/2006/main">
-  <p:cSld>
-    <p:spTree>
-      <p:nvGrpSpPr>
-        <p:cNvPr id="1" name=""/>
-        <p:cNvGrpSpPr/>
-        <p:nvPr/>
-      </p:nvGrpSpPr>
-      <p:grpSpPr>
-        <a:xfrm>
-          <a:off x="0" y="0"/>
-          <a:ext cx="0" cy="0"/>
-          <a:chOff x="0" y="0"/>
-          <a:chExt cx="0" cy="0"/>
-        </a:xfrm>
-      </p:grpSpPr>
-      <p:grpSp>
-        <p:nvGrpSpPr>
-          <p:cNvPr id="4" name="グループ化 3">
-            <a:extLst>
-              <a:ext uri="{FF2B5EF4-FFF2-40B4-BE49-F238E27FC236}">
-                <a16:creationId xmlns:a16="http://schemas.microsoft.com/office/drawing/2014/main" id="{D34AD894-73F6-D0BE-9775-55BC5794939C}"/>
-              </a:ext>
-            </a:extLst>
-          </p:cNvPr>
-          <p:cNvGrpSpPr/>
-          <p:nvPr/>
-        </p:nvGrpSpPr>
-        <p:grpSpPr>
-          <a:xfrm>
-            <a:off x="-1333175" y="-3888427"/>
-            <a:ext cx="11210374" cy="15739754"/>
-            <a:chOff x="0" y="292551"/>
-            <a:chExt cx="11615187" cy="13120379"/>
-          </a:xfrm>
-        </p:grpSpPr>
-        <p:sp>
-          <p:nvSpPr>
-            <p:cNvPr id="28" name="正方形/長方形 27">
-              <a:extLst>
-                <a:ext uri="{FF2B5EF4-FFF2-40B4-BE49-F238E27FC236}">
-                  <a16:creationId xmlns:a16="http://schemas.microsoft.com/office/drawing/2014/main" id="{82EFC521-04B3-A544-B2A4-7B412D68067E}"/>
-                </a:ext>
-              </a:extLst>
-            </p:cNvPr>
-            <p:cNvSpPr/>
-            <p:nvPr/>
-          </p:nvSpPr>
-          <p:spPr>
-            <a:xfrm>
-              <a:off x="0" y="292551"/>
-              <a:ext cx="11615187" cy="13120379"/>
-            </a:xfrm>
-            <a:prstGeom prst="rect">
-              <a:avLst/>
-            </a:prstGeom>
-            <a:ln>
-              <a:noFill/>
-            </a:ln>
-          </p:spPr>
-          <p:style>
-            <a:lnRef idx="2">
-              <a:schemeClr val="dk1"/>
-            </a:lnRef>
-            <a:fillRef idx="1">
-              <a:schemeClr val="lt1"/>
-            </a:fillRef>
-            <a:effectRef idx="0">
-              <a:schemeClr val="dk1"/>
-            </a:effectRef>
-            <a:fontRef idx="minor">
-              <a:schemeClr val="dk1"/>
-            </a:fontRef>
-          </p:style>
-          <p:txBody>
-            <a:bodyPr wrap="square" rtlCol="0" anchor="ctr"/>
-            <a:lstStyle>
-              <a:defPPr>
-                <a:defRPr lang="ja-JP"/>
-              </a:defPPr>
-              <a:lvl1pPr marL="0" indent="0" algn="l" defTabSz="914400" rtl="0" eaLnBrk="1" latinLnBrk="0" hangingPunct="1">
-                <a:defRPr kumimoji="1" sz="1800" kern="1200">
-                  <a:solidFill>
-                    <a:schemeClr val="dk1"/>
-                  </a:solidFill>
-                  <a:latin typeface="+mn-lt"/>
-                  <a:ea typeface="+mn-ea"/>
-                  <a:cs typeface="+mn-cs"/>
-                </a:defRPr>
-              </a:lvl1pPr>
-              <a:lvl2pPr marL="457200" indent="0" algn="l" defTabSz="914400" rtl="0" eaLnBrk="1" latinLnBrk="0" hangingPunct="1">
-                <a:defRPr kumimoji="1" sz="1800" kern="1200">
-                  <a:solidFill>
-                    <a:schemeClr val="dk1"/>
-                  </a:solidFill>
-                  <a:latin typeface="+mn-lt"/>
-                  <a:ea typeface="+mn-ea"/>
-                  <a:cs typeface="+mn-cs"/>
-                </a:defRPr>
-              </a:lvl2pPr>
-              <a:lvl3pPr marL="914400" indent="0" algn="l" defTabSz="914400" rtl="0" eaLnBrk="1" latinLnBrk="0" hangingPunct="1">
-                <a:defRPr kumimoji="1" sz="1800" kern="1200">
-                  <a:solidFill>
-                    <a:schemeClr val="dk1"/>
-                  </a:solidFill>
-                  <a:latin typeface="+mn-lt"/>
-                  <a:ea typeface="+mn-ea"/>
-                  <a:cs typeface="+mn-cs"/>
-                </a:defRPr>
-              </a:lvl3pPr>
-              <a:lvl4pPr marL="1371600" indent="0" algn="l" defTabSz="914400" rtl="0" eaLnBrk="1" latinLnBrk="0" hangingPunct="1">
-                <a:defRPr kumimoji="1" sz="1800" kern="1200">
-                  <a:solidFill>
-                    <a:schemeClr val="dk1"/>
-                  </a:solidFill>
-                  <a:latin typeface="+mn-lt"/>
-                  <a:ea typeface="+mn-ea"/>
-                  <a:cs typeface="+mn-cs"/>
-                </a:defRPr>
-              </a:lvl4pPr>
-              <a:lvl5pPr marL="1828800" indent="0" algn="l" defTabSz="914400" rtl="0" eaLnBrk="1" latinLnBrk="0" hangingPunct="1">
-                <a:defRPr kumimoji="1" sz="1800" kern="1200">
-                  <a:solidFill>
-                    <a:schemeClr val="dk1"/>
-                  </a:solidFill>
-                  <a:latin typeface="+mn-lt"/>
-                  <a:ea typeface="+mn-ea"/>
-                  <a:cs typeface="+mn-cs"/>
-                </a:defRPr>
-              </a:lvl5pPr>
-              <a:lvl6pPr marL="2286000" indent="0" algn="l" defTabSz="914400" rtl="0" eaLnBrk="1" latinLnBrk="0" hangingPunct="1">
-                <a:defRPr kumimoji="1" sz="1800" kern="1200">
-                  <a:solidFill>
-                    <a:schemeClr val="dk1"/>
-                  </a:solidFill>
-                  <a:latin typeface="+mn-lt"/>
-                  <a:ea typeface="+mn-ea"/>
-                  <a:cs typeface="+mn-cs"/>
-                </a:defRPr>
-              </a:lvl6pPr>
-              <a:lvl7pPr marL="2743200" indent="0" algn="l" defTabSz="914400" rtl="0" eaLnBrk="1" latinLnBrk="0" hangingPunct="1">
-                <a:defRPr kumimoji="1" sz="1800" kern="1200">
-                  <a:solidFill>
-                    <a:schemeClr val="dk1"/>
-                  </a:solidFill>
-                  <a:latin typeface="+mn-lt"/>
-                  <a:ea typeface="+mn-ea"/>
-                  <a:cs typeface="+mn-cs"/>
-                </a:defRPr>
-              </a:lvl7pPr>
-              <a:lvl8pPr marL="3200400" indent="0" algn="l" defTabSz="914400" rtl="0" eaLnBrk="1" latinLnBrk="0" hangingPunct="1">
-                <a:defRPr kumimoji="1" sz="1800" kern="1200">
-                  <a:solidFill>
-                    <a:schemeClr val="dk1"/>
-                  </a:solidFill>
-                  <a:latin typeface="+mn-lt"/>
-                  <a:ea typeface="+mn-ea"/>
-                  <a:cs typeface="+mn-cs"/>
-                </a:defRPr>
-              </a:lvl8pPr>
-              <a:lvl9pPr marL="3657600" indent="0" algn="l" defTabSz="914400" rtl="0" eaLnBrk="1" latinLnBrk="0" hangingPunct="1">
-                <a:defRPr kumimoji="1" sz="1800" kern="1200">
-                  <a:solidFill>
-                    <a:schemeClr val="dk1"/>
-                  </a:solidFill>
-                  <a:latin typeface="+mn-lt"/>
-                  <a:ea typeface="+mn-ea"/>
-                  <a:cs typeface="+mn-cs"/>
-                </a:defRPr>
-              </a:lvl9pPr>
-            </a:lstStyle>
-            <a:p>
-              <a:pPr algn="ctr"/>
-              <a:endParaRPr kumimoji="1" lang="ja-JP" altLang="en-US"/>
-            </a:p>
-          </p:txBody>
-        </p:sp>
-        <p:grpSp>
-          <p:nvGrpSpPr>
-            <p:cNvPr id="29" name="グループ化 28">
-              <a:extLst>
-                <a:ext uri="{FF2B5EF4-FFF2-40B4-BE49-F238E27FC236}">
-                  <a16:creationId xmlns:a16="http://schemas.microsoft.com/office/drawing/2014/main" id="{E6105164-CEE3-8735-000F-E6787D601891}"/>
-                </a:ext>
-              </a:extLst>
-            </p:cNvPr>
-            <p:cNvGrpSpPr/>
-            <p:nvPr/>
-          </p:nvGrpSpPr>
-          <p:grpSpPr>
-            <a:xfrm>
-              <a:off x="1461406" y="852684"/>
-              <a:ext cx="8749542" cy="12248694"/>
-              <a:chOff x="1461406" y="852684"/>
-              <a:chExt cx="10601325" cy="14944725"/>
-            </a:xfrm>
-          </p:grpSpPr>
-          <p:pic>
-            <p:nvPicPr>
-              <p:cNvPr id="43" name="図 42">
-                <a:extLst>
-                  <a:ext uri="{FF2B5EF4-FFF2-40B4-BE49-F238E27FC236}">
-                    <a16:creationId xmlns:a16="http://schemas.microsoft.com/office/drawing/2014/main" id="{6386A049-800B-303C-8321-70665D467BA7}"/>
-                  </a:ext>
-                </a:extLst>
-              </p:cNvPr>
-              <p:cNvPicPr>
-                <a:picLocks noChangeAspect="1"/>
-              </p:cNvPicPr>
-              <p:nvPr/>
-            </p:nvPicPr>
-            <p:blipFill rotWithShape="1">
-              <a:blip r:embed="rId2">
-                <a:alphaModFix/>
-              </a:blip>
-              <a:srcRect l="3250" t="13128" r="4513"/>
-              <a:stretch>
-                <a:fillRect/>
-              </a:stretch>
-            </p:blipFill>
-            <p:spPr>
-              <a:xfrm>
-                <a:off x="1461406" y="852684"/>
-                <a:ext cx="10544175" cy="7564017"/>
-              </a:xfrm>
-              <a:prstGeom prst="rect">
-                <a:avLst/>
-              </a:prstGeom>
-            </p:spPr>
-          </p:pic>
-          <p:pic>
-            <p:nvPicPr>
-              <p:cNvPr id="44" name="図 43">
-                <a:extLst>
-                  <a:ext uri="{FF2B5EF4-FFF2-40B4-BE49-F238E27FC236}">
-                    <a16:creationId xmlns:a16="http://schemas.microsoft.com/office/drawing/2014/main" id="{B46A3AEA-0088-3F49-C5A2-2D610BACF850}"/>
-                  </a:ext>
-                </a:extLst>
-              </p:cNvPr>
-              <p:cNvPicPr>
-                <a:picLocks noChangeAspect="1"/>
-              </p:cNvPicPr>
-              <p:nvPr/>
-            </p:nvPicPr>
-            <p:blipFill rotWithShape="1">
-              <a:blip r:embed="rId3">
-                <a:alphaModFix/>
-              </a:blip>
-              <a:srcRect l="5255" t="15043" r="6156"/>
-              <a:stretch>
-                <a:fillRect/>
-              </a:stretch>
-            </p:blipFill>
-            <p:spPr>
-              <a:xfrm>
-                <a:off x="1556656" y="6706749"/>
-                <a:ext cx="10439400" cy="7299923"/>
-              </a:xfrm>
-              <a:prstGeom prst="rect">
-                <a:avLst/>
-              </a:prstGeom>
-            </p:spPr>
-          </p:pic>
-          <p:pic>
-            <p:nvPicPr>
-              <p:cNvPr id="45" name="図 44">
-                <a:extLst>
-                  <a:ext uri="{FF2B5EF4-FFF2-40B4-BE49-F238E27FC236}">
-                    <a16:creationId xmlns:a16="http://schemas.microsoft.com/office/drawing/2014/main" id="{E415B419-0472-861A-0E05-E2E5FA0C8931}"/>
-                  </a:ext>
-                </a:extLst>
-              </p:cNvPr>
-              <p:cNvPicPr>
-                <a:picLocks noChangeAspect="1"/>
-              </p:cNvPicPr>
-              <p:nvPr/>
-            </p:nvPicPr>
-            <p:blipFill rotWithShape="1">
-              <a:blip r:embed="rId4">
-                <a:alphaModFix/>
-              </a:blip>
-              <a:srcRect l="6479" t="14685" r="1118" b="4147"/>
-              <a:stretch>
-                <a:fillRect/>
-              </a:stretch>
-            </p:blipFill>
-            <p:spPr>
-              <a:xfrm>
-                <a:off x="1499506" y="10980141"/>
-                <a:ext cx="10563225" cy="4817268"/>
-              </a:xfrm>
-              <a:prstGeom prst="rect">
-                <a:avLst/>
-              </a:prstGeom>
-            </p:spPr>
-          </p:pic>
-        </p:grpSp>
-        <p:grpSp>
-          <p:nvGrpSpPr>
-            <p:cNvPr id="30" name="グループ化 29">
-              <a:extLst>
-                <a:ext uri="{FF2B5EF4-FFF2-40B4-BE49-F238E27FC236}">
-                  <a16:creationId xmlns:a16="http://schemas.microsoft.com/office/drawing/2014/main" id="{D6271005-8921-50A2-0D01-7789575A2374}"/>
-                </a:ext>
-              </a:extLst>
-            </p:cNvPr>
-            <p:cNvGrpSpPr/>
-            <p:nvPr/>
-          </p:nvGrpSpPr>
-          <p:grpSpPr>
-            <a:xfrm>
-              <a:off x="1490601" y="1205473"/>
-              <a:ext cx="8519813" cy="11694801"/>
-              <a:chOff x="1490601" y="1205472"/>
-              <a:chExt cx="8725065" cy="10223473"/>
-            </a:xfrm>
-          </p:grpSpPr>
-          <p:sp>
-            <p:nvSpPr>
-              <p:cNvPr id="33" name="正方形/長方形 32">
-                <a:extLst>
-                  <a:ext uri="{FF2B5EF4-FFF2-40B4-BE49-F238E27FC236}">
-                    <a16:creationId xmlns:a16="http://schemas.microsoft.com/office/drawing/2014/main" id="{3B945DF4-4807-DD83-FE6D-A22E020EA53E}"/>
-                  </a:ext>
-                </a:extLst>
-              </p:cNvPr>
-              <p:cNvSpPr/>
-              <p:nvPr/>
-            </p:nvSpPr>
-            <p:spPr>
-              <a:xfrm>
-                <a:off x="1490601" y="1243188"/>
-                <a:ext cx="2578686" cy="357256"/>
-              </a:xfrm>
-              <a:prstGeom prst="rect">
-                <a:avLst/>
-              </a:prstGeom>
-              <a:noFill/>
-              <a:ln w="28575">
-                <a:solidFill>
-                  <a:srgbClr val="FF0000"/>
-                </a:solidFill>
-                <a:prstDash val="solid"/>
-              </a:ln>
-            </p:spPr>
-            <p:style>
-              <a:lnRef idx="2">
-                <a:schemeClr val="accent6"/>
-              </a:lnRef>
-              <a:fillRef idx="1">
-                <a:schemeClr val="lt1"/>
-              </a:fillRef>
-              <a:effectRef idx="0">
-                <a:schemeClr val="accent6"/>
-              </a:effectRef>
-              <a:fontRef idx="minor">
-                <a:schemeClr val="dk1"/>
-              </a:fontRef>
-            </p:style>
-            <p:txBody>
-              <a:bodyPr rtlCol="0" anchor="t"/>
-              <a:lstStyle>
-                <a:lvl1pPr marL="0" indent="0">
-                  <a:defRPr sz="1100">
-                    <a:solidFill>
-                      <a:schemeClr val="dk1"/>
-                    </a:solidFill>
-                    <a:latin typeface="+mn-lt"/>
-                    <a:ea typeface="+mn-ea"/>
-                    <a:cs typeface="+mn-cs"/>
-                  </a:defRPr>
-                </a:lvl1pPr>
-                <a:lvl2pPr marL="457200" indent="0">
-                  <a:defRPr sz="1100">
-                    <a:solidFill>
-                      <a:schemeClr val="dk1"/>
-                    </a:solidFill>
-                    <a:latin typeface="+mn-lt"/>
-                    <a:ea typeface="+mn-ea"/>
-                    <a:cs typeface="+mn-cs"/>
-                  </a:defRPr>
-                </a:lvl2pPr>
-                <a:lvl3pPr marL="914400" indent="0">
-                  <a:defRPr sz="1100">
-                    <a:solidFill>
-                      <a:schemeClr val="dk1"/>
-                    </a:solidFill>
-                    <a:latin typeface="+mn-lt"/>
-                    <a:ea typeface="+mn-ea"/>
-                    <a:cs typeface="+mn-cs"/>
-                  </a:defRPr>
-                </a:lvl3pPr>
-                <a:lvl4pPr marL="1371600" indent="0">
-                  <a:defRPr sz="1100">
-                    <a:solidFill>
-                      <a:schemeClr val="dk1"/>
-                    </a:solidFill>
-                    <a:latin typeface="+mn-lt"/>
-                    <a:ea typeface="+mn-ea"/>
-                    <a:cs typeface="+mn-cs"/>
-                  </a:defRPr>
-                </a:lvl4pPr>
-                <a:lvl5pPr marL="1828800" indent="0">
-                  <a:defRPr sz="1100">
-                    <a:solidFill>
-                      <a:schemeClr val="dk1"/>
-                    </a:solidFill>
-                    <a:latin typeface="+mn-lt"/>
-                    <a:ea typeface="+mn-ea"/>
-                    <a:cs typeface="+mn-cs"/>
-                  </a:defRPr>
-                </a:lvl5pPr>
-                <a:lvl6pPr marL="2286000" indent="0">
-                  <a:defRPr sz="1100">
-                    <a:solidFill>
-                      <a:schemeClr val="dk1"/>
-                    </a:solidFill>
-                    <a:latin typeface="+mn-lt"/>
-                    <a:ea typeface="+mn-ea"/>
-                    <a:cs typeface="+mn-cs"/>
-                  </a:defRPr>
-                </a:lvl6pPr>
-                <a:lvl7pPr marL="2743200" indent="0">
-                  <a:defRPr sz="1100">
-                    <a:solidFill>
-                      <a:schemeClr val="dk1"/>
-                    </a:solidFill>
-                    <a:latin typeface="+mn-lt"/>
-                    <a:ea typeface="+mn-ea"/>
-                    <a:cs typeface="+mn-cs"/>
-                  </a:defRPr>
-                </a:lvl7pPr>
-                <a:lvl8pPr marL="3200400" indent="0">
-                  <a:defRPr sz="1100">
-                    <a:solidFill>
-                      <a:schemeClr val="dk1"/>
-                    </a:solidFill>
-                    <a:latin typeface="+mn-lt"/>
-                    <a:ea typeface="+mn-ea"/>
-                    <a:cs typeface="+mn-cs"/>
-                  </a:defRPr>
-                </a:lvl8pPr>
-                <a:lvl9pPr marL="3657600" indent="0">
-                  <a:defRPr sz="1100">
-                    <a:solidFill>
-                      <a:schemeClr val="dk1"/>
-                    </a:solidFill>
-                    <a:latin typeface="+mn-lt"/>
-                    <a:ea typeface="+mn-ea"/>
-                    <a:cs typeface="+mn-cs"/>
-                  </a:defRPr>
-                </a:lvl9pPr>
-              </a:lstStyle>
-              <a:p>
-                <a:pPr algn="l"/>
-                <a:endParaRPr kumimoji="1" lang="ja-JP" altLang="en-US" sz="1100"/>
-              </a:p>
-            </p:txBody>
-          </p:sp>
-          <p:sp>
-            <p:nvSpPr>
-              <p:cNvPr id="34" name="正方形/長方形 33">
-                <a:extLst>
-                  <a:ext uri="{FF2B5EF4-FFF2-40B4-BE49-F238E27FC236}">
-                    <a16:creationId xmlns:a16="http://schemas.microsoft.com/office/drawing/2014/main" id="{8DAE86F7-ED40-C142-4AD4-A28F50B75186}"/>
-                  </a:ext>
-                </a:extLst>
-              </p:cNvPr>
-              <p:cNvSpPr/>
-              <p:nvPr/>
-            </p:nvSpPr>
-            <p:spPr>
-              <a:xfrm>
-                <a:off x="1706733" y="2219182"/>
-                <a:ext cx="8508933" cy="1805236"/>
-              </a:xfrm>
-              <a:prstGeom prst="rect">
-                <a:avLst/>
-              </a:prstGeom>
-              <a:noFill/>
-              <a:ln w="28575">
-                <a:solidFill>
-                  <a:srgbClr val="FF0000"/>
-                </a:solidFill>
-                <a:prstDash val="solid"/>
-              </a:ln>
-            </p:spPr>
-            <p:style>
-              <a:lnRef idx="2">
-                <a:schemeClr val="accent6"/>
-              </a:lnRef>
-              <a:fillRef idx="1">
-                <a:schemeClr val="lt1"/>
-              </a:fillRef>
-              <a:effectRef idx="0">
-                <a:schemeClr val="accent6"/>
-              </a:effectRef>
-              <a:fontRef idx="minor">
-                <a:schemeClr val="dk1"/>
-              </a:fontRef>
-            </p:style>
-            <p:txBody>
-              <a:bodyPr rtlCol="0" anchor="t"/>
-              <a:lstStyle>
-                <a:lvl1pPr marL="0" indent="0">
-                  <a:defRPr sz="1100">
-                    <a:solidFill>
-                      <a:schemeClr val="dk1"/>
-                    </a:solidFill>
-                    <a:latin typeface="+mn-lt"/>
-                    <a:ea typeface="+mn-ea"/>
-                    <a:cs typeface="+mn-cs"/>
-                  </a:defRPr>
-                </a:lvl1pPr>
-                <a:lvl2pPr marL="457200" indent="0">
-                  <a:defRPr sz="1100">
-                    <a:solidFill>
-                      <a:schemeClr val="dk1"/>
-                    </a:solidFill>
-                    <a:latin typeface="+mn-lt"/>
-                    <a:ea typeface="+mn-ea"/>
-                    <a:cs typeface="+mn-cs"/>
-                  </a:defRPr>
-                </a:lvl2pPr>
-                <a:lvl3pPr marL="914400" indent="0">
-                  <a:defRPr sz="1100">
-                    <a:solidFill>
-                      <a:schemeClr val="dk1"/>
-                    </a:solidFill>
-                    <a:latin typeface="+mn-lt"/>
-                    <a:ea typeface="+mn-ea"/>
-                    <a:cs typeface="+mn-cs"/>
-                  </a:defRPr>
-                </a:lvl3pPr>
-                <a:lvl4pPr marL="1371600" indent="0">
-                  <a:defRPr sz="1100">
-                    <a:solidFill>
-                      <a:schemeClr val="dk1"/>
-                    </a:solidFill>
-                    <a:latin typeface="+mn-lt"/>
-                    <a:ea typeface="+mn-ea"/>
-                    <a:cs typeface="+mn-cs"/>
-                  </a:defRPr>
-                </a:lvl4pPr>
-                <a:lvl5pPr marL="1828800" indent="0">
-                  <a:defRPr sz="1100">
-                    <a:solidFill>
-                      <a:schemeClr val="dk1"/>
-                    </a:solidFill>
-                    <a:latin typeface="+mn-lt"/>
-                    <a:ea typeface="+mn-ea"/>
-                    <a:cs typeface="+mn-cs"/>
-                  </a:defRPr>
-                </a:lvl5pPr>
-                <a:lvl6pPr marL="2286000" indent="0">
-                  <a:defRPr sz="1100">
-                    <a:solidFill>
-                      <a:schemeClr val="dk1"/>
-                    </a:solidFill>
-                    <a:latin typeface="+mn-lt"/>
-                    <a:ea typeface="+mn-ea"/>
-                    <a:cs typeface="+mn-cs"/>
-                  </a:defRPr>
-                </a:lvl6pPr>
-                <a:lvl7pPr marL="2743200" indent="0">
-                  <a:defRPr sz="1100">
-                    <a:solidFill>
-                      <a:schemeClr val="dk1"/>
-                    </a:solidFill>
-                    <a:latin typeface="+mn-lt"/>
-                    <a:ea typeface="+mn-ea"/>
-                    <a:cs typeface="+mn-cs"/>
-                  </a:defRPr>
-                </a:lvl7pPr>
-                <a:lvl8pPr marL="3200400" indent="0">
-                  <a:defRPr sz="1100">
-                    <a:solidFill>
-                      <a:schemeClr val="dk1"/>
-                    </a:solidFill>
-                    <a:latin typeface="+mn-lt"/>
-                    <a:ea typeface="+mn-ea"/>
-                    <a:cs typeface="+mn-cs"/>
-                  </a:defRPr>
-                </a:lvl8pPr>
-                <a:lvl9pPr marL="3657600" indent="0">
-                  <a:defRPr sz="1100">
-                    <a:solidFill>
-                      <a:schemeClr val="dk1"/>
-                    </a:solidFill>
-                    <a:latin typeface="+mn-lt"/>
-                    <a:ea typeface="+mn-ea"/>
-                    <a:cs typeface="+mn-cs"/>
-                  </a:defRPr>
-                </a:lvl9pPr>
-              </a:lstStyle>
-              <a:p>
-                <a:pPr algn="l"/>
-                <a:endParaRPr kumimoji="1" lang="ja-JP" altLang="en-US" sz="1100"/>
-              </a:p>
-            </p:txBody>
-          </p:sp>
-          <p:cxnSp>
-            <p:nvCxnSpPr>
-              <p:cNvPr id="36" name="直線矢印コネクタ 35">
-                <a:extLst>
-                  <a:ext uri="{FF2B5EF4-FFF2-40B4-BE49-F238E27FC236}">
-                    <a16:creationId xmlns:a16="http://schemas.microsoft.com/office/drawing/2014/main" id="{85E61E1C-106C-37E9-C0A1-BBA69266BEAA}"/>
-                  </a:ext>
-                </a:extLst>
-              </p:cNvPr>
-              <p:cNvCxnSpPr>
-                <a:stCxn id="37" idx="1"/>
-                <a:endCxn id="33" idx="3"/>
-              </p:cNvCxnSpPr>
-              <p:nvPr/>
-            </p:nvCxnSpPr>
-            <p:spPr>
-              <a:xfrm flipH="1">
-                <a:off x="4069287" y="1419525"/>
-                <a:ext cx="624821" cy="2291"/>
-              </a:xfrm>
-              <a:prstGeom prst="straightConnector1">
-                <a:avLst/>
-              </a:prstGeom>
-              <a:ln w="28575">
-                <a:solidFill>
-                  <a:srgbClr val="FF0000"/>
-                </a:solidFill>
-                <a:tailEnd type="triangle"/>
-              </a:ln>
-            </p:spPr>
-            <p:style>
-              <a:lnRef idx="2">
-                <a:schemeClr val="accent1"/>
-              </a:lnRef>
-              <a:fillRef idx="0">
-                <a:schemeClr val="accent1"/>
-              </a:fillRef>
-              <a:effectRef idx="1">
-                <a:schemeClr val="accent1"/>
-              </a:effectRef>
-              <a:fontRef idx="minor">
-                <a:schemeClr val="tx1"/>
-              </a:fontRef>
-            </p:style>
-          </p:cxnSp>
-          <p:sp>
-            <p:nvSpPr>
-              <p:cNvPr id="37" name="正方形/長方形 36">
-                <a:extLst>
-                  <a:ext uri="{FF2B5EF4-FFF2-40B4-BE49-F238E27FC236}">
-                    <a16:creationId xmlns:a16="http://schemas.microsoft.com/office/drawing/2014/main" id="{B8AB9CC2-1187-A04F-8E08-52F86CC8C888}"/>
-                  </a:ext>
-                </a:extLst>
-              </p:cNvPr>
-              <p:cNvSpPr/>
-              <p:nvPr/>
-            </p:nvSpPr>
-            <p:spPr>
-              <a:xfrm>
-                <a:off x="4694108" y="1205472"/>
-                <a:ext cx="1508759" cy="428106"/>
-              </a:xfrm>
-              <a:prstGeom prst="rect">
-                <a:avLst/>
-              </a:prstGeom>
-              <a:ln w="28575">
-                <a:solidFill>
-                  <a:srgbClr val="FF0000"/>
-                </a:solidFill>
-              </a:ln>
-            </p:spPr>
-            <p:style>
-              <a:lnRef idx="2">
-                <a:schemeClr val="accent6"/>
-              </a:lnRef>
-              <a:fillRef idx="1">
-                <a:schemeClr val="lt1"/>
-              </a:fillRef>
-              <a:effectRef idx="0">
-                <a:schemeClr val="accent6"/>
-              </a:effectRef>
-              <a:fontRef idx="minor">
-                <a:schemeClr val="dk1"/>
-              </a:fontRef>
-            </p:style>
-            <p:txBody>
-              <a:bodyPr rtlCol="0" anchor="ctr"/>
-              <a:lstStyle>
-                <a:lvl1pPr marL="0" indent="0">
-                  <a:defRPr sz="1100">
-                    <a:solidFill>
-                      <a:schemeClr val="dk1"/>
-                    </a:solidFill>
-                    <a:latin typeface="+mn-lt"/>
-                    <a:ea typeface="+mn-ea"/>
-                    <a:cs typeface="+mn-cs"/>
-                  </a:defRPr>
-                </a:lvl1pPr>
-                <a:lvl2pPr marL="457200" indent="0">
-                  <a:defRPr sz="1100">
-                    <a:solidFill>
-                      <a:schemeClr val="dk1"/>
-                    </a:solidFill>
-                    <a:latin typeface="+mn-lt"/>
-                    <a:ea typeface="+mn-ea"/>
-                    <a:cs typeface="+mn-cs"/>
-                  </a:defRPr>
-                </a:lvl2pPr>
-                <a:lvl3pPr marL="914400" indent="0">
-                  <a:defRPr sz="1100">
-                    <a:solidFill>
-                      <a:schemeClr val="dk1"/>
-                    </a:solidFill>
-                    <a:latin typeface="+mn-lt"/>
-                    <a:ea typeface="+mn-ea"/>
-                    <a:cs typeface="+mn-cs"/>
-                  </a:defRPr>
-                </a:lvl3pPr>
-                <a:lvl4pPr marL="1371600" indent="0">
-                  <a:defRPr sz="1100">
-                    <a:solidFill>
-                      <a:schemeClr val="dk1"/>
-                    </a:solidFill>
-                    <a:latin typeface="+mn-lt"/>
-                    <a:ea typeface="+mn-ea"/>
-                    <a:cs typeface="+mn-cs"/>
-                  </a:defRPr>
-                </a:lvl4pPr>
-                <a:lvl5pPr marL="1828800" indent="0">
-                  <a:defRPr sz="1100">
-                    <a:solidFill>
-                      <a:schemeClr val="dk1"/>
-                    </a:solidFill>
-                    <a:latin typeface="+mn-lt"/>
-                    <a:ea typeface="+mn-ea"/>
-                    <a:cs typeface="+mn-cs"/>
-                  </a:defRPr>
-                </a:lvl5pPr>
-                <a:lvl6pPr marL="2286000" indent="0">
-                  <a:defRPr sz="1100">
-                    <a:solidFill>
-                      <a:schemeClr val="dk1"/>
-                    </a:solidFill>
-                    <a:latin typeface="+mn-lt"/>
-                    <a:ea typeface="+mn-ea"/>
-                    <a:cs typeface="+mn-cs"/>
-                  </a:defRPr>
-                </a:lvl6pPr>
-                <a:lvl7pPr marL="2743200" indent="0">
-                  <a:defRPr sz="1100">
-                    <a:solidFill>
-                      <a:schemeClr val="dk1"/>
-                    </a:solidFill>
-                    <a:latin typeface="+mn-lt"/>
-                    <a:ea typeface="+mn-ea"/>
-                    <a:cs typeface="+mn-cs"/>
-                  </a:defRPr>
-                </a:lvl7pPr>
-                <a:lvl8pPr marL="3200400" indent="0">
-                  <a:defRPr sz="1100">
-                    <a:solidFill>
-                      <a:schemeClr val="dk1"/>
-                    </a:solidFill>
-                    <a:latin typeface="+mn-lt"/>
-                    <a:ea typeface="+mn-ea"/>
-                    <a:cs typeface="+mn-cs"/>
-                  </a:defRPr>
-                </a:lvl8pPr>
-                <a:lvl9pPr marL="3657600" indent="0">
-                  <a:defRPr sz="1100">
-                    <a:solidFill>
-                      <a:schemeClr val="dk1"/>
-                    </a:solidFill>
-                    <a:latin typeface="+mn-lt"/>
-                    <a:ea typeface="+mn-ea"/>
-                    <a:cs typeface="+mn-cs"/>
-                  </a:defRPr>
-                </a:lvl9pPr>
-              </a:lstStyle>
-              <a:p>
-                <a:pPr algn="l"/>
-                <a:r>
-                  <a:rPr kumimoji="1" lang="ja-JP" altLang="en-US" sz="1200" b="1">
-                    <a:solidFill>
-                      <a:srgbClr val="FF0000"/>
-                    </a:solidFill>
-                  </a:rPr>
-                  <a:t>①タブの切り替え</a:t>
-                </a:r>
-              </a:p>
-            </p:txBody>
-          </p:sp>
-          <p:sp>
-            <p:nvSpPr>
-              <p:cNvPr id="38" name="正方形/長方形 37">
-                <a:extLst>
-                  <a:ext uri="{FF2B5EF4-FFF2-40B4-BE49-F238E27FC236}">
-                    <a16:creationId xmlns:a16="http://schemas.microsoft.com/office/drawing/2014/main" id="{A124CAFD-D2FD-5BB6-3A36-0F7C7E54BC8B}"/>
-                  </a:ext>
-                </a:extLst>
-              </p:cNvPr>
-              <p:cNvSpPr/>
-              <p:nvPr/>
-            </p:nvSpPr>
-            <p:spPr>
-              <a:xfrm>
-                <a:off x="7331741" y="1579168"/>
-                <a:ext cx="1127378" cy="420485"/>
-              </a:xfrm>
-              <a:prstGeom prst="rect">
-                <a:avLst/>
-              </a:prstGeom>
-              <a:ln w="28575">
-                <a:solidFill>
-                  <a:srgbClr val="FF0000"/>
-                </a:solidFill>
-              </a:ln>
-            </p:spPr>
-            <p:style>
-              <a:lnRef idx="2">
-                <a:schemeClr val="accent6"/>
-              </a:lnRef>
-              <a:fillRef idx="1">
-                <a:schemeClr val="lt1"/>
-              </a:fillRef>
-              <a:effectRef idx="0">
-                <a:schemeClr val="accent6"/>
-              </a:effectRef>
-              <a:fontRef idx="minor">
-                <a:schemeClr val="dk1"/>
-              </a:fontRef>
-            </p:style>
-            <p:txBody>
-              <a:bodyPr rtlCol="0" anchor="ctr"/>
-              <a:lstStyle>
-                <a:lvl1pPr marL="0" indent="0">
-                  <a:defRPr sz="1100">
-                    <a:solidFill>
-                      <a:schemeClr val="dk1"/>
-                    </a:solidFill>
-                    <a:latin typeface="+mn-lt"/>
-                    <a:ea typeface="+mn-ea"/>
-                    <a:cs typeface="+mn-cs"/>
-                  </a:defRPr>
-                </a:lvl1pPr>
-                <a:lvl2pPr marL="457200" indent="0">
-                  <a:defRPr sz="1100">
-                    <a:solidFill>
-                      <a:schemeClr val="dk1"/>
-                    </a:solidFill>
-                    <a:latin typeface="+mn-lt"/>
-                    <a:ea typeface="+mn-ea"/>
-                    <a:cs typeface="+mn-cs"/>
-                  </a:defRPr>
-                </a:lvl2pPr>
-                <a:lvl3pPr marL="914400" indent="0">
-                  <a:defRPr sz="1100">
-                    <a:solidFill>
-                      <a:schemeClr val="dk1"/>
-                    </a:solidFill>
-                    <a:latin typeface="+mn-lt"/>
-                    <a:ea typeface="+mn-ea"/>
-                    <a:cs typeface="+mn-cs"/>
-                  </a:defRPr>
-                </a:lvl3pPr>
-                <a:lvl4pPr marL="1371600" indent="0">
-                  <a:defRPr sz="1100">
-                    <a:solidFill>
-                      <a:schemeClr val="dk1"/>
-                    </a:solidFill>
-                    <a:latin typeface="+mn-lt"/>
-                    <a:ea typeface="+mn-ea"/>
-                    <a:cs typeface="+mn-cs"/>
-                  </a:defRPr>
-                </a:lvl4pPr>
-                <a:lvl5pPr marL="1828800" indent="0">
-                  <a:defRPr sz="1100">
-                    <a:solidFill>
-                      <a:schemeClr val="dk1"/>
-                    </a:solidFill>
-                    <a:latin typeface="+mn-lt"/>
-                    <a:ea typeface="+mn-ea"/>
-                    <a:cs typeface="+mn-cs"/>
-                  </a:defRPr>
-                </a:lvl5pPr>
-                <a:lvl6pPr marL="2286000" indent="0">
-                  <a:defRPr sz="1100">
-                    <a:solidFill>
-                      <a:schemeClr val="dk1"/>
-                    </a:solidFill>
-                    <a:latin typeface="+mn-lt"/>
-                    <a:ea typeface="+mn-ea"/>
-                    <a:cs typeface="+mn-cs"/>
-                  </a:defRPr>
-                </a:lvl6pPr>
-                <a:lvl7pPr marL="2743200" indent="0">
-                  <a:defRPr sz="1100">
-                    <a:solidFill>
-                      <a:schemeClr val="dk1"/>
-                    </a:solidFill>
-                    <a:latin typeface="+mn-lt"/>
-                    <a:ea typeface="+mn-ea"/>
-                    <a:cs typeface="+mn-cs"/>
-                  </a:defRPr>
-                </a:lvl7pPr>
-                <a:lvl8pPr marL="3200400" indent="0">
-                  <a:defRPr sz="1100">
-                    <a:solidFill>
-                      <a:schemeClr val="dk1"/>
-                    </a:solidFill>
-                    <a:latin typeface="+mn-lt"/>
-                    <a:ea typeface="+mn-ea"/>
-                    <a:cs typeface="+mn-cs"/>
-                  </a:defRPr>
-                </a:lvl8pPr>
-                <a:lvl9pPr marL="3657600" indent="0">
-                  <a:defRPr sz="1100">
-                    <a:solidFill>
-                      <a:schemeClr val="dk1"/>
-                    </a:solidFill>
-                    <a:latin typeface="+mn-lt"/>
-                    <a:ea typeface="+mn-ea"/>
-                    <a:cs typeface="+mn-cs"/>
-                  </a:defRPr>
-                </a:lvl9pPr>
-              </a:lstStyle>
-              <a:p>
-                <a:pPr algn="l"/>
-                <a:r>
-                  <a:rPr kumimoji="1" lang="ja-JP" altLang="en-US" sz="1200" b="1">
-                    <a:solidFill>
-                      <a:srgbClr val="FF0000"/>
-                    </a:solidFill>
-                  </a:rPr>
-                  <a:t>②特技の例</a:t>
-                </a:r>
-              </a:p>
-            </p:txBody>
-          </p:sp>
-          <p:sp>
-            <p:nvSpPr>
-              <p:cNvPr id="41" name="正方形/長方形 40">
-                <a:extLst>
-                  <a:ext uri="{FF2B5EF4-FFF2-40B4-BE49-F238E27FC236}">
-                    <a16:creationId xmlns:a16="http://schemas.microsoft.com/office/drawing/2014/main" id="{4921E6F5-3086-5ACA-48AE-1EE7A949899F}"/>
-                  </a:ext>
-                </a:extLst>
-              </p:cNvPr>
-              <p:cNvSpPr/>
-              <p:nvPr/>
-            </p:nvSpPr>
-            <p:spPr>
-              <a:xfrm>
-                <a:off x="1660048" y="4115497"/>
-                <a:ext cx="8555618" cy="7313448"/>
-              </a:xfrm>
-              <a:prstGeom prst="rect">
-                <a:avLst/>
-              </a:prstGeom>
-              <a:noFill/>
-              <a:ln w="28575">
-                <a:solidFill>
-                  <a:srgbClr val="FF0000"/>
-                </a:solidFill>
-                <a:prstDash val="solid"/>
-              </a:ln>
-            </p:spPr>
-            <p:style>
-              <a:lnRef idx="2">
-                <a:schemeClr val="accent6"/>
-              </a:lnRef>
-              <a:fillRef idx="1">
-                <a:schemeClr val="lt1"/>
-              </a:fillRef>
-              <a:effectRef idx="0">
-                <a:schemeClr val="accent6"/>
-              </a:effectRef>
-              <a:fontRef idx="minor">
-                <a:schemeClr val="dk1"/>
-              </a:fontRef>
-            </p:style>
-            <p:txBody>
-              <a:bodyPr rtlCol="0" anchor="t"/>
-              <a:lstStyle>
-                <a:lvl1pPr marL="0" indent="0">
-                  <a:defRPr sz="1100">
-                    <a:solidFill>
-                      <a:schemeClr val="dk1"/>
-                    </a:solidFill>
-                    <a:latin typeface="+mn-lt"/>
-                    <a:ea typeface="+mn-ea"/>
-                    <a:cs typeface="+mn-cs"/>
-                  </a:defRPr>
-                </a:lvl1pPr>
-                <a:lvl2pPr marL="457200" indent="0">
-                  <a:defRPr sz="1100">
-                    <a:solidFill>
-                      <a:schemeClr val="dk1"/>
-                    </a:solidFill>
-                    <a:latin typeface="+mn-lt"/>
-                    <a:ea typeface="+mn-ea"/>
-                    <a:cs typeface="+mn-cs"/>
-                  </a:defRPr>
-                </a:lvl2pPr>
-                <a:lvl3pPr marL="914400" indent="0">
-                  <a:defRPr sz="1100">
-                    <a:solidFill>
-                      <a:schemeClr val="dk1"/>
-                    </a:solidFill>
-                    <a:latin typeface="+mn-lt"/>
-                    <a:ea typeface="+mn-ea"/>
-                    <a:cs typeface="+mn-cs"/>
-                  </a:defRPr>
-                </a:lvl3pPr>
-                <a:lvl4pPr marL="1371600" indent="0">
-                  <a:defRPr sz="1100">
-                    <a:solidFill>
-                      <a:schemeClr val="dk1"/>
-                    </a:solidFill>
-                    <a:latin typeface="+mn-lt"/>
-                    <a:ea typeface="+mn-ea"/>
-                    <a:cs typeface="+mn-cs"/>
-                  </a:defRPr>
-                </a:lvl4pPr>
-                <a:lvl5pPr marL="1828800" indent="0">
-                  <a:defRPr sz="1100">
-                    <a:solidFill>
-                      <a:schemeClr val="dk1"/>
-                    </a:solidFill>
-                    <a:latin typeface="+mn-lt"/>
-                    <a:ea typeface="+mn-ea"/>
-                    <a:cs typeface="+mn-cs"/>
-                  </a:defRPr>
-                </a:lvl5pPr>
-                <a:lvl6pPr marL="2286000" indent="0">
-                  <a:defRPr sz="1100">
-                    <a:solidFill>
-                      <a:schemeClr val="dk1"/>
-                    </a:solidFill>
-                    <a:latin typeface="+mn-lt"/>
-                    <a:ea typeface="+mn-ea"/>
-                    <a:cs typeface="+mn-cs"/>
-                  </a:defRPr>
-                </a:lvl6pPr>
-                <a:lvl7pPr marL="2743200" indent="0">
-                  <a:defRPr sz="1100">
-                    <a:solidFill>
-                      <a:schemeClr val="dk1"/>
-                    </a:solidFill>
-                    <a:latin typeface="+mn-lt"/>
-                    <a:ea typeface="+mn-ea"/>
-                    <a:cs typeface="+mn-cs"/>
-                  </a:defRPr>
-                </a:lvl7pPr>
-                <a:lvl8pPr marL="3200400" indent="0">
-                  <a:defRPr sz="1100">
-                    <a:solidFill>
-                      <a:schemeClr val="dk1"/>
-                    </a:solidFill>
-                    <a:latin typeface="+mn-lt"/>
-                    <a:ea typeface="+mn-ea"/>
-                    <a:cs typeface="+mn-cs"/>
-                  </a:defRPr>
-                </a:lvl8pPr>
-                <a:lvl9pPr marL="3657600" indent="0">
-                  <a:defRPr sz="1100">
-                    <a:solidFill>
-                      <a:schemeClr val="dk1"/>
-                    </a:solidFill>
-                    <a:latin typeface="+mn-lt"/>
-                    <a:ea typeface="+mn-ea"/>
-                    <a:cs typeface="+mn-cs"/>
-                  </a:defRPr>
-                </a:lvl9pPr>
-              </a:lstStyle>
-              <a:p>
-                <a:pPr algn="l"/>
-                <a:endParaRPr kumimoji="1" lang="ja-JP" altLang="en-US" sz="1100"/>
-              </a:p>
-            </p:txBody>
-          </p:sp>
-          <p:sp>
-            <p:nvSpPr>
-              <p:cNvPr id="9" name="正方形/長方形 8">
-                <a:extLst>
-                  <a:ext uri="{FF2B5EF4-FFF2-40B4-BE49-F238E27FC236}">
-                    <a16:creationId xmlns:a16="http://schemas.microsoft.com/office/drawing/2014/main" id="{01CE8B1A-7AC7-9D1E-10CE-ACA3234A23B3}"/>
-                  </a:ext>
-                </a:extLst>
-              </p:cNvPr>
-              <p:cNvSpPr/>
-              <p:nvPr/>
-            </p:nvSpPr>
-            <p:spPr>
-              <a:xfrm>
-                <a:off x="7577779" y="3433269"/>
-                <a:ext cx="1166633" cy="420485"/>
-              </a:xfrm>
-              <a:prstGeom prst="rect">
-                <a:avLst/>
-              </a:prstGeom>
-              <a:ln w="28575">
-                <a:solidFill>
-                  <a:srgbClr val="FF0000"/>
-                </a:solidFill>
-              </a:ln>
-            </p:spPr>
-            <p:style>
-              <a:lnRef idx="2">
-                <a:schemeClr val="accent6"/>
-              </a:lnRef>
-              <a:fillRef idx="1">
-                <a:schemeClr val="lt1"/>
-              </a:fillRef>
-              <a:effectRef idx="0">
-                <a:schemeClr val="accent6"/>
-              </a:effectRef>
-              <a:fontRef idx="minor">
-                <a:schemeClr val="dk1"/>
-              </a:fontRef>
-            </p:style>
-            <p:txBody>
-              <a:bodyPr rtlCol="0" anchor="ctr"/>
-              <a:lstStyle>
-                <a:lvl1pPr marL="0" indent="0">
-                  <a:defRPr sz="1100">
-                    <a:solidFill>
-                      <a:schemeClr val="dk1"/>
-                    </a:solidFill>
-                    <a:latin typeface="+mn-lt"/>
-                    <a:ea typeface="+mn-ea"/>
-                    <a:cs typeface="+mn-cs"/>
-                  </a:defRPr>
-                </a:lvl1pPr>
-                <a:lvl2pPr marL="457200" indent="0">
-                  <a:defRPr sz="1100">
-                    <a:solidFill>
-                      <a:schemeClr val="dk1"/>
-                    </a:solidFill>
-                    <a:latin typeface="+mn-lt"/>
-                    <a:ea typeface="+mn-ea"/>
-                    <a:cs typeface="+mn-cs"/>
-                  </a:defRPr>
-                </a:lvl2pPr>
-                <a:lvl3pPr marL="914400" indent="0">
-                  <a:defRPr sz="1100">
-                    <a:solidFill>
-                      <a:schemeClr val="dk1"/>
-                    </a:solidFill>
-                    <a:latin typeface="+mn-lt"/>
-                    <a:ea typeface="+mn-ea"/>
-                    <a:cs typeface="+mn-cs"/>
-                  </a:defRPr>
-                </a:lvl3pPr>
-                <a:lvl4pPr marL="1371600" indent="0">
-                  <a:defRPr sz="1100">
-                    <a:solidFill>
-                      <a:schemeClr val="dk1"/>
-                    </a:solidFill>
-                    <a:latin typeface="+mn-lt"/>
-                    <a:ea typeface="+mn-ea"/>
-                    <a:cs typeface="+mn-cs"/>
-                  </a:defRPr>
-                </a:lvl4pPr>
-                <a:lvl5pPr marL="1828800" indent="0">
-                  <a:defRPr sz="1100">
-                    <a:solidFill>
-                      <a:schemeClr val="dk1"/>
-                    </a:solidFill>
-                    <a:latin typeface="+mn-lt"/>
-                    <a:ea typeface="+mn-ea"/>
-                    <a:cs typeface="+mn-cs"/>
-                  </a:defRPr>
-                </a:lvl5pPr>
-                <a:lvl6pPr marL="2286000" indent="0">
-                  <a:defRPr sz="1100">
-                    <a:solidFill>
-                      <a:schemeClr val="dk1"/>
-                    </a:solidFill>
-                    <a:latin typeface="+mn-lt"/>
-                    <a:ea typeface="+mn-ea"/>
-                    <a:cs typeface="+mn-cs"/>
-                  </a:defRPr>
-                </a:lvl6pPr>
-                <a:lvl7pPr marL="2743200" indent="0">
-                  <a:defRPr sz="1100">
-                    <a:solidFill>
-                      <a:schemeClr val="dk1"/>
-                    </a:solidFill>
-                    <a:latin typeface="+mn-lt"/>
-                    <a:ea typeface="+mn-ea"/>
-                    <a:cs typeface="+mn-cs"/>
-                  </a:defRPr>
-                </a:lvl7pPr>
-                <a:lvl8pPr marL="3200400" indent="0">
-                  <a:defRPr sz="1100">
-                    <a:solidFill>
-                      <a:schemeClr val="dk1"/>
-                    </a:solidFill>
-                    <a:latin typeface="+mn-lt"/>
-                    <a:ea typeface="+mn-ea"/>
-                    <a:cs typeface="+mn-cs"/>
-                  </a:defRPr>
-                </a:lvl8pPr>
-                <a:lvl9pPr marL="3657600" indent="0">
-                  <a:defRPr sz="1100">
-                    <a:solidFill>
-                      <a:schemeClr val="dk1"/>
-                    </a:solidFill>
-                    <a:latin typeface="+mn-lt"/>
-                    <a:ea typeface="+mn-ea"/>
-                    <a:cs typeface="+mn-cs"/>
-                  </a:defRPr>
-                </a:lvl9pPr>
-              </a:lstStyle>
-              <a:p>
-                <a:pPr algn="l"/>
-                <a:r>
-                  <a:rPr kumimoji="1" lang="ja-JP" altLang="en-US" sz="1200" b="1" dirty="0">
-                    <a:solidFill>
-                      <a:srgbClr val="FF0000"/>
-                    </a:solidFill>
-                  </a:rPr>
-                  <a:t>③特技の入力</a:t>
-                </a:r>
-              </a:p>
-            </p:txBody>
-          </p:sp>
-        </p:grpSp>
-        <p:cxnSp>
-          <p:nvCxnSpPr>
-            <p:cNvPr id="31" name="直線矢印コネクタ 30">
-              <a:extLst>
-                <a:ext uri="{FF2B5EF4-FFF2-40B4-BE49-F238E27FC236}">
-                  <a16:creationId xmlns:a16="http://schemas.microsoft.com/office/drawing/2014/main" id="{3FC586A4-3CD7-A80B-E848-D2A716BB9339}"/>
-                </a:ext>
-              </a:extLst>
-            </p:cNvPr>
-            <p:cNvCxnSpPr/>
-            <p:nvPr/>
-          </p:nvCxnSpPr>
-          <p:spPr>
-            <a:xfrm>
-              <a:off x="7733432" y="2112706"/>
-              <a:ext cx="491" cy="237122"/>
-            </a:xfrm>
-            <a:prstGeom prst="straightConnector1">
-              <a:avLst/>
-            </a:prstGeom>
-            <a:ln w="28575">
-              <a:solidFill>
-                <a:srgbClr val="FF0000"/>
-              </a:solidFill>
-              <a:tailEnd type="triangle"/>
-            </a:ln>
-          </p:spPr>
-          <p:style>
-            <a:lnRef idx="2">
-              <a:schemeClr val="accent1"/>
-            </a:lnRef>
-            <a:fillRef idx="0">
-              <a:schemeClr val="accent1"/>
-            </a:fillRef>
-            <a:effectRef idx="1">
-              <a:schemeClr val="accent1"/>
-            </a:effectRef>
-            <a:fontRef idx="minor">
-              <a:schemeClr val="tx1"/>
-            </a:fontRef>
-          </p:style>
-        </p:cxnSp>
-        <p:cxnSp>
-          <p:nvCxnSpPr>
-            <p:cNvPr id="32" name="直線矢印コネクタ 31">
-              <a:extLst>
-                <a:ext uri="{FF2B5EF4-FFF2-40B4-BE49-F238E27FC236}">
-                  <a16:creationId xmlns:a16="http://schemas.microsoft.com/office/drawing/2014/main" id="{F48CF319-1286-8005-6CDE-1348AEF0F36D}"/>
-                </a:ext>
-              </a:extLst>
-            </p:cNvPr>
-            <p:cNvCxnSpPr>
-              <a:cxnSpLocks/>
-            </p:cNvCxnSpPr>
-            <p:nvPr/>
-          </p:nvCxnSpPr>
-          <p:spPr>
-            <a:xfrm>
-              <a:off x="7990518" y="4244300"/>
-              <a:ext cx="0" cy="296011"/>
-            </a:xfrm>
-            <a:prstGeom prst="straightConnector1">
-              <a:avLst/>
-            </a:prstGeom>
-            <a:ln w="28575">
-              <a:solidFill>
-                <a:srgbClr val="FF0000"/>
-              </a:solidFill>
-              <a:tailEnd type="triangle"/>
-            </a:ln>
-          </p:spPr>
-          <p:style>
-            <a:lnRef idx="2">
-              <a:schemeClr val="accent1"/>
-            </a:lnRef>
-            <a:fillRef idx="0">
-              <a:schemeClr val="accent1"/>
-            </a:fillRef>
-            <a:effectRef idx="1">
-              <a:schemeClr val="accent1"/>
-            </a:effectRef>
-            <a:fontRef idx="minor">
-              <a:schemeClr val="tx1"/>
-            </a:fontRef>
-          </p:style>
-        </p:cxnSp>
-      </p:grpSp>
-    </p:spTree>
-    <p:extLst>
-      <p:ext uri="{BB962C8B-B14F-4D97-AF65-F5344CB8AC3E}">
-        <p14:creationId xmlns:p14="http://schemas.microsoft.com/office/powerpoint/2010/main" val="1896282833"/>
       </p:ext>
     </p:extLst>
   </p:cSld>
